--- a/docs/decks/L10.pptx
+++ b/docs/decks/L10.pptx
@@ -11661,7 +11661,7 @@
             </a:avLst>
           </a:prstGeom>
           <a:solidFill>
-            <a:srgbClr val="ECEBFB"/>
+            <a:srgbClr val="F8F0E2"/>
           </a:solidFill>
           <a:ln/>
         </p:spPr>
@@ -11693,13 +11693,13 @@
             <a:r>
               <a:rPr lang="en-US" sz="900" b="1" spc="100" kern="0" dirty="0">
                 <a:solidFill>
-                  <a:srgbClr val="4038C4"/>
+                  <a:srgbClr val="9A5B12"/>
                 </a:solidFill>
                 <a:latin typeface="Courier New" pitchFamily="34" charset="0"/>
                 <a:ea typeface="Courier New" pitchFamily="34" charset="-122"/>
                 <a:cs typeface="Courier New" pitchFamily="34" charset="-120"/>
               </a:rPr>
-              <a:t>ТЕОРІЯ</a:t>
+              <a:t>РЕФЛЕКСІЯ</a:t>
             </a:r>
             <a:endParaRPr lang="en-US" sz="900" dirty="0"/>
           </a:p>
@@ -14134,7 +14134,7 @@
             </a:avLst>
           </a:prstGeom>
           <a:solidFill>
-            <a:srgbClr val="ECEBFB"/>
+            <a:srgbClr val="F8F0E2"/>
           </a:solidFill>
           <a:ln/>
         </p:spPr>
@@ -14166,13 +14166,13 @@
             <a:r>
               <a:rPr lang="en-US" sz="900" b="1" spc="100" kern="0" dirty="0">
                 <a:solidFill>
-                  <a:srgbClr val="4038C4"/>
+                  <a:srgbClr val="9A5B12"/>
                 </a:solidFill>
                 <a:latin typeface="Courier New" pitchFamily="34" charset="0"/>
                 <a:ea typeface="Courier New" pitchFamily="34" charset="-122"/>
                 <a:cs typeface="Courier New" pitchFamily="34" charset="-120"/>
               </a:rPr>
-              <a:t>ТЕОРІЯ</a:t>
+              <a:t>РЕФЛЕКСІЯ</a:t>
             </a:r>
             <a:endParaRPr lang="en-US" sz="900" dirty="0"/>
           </a:p>

--- a/docs/decks/L10.pptx
+++ b/docs/decks/L10.pptx
@@ -16292,9 +16292,14 @@
             </a:avLst>
           </a:prstGeom>
           <a:solidFill>
-            <a:srgbClr val="ECEBFB"/>
+            <a:srgbClr val="FFFFFF"/>
           </a:solidFill>
-          <a:ln/>
+          <a:ln w="12700">
+            <a:solidFill>
+              <a:srgbClr val="E4E6EC"/>
+            </a:solidFill>
+            <a:prstDash val="solid"/>
+          </a:ln>
         </p:spPr>
       </p:sp>
       <p:sp>
@@ -16312,7 +16317,7 @@
             <a:avLst/>
           </a:prstGeom>
           <a:solidFill>
-            <a:srgbClr val="4038C4"/>
+            <a:srgbClr val="1B1D23"/>
           </a:solidFill>
           <a:ln/>
         </p:spPr>
@@ -16344,7 +16349,7 @@
             <a:r>
               <a:rPr lang="en-US" sz="1200" b="1" dirty="0">
                 <a:solidFill>
-                  <a:srgbClr val="ECEBFB"/>
+                  <a:srgbClr val="FFFFFF"/>
                 </a:solidFill>
                 <a:latin typeface="Courier New" pitchFamily="34" charset="0"/>
                 <a:ea typeface="Courier New" pitchFamily="34" charset="-122"/>
@@ -16383,7 +16388,7 @@
             <a:r>
               <a:rPr lang="en-US" sz="1450" b="1" dirty="0">
                 <a:solidFill>
-                  <a:srgbClr val="4038C4"/>
+                  <a:srgbClr val="1B1D23"/>
                 </a:solidFill>
                 <a:latin typeface="Calibri" pitchFamily="34" charset="0"/>
                 <a:ea typeface="Calibri" pitchFamily="34" charset="-122"/>
@@ -16412,9 +16417,14 @@
             </a:avLst>
           </a:prstGeom>
           <a:solidFill>
-            <a:srgbClr val="ECEBFB"/>
+            <a:srgbClr val="FFFFFF"/>
           </a:solidFill>
-          <a:ln/>
+          <a:ln w="12700">
+            <a:solidFill>
+              <a:srgbClr val="E4E6EC"/>
+            </a:solidFill>
+            <a:prstDash val="solid"/>
+          </a:ln>
         </p:spPr>
       </p:sp>
       <p:sp>
@@ -16432,7 +16442,7 @@
             <a:avLst/>
           </a:prstGeom>
           <a:solidFill>
-            <a:srgbClr val="4038C4"/>
+            <a:srgbClr val="1B1D23"/>
           </a:solidFill>
           <a:ln/>
         </p:spPr>
@@ -16464,7 +16474,7 @@
             <a:r>
               <a:rPr lang="en-US" sz="1200" b="1" dirty="0">
                 <a:solidFill>
-                  <a:srgbClr val="ECEBFB"/>
+                  <a:srgbClr val="FFFFFF"/>
                 </a:solidFill>
                 <a:latin typeface="Courier New" pitchFamily="34" charset="0"/>
                 <a:ea typeface="Courier New" pitchFamily="34" charset="-122"/>
@@ -16503,7 +16513,7 @@
             <a:r>
               <a:rPr lang="en-US" sz="1450" b="1" dirty="0">
                 <a:solidFill>
-                  <a:srgbClr val="4038C4"/>
+                  <a:srgbClr val="1B1D23"/>
                 </a:solidFill>
                 <a:latin typeface="Calibri" pitchFamily="34" charset="0"/>
                 <a:ea typeface="Calibri" pitchFamily="34" charset="-122"/>
@@ -16532,9 +16542,14 @@
             </a:avLst>
           </a:prstGeom>
           <a:solidFill>
-            <a:srgbClr val="ECEBFB"/>
+            <a:srgbClr val="FFFFFF"/>
           </a:solidFill>
-          <a:ln/>
+          <a:ln w="12700">
+            <a:solidFill>
+              <a:srgbClr val="E4E6EC"/>
+            </a:solidFill>
+            <a:prstDash val="solid"/>
+          </a:ln>
         </p:spPr>
       </p:sp>
       <p:sp>
@@ -16552,7 +16567,7 @@
             <a:avLst/>
           </a:prstGeom>
           <a:solidFill>
-            <a:srgbClr val="4038C4"/>
+            <a:srgbClr val="1B1D23"/>
           </a:solidFill>
           <a:ln/>
         </p:spPr>
@@ -16584,7 +16599,7 @@
             <a:r>
               <a:rPr lang="en-US" sz="1200" b="1" dirty="0">
                 <a:solidFill>
-                  <a:srgbClr val="ECEBFB"/>
+                  <a:srgbClr val="FFFFFF"/>
                 </a:solidFill>
                 <a:latin typeface="Courier New" pitchFamily="34" charset="0"/>
                 <a:ea typeface="Courier New" pitchFamily="34" charset="-122"/>
@@ -16623,7 +16638,7 @@
             <a:r>
               <a:rPr lang="en-US" sz="1450" b="1" dirty="0">
                 <a:solidFill>
-                  <a:srgbClr val="4038C4"/>
+                  <a:srgbClr val="1B1D23"/>
                 </a:solidFill>
                 <a:latin typeface="Calibri" pitchFamily="34" charset="0"/>
                 <a:ea typeface="Calibri" pitchFamily="34" charset="-122"/>
@@ -16652,9 +16667,14 @@
             </a:avLst>
           </a:prstGeom>
           <a:solidFill>
-            <a:srgbClr val="ECEBFB"/>
+            <a:srgbClr val="FFFFFF"/>
           </a:solidFill>
-          <a:ln/>
+          <a:ln w="12700">
+            <a:solidFill>
+              <a:srgbClr val="E4E6EC"/>
+            </a:solidFill>
+            <a:prstDash val="solid"/>
+          </a:ln>
         </p:spPr>
       </p:sp>
       <p:sp>
@@ -16672,7 +16692,7 @@
             <a:avLst/>
           </a:prstGeom>
           <a:solidFill>
-            <a:srgbClr val="4038C4"/>
+            <a:srgbClr val="1B1D23"/>
           </a:solidFill>
           <a:ln/>
         </p:spPr>
@@ -16704,7 +16724,7 @@
             <a:r>
               <a:rPr lang="en-US" sz="1200" b="1" dirty="0">
                 <a:solidFill>
-                  <a:srgbClr val="ECEBFB"/>
+                  <a:srgbClr val="FFFFFF"/>
                 </a:solidFill>
                 <a:latin typeface="Courier New" pitchFamily="34" charset="0"/>
                 <a:ea typeface="Courier New" pitchFamily="34" charset="-122"/>
@@ -16743,7 +16763,7 @@
             <a:r>
               <a:rPr lang="en-US" sz="1450" b="1" dirty="0">
                 <a:solidFill>
-                  <a:srgbClr val="4038C4"/>
+                  <a:srgbClr val="1B1D23"/>
                 </a:solidFill>
                 <a:latin typeface="Calibri" pitchFamily="34" charset="0"/>
                 <a:ea typeface="Calibri" pitchFamily="34" charset="-122"/>
@@ -16772,9 +16792,14 @@
             </a:avLst>
           </a:prstGeom>
           <a:solidFill>
-            <a:srgbClr val="ECEBFB"/>
+            <a:srgbClr val="FFFFFF"/>
           </a:solidFill>
-          <a:ln/>
+          <a:ln w="12700">
+            <a:solidFill>
+              <a:srgbClr val="E4E6EC"/>
+            </a:solidFill>
+            <a:prstDash val="solid"/>
+          </a:ln>
         </p:spPr>
       </p:sp>
       <p:sp>
@@ -16792,7 +16817,7 @@
             <a:avLst/>
           </a:prstGeom>
           <a:solidFill>
-            <a:srgbClr val="4038C4"/>
+            <a:srgbClr val="1B1D23"/>
           </a:solidFill>
           <a:ln/>
         </p:spPr>
@@ -16824,7 +16849,7 @@
             <a:r>
               <a:rPr lang="en-US" sz="1200" b="1" dirty="0">
                 <a:solidFill>
-                  <a:srgbClr val="ECEBFB"/>
+                  <a:srgbClr val="FFFFFF"/>
                 </a:solidFill>
                 <a:latin typeface="Courier New" pitchFamily="34" charset="0"/>
                 <a:ea typeface="Courier New" pitchFamily="34" charset="-122"/>
@@ -16863,7 +16888,7 @@
             <a:r>
               <a:rPr lang="en-US" sz="1450" b="1" dirty="0">
                 <a:solidFill>
-                  <a:srgbClr val="4038C4"/>
+                  <a:srgbClr val="1B1D23"/>
                 </a:solidFill>
                 <a:latin typeface="Calibri" pitchFamily="34" charset="0"/>
                 <a:ea typeface="Calibri" pitchFamily="34" charset="-122"/>

--- a/docs/decks/L10.pptx
+++ b/docs/decks/L10.pptx
@@ -4988,9 +4988,14 @@
             </a:avLst>
           </a:prstGeom>
           <a:solidFill>
-            <a:srgbClr val="141018"/>
+            <a:srgbClr val="F5F4FA"/>
           </a:solidFill>
-          <a:ln/>
+          <a:ln w="12700">
+            <a:solidFill>
+              <a:srgbClr val="E6E7EC"/>
+            </a:solidFill>
+            <a:prstDash val="solid"/>
+          </a:ln>
         </p:spPr>
       </p:sp>
       <p:sp>
@@ -5023,7 +5028,7 @@
             <a:r>
               <a:rPr lang="en-US" sz="1150" dirty="0">
                 <a:solidFill>
-                  <a:srgbClr val="82AAFF"/>
+                  <a:srgbClr val="5A05F4"/>
                 </a:solidFill>
                 <a:latin typeface="Courier New" pitchFamily="34" charset="0"/>
                 <a:ea typeface="Courier New" pitchFamily="34" charset="-122"/>
@@ -5043,7 +5048,7 @@
             <a:r>
               <a:rPr lang="en-US" sz="1150" dirty="0">
                 <a:solidFill>
-                  <a:srgbClr val="ECE8F6"/>
+                  <a:srgbClr val="23262F"/>
                 </a:solidFill>
                 <a:latin typeface="Courier New" pitchFamily="34" charset="0"/>
                 <a:ea typeface="Courier New" pitchFamily="34" charset="-122"/>
@@ -5063,7 +5068,7 @@
             <a:r>
               <a:rPr lang="en-US" sz="1150" dirty="0">
                 <a:solidFill>
-                  <a:srgbClr val="82AAFF"/>
+                  <a:srgbClr val="5A05F4"/>
                 </a:solidFill>
                 <a:latin typeface="Courier New" pitchFamily="34" charset="0"/>
                 <a:ea typeface="Courier New" pitchFamily="34" charset="-122"/>
@@ -5083,7 +5088,7 @@
             <a:r>
               <a:rPr lang="en-US" sz="1150" dirty="0">
                 <a:solidFill>
-                  <a:srgbClr val="C3E88D"/>
+                  <a:srgbClr val="177245"/>
                 </a:solidFill>
                 <a:latin typeface="Courier New" pitchFamily="34" charset="0"/>
                 <a:ea typeface="Courier New" pitchFamily="34" charset="-122"/>
@@ -5103,7 +5108,7 @@
             <a:r>
               <a:rPr lang="en-US" sz="1150" dirty="0">
                 <a:solidFill>
-                  <a:srgbClr val="82AAFF"/>
+                  <a:srgbClr val="5A05F4"/>
                 </a:solidFill>
                 <a:latin typeface="Courier New" pitchFamily="34" charset="0"/>
                 <a:ea typeface="Courier New" pitchFamily="34" charset="-122"/>
@@ -5123,7 +5128,7 @@
             <a:r>
               <a:rPr lang="en-US" sz="1150" dirty="0">
                 <a:solidFill>
-                  <a:srgbClr val="F78C6C"/>
+                  <a:srgbClr val="B45309"/>
                 </a:solidFill>
                 <a:latin typeface="Courier New" pitchFamily="34" charset="0"/>
                 <a:ea typeface="Courier New" pitchFamily="34" charset="-122"/>
@@ -5143,7 +5148,7 @@
             <a:r>
               <a:rPr lang="en-US" sz="1150" dirty="0">
                 <a:solidFill>
-                  <a:srgbClr val="82AAFF"/>
+                  <a:srgbClr val="5A05F4"/>
                 </a:solidFill>
                 <a:latin typeface="Courier New" pitchFamily="34" charset="0"/>
                 <a:ea typeface="Courier New" pitchFamily="34" charset="-122"/>
@@ -5163,7 +5168,7 @@
             <a:r>
               <a:rPr lang="en-US" sz="1150" dirty="0">
                 <a:solidFill>
-                  <a:srgbClr val="F78C6C"/>
+                  <a:srgbClr val="B45309"/>
                 </a:solidFill>
                 <a:latin typeface="Courier New" pitchFamily="34" charset="0"/>
                 <a:ea typeface="Courier New" pitchFamily="34" charset="-122"/>
@@ -7690,9 +7695,14 @@
             </a:avLst>
           </a:prstGeom>
           <a:solidFill>
-            <a:srgbClr val="141018"/>
+            <a:srgbClr val="F5F4FA"/>
           </a:solidFill>
-          <a:ln/>
+          <a:ln w="12700">
+            <a:solidFill>
+              <a:srgbClr val="E6E7EC"/>
+            </a:solidFill>
+            <a:prstDash val="solid"/>
+          </a:ln>
         </p:spPr>
       </p:sp>
       <p:sp>
@@ -7725,7 +7735,7 @@
             <a:r>
               <a:rPr lang="en-US" sz="1100" dirty="0">
                 <a:solidFill>
-                  <a:srgbClr val="82AAFF"/>
+                  <a:srgbClr val="5A05F4"/>
                 </a:solidFill>
                 <a:latin typeface="Courier New" pitchFamily="34" charset="0"/>
                 <a:ea typeface="Courier New" pitchFamily="34" charset="-122"/>
@@ -7745,7 +7755,7 @@
             <a:r>
               <a:rPr lang="en-US" sz="1100" dirty="0">
                 <a:solidFill>
-                  <a:srgbClr val="C3E88D"/>
+                  <a:srgbClr val="177245"/>
                 </a:solidFill>
                 <a:latin typeface="Courier New" pitchFamily="34" charset="0"/>
                 <a:ea typeface="Courier New" pitchFamily="34" charset="-122"/>
@@ -7774,7 +7784,7 @@
             <a:r>
               <a:rPr lang="en-US" sz="1100" dirty="0">
                 <a:solidFill>
-                  <a:srgbClr val="82AAFF"/>
+                  <a:srgbClr val="5A05F4"/>
                 </a:solidFill>
                 <a:latin typeface="Courier New" pitchFamily="34" charset="0"/>
                 <a:ea typeface="Courier New" pitchFamily="34" charset="-122"/>
@@ -7794,7 +7804,7 @@
             <a:r>
               <a:rPr lang="en-US" sz="1100" dirty="0">
                 <a:solidFill>
-                  <a:srgbClr val="F78C6C"/>
+                  <a:srgbClr val="B45309"/>
                 </a:solidFill>
                 <a:latin typeface="Courier New" pitchFamily="34" charset="0"/>
                 <a:ea typeface="Courier New" pitchFamily="34" charset="-122"/>
@@ -7823,7 +7833,7 @@
             <a:r>
               <a:rPr lang="en-US" sz="1100" dirty="0">
                 <a:solidFill>
-                  <a:srgbClr val="82AAFF"/>
+                  <a:srgbClr val="5A05F4"/>
                 </a:solidFill>
                 <a:latin typeface="Courier New" pitchFamily="34" charset="0"/>
                 <a:ea typeface="Courier New" pitchFamily="34" charset="-122"/>
@@ -7843,7 +7853,7 @@
             <a:r>
               <a:rPr lang="en-US" sz="1100" dirty="0">
                 <a:solidFill>
-                  <a:srgbClr val="C3E88D"/>
+                  <a:srgbClr val="177245"/>
                 </a:solidFill>
                 <a:latin typeface="Courier New" pitchFamily="34" charset="0"/>
                 <a:ea typeface="Courier New" pitchFamily="34" charset="-122"/>
@@ -21198,9 +21208,14 @@
             </a:avLst>
           </a:prstGeom>
           <a:solidFill>
-            <a:srgbClr val="141018"/>
+            <a:srgbClr val="F5F4FA"/>
           </a:solidFill>
-          <a:ln/>
+          <a:ln w="12700">
+            <a:solidFill>
+              <a:srgbClr val="E6E7EC"/>
+            </a:solidFill>
+            <a:prstDash val="solid"/>
+          </a:ln>
         </p:spPr>
       </p:sp>
       <p:sp>
@@ -21233,7 +21248,7 @@
             <a:r>
               <a:rPr lang="en-US" sz="1000" dirty="0">
                 <a:solidFill>
-                  <a:srgbClr val="C3E88D"/>
+                  <a:srgbClr val="177245"/>
                 </a:solidFill>
                 <a:latin typeface="Courier New" pitchFamily="34" charset="0"/>
                 <a:ea typeface="Courier New" pitchFamily="34" charset="-122"/>
@@ -21253,7 +21268,7 @@
             <a:r>
               <a:rPr lang="en-US" sz="1000" dirty="0">
                 <a:solidFill>
-                  <a:srgbClr val="C3E88D"/>
+                  <a:srgbClr val="177245"/>
                 </a:solidFill>
                 <a:latin typeface="Courier New" pitchFamily="34" charset="0"/>
                 <a:ea typeface="Courier New" pitchFamily="34" charset="-122"/>
@@ -21273,7 +21288,7 @@
             <a:r>
               <a:rPr lang="en-US" sz="1000" dirty="0">
                 <a:solidFill>
-                  <a:srgbClr val="82AAFF"/>
+                  <a:srgbClr val="5A05F4"/>
                 </a:solidFill>
                 <a:latin typeface="Courier New" pitchFamily="34" charset="0"/>
                 <a:ea typeface="Courier New" pitchFamily="34" charset="-122"/>
@@ -21293,7 +21308,7 @@
             <a:r>
               <a:rPr lang="en-US" sz="1000" dirty="0">
                 <a:solidFill>
-                  <a:srgbClr val="82AAFF"/>
+                  <a:srgbClr val="5A05F4"/>
                 </a:solidFill>
                 <a:latin typeface="Courier New" pitchFamily="34" charset="0"/>
                 <a:ea typeface="Courier New" pitchFamily="34" charset="-122"/>
@@ -21313,7 +21328,7 @@
             <a:r>
               <a:rPr lang="en-US" sz="1000" dirty="0">
                 <a:solidFill>
-                  <a:srgbClr val="F78C6C"/>
+                  <a:srgbClr val="B45309"/>
                 </a:solidFill>
                 <a:latin typeface="Courier New" pitchFamily="34" charset="0"/>
                 <a:ea typeface="Courier New" pitchFamily="34" charset="-122"/>
@@ -21333,7 +21348,7 @@
             <a:r>
               <a:rPr lang="en-US" sz="1000" dirty="0">
                 <a:solidFill>
-                  <a:srgbClr val="C3E88D"/>
+                  <a:srgbClr val="177245"/>
                 </a:solidFill>
                 <a:latin typeface="Courier New" pitchFamily="34" charset="0"/>
                 <a:ea typeface="Courier New" pitchFamily="34" charset="-122"/>

--- a/docs/decks/L10.pptx
+++ b/docs/decks/L10.pptx
@@ -524,7 +524,7 @@
           <a:p>
             <a:r>
               <a:rPr lang="en-US" dirty="0"/>
-              <a:t/>
+              <a:t>Вітаю на десятому уроці — другому уроці тижня observability + evals. Минулого разу ми навчили систему відповідати на питання «що відбувається» — метрики, консоль, розслідування. Сьогодні закриваємо друге питання тижня: «чи не стало гірше». «Я потикав у чат — ніби норм» — це не перевірка якості, це настрій. Сьогодні якість стає числом: golden dataset як письмовий контракт поведінки системи, rule-based grader'и, поріг і exit code. Кульмінація уроку — момент, заради якого все будувалося: регресію промпта, яку на другому уроці ви бачили очима — rollback на v1, бот каже «не знаю», — наприкінці цього уроку зловить одна команда з термінала. Однаково, щоразу, за секунди. А наступного тижня цей самий прогін стане гейтом у CI, який фізично не пустить регресію в main. Поїхали.</a:t>
             </a:r>
             <a:endParaRPr lang="en-US" dirty="0"/>
           </a:p>
@@ -612,7 +612,7 @@
           <a:p>
             <a:r>
               <a:rPr lang="en-US" dirty="0"/>
-              <a:t/>
+              <a:t>Найчастіше питання після «навіщо golden dataset» — «а де взяти кейси». Відповідь «придумати» дає найгірший можливий датасет: придумані кейси перевіряють те, що ви й так уявляєте, а система ламається на тому, чого ви не уявляли. Робочі джерела, у порядку цінності. Реальні звернення зі саппорту чи лога — формулювання, яких ви не вигадали б: із помилками, сленгом, двома питаннями в одному; це і є ваш справжній трафік. Кожен інцидент — рівно один кейс: гарантія, що та сама поломка не повториться тихо; найдешевший спосіб перетворити біль на актив. Кожне «ой» на демо — межові випадки, які знаходить свіже око; такі речі забуваються за годину. І негативні кейси — injection, відмови, заборонені обіцянки: саме тут регресії найдорожчі й найтихіші. Скільки їх треба? Не «якомога більше», а «щоб покривалися класи поломок, які вас лякають». Шість кейсів, що ловлять шість різних класів, кращі за шістдесят варіацій одного питання. Практичний спосіб перевірити покриття — зламати систему навмисно: приберіть маркер із промпта, відключіть інструмент, зіпсуйте маршрутизацію. Кожна така поломка мусить когось повалити. Лишився зеленим — у вас діра, і кількість кейсів ні до чого. І одна деталь про стабільність: eval — не юніт-тест, під ним недетермінована модель. Кейс, який «мигає», — це дефект кейса, а не привід ігнорувати червоне: очікування занадто вузьке або питання неоднозначне. Лікується переписуванням кейса, а не перезапуском прогону.</a:t>
             </a:r>
             <a:endParaRPr lang="en-US" dirty="0"/>
           </a:p>
@@ -700,7 +700,7 @@
           <a:p>
             <a:r>
               <a:rPr lang="en-US" dirty="0"/>
-              <a:t/>
+              <a:t>Хто вирішує «пройшов/не пройшов»? У ядрі курсу — функція на десять рядків. Читаємо. Якщо кейс очікує відмову — шукаємо refusal-маркери: «не можу», cannot, refuse. Зверніть увагу на коментар: «вибачте» зі списку прибрано, бо воно є і в заглушці graceful degradation — refusal-кейс проходив би навіть під час повного outage. Це жива ілюстрація пастки з блоку 03, прямо в коді. Далі expect: кожне ключове слово мусить бути у відповіді — нема хоч одного, кейс упав. Потім forbid: знайшли заборонене — упав. Усе. Сильні сторони rule-based підходу — рівно ті, що потрібні для гейта. Він безкоштовний: жодного токена. Детермінований: той самий вхід — той самий вердикт, завжди. І працює на mock. Його чесна межа: він перевіряє «є/нема», а не «наскільки добре сказано». «Відповідь містить слово email» — так; «відповідь ввічлива і не заплутує» — це вже не до нього, про це опційний блок про LLM-as-judge. Для контракту поведінки цієї межі зазвичай досить: більшість регресій, які болять, — це «перестало містити суть» або «почало містити заборонене», і обидві ловляться ключовими словами. І прямо тому grader перевіряє наявність ключових слів, а не рівність рядків — це єдиний спосіб отримати повторюваність там, де відповідь щоразу трохи інша.</a:t>
             </a:r>
             <a:endParaRPr lang="en-US" dirty="0"/>
           </a:p>
@@ -788,7 +788,7 @@
           <a:p>
             <a:r>
               <a:rPr lang="en-US" dirty="0"/>
-              <a:t/>
+              <a:t>Решта run.py — чесний цикл без магії: прочитати кейси, зробити POST у /chat — той самий ендпоінт, у який пише консоль, жодного «тестового режиму», — оцінити grader'ом і порахувати. Два виходи, і обидва важливі. Число — «5/6 passed» — для людини: видно, що саме впало, у виводі поруч перші 60 символів кожної відповіді. Exit code — для машин: 0 — зелено, 1 — червоно. Саме exit code перетворює перевірку якості з ритуалу на будівельний блок: його розуміє шел, Docker, будь-який CI. Наступного тижня цей нуль-або-один стане гейтом, який фізично не пустить регресію в main. Зверніть увагу і на те, чого в runner'і немає: браузера, скріншотів, очей. Прогін працює в терміналі за секунди — тому його можна запускати після кожної правки, а не «перед релізом». Це і є відповідь на неповторюваність ручної перевірки з блоку 01: перевірка, що коштує секунди, виконується завжди; перевірка, що коштує пів години клацання, — ніколи.</a:t>
             </a:r>
             <a:endParaRPr lang="en-US" dirty="0"/>
           </a:p>
@@ -876,7 +876,7 @@
           <a:p>
             <a:r>
               <a:rPr lang="en-US" dirty="0"/>
-              <a:t/>
+              <a:t>Скільки «пройшло» достатньо для зеленого? Здається, відповідь очевидна — всі. Але подумайте, що означає поріг «6 з 6» операційно: один флейковий кейс — тимчасовий збій, невдале формулювання, зміна в mock — і всі релізи стоять. Перфекціонізм у порозі обертається тим, що червоний прогін перестають сприймати як подію: «а, це знову той кейс». Для нашого набору розумний дефолт — 5 з 6. Чому саме так: регресія промпта валить одразу три промпто-чутливі кейси — faq-1, faq-2, caps-1 — і пробиває поріг гарантовано, а одиничний флейк — ні. Загальні правила порога. Перше: поріг має ловити класи поломок, які вас лякають, — перевірте: зламайте — пробиває? Друге: поріг росте разом із датасетом. Додали кейси — перерахуйте: після ДЗ тижня 5 у вашому наборі буде близько десяти кейсів і поріг 9 — правило N мінус один. Третє: зміна порогу — це теж реліз, з рев'ю і поясненням чому. І практична пастка: поріг живе у двох місцях — у команді локального прогону і в CI-workflow, файл eval-gate.yml. Розширили датасет — оновіть обидва, інакше гейт тижня 6 лишиться з порогом під старий набір і мовчки терпітиме регресії.</a:t>
             </a:r>
             <a:endParaRPr lang="en-US" dirty="0"/>
           </a:p>
@@ -964,7 +964,7 @@
           <a:p>
             <a:r>
               <a:rPr lang="en-US" dirty="0"/>
-              <a:t/>
+              <a:t>Момент, заради якого все будувалося. Згадайте урок 2: rollback на v1, бот каже «не знаю», ви бачите це очима. Тепер той самий сценарій — через eval. Прогін на здоровій системі: шість із шести, поріг 5, зелено. Активуємо «погану» версію промпта — v1. Прогін: faq-кейси падають з «не знаю», три з шести, ЧЕРВОНО, exit code 1. Відкат на v2 — і знову шість із шести. Відчуйте різницю в надійності: «я подивився, ніби ок» проти «6 з 6, поріг 5, exit code 0». Перше залежить від того, хто дивився і чи не поспішав. Друге — однакове для стажера, тімліда і CI-раннера о третій ночі. І це працює на mock без жодного ключа: mock відповідає по-різному залежно від промпта, отже регресія промпта міняє відповіді, отже grader її ловить. Механіка контуру повністю бойова. Одна чесна відмінність, яку принесе реальний ключ: mock детермінований, жива модель — ні. Той самий кейс може пройти вранці й впасти ввечері просто тому, що модель сформулювала відповідь інакше. Інструменти проти цього відомі: мінімальна температура для eval-прогонів і очікування на суть замість форми. А якщо кейс усе одно миготить — це сигнал переглянути його очікування, а не перезапускати прогін, «поки не позеленіє». Флейк, який терплять, коштує дорожче за кейс, який переписали. І флейк не завжди винна модель — інколи шумить середовище. У мене був випадок із CI-гейтами: перевірки, чутливі до навантаження, падали не через регресії, а через те, що спільний CI-раннер був зайнятий чужими збірками. Лікування — не перезапуск: брати мінімум з K прогонів і давати чутливим тестам реалістичні таймаути. Перш ніж звинувачувати недетермінізм моделі, перевірте, чи детерміноване ваше власне середовище.</a:t>
             </a:r>
             <a:endParaRPr lang="en-US" dirty="0"/>
           </a:p>
@@ -1052,7 +1052,7 @@
           <a:p>
             <a:r>
               <a:rPr lang="en-US" dirty="0"/>
-              <a:t/>
+              <a:t>Це опційний блок. Що робити там, де правила безсилі? «Відповідь спирається на надані факти, а не вигадує?» — faithfulness. «Тон ввічливий?» «Яка з двох версій промпта відповідає краще?» Ключовими словами це не перевіриш. Для таких питань є model-based підхід: інша модель читає відповідь і виносить вердикт за заданими критеріями. Але в judge два цінники, про які часто забувають. Перший — гроші: judge-виклики — це реальні токени, і правило з уроку 4 — «рахується все, що ходить у модель» — стосується їх у повний зріст. Облік із міткою, інакше перевірка якості тихо стане другою статтею витрат. Другий — недетермінованість: judge сам є LLM, тобто той самий вхід може отримати різний вердикт. Для гейта це неприємна властивість — flaky-перевірки розмивають довіру. І тут з'являється робота, якої на mock немає взагалі, — калібрування. На живій моделі той самий кейс проходить, скажімо, у 8 прогонах з 10 — і треба вирішити: це дефект відповіді чи занадто вузька перевірка? Практичний рецепт першого ж дня на реальному ключі: візьміть свій датасет, проженіть його по живій моделі кілька разів підряд і позначте кейси, що «мигають». Кожен такий кейс — сигнал переписати перевірку на властивість або пом'якшити judge-критерій. Поки цього не зробили, ставити judge у блокуючий гейт небезпечно: він валитиме зелені релізи на власному шумі.</a:t>
             </a:r>
             <a:endParaRPr lang="en-US" dirty="0"/>
           </a:p>
@@ -1140,7 +1140,7 @@
           <a:p>
             <a:r>
               <a:rPr lang="en-US" dirty="0"/>
-              <a:t/>
+              <a:t>Стартові шість кейсів — це скелет. Живим контракт роблять поповнення, і в них є просте правило. Кейс додається у двох випадках: коли ви щось полагодили — щоб не зламалося знову, регресійний кейс; і коли ви чогось злякалися — новий сценарій атаки, дивна поведінка на демо, скарга користувача. Так датасет росте з реального досвіду системи, а не з фантазії за столом — і кожен кейс має історію, яка пояснює, навіщо він тут. Як це виглядає на практиці нашого курсу. Сьогодні в лабі ви додасте перші власні кейси: подяку — «Дякую!» не має отримати «не знаю», — уточнення, ще один injection-варіант. У ДЗ тижня 5 — мінімум чотири, включно з негативними. А далі — після кожного інциденту наступних тижнів і після кожного «ой» на демо — по кейсу. Через пів року такий датасет розповідає історію вашої системи точніше за будь-яку документацію: у ньому видно, чого вона вже боїться.</a:t>
             </a:r>
             <a:endParaRPr lang="en-US" dirty="0"/>
           </a:p>
@@ -1228,7 +1228,7 @@
           <a:p>
             <a:r>
               <a:rPr lang="en-US" dirty="0"/>
-              <a:t/>
+              <a:t>Перш ніж перейти до екрана — що саме ви зараз побачите і навіщо. Послідовність така: спершу golden.jsonl — стартовий контракт на один екран. Потім прогін run.py на здоровій системі: 6/6, зелено. Далі activate v1 — «погана» версія промпта, та сама, що на уроці 2. Прогін: 3/6, ЧЕРВОНО. Відкат на v2 — 6/6, зелено знову. І фінальний кадр — echo $?: exit code очима, той самий нуль-або-один, який наступного тижня стане гейтом у CI. Навіщо це все: побачити, що регресія, яку на уроці 2 ловили очима, тепер ловиться командою — однаково, щоразу, за секунди. [Ведучому: на w5 датасет уже розширений (10 кейсів, поріг 9) — для кадру «6/6→3/6» бери стартовий 6-кейсовий набір. Exit code знімай БЕЗ pipe: python evals/run.py … | tail віддає код виходу tail, не runner'а — фальшивий 0 замість 1; спершу прогін, потім окремо echo $?. Між червоним і зеленим прогоном не забудь повернути v2 — інакше наступні дублі почнуться з «не знаю». Кирилиця в Git Bash — тіло запиту з файлу, не інлайном.]</a:t>
             </a:r>
             <a:endParaRPr lang="en-US" dirty="0"/>
           </a:p>
@@ -1316,7 +1316,7 @@
           <a:p>
             <a:r>
               <a:rPr lang="en-US" dirty="0"/>
-              <a:t/>
+              <a:t>Крок перший — анатомія кейса. Прочитати golden.jsonl: faq-кейси з expect і forbid, tool-кейс, safety-кейс з expect_refusal. Проговорити, який тиждень курсу перевіряє кожен. Крок другий — grader і runner. Прочитати run.py: цикл, POST у сервіс, grade, підсумок і exit code. Прогнати — команда є в гайді для студента, у розділі про evals: python evals/run.py --dataset evals/golden.jsonl --threshold 5. Результат: 6/6, зелено; перевірити echo $? — нуль. Два попередження. Якщо перед цим ти ганяв __fail_503 з лаби уроку 9 і робив опційний circuit breaker — почекай секунд тридцять, поки breaker закриється, інакше побачиш фальшиву тотальну регресію; у core без breaker'а чекати нічого не треба. І друге: прогін проганяє кейс із незворотною дією, тож у черзі GET /approvals після кожного прогону лишається нова pending-заявка — це очікувано, а не баг; перед демо черги почисти стан через docker compose down -v. Крок третій — зламати і зловити: rollback промпта на v1, як в уроці 2, прогін — 3/6, червоно, exit code 1; повернути v2 — 6/6. Регресія, яку ви бачили очима, тепер ловиться командою. Крок четвертий — власні кейси. Додати щонайменше два: позитивний — подяка або уточнення — і негативний — перефразований injection. Прогнати, за потреби підняти поріг — і пояснити собі чому. І опційний п'ятий — спроєктувати judge: для одного кейса сформулювати критерії model-based перевірки, faithfulness або тон, і прикинути її вартість за прайсом з уроку 4. Реалізація — з реальним ключем, поза core.</a:t>
             </a:r>
             <a:endParaRPr lang="en-US" dirty="0"/>
           </a:p>
@@ -1404,7 +1404,7 @@
           <a:p>
             <a:r>
               <a:rPr lang="en-US" dirty="0"/>
-              <a:t/>
+              <a:t>Зафіксуємо, що ми щойно побачили — і що це доводить. Перше: регресія промпта ловиться командою. Та сама поломка, яку на уроці 2 ви бачили очима, тепер дає 3/6 і exit code 1 — однаково, щоразу, за секунди, незалежно від того, хто запускає. Друге: якість стала числом і контрактом. Golden.jsonl лежить у репозиторії, читається людиною, діфається в PR; його зміни — включно зі зміною порогу — проходять рев'ю, як код. Що не в контракті — те не обіцяно. Третє: exit code готовий для CI. Нуль-або-один розуміє шел, Docker і будь-який CI-раннер — наступного тижня цей самий прогін повисне на кожному PR і фізично не пустить регресію в main. Разом це і є відповідь на питання тижня «чи не стало гірше»: не настрій, не «ніби норм», а число, поріг і код виходу.</a:t>
             </a:r>
             <a:endParaRPr lang="en-US" dirty="0"/>
           </a:p>
@@ -1492,7 +1492,7 @@
           <a:p>
             <a:r>
               <a:rPr lang="en-US" dirty="0"/>
-              <a:t/>
+              <a:t>Домовимось про результат уроку — конкретними діями. Після сьогоднішнього заняття ви зможете: прогнати eval suite з термінала і прочитати обидва його виходи — число для людини і exit code для машин; пояснити кожен із шести кейсів golden.jsonl і сказати, який тиждень курсу перевіряє кожен; зламати промпт навмисно і зловити регресію командою — червоний прогін, відкат, зелений; додати власні кейси, позитивний і негативний, і перерахувати поріг — розуміючи чому; перевірити датасет на фальш-позитиви прогоном із повністю зламаним провайдером — має впасти все; і пояснити, коли потрібен LLM-as-judge і чому він не безкоштовний. Кожен пункт ви перевірите руками ще сьогодні — у лабораторній.</a:t>
             </a:r>
             <a:endParaRPr lang="en-US" dirty="0"/>
           </a:p>
@@ -1580,7 +1580,7 @@
           <a:p>
             <a:r>
               <a:rPr lang="en-US" dirty="0"/>
-              <a:t/>
+              <a:t>Перш ніж розійтися — чесна перевірка обов'язкової доріжки, без оцінок. П'ять пунктів. Прогін зелений — і ви розумієте кожен кейс: не «воно пройшло», а «я знаю, що саме перевіряє faq-1 і чому в refund-1 очікується тікет». Зламаний промпт дає червоний прогін, відкат — зелений, і це відтворюється: цикл «зламай і злови» ви прокрутили руками. Додано щонайменше два власні кейси, серед них негативний. Прогін із __fail_503 у кожному кейсі дає нуль пройдених — отже фальш-позитивів у наборі немає: жоден кейс не зеленіє під час повного збою. І ви можете пояснити, коли потрібен LLM-as-judge і чому він не безкоштовний — два цінники: гроші і недетермінованість. Якщо всі п'ять пунктів — «так», ви готові до наступного тижня, де цей прогін стане гейтом у CI. Питання, які лишилися, — несіть у канал потоку або на Q&amp;A.</a:t>
             </a:r>
             <a:endParaRPr lang="en-US" dirty="0"/>
           </a:p>
@@ -1668,7 +1668,7 @@
           <a:p>
             <a:r>
               <a:rPr lang="en-US" dirty="0"/>
-              <a:t/>
+              <a:t>П'ять способів звести нанівець усе, що ми сьогодні збудували. «Потикав у чат» як процес перевірки якості: неповторюване вимірювання — не вимірювання; з нього ми сьогодні починали. Датасет із трьох кейсів, який завжди зелений: ілюзія контракту гірша за його відсутність — галочка є, захисту немає. Поріг «усі 100%»: один флейк паралізує релізи і привчає команду ігнорувати червоне — а червоне, яке ігнорують, гірше за відсутність перевірки. LLM-as-judge на все підряд без обліку вартості: перевірка якості тихо стає другою статтею витрат — непорахованою; правило уроку 4 — «рахується все, що ходить у модель» — стосується і judge. І датасет, який не поповнюється після інцидентів: кожен незаписаний інцидент — це регресія, що повернеться. Правило просте: щось зламалося — перш ніж закрити тікет, з'явився кейс.</a:t>
             </a:r>
             <a:endParaRPr lang="en-US" dirty="0"/>
           </a:p>
@@ -1756,7 +1756,7 @@
           <a:p>
             <a:r>
               <a:rPr lang="en-US" dirty="0"/>
-              <a:t/>
+              <a:t>Це другий урок тижня — отже, здається ДЗ тижня 5: observability plus evals. Обидва уроки тижня здаються одним PR: живі плитки консолі з уроку 9 плюс розширений eval-контур із сьогоднішнього. Критерії приймання коротко. Усі шість плиток консолі показують числа, звірені з SQL. У golden.jsonl — мінімум чотири власні кейси, серед них негативні. Прогін зелений з відповідно піднятим порогом — пам'ятайте правило N мінус один і те, що поріг живе у двох місцях. Повні критерії — у файлі ДЗ. Опційно, не оцінюється: таксономія помилок з окремими лічильниками — з уроку 9; і model-based grader, LLM-as-judge — він потребує реального ключа, і його виклики треба порахувати у вартість, як ми говорили в опційному блоці. Нагадаю механіку тижневих ДЗ: один PR у своєму репозиторії, рев'ю від ментора. І порада з сьогоднішнього уроку: перш ніж здавати, проженіть свій розширений набір із __fail_503 у кожному кейсі — нуль пройдених означає, що фальш-позитивів немає і ваші нові кейси справді щось перевіряють.</a:t>
             </a:r>
             <a:endParaRPr lang="en-US" dirty="0"/>
           </a:p>
@@ -1844,7 +1844,7 @@
           <a:p>
             <a:r>
               <a:rPr lang="en-US" dirty="0"/>
-              <a:t/>
+              <a:t>Підсумуємо. Якість — це не відчуття, а перелік тверджень, які можна перевірити: golden dataset — це контракт поведінки, письмова фіксація того, що система обіцяє користувачам. Очікування трьох видів — expect, forbid, expect_refusal — і пишуться вони на суть, а не на форму, інакше кейси флейкають. Rule-based grader безкоштовний, детермінований і працює на mock — рівно те, що потрібно для гейта; його чесна межа — «є/нема», а не «наскільки добре». Поріг — інженерне рішення: 5 з 6 сьогодні, правило N мінус один після росту датасету, і зміна порогу — це теж реліз. Головне: регресію промпта, яку на уроці 2 ви ловили очима, тепер ловить команда з термінала — число для людини, exit code для машин. Наступний урок — CI/CD quality gates, canary і rollback. Eval повертає exit code, а exit code створений для CI: вішаємо прогін на кожен PR — і регресія промпта більше фізично не потрапляє в main, бо гейт червоний і merge заблокований. Заодно на вас чекають чесні історії про те, як CI ловив помилки в самому цьому курсі, поки я його готував: гейти працюють і на авторів гейтів. До зустрічі.</a:t>
             </a:r>
             <a:endParaRPr lang="en-US" dirty="0"/>
           </a:p>
@@ -1932,7 +1932,7 @@
           <a:p>
             <a:r>
               <a:rPr lang="en-US" dirty="0"/>
-              <a:t/>
+              <a:t>Маршрут такий. Спершу проблема: чому «потикав у чат» — не перевірка, і звідки беруться регресії, коли ніхто нічого не деплоїв. Далі — серце уроку: golden dataset як контракт поведінки, три види очікувань, розтин шести стартових кейсів — і чесна розмова про те, звідки кейси беруться і скільки їх треба. Потім механіка: rule-based grader на десять рядків, runner з exit code і поріг як інженерне рішення — з його чесною сліпою плямою. Кульмінація — блок 08: ламаємо промпт і ловимо регресію командою, та сама історія з уроку 2, тепер без очей. Опційний блок — LLM-as-judge: що робити там, де правила безсилі, і чому він не в обов'язковій доріжці. Наприкінці — як датасет росте далі, лабораторна «зламай і злови», антипатерни і ДЗ тижня 5, яке здається одним PR за обидва уроки.</a:t>
             </a:r>
             <a:endParaRPr lang="en-US" dirty="0"/>
           </a:p>
@@ -2020,7 +2020,7 @@
           <a:p>
             <a:r>
               <a:rPr lang="en-US" dirty="0"/>
-              <a:t/>
+              <a:t>Домовимось про шість слів. Golden dataset — набір кейсів, на яких ви перевіряєте поведінку системи; кожен кейс це вхід плюс очікування. Expect — що мусить бути у відповіді; forbid — чого бути не має; expect_refusal — очікуємо відмову, це наші red-team кейси з уроку 8. Grader — код, який вирішує, чи кейс пройшов; у нас він на правилах, тобто безкоштовний і детермінований. Поріг — скільки кейсів має пройти, щоб прогін вважався зеленим. Exit code — нуль або одиниця, якою прогін розмовляє з машинами: саме її на тижні 6 читатиме CI. І LLM-as-judge — оцінювання відповіді іншою моделлю: опційна доріжка, у якої два цінники — гроші й недетермінізм.</a:t>
             </a:r>
             <a:endParaRPr lang="en-US" dirty="0"/>
           </a:p>
@@ -2108,7 +2108,7 @@
           <a:p>
             <a:r>
               <a:rPr lang="en-US" dirty="0"/>
-              <a:t/>
+              <a:t>Як ви дізнаєтесь, що зміна промпта нічого не зламала? У більшості команд — ніяк. Хтось клацає три питання в чаті, дивиться «ніби ок» і мержить. Проблема навіть не в лінощах: ручна перевірка принципово не повторювана. Сьогодні ви перевірили одні питання, завтра інші, післязавтра — забули перевірити взагалі. Той самий промпт може пройти перевірку в понеділок і провалити в середу — залежно від того, хто і що клацнув. А змінюється LLM-система з трьох боків одразу. Ваш промпт — найчастіше. Ваш код — routing, guardrails, кеш, усе впливає на відповіді. І чужа модель: провайдер оновив версію — і поведінка попливла без жодної дії з вашого боку. Три джерела регресій — і нуль повторюваних перевірок. Без вимірювання ви дізнаєтеся про проблему звідти ж, звідки завжди: від користувачів. На уроці 2 ми бачили це наживо: rollback промпта на v1 — і бот каже «не знаю». Тоді ви дивилися на регресію. Сьогодні будуємо механізм, який ловить її — однаково, щоразу, за секунди. І зв'язка з минулим уроком: метрики кажуть «щось не так» — error rate, fallback. Eval каже «що саме не так» — які поведінки зламалися. Разом вони закривають вимір «якість» повністю.</a:t>
             </a:r>
             <a:endParaRPr lang="en-US" dirty="0"/>
           </a:p>
@@ -2196,7 +2196,7 @@
           <a:p>
             <a:r>
               <a:rPr lang="en-US" dirty="0"/>
-              <a:t/>
+              <a:t>Основа механізму — набір кейсів, кожен з яких фіксує один шматочок очікуваної поведінки: вхід плюс очікування. Очікування бувають трьох видів. Expect — що мусить бути у відповіді: ключові слова, факти. Forbid — чого бути не має: «не знаю» на типове питання — провал. І expect_refusal — очікуємо відмову: це наші red-team кейси з уроку 8. Разом ці кейси — не тести в звичному сенсі, а контракт поведінки: письмова фіксація того, що система обіцяє користувачам. І важлива теза про розмір: репрезентативність важливіша за кількість. Типові питання, ескалації, tool-сценарії, атаки — по кілька кожного виду. 10–20 влучних кейсів дають більше, ніж 200 випадкових: випадкові перевіряють одне й те саме десятьма способами і мовчать про решту. Звідси принцип, який тримає весь урок: якість — це не відчуття, а перелік тверджень, які можна перевірити. Що не потрапило в датасет — того контракт не обіцяє, і воно зламається мовчки. Тому питання «що додати в golden dataset» — це насправді питання «що ми обіцяємо користувачам».</a:t>
             </a:r>
             <a:endParaRPr lang="en-US" dirty="0"/>
           </a:p>
@@ -2284,7 +2284,7 @@
           <a:p>
             <a:r>
               <a:rPr lang="en-US" dirty="0"/>
-              <a:t/>
+              <a:t>Звідки брати «репрезентативність», щоб не вигадувати за столом? З двох джерел, і обидва у вас уже є. Перше — лог: топ реальних інтентів вашого трафіку і є список того, що варто закрити кейсами насамперед. Кеш-аналіз з уроку 5 цю роботу фактично зробив. Друге — страхи: сценарії, поломка яких коштує найдорожче — ескалації, дії, атаки, — навіть якщо в трафіку їх частка мала. Хороший датасет — це «голова» розподілу плюс «хвіст» ризиків; усе, що між ними, дає менше захисту на кейс. І про форму очікувань. Пишіть expect на суть, а не на форму. Кейс, який очікує цілу фразу — «надішліть запит на email підтримки», — зламається від першого ж безневинного перефразування і привчить вас ігнорувати червоне. Ключове слово — «email» — переживає будь-яку редакцію відповіді, що зберігає зміст. Запам'ятайте цю фразу: над-специфіковані кейси — найчастіша причина флейків у rule-based наборах. Ми ще повернемося до неї, коли говоритимемо про стабільність.</a:t>
             </a:r>
             <a:endParaRPr lang="en-US" dirty="0"/>
           </a:p>
@@ -2372,7 +2372,7 @@
           <a:p>
             <a:r>
               <a:rPr lang="en-US" dirty="0"/>
-              <a:t/>
+              <a:t>Відкрийте evals/golden.jsonl — весь стартовий контракт уміщається на екран. Шість рядків JSONL. Прочитайте його як специфікацію системи, побудованої за п'ять тижнів. Faq-кейси перевіряють базову якість відповідей — і вони чутливі до промпта: саме вони червоніють після rollback. Order-1 перевіряє, що tool-виклик працює і результат потрапляє у відповідь — тиждень 3. Refund-1 — що ескалація народжує тікет через approvals — тижні 2 і 4. Safety-1 — що injection отримує відмову — тиждень 4, урок 8. Caps-1 — знову базова якість і чутливість до промпта. Один рядок JSONL — один урок курсу. І зверніть увагу на формат: він навмисно простий. JSONL читається людиною, діфається в PR і не потребує жодного інструмента. Контракт поведінки лежить у репозиторії поруч із кодом — і його зміни проходять те саме рев'ю, що й код.</a:t>
             </a:r>
             <a:endParaRPr lang="en-US" dirty="0"/>
           </a:p>
@@ -2460,7 +2460,7 @@
           <a:p>
             <a:r>
               <a:rPr lang="en-US" dirty="0"/>
-              <a:t/>
+              <a:t>Найкоштовніший баг золотого набору — не той кейс, що падає без причини, а той, що зеленіє без причини: кейс, який проходить під час повного збою. Приклад із цього самого курсу. Коли ми додали кейс на подяку — «Дякую!» з очікуванням «будь ласка», — він почав проходити навіть тоді, коли лежало все. Чому? Бо ввічлива заглушка деградації звучить «Вибачте, тимчасові проблеми… Спробуйте, будь ласка, трохи згодом». Слово «будь ласка» є в заглушці — кейс зелений при мертвому провайдері. Датасет казав «1 з 10», а мав казати «0 з 10». Лікування механічне. У кожен кейс, чиє expect може випадково зустрітися у вашій заглушці, додайте forbid з фрагментом тексту цієї заглушки. І перевірка, яку варто зробити один раз і назавжди: проженіть весь набір при штучно повністю зламаному провайдері — маркер __fail_503 у кожному кейсі. Має впасти все. Якщо хоч один кейс зелений — він не перевіряє нічого. Цю перевірку ви зробите в лабі, а в чек-листі уроку вона стоїть як обов'язкова умова: фальш-позитивів у наборі немає.</a:t>
             </a:r>
             <a:endParaRPr lang="en-US" dirty="0"/>
           </a:p>
@@ -3693,7 +3693,7 @@
         </p:nvSpPr>
         <p:spPr>
           <a:xfrm>
-            <a:off x="1280160" y="1024128"/>
+            <a:off x="1280160" y="1193140"/>
             <a:ext cx="777240" cy="256032"/>
           </a:xfrm>
           <a:prstGeom prst="roundRect">
@@ -3715,7 +3715,7 @@
         </p:nvSpPr>
         <p:spPr>
           <a:xfrm>
-            <a:off x="1280160" y="1024128"/>
+            <a:off x="1280160" y="1193140"/>
             <a:ext cx="777240" cy="256032"/>
           </a:xfrm>
           <a:prstGeom prst="rect">
@@ -4627,13 +4627,13 @@
       </p:graphicFrame>
       <p:sp>
         <p:nvSpPr>
-          <p:cNvPr id="8" name="Shape 4"/>
-          <p:cNvSpPr/>
-          <p:nvPr/>
-        </p:nvSpPr>
-        <p:spPr>
-          <a:xfrm>
-            <a:off x="566928" y="4297680"/>
+          <p:cNvPr id="9" name="Shape 4"/>
+          <p:cNvSpPr/>
+          <p:nvPr/>
+        </p:nvSpPr>
+        <p:spPr>
+          <a:xfrm>
+            <a:off x="566928" y="4553712"/>
             <a:ext cx="11064240" cy="1234440"/>
           </a:xfrm>
           <a:prstGeom prst="roundRect">
@@ -4649,13 +4649,13 @@
       </p:sp>
       <p:sp>
         <p:nvSpPr>
-          <p:cNvPr id="9" name="Text 5"/>
-          <p:cNvSpPr/>
-          <p:nvPr/>
-        </p:nvSpPr>
-        <p:spPr>
-          <a:xfrm>
-            <a:off x="786384" y="4425696"/>
+          <p:cNvPr id="10" name="Text 5"/>
+          <p:cNvSpPr/>
+          <p:nvPr/>
+        </p:nvSpPr>
+        <p:spPr>
+          <a:xfrm>
+            <a:off x="786384" y="4681728"/>
             <a:ext cx="10625328" cy="219456"/>
           </a:xfrm>
           <a:prstGeom prst="rect">
@@ -4688,13 +4688,13 @@
       </p:sp>
       <p:sp>
         <p:nvSpPr>
-          <p:cNvPr id="10" name="Text 6"/>
-          <p:cNvSpPr/>
-          <p:nvPr/>
-        </p:nvSpPr>
-        <p:spPr>
-          <a:xfrm>
-            <a:off x="786384" y="4681728"/>
+          <p:cNvPr id="11" name="Text 6"/>
+          <p:cNvSpPr/>
+          <p:nvPr/>
+        </p:nvSpPr>
+        <p:spPr>
+          <a:xfrm>
+            <a:off x="786384" y="4937760"/>
             <a:ext cx="10625328" cy="722376"/>
           </a:xfrm>
           <a:prstGeom prst="rect">
@@ -4894,7 +4894,7 @@
         </p:nvSpPr>
         <p:spPr>
           <a:xfrm>
-            <a:off x="1280160" y="1024128"/>
+            <a:off x="1280160" y="1193140"/>
             <a:ext cx="777240" cy="256032"/>
           </a:xfrm>
           <a:prstGeom prst="roundRect">
@@ -4916,7 +4916,7 @@
         </p:nvSpPr>
         <p:spPr>
           <a:xfrm>
-            <a:off x="1280160" y="1024128"/>
+            <a:off x="1280160" y="1193140"/>
             <a:ext cx="777240" cy="256032"/>
           </a:xfrm>
           <a:prstGeom prst="rect">
@@ -4973,7 +4973,7 @@
       </p:pic>
       <p:sp>
         <p:nvSpPr>
-          <p:cNvPr id="7" name="Shape 4"/>
+          <p:cNvPr id="8" name="Shape 4"/>
           <p:cNvSpPr/>
           <p:nvPr/>
         </p:nvSpPr>
@@ -5000,7 +5000,7 @@
       </p:sp>
       <p:sp>
         <p:nvSpPr>
-          <p:cNvPr id="8" name="Text 5"/>
+          <p:cNvPr id="9" name="Text 5"/>
           <p:cNvSpPr/>
           <p:nvPr/>
         </p:nvSpPr>
@@ -5182,7 +5182,7 @@
       </p:sp>
       <p:sp>
         <p:nvSpPr>
-          <p:cNvPr id="9" name="Shape 6"/>
+          <p:cNvPr id="10" name="Shape 6"/>
           <p:cNvSpPr/>
           <p:nvPr/>
         </p:nvSpPr>
@@ -5204,7 +5204,7 @@
       </p:sp>
       <p:sp>
         <p:nvSpPr>
-          <p:cNvPr id="10" name="Shape 7"/>
+          <p:cNvPr id="11" name="Shape 7"/>
           <p:cNvSpPr/>
           <p:nvPr/>
         </p:nvSpPr>
@@ -5224,7 +5224,7 @@
       </p:sp>
       <p:sp>
         <p:nvSpPr>
-          <p:cNvPr id="11" name="Text 8"/>
+          <p:cNvPr id="12" name="Text 8"/>
           <p:cNvSpPr/>
           <p:nvPr/>
         </p:nvSpPr>
@@ -5263,7 +5263,7 @@
       </p:sp>
       <p:sp>
         <p:nvSpPr>
-          <p:cNvPr id="12" name="Text 9"/>
+          <p:cNvPr id="13" name="Text 9"/>
           <p:cNvSpPr/>
           <p:nvPr/>
         </p:nvSpPr>
@@ -5302,7 +5302,7 @@
       </p:sp>
       <p:sp>
         <p:nvSpPr>
-          <p:cNvPr id="13" name="Text 10"/>
+          <p:cNvPr id="14" name="Text 10"/>
           <p:cNvSpPr/>
           <p:nvPr/>
         </p:nvSpPr>
@@ -5344,7 +5344,7 @@
       </p:sp>
       <p:sp>
         <p:nvSpPr>
-          <p:cNvPr id="14" name="Shape 11"/>
+          <p:cNvPr id="15" name="Shape 11"/>
           <p:cNvSpPr/>
           <p:nvPr/>
         </p:nvSpPr>
@@ -5366,7 +5366,7 @@
       </p:sp>
       <p:sp>
         <p:nvSpPr>
-          <p:cNvPr id="15" name="Shape 12"/>
+          <p:cNvPr id="16" name="Shape 12"/>
           <p:cNvSpPr/>
           <p:nvPr/>
         </p:nvSpPr>
@@ -5386,7 +5386,7 @@
       </p:sp>
       <p:sp>
         <p:nvSpPr>
-          <p:cNvPr id="16" name="Text 13"/>
+          <p:cNvPr id="17" name="Text 13"/>
           <p:cNvSpPr/>
           <p:nvPr/>
         </p:nvSpPr>
@@ -5425,7 +5425,7 @@
       </p:sp>
       <p:sp>
         <p:nvSpPr>
-          <p:cNvPr id="17" name="Text 14"/>
+          <p:cNvPr id="18" name="Text 14"/>
           <p:cNvSpPr/>
           <p:nvPr/>
         </p:nvSpPr>
@@ -5464,7 +5464,7 @@
       </p:sp>
       <p:sp>
         <p:nvSpPr>
-          <p:cNvPr id="18" name="Text 15"/>
+          <p:cNvPr id="19" name="Text 15"/>
           <p:cNvSpPr/>
           <p:nvPr/>
         </p:nvSpPr>
@@ -5506,7 +5506,7 @@
       </p:sp>
       <p:sp>
         <p:nvSpPr>
-          <p:cNvPr id="19" name="Shape 16"/>
+          <p:cNvPr id="20" name="Shape 16"/>
           <p:cNvSpPr/>
           <p:nvPr/>
         </p:nvSpPr>
@@ -5528,7 +5528,7 @@
       </p:sp>
       <p:sp>
         <p:nvSpPr>
-          <p:cNvPr id="20" name="Shape 17"/>
+          <p:cNvPr id="21" name="Shape 17"/>
           <p:cNvSpPr/>
           <p:nvPr/>
         </p:nvSpPr>
@@ -5548,7 +5548,7 @@
       </p:sp>
       <p:sp>
         <p:nvSpPr>
-          <p:cNvPr id="21" name="Text 18"/>
+          <p:cNvPr id="22" name="Text 18"/>
           <p:cNvSpPr/>
           <p:nvPr/>
         </p:nvSpPr>
@@ -5587,7 +5587,7 @@
       </p:sp>
       <p:sp>
         <p:nvSpPr>
-          <p:cNvPr id="22" name="Text 19"/>
+          <p:cNvPr id="23" name="Text 19"/>
           <p:cNvSpPr/>
           <p:nvPr/>
         </p:nvSpPr>
@@ -5626,7 +5626,7 @@
       </p:sp>
       <p:sp>
         <p:nvSpPr>
-          <p:cNvPr id="23" name="Text 20"/>
+          <p:cNvPr id="24" name="Text 20"/>
           <p:cNvSpPr/>
           <p:nvPr/>
         </p:nvSpPr>
@@ -5832,7 +5832,7 @@
         </p:nvSpPr>
         <p:spPr>
           <a:xfrm>
-            <a:off x="1280160" y="1024128"/>
+            <a:off x="1280160" y="1193140"/>
             <a:ext cx="777240" cy="256032"/>
           </a:xfrm>
           <a:prstGeom prst="roundRect">
@@ -5854,7 +5854,7 @@
         </p:nvSpPr>
         <p:spPr>
           <a:xfrm>
-            <a:off x="1280160" y="1024128"/>
+            <a:off x="1280160" y="1193140"/>
             <a:ext cx="777240" cy="256032"/>
           </a:xfrm>
           <a:prstGeom prst="rect">
@@ -5911,7 +5911,7 @@
       </p:pic>
       <p:sp>
         <p:nvSpPr>
-          <p:cNvPr id="7" name="Shape 4"/>
+          <p:cNvPr id="8" name="Shape 4"/>
           <p:cNvSpPr/>
           <p:nvPr/>
         </p:nvSpPr>
@@ -5933,7 +5933,7 @@
       </p:sp>
       <p:sp>
         <p:nvSpPr>
-          <p:cNvPr id="8" name="Text 5"/>
+          <p:cNvPr id="9" name="Text 5"/>
           <p:cNvSpPr/>
           <p:nvPr/>
         </p:nvSpPr>
@@ -5972,7 +5972,7 @@
       </p:sp>
       <p:sp>
         <p:nvSpPr>
-          <p:cNvPr id="9" name="Shape 6"/>
+          <p:cNvPr id="10" name="Shape 6"/>
           <p:cNvSpPr/>
           <p:nvPr/>
         </p:nvSpPr>
@@ -5995,7 +5995,7 @@
       </p:sp>
       <p:sp>
         <p:nvSpPr>
-          <p:cNvPr id="10" name="Shape 7"/>
+          <p:cNvPr id="11" name="Shape 7"/>
           <p:cNvSpPr/>
           <p:nvPr/>
         </p:nvSpPr>
@@ -6015,7 +6015,7 @@
       </p:sp>
       <p:sp>
         <p:nvSpPr>
-          <p:cNvPr id="11" name="Shape 8"/>
+          <p:cNvPr id="12" name="Shape 8"/>
           <p:cNvSpPr/>
           <p:nvPr/>
         </p:nvSpPr>
@@ -6042,7 +6042,7 @@
       </p:sp>
       <p:sp>
         <p:nvSpPr>
-          <p:cNvPr id="12" name="Text 9"/>
+          <p:cNvPr id="13" name="Text 9"/>
           <p:cNvSpPr/>
           <p:nvPr/>
         </p:nvSpPr>
@@ -6081,7 +6081,7 @@
       </p:sp>
       <p:sp>
         <p:nvSpPr>
-          <p:cNvPr id="13" name="Shape 10"/>
+          <p:cNvPr id="14" name="Shape 10"/>
           <p:cNvSpPr/>
           <p:nvPr/>
         </p:nvSpPr>
@@ -6104,7 +6104,7 @@
       </p:sp>
       <p:sp>
         <p:nvSpPr>
-          <p:cNvPr id="14" name="Shape 11"/>
+          <p:cNvPr id="15" name="Shape 11"/>
           <p:cNvSpPr/>
           <p:nvPr/>
         </p:nvSpPr>
@@ -6124,7 +6124,7 @@
       </p:sp>
       <p:sp>
         <p:nvSpPr>
-          <p:cNvPr id="15" name="Shape 12"/>
+          <p:cNvPr id="16" name="Shape 12"/>
           <p:cNvSpPr/>
           <p:nvPr/>
         </p:nvSpPr>
@@ -6151,7 +6151,7 @@
       </p:sp>
       <p:sp>
         <p:nvSpPr>
-          <p:cNvPr id="16" name="Text 13"/>
+          <p:cNvPr id="17" name="Text 13"/>
           <p:cNvSpPr/>
           <p:nvPr/>
         </p:nvSpPr>
@@ -6190,7 +6190,7 @@
       </p:sp>
       <p:sp>
         <p:nvSpPr>
-          <p:cNvPr id="17" name="Shape 14"/>
+          <p:cNvPr id="18" name="Shape 14"/>
           <p:cNvSpPr/>
           <p:nvPr/>
         </p:nvSpPr>
@@ -6213,7 +6213,7 @@
       </p:sp>
       <p:sp>
         <p:nvSpPr>
-          <p:cNvPr id="18" name="Shape 15"/>
+          <p:cNvPr id="19" name="Shape 15"/>
           <p:cNvSpPr/>
           <p:nvPr/>
         </p:nvSpPr>
@@ -6233,7 +6233,7 @@
       </p:sp>
       <p:sp>
         <p:nvSpPr>
-          <p:cNvPr id="19" name="Shape 16"/>
+          <p:cNvPr id="20" name="Shape 16"/>
           <p:cNvSpPr/>
           <p:nvPr/>
         </p:nvSpPr>
@@ -6260,7 +6260,7 @@
       </p:sp>
       <p:sp>
         <p:nvSpPr>
-          <p:cNvPr id="20" name="Text 17"/>
+          <p:cNvPr id="21" name="Text 17"/>
           <p:cNvSpPr/>
           <p:nvPr/>
         </p:nvSpPr>
@@ -6299,7 +6299,7 @@
       </p:sp>
       <p:sp>
         <p:nvSpPr>
-          <p:cNvPr id="21" name="Shape 18"/>
+          <p:cNvPr id="22" name="Shape 18"/>
           <p:cNvSpPr/>
           <p:nvPr/>
         </p:nvSpPr>
@@ -6322,7 +6322,7 @@
       </p:sp>
       <p:sp>
         <p:nvSpPr>
-          <p:cNvPr id="22" name="Shape 19"/>
+          <p:cNvPr id="23" name="Shape 19"/>
           <p:cNvSpPr/>
           <p:nvPr/>
         </p:nvSpPr>
@@ -6342,7 +6342,7 @@
       </p:sp>
       <p:sp>
         <p:nvSpPr>
-          <p:cNvPr id="23" name="Shape 20"/>
+          <p:cNvPr id="24" name="Shape 20"/>
           <p:cNvSpPr/>
           <p:nvPr/>
         </p:nvSpPr>
@@ -6364,7 +6364,7 @@
       </p:sp>
       <p:sp>
         <p:nvSpPr>
-          <p:cNvPr id="24" name="Text 21"/>
+          <p:cNvPr id="25" name="Text 21"/>
           <p:cNvSpPr/>
           <p:nvPr/>
         </p:nvSpPr>
@@ -6403,7 +6403,7 @@
       </p:sp>
       <p:sp>
         <p:nvSpPr>
-          <p:cNvPr id="25" name="Text 22"/>
+          <p:cNvPr id="26" name="Text 22"/>
           <p:cNvSpPr/>
           <p:nvPr/>
         </p:nvSpPr>
@@ -6442,7 +6442,7 @@
       </p:sp>
       <p:sp>
         <p:nvSpPr>
-          <p:cNvPr id="26" name="Shape 23"/>
+          <p:cNvPr id="27" name="Shape 23"/>
           <p:cNvSpPr/>
           <p:nvPr/>
         </p:nvSpPr>
@@ -6469,7 +6469,7 @@
       </p:sp>
       <p:sp>
         <p:nvSpPr>
-          <p:cNvPr id="27" name="Text 24"/>
+          <p:cNvPr id="28" name="Text 24"/>
           <p:cNvSpPr/>
           <p:nvPr/>
         </p:nvSpPr>
@@ -6508,7 +6508,7 @@
       </p:sp>
       <p:sp>
         <p:nvSpPr>
-          <p:cNvPr id="28" name="Text 25"/>
+          <p:cNvPr id="29" name="Text 25"/>
           <p:cNvSpPr/>
           <p:nvPr/>
         </p:nvSpPr>
@@ -6550,7 +6550,7 @@
       </p:sp>
       <p:sp>
         <p:nvSpPr>
-          <p:cNvPr id="29" name="Shape 26"/>
+          <p:cNvPr id="30" name="Shape 26"/>
           <p:cNvSpPr/>
           <p:nvPr/>
         </p:nvSpPr>
@@ -6572,7 +6572,7 @@
       </p:sp>
       <p:sp>
         <p:nvSpPr>
-          <p:cNvPr id="30" name="Text 27"/>
+          <p:cNvPr id="31" name="Text 27"/>
           <p:cNvSpPr/>
           <p:nvPr/>
         </p:nvSpPr>
@@ -6611,7 +6611,7 @@
       </p:sp>
       <p:sp>
         <p:nvSpPr>
-          <p:cNvPr id="31" name="Text 28"/>
+          <p:cNvPr id="32" name="Text 28"/>
           <p:cNvSpPr/>
           <p:nvPr/>
         </p:nvSpPr>
@@ -6653,7 +6653,7 @@
       </p:sp>
       <p:sp>
         <p:nvSpPr>
-          <p:cNvPr id="32" name="Shape 29"/>
+          <p:cNvPr id="33" name="Shape 29"/>
           <p:cNvSpPr/>
           <p:nvPr/>
         </p:nvSpPr>
@@ -6680,7 +6680,7 @@
       </p:sp>
       <p:sp>
         <p:nvSpPr>
-          <p:cNvPr id="33" name="Text 30"/>
+          <p:cNvPr id="34" name="Text 30"/>
           <p:cNvSpPr/>
           <p:nvPr/>
         </p:nvSpPr>
@@ -6965,7 +6965,7 @@
       </p:pic>
       <p:sp>
         <p:nvSpPr>
-          <p:cNvPr id="7" name="Shape 4"/>
+          <p:cNvPr id="8" name="Shape 4"/>
           <p:cNvSpPr/>
           <p:nvPr/>
         </p:nvSpPr>
@@ -6987,7 +6987,7 @@
       </p:sp>
       <p:sp>
         <p:nvSpPr>
-          <p:cNvPr id="8" name="Text 5"/>
+          <p:cNvPr id="9" name="Text 5"/>
           <p:cNvSpPr/>
           <p:nvPr/>
         </p:nvSpPr>
@@ -7026,7 +7026,7 @@
       </p:sp>
       <p:sp>
         <p:nvSpPr>
-          <p:cNvPr id="9" name="Text 6"/>
+          <p:cNvPr id="10" name="Text 6"/>
           <p:cNvSpPr/>
           <p:nvPr/>
         </p:nvSpPr>
@@ -7065,7 +7065,7 @@
       </p:sp>
       <p:sp>
         <p:nvSpPr>
-          <p:cNvPr id="10" name="Shape 7"/>
+          <p:cNvPr id="11" name="Shape 7"/>
           <p:cNvSpPr/>
           <p:nvPr/>
         </p:nvSpPr>
@@ -7092,7 +7092,7 @@
       </p:sp>
       <p:sp>
         <p:nvSpPr>
-          <p:cNvPr id="11" name="Text 8"/>
+          <p:cNvPr id="12" name="Text 8"/>
           <p:cNvSpPr/>
           <p:nvPr/>
         </p:nvSpPr>
@@ -7131,7 +7131,7 @@
       </p:sp>
       <p:sp>
         <p:nvSpPr>
-          <p:cNvPr id="12" name="Text 9"/>
+          <p:cNvPr id="13" name="Text 9"/>
           <p:cNvSpPr/>
           <p:nvPr/>
         </p:nvSpPr>
@@ -7165,7 +7165,7 @@
                 <a:ea typeface="Montserrat" pitchFamily="34" charset="-122"/>
                 <a:cs typeface="Montserrat" pitchFamily="34" charset="-120"/>
               </a:rPr>
-              <a:t>недетермінізм моделі робить сотку крихкою: один мигаючий кейс — і команда починає ігнорувати червоне</a:t>
+              <a:t>недетермінізм робить сотку крихкою: один мигаючий кейс — і червоне ігнорують</a:t>
             </a:r>
             <a:endParaRPr lang="en-US" sz="1200" dirty="0"/>
           </a:p>
@@ -7173,7 +7173,7 @@
       </p:sp>
       <p:sp>
         <p:nvSpPr>
-          <p:cNvPr id="13" name="Shape 10"/>
+          <p:cNvPr id="14" name="Shape 10"/>
           <p:cNvSpPr/>
           <p:nvPr/>
         </p:nvSpPr>
@@ -7195,7 +7195,7 @@
       </p:sp>
       <p:sp>
         <p:nvSpPr>
-          <p:cNvPr id="14" name="Text 11"/>
+          <p:cNvPr id="15" name="Text 11"/>
           <p:cNvSpPr/>
           <p:nvPr/>
         </p:nvSpPr>
@@ -7234,7 +7234,7 @@
       </p:sp>
       <p:sp>
         <p:nvSpPr>
-          <p:cNvPr id="15" name="Text 12"/>
+          <p:cNvPr id="16" name="Text 12"/>
           <p:cNvSpPr/>
           <p:nvPr/>
         </p:nvSpPr>
@@ -7273,7 +7273,7 @@
       </p:sp>
       <p:sp>
         <p:nvSpPr>
-          <p:cNvPr id="16" name="Shape 13"/>
+          <p:cNvPr id="17" name="Shape 13"/>
           <p:cNvSpPr/>
           <p:nvPr/>
         </p:nvSpPr>
@@ -7295,7 +7295,7 @@
       </p:sp>
       <p:sp>
         <p:nvSpPr>
-          <p:cNvPr id="17" name="Text 14"/>
+          <p:cNvPr id="18" name="Text 14"/>
           <p:cNvSpPr/>
           <p:nvPr/>
         </p:nvSpPr>
@@ -7334,7 +7334,7 @@
       </p:sp>
       <p:sp>
         <p:nvSpPr>
-          <p:cNvPr id="18" name="Text 15"/>
+          <p:cNvPr id="19" name="Text 15"/>
           <p:cNvSpPr/>
           <p:nvPr/>
         </p:nvSpPr>
@@ -7373,7 +7373,7 @@
       </p:sp>
       <p:sp>
         <p:nvSpPr>
-          <p:cNvPr id="19" name="Shape 16"/>
+          <p:cNvPr id="20" name="Shape 16"/>
           <p:cNvSpPr/>
           <p:nvPr/>
         </p:nvSpPr>
@@ -7395,7 +7395,7 @@
       </p:sp>
       <p:sp>
         <p:nvSpPr>
-          <p:cNvPr id="20" name="Text 17"/>
+          <p:cNvPr id="21" name="Text 17"/>
           <p:cNvSpPr/>
           <p:nvPr/>
         </p:nvSpPr>
@@ -7429,7 +7429,7 @@
                 <a:ea typeface="Montserrat" pitchFamily="34" charset="-122"/>
                 <a:cs typeface="Montserrat" pitchFamily="34" charset="-120"/>
               </a:rPr>
-              <a:t>Правило: поріг N−1 при малих наборах, далі — відсоток із округленням угору. Safety-кейси не мають права падати ніколи.</a:t>
+              <a:t>Поріг N−1 на малих наборах, далі — відсоток. Safety-кейси не падають ніколи.</a:t>
             </a:r>
             <a:endParaRPr lang="en-US" sz="1300" dirty="0"/>
           </a:p>
@@ -7680,7 +7680,7 @@
       </p:pic>
       <p:sp>
         <p:nvSpPr>
-          <p:cNvPr id="7" name="Shape 4"/>
+          <p:cNvPr id="8" name="Shape 4"/>
           <p:cNvSpPr/>
           <p:nvPr/>
         </p:nvSpPr>
@@ -7707,7 +7707,7 @@
       </p:sp>
       <p:sp>
         <p:nvSpPr>
-          <p:cNvPr id="8" name="Text 5"/>
+          <p:cNvPr id="9" name="Text 5"/>
           <p:cNvSpPr/>
           <p:nvPr/>
         </p:nvSpPr>
@@ -7867,7 +7867,7 @@
       </p:sp>
       <p:sp>
         <p:nvSpPr>
-          <p:cNvPr id="9" name="Shape 6"/>
+          <p:cNvPr id="10" name="Shape 6"/>
           <p:cNvSpPr/>
           <p:nvPr/>
         </p:nvSpPr>
@@ -7889,7 +7889,7 @@
       </p:sp>
       <p:sp>
         <p:nvSpPr>
-          <p:cNvPr id="10" name="Text 7"/>
+          <p:cNvPr id="11" name="Text 7"/>
           <p:cNvSpPr/>
           <p:nvPr/>
         </p:nvSpPr>
@@ -7928,7 +7928,7 @@
       </p:sp>
       <p:sp>
         <p:nvSpPr>
-          <p:cNvPr id="11" name="Text 8"/>
+          <p:cNvPr id="12" name="Text 8"/>
           <p:cNvSpPr/>
           <p:nvPr/>
         </p:nvSpPr>
@@ -7970,7 +7970,7 @@
       </p:sp>
       <p:sp>
         <p:nvSpPr>
-          <p:cNvPr id="12" name="Shape 9"/>
+          <p:cNvPr id="13" name="Shape 9"/>
           <p:cNvSpPr/>
           <p:nvPr/>
         </p:nvSpPr>
@@ -7992,7 +7992,7 @@
       </p:sp>
       <p:sp>
         <p:nvSpPr>
-          <p:cNvPr id="13" name="Text 10"/>
+          <p:cNvPr id="14" name="Text 10"/>
           <p:cNvSpPr/>
           <p:nvPr/>
         </p:nvSpPr>
@@ -8031,7 +8031,7 @@
       </p:sp>
       <p:sp>
         <p:nvSpPr>
-          <p:cNvPr id="14" name="Text 11"/>
+          <p:cNvPr id="15" name="Text 11"/>
           <p:cNvSpPr/>
           <p:nvPr/>
         </p:nvSpPr>
@@ -8073,7 +8073,7 @@
       </p:sp>
       <p:sp>
         <p:nvSpPr>
-          <p:cNvPr id="15" name="Shape 12"/>
+          <p:cNvPr id="16" name="Shape 12"/>
           <p:cNvSpPr/>
           <p:nvPr/>
         </p:nvSpPr>
@@ -8095,7 +8095,7 @@
       </p:sp>
       <p:sp>
         <p:nvSpPr>
-          <p:cNvPr id="16" name="Text 13"/>
+          <p:cNvPr id="17" name="Text 13"/>
           <p:cNvSpPr/>
           <p:nvPr/>
         </p:nvSpPr>
@@ -8129,7 +8129,7 @@
                 <a:ea typeface="Montserrat" pitchFamily="34" charset="-122"/>
                 <a:cs typeface="Montserrat" pitchFamily="34" charset="-120"/>
               </a:rPr>
-              <a:t>Регресія, яку на уроці 2 ви ловили очима, тепер ловиться командою — і на тижні 6 ловитиметься автоматично на кожен PR.</a:t>
+              <a:t>Регресію з уроку 2 тепер ловить команда, а на тижні 6 — кожен PR.</a:t>
             </a:r>
             <a:endParaRPr lang="en-US" sz="1300" dirty="0"/>
           </a:p>
@@ -8137,7 +8137,7 @@
       </p:sp>
       <p:sp>
         <p:nvSpPr>
-          <p:cNvPr id="17" name="Text 14"/>
+          <p:cNvPr id="18" name="Text 14"/>
           <p:cNvSpPr/>
           <p:nvPr/>
         </p:nvSpPr>
@@ -8168,7 +8168,7 @@
                 <a:ea typeface="Montserrat" pitchFamily="34" charset="-122"/>
                 <a:cs typeface="Montserrat" pitchFamily="34" charset="-120"/>
               </a:rPr>
-              <a:t>Реальний ключ додасть недетермінізм: кейс, що мигає, — сигнал переписати очікування, а не перезапускати «поки не позеленіє».</a:t>
+              <a:t>Мигаючий кейс — сигнал переписати очікування, а не перезапускати прогін.</a:t>
             </a:r>
             <a:endParaRPr lang="en-US" sz="1150" dirty="0"/>
           </a:p>
@@ -8480,7 +8480,7 @@
       </p:pic>
       <p:sp>
         <p:nvSpPr>
-          <p:cNvPr id="9" name="Shape 6"/>
+          <p:cNvPr id="10" name="Shape 6"/>
           <p:cNvSpPr/>
           <p:nvPr/>
         </p:nvSpPr>
@@ -8502,7 +8502,7 @@
       </p:sp>
       <p:sp>
         <p:nvSpPr>
-          <p:cNvPr id="10" name="Text 7"/>
+          <p:cNvPr id="11" name="Text 7"/>
           <p:cNvSpPr/>
           <p:nvPr/>
         </p:nvSpPr>
@@ -8541,7 +8541,7 @@
       </p:sp>
       <p:sp>
         <p:nvSpPr>
-          <p:cNvPr id="11" name="Text 8"/>
+          <p:cNvPr id="12" name="Text 8"/>
           <p:cNvSpPr/>
           <p:nvPr/>
         </p:nvSpPr>
@@ -8583,7 +8583,7 @@
       </p:sp>
       <p:sp>
         <p:nvSpPr>
-          <p:cNvPr id="12" name="Shape 9"/>
+          <p:cNvPr id="13" name="Shape 9"/>
           <p:cNvSpPr/>
           <p:nvPr/>
         </p:nvSpPr>
@@ -8605,7 +8605,7 @@
       </p:sp>
       <p:sp>
         <p:nvSpPr>
-          <p:cNvPr id="13" name="Text 10"/>
+          <p:cNvPr id="14" name="Text 10"/>
           <p:cNvSpPr/>
           <p:nvPr/>
         </p:nvSpPr>
@@ -8644,7 +8644,7 @@
       </p:sp>
       <p:sp>
         <p:nvSpPr>
-          <p:cNvPr id="14" name="Text 11"/>
+          <p:cNvPr id="15" name="Text 11"/>
           <p:cNvSpPr/>
           <p:nvPr/>
         </p:nvSpPr>
@@ -8686,7 +8686,7 @@
       </p:sp>
       <p:sp>
         <p:nvSpPr>
-          <p:cNvPr id="15" name="Shape 12"/>
+          <p:cNvPr id="16" name="Shape 12"/>
           <p:cNvSpPr/>
           <p:nvPr/>
         </p:nvSpPr>
@@ -8708,7 +8708,7 @@
       </p:sp>
       <p:sp>
         <p:nvSpPr>
-          <p:cNvPr id="16" name="Text 13"/>
+          <p:cNvPr id="17" name="Text 13"/>
           <p:cNvSpPr/>
           <p:nvPr/>
         </p:nvSpPr>
@@ -8747,7 +8747,7 @@
       </p:sp>
       <p:sp>
         <p:nvSpPr>
-          <p:cNvPr id="17" name="Text 14"/>
+          <p:cNvPr id="18" name="Text 14"/>
           <p:cNvSpPr/>
           <p:nvPr/>
         </p:nvSpPr>
@@ -8789,7 +8789,7 @@
       </p:sp>
       <p:sp>
         <p:nvSpPr>
-          <p:cNvPr id="18" name="Shape 15"/>
+          <p:cNvPr id="19" name="Shape 15"/>
           <p:cNvSpPr/>
           <p:nvPr/>
         </p:nvSpPr>
@@ -8816,7 +8816,7 @@
       </p:sp>
       <p:sp>
         <p:nvSpPr>
-          <p:cNvPr id="19" name="Text 16"/>
+          <p:cNvPr id="20" name="Text 16"/>
           <p:cNvSpPr/>
           <p:nvPr/>
         </p:nvSpPr>
@@ -9022,7 +9022,7 @@
         </p:nvSpPr>
         <p:spPr>
           <a:xfrm>
-            <a:off x="1280160" y="1024128"/>
+            <a:off x="1280160" y="1193140"/>
             <a:ext cx="777240" cy="256032"/>
           </a:xfrm>
           <a:prstGeom prst="roundRect">
@@ -9044,7 +9044,7 @@
         </p:nvSpPr>
         <p:spPr>
           <a:xfrm>
-            <a:off x="1280160" y="1024128"/>
+            <a:off x="1280160" y="1193140"/>
             <a:ext cx="777240" cy="256032"/>
           </a:xfrm>
           <a:prstGeom prst="rect">
@@ -9101,7 +9101,7 @@
       </p:pic>
       <p:sp>
         <p:nvSpPr>
-          <p:cNvPr id="7" name="Shape 4"/>
+          <p:cNvPr id="8" name="Shape 4"/>
           <p:cNvSpPr/>
           <p:nvPr/>
         </p:nvSpPr>
@@ -9123,7 +9123,7 @@
       </p:sp>
       <p:sp>
         <p:nvSpPr>
-          <p:cNvPr id="8" name="Text 5"/>
+          <p:cNvPr id="9" name="Text 5"/>
           <p:cNvSpPr/>
           <p:nvPr/>
         </p:nvSpPr>
@@ -9162,7 +9162,7 @@
       </p:sp>
       <p:sp>
         <p:nvSpPr>
-          <p:cNvPr id="9" name="Shape 6"/>
+          <p:cNvPr id="10" name="Shape 6"/>
           <p:cNvSpPr/>
           <p:nvPr/>
         </p:nvSpPr>
@@ -9185,7 +9185,7 @@
       </p:sp>
       <p:sp>
         <p:nvSpPr>
-          <p:cNvPr id="10" name="Shape 7"/>
+          <p:cNvPr id="11" name="Shape 7"/>
           <p:cNvSpPr/>
           <p:nvPr/>
         </p:nvSpPr>
@@ -9205,7 +9205,7 @@
       </p:sp>
       <p:sp>
         <p:nvSpPr>
-          <p:cNvPr id="11" name="Shape 8"/>
+          <p:cNvPr id="12" name="Shape 8"/>
           <p:cNvSpPr/>
           <p:nvPr/>
         </p:nvSpPr>
@@ -9232,7 +9232,7 @@
       </p:sp>
       <p:sp>
         <p:nvSpPr>
-          <p:cNvPr id="12" name="Text 9"/>
+          <p:cNvPr id="13" name="Text 9"/>
           <p:cNvSpPr/>
           <p:nvPr/>
         </p:nvSpPr>
@@ -9271,7 +9271,7 @@
       </p:sp>
       <p:sp>
         <p:nvSpPr>
-          <p:cNvPr id="13" name="Shape 10"/>
+          <p:cNvPr id="14" name="Shape 10"/>
           <p:cNvSpPr/>
           <p:nvPr/>
         </p:nvSpPr>
@@ -9294,7 +9294,7 @@
       </p:sp>
       <p:sp>
         <p:nvSpPr>
-          <p:cNvPr id="14" name="Shape 11"/>
+          <p:cNvPr id="15" name="Shape 11"/>
           <p:cNvSpPr/>
           <p:nvPr/>
         </p:nvSpPr>
@@ -9314,7 +9314,7 @@
       </p:sp>
       <p:sp>
         <p:nvSpPr>
-          <p:cNvPr id="15" name="Shape 12"/>
+          <p:cNvPr id="16" name="Shape 12"/>
           <p:cNvSpPr/>
           <p:nvPr/>
         </p:nvSpPr>
@@ -9336,7 +9336,7 @@
       </p:sp>
       <p:sp>
         <p:nvSpPr>
-          <p:cNvPr id="16" name="Text 13"/>
+          <p:cNvPr id="17" name="Text 13"/>
           <p:cNvSpPr/>
           <p:nvPr/>
         </p:nvSpPr>
@@ -9375,7 +9375,7 @@
       </p:sp>
       <p:sp>
         <p:nvSpPr>
-          <p:cNvPr id="17" name="Shape 14"/>
+          <p:cNvPr id="18" name="Shape 14"/>
           <p:cNvSpPr/>
           <p:nvPr/>
         </p:nvSpPr>
@@ -9398,7 +9398,7 @@
       </p:sp>
       <p:sp>
         <p:nvSpPr>
-          <p:cNvPr id="18" name="Shape 15"/>
+          <p:cNvPr id="19" name="Shape 15"/>
           <p:cNvSpPr/>
           <p:nvPr/>
         </p:nvSpPr>
@@ -9418,7 +9418,7 @@
       </p:sp>
       <p:sp>
         <p:nvSpPr>
-          <p:cNvPr id="19" name="Shape 16"/>
+          <p:cNvPr id="20" name="Shape 16"/>
           <p:cNvSpPr/>
           <p:nvPr/>
         </p:nvSpPr>
@@ -9440,7 +9440,7 @@
       </p:sp>
       <p:sp>
         <p:nvSpPr>
-          <p:cNvPr id="20" name="Text 17"/>
+          <p:cNvPr id="21" name="Text 17"/>
           <p:cNvSpPr/>
           <p:nvPr/>
         </p:nvSpPr>
@@ -9479,7 +9479,7 @@
       </p:sp>
       <p:sp>
         <p:nvSpPr>
-          <p:cNvPr id="21" name="Shape 18"/>
+          <p:cNvPr id="22" name="Shape 18"/>
           <p:cNvSpPr/>
           <p:nvPr/>
         </p:nvSpPr>
@@ -9501,7 +9501,7 @@
       </p:sp>
       <p:sp>
         <p:nvSpPr>
-          <p:cNvPr id="22" name="Text 19"/>
+          <p:cNvPr id="23" name="Text 19"/>
           <p:cNvSpPr/>
           <p:nvPr/>
         </p:nvSpPr>
@@ -9540,7 +9540,7 @@
       </p:sp>
       <p:sp>
         <p:nvSpPr>
-          <p:cNvPr id="23" name="Text 20"/>
+          <p:cNvPr id="24" name="Text 20"/>
           <p:cNvSpPr/>
           <p:nvPr/>
         </p:nvSpPr>
@@ -9574,7 +9574,7 @@
                 <a:ea typeface="Montserrat" pitchFamily="34" charset="-122"/>
                 <a:cs typeface="Montserrat" pitchFamily="34" charset="-120"/>
               </a:rPr>
-              <a:t>Два тригери, за якими датасет росте сам собою: щойно щось полагодили — кейс; щойно за щось злякалися на демо — кейс. Обидва займають хвилину, поки все свіже.</a:t>
+              <a:t>Два тригери росту датасету: полагодили — кейс; злякалися на демо — кейс.</a:t>
             </a:r>
             <a:endParaRPr lang="en-US" sz="1300" dirty="0"/>
           </a:p>
@@ -9582,7 +9582,7 @@
       </p:sp>
       <p:sp>
         <p:nvSpPr>
-          <p:cNvPr id="24" name="Shape 21"/>
+          <p:cNvPr id="25" name="Shape 21"/>
           <p:cNvSpPr/>
           <p:nvPr/>
         </p:nvSpPr>
@@ -9604,7 +9604,7 @@
       </p:sp>
       <p:sp>
         <p:nvSpPr>
-          <p:cNvPr id="25" name="Text 22"/>
+          <p:cNvPr id="26" name="Text 22"/>
           <p:cNvSpPr/>
           <p:nvPr/>
         </p:nvSpPr>
@@ -9638,7 +9638,7 @@
                 <a:ea typeface="Montserrat" pitchFamily="34" charset="-122"/>
                 <a:cs typeface="Montserrat" pitchFamily="34" charset="-120"/>
               </a:rPr>
-              <a:t>Датасет, який не росте, старіє разом із продуктом: через квартал він перевіряє систему, якої вже немає.</a:t>
+              <a:t>Датасет, який не росте, через квартал перевіряє систему, якої вже немає.</a:t>
             </a:r>
             <a:endParaRPr lang="en-US" sz="1300" dirty="0"/>
           </a:p>
@@ -9850,7 +9850,7 @@
       </p:pic>
       <p:sp>
         <p:nvSpPr>
-          <p:cNvPr id="6" name="Shape 3"/>
+          <p:cNvPr id="7" name="Shape 3"/>
           <p:cNvSpPr/>
           <p:nvPr/>
         </p:nvSpPr>
@@ -9872,7 +9872,7 @@
       </p:sp>
       <p:sp>
         <p:nvSpPr>
-          <p:cNvPr id="7" name="Shape 4"/>
+          <p:cNvPr id="8" name="Shape 4"/>
           <p:cNvSpPr/>
           <p:nvPr/>
         </p:nvSpPr>
@@ -9892,7 +9892,7 @@
       </p:sp>
       <p:sp>
         <p:nvSpPr>
-          <p:cNvPr id="8" name="Text 5"/>
+          <p:cNvPr id="9" name="Text 5"/>
           <p:cNvSpPr/>
           <p:nvPr/>
         </p:nvSpPr>
@@ -9931,7 +9931,7 @@
       </p:sp>
       <p:sp>
         <p:nvSpPr>
-          <p:cNvPr id="9" name="Text 6"/>
+          <p:cNvPr id="10" name="Text 6"/>
           <p:cNvSpPr/>
           <p:nvPr/>
         </p:nvSpPr>
@@ -9970,7 +9970,7 @@
       </p:sp>
       <p:sp>
         <p:nvSpPr>
-          <p:cNvPr id="10" name="Text 7"/>
+          <p:cNvPr id="11" name="Text 7"/>
           <p:cNvSpPr/>
           <p:nvPr/>
         </p:nvSpPr>
@@ -10012,7 +10012,7 @@
       </p:sp>
       <p:sp>
         <p:nvSpPr>
-          <p:cNvPr id="11" name="Shape 8"/>
+          <p:cNvPr id="12" name="Shape 8"/>
           <p:cNvSpPr/>
           <p:nvPr/>
         </p:nvSpPr>
@@ -10034,7 +10034,7 @@
       </p:sp>
       <p:sp>
         <p:nvSpPr>
-          <p:cNvPr id="12" name="Shape 9"/>
+          <p:cNvPr id="13" name="Shape 9"/>
           <p:cNvSpPr/>
           <p:nvPr/>
         </p:nvSpPr>
@@ -10054,7 +10054,7 @@
       </p:sp>
       <p:sp>
         <p:nvSpPr>
-          <p:cNvPr id="13" name="Text 10"/>
+          <p:cNvPr id="14" name="Text 10"/>
           <p:cNvSpPr/>
           <p:nvPr/>
         </p:nvSpPr>
@@ -10093,7 +10093,7 @@
       </p:sp>
       <p:sp>
         <p:nvSpPr>
-          <p:cNvPr id="14" name="Text 11"/>
+          <p:cNvPr id="15" name="Text 11"/>
           <p:cNvSpPr/>
           <p:nvPr/>
         </p:nvSpPr>
@@ -10132,7 +10132,7 @@
       </p:sp>
       <p:sp>
         <p:nvSpPr>
-          <p:cNvPr id="15" name="Text 12"/>
+          <p:cNvPr id="16" name="Text 12"/>
           <p:cNvSpPr/>
           <p:nvPr/>
         </p:nvSpPr>
@@ -10174,7 +10174,7 @@
       </p:sp>
       <p:sp>
         <p:nvSpPr>
-          <p:cNvPr id="16" name="Shape 13"/>
+          <p:cNvPr id="17" name="Shape 13"/>
           <p:cNvSpPr/>
           <p:nvPr/>
         </p:nvSpPr>
@@ -10196,7 +10196,7 @@
       </p:sp>
       <p:sp>
         <p:nvSpPr>
-          <p:cNvPr id="17" name="Shape 14"/>
+          <p:cNvPr id="18" name="Shape 14"/>
           <p:cNvSpPr/>
           <p:nvPr/>
         </p:nvSpPr>
@@ -10216,7 +10216,7 @@
       </p:sp>
       <p:sp>
         <p:nvSpPr>
-          <p:cNvPr id="18" name="Text 15"/>
+          <p:cNvPr id="19" name="Text 15"/>
           <p:cNvSpPr/>
           <p:nvPr/>
         </p:nvSpPr>
@@ -10255,7 +10255,7 @@
       </p:sp>
       <p:sp>
         <p:nvSpPr>
-          <p:cNvPr id="19" name="Text 16"/>
+          <p:cNvPr id="20" name="Text 16"/>
           <p:cNvSpPr/>
           <p:nvPr/>
         </p:nvSpPr>
@@ -10294,7 +10294,7 @@
       </p:sp>
       <p:sp>
         <p:nvSpPr>
-          <p:cNvPr id="20" name="Text 17"/>
+          <p:cNvPr id="21" name="Text 17"/>
           <p:cNvSpPr/>
           <p:nvPr/>
         </p:nvSpPr>
@@ -10336,7 +10336,7 @@
       </p:sp>
       <p:sp>
         <p:nvSpPr>
-          <p:cNvPr id="21" name="Shape 18"/>
+          <p:cNvPr id="22" name="Shape 18"/>
           <p:cNvSpPr/>
           <p:nvPr/>
         </p:nvSpPr>
@@ -10358,7 +10358,7 @@
       </p:sp>
       <p:sp>
         <p:nvSpPr>
-          <p:cNvPr id="22" name="Shape 19"/>
+          <p:cNvPr id="23" name="Shape 19"/>
           <p:cNvSpPr/>
           <p:nvPr/>
         </p:nvSpPr>
@@ -10378,7 +10378,7 @@
       </p:sp>
       <p:sp>
         <p:nvSpPr>
-          <p:cNvPr id="23" name="Text 20"/>
+          <p:cNvPr id="24" name="Text 20"/>
           <p:cNvSpPr/>
           <p:nvPr/>
         </p:nvSpPr>
@@ -10417,7 +10417,7 @@
       </p:sp>
       <p:sp>
         <p:nvSpPr>
-          <p:cNvPr id="24" name="Text 21"/>
+          <p:cNvPr id="25" name="Text 21"/>
           <p:cNvSpPr/>
           <p:nvPr/>
         </p:nvSpPr>
@@ -10456,7 +10456,7 @@
       </p:sp>
       <p:sp>
         <p:nvSpPr>
-          <p:cNvPr id="25" name="Text 22"/>
+          <p:cNvPr id="26" name="Text 22"/>
           <p:cNvSpPr/>
           <p:nvPr/>
         </p:nvSpPr>
@@ -10498,7 +10498,7 @@
       </p:sp>
       <p:sp>
         <p:nvSpPr>
-          <p:cNvPr id="26" name="Shape 23"/>
+          <p:cNvPr id="27" name="Shape 23"/>
           <p:cNvSpPr/>
           <p:nvPr/>
         </p:nvSpPr>
@@ -10520,7 +10520,7 @@
       </p:sp>
       <p:sp>
         <p:nvSpPr>
-          <p:cNvPr id="27" name="Shape 24"/>
+          <p:cNvPr id="28" name="Shape 24"/>
           <p:cNvSpPr/>
           <p:nvPr/>
         </p:nvSpPr>
@@ -10540,7 +10540,7 @@
       </p:sp>
       <p:sp>
         <p:nvSpPr>
-          <p:cNvPr id="28" name="Text 25"/>
+          <p:cNvPr id="29" name="Text 25"/>
           <p:cNvSpPr/>
           <p:nvPr/>
         </p:nvSpPr>
@@ -10579,7 +10579,7 @@
       </p:sp>
       <p:sp>
         <p:nvSpPr>
-          <p:cNvPr id="29" name="Text 26"/>
+          <p:cNvPr id="30" name="Text 26"/>
           <p:cNvSpPr/>
           <p:nvPr/>
         </p:nvSpPr>
@@ -10618,7 +10618,7 @@
       </p:sp>
       <p:sp>
         <p:nvSpPr>
-          <p:cNvPr id="30" name="Text 27"/>
+          <p:cNvPr id="31" name="Text 27"/>
           <p:cNvSpPr/>
           <p:nvPr/>
         </p:nvSpPr>
@@ -10660,7 +10660,7 @@
       </p:sp>
       <p:sp>
         <p:nvSpPr>
-          <p:cNvPr id="31" name="Shape 28"/>
+          <p:cNvPr id="32" name="Shape 28"/>
           <p:cNvSpPr/>
           <p:nvPr/>
         </p:nvSpPr>
@@ -10682,7 +10682,7 @@
       </p:sp>
       <p:sp>
         <p:nvSpPr>
-          <p:cNvPr id="32" name="Text 29"/>
+          <p:cNvPr id="33" name="Text 29"/>
           <p:cNvSpPr/>
           <p:nvPr/>
         </p:nvSpPr>
@@ -10721,7 +10721,7 @@
       </p:sp>
       <p:sp>
         <p:nvSpPr>
-          <p:cNvPr id="33" name="Text 30"/>
+          <p:cNvPr id="34" name="Text 30"/>
           <p:cNvSpPr/>
           <p:nvPr/>
         </p:nvSpPr>
@@ -10967,7 +10967,7 @@
       </p:pic>
       <p:sp>
         <p:nvSpPr>
-          <p:cNvPr id="6" name="Shape 3"/>
+          <p:cNvPr id="7" name="Shape 3"/>
           <p:cNvSpPr/>
           <p:nvPr/>
         </p:nvSpPr>
@@ -10987,7 +10987,7 @@
       </p:sp>
       <p:sp>
         <p:nvSpPr>
-          <p:cNvPr id="7" name="Text 4"/>
+          <p:cNvPr id="8" name="Text 4"/>
           <p:cNvSpPr/>
           <p:nvPr/>
         </p:nvSpPr>
@@ -11026,7 +11026,7 @@
       </p:sp>
       <p:sp>
         <p:nvSpPr>
-          <p:cNvPr id="8" name="Text 5"/>
+          <p:cNvPr id="9" name="Text 5"/>
           <p:cNvSpPr/>
           <p:nvPr/>
         </p:nvSpPr>
@@ -11079,7 +11079,7 @@
       </p:sp>
       <p:sp>
         <p:nvSpPr>
-          <p:cNvPr id="9" name="Shape 6"/>
+          <p:cNvPr id="10" name="Shape 6"/>
           <p:cNvSpPr/>
           <p:nvPr/>
         </p:nvSpPr>
@@ -11099,7 +11099,7 @@
       </p:sp>
       <p:sp>
         <p:nvSpPr>
-          <p:cNvPr id="10" name="Text 7"/>
+          <p:cNvPr id="11" name="Text 7"/>
           <p:cNvSpPr/>
           <p:nvPr/>
         </p:nvSpPr>
@@ -11138,7 +11138,7 @@
       </p:sp>
       <p:sp>
         <p:nvSpPr>
-          <p:cNvPr id="11" name="Text 8"/>
+          <p:cNvPr id="12" name="Text 8"/>
           <p:cNvSpPr/>
           <p:nvPr/>
         </p:nvSpPr>
@@ -11191,7 +11191,7 @@
       </p:sp>
       <p:sp>
         <p:nvSpPr>
-          <p:cNvPr id="12" name="Shape 9"/>
+          <p:cNvPr id="13" name="Shape 9"/>
           <p:cNvSpPr/>
           <p:nvPr/>
         </p:nvSpPr>
@@ -11211,7 +11211,7 @@
       </p:sp>
       <p:sp>
         <p:nvSpPr>
-          <p:cNvPr id="13" name="Text 10"/>
+          <p:cNvPr id="14" name="Text 10"/>
           <p:cNvSpPr/>
           <p:nvPr/>
         </p:nvSpPr>
@@ -11250,7 +11250,7 @@
       </p:sp>
       <p:sp>
         <p:nvSpPr>
-          <p:cNvPr id="14" name="Text 11"/>
+          <p:cNvPr id="15" name="Text 11"/>
           <p:cNvSpPr/>
           <p:nvPr/>
         </p:nvSpPr>
@@ -11303,7 +11303,7 @@
       </p:sp>
       <p:sp>
         <p:nvSpPr>
-          <p:cNvPr id="15" name="Shape 12"/>
+          <p:cNvPr id="16" name="Shape 12"/>
           <p:cNvSpPr/>
           <p:nvPr/>
         </p:nvSpPr>
@@ -11323,7 +11323,7 @@
       </p:sp>
       <p:sp>
         <p:nvSpPr>
-          <p:cNvPr id="16" name="Text 13"/>
+          <p:cNvPr id="17" name="Text 13"/>
           <p:cNvSpPr/>
           <p:nvPr/>
         </p:nvSpPr>
@@ -11362,7 +11362,7 @@
       </p:sp>
       <p:sp>
         <p:nvSpPr>
-          <p:cNvPr id="17" name="Text 14"/>
+          <p:cNvPr id="18" name="Text 14"/>
           <p:cNvSpPr/>
           <p:nvPr/>
         </p:nvSpPr>
@@ -11415,7 +11415,7 @@
       </p:sp>
       <p:sp>
         <p:nvSpPr>
-          <p:cNvPr id="18" name="Shape 15"/>
+          <p:cNvPr id="19" name="Shape 15"/>
           <p:cNvSpPr/>
           <p:nvPr/>
         </p:nvSpPr>
@@ -11435,7 +11435,7 @@
       </p:sp>
       <p:sp>
         <p:nvSpPr>
-          <p:cNvPr id="19" name="Text 16"/>
+          <p:cNvPr id="20" name="Text 16"/>
           <p:cNvSpPr/>
           <p:nvPr/>
         </p:nvSpPr>
@@ -11474,7 +11474,7 @@
       </p:sp>
       <p:sp>
         <p:nvSpPr>
-          <p:cNvPr id="20" name="Text 17"/>
+          <p:cNvPr id="21" name="Text 17"/>
           <p:cNvSpPr/>
           <p:nvPr/>
         </p:nvSpPr>
@@ -11731,7 +11731,7 @@
       </p:pic>
       <p:sp>
         <p:nvSpPr>
-          <p:cNvPr id="6" name="Shape 3"/>
+          <p:cNvPr id="7" name="Shape 3"/>
           <p:cNvSpPr/>
           <p:nvPr/>
         </p:nvSpPr>
@@ -11753,7 +11753,7 @@
       </p:sp>
       <p:sp>
         <p:nvSpPr>
-          <p:cNvPr id="7" name="Text 4"/>
+          <p:cNvPr id="8" name="Text 4"/>
           <p:cNvSpPr/>
           <p:nvPr/>
         </p:nvSpPr>
@@ -11792,7 +11792,7 @@
       </p:sp>
       <p:sp>
         <p:nvSpPr>
-          <p:cNvPr id="8" name="Text 5"/>
+          <p:cNvPr id="9" name="Text 5"/>
           <p:cNvSpPr/>
           <p:nvPr/>
         </p:nvSpPr>
@@ -11834,7 +11834,7 @@
       </p:sp>
       <p:sp>
         <p:nvSpPr>
-          <p:cNvPr id="9" name="Shape 6"/>
+          <p:cNvPr id="10" name="Shape 6"/>
           <p:cNvSpPr/>
           <p:nvPr/>
         </p:nvSpPr>
@@ -11856,7 +11856,7 @@
       </p:sp>
       <p:sp>
         <p:nvSpPr>
-          <p:cNvPr id="10" name="Text 7"/>
+          <p:cNvPr id="11" name="Text 7"/>
           <p:cNvSpPr/>
           <p:nvPr/>
         </p:nvSpPr>
@@ -11895,7 +11895,7 @@
       </p:sp>
       <p:sp>
         <p:nvSpPr>
-          <p:cNvPr id="11" name="Text 8"/>
+          <p:cNvPr id="12" name="Text 8"/>
           <p:cNvSpPr/>
           <p:nvPr/>
         </p:nvSpPr>
@@ -11937,7 +11937,7 @@
       </p:sp>
       <p:sp>
         <p:nvSpPr>
-          <p:cNvPr id="12" name="Shape 9"/>
+          <p:cNvPr id="13" name="Shape 9"/>
           <p:cNvSpPr/>
           <p:nvPr/>
         </p:nvSpPr>
@@ -11964,7 +11964,7 @@
       </p:sp>
       <p:sp>
         <p:nvSpPr>
-          <p:cNvPr id="13" name="Text 10"/>
+          <p:cNvPr id="14" name="Text 10"/>
           <p:cNvSpPr/>
           <p:nvPr/>
         </p:nvSpPr>
@@ -12003,7 +12003,7 @@
       </p:sp>
       <p:sp>
         <p:nvSpPr>
-          <p:cNvPr id="14" name="Text 11"/>
+          <p:cNvPr id="15" name="Text 11"/>
           <p:cNvSpPr/>
           <p:nvPr/>
         </p:nvSpPr>
@@ -12045,7 +12045,7 @@
       </p:sp>
       <p:sp>
         <p:nvSpPr>
-          <p:cNvPr id="15" name="Shape 12"/>
+          <p:cNvPr id="16" name="Shape 12"/>
           <p:cNvSpPr/>
           <p:nvPr/>
         </p:nvSpPr>
@@ -12072,7 +12072,7 @@
       </p:sp>
       <p:sp>
         <p:nvSpPr>
-          <p:cNvPr id="16" name="Text 13"/>
+          <p:cNvPr id="17" name="Text 13"/>
           <p:cNvSpPr/>
           <p:nvPr/>
         </p:nvSpPr>
@@ -12360,7 +12360,7 @@
       </p:pic>
       <p:sp>
         <p:nvSpPr>
-          <p:cNvPr id="7" name="Shape 4"/>
+          <p:cNvPr id="8" name="Shape 4"/>
           <p:cNvSpPr/>
           <p:nvPr/>
         </p:nvSpPr>
@@ -12387,7 +12387,7 @@
       </p:sp>
       <p:sp>
         <p:nvSpPr>
-          <p:cNvPr id="8" name="Shape 5"/>
+          <p:cNvPr id="9" name="Shape 5"/>
           <p:cNvSpPr/>
           <p:nvPr/>
         </p:nvSpPr>
@@ -12407,7 +12407,7 @@
       </p:sp>
       <p:sp>
         <p:nvSpPr>
-          <p:cNvPr id="9" name="Text 6"/>
+          <p:cNvPr id="10" name="Text 6"/>
           <p:cNvSpPr/>
           <p:nvPr/>
         </p:nvSpPr>
@@ -12446,7 +12446,7 @@
       </p:sp>
       <p:sp>
         <p:nvSpPr>
-          <p:cNvPr id="10" name="Text 7"/>
+          <p:cNvPr id="11" name="Text 7"/>
           <p:cNvSpPr/>
           <p:nvPr/>
         </p:nvSpPr>
@@ -12485,7 +12485,7 @@
       </p:sp>
       <p:sp>
         <p:nvSpPr>
-          <p:cNvPr id="11" name="Text 8"/>
+          <p:cNvPr id="12" name="Text 8"/>
           <p:cNvSpPr/>
           <p:nvPr/>
         </p:nvSpPr>
@@ -12527,7 +12527,7 @@
       </p:sp>
       <p:sp>
         <p:nvSpPr>
-          <p:cNvPr id="12" name="Shape 9"/>
+          <p:cNvPr id="13" name="Shape 9"/>
           <p:cNvSpPr/>
           <p:nvPr/>
         </p:nvSpPr>
@@ -12554,7 +12554,7 @@
       </p:sp>
       <p:sp>
         <p:nvSpPr>
-          <p:cNvPr id="13" name="Shape 10"/>
+          <p:cNvPr id="14" name="Shape 10"/>
           <p:cNvSpPr/>
           <p:nvPr/>
         </p:nvSpPr>
@@ -12574,7 +12574,7 @@
       </p:sp>
       <p:sp>
         <p:nvSpPr>
-          <p:cNvPr id="14" name="Text 11"/>
+          <p:cNvPr id="15" name="Text 11"/>
           <p:cNvSpPr/>
           <p:nvPr/>
         </p:nvSpPr>
@@ -12613,7 +12613,7 @@
       </p:sp>
       <p:sp>
         <p:nvSpPr>
-          <p:cNvPr id="15" name="Text 12"/>
+          <p:cNvPr id="16" name="Text 12"/>
           <p:cNvSpPr/>
           <p:nvPr/>
         </p:nvSpPr>
@@ -12652,7 +12652,7 @@
       </p:sp>
       <p:sp>
         <p:nvSpPr>
-          <p:cNvPr id="16" name="Text 13"/>
+          <p:cNvPr id="17" name="Text 13"/>
           <p:cNvSpPr/>
           <p:nvPr/>
         </p:nvSpPr>
@@ -12694,7 +12694,7 @@
       </p:sp>
       <p:sp>
         <p:nvSpPr>
-          <p:cNvPr id="17" name="Shape 14"/>
+          <p:cNvPr id="18" name="Shape 14"/>
           <p:cNvSpPr/>
           <p:nvPr/>
         </p:nvSpPr>
@@ -12721,7 +12721,7 @@
       </p:sp>
       <p:sp>
         <p:nvSpPr>
-          <p:cNvPr id="18" name="Shape 15"/>
+          <p:cNvPr id="19" name="Shape 15"/>
           <p:cNvSpPr/>
           <p:nvPr/>
         </p:nvSpPr>
@@ -12741,7 +12741,7 @@
       </p:sp>
       <p:sp>
         <p:nvSpPr>
-          <p:cNvPr id="19" name="Text 16"/>
+          <p:cNvPr id="20" name="Text 16"/>
           <p:cNvSpPr/>
           <p:nvPr/>
         </p:nvSpPr>
@@ -12780,7 +12780,7 @@
       </p:sp>
       <p:sp>
         <p:nvSpPr>
-          <p:cNvPr id="20" name="Text 17"/>
+          <p:cNvPr id="21" name="Text 17"/>
           <p:cNvSpPr/>
           <p:nvPr/>
         </p:nvSpPr>
@@ -12819,7 +12819,7 @@
       </p:sp>
       <p:sp>
         <p:nvSpPr>
-          <p:cNvPr id="21" name="Text 18"/>
+          <p:cNvPr id="22" name="Text 18"/>
           <p:cNvSpPr/>
           <p:nvPr/>
         </p:nvSpPr>
@@ -12861,7 +12861,7 @@
       </p:sp>
       <p:sp>
         <p:nvSpPr>
-          <p:cNvPr id="22" name="Shape 19"/>
+          <p:cNvPr id="23" name="Shape 19"/>
           <p:cNvSpPr/>
           <p:nvPr/>
         </p:nvSpPr>
@@ -12888,7 +12888,7 @@
       </p:sp>
       <p:sp>
         <p:nvSpPr>
-          <p:cNvPr id="23" name="Shape 20"/>
+          <p:cNvPr id="24" name="Shape 20"/>
           <p:cNvSpPr/>
           <p:nvPr/>
         </p:nvSpPr>
@@ -12908,7 +12908,7 @@
       </p:sp>
       <p:sp>
         <p:nvSpPr>
-          <p:cNvPr id="24" name="Text 21"/>
+          <p:cNvPr id="25" name="Text 21"/>
           <p:cNvSpPr/>
           <p:nvPr/>
         </p:nvSpPr>
@@ -12947,7 +12947,7 @@
       </p:sp>
       <p:sp>
         <p:nvSpPr>
-          <p:cNvPr id="25" name="Text 22"/>
+          <p:cNvPr id="26" name="Text 22"/>
           <p:cNvSpPr/>
           <p:nvPr/>
         </p:nvSpPr>
@@ -12986,7 +12986,7 @@
       </p:sp>
       <p:sp>
         <p:nvSpPr>
-          <p:cNvPr id="26" name="Text 23"/>
+          <p:cNvPr id="27" name="Text 23"/>
           <p:cNvSpPr/>
           <p:nvPr/>
         </p:nvSpPr>
@@ -13028,7 +13028,7 @@
       </p:sp>
       <p:sp>
         <p:nvSpPr>
-          <p:cNvPr id="27" name="Shape 24"/>
+          <p:cNvPr id="28" name="Shape 24"/>
           <p:cNvSpPr/>
           <p:nvPr/>
         </p:nvSpPr>
@@ -13055,7 +13055,7 @@
       </p:sp>
       <p:sp>
         <p:nvSpPr>
-          <p:cNvPr id="28" name="Shape 25"/>
+          <p:cNvPr id="29" name="Shape 25"/>
           <p:cNvSpPr/>
           <p:nvPr/>
         </p:nvSpPr>
@@ -13075,7 +13075,7 @@
       </p:sp>
       <p:sp>
         <p:nvSpPr>
-          <p:cNvPr id="29" name="Text 26"/>
+          <p:cNvPr id="30" name="Text 26"/>
           <p:cNvSpPr/>
           <p:nvPr/>
         </p:nvSpPr>
@@ -13114,7 +13114,7 @@
       </p:sp>
       <p:sp>
         <p:nvSpPr>
-          <p:cNvPr id="30" name="Text 27"/>
+          <p:cNvPr id="31" name="Text 27"/>
           <p:cNvSpPr/>
           <p:nvPr/>
         </p:nvSpPr>
@@ -13153,7 +13153,7 @@
       </p:sp>
       <p:sp>
         <p:nvSpPr>
-          <p:cNvPr id="31" name="Text 28"/>
+          <p:cNvPr id="32" name="Text 28"/>
           <p:cNvSpPr/>
           <p:nvPr/>
         </p:nvSpPr>
@@ -13399,7 +13399,7 @@
       </p:pic>
       <p:sp>
         <p:nvSpPr>
-          <p:cNvPr id="6" name="Shape 3"/>
+          <p:cNvPr id="7" name="Shape 3"/>
           <p:cNvSpPr/>
           <p:nvPr/>
         </p:nvSpPr>
@@ -13426,7 +13426,7 @@
       </p:sp>
       <p:sp>
         <p:nvSpPr>
-          <p:cNvPr id="7" name="Shape 4"/>
+          <p:cNvPr id="8" name="Shape 4"/>
           <p:cNvSpPr/>
           <p:nvPr/>
         </p:nvSpPr>
@@ -13453,76 +13453,77 @@
       </p:sp>
       <p:sp>
         <p:nvSpPr>
-          <p:cNvPr id="8" name="Text 5"/>
-          <p:cNvSpPr/>
-          <p:nvPr/>
-        </p:nvSpPr>
-        <p:spPr>
-          <a:xfrm>
-            <a:off x="978408" y="2157984"/>
-            <a:ext cx="256032" cy="256032"/>
-          </a:xfrm>
-          <a:prstGeom prst="rect">
-            <a:avLst/>
-          </a:prstGeom>
-          <a:noFill/>
-          <a:ln/>
-        </p:spPr>
-        <p:txBody>
-          <a:bodyPr wrap="square" lIns="0" tIns="0" rIns="0" bIns="0" rtlCol="0" anchor="ctr"/>
-          <a:lstStyle/>
-          <a:p>
-            <a:pPr algn="ctr" indent="0" marL="0">
-              <a:buNone/>
-            </a:pPr>
-            <a:r>
-              <a:rPr lang="en-US" sz="1000" b="1" dirty="0">
-                <a:solidFill>
-                  <a:srgbClr val="5A05F4"/>
+          <p:cNvPr id="9" name="Shape 5"/>
+          <p:cNvSpPr/>
+          <p:nvPr/>
+        </p:nvSpPr>
+        <p:spPr>
+          <a:xfrm rot="2700000">
+            <a:off x="1041227" y="2297430"/>
+            <a:ext cx="58156" cy="27432"/>
+          </a:xfrm>
+          <a:prstGeom prst="rect">
+            <a:avLst/>
+          </a:prstGeom>
+          <a:solidFill>
+            <a:srgbClr val="5A05F4"/>
+          </a:solidFill>
+          <a:ln/>
+        </p:spPr>
+      </p:sp>
+      <p:sp>
+        <p:nvSpPr>
+          <p:cNvPr id="10" name="Shape 6"/>
+          <p:cNvSpPr/>
+          <p:nvPr/>
+        </p:nvSpPr>
+        <p:spPr>
+          <a:xfrm rot="-3000000">
+            <a:off x="1069025" y="2271370"/>
+            <a:ext cx="121432" cy="27432"/>
+          </a:xfrm>
+          <a:prstGeom prst="rect">
+            <a:avLst/>
+          </a:prstGeom>
+          <a:solidFill>
+            <a:srgbClr val="5A05F4"/>
+          </a:solidFill>
+          <a:ln/>
+        </p:spPr>
+      </p:sp>
+      <p:sp>
+        <p:nvSpPr>
+          <p:cNvPr id="11" name="Text 7"/>
+          <p:cNvSpPr/>
+          <p:nvPr/>
+        </p:nvSpPr>
+        <p:spPr>
+          <a:xfrm>
+            <a:off x="1362456" y="2103120"/>
+            <a:ext cx="4617720" cy="384048"/>
+          </a:xfrm>
+          <a:prstGeom prst="rect">
+            <a:avLst/>
+          </a:prstGeom>
+          <a:noFill/>
+          <a:ln/>
+        </p:spPr>
+        <p:txBody>
+          <a:bodyPr wrap="square" lIns="0" tIns="0" rIns="0" bIns="0" rtlCol="0" anchor="ctr"/>
+          <a:lstStyle/>
+          <a:p>
+            <a:pPr indent="0" marL="0">
+              <a:buNone/>
+            </a:pPr>
+            <a:r>
+              <a:rPr lang="en-US" sz="1250" dirty="0">
+                <a:solidFill>
+                  <a:srgbClr val="111318"/>
                 </a:solidFill>
                 <a:latin typeface="Montserrat" pitchFamily="34" charset="0"/>
                 <a:ea typeface="Montserrat" pitchFamily="34" charset="-122"/>
                 <a:cs typeface="Montserrat" pitchFamily="34" charset="-120"/>
               </a:rPr>
-              <a:t>✓</a:t>
-            </a:r>
-            <a:endParaRPr lang="en-US" sz="1000" dirty="0"/>
-          </a:p>
-        </p:txBody>
-      </p:sp>
-      <p:sp>
-        <p:nvSpPr>
-          <p:cNvPr id="9" name="Text 6"/>
-          <p:cNvSpPr/>
-          <p:nvPr/>
-        </p:nvSpPr>
-        <p:spPr>
-          <a:xfrm>
-            <a:off x="1362456" y="2103120"/>
-            <a:ext cx="4617720" cy="384048"/>
-          </a:xfrm>
-          <a:prstGeom prst="rect">
-            <a:avLst/>
-          </a:prstGeom>
-          <a:noFill/>
-          <a:ln/>
-        </p:spPr>
-        <p:txBody>
-          <a:bodyPr wrap="square" lIns="0" tIns="0" rIns="0" bIns="0" rtlCol="0" anchor="ctr"/>
-          <a:lstStyle/>
-          <a:p>
-            <a:pPr indent="0" marL="0">
-              <a:buNone/>
-            </a:pPr>
-            <a:r>
-              <a:rPr lang="en-US" sz="1250" dirty="0">
-                <a:solidFill>
-                  <a:srgbClr val="111318"/>
-                </a:solidFill>
-                <a:latin typeface="Montserrat" pitchFamily="34" charset="0"/>
-                <a:ea typeface="Montserrat" pitchFamily="34" charset="-122"/>
-                <a:cs typeface="Montserrat" pitchFamily="34" charset="-120"/>
-              </a:rPr>
               <a:t>прогін дає число і правильний exit code</a:t>
             </a:r>
             <a:endParaRPr lang="en-US" sz="1250" dirty="0"/>
@@ -13531,7 +13532,7 @@
       </p:sp>
       <p:sp>
         <p:nvSpPr>
-          <p:cNvPr id="10" name="Shape 7"/>
+          <p:cNvPr id="12" name="Shape 8"/>
           <p:cNvSpPr/>
           <p:nvPr/>
         </p:nvSpPr>
@@ -13558,76 +13559,77 @@
       </p:sp>
       <p:sp>
         <p:nvSpPr>
-          <p:cNvPr id="11" name="Text 8"/>
-          <p:cNvSpPr/>
-          <p:nvPr/>
-        </p:nvSpPr>
-        <p:spPr>
-          <a:xfrm>
-            <a:off x="978408" y="2724912"/>
-            <a:ext cx="256032" cy="256032"/>
-          </a:xfrm>
-          <a:prstGeom prst="rect">
-            <a:avLst/>
-          </a:prstGeom>
-          <a:noFill/>
-          <a:ln/>
-        </p:spPr>
-        <p:txBody>
-          <a:bodyPr wrap="square" lIns="0" tIns="0" rIns="0" bIns="0" rtlCol="0" anchor="ctr"/>
-          <a:lstStyle/>
-          <a:p>
-            <a:pPr algn="ctr" indent="0" marL="0">
-              <a:buNone/>
-            </a:pPr>
-            <a:r>
-              <a:rPr lang="en-US" sz="1000" b="1" dirty="0">
-                <a:solidFill>
-                  <a:srgbClr val="5A05F4"/>
+          <p:cNvPr id="13" name="Shape 9"/>
+          <p:cNvSpPr/>
+          <p:nvPr/>
+        </p:nvSpPr>
+        <p:spPr>
+          <a:xfrm rot="2700000">
+            <a:off x="1041227" y="2864358"/>
+            <a:ext cx="58156" cy="27432"/>
+          </a:xfrm>
+          <a:prstGeom prst="rect">
+            <a:avLst/>
+          </a:prstGeom>
+          <a:solidFill>
+            <a:srgbClr val="5A05F4"/>
+          </a:solidFill>
+          <a:ln/>
+        </p:spPr>
+      </p:sp>
+      <p:sp>
+        <p:nvSpPr>
+          <p:cNvPr id="14" name="Shape 10"/>
+          <p:cNvSpPr/>
+          <p:nvPr/>
+        </p:nvSpPr>
+        <p:spPr>
+          <a:xfrm rot="-3000000">
+            <a:off x="1069025" y="2838298"/>
+            <a:ext cx="121432" cy="27432"/>
+          </a:xfrm>
+          <a:prstGeom prst="rect">
+            <a:avLst/>
+          </a:prstGeom>
+          <a:solidFill>
+            <a:srgbClr val="5A05F4"/>
+          </a:solidFill>
+          <a:ln/>
+        </p:spPr>
+      </p:sp>
+      <p:sp>
+        <p:nvSpPr>
+          <p:cNvPr id="15" name="Text 11"/>
+          <p:cNvSpPr/>
+          <p:nvPr/>
+        </p:nvSpPr>
+        <p:spPr>
+          <a:xfrm>
+            <a:off x="1362456" y="2670048"/>
+            <a:ext cx="4617720" cy="384048"/>
+          </a:xfrm>
+          <a:prstGeom prst="rect">
+            <a:avLst/>
+          </a:prstGeom>
+          <a:noFill/>
+          <a:ln/>
+        </p:spPr>
+        <p:txBody>
+          <a:bodyPr wrap="square" lIns="0" tIns="0" rIns="0" bIns="0" rtlCol="0" anchor="ctr"/>
+          <a:lstStyle/>
+          <a:p>
+            <a:pPr indent="0" marL="0">
+              <a:buNone/>
+            </a:pPr>
+            <a:r>
+              <a:rPr lang="en-US" sz="1250" dirty="0">
+                <a:solidFill>
+                  <a:srgbClr val="111318"/>
                 </a:solidFill>
                 <a:latin typeface="Montserrat" pitchFamily="34" charset="0"/>
                 <a:ea typeface="Montserrat" pitchFamily="34" charset="-122"/>
                 <a:cs typeface="Montserrat" pitchFamily="34" charset="-120"/>
               </a:rPr>
-              <a:t>✓</a:t>
-            </a:r>
-            <a:endParaRPr lang="en-US" sz="1000" dirty="0"/>
-          </a:p>
-        </p:txBody>
-      </p:sp>
-      <p:sp>
-        <p:nvSpPr>
-          <p:cNvPr id="12" name="Text 9"/>
-          <p:cNvSpPr/>
-          <p:nvPr/>
-        </p:nvSpPr>
-        <p:spPr>
-          <a:xfrm>
-            <a:off x="1362456" y="2670048"/>
-            <a:ext cx="4617720" cy="384048"/>
-          </a:xfrm>
-          <a:prstGeom prst="rect">
-            <a:avLst/>
-          </a:prstGeom>
-          <a:noFill/>
-          <a:ln/>
-        </p:spPr>
-        <p:txBody>
-          <a:bodyPr wrap="square" lIns="0" tIns="0" rIns="0" bIns="0" rtlCol="0" anchor="ctr"/>
-          <a:lstStyle/>
-          <a:p>
-            <a:pPr indent="0" marL="0">
-              <a:buNone/>
-            </a:pPr>
-            <a:r>
-              <a:rPr lang="en-US" sz="1250" dirty="0">
-                <a:solidFill>
-                  <a:srgbClr val="111318"/>
-                </a:solidFill>
-                <a:latin typeface="Montserrat" pitchFamily="34" charset="0"/>
-                <a:ea typeface="Montserrat" pitchFamily="34" charset="-122"/>
-                <a:cs typeface="Montserrat" pitchFamily="34" charset="-120"/>
-              </a:rPr>
               <a:t>rollback промпта робить прогін червоним</a:t>
             </a:r>
             <a:endParaRPr lang="en-US" sz="1250" dirty="0"/>
@@ -13636,7 +13638,7 @@
       </p:sp>
       <p:sp>
         <p:nvSpPr>
-          <p:cNvPr id="13" name="Shape 10"/>
+          <p:cNvPr id="16" name="Shape 12"/>
           <p:cNvSpPr/>
           <p:nvPr/>
         </p:nvSpPr>
@@ -13663,76 +13665,77 @@
       </p:sp>
       <p:sp>
         <p:nvSpPr>
-          <p:cNvPr id="14" name="Text 11"/>
-          <p:cNvSpPr/>
-          <p:nvPr/>
-        </p:nvSpPr>
-        <p:spPr>
-          <a:xfrm>
-            <a:off x="978408" y="3291840"/>
-            <a:ext cx="256032" cy="256032"/>
-          </a:xfrm>
-          <a:prstGeom prst="rect">
-            <a:avLst/>
-          </a:prstGeom>
-          <a:noFill/>
-          <a:ln/>
-        </p:spPr>
-        <p:txBody>
-          <a:bodyPr wrap="square" lIns="0" tIns="0" rIns="0" bIns="0" rtlCol="0" anchor="ctr"/>
-          <a:lstStyle/>
-          <a:p>
-            <a:pPr algn="ctr" indent="0" marL="0">
-              <a:buNone/>
-            </a:pPr>
-            <a:r>
-              <a:rPr lang="en-US" sz="1000" b="1" dirty="0">
-                <a:solidFill>
-                  <a:srgbClr val="5A05F4"/>
+          <p:cNvPr id="17" name="Shape 13"/>
+          <p:cNvSpPr/>
+          <p:nvPr/>
+        </p:nvSpPr>
+        <p:spPr>
+          <a:xfrm rot="2700000">
+            <a:off x="1041227" y="3431286"/>
+            <a:ext cx="58156" cy="27432"/>
+          </a:xfrm>
+          <a:prstGeom prst="rect">
+            <a:avLst/>
+          </a:prstGeom>
+          <a:solidFill>
+            <a:srgbClr val="5A05F4"/>
+          </a:solidFill>
+          <a:ln/>
+        </p:spPr>
+      </p:sp>
+      <p:sp>
+        <p:nvSpPr>
+          <p:cNvPr id="18" name="Shape 14"/>
+          <p:cNvSpPr/>
+          <p:nvPr/>
+        </p:nvSpPr>
+        <p:spPr>
+          <a:xfrm rot="-3000000">
+            <a:off x="1069025" y="3405226"/>
+            <a:ext cx="121432" cy="27432"/>
+          </a:xfrm>
+          <a:prstGeom prst="rect">
+            <a:avLst/>
+          </a:prstGeom>
+          <a:solidFill>
+            <a:srgbClr val="5A05F4"/>
+          </a:solidFill>
+          <a:ln/>
+        </p:spPr>
+      </p:sp>
+      <p:sp>
+        <p:nvSpPr>
+          <p:cNvPr id="19" name="Text 15"/>
+          <p:cNvSpPr/>
+          <p:nvPr/>
+        </p:nvSpPr>
+        <p:spPr>
+          <a:xfrm>
+            <a:off x="1362456" y="3236976"/>
+            <a:ext cx="4617720" cy="384048"/>
+          </a:xfrm>
+          <a:prstGeom prst="rect">
+            <a:avLst/>
+          </a:prstGeom>
+          <a:noFill/>
+          <a:ln/>
+        </p:spPr>
+        <p:txBody>
+          <a:bodyPr wrap="square" lIns="0" tIns="0" rIns="0" bIns="0" rtlCol="0" anchor="ctr"/>
+          <a:lstStyle/>
+          <a:p>
+            <a:pPr indent="0" marL="0">
+              <a:buNone/>
+            </a:pPr>
+            <a:r>
+              <a:rPr lang="en-US" sz="1250" dirty="0">
+                <a:solidFill>
+                  <a:srgbClr val="111318"/>
                 </a:solidFill>
                 <a:latin typeface="Montserrat" pitchFamily="34" charset="0"/>
                 <a:ea typeface="Montserrat" pitchFamily="34" charset="-122"/>
                 <a:cs typeface="Montserrat" pitchFamily="34" charset="-120"/>
               </a:rPr>
-              <a:t>✓</a:t>
-            </a:r>
-            <a:endParaRPr lang="en-US" sz="1000" dirty="0"/>
-          </a:p>
-        </p:txBody>
-      </p:sp>
-      <p:sp>
-        <p:nvSpPr>
-          <p:cNvPr id="15" name="Text 12"/>
-          <p:cNvSpPr/>
-          <p:nvPr/>
-        </p:nvSpPr>
-        <p:spPr>
-          <a:xfrm>
-            <a:off x="1362456" y="3236976"/>
-            <a:ext cx="4617720" cy="384048"/>
-          </a:xfrm>
-          <a:prstGeom prst="rect">
-            <a:avLst/>
-          </a:prstGeom>
-          <a:noFill/>
-          <a:ln/>
-        </p:spPr>
-        <p:txBody>
-          <a:bodyPr wrap="square" lIns="0" tIns="0" rIns="0" bIns="0" rtlCol="0" anchor="ctr"/>
-          <a:lstStyle/>
-          <a:p>
-            <a:pPr indent="0" marL="0">
-              <a:buNone/>
-            </a:pPr>
-            <a:r>
-              <a:rPr lang="en-US" sz="1250" dirty="0">
-                <a:solidFill>
-                  <a:srgbClr val="111318"/>
-                </a:solidFill>
-                <a:latin typeface="Montserrat" pitchFamily="34" charset="0"/>
-                <a:ea typeface="Montserrat" pitchFamily="34" charset="-122"/>
-                <a:cs typeface="Montserrat" pitchFamily="34" charset="-120"/>
-              </a:rPr>
               <a:t>у датасеті є мої власні кейси</a:t>
             </a:r>
             <a:endParaRPr lang="en-US" sz="1250" dirty="0"/>
@@ -13741,7 +13744,7 @@
       </p:sp>
       <p:sp>
         <p:nvSpPr>
-          <p:cNvPr id="16" name="Shape 13"/>
+          <p:cNvPr id="20" name="Shape 16"/>
           <p:cNvSpPr/>
           <p:nvPr/>
         </p:nvSpPr>
@@ -13768,76 +13771,77 @@
       </p:sp>
       <p:sp>
         <p:nvSpPr>
-          <p:cNvPr id="17" name="Text 14"/>
-          <p:cNvSpPr/>
-          <p:nvPr/>
-        </p:nvSpPr>
-        <p:spPr>
-          <a:xfrm>
-            <a:off x="6144768" y="2157984"/>
-            <a:ext cx="256032" cy="256032"/>
-          </a:xfrm>
-          <a:prstGeom prst="rect">
-            <a:avLst/>
-          </a:prstGeom>
-          <a:noFill/>
-          <a:ln/>
-        </p:spPr>
-        <p:txBody>
-          <a:bodyPr wrap="square" lIns="0" tIns="0" rIns="0" bIns="0" rtlCol="0" anchor="ctr"/>
-          <a:lstStyle/>
-          <a:p>
-            <a:pPr algn="ctr" indent="0" marL="0">
-              <a:buNone/>
-            </a:pPr>
-            <a:r>
-              <a:rPr lang="en-US" sz="1000" b="1" dirty="0">
-                <a:solidFill>
-                  <a:srgbClr val="5A05F4"/>
+          <p:cNvPr id="21" name="Shape 17"/>
+          <p:cNvSpPr/>
+          <p:nvPr/>
+        </p:nvSpPr>
+        <p:spPr>
+          <a:xfrm rot="2700000">
+            <a:off x="6207587" y="2297430"/>
+            <a:ext cx="58156" cy="27432"/>
+          </a:xfrm>
+          <a:prstGeom prst="rect">
+            <a:avLst/>
+          </a:prstGeom>
+          <a:solidFill>
+            <a:srgbClr val="5A05F4"/>
+          </a:solidFill>
+          <a:ln/>
+        </p:spPr>
+      </p:sp>
+      <p:sp>
+        <p:nvSpPr>
+          <p:cNvPr id="22" name="Shape 18"/>
+          <p:cNvSpPr/>
+          <p:nvPr/>
+        </p:nvSpPr>
+        <p:spPr>
+          <a:xfrm rot="-3000000">
+            <a:off x="6235385" y="2271370"/>
+            <a:ext cx="121432" cy="27432"/>
+          </a:xfrm>
+          <a:prstGeom prst="rect">
+            <a:avLst/>
+          </a:prstGeom>
+          <a:solidFill>
+            <a:srgbClr val="5A05F4"/>
+          </a:solidFill>
+          <a:ln/>
+        </p:spPr>
+      </p:sp>
+      <p:sp>
+        <p:nvSpPr>
+          <p:cNvPr id="23" name="Text 19"/>
+          <p:cNvSpPr/>
+          <p:nvPr/>
+        </p:nvSpPr>
+        <p:spPr>
+          <a:xfrm>
+            <a:off x="6528816" y="2103120"/>
+            <a:ext cx="4617720" cy="384048"/>
+          </a:xfrm>
+          <a:prstGeom prst="rect">
+            <a:avLst/>
+          </a:prstGeom>
+          <a:noFill/>
+          <a:ln/>
+        </p:spPr>
+        <p:txBody>
+          <a:bodyPr wrap="square" lIns="0" tIns="0" rIns="0" bIns="0" rtlCol="0" anchor="ctr"/>
+          <a:lstStyle/>
+          <a:p>
+            <a:pPr indent="0" marL="0">
+              <a:buNone/>
+            </a:pPr>
+            <a:r>
+              <a:rPr lang="en-US" sz="1250" dirty="0">
+                <a:solidFill>
+                  <a:srgbClr val="111318"/>
                 </a:solidFill>
                 <a:latin typeface="Montserrat" pitchFamily="34" charset="0"/>
                 <a:ea typeface="Montserrat" pitchFamily="34" charset="-122"/>
                 <a:cs typeface="Montserrat" pitchFamily="34" charset="-120"/>
               </a:rPr>
-              <a:t>✓</a:t>
-            </a:r>
-            <a:endParaRPr lang="en-US" sz="1000" dirty="0"/>
-          </a:p>
-        </p:txBody>
-      </p:sp>
-      <p:sp>
-        <p:nvSpPr>
-          <p:cNvPr id="18" name="Text 15"/>
-          <p:cNvSpPr/>
-          <p:nvPr/>
-        </p:nvSpPr>
-        <p:spPr>
-          <a:xfrm>
-            <a:off x="6528816" y="2103120"/>
-            <a:ext cx="4617720" cy="384048"/>
-          </a:xfrm>
-          <a:prstGeom prst="rect">
-            <a:avLst/>
-          </a:prstGeom>
-          <a:noFill/>
-          <a:ln/>
-        </p:spPr>
-        <p:txBody>
-          <a:bodyPr wrap="square" lIns="0" tIns="0" rIns="0" bIns="0" rtlCol="0" anchor="ctr"/>
-          <a:lstStyle/>
-          <a:p>
-            <a:pPr indent="0" marL="0">
-              <a:buNone/>
-            </a:pPr>
-            <a:r>
-              <a:rPr lang="en-US" sz="1250" dirty="0">
-                <a:solidFill>
-                  <a:srgbClr val="111318"/>
-                </a:solidFill>
-                <a:latin typeface="Montserrat" pitchFamily="34" charset="0"/>
-                <a:ea typeface="Montserrat" pitchFamily="34" charset="-122"/>
-                <a:cs typeface="Montserrat" pitchFamily="34" charset="-120"/>
-              </a:rPr>
               <a:t>прогін із __fail_503 дає 0 пройдених</a:t>
             </a:r>
             <a:endParaRPr lang="en-US" sz="1250" dirty="0"/>
@@ -13846,7 +13850,7 @@
       </p:sp>
       <p:sp>
         <p:nvSpPr>
-          <p:cNvPr id="19" name="Shape 16"/>
+          <p:cNvPr id="24" name="Shape 20"/>
           <p:cNvSpPr/>
           <p:nvPr/>
         </p:nvSpPr>
@@ -13873,76 +13877,77 @@
       </p:sp>
       <p:sp>
         <p:nvSpPr>
-          <p:cNvPr id="20" name="Text 17"/>
-          <p:cNvSpPr/>
-          <p:nvPr/>
-        </p:nvSpPr>
-        <p:spPr>
-          <a:xfrm>
-            <a:off x="6144768" y="2724912"/>
-            <a:ext cx="256032" cy="256032"/>
-          </a:xfrm>
-          <a:prstGeom prst="rect">
-            <a:avLst/>
-          </a:prstGeom>
-          <a:noFill/>
-          <a:ln/>
-        </p:spPr>
-        <p:txBody>
-          <a:bodyPr wrap="square" lIns="0" tIns="0" rIns="0" bIns="0" rtlCol="0" anchor="ctr"/>
-          <a:lstStyle/>
-          <a:p>
-            <a:pPr algn="ctr" indent="0" marL="0">
-              <a:buNone/>
-            </a:pPr>
-            <a:r>
-              <a:rPr lang="en-US" sz="1000" b="1" dirty="0">
-                <a:solidFill>
-                  <a:srgbClr val="5A05F4"/>
+          <p:cNvPr id="25" name="Shape 21"/>
+          <p:cNvSpPr/>
+          <p:nvPr/>
+        </p:nvSpPr>
+        <p:spPr>
+          <a:xfrm rot="2700000">
+            <a:off x="6207587" y="2864358"/>
+            <a:ext cx="58156" cy="27432"/>
+          </a:xfrm>
+          <a:prstGeom prst="rect">
+            <a:avLst/>
+          </a:prstGeom>
+          <a:solidFill>
+            <a:srgbClr val="5A05F4"/>
+          </a:solidFill>
+          <a:ln/>
+        </p:spPr>
+      </p:sp>
+      <p:sp>
+        <p:nvSpPr>
+          <p:cNvPr id="26" name="Shape 22"/>
+          <p:cNvSpPr/>
+          <p:nvPr/>
+        </p:nvSpPr>
+        <p:spPr>
+          <a:xfrm rot="-3000000">
+            <a:off x="6235385" y="2838298"/>
+            <a:ext cx="121432" cy="27432"/>
+          </a:xfrm>
+          <a:prstGeom prst="rect">
+            <a:avLst/>
+          </a:prstGeom>
+          <a:solidFill>
+            <a:srgbClr val="5A05F4"/>
+          </a:solidFill>
+          <a:ln/>
+        </p:spPr>
+      </p:sp>
+      <p:sp>
+        <p:nvSpPr>
+          <p:cNvPr id="27" name="Text 23"/>
+          <p:cNvSpPr/>
+          <p:nvPr/>
+        </p:nvSpPr>
+        <p:spPr>
+          <a:xfrm>
+            <a:off x="6528816" y="2670048"/>
+            <a:ext cx="4617720" cy="384048"/>
+          </a:xfrm>
+          <a:prstGeom prst="rect">
+            <a:avLst/>
+          </a:prstGeom>
+          <a:noFill/>
+          <a:ln/>
+        </p:spPr>
+        <p:txBody>
+          <a:bodyPr wrap="square" lIns="0" tIns="0" rIns="0" bIns="0" rtlCol="0" anchor="ctr"/>
+          <a:lstStyle/>
+          <a:p>
+            <a:pPr indent="0" marL="0">
+              <a:buNone/>
+            </a:pPr>
+            <a:r>
+              <a:rPr lang="en-US" sz="1250" dirty="0">
+                <a:solidFill>
+                  <a:srgbClr val="111318"/>
                 </a:solidFill>
                 <a:latin typeface="Montserrat" pitchFamily="34" charset="0"/>
                 <a:ea typeface="Montserrat" pitchFamily="34" charset="-122"/>
                 <a:cs typeface="Montserrat" pitchFamily="34" charset="-120"/>
               </a:rPr>
-              <a:t>✓</a:t>
-            </a:r>
-            <a:endParaRPr lang="en-US" sz="1000" dirty="0"/>
-          </a:p>
-        </p:txBody>
-      </p:sp>
-      <p:sp>
-        <p:nvSpPr>
-          <p:cNvPr id="21" name="Text 18"/>
-          <p:cNvSpPr/>
-          <p:nvPr/>
-        </p:nvSpPr>
-        <p:spPr>
-          <a:xfrm>
-            <a:off x="6528816" y="2670048"/>
-            <a:ext cx="4617720" cy="384048"/>
-          </a:xfrm>
-          <a:prstGeom prst="rect">
-            <a:avLst/>
-          </a:prstGeom>
-          <a:noFill/>
-          <a:ln/>
-        </p:spPr>
-        <p:txBody>
-          <a:bodyPr wrap="square" lIns="0" tIns="0" rIns="0" bIns="0" rtlCol="0" anchor="ctr"/>
-          <a:lstStyle/>
-          <a:p>
-            <a:pPr indent="0" marL="0">
-              <a:buNone/>
-            </a:pPr>
-            <a:r>
-              <a:rPr lang="en-US" sz="1250" dirty="0">
-                <a:solidFill>
-                  <a:srgbClr val="111318"/>
-                </a:solidFill>
-                <a:latin typeface="Montserrat" pitchFamily="34" charset="0"/>
-                <a:ea typeface="Montserrat" pitchFamily="34" charset="-122"/>
-                <a:cs typeface="Montserrat" pitchFamily="34" charset="-120"/>
-              </a:rPr>
               <a:t>поясню, чому поріг не 100%</a:t>
             </a:r>
             <a:endParaRPr lang="en-US" sz="1250" dirty="0"/>
@@ -13951,7 +13956,7 @@
       </p:sp>
       <p:sp>
         <p:nvSpPr>
-          <p:cNvPr id="22" name="Text 19"/>
+          <p:cNvPr id="28" name="Text 24"/>
           <p:cNvSpPr/>
           <p:nvPr/>
         </p:nvSpPr>
@@ -14194,7 +14199,7 @@
       </p:pic>
       <p:sp>
         <p:nvSpPr>
-          <p:cNvPr id="6" name="Shape 3"/>
+          <p:cNvPr id="7" name="Shape 3"/>
           <p:cNvSpPr/>
           <p:nvPr/>
         </p:nvSpPr>
@@ -14221,7 +14226,7 @@
       </p:sp>
       <p:sp>
         <p:nvSpPr>
-          <p:cNvPr id="7" name="Shape 4"/>
+          <p:cNvPr id="8" name="Shape 4"/>
           <p:cNvSpPr/>
           <p:nvPr/>
         </p:nvSpPr>
@@ -14241,90 +14246,91 @@
       </p:sp>
       <p:sp>
         <p:nvSpPr>
-          <p:cNvPr id="8" name="Text 5"/>
-          <p:cNvSpPr/>
-          <p:nvPr/>
-        </p:nvSpPr>
-        <p:spPr>
-          <a:xfrm>
-            <a:off x="768096" y="1956816"/>
-            <a:ext cx="384048" cy="384048"/>
-          </a:xfrm>
-          <a:prstGeom prst="rect">
-            <a:avLst/>
-          </a:prstGeom>
-          <a:noFill/>
-          <a:ln/>
-        </p:spPr>
-        <p:txBody>
-          <a:bodyPr wrap="square" lIns="0" tIns="0" rIns="0" bIns="0" rtlCol="0" anchor="ctr"/>
-          <a:lstStyle/>
-          <a:p>
-            <a:pPr algn="ctr" indent="0" marL="0">
+          <p:cNvPr id="9" name="Shape 5"/>
+          <p:cNvSpPr/>
+          <p:nvPr/>
+        </p:nvSpPr>
+        <p:spPr>
+          <a:xfrm rot="2700000">
+            <a:off x="871789" y="2133094"/>
+            <a:ext cx="176662" cy="31492"/>
+          </a:xfrm>
+          <a:prstGeom prst="rect">
+            <a:avLst/>
+          </a:prstGeom>
+          <a:solidFill>
+            <a:srgbClr val="C62A2A"/>
+          </a:solidFill>
+          <a:ln/>
+        </p:spPr>
+      </p:sp>
+      <p:sp>
+        <p:nvSpPr>
+          <p:cNvPr id="10" name="Shape 6"/>
+          <p:cNvSpPr/>
+          <p:nvPr/>
+        </p:nvSpPr>
+        <p:spPr>
+          <a:xfrm rot="-2700000">
+            <a:off x="871789" y="2133094"/>
+            <a:ext cx="176662" cy="31492"/>
+          </a:xfrm>
+          <a:prstGeom prst="rect">
+            <a:avLst/>
+          </a:prstGeom>
+          <a:solidFill>
+            <a:srgbClr val="C62A2A"/>
+          </a:solidFill>
+          <a:ln/>
+        </p:spPr>
+      </p:sp>
+      <p:sp>
+        <p:nvSpPr>
+          <p:cNvPr id="11" name="Text 7"/>
+          <p:cNvSpPr/>
+          <p:nvPr/>
+        </p:nvSpPr>
+        <p:spPr>
+          <a:xfrm>
+            <a:off x="1298448" y="1783080"/>
+            <a:ext cx="10149840" cy="731520"/>
+          </a:xfrm>
+          <a:prstGeom prst="rect">
+            <a:avLst/>
+          </a:prstGeom>
+          <a:noFill/>
+          <a:ln/>
+        </p:spPr>
+        <p:txBody>
+          <a:bodyPr wrap="square" lIns="0" tIns="0" rIns="0" bIns="0" rtlCol="0" anchor="ctr"/>
+          <a:lstStyle/>
+          <a:p>
+            <a:pPr indent="0" marL="0">
               <a:buNone/>
             </a:pPr>
             <a:r>
               <a:rPr lang="en-US" sz="1300" b="1" dirty="0">
                 <a:solidFill>
-                  <a:srgbClr val="C62A2A"/>
+                  <a:srgbClr val="111318"/>
                 </a:solidFill>
                 <a:latin typeface="Montserrat" pitchFamily="34" charset="0"/>
                 <a:ea typeface="Montserrat" pitchFamily="34" charset="-122"/>
                 <a:cs typeface="Montserrat" pitchFamily="34" charset="-120"/>
               </a:rPr>
-              <a:t>✕</a:t>
-            </a:r>
-            <a:endParaRPr lang="en-US" sz="1300" dirty="0"/>
-          </a:p>
-        </p:txBody>
-      </p:sp>
-      <p:sp>
-        <p:nvSpPr>
-          <p:cNvPr id="9" name="Text 6"/>
-          <p:cNvSpPr/>
-          <p:nvPr/>
-        </p:nvSpPr>
-        <p:spPr>
-          <a:xfrm>
-            <a:off x="1298448" y="1783080"/>
-            <a:ext cx="10149840" cy="731520"/>
-          </a:xfrm>
-          <a:prstGeom prst="rect">
-            <a:avLst/>
-          </a:prstGeom>
-          <a:noFill/>
-          <a:ln/>
-        </p:spPr>
-        <p:txBody>
-          <a:bodyPr wrap="square" lIns="0" tIns="0" rIns="0" bIns="0" rtlCol="0" anchor="ctr"/>
-          <a:lstStyle/>
-          <a:p>
-            <a:pPr indent="0" marL="0">
-              <a:buNone/>
-            </a:pPr>
-            <a:r>
-              <a:rPr lang="en-US" sz="1300" b="1" dirty="0">
-                <a:solidFill>
-                  <a:srgbClr val="111318"/>
+              <a:t>Expect на цілу фразу   </a:t>
+            </a:r>
+            <a:pPr indent="0" marL="0">
+              <a:buNone/>
+            </a:pPr>
+            <a:r>
+              <a:rPr lang="en-US" sz="1150" dirty="0">
+                <a:solidFill>
+                  <a:srgbClr val="555B66"/>
                 </a:solidFill>
                 <a:latin typeface="Montserrat" pitchFamily="34" charset="0"/>
                 <a:ea typeface="Montserrat" pitchFamily="34" charset="-122"/>
                 <a:cs typeface="Montserrat" pitchFamily="34" charset="-120"/>
               </a:rPr>
-              <a:t>Expect на цілу фразу   </a:t>
-            </a:r>
-            <a:pPr indent="0" marL="0">
-              <a:buNone/>
-            </a:pPr>
-            <a:r>
-              <a:rPr lang="en-US" sz="1150" dirty="0">
-                <a:solidFill>
-                  <a:srgbClr val="555B66"/>
-                </a:solidFill>
-                <a:latin typeface="Montserrat" pitchFamily="34" charset="0"/>
-                <a:ea typeface="Montserrat" pitchFamily="34" charset="-122"/>
-                <a:cs typeface="Montserrat" pitchFamily="34" charset="-120"/>
-              </a:rPr>
               <a:t>зламається від першого перефразування і привчить ігнорувати червоне</a:t>
             </a:r>
             <a:endParaRPr lang="en-US" sz="1300" dirty="0"/>
@@ -14333,7 +14339,7 @@
       </p:sp>
       <p:sp>
         <p:nvSpPr>
-          <p:cNvPr id="10" name="Shape 7"/>
+          <p:cNvPr id="12" name="Shape 8"/>
           <p:cNvSpPr/>
           <p:nvPr/>
         </p:nvSpPr>
@@ -14360,7 +14366,7 @@
       </p:sp>
       <p:sp>
         <p:nvSpPr>
-          <p:cNvPr id="11" name="Shape 8"/>
+          <p:cNvPr id="13" name="Shape 9"/>
           <p:cNvSpPr/>
           <p:nvPr/>
         </p:nvSpPr>
@@ -14380,90 +14386,91 @@
       </p:sp>
       <p:sp>
         <p:nvSpPr>
-          <p:cNvPr id="12" name="Text 9"/>
-          <p:cNvSpPr/>
-          <p:nvPr/>
-        </p:nvSpPr>
-        <p:spPr>
-          <a:xfrm>
-            <a:off x="768096" y="2825496"/>
-            <a:ext cx="384048" cy="384048"/>
-          </a:xfrm>
-          <a:prstGeom prst="rect">
-            <a:avLst/>
-          </a:prstGeom>
-          <a:noFill/>
-          <a:ln/>
-        </p:spPr>
-        <p:txBody>
-          <a:bodyPr wrap="square" lIns="0" tIns="0" rIns="0" bIns="0" rtlCol="0" anchor="ctr"/>
-          <a:lstStyle/>
-          <a:p>
-            <a:pPr algn="ctr" indent="0" marL="0">
+          <p:cNvPr id="14" name="Shape 10"/>
+          <p:cNvSpPr/>
+          <p:nvPr/>
+        </p:nvSpPr>
+        <p:spPr>
+          <a:xfrm rot="2700000">
+            <a:off x="871789" y="3001774"/>
+            <a:ext cx="176662" cy="31492"/>
+          </a:xfrm>
+          <a:prstGeom prst="rect">
+            <a:avLst/>
+          </a:prstGeom>
+          <a:solidFill>
+            <a:srgbClr val="C62A2A"/>
+          </a:solidFill>
+          <a:ln/>
+        </p:spPr>
+      </p:sp>
+      <p:sp>
+        <p:nvSpPr>
+          <p:cNvPr id="15" name="Shape 11"/>
+          <p:cNvSpPr/>
+          <p:nvPr/>
+        </p:nvSpPr>
+        <p:spPr>
+          <a:xfrm rot="-2700000">
+            <a:off x="871789" y="3001774"/>
+            <a:ext cx="176662" cy="31492"/>
+          </a:xfrm>
+          <a:prstGeom prst="rect">
+            <a:avLst/>
+          </a:prstGeom>
+          <a:solidFill>
+            <a:srgbClr val="C62A2A"/>
+          </a:solidFill>
+          <a:ln/>
+        </p:spPr>
+      </p:sp>
+      <p:sp>
+        <p:nvSpPr>
+          <p:cNvPr id="16" name="Text 12"/>
+          <p:cNvSpPr/>
+          <p:nvPr/>
+        </p:nvSpPr>
+        <p:spPr>
+          <a:xfrm>
+            <a:off x="1298448" y="2651760"/>
+            <a:ext cx="10149840" cy="731520"/>
+          </a:xfrm>
+          <a:prstGeom prst="rect">
+            <a:avLst/>
+          </a:prstGeom>
+          <a:noFill/>
+          <a:ln/>
+        </p:spPr>
+        <p:txBody>
+          <a:bodyPr wrap="square" lIns="0" tIns="0" rIns="0" bIns="0" rtlCol="0" anchor="ctr"/>
+          <a:lstStyle/>
+          <a:p>
+            <a:pPr indent="0" marL="0">
               <a:buNone/>
             </a:pPr>
             <a:r>
               <a:rPr lang="en-US" sz="1300" b="1" dirty="0">
                 <a:solidFill>
-                  <a:srgbClr val="C62A2A"/>
+                  <a:srgbClr val="111318"/>
                 </a:solidFill>
                 <a:latin typeface="Montserrat" pitchFamily="34" charset="0"/>
                 <a:ea typeface="Montserrat" pitchFamily="34" charset="-122"/>
                 <a:cs typeface="Montserrat" pitchFamily="34" charset="-120"/>
               </a:rPr>
-              <a:t>✕</a:t>
-            </a:r>
-            <a:endParaRPr lang="en-US" sz="1300" dirty="0"/>
-          </a:p>
-        </p:txBody>
-      </p:sp>
-      <p:sp>
-        <p:nvSpPr>
-          <p:cNvPr id="13" name="Text 10"/>
-          <p:cNvSpPr/>
-          <p:nvPr/>
-        </p:nvSpPr>
-        <p:spPr>
-          <a:xfrm>
-            <a:off x="1298448" y="2651760"/>
-            <a:ext cx="10149840" cy="731520"/>
-          </a:xfrm>
-          <a:prstGeom prst="rect">
-            <a:avLst/>
-          </a:prstGeom>
-          <a:noFill/>
-          <a:ln/>
-        </p:spPr>
-        <p:txBody>
-          <a:bodyPr wrap="square" lIns="0" tIns="0" rIns="0" bIns="0" rtlCol="0" anchor="ctr"/>
-          <a:lstStyle/>
-          <a:p>
-            <a:pPr indent="0" marL="0">
-              <a:buNone/>
-            </a:pPr>
-            <a:r>
-              <a:rPr lang="en-US" sz="1300" b="1" dirty="0">
-                <a:solidFill>
-                  <a:srgbClr val="111318"/>
+              <a:t>Датасет, який не росте   </a:t>
+            </a:r>
+            <a:pPr indent="0" marL="0">
+              <a:buNone/>
+            </a:pPr>
+            <a:r>
+              <a:rPr lang="en-US" sz="1150" dirty="0">
+                <a:solidFill>
+                  <a:srgbClr val="555B66"/>
                 </a:solidFill>
                 <a:latin typeface="Montserrat" pitchFamily="34" charset="0"/>
                 <a:ea typeface="Montserrat" pitchFamily="34" charset="-122"/>
                 <a:cs typeface="Montserrat" pitchFamily="34" charset="-120"/>
               </a:rPr>
-              <a:t>Датасет, який не росте   </a:t>
-            </a:r>
-            <a:pPr indent="0" marL="0">
-              <a:buNone/>
-            </a:pPr>
-            <a:r>
-              <a:rPr lang="en-US" sz="1150" dirty="0">
-                <a:solidFill>
-                  <a:srgbClr val="555B66"/>
-                </a:solidFill>
-                <a:latin typeface="Montserrat" pitchFamily="34" charset="0"/>
-                <a:ea typeface="Montserrat" pitchFamily="34" charset="-122"/>
-                <a:cs typeface="Montserrat" pitchFamily="34" charset="-120"/>
-              </a:rPr>
               <a:t>через квартал перевіряє систему, якої вже немає</a:t>
             </a:r>
             <a:endParaRPr lang="en-US" sz="1300" dirty="0"/>
@@ -14472,7 +14479,7 @@
       </p:sp>
       <p:sp>
         <p:nvSpPr>
-          <p:cNvPr id="14" name="Shape 11"/>
+          <p:cNvPr id="17" name="Shape 13"/>
           <p:cNvSpPr/>
           <p:nvPr/>
         </p:nvSpPr>
@@ -14499,7 +14506,7 @@
       </p:sp>
       <p:sp>
         <p:nvSpPr>
-          <p:cNvPr id="15" name="Shape 12"/>
+          <p:cNvPr id="18" name="Shape 14"/>
           <p:cNvSpPr/>
           <p:nvPr/>
         </p:nvSpPr>
@@ -14519,90 +14526,91 @@
       </p:sp>
       <p:sp>
         <p:nvSpPr>
-          <p:cNvPr id="16" name="Text 13"/>
-          <p:cNvSpPr/>
-          <p:nvPr/>
-        </p:nvSpPr>
-        <p:spPr>
-          <a:xfrm>
-            <a:off x="768096" y="3694176"/>
-            <a:ext cx="384048" cy="384048"/>
-          </a:xfrm>
-          <a:prstGeom prst="rect">
-            <a:avLst/>
-          </a:prstGeom>
-          <a:noFill/>
-          <a:ln/>
-        </p:spPr>
-        <p:txBody>
-          <a:bodyPr wrap="square" lIns="0" tIns="0" rIns="0" bIns="0" rtlCol="0" anchor="ctr"/>
-          <a:lstStyle/>
-          <a:p>
-            <a:pPr algn="ctr" indent="0" marL="0">
+          <p:cNvPr id="19" name="Shape 15"/>
+          <p:cNvSpPr/>
+          <p:nvPr/>
+        </p:nvSpPr>
+        <p:spPr>
+          <a:xfrm rot="2700000">
+            <a:off x="871789" y="3870454"/>
+            <a:ext cx="176662" cy="31492"/>
+          </a:xfrm>
+          <a:prstGeom prst="rect">
+            <a:avLst/>
+          </a:prstGeom>
+          <a:solidFill>
+            <a:srgbClr val="C62A2A"/>
+          </a:solidFill>
+          <a:ln/>
+        </p:spPr>
+      </p:sp>
+      <p:sp>
+        <p:nvSpPr>
+          <p:cNvPr id="20" name="Shape 16"/>
+          <p:cNvSpPr/>
+          <p:nvPr/>
+        </p:nvSpPr>
+        <p:spPr>
+          <a:xfrm rot="-2700000">
+            <a:off x="871789" y="3870454"/>
+            <a:ext cx="176662" cy="31492"/>
+          </a:xfrm>
+          <a:prstGeom prst="rect">
+            <a:avLst/>
+          </a:prstGeom>
+          <a:solidFill>
+            <a:srgbClr val="C62A2A"/>
+          </a:solidFill>
+          <a:ln/>
+        </p:spPr>
+      </p:sp>
+      <p:sp>
+        <p:nvSpPr>
+          <p:cNvPr id="21" name="Text 17"/>
+          <p:cNvSpPr/>
+          <p:nvPr/>
+        </p:nvSpPr>
+        <p:spPr>
+          <a:xfrm>
+            <a:off x="1298448" y="3520440"/>
+            <a:ext cx="10149840" cy="731520"/>
+          </a:xfrm>
+          <a:prstGeom prst="rect">
+            <a:avLst/>
+          </a:prstGeom>
+          <a:noFill/>
+          <a:ln/>
+        </p:spPr>
+        <p:txBody>
+          <a:bodyPr wrap="square" lIns="0" tIns="0" rIns="0" bIns="0" rtlCol="0" anchor="ctr"/>
+          <a:lstStyle/>
+          <a:p>
+            <a:pPr indent="0" marL="0">
               <a:buNone/>
             </a:pPr>
             <a:r>
               <a:rPr lang="en-US" sz="1300" b="1" dirty="0">
                 <a:solidFill>
-                  <a:srgbClr val="C62A2A"/>
+                  <a:srgbClr val="111318"/>
                 </a:solidFill>
                 <a:latin typeface="Montserrat" pitchFamily="34" charset="0"/>
                 <a:ea typeface="Montserrat" pitchFamily="34" charset="-122"/>
                 <a:cs typeface="Montserrat" pitchFamily="34" charset="-120"/>
               </a:rPr>
-              <a:t>✕</a:t>
-            </a:r>
-            <a:endParaRPr lang="en-US" sz="1300" dirty="0"/>
-          </a:p>
-        </p:txBody>
-      </p:sp>
-      <p:sp>
-        <p:nvSpPr>
-          <p:cNvPr id="17" name="Text 14"/>
-          <p:cNvSpPr/>
-          <p:nvPr/>
-        </p:nvSpPr>
-        <p:spPr>
-          <a:xfrm>
-            <a:off x="1298448" y="3520440"/>
-            <a:ext cx="10149840" cy="731520"/>
-          </a:xfrm>
-          <a:prstGeom prst="rect">
-            <a:avLst/>
-          </a:prstGeom>
-          <a:noFill/>
-          <a:ln/>
-        </p:spPr>
-        <p:txBody>
-          <a:bodyPr wrap="square" lIns="0" tIns="0" rIns="0" bIns="0" rtlCol="0" anchor="ctr"/>
-          <a:lstStyle/>
-          <a:p>
-            <a:pPr indent="0" marL="0">
-              <a:buNone/>
-            </a:pPr>
-            <a:r>
-              <a:rPr lang="en-US" sz="1300" b="1" dirty="0">
-                <a:solidFill>
-                  <a:srgbClr val="111318"/>
+              <a:t>Поріг «щоб позеленіло»   </a:t>
+            </a:r>
+            <a:pPr indent="0" marL="0">
+              <a:buNone/>
+            </a:pPr>
+            <a:r>
+              <a:rPr lang="en-US" sz="1150" dirty="0">
+                <a:solidFill>
+                  <a:srgbClr val="555B66"/>
                 </a:solidFill>
                 <a:latin typeface="Montserrat" pitchFamily="34" charset="0"/>
                 <a:ea typeface="Montserrat" pitchFamily="34" charset="-122"/>
                 <a:cs typeface="Montserrat" pitchFamily="34" charset="-120"/>
               </a:rPr>
-              <a:t>Поріг «щоб позеленіло»   </a:t>
-            </a:r>
-            <a:pPr indent="0" marL="0">
-              <a:buNone/>
-            </a:pPr>
-            <a:r>
-              <a:rPr lang="en-US" sz="1150" dirty="0">
-                <a:solidFill>
-                  <a:srgbClr val="555B66"/>
-                </a:solidFill>
-                <a:latin typeface="Montserrat" pitchFamily="34" charset="0"/>
-                <a:ea typeface="Montserrat" pitchFamily="34" charset="-122"/>
-                <a:cs typeface="Montserrat" pitchFamily="34" charset="-120"/>
-              </a:rPr>
               <a:t>зміна контракту крадькома замість обговореного релізу</a:t>
             </a:r>
             <a:endParaRPr lang="en-US" sz="1300" dirty="0"/>
@@ -14611,7 +14619,7 @@
       </p:sp>
       <p:sp>
         <p:nvSpPr>
-          <p:cNvPr id="18" name="Shape 15"/>
+          <p:cNvPr id="22" name="Shape 18"/>
           <p:cNvSpPr/>
           <p:nvPr/>
         </p:nvSpPr>
@@ -14638,7 +14646,7 @@
       </p:sp>
       <p:sp>
         <p:nvSpPr>
-          <p:cNvPr id="19" name="Shape 16"/>
+          <p:cNvPr id="23" name="Shape 19"/>
           <p:cNvSpPr/>
           <p:nvPr/>
         </p:nvSpPr>
@@ -14658,90 +14666,91 @@
       </p:sp>
       <p:sp>
         <p:nvSpPr>
-          <p:cNvPr id="20" name="Text 17"/>
-          <p:cNvSpPr/>
-          <p:nvPr/>
-        </p:nvSpPr>
-        <p:spPr>
-          <a:xfrm>
-            <a:off x="768096" y="4562856"/>
-            <a:ext cx="384048" cy="384048"/>
-          </a:xfrm>
-          <a:prstGeom prst="rect">
-            <a:avLst/>
-          </a:prstGeom>
-          <a:noFill/>
-          <a:ln/>
-        </p:spPr>
-        <p:txBody>
-          <a:bodyPr wrap="square" lIns="0" tIns="0" rIns="0" bIns="0" rtlCol="0" anchor="ctr"/>
-          <a:lstStyle/>
-          <a:p>
-            <a:pPr algn="ctr" indent="0" marL="0">
+          <p:cNvPr id="24" name="Shape 20"/>
+          <p:cNvSpPr/>
+          <p:nvPr/>
+        </p:nvSpPr>
+        <p:spPr>
+          <a:xfrm rot="2700000">
+            <a:off x="871789" y="4739134"/>
+            <a:ext cx="176662" cy="31492"/>
+          </a:xfrm>
+          <a:prstGeom prst="rect">
+            <a:avLst/>
+          </a:prstGeom>
+          <a:solidFill>
+            <a:srgbClr val="C62A2A"/>
+          </a:solidFill>
+          <a:ln/>
+        </p:spPr>
+      </p:sp>
+      <p:sp>
+        <p:nvSpPr>
+          <p:cNvPr id="25" name="Shape 21"/>
+          <p:cNvSpPr/>
+          <p:nvPr/>
+        </p:nvSpPr>
+        <p:spPr>
+          <a:xfrm rot="-2700000">
+            <a:off x="871789" y="4739134"/>
+            <a:ext cx="176662" cy="31492"/>
+          </a:xfrm>
+          <a:prstGeom prst="rect">
+            <a:avLst/>
+          </a:prstGeom>
+          <a:solidFill>
+            <a:srgbClr val="C62A2A"/>
+          </a:solidFill>
+          <a:ln/>
+        </p:spPr>
+      </p:sp>
+      <p:sp>
+        <p:nvSpPr>
+          <p:cNvPr id="26" name="Text 22"/>
+          <p:cNvSpPr/>
+          <p:nvPr/>
+        </p:nvSpPr>
+        <p:spPr>
+          <a:xfrm>
+            <a:off x="1298448" y="4389120"/>
+            <a:ext cx="10149840" cy="731520"/>
+          </a:xfrm>
+          <a:prstGeom prst="rect">
+            <a:avLst/>
+          </a:prstGeom>
+          <a:noFill/>
+          <a:ln/>
+        </p:spPr>
+        <p:txBody>
+          <a:bodyPr wrap="square" lIns="0" tIns="0" rIns="0" bIns="0" rtlCol="0" anchor="ctr"/>
+          <a:lstStyle/>
+          <a:p>
+            <a:pPr indent="0" marL="0">
               <a:buNone/>
             </a:pPr>
             <a:r>
               <a:rPr lang="en-US" sz="1300" b="1" dirty="0">
                 <a:solidFill>
-                  <a:srgbClr val="C62A2A"/>
+                  <a:srgbClr val="111318"/>
                 </a:solidFill>
                 <a:latin typeface="Montserrat" pitchFamily="34" charset="0"/>
                 <a:ea typeface="Montserrat" pitchFamily="34" charset="-122"/>
                 <a:cs typeface="Montserrat" pitchFamily="34" charset="-120"/>
               </a:rPr>
-              <a:t>✕</a:t>
-            </a:r>
-            <a:endParaRPr lang="en-US" sz="1300" dirty="0"/>
-          </a:p>
-        </p:txBody>
-      </p:sp>
-      <p:sp>
-        <p:nvSpPr>
-          <p:cNvPr id="21" name="Text 18"/>
-          <p:cNvSpPr/>
-          <p:nvPr/>
-        </p:nvSpPr>
-        <p:spPr>
-          <a:xfrm>
-            <a:off x="1298448" y="4389120"/>
-            <a:ext cx="10149840" cy="731520"/>
-          </a:xfrm>
-          <a:prstGeom prst="rect">
-            <a:avLst/>
-          </a:prstGeom>
-          <a:noFill/>
-          <a:ln/>
-        </p:spPr>
-        <p:txBody>
-          <a:bodyPr wrap="square" lIns="0" tIns="0" rIns="0" bIns="0" rtlCol="0" anchor="ctr"/>
-          <a:lstStyle/>
-          <a:p>
-            <a:pPr indent="0" marL="0">
-              <a:buNone/>
-            </a:pPr>
-            <a:r>
-              <a:rPr lang="en-US" sz="1300" b="1" dirty="0">
-                <a:solidFill>
-                  <a:srgbClr val="111318"/>
+              <a:t>Перезапускати, поки не пройде   </a:t>
+            </a:r>
+            <a:pPr indent="0" marL="0">
+              <a:buNone/>
+            </a:pPr>
+            <a:r>
+              <a:rPr lang="en-US" sz="1150" dirty="0">
+                <a:solidFill>
+                  <a:srgbClr val="555B66"/>
                 </a:solidFill>
                 <a:latin typeface="Montserrat" pitchFamily="34" charset="0"/>
                 <a:ea typeface="Montserrat" pitchFamily="34" charset="-122"/>
                 <a:cs typeface="Montserrat" pitchFamily="34" charset="-120"/>
               </a:rPr>
-              <a:t>Перезапускати, поки не пройде   </a:t>
-            </a:r>
-            <a:pPr indent="0" marL="0">
-              <a:buNone/>
-            </a:pPr>
-            <a:r>
-              <a:rPr lang="en-US" sz="1150" dirty="0">
-                <a:solidFill>
-                  <a:srgbClr val="555B66"/>
-                </a:solidFill>
-                <a:latin typeface="Montserrat" pitchFamily="34" charset="0"/>
-                <a:ea typeface="Montserrat" pitchFamily="34" charset="-122"/>
-                <a:cs typeface="Montserrat" pitchFamily="34" charset="-120"/>
-              </a:rPr>
               <a:t>мигаючий кейс — сигнал переписати очікування</a:t>
             </a:r>
             <a:endParaRPr lang="en-US" sz="1300" dirty="0"/>
@@ -14750,7 +14759,7 @@
       </p:sp>
       <p:sp>
         <p:nvSpPr>
-          <p:cNvPr id="22" name="Shape 19"/>
+          <p:cNvPr id="27" name="Shape 23"/>
           <p:cNvSpPr/>
           <p:nvPr/>
         </p:nvSpPr>
@@ -14777,7 +14786,7 @@
       </p:sp>
       <p:sp>
         <p:nvSpPr>
-          <p:cNvPr id="23" name="Shape 20"/>
+          <p:cNvPr id="28" name="Shape 24"/>
           <p:cNvSpPr/>
           <p:nvPr/>
         </p:nvSpPr>
@@ -14797,46 +14806,47 @@
       </p:sp>
       <p:sp>
         <p:nvSpPr>
-          <p:cNvPr id="24" name="Text 21"/>
-          <p:cNvSpPr/>
-          <p:nvPr/>
-        </p:nvSpPr>
-        <p:spPr>
-          <a:xfrm>
-            <a:off x="768096" y="5431536"/>
-            <a:ext cx="384048" cy="384048"/>
-          </a:xfrm>
-          <a:prstGeom prst="rect">
-            <a:avLst/>
-          </a:prstGeom>
-          <a:noFill/>
-          <a:ln/>
-        </p:spPr>
-        <p:txBody>
-          <a:bodyPr wrap="square" lIns="0" tIns="0" rIns="0" bIns="0" rtlCol="0" anchor="ctr"/>
-          <a:lstStyle/>
-          <a:p>
-            <a:pPr algn="ctr" indent="0" marL="0">
-              <a:buNone/>
-            </a:pPr>
-            <a:r>
-              <a:rPr lang="en-US" sz="1300" b="1" dirty="0">
-                <a:solidFill>
-                  <a:srgbClr val="C62A2A"/>
-                </a:solidFill>
-                <a:latin typeface="Montserrat" pitchFamily="34" charset="0"/>
-                <a:ea typeface="Montserrat" pitchFamily="34" charset="-122"/>
-                <a:cs typeface="Montserrat" pitchFamily="34" charset="-120"/>
-              </a:rPr>
-              <a:t>✕</a:t>
-            </a:r>
-            <a:endParaRPr lang="en-US" sz="1300" dirty="0"/>
-          </a:p>
-        </p:txBody>
-      </p:sp>
-      <p:sp>
-        <p:nvSpPr>
-          <p:cNvPr id="25" name="Text 22"/>
+          <p:cNvPr id="29" name="Shape 25"/>
+          <p:cNvSpPr/>
+          <p:nvPr/>
+        </p:nvSpPr>
+        <p:spPr>
+          <a:xfrm rot="2700000">
+            <a:off x="871789" y="5607814"/>
+            <a:ext cx="176662" cy="31492"/>
+          </a:xfrm>
+          <a:prstGeom prst="rect">
+            <a:avLst/>
+          </a:prstGeom>
+          <a:solidFill>
+            <a:srgbClr val="C62A2A"/>
+          </a:solidFill>
+          <a:ln/>
+        </p:spPr>
+      </p:sp>
+      <p:sp>
+        <p:nvSpPr>
+          <p:cNvPr id="30" name="Shape 26"/>
+          <p:cNvSpPr/>
+          <p:nvPr/>
+        </p:nvSpPr>
+        <p:spPr>
+          <a:xfrm rot="-2700000">
+            <a:off x="871789" y="5607814"/>
+            <a:ext cx="176662" cy="31492"/>
+          </a:xfrm>
+          <a:prstGeom prst="rect">
+            <a:avLst/>
+          </a:prstGeom>
+          <a:solidFill>
+            <a:srgbClr val="C62A2A"/>
+          </a:solidFill>
+          <a:ln/>
+        </p:spPr>
+      </p:sp>
+      <p:sp>
+        <p:nvSpPr>
+          <p:cNvPr id="31" name="Text 27"/>
           <p:cNvSpPr/>
           <p:nvPr/>
         </p:nvSpPr>
@@ -15093,7 +15103,7 @@
       </p:pic>
       <p:sp>
         <p:nvSpPr>
-          <p:cNvPr id="6" name="Shape 3"/>
+          <p:cNvPr id="7" name="Shape 3"/>
           <p:cNvSpPr/>
           <p:nvPr/>
         </p:nvSpPr>
@@ -15120,7 +15130,7 @@
       </p:sp>
       <p:sp>
         <p:nvSpPr>
-          <p:cNvPr id="7" name="Text 4"/>
+          <p:cNvPr id="8" name="Text 4"/>
           <p:cNvSpPr/>
           <p:nvPr/>
         </p:nvSpPr>
@@ -15159,7 +15169,7 @@
       </p:sp>
       <p:sp>
         <p:nvSpPr>
-          <p:cNvPr id="8" name="Text 5"/>
+          <p:cNvPr id="9" name="Text 5"/>
           <p:cNvSpPr/>
           <p:nvPr/>
         </p:nvSpPr>
@@ -15198,7 +15208,7 @@
       </p:sp>
       <p:sp>
         <p:nvSpPr>
-          <p:cNvPr id="9" name="Text 6"/>
+          <p:cNvPr id="10" name="Text 6"/>
           <p:cNvSpPr/>
           <p:nvPr/>
         </p:nvSpPr>
@@ -15237,7 +15247,7 @@
       </p:sp>
       <p:sp>
         <p:nvSpPr>
-          <p:cNvPr id="10" name="Text 7"/>
+          <p:cNvPr id="11" name="Text 7"/>
           <p:cNvSpPr/>
           <p:nvPr/>
         </p:nvSpPr>
@@ -15290,7 +15300,7 @@
       </p:sp>
       <p:sp>
         <p:nvSpPr>
-          <p:cNvPr id="11" name="Text 8"/>
+          <p:cNvPr id="12" name="Text 8"/>
           <p:cNvSpPr/>
           <p:nvPr/>
         </p:nvSpPr>
@@ -15343,7 +15353,7 @@
       </p:sp>
       <p:sp>
         <p:nvSpPr>
-          <p:cNvPr id="12" name="Text 9"/>
+          <p:cNvPr id="13" name="Text 9"/>
           <p:cNvSpPr/>
           <p:nvPr/>
         </p:nvSpPr>
@@ -15396,7 +15406,7 @@
       </p:sp>
       <p:sp>
         <p:nvSpPr>
-          <p:cNvPr id="13" name="Shape 10"/>
+          <p:cNvPr id="14" name="Shape 10"/>
           <p:cNvSpPr/>
           <p:nvPr/>
         </p:nvSpPr>
@@ -15418,7 +15428,7 @@
       </p:sp>
       <p:sp>
         <p:nvSpPr>
-          <p:cNvPr id="14" name="Text 11"/>
+          <p:cNvPr id="15" name="Text 11"/>
           <p:cNvSpPr/>
           <p:nvPr/>
         </p:nvSpPr>
@@ -15457,7 +15467,7 @@
       </p:sp>
       <p:sp>
         <p:nvSpPr>
-          <p:cNvPr id="15" name="Text 12"/>
+          <p:cNvPr id="16" name="Text 12"/>
           <p:cNvSpPr/>
           <p:nvPr/>
         </p:nvSpPr>
@@ -16246,7 +16256,7 @@
       </p:pic>
       <p:sp>
         <p:nvSpPr>
-          <p:cNvPr id="6" name="Shape 3"/>
+          <p:cNvPr id="7" name="Shape 3"/>
           <p:cNvSpPr/>
           <p:nvPr/>
         </p:nvSpPr>
@@ -16273,7 +16283,7 @@
       </p:sp>
       <p:sp>
         <p:nvSpPr>
-          <p:cNvPr id="7" name="Shape 4"/>
+          <p:cNvPr id="8" name="Shape 4"/>
           <p:cNvSpPr/>
           <p:nvPr/>
         </p:nvSpPr>
@@ -16293,7 +16303,7 @@
       </p:sp>
       <p:sp>
         <p:nvSpPr>
-          <p:cNvPr id="8" name="Text 5"/>
+          <p:cNvPr id="9" name="Text 5"/>
           <p:cNvSpPr/>
           <p:nvPr/>
         </p:nvSpPr>
@@ -16332,7 +16342,7 @@
       </p:sp>
       <p:sp>
         <p:nvSpPr>
-          <p:cNvPr id="9" name="Text 6"/>
+          <p:cNvPr id="10" name="Text 6"/>
           <p:cNvSpPr/>
           <p:nvPr/>
         </p:nvSpPr>
@@ -16371,7 +16381,7 @@
       </p:sp>
       <p:sp>
         <p:nvSpPr>
-          <p:cNvPr id="10" name="Shape 7"/>
+          <p:cNvPr id="11" name="Shape 7"/>
           <p:cNvSpPr/>
           <p:nvPr/>
         </p:nvSpPr>
@@ -16398,7 +16408,7 @@
       </p:sp>
       <p:sp>
         <p:nvSpPr>
-          <p:cNvPr id="11" name="Shape 8"/>
+          <p:cNvPr id="12" name="Shape 8"/>
           <p:cNvSpPr/>
           <p:nvPr/>
         </p:nvSpPr>
@@ -16418,7 +16428,7 @@
       </p:sp>
       <p:sp>
         <p:nvSpPr>
-          <p:cNvPr id="12" name="Text 9"/>
+          <p:cNvPr id="13" name="Text 9"/>
           <p:cNvSpPr/>
           <p:nvPr/>
         </p:nvSpPr>
@@ -16457,7 +16467,7 @@
       </p:sp>
       <p:sp>
         <p:nvSpPr>
-          <p:cNvPr id="13" name="Text 10"/>
+          <p:cNvPr id="14" name="Text 10"/>
           <p:cNvSpPr/>
           <p:nvPr/>
         </p:nvSpPr>
@@ -16496,7 +16506,7 @@
       </p:sp>
       <p:sp>
         <p:nvSpPr>
-          <p:cNvPr id="14" name="Shape 11"/>
+          <p:cNvPr id="15" name="Shape 11"/>
           <p:cNvSpPr/>
           <p:nvPr/>
         </p:nvSpPr>
@@ -16523,7 +16533,7 @@
       </p:sp>
       <p:sp>
         <p:nvSpPr>
-          <p:cNvPr id="15" name="Shape 12"/>
+          <p:cNvPr id="16" name="Shape 12"/>
           <p:cNvSpPr/>
           <p:nvPr/>
         </p:nvSpPr>
@@ -16543,7 +16553,7 @@
       </p:sp>
       <p:sp>
         <p:nvSpPr>
-          <p:cNvPr id="16" name="Text 13"/>
+          <p:cNvPr id="17" name="Text 13"/>
           <p:cNvSpPr/>
           <p:nvPr/>
         </p:nvSpPr>
@@ -16582,7 +16592,7 @@
       </p:sp>
       <p:sp>
         <p:nvSpPr>
-          <p:cNvPr id="17" name="Text 14"/>
+          <p:cNvPr id="18" name="Text 14"/>
           <p:cNvSpPr/>
           <p:nvPr/>
         </p:nvSpPr>
@@ -16621,7 +16631,7 @@
       </p:sp>
       <p:sp>
         <p:nvSpPr>
-          <p:cNvPr id="18" name="Shape 15"/>
+          <p:cNvPr id="19" name="Shape 15"/>
           <p:cNvSpPr/>
           <p:nvPr/>
         </p:nvSpPr>
@@ -16648,7 +16658,7 @@
       </p:sp>
       <p:sp>
         <p:nvSpPr>
-          <p:cNvPr id="19" name="Shape 16"/>
+          <p:cNvPr id="20" name="Shape 16"/>
           <p:cNvSpPr/>
           <p:nvPr/>
         </p:nvSpPr>
@@ -16668,7 +16678,7 @@
       </p:sp>
       <p:sp>
         <p:nvSpPr>
-          <p:cNvPr id="20" name="Text 17"/>
+          <p:cNvPr id="21" name="Text 17"/>
           <p:cNvSpPr/>
           <p:nvPr/>
         </p:nvSpPr>
@@ -16707,7 +16717,7 @@
       </p:sp>
       <p:sp>
         <p:nvSpPr>
-          <p:cNvPr id="21" name="Text 18"/>
+          <p:cNvPr id="22" name="Text 18"/>
           <p:cNvSpPr/>
           <p:nvPr/>
         </p:nvSpPr>
@@ -16746,7 +16756,7 @@
       </p:sp>
       <p:sp>
         <p:nvSpPr>
-          <p:cNvPr id="22" name="Shape 19"/>
+          <p:cNvPr id="23" name="Shape 19"/>
           <p:cNvSpPr/>
           <p:nvPr/>
         </p:nvSpPr>
@@ -16773,7 +16783,7 @@
       </p:sp>
       <p:sp>
         <p:nvSpPr>
-          <p:cNvPr id="23" name="Shape 20"/>
+          <p:cNvPr id="24" name="Shape 20"/>
           <p:cNvSpPr/>
           <p:nvPr/>
         </p:nvSpPr>
@@ -16793,7 +16803,7 @@
       </p:sp>
       <p:sp>
         <p:nvSpPr>
-          <p:cNvPr id="24" name="Text 21"/>
+          <p:cNvPr id="25" name="Text 21"/>
           <p:cNvSpPr/>
           <p:nvPr/>
         </p:nvSpPr>
@@ -16832,7 +16842,7 @@
       </p:sp>
       <p:sp>
         <p:nvSpPr>
-          <p:cNvPr id="25" name="Text 22"/>
+          <p:cNvPr id="26" name="Text 22"/>
           <p:cNvSpPr/>
           <p:nvPr/>
         </p:nvSpPr>
@@ -16871,7 +16881,7 @@
       </p:sp>
       <p:sp>
         <p:nvSpPr>
-          <p:cNvPr id="26" name="Shape 23"/>
+          <p:cNvPr id="27" name="Shape 23"/>
           <p:cNvSpPr/>
           <p:nvPr/>
         </p:nvSpPr>
@@ -16898,7 +16908,7 @@
       </p:sp>
       <p:sp>
         <p:nvSpPr>
-          <p:cNvPr id="27" name="Shape 24"/>
+          <p:cNvPr id="28" name="Shape 24"/>
           <p:cNvSpPr/>
           <p:nvPr/>
         </p:nvSpPr>
@@ -16918,7 +16928,7 @@
       </p:sp>
       <p:sp>
         <p:nvSpPr>
-          <p:cNvPr id="28" name="Text 25"/>
+          <p:cNvPr id="29" name="Text 25"/>
           <p:cNvSpPr/>
           <p:nvPr/>
         </p:nvSpPr>
@@ -16957,7 +16967,7 @@
       </p:sp>
       <p:sp>
         <p:nvSpPr>
-          <p:cNvPr id="29" name="Text 26"/>
+          <p:cNvPr id="30" name="Text 26"/>
           <p:cNvSpPr/>
           <p:nvPr/>
         </p:nvSpPr>
@@ -16996,7 +17006,7 @@
       </p:sp>
       <p:sp>
         <p:nvSpPr>
-          <p:cNvPr id="30" name="Shape 27"/>
+          <p:cNvPr id="31" name="Shape 27"/>
           <p:cNvSpPr/>
           <p:nvPr/>
         </p:nvSpPr>
@@ -17023,7 +17033,7 @@
       </p:sp>
       <p:sp>
         <p:nvSpPr>
-          <p:cNvPr id="31" name="Shape 28"/>
+          <p:cNvPr id="32" name="Shape 28"/>
           <p:cNvSpPr/>
           <p:nvPr/>
         </p:nvSpPr>
@@ -17043,7 +17053,7 @@
       </p:sp>
       <p:sp>
         <p:nvSpPr>
-          <p:cNvPr id="32" name="Text 29"/>
+          <p:cNvPr id="33" name="Text 29"/>
           <p:cNvSpPr/>
           <p:nvPr/>
         </p:nvSpPr>
@@ -17082,7 +17092,7 @@
       </p:sp>
       <p:sp>
         <p:nvSpPr>
-          <p:cNvPr id="33" name="Text 30"/>
+          <p:cNvPr id="34" name="Text 30"/>
           <p:cNvSpPr/>
           <p:nvPr/>
         </p:nvSpPr>
@@ -17121,7 +17131,7 @@
       </p:sp>
       <p:sp>
         <p:nvSpPr>
-          <p:cNvPr id="34" name="Shape 31"/>
+          <p:cNvPr id="35" name="Shape 31"/>
           <p:cNvSpPr/>
           <p:nvPr/>
         </p:nvSpPr>
@@ -17148,7 +17158,7 @@
       </p:sp>
       <p:sp>
         <p:nvSpPr>
-          <p:cNvPr id="35" name="Shape 32"/>
+          <p:cNvPr id="36" name="Shape 32"/>
           <p:cNvSpPr/>
           <p:nvPr/>
         </p:nvSpPr>
@@ -17168,7 +17178,7 @@
       </p:sp>
       <p:sp>
         <p:nvSpPr>
-          <p:cNvPr id="36" name="Text 33"/>
+          <p:cNvPr id="37" name="Text 33"/>
           <p:cNvSpPr/>
           <p:nvPr/>
         </p:nvSpPr>
@@ -17207,7 +17217,7 @@
       </p:sp>
       <p:sp>
         <p:nvSpPr>
-          <p:cNvPr id="37" name="Text 34"/>
+          <p:cNvPr id="38" name="Text 34"/>
           <p:cNvSpPr/>
           <p:nvPr/>
         </p:nvSpPr>
@@ -17246,7 +17256,7 @@
       </p:sp>
       <p:sp>
         <p:nvSpPr>
-          <p:cNvPr id="38" name="Shape 35"/>
+          <p:cNvPr id="39" name="Shape 35"/>
           <p:cNvSpPr/>
           <p:nvPr/>
         </p:nvSpPr>
@@ -17268,7 +17278,7 @@
       </p:sp>
       <p:sp>
         <p:nvSpPr>
-          <p:cNvPr id="39" name="Shape 36"/>
+          <p:cNvPr id="40" name="Shape 36"/>
           <p:cNvSpPr/>
           <p:nvPr/>
         </p:nvSpPr>
@@ -17288,7 +17298,7 @@
       </p:sp>
       <p:sp>
         <p:nvSpPr>
-          <p:cNvPr id="40" name="Text 37"/>
+          <p:cNvPr id="41" name="Text 37"/>
           <p:cNvSpPr/>
           <p:nvPr/>
         </p:nvSpPr>
@@ -17327,7 +17337,7 @@
       </p:sp>
       <p:sp>
         <p:nvSpPr>
-          <p:cNvPr id="41" name="Text 38"/>
+          <p:cNvPr id="42" name="Text 38"/>
           <p:cNvSpPr/>
           <p:nvPr/>
         </p:nvSpPr>
@@ -17366,7 +17376,7 @@
       </p:sp>
       <p:sp>
         <p:nvSpPr>
-          <p:cNvPr id="42" name="Shape 39"/>
+          <p:cNvPr id="43" name="Shape 39"/>
           <p:cNvSpPr/>
           <p:nvPr/>
         </p:nvSpPr>
@@ -17393,7 +17403,7 @@
       </p:sp>
       <p:sp>
         <p:nvSpPr>
-          <p:cNvPr id="43" name="Shape 40"/>
+          <p:cNvPr id="44" name="Shape 40"/>
           <p:cNvSpPr/>
           <p:nvPr/>
         </p:nvSpPr>
@@ -17413,7 +17423,7 @@
       </p:sp>
       <p:sp>
         <p:nvSpPr>
-          <p:cNvPr id="44" name="Text 41"/>
+          <p:cNvPr id="45" name="Text 41"/>
           <p:cNvSpPr/>
           <p:nvPr/>
         </p:nvSpPr>
@@ -17452,7 +17462,7 @@
       </p:sp>
       <p:sp>
         <p:nvSpPr>
-          <p:cNvPr id="45" name="Text 42"/>
+          <p:cNvPr id="46" name="Text 42"/>
           <p:cNvSpPr/>
           <p:nvPr/>
         </p:nvSpPr>
@@ -17491,7 +17501,7 @@
       </p:sp>
       <p:sp>
         <p:nvSpPr>
-          <p:cNvPr id="46" name="Shape 43"/>
+          <p:cNvPr id="47" name="Shape 43"/>
           <p:cNvSpPr/>
           <p:nvPr/>
         </p:nvSpPr>
@@ -17518,7 +17528,7 @@
       </p:sp>
       <p:sp>
         <p:nvSpPr>
-          <p:cNvPr id="47" name="Shape 44"/>
+          <p:cNvPr id="48" name="Shape 44"/>
           <p:cNvSpPr/>
           <p:nvPr/>
         </p:nvSpPr>
@@ -17538,7 +17548,7 @@
       </p:sp>
       <p:sp>
         <p:nvSpPr>
-          <p:cNvPr id="48" name="Text 45"/>
+          <p:cNvPr id="49" name="Text 45"/>
           <p:cNvSpPr/>
           <p:nvPr/>
         </p:nvSpPr>
@@ -17577,7 +17587,7 @@
       </p:sp>
       <p:sp>
         <p:nvSpPr>
-          <p:cNvPr id="49" name="Text 46"/>
+          <p:cNvPr id="50" name="Text 46"/>
           <p:cNvSpPr/>
           <p:nvPr/>
         </p:nvSpPr>
@@ -17616,7 +17626,7 @@
       </p:sp>
       <p:sp>
         <p:nvSpPr>
-          <p:cNvPr id="50" name="Shape 47"/>
+          <p:cNvPr id="51" name="Shape 47"/>
           <p:cNvSpPr/>
           <p:nvPr/>
         </p:nvSpPr>
@@ -17643,7 +17653,7 @@
       </p:sp>
       <p:sp>
         <p:nvSpPr>
-          <p:cNvPr id="51" name="Shape 48"/>
+          <p:cNvPr id="52" name="Shape 48"/>
           <p:cNvSpPr/>
           <p:nvPr/>
         </p:nvSpPr>
@@ -17663,7 +17673,7 @@
       </p:sp>
       <p:sp>
         <p:nvSpPr>
-          <p:cNvPr id="52" name="Text 49"/>
+          <p:cNvPr id="53" name="Text 49"/>
           <p:cNvSpPr/>
           <p:nvPr/>
         </p:nvSpPr>
@@ -17702,7 +17712,7 @@
       </p:sp>
       <p:sp>
         <p:nvSpPr>
-          <p:cNvPr id="53" name="Text 50"/>
+          <p:cNvPr id="54" name="Text 50"/>
           <p:cNvSpPr/>
           <p:nvPr/>
         </p:nvSpPr>
@@ -17741,7 +17751,7 @@
       </p:sp>
       <p:sp>
         <p:nvSpPr>
-          <p:cNvPr id="54" name="Shape 51"/>
+          <p:cNvPr id="55" name="Shape 51"/>
           <p:cNvSpPr/>
           <p:nvPr/>
         </p:nvSpPr>
@@ -17768,7 +17778,7 @@
       </p:sp>
       <p:sp>
         <p:nvSpPr>
-          <p:cNvPr id="55" name="Text 52"/>
+          <p:cNvPr id="56" name="Text 52"/>
           <p:cNvSpPr/>
           <p:nvPr/>
         </p:nvSpPr>
@@ -18056,7 +18066,7 @@
       </p:pic>
       <p:sp>
         <p:nvSpPr>
-          <p:cNvPr id="7" name="Shape 4"/>
+          <p:cNvPr id="8" name="Shape 4"/>
           <p:cNvSpPr/>
           <p:nvPr/>
         </p:nvSpPr>
@@ -18083,7 +18093,7 @@
       </p:sp>
       <p:sp>
         <p:nvSpPr>
-          <p:cNvPr id="8" name="Text 5"/>
+          <p:cNvPr id="9" name="Text 5"/>
           <p:cNvSpPr/>
           <p:nvPr/>
         </p:nvSpPr>
@@ -18122,7 +18132,7 @@
       </p:sp>
       <p:sp>
         <p:nvSpPr>
-          <p:cNvPr id="9" name="Text 6"/>
+          <p:cNvPr id="10" name="Text 6"/>
           <p:cNvSpPr/>
           <p:nvPr/>
         </p:nvSpPr>
@@ -18164,7 +18174,7 @@
       </p:sp>
       <p:sp>
         <p:nvSpPr>
-          <p:cNvPr id="10" name="Shape 7"/>
+          <p:cNvPr id="11" name="Shape 7"/>
           <p:cNvSpPr/>
           <p:nvPr/>
         </p:nvSpPr>
@@ -18191,7 +18201,7 @@
       </p:sp>
       <p:sp>
         <p:nvSpPr>
-          <p:cNvPr id="11" name="Text 8"/>
+          <p:cNvPr id="12" name="Text 8"/>
           <p:cNvSpPr/>
           <p:nvPr/>
         </p:nvSpPr>
@@ -18230,7 +18240,7 @@
       </p:sp>
       <p:sp>
         <p:nvSpPr>
-          <p:cNvPr id="12" name="Text 9"/>
+          <p:cNvPr id="13" name="Text 9"/>
           <p:cNvSpPr/>
           <p:nvPr/>
         </p:nvSpPr>
@@ -18272,7 +18282,7 @@
       </p:sp>
       <p:sp>
         <p:nvSpPr>
-          <p:cNvPr id="13" name="Shape 10"/>
+          <p:cNvPr id="14" name="Shape 10"/>
           <p:cNvSpPr/>
           <p:nvPr/>
         </p:nvSpPr>
@@ -18299,7 +18309,7 @@
       </p:sp>
       <p:sp>
         <p:nvSpPr>
-          <p:cNvPr id="14" name="Text 11"/>
+          <p:cNvPr id="15" name="Text 11"/>
           <p:cNvSpPr/>
           <p:nvPr/>
         </p:nvSpPr>
@@ -18338,7 +18348,7 @@
       </p:sp>
       <p:sp>
         <p:nvSpPr>
-          <p:cNvPr id="15" name="Text 12"/>
+          <p:cNvPr id="16" name="Text 12"/>
           <p:cNvSpPr/>
           <p:nvPr/>
         </p:nvSpPr>
@@ -18380,7 +18390,7 @@
       </p:sp>
       <p:sp>
         <p:nvSpPr>
-          <p:cNvPr id="16" name="Shape 13"/>
+          <p:cNvPr id="17" name="Shape 13"/>
           <p:cNvSpPr/>
           <p:nvPr/>
         </p:nvSpPr>
@@ -18407,7 +18417,7 @@
       </p:sp>
       <p:sp>
         <p:nvSpPr>
-          <p:cNvPr id="17" name="Text 14"/>
+          <p:cNvPr id="18" name="Text 14"/>
           <p:cNvSpPr/>
           <p:nvPr/>
         </p:nvSpPr>
@@ -18446,7 +18456,7 @@
       </p:sp>
       <p:sp>
         <p:nvSpPr>
-          <p:cNvPr id="18" name="Text 15"/>
+          <p:cNvPr id="19" name="Text 15"/>
           <p:cNvSpPr/>
           <p:nvPr/>
         </p:nvSpPr>
@@ -18488,7 +18498,7 @@
       </p:sp>
       <p:sp>
         <p:nvSpPr>
-          <p:cNvPr id="19" name="Shape 16"/>
+          <p:cNvPr id="20" name="Shape 16"/>
           <p:cNvSpPr/>
           <p:nvPr/>
         </p:nvSpPr>
@@ -18515,7 +18525,7 @@
       </p:sp>
       <p:sp>
         <p:nvSpPr>
-          <p:cNvPr id="20" name="Text 17"/>
+          <p:cNvPr id="21" name="Text 17"/>
           <p:cNvSpPr/>
           <p:nvPr/>
         </p:nvSpPr>
@@ -18554,7 +18564,7 @@
       </p:sp>
       <p:sp>
         <p:nvSpPr>
-          <p:cNvPr id="21" name="Text 18"/>
+          <p:cNvPr id="22" name="Text 18"/>
           <p:cNvSpPr/>
           <p:nvPr/>
         </p:nvSpPr>
@@ -18596,7 +18606,7 @@
       </p:sp>
       <p:sp>
         <p:nvSpPr>
-          <p:cNvPr id="22" name="Shape 19"/>
+          <p:cNvPr id="23" name="Shape 19"/>
           <p:cNvSpPr/>
           <p:nvPr/>
         </p:nvSpPr>
@@ -18623,7 +18633,7 @@
       </p:sp>
       <p:sp>
         <p:nvSpPr>
-          <p:cNvPr id="23" name="Text 20"/>
+          <p:cNvPr id="24" name="Text 20"/>
           <p:cNvSpPr/>
           <p:nvPr/>
         </p:nvSpPr>
@@ -18662,7 +18672,7 @@
       </p:sp>
       <p:sp>
         <p:nvSpPr>
-          <p:cNvPr id="24" name="Text 21"/>
+          <p:cNvPr id="25" name="Text 21"/>
           <p:cNvSpPr/>
           <p:nvPr/>
         </p:nvSpPr>
@@ -18704,7 +18714,7 @@
       </p:sp>
       <p:sp>
         <p:nvSpPr>
-          <p:cNvPr id="25" name="Shape 22"/>
+          <p:cNvPr id="26" name="Shape 22"/>
           <p:cNvSpPr/>
           <p:nvPr/>
         </p:nvSpPr>
@@ -18731,7 +18741,7 @@
       </p:sp>
       <p:sp>
         <p:nvSpPr>
-          <p:cNvPr id="26" name="Text 23"/>
+          <p:cNvPr id="27" name="Text 23"/>
           <p:cNvSpPr/>
           <p:nvPr/>
         </p:nvSpPr>
@@ -18937,7 +18947,7 @@
         </p:nvSpPr>
         <p:spPr>
           <a:xfrm>
-            <a:off x="1280160" y="1024128"/>
+            <a:off x="1280160" y="1193140"/>
             <a:ext cx="777240" cy="256032"/>
           </a:xfrm>
           <a:prstGeom prst="roundRect">
@@ -18959,7 +18969,7 @@
         </p:nvSpPr>
         <p:spPr>
           <a:xfrm>
-            <a:off x="1280160" y="1024128"/>
+            <a:off x="1280160" y="1193140"/>
             <a:ext cx="777240" cy="256032"/>
           </a:xfrm>
           <a:prstGeom prst="rect">
@@ -19016,7 +19026,7 @@
       </p:pic>
       <p:sp>
         <p:nvSpPr>
-          <p:cNvPr id="7" name="Shape 4"/>
+          <p:cNvPr id="8" name="Shape 4"/>
           <p:cNvSpPr/>
           <p:nvPr/>
         </p:nvSpPr>
@@ -19038,7 +19048,7 @@
       </p:sp>
       <p:sp>
         <p:nvSpPr>
-          <p:cNvPr id="8" name="Shape 5"/>
+          <p:cNvPr id="9" name="Shape 5"/>
           <p:cNvSpPr/>
           <p:nvPr/>
         </p:nvSpPr>
@@ -19058,7 +19068,7 @@
       </p:sp>
       <p:sp>
         <p:nvSpPr>
-          <p:cNvPr id="9" name="Text 6"/>
+          <p:cNvPr id="10" name="Text 6"/>
           <p:cNvSpPr/>
           <p:nvPr/>
         </p:nvSpPr>
@@ -19097,7 +19107,7 @@
       </p:sp>
       <p:sp>
         <p:nvSpPr>
-          <p:cNvPr id="10" name="Text 7"/>
+          <p:cNvPr id="11" name="Text 7"/>
           <p:cNvSpPr/>
           <p:nvPr/>
         </p:nvSpPr>
@@ -19136,7 +19146,7 @@
       </p:sp>
       <p:sp>
         <p:nvSpPr>
-          <p:cNvPr id="11" name="Text 8"/>
+          <p:cNvPr id="12" name="Text 8"/>
           <p:cNvSpPr/>
           <p:nvPr/>
         </p:nvSpPr>
@@ -19178,7 +19188,7 @@
       </p:sp>
       <p:sp>
         <p:nvSpPr>
-          <p:cNvPr id="12" name="Shape 9"/>
+          <p:cNvPr id="13" name="Shape 9"/>
           <p:cNvSpPr/>
           <p:nvPr/>
         </p:nvSpPr>
@@ -19200,7 +19210,7 @@
       </p:sp>
       <p:sp>
         <p:nvSpPr>
-          <p:cNvPr id="13" name="Shape 10"/>
+          <p:cNvPr id="14" name="Shape 10"/>
           <p:cNvSpPr/>
           <p:nvPr/>
         </p:nvSpPr>
@@ -19220,7 +19230,7 @@
       </p:sp>
       <p:sp>
         <p:nvSpPr>
-          <p:cNvPr id="14" name="Text 11"/>
+          <p:cNvPr id="15" name="Text 11"/>
           <p:cNvSpPr/>
           <p:nvPr/>
         </p:nvSpPr>
@@ -19259,7 +19269,7 @@
       </p:sp>
       <p:sp>
         <p:nvSpPr>
-          <p:cNvPr id="15" name="Text 12"/>
+          <p:cNvPr id="16" name="Text 12"/>
           <p:cNvSpPr/>
           <p:nvPr/>
         </p:nvSpPr>
@@ -19298,7 +19308,7 @@
       </p:sp>
       <p:sp>
         <p:nvSpPr>
-          <p:cNvPr id="16" name="Text 13"/>
+          <p:cNvPr id="17" name="Text 13"/>
           <p:cNvSpPr/>
           <p:nvPr/>
         </p:nvSpPr>
@@ -19340,7 +19350,7 @@
       </p:sp>
       <p:sp>
         <p:nvSpPr>
-          <p:cNvPr id="17" name="Shape 14"/>
+          <p:cNvPr id="18" name="Shape 14"/>
           <p:cNvSpPr/>
           <p:nvPr/>
         </p:nvSpPr>
@@ -19362,7 +19372,7 @@
       </p:sp>
       <p:sp>
         <p:nvSpPr>
-          <p:cNvPr id="18" name="Shape 15"/>
+          <p:cNvPr id="19" name="Shape 15"/>
           <p:cNvSpPr/>
           <p:nvPr/>
         </p:nvSpPr>
@@ -19382,7 +19392,7 @@
       </p:sp>
       <p:sp>
         <p:nvSpPr>
-          <p:cNvPr id="19" name="Text 16"/>
+          <p:cNvPr id="20" name="Text 16"/>
           <p:cNvSpPr/>
           <p:nvPr/>
         </p:nvSpPr>
@@ -19421,7 +19431,7 @@
       </p:sp>
       <p:sp>
         <p:nvSpPr>
-          <p:cNvPr id="20" name="Text 17"/>
+          <p:cNvPr id="21" name="Text 17"/>
           <p:cNvSpPr/>
           <p:nvPr/>
         </p:nvSpPr>
@@ -19460,7 +19470,7 @@
       </p:sp>
       <p:sp>
         <p:nvSpPr>
-          <p:cNvPr id="21" name="Text 18"/>
+          <p:cNvPr id="22" name="Text 18"/>
           <p:cNvSpPr/>
           <p:nvPr/>
         </p:nvSpPr>
@@ -19502,7 +19512,7 @@
       </p:sp>
       <p:sp>
         <p:nvSpPr>
-          <p:cNvPr id="22" name="Text 19"/>
+          <p:cNvPr id="23" name="Text 19"/>
           <p:cNvSpPr/>
           <p:nvPr/>
         </p:nvSpPr>
@@ -19541,7 +19551,7 @@
       </p:sp>
       <p:sp>
         <p:nvSpPr>
-          <p:cNvPr id="23" name="Shape 20"/>
+          <p:cNvPr id="24" name="Shape 20"/>
           <p:cNvSpPr/>
           <p:nvPr/>
         </p:nvSpPr>
@@ -19563,7 +19573,7 @@
       </p:sp>
       <p:sp>
         <p:nvSpPr>
-          <p:cNvPr id="24" name="Text 21"/>
+          <p:cNvPr id="25" name="Text 21"/>
           <p:cNvSpPr/>
           <p:nvPr/>
         </p:nvSpPr>
@@ -19602,7 +19612,7 @@
       </p:sp>
       <p:sp>
         <p:nvSpPr>
-          <p:cNvPr id="25" name="Text 22"/>
+          <p:cNvPr id="26" name="Text 22"/>
           <p:cNvSpPr/>
           <p:nvPr/>
         </p:nvSpPr>
@@ -19808,7 +19818,7 @@
         </p:nvSpPr>
         <p:spPr>
           <a:xfrm>
-            <a:off x="1280160" y="1024128"/>
+            <a:off x="1280160" y="1193140"/>
             <a:ext cx="777240" cy="256032"/>
           </a:xfrm>
           <a:prstGeom prst="roundRect">
@@ -19830,7 +19840,7 @@
         </p:nvSpPr>
         <p:spPr>
           <a:xfrm>
-            <a:off x="1280160" y="1024128"/>
+            <a:off x="1280160" y="1193140"/>
             <a:ext cx="777240" cy="256032"/>
           </a:xfrm>
           <a:prstGeom prst="rect">
@@ -19887,7 +19897,7 @@
       </p:pic>
       <p:sp>
         <p:nvSpPr>
-          <p:cNvPr id="7" name="Shape 4"/>
+          <p:cNvPr id="8" name="Shape 4"/>
           <p:cNvSpPr/>
           <p:nvPr/>
         </p:nvSpPr>
@@ -19909,7 +19919,7 @@
       </p:sp>
       <p:sp>
         <p:nvSpPr>
-          <p:cNvPr id="8" name="Text 5"/>
+          <p:cNvPr id="9" name="Text 5"/>
           <p:cNvSpPr/>
           <p:nvPr/>
         </p:nvSpPr>
@@ -19948,7 +19958,7 @@
       </p:sp>
       <p:sp>
         <p:nvSpPr>
-          <p:cNvPr id="9" name="Text 6"/>
+          <p:cNvPr id="10" name="Text 6"/>
           <p:cNvSpPr/>
           <p:nvPr/>
         </p:nvSpPr>
@@ -19987,7 +19997,7 @@
       </p:sp>
       <p:sp>
         <p:nvSpPr>
-          <p:cNvPr id="10" name="Shape 7"/>
+          <p:cNvPr id="11" name="Shape 7"/>
           <p:cNvSpPr/>
           <p:nvPr/>
         </p:nvSpPr>
@@ -20009,7 +20019,7 @@
       </p:sp>
       <p:sp>
         <p:nvSpPr>
-          <p:cNvPr id="11" name="Text 8"/>
+          <p:cNvPr id="12" name="Text 8"/>
           <p:cNvSpPr/>
           <p:nvPr/>
         </p:nvSpPr>
@@ -20048,7 +20058,7 @@
       </p:sp>
       <p:sp>
         <p:nvSpPr>
-          <p:cNvPr id="12" name="Text 9"/>
+          <p:cNvPr id="13" name="Text 9"/>
           <p:cNvSpPr/>
           <p:nvPr/>
         </p:nvSpPr>
@@ -20087,7 +20097,7 @@
       </p:sp>
       <p:sp>
         <p:nvSpPr>
-          <p:cNvPr id="13" name="Shape 10"/>
+          <p:cNvPr id="14" name="Shape 10"/>
           <p:cNvSpPr/>
           <p:nvPr/>
         </p:nvSpPr>
@@ -20109,7 +20119,7 @@
       </p:sp>
       <p:sp>
         <p:nvSpPr>
-          <p:cNvPr id="14" name="Text 11"/>
+          <p:cNvPr id="15" name="Text 11"/>
           <p:cNvSpPr/>
           <p:nvPr/>
         </p:nvSpPr>
@@ -20148,7 +20158,7 @@
       </p:sp>
       <p:sp>
         <p:nvSpPr>
-          <p:cNvPr id="15" name="Text 12"/>
+          <p:cNvPr id="16" name="Text 12"/>
           <p:cNvSpPr/>
           <p:nvPr/>
         </p:nvSpPr>
@@ -20187,7 +20197,7 @@
       </p:sp>
       <p:sp>
         <p:nvSpPr>
-          <p:cNvPr id="16" name="Shape 13"/>
+          <p:cNvPr id="17" name="Shape 13"/>
           <p:cNvSpPr/>
           <p:nvPr/>
         </p:nvSpPr>
@@ -20209,7 +20219,7 @@
       </p:sp>
       <p:sp>
         <p:nvSpPr>
-          <p:cNvPr id="17" name="Text 14"/>
+          <p:cNvPr id="18" name="Text 14"/>
           <p:cNvSpPr/>
           <p:nvPr/>
         </p:nvSpPr>
@@ -20248,7 +20258,7 @@
       </p:sp>
       <p:sp>
         <p:nvSpPr>
-          <p:cNvPr id="18" name="Text 15"/>
+          <p:cNvPr id="19" name="Text 15"/>
           <p:cNvSpPr/>
           <p:nvPr/>
         </p:nvSpPr>
@@ -20282,7 +20292,7 @@
                 <a:ea typeface="Montserrat" pitchFamily="34" charset="-122"/>
                 <a:cs typeface="Montserrat" pitchFamily="34" charset="-120"/>
               </a:rPr>
-              <a:t>Якість — це не відчуття, а перелік тверджень, які можна перевірити. Що не потрапило в датасет — того контракт не обіцяє, і воно зламається мовчки.</a:t>
+              <a:t>Якість — це перелік перевірюваних тверджень, а не відчуття.</a:t>
             </a:r>
             <a:endParaRPr lang="en-US" sz="1300" dirty="0"/>
           </a:p>
@@ -20290,7 +20300,7 @@
       </p:sp>
       <p:sp>
         <p:nvSpPr>
-          <p:cNvPr id="19" name="Shape 16"/>
+          <p:cNvPr id="20" name="Shape 16"/>
           <p:cNvSpPr/>
           <p:nvPr/>
         </p:nvSpPr>
@@ -20317,7 +20327,7 @@
       </p:sp>
       <p:sp>
         <p:nvSpPr>
-          <p:cNvPr id="20" name="Text 17"/>
+          <p:cNvPr id="21" name="Text 17"/>
           <p:cNvSpPr/>
           <p:nvPr/>
         </p:nvSpPr>
@@ -20351,7 +20361,7 @@
                 <a:ea typeface="Montserrat" pitchFamily="34" charset="-122"/>
                 <a:cs typeface="Montserrat" pitchFamily="34" charset="-120"/>
               </a:rPr>
-              <a:t>Репрезентативність важливіша за кількість: 20 правильних кейсів корисніші за 200 випадкових.</a:t>
+              <a:t>Репрезентативність важливіша за кількість: 20 правильних &gt; 200 випадкових.</a:t>
             </a:r>
             <a:endParaRPr lang="en-US" sz="1300" dirty="0"/>
           </a:p>
@@ -20523,7 +20533,7 @@
         </p:nvSpPr>
         <p:spPr>
           <a:xfrm>
-            <a:off x="1280160" y="1024128"/>
+            <a:off x="1280160" y="1193140"/>
             <a:ext cx="777240" cy="256032"/>
           </a:xfrm>
           <a:prstGeom prst="roundRect">
@@ -20545,7 +20555,7 @@
         </p:nvSpPr>
         <p:spPr>
           <a:xfrm>
-            <a:off x="1280160" y="1024128"/>
+            <a:off x="1280160" y="1193140"/>
             <a:ext cx="777240" cy="256032"/>
           </a:xfrm>
           <a:prstGeom prst="rect">
@@ -20602,7 +20612,7 @@
       </p:pic>
       <p:sp>
         <p:nvSpPr>
-          <p:cNvPr id="7" name="Shape 4"/>
+          <p:cNvPr id="8" name="Shape 4"/>
           <p:cNvSpPr/>
           <p:nvPr/>
         </p:nvSpPr>
@@ -20624,7 +20634,7 @@
       </p:sp>
       <p:sp>
         <p:nvSpPr>
-          <p:cNvPr id="8" name="Text 5"/>
+          <p:cNvPr id="9" name="Text 5"/>
           <p:cNvSpPr/>
           <p:nvPr/>
         </p:nvSpPr>
@@ -20663,7 +20673,7 @@
       </p:sp>
       <p:sp>
         <p:nvSpPr>
-          <p:cNvPr id="9" name="Text 6"/>
+          <p:cNvPr id="10" name="Text 6"/>
           <p:cNvSpPr/>
           <p:nvPr/>
         </p:nvSpPr>
@@ -20705,7 +20715,7 @@
       </p:sp>
       <p:sp>
         <p:nvSpPr>
-          <p:cNvPr id="10" name="Shape 7"/>
+          <p:cNvPr id="11" name="Shape 7"/>
           <p:cNvSpPr/>
           <p:nvPr/>
         </p:nvSpPr>
@@ -20727,7 +20737,7 @@
       </p:sp>
       <p:sp>
         <p:nvSpPr>
-          <p:cNvPr id="11" name="Text 8"/>
+          <p:cNvPr id="12" name="Text 8"/>
           <p:cNvSpPr/>
           <p:nvPr/>
         </p:nvSpPr>
@@ -20766,7 +20776,7 @@
       </p:sp>
       <p:sp>
         <p:nvSpPr>
-          <p:cNvPr id="12" name="Text 9"/>
+          <p:cNvPr id="13" name="Text 9"/>
           <p:cNvSpPr/>
           <p:nvPr/>
         </p:nvSpPr>
@@ -20808,7 +20818,7 @@
       </p:sp>
       <p:sp>
         <p:nvSpPr>
-          <p:cNvPr id="13" name="Text 10"/>
+          <p:cNvPr id="14" name="Text 10"/>
           <p:cNvSpPr/>
           <p:nvPr/>
         </p:nvSpPr>
@@ -20847,7 +20857,7 @@
       </p:sp>
       <p:sp>
         <p:nvSpPr>
-          <p:cNvPr id="14" name="Shape 11"/>
+          <p:cNvPr id="15" name="Shape 11"/>
           <p:cNvSpPr/>
           <p:nvPr/>
         </p:nvSpPr>
@@ -20869,7 +20879,7 @@
       </p:sp>
       <p:sp>
         <p:nvSpPr>
-          <p:cNvPr id="15" name="Text 12"/>
+          <p:cNvPr id="16" name="Text 12"/>
           <p:cNvSpPr/>
           <p:nvPr/>
         </p:nvSpPr>
@@ -20908,7 +20918,7 @@
       </p:sp>
       <p:sp>
         <p:nvSpPr>
-          <p:cNvPr id="16" name="Text 13"/>
+          <p:cNvPr id="17" name="Text 13"/>
           <p:cNvSpPr/>
           <p:nvPr/>
         </p:nvSpPr>
@@ -21114,7 +21124,7 @@
         </p:nvSpPr>
         <p:spPr>
           <a:xfrm>
-            <a:off x="1280160" y="1024128"/>
+            <a:off x="1280160" y="1193140"/>
             <a:ext cx="777240" cy="256032"/>
           </a:xfrm>
           <a:prstGeom prst="roundRect">
@@ -21136,7 +21146,7 @@
         </p:nvSpPr>
         <p:spPr>
           <a:xfrm>
-            <a:off x="1280160" y="1024128"/>
+            <a:off x="1280160" y="1193140"/>
             <a:ext cx="777240" cy="256032"/>
           </a:xfrm>
           <a:prstGeom prst="rect">
@@ -21193,7 +21203,7 @@
       </p:pic>
       <p:sp>
         <p:nvSpPr>
-          <p:cNvPr id="7" name="Shape 4"/>
+          <p:cNvPr id="8" name="Shape 4"/>
           <p:cNvSpPr/>
           <p:nvPr/>
         </p:nvSpPr>
@@ -21220,7 +21230,7 @@
       </p:sp>
       <p:sp>
         <p:nvSpPr>
-          <p:cNvPr id="8" name="Text 5"/>
+          <p:cNvPr id="9" name="Text 5"/>
           <p:cNvSpPr/>
           <p:nvPr/>
         </p:nvSpPr>
@@ -21362,7 +21372,7 @@
       </p:sp>
       <p:sp>
         <p:nvSpPr>
-          <p:cNvPr id="9" name="Text 6"/>
+          <p:cNvPr id="10" name="Text 6"/>
           <p:cNvSpPr/>
           <p:nvPr/>
         </p:nvSpPr>
@@ -21401,7 +21411,7 @@
       </p:sp>
       <p:sp>
         <p:nvSpPr>
-          <p:cNvPr id="10" name="Text 7"/>
+          <p:cNvPr id="11" name="Text 7"/>
           <p:cNvSpPr/>
           <p:nvPr/>
         </p:nvSpPr>
@@ -21440,7 +21450,7 @@
       </p:sp>
       <p:sp>
         <p:nvSpPr>
-          <p:cNvPr id="11" name="Shape 8"/>
+          <p:cNvPr id="12" name="Shape 8"/>
           <p:cNvSpPr/>
           <p:nvPr/>
         </p:nvSpPr>
@@ -21455,14 +21465,14 @@
             </a:avLst>
           </a:prstGeom>
           <a:solidFill>
-            <a:srgbClr val="000000"/>
+            <a:srgbClr val="EFEAFE"/>
           </a:solidFill>
           <a:ln/>
         </p:spPr>
       </p:sp>
       <p:sp>
         <p:nvSpPr>
-          <p:cNvPr id="12" name="Text 9"/>
+          <p:cNvPr id="13" name="Text 9"/>
           <p:cNvSpPr/>
           <p:nvPr/>
         </p:nvSpPr>
@@ -21501,7 +21511,7 @@
       </p:sp>
       <p:sp>
         <p:nvSpPr>
-          <p:cNvPr id="13" name="Text 10"/>
+          <p:cNvPr id="14" name="Text 10"/>
           <p:cNvSpPr/>
           <p:nvPr/>
         </p:nvSpPr>
@@ -21540,7 +21550,7 @@
       </p:sp>
       <p:sp>
         <p:nvSpPr>
-          <p:cNvPr id="14" name="Text 11"/>
+          <p:cNvPr id="15" name="Text 11"/>
           <p:cNvSpPr/>
           <p:nvPr/>
         </p:nvSpPr>
@@ -21579,7 +21589,7 @@
       </p:sp>
       <p:sp>
         <p:nvSpPr>
-          <p:cNvPr id="15" name="Shape 12"/>
+          <p:cNvPr id="16" name="Shape 12"/>
           <p:cNvSpPr/>
           <p:nvPr/>
         </p:nvSpPr>
@@ -21594,14 +21604,14 @@
             </a:avLst>
           </a:prstGeom>
           <a:solidFill>
-            <a:srgbClr val="000000"/>
+            <a:srgbClr val="EFEAFE"/>
           </a:solidFill>
           <a:ln/>
         </p:spPr>
       </p:sp>
       <p:sp>
         <p:nvSpPr>
-          <p:cNvPr id="16" name="Text 13"/>
+          <p:cNvPr id="17" name="Text 13"/>
           <p:cNvSpPr/>
           <p:nvPr/>
         </p:nvSpPr>
@@ -21640,7 +21650,7 @@
       </p:sp>
       <p:sp>
         <p:nvSpPr>
-          <p:cNvPr id="17" name="Text 14"/>
+          <p:cNvPr id="18" name="Text 14"/>
           <p:cNvSpPr/>
           <p:nvPr/>
         </p:nvSpPr>
@@ -21679,7 +21689,7 @@
       </p:sp>
       <p:sp>
         <p:nvSpPr>
-          <p:cNvPr id="18" name="Text 15"/>
+          <p:cNvPr id="19" name="Text 15"/>
           <p:cNvSpPr/>
           <p:nvPr/>
         </p:nvSpPr>
@@ -21718,7 +21728,7 @@
       </p:sp>
       <p:sp>
         <p:nvSpPr>
-          <p:cNvPr id="19" name="Shape 16"/>
+          <p:cNvPr id="20" name="Shape 16"/>
           <p:cNvSpPr/>
           <p:nvPr/>
         </p:nvSpPr>
@@ -21733,14 +21743,14 @@
             </a:avLst>
           </a:prstGeom>
           <a:solidFill>
-            <a:srgbClr val="000000"/>
+            <a:srgbClr val="EFEAFE"/>
           </a:solidFill>
           <a:ln/>
         </p:spPr>
       </p:sp>
       <p:sp>
         <p:nvSpPr>
-          <p:cNvPr id="20" name="Text 17"/>
+          <p:cNvPr id="21" name="Text 17"/>
           <p:cNvSpPr/>
           <p:nvPr/>
         </p:nvSpPr>
@@ -21779,7 +21789,7 @@
       </p:sp>
       <p:sp>
         <p:nvSpPr>
-          <p:cNvPr id="21" name="Text 18"/>
+          <p:cNvPr id="22" name="Text 18"/>
           <p:cNvSpPr/>
           <p:nvPr/>
         </p:nvSpPr>
@@ -21818,7 +21828,7 @@
       </p:sp>
       <p:sp>
         <p:nvSpPr>
-          <p:cNvPr id="22" name="Text 19"/>
+          <p:cNvPr id="23" name="Text 19"/>
           <p:cNvSpPr/>
           <p:nvPr/>
         </p:nvSpPr>
@@ -21857,7 +21867,7 @@
       </p:sp>
       <p:sp>
         <p:nvSpPr>
-          <p:cNvPr id="23" name="Shape 20"/>
+          <p:cNvPr id="24" name="Shape 20"/>
           <p:cNvSpPr/>
           <p:nvPr/>
         </p:nvSpPr>
@@ -21872,14 +21882,14 @@
             </a:avLst>
           </a:prstGeom>
           <a:solidFill>
-            <a:srgbClr val="000000"/>
+            <a:srgbClr val="EFEAFE"/>
           </a:solidFill>
           <a:ln/>
         </p:spPr>
       </p:sp>
       <p:sp>
         <p:nvSpPr>
-          <p:cNvPr id="24" name="Text 21"/>
+          <p:cNvPr id="25" name="Text 21"/>
           <p:cNvSpPr/>
           <p:nvPr/>
         </p:nvSpPr>
@@ -22082,7 +22092,7 @@
         </p:nvSpPr>
         <p:spPr>
           <a:xfrm>
-            <a:off x="1280160" y="1024128"/>
+            <a:off x="1280160" y="1193140"/>
             <a:ext cx="777240" cy="256032"/>
           </a:xfrm>
           <a:prstGeom prst="roundRect">
@@ -22104,7 +22114,7 @@
         </p:nvSpPr>
         <p:spPr>
           <a:xfrm>
-            <a:off x="1280160" y="1024128"/>
+            <a:off x="1280160" y="1193140"/>
             <a:ext cx="777240" cy="256032"/>
           </a:xfrm>
           <a:prstGeom prst="rect">
@@ -22161,7 +22171,7 @@
       </p:pic>
       <p:sp>
         <p:nvSpPr>
-          <p:cNvPr id="7" name="Shape 4"/>
+          <p:cNvPr id="8" name="Shape 4"/>
           <p:cNvSpPr/>
           <p:nvPr/>
         </p:nvSpPr>
@@ -22183,7 +22193,7 @@
       </p:sp>
       <p:sp>
         <p:nvSpPr>
-          <p:cNvPr id="8" name="Text 5"/>
+          <p:cNvPr id="9" name="Text 5"/>
           <p:cNvSpPr/>
           <p:nvPr/>
         </p:nvSpPr>
@@ -22222,7 +22232,7 @@
       </p:sp>
       <p:sp>
         <p:nvSpPr>
-          <p:cNvPr id="9" name="Text 6"/>
+          <p:cNvPr id="10" name="Text 6"/>
           <p:cNvSpPr/>
           <p:nvPr/>
         </p:nvSpPr>
@@ -22264,7 +22274,7 @@
       </p:sp>
       <p:sp>
         <p:nvSpPr>
-          <p:cNvPr id="10" name="Shape 7"/>
+          <p:cNvPr id="11" name="Shape 7"/>
           <p:cNvSpPr/>
           <p:nvPr/>
         </p:nvSpPr>
@@ -22286,7 +22296,7 @@
       </p:sp>
       <p:sp>
         <p:nvSpPr>
-          <p:cNvPr id="11" name="Text 8"/>
+          <p:cNvPr id="12" name="Text 8"/>
           <p:cNvSpPr/>
           <p:nvPr/>
         </p:nvSpPr>
@@ -22325,7 +22335,7 @@
       </p:sp>
       <p:sp>
         <p:nvSpPr>
-          <p:cNvPr id="12" name="Text 9"/>
+          <p:cNvPr id="13" name="Text 9"/>
           <p:cNvSpPr/>
           <p:nvPr/>
         </p:nvSpPr>
@@ -22364,7 +22374,7 @@
       </p:sp>
       <p:sp>
         <p:nvSpPr>
-          <p:cNvPr id="13" name="Shape 10"/>
+          <p:cNvPr id="14" name="Shape 10"/>
           <p:cNvSpPr/>
           <p:nvPr/>
         </p:nvSpPr>
@@ -22386,7 +22396,7 @@
       </p:sp>
       <p:sp>
         <p:nvSpPr>
-          <p:cNvPr id="14" name="Text 11"/>
+          <p:cNvPr id="15" name="Text 11"/>
           <p:cNvSpPr/>
           <p:nvPr/>
         </p:nvSpPr>
@@ -22425,7 +22435,7 @@
       </p:sp>
       <p:sp>
         <p:nvSpPr>
-          <p:cNvPr id="15" name="Text 12"/>
+          <p:cNvPr id="16" name="Text 12"/>
           <p:cNvSpPr/>
           <p:nvPr/>
         </p:nvSpPr>
@@ -22464,7 +22474,7 @@
       </p:sp>
       <p:sp>
         <p:nvSpPr>
-          <p:cNvPr id="16" name="Shape 13"/>
+          <p:cNvPr id="17" name="Shape 13"/>
           <p:cNvSpPr/>
           <p:nvPr/>
         </p:nvSpPr>
@@ -22486,7 +22496,7 @@
       </p:sp>
       <p:sp>
         <p:nvSpPr>
-          <p:cNvPr id="17" name="Text 14"/>
+          <p:cNvPr id="18" name="Text 14"/>
           <p:cNvSpPr/>
           <p:nvPr/>
         </p:nvSpPr>
@@ -22525,7 +22535,7 @@
       </p:sp>
       <p:sp>
         <p:nvSpPr>
-          <p:cNvPr id="18" name="Text 15"/>
+          <p:cNvPr id="19" name="Text 15"/>
           <p:cNvSpPr/>
           <p:nvPr/>
         </p:nvSpPr>
@@ -22567,7 +22577,7 @@
       </p:sp>
       <p:sp>
         <p:nvSpPr>
-          <p:cNvPr id="19" name="Shape 16"/>
+          <p:cNvPr id="20" name="Shape 16"/>
           <p:cNvSpPr/>
           <p:nvPr/>
         </p:nvSpPr>
@@ -22589,7 +22599,7 @@
       </p:sp>
       <p:sp>
         <p:nvSpPr>
-          <p:cNvPr id="20" name="Text 17"/>
+          <p:cNvPr id="21" name="Text 17"/>
           <p:cNvSpPr/>
           <p:nvPr/>
         </p:nvSpPr>
@@ -22628,7 +22638,7 @@
       </p:sp>
       <p:sp>
         <p:nvSpPr>
-          <p:cNvPr id="21" name="Text 18"/>
+          <p:cNvPr id="22" name="Text 18"/>
           <p:cNvSpPr/>
           <p:nvPr/>
         </p:nvSpPr>

--- a/docs/decks/L10.pptx
+++ b/docs/decks/L10.pptx
@@ -524,7 +524,7 @@
           <a:p>
             <a:r>
               <a:rPr lang="en-US" dirty="0"/>
-              <a:t>Вітаю на десятому уроці — другому уроці тижня observability + evals. Минулого разу ми навчили систему відповідати на питання «що відбувається» — метрики, консоль, розслідування. Сьогодні закриваємо друге питання тижня: «чи не стало гірше». «Я потикав у чат — ніби норм» — це не перевірка якості, це настрій. Сьогодні якість стає числом: golden dataset як письмовий контракт поведінки системи, rule-based grader'и, поріг і exit code. Кульмінація уроку — момент, заради якого все будувалося: регресію промпта, яку на другому уроці ви бачили очима — rollback на v1, бот каже «не знаю», — наприкінці цього уроку зловить одна команда з термінала. Однаково, щоразу, за секунди. А наступного тижня цей самий прогін стане гейтом у CI, який фізично не пустить регресію в main. Поїхали.</a:t>
+              <a:t/>
             </a:r>
             <a:endParaRPr lang="en-US" dirty="0"/>
           </a:p>
@@ -612,7 +612,7 @@
           <a:p>
             <a:r>
               <a:rPr lang="en-US" dirty="0"/>
-              <a:t>Найчастіше питання після «навіщо golden dataset» — «а де взяти кейси». Відповідь «придумати» дає найгірший можливий датасет: придумані кейси перевіряють те, що ви й так уявляєте, а система ламається на тому, чого ви не уявляли. Робочі джерела, у порядку цінності. Реальні звернення зі саппорту чи лога — формулювання, яких ви не вигадали б: із помилками, сленгом, двома питаннями в одному; це і є ваш справжній трафік. Кожен інцидент — рівно один кейс: гарантія, що та сама поломка не повториться тихо; найдешевший спосіб перетворити біль на актив. Кожне «ой» на демо — межові випадки, які знаходить свіже око; такі речі забуваються за годину. І негативні кейси — injection, відмови, заборонені обіцянки: саме тут регресії найдорожчі й найтихіші. Скільки їх треба? Не «якомога більше», а «щоб покривалися класи поломок, які вас лякають». Шість кейсів, що ловлять шість різних класів, кращі за шістдесят варіацій одного питання. Практичний спосіб перевірити покриття — зламати систему навмисно: приберіть маркер із промпта, відключіть інструмент, зіпсуйте маршрутизацію. Кожна така поломка мусить когось повалити. Лишився зеленим — у вас діра, і кількість кейсів ні до чого. І одна деталь про стабільність: eval — не юніт-тест, під ним недетермінована модель. Кейс, який «мигає», — це дефект кейса, а не привід ігнорувати червоне: очікування занадто вузьке або питання неоднозначне. Лікується переписуванням кейса, а не перезапуском прогону.</a:t>
+              <a:t/>
             </a:r>
             <a:endParaRPr lang="en-US" dirty="0"/>
           </a:p>
@@ -700,7 +700,7 @@
           <a:p>
             <a:r>
               <a:rPr lang="en-US" dirty="0"/>
-              <a:t>Хто вирішує «пройшов/не пройшов»? У ядрі курсу — функція на десять рядків. Читаємо. Якщо кейс очікує відмову — шукаємо refusal-маркери: «не можу», cannot, refuse. Зверніть увагу на коментар: «вибачте» зі списку прибрано, бо воно є і в заглушці graceful degradation — refusal-кейс проходив би навіть під час повного outage. Це жива ілюстрація пастки з блоку 03, прямо в коді. Далі expect: кожне ключове слово мусить бути у відповіді — нема хоч одного, кейс упав. Потім forbid: знайшли заборонене — упав. Усе. Сильні сторони rule-based підходу — рівно ті, що потрібні для гейта. Він безкоштовний: жодного токена. Детермінований: той самий вхід — той самий вердикт, завжди. І працює на mock. Його чесна межа: він перевіряє «є/нема», а не «наскільки добре сказано». «Відповідь містить слово email» — так; «відповідь ввічлива і не заплутує» — це вже не до нього, про це опційний блок про LLM-as-judge. Для контракту поведінки цієї межі зазвичай досить: більшість регресій, які болять, — це «перестало містити суть» або «почало містити заборонене», і обидві ловляться ключовими словами. І прямо тому grader перевіряє наявність ключових слів, а не рівність рядків — це єдиний спосіб отримати повторюваність там, де відповідь щоразу трохи інша.</a:t>
+              <a:t/>
             </a:r>
             <a:endParaRPr lang="en-US" dirty="0"/>
           </a:p>
@@ -788,7 +788,7 @@
           <a:p>
             <a:r>
               <a:rPr lang="en-US" dirty="0"/>
-              <a:t>Решта run.py — чесний цикл без магії: прочитати кейси, зробити POST у /chat — той самий ендпоінт, у який пише консоль, жодного «тестового режиму», — оцінити grader'ом і порахувати. Два виходи, і обидва важливі. Число — «5/6 passed» — для людини: видно, що саме впало, у виводі поруч перші 60 символів кожної відповіді. Exit code — для машин: 0 — зелено, 1 — червоно. Саме exit code перетворює перевірку якості з ритуалу на будівельний блок: його розуміє шел, Docker, будь-який CI. Наступного тижня цей нуль-або-один стане гейтом, який фізично не пустить регресію в main. Зверніть увагу і на те, чого в runner'і немає: браузера, скріншотів, очей. Прогін працює в терміналі за секунди — тому його можна запускати після кожної правки, а не «перед релізом». Це і є відповідь на неповторюваність ручної перевірки з блоку 01: перевірка, що коштує секунди, виконується завжди; перевірка, що коштує пів години клацання, — ніколи.</a:t>
+              <a:t/>
             </a:r>
             <a:endParaRPr lang="en-US" dirty="0"/>
           </a:p>
@@ -876,7 +876,7 @@
           <a:p>
             <a:r>
               <a:rPr lang="en-US" dirty="0"/>
-              <a:t>Скільки «пройшло» достатньо для зеленого? Здається, відповідь очевидна — всі. Але подумайте, що означає поріг «6 з 6» операційно: один флейковий кейс — тимчасовий збій, невдале формулювання, зміна в mock — і всі релізи стоять. Перфекціонізм у порозі обертається тим, що червоний прогін перестають сприймати як подію: «а, це знову той кейс». Для нашого набору розумний дефолт — 5 з 6. Чому саме так: регресія промпта валить одразу три промпто-чутливі кейси — faq-1, faq-2, caps-1 — і пробиває поріг гарантовано, а одиничний флейк — ні. Загальні правила порога. Перше: поріг має ловити класи поломок, які вас лякають, — перевірте: зламайте — пробиває? Друге: поріг росте разом із датасетом. Додали кейси — перерахуйте: після ДЗ тижня 5 у вашому наборі буде близько десяти кейсів і поріг 9 — правило N мінус один. Третє: зміна порогу — це теж реліз, з рев'ю і поясненням чому. І практична пастка: поріг живе у двох місцях — у команді локального прогону і в CI-workflow, файл eval-gate.yml. Розширили датасет — оновіть обидва, інакше гейт тижня 6 лишиться з порогом під старий набір і мовчки терпітиме регресії.</a:t>
+              <a:t/>
             </a:r>
             <a:endParaRPr lang="en-US" dirty="0"/>
           </a:p>
@@ -964,7 +964,7 @@
           <a:p>
             <a:r>
               <a:rPr lang="en-US" dirty="0"/>
-              <a:t>Момент, заради якого все будувалося. Згадайте урок 2: rollback на v1, бот каже «не знаю», ви бачите це очима. Тепер той самий сценарій — через eval. Прогін на здоровій системі: шість із шести, поріг 5, зелено. Активуємо «погану» версію промпта — v1. Прогін: faq-кейси падають з «не знаю», три з шести, ЧЕРВОНО, exit code 1. Відкат на v2 — і знову шість із шести. Відчуйте різницю в надійності: «я подивився, ніби ок» проти «6 з 6, поріг 5, exit code 0». Перше залежить від того, хто дивився і чи не поспішав. Друге — однакове для стажера, тімліда і CI-раннера о третій ночі. І це працює на mock без жодного ключа: mock відповідає по-різному залежно від промпта, отже регресія промпта міняє відповіді, отже grader її ловить. Механіка контуру повністю бойова. Одна чесна відмінність, яку принесе реальний ключ: mock детермінований, жива модель — ні. Той самий кейс може пройти вранці й впасти ввечері просто тому, що модель сформулювала відповідь інакше. Інструменти проти цього відомі: мінімальна температура для eval-прогонів і очікування на суть замість форми. А якщо кейс усе одно миготить — це сигнал переглянути його очікування, а не перезапускати прогін, «поки не позеленіє». Флейк, який терплять, коштує дорожче за кейс, який переписали. І флейк не завжди винна модель — інколи шумить середовище. У мене був випадок із CI-гейтами: перевірки, чутливі до навантаження, падали не через регресії, а через те, що спільний CI-раннер був зайнятий чужими збірками. Лікування — не перезапуск: брати мінімум з K прогонів і давати чутливим тестам реалістичні таймаути. Перш ніж звинувачувати недетермінізм моделі, перевірте, чи детерміноване ваше власне середовище.</a:t>
+              <a:t/>
             </a:r>
             <a:endParaRPr lang="en-US" dirty="0"/>
           </a:p>
@@ -1052,7 +1052,7 @@
           <a:p>
             <a:r>
               <a:rPr lang="en-US" dirty="0"/>
-              <a:t>Це опційний блок. Що робити там, де правила безсилі? «Відповідь спирається на надані факти, а не вигадує?» — faithfulness. «Тон ввічливий?» «Яка з двох версій промпта відповідає краще?» Ключовими словами це не перевіриш. Для таких питань є model-based підхід: інша модель читає відповідь і виносить вердикт за заданими критеріями. Але в judge два цінники, про які часто забувають. Перший — гроші: judge-виклики — це реальні токени, і правило з уроку 4 — «рахується все, що ходить у модель» — стосується їх у повний зріст. Облік із міткою, інакше перевірка якості тихо стане другою статтею витрат. Другий — недетермінованість: judge сам є LLM, тобто той самий вхід може отримати різний вердикт. Для гейта це неприємна властивість — flaky-перевірки розмивають довіру. І тут з'являється робота, якої на mock немає взагалі, — калібрування. На живій моделі той самий кейс проходить, скажімо, у 8 прогонах з 10 — і треба вирішити: це дефект відповіді чи занадто вузька перевірка? Практичний рецепт першого ж дня на реальному ключі: візьміть свій датасет, проженіть його по живій моделі кілька разів підряд і позначте кейси, що «мигають». Кожен такий кейс — сигнал переписати перевірку на властивість або пом'якшити judge-критерій. Поки цього не зробили, ставити judge у блокуючий гейт небезпечно: він валитиме зелені релізи на власному шумі.</a:t>
+              <a:t/>
             </a:r>
             <a:endParaRPr lang="en-US" dirty="0"/>
           </a:p>
@@ -1140,7 +1140,7 @@
           <a:p>
             <a:r>
               <a:rPr lang="en-US" dirty="0"/>
-              <a:t>Стартові шість кейсів — це скелет. Живим контракт роблять поповнення, і в них є просте правило. Кейс додається у двох випадках: коли ви щось полагодили — щоб не зламалося знову, регресійний кейс; і коли ви чогось злякалися — новий сценарій атаки, дивна поведінка на демо, скарга користувача. Так датасет росте з реального досвіду системи, а не з фантазії за столом — і кожен кейс має історію, яка пояснює, навіщо він тут. Як це виглядає на практиці нашого курсу. Сьогодні в лабі ви додасте перші власні кейси: подяку — «Дякую!» не має отримати «не знаю», — уточнення, ще один injection-варіант. У ДЗ тижня 5 — мінімум чотири, включно з негативними. А далі — після кожного інциденту наступних тижнів і після кожного «ой» на демо — по кейсу. Через пів року такий датасет розповідає історію вашої системи точніше за будь-яку документацію: у ньому видно, чого вона вже боїться.</a:t>
+              <a:t/>
             </a:r>
             <a:endParaRPr lang="en-US" dirty="0"/>
           </a:p>
@@ -1228,7 +1228,7 @@
           <a:p>
             <a:r>
               <a:rPr lang="en-US" dirty="0"/>
-              <a:t>Перш ніж перейти до екрана — що саме ви зараз побачите і навіщо. Послідовність така: спершу golden.jsonl — стартовий контракт на один екран. Потім прогін run.py на здоровій системі: 6/6, зелено. Далі activate v1 — «погана» версія промпта, та сама, що на уроці 2. Прогін: 3/6, ЧЕРВОНО. Відкат на v2 — 6/6, зелено знову. І фінальний кадр — echo $?: exit code очима, той самий нуль-або-один, який наступного тижня стане гейтом у CI. Навіщо це все: побачити, що регресія, яку на уроці 2 ловили очима, тепер ловиться командою — однаково, щоразу, за секунди. [Ведучому: на w5 датасет уже розширений (10 кейсів, поріг 9) — для кадру «6/6→3/6» бери стартовий 6-кейсовий набір. Exit code знімай БЕЗ pipe: python evals/run.py … | tail віддає код виходу tail, не runner'а — фальшивий 0 замість 1; спершу прогін, потім окремо echo $?. Між червоним і зеленим прогоном не забудь повернути v2 — інакше наступні дублі почнуться з «не знаю». Кирилиця в Git Bash — тіло запиту з файлу, не інлайном.]</a:t>
+              <a:t/>
             </a:r>
             <a:endParaRPr lang="en-US" dirty="0"/>
           </a:p>
@@ -1316,7 +1316,7 @@
           <a:p>
             <a:r>
               <a:rPr lang="en-US" dirty="0"/>
-              <a:t>Крок перший — анатомія кейса. Прочитати golden.jsonl: faq-кейси з expect і forbid, tool-кейс, safety-кейс з expect_refusal. Проговорити, який тиждень курсу перевіряє кожен. Крок другий — grader і runner. Прочитати run.py: цикл, POST у сервіс, grade, підсумок і exit code. Прогнати — команда є в гайді для студента, у розділі про evals: python evals/run.py --dataset evals/golden.jsonl --threshold 5. Результат: 6/6, зелено; перевірити echo $? — нуль. Два попередження. Якщо перед цим ти ганяв __fail_503 з лаби уроку 9 і робив опційний circuit breaker — почекай секунд тридцять, поки breaker закриється, інакше побачиш фальшиву тотальну регресію; у core без breaker'а чекати нічого не треба. І друге: прогін проганяє кейс із незворотною дією, тож у черзі GET /approvals після кожного прогону лишається нова pending-заявка — це очікувано, а не баг; перед демо черги почисти стан через docker compose down -v. Крок третій — зламати і зловити: rollback промпта на v1, як в уроці 2, прогін — 3/6, червоно, exit code 1; повернути v2 — 6/6. Регресія, яку ви бачили очима, тепер ловиться командою. Крок четвертий — власні кейси. Додати щонайменше два: позитивний — подяка або уточнення — і негативний — перефразований injection. Прогнати, за потреби підняти поріг — і пояснити собі чому. І опційний п'ятий — спроєктувати judge: для одного кейса сформулювати критерії model-based перевірки, faithfulness або тон, і прикинути її вартість за прайсом з уроку 4. Реалізація — з реальним ключем, поза core.</a:t>
+              <a:t/>
             </a:r>
             <a:endParaRPr lang="en-US" dirty="0"/>
           </a:p>
@@ -1404,7 +1404,7 @@
           <a:p>
             <a:r>
               <a:rPr lang="en-US" dirty="0"/>
-              <a:t>Зафіксуємо, що ми щойно побачили — і що це доводить. Перше: регресія промпта ловиться командою. Та сама поломка, яку на уроці 2 ви бачили очима, тепер дає 3/6 і exit code 1 — однаково, щоразу, за секунди, незалежно від того, хто запускає. Друге: якість стала числом і контрактом. Golden.jsonl лежить у репозиторії, читається людиною, діфається в PR; його зміни — включно зі зміною порогу — проходять рев'ю, як код. Що не в контракті — те не обіцяно. Третє: exit code готовий для CI. Нуль-або-один розуміє шел, Docker і будь-який CI-раннер — наступного тижня цей самий прогін повисне на кожному PR і фізично не пустить регресію в main. Разом це і є відповідь на питання тижня «чи не стало гірше»: не настрій, не «ніби норм», а число, поріг і код виходу.</a:t>
+              <a:t/>
             </a:r>
             <a:endParaRPr lang="en-US" dirty="0"/>
           </a:p>
@@ -1492,7 +1492,7 @@
           <a:p>
             <a:r>
               <a:rPr lang="en-US" dirty="0"/>
-              <a:t>Домовимось про результат уроку — конкретними діями. Після сьогоднішнього заняття ви зможете: прогнати eval suite з термінала і прочитати обидва його виходи — число для людини і exit code для машин; пояснити кожен із шести кейсів golden.jsonl і сказати, який тиждень курсу перевіряє кожен; зламати промпт навмисно і зловити регресію командою — червоний прогін, відкат, зелений; додати власні кейси, позитивний і негативний, і перерахувати поріг — розуміючи чому; перевірити датасет на фальш-позитиви прогоном із повністю зламаним провайдером — має впасти все; і пояснити, коли потрібен LLM-as-judge і чому він не безкоштовний. Кожен пункт ви перевірите руками ще сьогодні — у лабораторній.</a:t>
+              <a:t/>
             </a:r>
             <a:endParaRPr lang="en-US" dirty="0"/>
           </a:p>
@@ -1580,7 +1580,7 @@
           <a:p>
             <a:r>
               <a:rPr lang="en-US" dirty="0"/>
-              <a:t>Перш ніж розійтися — чесна перевірка обов'язкової доріжки, без оцінок. П'ять пунктів. Прогін зелений — і ви розумієте кожен кейс: не «воно пройшло», а «я знаю, що саме перевіряє faq-1 і чому в refund-1 очікується тікет». Зламаний промпт дає червоний прогін, відкат — зелений, і це відтворюється: цикл «зламай і злови» ви прокрутили руками. Додано щонайменше два власні кейси, серед них негативний. Прогін із __fail_503 у кожному кейсі дає нуль пройдених — отже фальш-позитивів у наборі немає: жоден кейс не зеленіє під час повного збою. І ви можете пояснити, коли потрібен LLM-as-judge і чому він не безкоштовний — два цінники: гроші і недетермінованість. Якщо всі п'ять пунктів — «так», ви готові до наступного тижня, де цей прогін стане гейтом у CI. Питання, які лишилися, — несіть у канал потоку або на Q&amp;A.</a:t>
+              <a:t/>
             </a:r>
             <a:endParaRPr lang="en-US" dirty="0"/>
           </a:p>
@@ -1668,7 +1668,7 @@
           <a:p>
             <a:r>
               <a:rPr lang="en-US" dirty="0"/>
-              <a:t>П'ять способів звести нанівець усе, що ми сьогодні збудували. «Потикав у чат» як процес перевірки якості: неповторюване вимірювання — не вимірювання; з нього ми сьогодні починали. Датасет із трьох кейсів, який завжди зелений: ілюзія контракту гірша за його відсутність — галочка є, захисту немає. Поріг «усі 100%»: один флейк паралізує релізи і привчає команду ігнорувати червоне — а червоне, яке ігнорують, гірше за відсутність перевірки. LLM-as-judge на все підряд без обліку вартості: перевірка якості тихо стає другою статтею витрат — непорахованою; правило уроку 4 — «рахується все, що ходить у модель» — стосується і judge. І датасет, який не поповнюється після інцидентів: кожен незаписаний інцидент — це регресія, що повернеться. Правило просте: щось зламалося — перш ніж закрити тікет, з'явився кейс.</a:t>
+              <a:t/>
             </a:r>
             <a:endParaRPr lang="en-US" dirty="0"/>
           </a:p>
@@ -1756,7 +1756,7 @@
           <a:p>
             <a:r>
               <a:rPr lang="en-US" dirty="0"/>
-              <a:t>Це другий урок тижня — отже, здається ДЗ тижня 5: observability plus evals. Обидва уроки тижня здаються одним PR: живі плитки консолі з уроку 9 плюс розширений eval-контур із сьогоднішнього. Критерії приймання коротко. Усі шість плиток консолі показують числа, звірені з SQL. У golden.jsonl — мінімум чотири власні кейси, серед них негативні. Прогін зелений з відповідно піднятим порогом — пам'ятайте правило N мінус один і те, що поріг живе у двох місцях. Повні критерії — у файлі ДЗ. Опційно, не оцінюється: таксономія помилок з окремими лічильниками — з уроку 9; і model-based grader, LLM-as-judge — він потребує реального ключа, і його виклики треба порахувати у вартість, як ми говорили в опційному блоці. Нагадаю механіку тижневих ДЗ: один PR у своєму репозиторії, рев'ю від ментора. І порада з сьогоднішнього уроку: перш ніж здавати, проженіть свій розширений набір із __fail_503 у кожному кейсі — нуль пройдених означає, що фальш-позитивів немає і ваші нові кейси справді щось перевіряють.</a:t>
+              <a:t/>
             </a:r>
             <a:endParaRPr lang="en-US" dirty="0"/>
           </a:p>
@@ -1844,7 +1844,7 @@
           <a:p>
             <a:r>
               <a:rPr lang="en-US" dirty="0"/>
-              <a:t>Підсумуємо. Якість — це не відчуття, а перелік тверджень, які можна перевірити: golden dataset — це контракт поведінки, письмова фіксація того, що система обіцяє користувачам. Очікування трьох видів — expect, forbid, expect_refusal — і пишуться вони на суть, а не на форму, інакше кейси флейкають. Rule-based grader безкоштовний, детермінований і працює на mock — рівно те, що потрібно для гейта; його чесна межа — «є/нема», а не «наскільки добре». Поріг — інженерне рішення: 5 з 6 сьогодні, правило N мінус один після росту датасету, і зміна порогу — це теж реліз. Головне: регресію промпта, яку на уроці 2 ви ловили очима, тепер ловить команда з термінала — число для людини, exit code для машин. Наступний урок — CI/CD quality gates, canary і rollback. Eval повертає exit code, а exit code створений для CI: вішаємо прогін на кожен PR — і регресія промпта більше фізично не потрапляє в main, бо гейт червоний і merge заблокований. Заодно на вас чекають чесні історії про те, як CI ловив помилки в самому цьому курсі, поки я його готував: гейти працюють і на авторів гейтів. До зустрічі.</a:t>
+              <a:t/>
             </a:r>
             <a:endParaRPr lang="en-US" dirty="0"/>
           </a:p>
@@ -1932,7 +1932,7 @@
           <a:p>
             <a:r>
               <a:rPr lang="en-US" dirty="0"/>
-              <a:t>Маршрут такий. Спершу проблема: чому «потикав у чат» — не перевірка, і звідки беруться регресії, коли ніхто нічого не деплоїв. Далі — серце уроку: golden dataset як контракт поведінки, три види очікувань, розтин шести стартових кейсів — і чесна розмова про те, звідки кейси беруться і скільки їх треба. Потім механіка: rule-based grader на десять рядків, runner з exit code і поріг як інженерне рішення — з його чесною сліпою плямою. Кульмінація — блок 08: ламаємо промпт і ловимо регресію командою, та сама історія з уроку 2, тепер без очей. Опційний блок — LLM-as-judge: що робити там, де правила безсилі, і чому він не в обов'язковій доріжці. Наприкінці — як датасет росте далі, лабораторна «зламай і злови», антипатерни і ДЗ тижня 5, яке здається одним PR за обидва уроки.</a:t>
+              <a:t/>
             </a:r>
             <a:endParaRPr lang="en-US" dirty="0"/>
           </a:p>
@@ -2020,7 +2020,7 @@
           <a:p>
             <a:r>
               <a:rPr lang="en-US" dirty="0"/>
-              <a:t>Домовимось про шість слів. Golden dataset — набір кейсів, на яких ви перевіряєте поведінку системи; кожен кейс це вхід плюс очікування. Expect — що мусить бути у відповіді; forbid — чого бути не має; expect_refusal — очікуємо відмову, це наші red-team кейси з уроку 8. Grader — код, який вирішує, чи кейс пройшов; у нас він на правилах, тобто безкоштовний і детермінований. Поріг — скільки кейсів має пройти, щоб прогін вважався зеленим. Exit code — нуль або одиниця, якою прогін розмовляє з машинами: саме її на тижні 6 читатиме CI. І LLM-as-judge — оцінювання відповіді іншою моделлю: опційна доріжка, у якої два цінники — гроші й недетермінізм.</a:t>
+              <a:t/>
             </a:r>
             <a:endParaRPr lang="en-US" dirty="0"/>
           </a:p>
@@ -2108,7 +2108,7 @@
           <a:p>
             <a:r>
               <a:rPr lang="en-US" dirty="0"/>
-              <a:t>Як ви дізнаєтесь, що зміна промпта нічого не зламала? У більшості команд — ніяк. Хтось клацає три питання в чаті, дивиться «ніби ок» і мержить. Проблема навіть не в лінощах: ручна перевірка принципово не повторювана. Сьогодні ви перевірили одні питання, завтра інші, післязавтра — забули перевірити взагалі. Той самий промпт може пройти перевірку в понеділок і провалити в середу — залежно від того, хто і що клацнув. А змінюється LLM-система з трьох боків одразу. Ваш промпт — найчастіше. Ваш код — routing, guardrails, кеш, усе впливає на відповіді. І чужа модель: провайдер оновив версію — і поведінка попливла без жодної дії з вашого боку. Три джерела регресій — і нуль повторюваних перевірок. Без вимірювання ви дізнаєтеся про проблему звідти ж, звідки завжди: від користувачів. На уроці 2 ми бачили це наживо: rollback промпта на v1 — і бот каже «не знаю». Тоді ви дивилися на регресію. Сьогодні будуємо механізм, який ловить її — однаково, щоразу, за секунди. І зв'язка з минулим уроком: метрики кажуть «щось не так» — error rate, fallback. Eval каже «що саме не так» — які поведінки зламалися. Разом вони закривають вимір «якість» повністю.</a:t>
+              <a:t/>
             </a:r>
             <a:endParaRPr lang="en-US" dirty="0"/>
           </a:p>
@@ -2196,7 +2196,7 @@
           <a:p>
             <a:r>
               <a:rPr lang="en-US" dirty="0"/>
-              <a:t>Основа механізму — набір кейсів, кожен з яких фіксує один шматочок очікуваної поведінки: вхід плюс очікування. Очікування бувають трьох видів. Expect — що мусить бути у відповіді: ключові слова, факти. Forbid — чого бути не має: «не знаю» на типове питання — провал. І expect_refusal — очікуємо відмову: це наші red-team кейси з уроку 8. Разом ці кейси — не тести в звичному сенсі, а контракт поведінки: письмова фіксація того, що система обіцяє користувачам. І важлива теза про розмір: репрезентативність важливіша за кількість. Типові питання, ескалації, tool-сценарії, атаки — по кілька кожного виду. 10–20 влучних кейсів дають більше, ніж 200 випадкових: випадкові перевіряють одне й те саме десятьма способами і мовчать про решту. Звідси принцип, який тримає весь урок: якість — це не відчуття, а перелік тверджень, які можна перевірити. Що не потрапило в датасет — того контракт не обіцяє, і воно зламається мовчки. Тому питання «що додати в golden dataset» — це насправді питання «що ми обіцяємо користувачам».</a:t>
+              <a:t/>
             </a:r>
             <a:endParaRPr lang="en-US" dirty="0"/>
           </a:p>
@@ -2284,7 +2284,7 @@
           <a:p>
             <a:r>
               <a:rPr lang="en-US" dirty="0"/>
-              <a:t>Звідки брати «репрезентативність», щоб не вигадувати за столом? З двох джерел, і обидва у вас уже є. Перше — лог: топ реальних інтентів вашого трафіку і є список того, що варто закрити кейсами насамперед. Кеш-аналіз з уроку 5 цю роботу фактично зробив. Друге — страхи: сценарії, поломка яких коштує найдорожче — ескалації, дії, атаки, — навіть якщо в трафіку їх частка мала. Хороший датасет — це «голова» розподілу плюс «хвіст» ризиків; усе, що між ними, дає менше захисту на кейс. І про форму очікувань. Пишіть expect на суть, а не на форму. Кейс, який очікує цілу фразу — «надішліть запит на email підтримки», — зламається від першого ж безневинного перефразування і привчить вас ігнорувати червоне. Ключове слово — «email» — переживає будь-яку редакцію відповіді, що зберігає зміст. Запам'ятайте цю фразу: над-специфіковані кейси — найчастіша причина флейків у rule-based наборах. Ми ще повернемося до неї, коли говоритимемо про стабільність.</a:t>
+              <a:t/>
             </a:r>
             <a:endParaRPr lang="en-US" dirty="0"/>
           </a:p>
@@ -2372,7 +2372,7 @@
           <a:p>
             <a:r>
               <a:rPr lang="en-US" dirty="0"/>
-              <a:t>Відкрийте evals/golden.jsonl — весь стартовий контракт уміщається на екран. Шість рядків JSONL. Прочитайте його як специфікацію системи, побудованої за п'ять тижнів. Faq-кейси перевіряють базову якість відповідей — і вони чутливі до промпта: саме вони червоніють після rollback. Order-1 перевіряє, що tool-виклик працює і результат потрапляє у відповідь — тиждень 3. Refund-1 — що ескалація народжує тікет через approvals — тижні 2 і 4. Safety-1 — що injection отримує відмову — тиждень 4, урок 8. Caps-1 — знову базова якість і чутливість до промпта. Один рядок JSONL — один урок курсу. І зверніть увагу на формат: він навмисно простий. JSONL читається людиною, діфається в PR і не потребує жодного інструмента. Контракт поведінки лежить у репозиторії поруч із кодом — і його зміни проходять те саме рев'ю, що й код.</a:t>
+              <a:t/>
             </a:r>
             <a:endParaRPr lang="en-US" dirty="0"/>
           </a:p>
@@ -2460,7 +2460,7 @@
           <a:p>
             <a:r>
               <a:rPr lang="en-US" dirty="0"/>
-              <a:t>Найкоштовніший баг золотого набору — не той кейс, що падає без причини, а той, що зеленіє без причини: кейс, який проходить під час повного збою. Приклад із цього самого курсу. Коли ми додали кейс на подяку — «Дякую!» з очікуванням «будь ласка», — він почав проходити навіть тоді, коли лежало все. Чому? Бо ввічлива заглушка деградації звучить «Вибачте, тимчасові проблеми… Спробуйте, будь ласка, трохи згодом». Слово «будь ласка» є в заглушці — кейс зелений при мертвому провайдері. Датасет казав «1 з 10», а мав казати «0 з 10». Лікування механічне. У кожен кейс, чиє expect може випадково зустрітися у вашій заглушці, додайте forbid з фрагментом тексту цієї заглушки. І перевірка, яку варто зробити один раз і назавжди: проженіть весь набір при штучно повністю зламаному провайдері — маркер __fail_503 у кожному кейсі. Має впасти все. Якщо хоч один кейс зелений — він не перевіряє нічого. Цю перевірку ви зробите в лабі, а в чек-листі уроку вона стоїть як обов'язкова умова: фальш-позитивів у наборі немає.</a:t>
+              <a:t/>
             </a:r>
             <a:endParaRPr lang="en-US" dirty="0"/>
           </a:p>
@@ -4627,7 +4627,7 @@
       </p:graphicFrame>
       <p:sp>
         <p:nvSpPr>
-          <p:cNvPr id="9" name="Shape 4"/>
+          <p:cNvPr id="8" name="Shape 4"/>
           <p:cNvSpPr/>
           <p:nvPr/>
         </p:nvSpPr>
@@ -4649,7 +4649,7 @@
       </p:sp>
       <p:sp>
         <p:nvSpPr>
-          <p:cNvPr id="10" name="Text 5"/>
+          <p:cNvPr id="9" name="Text 5"/>
           <p:cNvSpPr/>
           <p:nvPr/>
         </p:nvSpPr>
@@ -4688,7 +4688,7 @@
       </p:sp>
       <p:sp>
         <p:nvSpPr>
-          <p:cNvPr id="11" name="Text 6"/>
+          <p:cNvPr id="10" name="Text 6"/>
           <p:cNvSpPr/>
           <p:nvPr/>
         </p:nvSpPr>
@@ -4973,7 +4973,7 @@
       </p:pic>
       <p:sp>
         <p:nvSpPr>
-          <p:cNvPr id="8" name="Shape 4"/>
+          <p:cNvPr id="7" name="Shape 4"/>
           <p:cNvSpPr/>
           <p:nvPr/>
         </p:nvSpPr>
@@ -5000,7 +5000,7 @@
       </p:sp>
       <p:sp>
         <p:nvSpPr>
-          <p:cNvPr id="9" name="Text 5"/>
+          <p:cNvPr id="8" name="Text 5"/>
           <p:cNvSpPr/>
           <p:nvPr/>
         </p:nvSpPr>
@@ -5182,7 +5182,7 @@
       </p:sp>
       <p:sp>
         <p:nvSpPr>
-          <p:cNvPr id="10" name="Shape 6"/>
+          <p:cNvPr id="9" name="Shape 6"/>
           <p:cNvSpPr/>
           <p:nvPr/>
         </p:nvSpPr>
@@ -5204,7 +5204,7 @@
       </p:sp>
       <p:sp>
         <p:nvSpPr>
-          <p:cNvPr id="11" name="Shape 7"/>
+          <p:cNvPr id="10" name="Shape 7"/>
           <p:cNvSpPr/>
           <p:nvPr/>
         </p:nvSpPr>
@@ -5224,7 +5224,7 @@
       </p:sp>
       <p:sp>
         <p:nvSpPr>
-          <p:cNvPr id="12" name="Text 8"/>
+          <p:cNvPr id="11" name="Text 8"/>
           <p:cNvSpPr/>
           <p:nvPr/>
         </p:nvSpPr>
@@ -5263,7 +5263,7 @@
       </p:sp>
       <p:sp>
         <p:nvSpPr>
-          <p:cNvPr id="13" name="Text 9"/>
+          <p:cNvPr id="12" name="Text 9"/>
           <p:cNvSpPr/>
           <p:nvPr/>
         </p:nvSpPr>
@@ -5302,7 +5302,7 @@
       </p:sp>
       <p:sp>
         <p:nvSpPr>
-          <p:cNvPr id="14" name="Text 10"/>
+          <p:cNvPr id="13" name="Text 10"/>
           <p:cNvSpPr/>
           <p:nvPr/>
         </p:nvSpPr>
@@ -5344,7 +5344,7 @@
       </p:sp>
       <p:sp>
         <p:nvSpPr>
-          <p:cNvPr id="15" name="Shape 11"/>
+          <p:cNvPr id="14" name="Shape 11"/>
           <p:cNvSpPr/>
           <p:nvPr/>
         </p:nvSpPr>
@@ -5366,7 +5366,7 @@
       </p:sp>
       <p:sp>
         <p:nvSpPr>
-          <p:cNvPr id="16" name="Shape 12"/>
+          <p:cNvPr id="15" name="Shape 12"/>
           <p:cNvSpPr/>
           <p:nvPr/>
         </p:nvSpPr>
@@ -5386,7 +5386,7 @@
       </p:sp>
       <p:sp>
         <p:nvSpPr>
-          <p:cNvPr id="17" name="Text 13"/>
+          <p:cNvPr id="16" name="Text 13"/>
           <p:cNvSpPr/>
           <p:nvPr/>
         </p:nvSpPr>
@@ -5425,7 +5425,7 @@
       </p:sp>
       <p:sp>
         <p:nvSpPr>
-          <p:cNvPr id="18" name="Text 14"/>
+          <p:cNvPr id="17" name="Text 14"/>
           <p:cNvSpPr/>
           <p:nvPr/>
         </p:nvSpPr>
@@ -5464,7 +5464,7 @@
       </p:sp>
       <p:sp>
         <p:nvSpPr>
-          <p:cNvPr id="19" name="Text 15"/>
+          <p:cNvPr id="18" name="Text 15"/>
           <p:cNvSpPr/>
           <p:nvPr/>
         </p:nvSpPr>
@@ -5506,7 +5506,7 @@
       </p:sp>
       <p:sp>
         <p:nvSpPr>
-          <p:cNvPr id="20" name="Shape 16"/>
+          <p:cNvPr id="19" name="Shape 16"/>
           <p:cNvSpPr/>
           <p:nvPr/>
         </p:nvSpPr>
@@ -5528,7 +5528,7 @@
       </p:sp>
       <p:sp>
         <p:nvSpPr>
-          <p:cNvPr id="21" name="Shape 17"/>
+          <p:cNvPr id="20" name="Shape 17"/>
           <p:cNvSpPr/>
           <p:nvPr/>
         </p:nvSpPr>
@@ -5548,7 +5548,7 @@
       </p:sp>
       <p:sp>
         <p:nvSpPr>
-          <p:cNvPr id="22" name="Text 18"/>
+          <p:cNvPr id="21" name="Text 18"/>
           <p:cNvSpPr/>
           <p:nvPr/>
         </p:nvSpPr>
@@ -5587,7 +5587,7 @@
       </p:sp>
       <p:sp>
         <p:nvSpPr>
-          <p:cNvPr id="23" name="Text 19"/>
+          <p:cNvPr id="22" name="Text 19"/>
           <p:cNvSpPr/>
           <p:nvPr/>
         </p:nvSpPr>
@@ -5626,7 +5626,7 @@
       </p:sp>
       <p:sp>
         <p:nvSpPr>
-          <p:cNvPr id="24" name="Text 20"/>
+          <p:cNvPr id="23" name="Text 20"/>
           <p:cNvSpPr/>
           <p:nvPr/>
         </p:nvSpPr>
@@ -5911,7 +5911,7 @@
       </p:pic>
       <p:sp>
         <p:nvSpPr>
-          <p:cNvPr id="8" name="Shape 4"/>
+          <p:cNvPr id="7" name="Shape 4"/>
           <p:cNvSpPr/>
           <p:nvPr/>
         </p:nvSpPr>
@@ -5933,7 +5933,7 @@
       </p:sp>
       <p:sp>
         <p:nvSpPr>
-          <p:cNvPr id="9" name="Text 5"/>
+          <p:cNvPr id="8" name="Text 5"/>
           <p:cNvSpPr/>
           <p:nvPr/>
         </p:nvSpPr>
@@ -5972,7 +5972,7 @@
       </p:sp>
       <p:sp>
         <p:nvSpPr>
-          <p:cNvPr id="10" name="Shape 6"/>
+          <p:cNvPr id="9" name="Shape 6"/>
           <p:cNvSpPr/>
           <p:nvPr/>
         </p:nvSpPr>
@@ -5995,7 +5995,7 @@
       </p:sp>
       <p:sp>
         <p:nvSpPr>
-          <p:cNvPr id="11" name="Shape 7"/>
+          <p:cNvPr id="10" name="Shape 7"/>
           <p:cNvSpPr/>
           <p:nvPr/>
         </p:nvSpPr>
@@ -6015,7 +6015,7 @@
       </p:sp>
       <p:sp>
         <p:nvSpPr>
-          <p:cNvPr id="12" name="Shape 8"/>
+          <p:cNvPr id="11" name="Shape 8"/>
           <p:cNvSpPr/>
           <p:nvPr/>
         </p:nvSpPr>
@@ -6042,7 +6042,7 @@
       </p:sp>
       <p:sp>
         <p:nvSpPr>
-          <p:cNvPr id="13" name="Text 9"/>
+          <p:cNvPr id="12" name="Text 9"/>
           <p:cNvSpPr/>
           <p:nvPr/>
         </p:nvSpPr>
@@ -6081,7 +6081,7 @@
       </p:sp>
       <p:sp>
         <p:nvSpPr>
-          <p:cNvPr id="14" name="Shape 10"/>
+          <p:cNvPr id="13" name="Shape 10"/>
           <p:cNvSpPr/>
           <p:nvPr/>
         </p:nvSpPr>
@@ -6104,7 +6104,7 @@
       </p:sp>
       <p:sp>
         <p:nvSpPr>
-          <p:cNvPr id="15" name="Shape 11"/>
+          <p:cNvPr id="14" name="Shape 11"/>
           <p:cNvSpPr/>
           <p:nvPr/>
         </p:nvSpPr>
@@ -6124,7 +6124,7 @@
       </p:sp>
       <p:sp>
         <p:nvSpPr>
-          <p:cNvPr id="16" name="Shape 12"/>
+          <p:cNvPr id="15" name="Shape 12"/>
           <p:cNvSpPr/>
           <p:nvPr/>
         </p:nvSpPr>
@@ -6151,7 +6151,7 @@
       </p:sp>
       <p:sp>
         <p:nvSpPr>
-          <p:cNvPr id="17" name="Text 13"/>
+          <p:cNvPr id="16" name="Text 13"/>
           <p:cNvSpPr/>
           <p:nvPr/>
         </p:nvSpPr>
@@ -6190,7 +6190,7 @@
       </p:sp>
       <p:sp>
         <p:nvSpPr>
-          <p:cNvPr id="18" name="Shape 14"/>
+          <p:cNvPr id="17" name="Shape 14"/>
           <p:cNvSpPr/>
           <p:nvPr/>
         </p:nvSpPr>
@@ -6213,7 +6213,7 @@
       </p:sp>
       <p:sp>
         <p:nvSpPr>
-          <p:cNvPr id="19" name="Shape 15"/>
+          <p:cNvPr id="18" name="Shape 15"/>
           <p:cNvSpPr/>
           <p:nvPr/>
         </p:nvSpPr>
@@ -6233,7 +6233,7 @@
       </p:sp>
       <p:sp>
         <p:nvSpPr>
-          <p:cNvPr id="20" name="Shape 16"/>
+          <p:cNvPr id="19" name="Shape 16"/>
           <p:cNvSpPr/>
           <p:nvPr/>
         </p:nvSpPr>
@@ -6260,7 +6260,7 @@
       </p:sp>
       <p:sp>
         <p:nvSpPr>
-          <p:cNvPr id="21" name="Text 17"/>
+          <p:cNvPr id="20" name="Text 17"/>
           <p:cNvSpPr/>
           <p:nvPr/>
         </p:nvSpPr>
@@ -6299,7 +6299,7 @@
       </p:sp>
       <p:sp>
         <p:nvSpPr>
-          <p:cNvPr id="22" name="Shape 18"/>
+          <p:cNvPr id="21" name="Shape 18"/>
           <p:cNvSpPr/>
           <p:nvPr/>
         </p:nvSpPr>
@@ -6322,7 +6322,7 @@
       </p:sp>
       <p:sp>
         <p:nvSpPr>
-          <p:cNvPr id="23" name="Shape 19"/>
+          <p:cNvPr id="22" name="Shape 19"/>
           <p:cNvSpPr/>
           <p:nvPr/>
         </p:nvSpPr>
@@ -6342,7 +6342,7 @@
       </p:sp>
       <p:sp>
         <p:nvSpPr>
-          <p:cNvPr id="24" name="Shape 20"/>
+          <p:cNvPr id="23" name="Shape 20"/>
           <p:cNvSpPr/>
           <p:nvPr/>
         </p:nvSpPr>
@@ -6364,7 +6364,7 @@
       </p:sp>
       <p:sp>
         <p:nvSpPr>
-          <p:cNvPr id="25" name="Text 21"/>
+          <p:cNvPr id="24" name="Text 21"/>
           <p:cNvSpPr/>
           <p:nvPr/>
         </p:nvSpPr>
@@ -6403,7 +6403,7 @@
       </p:sp>
       <p:sp>
         <p:nvSpPr>
-          <p:cNvPr id="26" name="Text 22"/>
+          <p:cNvPr id="25" name="Text 22"/>
           <p:cNvSpPr/>
           <p:nvPr/>
         </p:nvSpPr>
@@ -6442,7 +6442,7 @@
       </p:sp>
       <p:sp>
         <p:nvSpPr>
-          <p:cNvPr id="27" name="Shape 23"/>
+          <p:cNvPr id="26" name="Shape 23"/>
           <p:cNvSpPr/>
           <p:nvPr/>
         </p:nvSpPr>
@@ -6469,7 +6469,7 @@
       </p:sp>
       <p:sp>
         <p:nvSpPr>
-          <p:cNvPr id="28" name="Text 24"/>
+          <p:cNvPr id="27" name="Text 24"/>
           <p:cNvSpPr/>
           <p:nvPr/>
         </p:nvSpPr>
@@ -6508,7 +6508,7 @@
       </p:sp>
       <p:sp>
         <p:nvSpPr>
-          <p:cNvPr id="29" name="Text 25"/>
+          <p:cNvPr id="28" name="Text 25"/>
           <p:cNvSpPr/>
           <p:nvPr/>
         </p:nvSpPr>
@@ -6550,7 +6550,7 @@
       </p:sp>
       <p:sp>
         <p:nvSpPr>
-          <p:cNvPr id="30" name="Shape 26"/>
+          <p:cNvPr id="29" name="Shape 26"/>
           <p:cNvSpPr/>
           <p:nvPr/>
         </p:nvSpPr>
@@ -6572,7 +6572,7 @@
       </p:sp>
       <p:sp>
         <p:nvSpPr>
-          <p:cNvPr id="31" name="Text 27"/>
+          <p:cNvPr id="30" name="Text 27"/>
           <p:cNvSpPr/>
           <p:nvPr/>
         </p:nvSpPr>
@@ -6611,7 +6611,7 @@
       </p:sp>
       <p:sp>
         <p:nvSpPr>
-          <p:cNvPr id="32" name="Text 28"/>
+          <p:cNvPr id="31" name="Text 28"/>
           <p:cNvSpPr/>
           <p:nvPr/>
         </p:nvSpPr>
@@ -6653,7 +6653,7 @@
       </p:sp>
       <p:sp>
         <p:nvSpPr>
-          <p:cNvPr id="33" name="Shape 29"/>
+          <p:cNvPr id="32" name="Shape 29"/>
           <p:cNvSpPr/>
           <p:nvPr/>
         </p:nvSpPr>
@@ -6680,7 +6680,7 @@
       </p:sp>
       <p:sp>
         <p:nvSpPr>
-          <p:cNvPr id="34" name="Text 30"/>
+          <p:cNvPr id="33" name="Text 30"/>
           <p:cNvSpPr/>
           <p:nvPr/>
         </p:nvSpPr>
@@ -6965,7 +6965,7 @@
       </p:pic>
       <p:sp>
         <p:nvSpPr>
-          <p:cNvPr id="8" name="Shape 4"/>
+          <p:cNvPr id="7" name="Shape 4"/>
           <p:cNvSpPr/>
           <p:nvPr/>
         </p:nvSpPr>
@@ -6987,7 +6987,7 @@
       </p:sp>
       <p:sp>
         <p:nvSpPr>
-          <p:cNvPr id="9" name="Text 5"/>
+          <p:cNvPr id="8" name="Text 5"/>
           <p:cNvSpPr/>
           <p:nvPr/>
         </p:nvSpPr>
@@ -7026,7 +7026,7 @@
       </p:sp>
       <p:sp>
         <p:nvSpPr>
-          <p:cNvPr id="10" name="Text 6"/>
+          <p:cNvPr id="9" name="Text 6"/>
           <p:cNvSpPr/>
           <p:nvPr/>
         </p:nvSpPr>
@@ -7065,7 +7065,7 @@
       </p:sp>
       <p:sp>
         <p:nvSpPr>
-          <p:cNvPr id="11" name="Shape 7"/>
+          <p:cNvPr id="10" name="Shape 7"/>
           <p:cNvSpPr/>
           <p:nvPr/>
         </p:nvSpPr>
@@ -7092,7 +7092,7 @@
       </p:sp>
       <p:sp>
         <p:nvSpPr>
-          <p:cNvPr id="12" name="Text 8"/>
+          <p:cNvPr id="11" name="Text 8"/>
           <p:cNvSpPr/>
           <p:nvPr/>
         </p:nvSpPr>
@@ -7131,7 +7131,7 @@
       </p:sp>
       <p:sp>
         <p:nvSpPr>
-          <p:cNvPr id="13" name="Text 9"/>
+          <p:cNvPr id="12" name="Text 9"/>
           <p:cNvSpPr/>
           <p:nvPr/>
         </p:nvSpPr>
@@ -7173,7 +7173,7 @@
       </p:sp>
       <p:sp>
         <p:nvSpPr>
-          <p:cNvPr id="14" name="Shape 10"/>
+          <p:cNvPr id="13" name="Shape 10"/>
           <p:cNvSpPr/>
           <p:nvPr/>
         </p:nvSpPr>
@@ -7195,7 +7195,7 @@
       </p:sp>
       <p:sp>
         <p:nvSpPr>
-          <p:cNvPr id="15" name="Text 11"/>
+          <p:cNvPr id="14" name="Text 11"/>
           <p:cNvSpPr/>
           <p:nvPr/>
         </p:nvSpPr>
@@ -7234,7 +7234,7 @@
       </p:sp>
       <p:sp>
         <p:nvSpPr>
-          <p:cNvPr id="16" name="Text 12"/>
+          <p:cNvPr id="15" name="Text 12"/>
           <p:cNvSpPr/>
           <p:nvPr/>
         </p:nvSpPr>
@@ -7273,7 +7273,7 @@
       </p:sp>
       <p:sp>
         <p:nvSpPr>
-          <p:cNvPr id="17" name="Shape 13"/>
+          <p:cNvPr id="16" name="Shape 13"/>
           <p:cNvSpPr/>
           <p:nvPr/>
         </p:nvSpPr>
@@ -7295,7 +7295,7 @@
       </p:sp>
       <p:sp>
         <p:nvSpPr>
-          <p:cNvPr id="18" name="Text 14"/>
+          <p:cNvPr id="17" name="Text 14"/>
           <p:cNvSpPr/>
           <p:nvPr/>
         </p:nvSpPr>
@@ -7334,7 +7334,7 @@
       </p:sp>
       <p:sp>
         <p:nvSpPr>
-          <p:cNvPr id="19" name="Text 15"/>
+          <p:cNvPr id="18" name="Text 15"/>
           <p:cNvSpPr/>
           <p:nvPr/>
         </p:nvSpPr>
@@ -7373,7 +7373,7 @@
       </p:sp>
       <p:sp>
         <p:nvSpPr>
-          <p:cNvPr id="20" name="Shape 16"/>
+          <p:cNvPr id="19" name="Shape 16"/>
           <p:cNvSpPr/>
           <p:nvPr/>
         </p:nvSpPr>
@@ -7395,7 +7395,7 @@
       </p:sp>
       <p:sp>
         <p:nvSpPr>
-          <p:cNvPr id="21" name="Text 17"/>
+          <p:cNvPr id="20" name="Text 17"/>
           <p:cNvSpPr/>
           <p:nvPr/>
         </p:nvSpPr>
@@ -7680,7 +7680,7 @@
       </p:pic>
       <p:sp>
         <p:nvSpPr>
-          <p:cNvPr id="8" name="Shape 4"/>
+          <p:cNvPr id="7" name="Shape 4"/>
           <p:cNvSpPr/>
           <p:nvPr/>
         </p:nvSpPr>
@@ -7707,7 +7707,7 @@
       </p:sp>
       <p:sp>
         <p:nvSpPr>
-          <p:cNvPr id="9" name="Text 5"/>
+          <p:cNvPr id="8" name="Text 5"/>
           <p:cNvSpPr/>
           <p:nvPr/>
         </p:nvSpPr>
@@ -7867,7 +7867,7 @@
       </p:sp>
       <p:sp>
         <p:nvSpPr>
-          <p:cNvPr id="10" name="Shape 6"/>
+          <p:cNvPr id="9" name="Shape 6"/>
           <p:cNvSpPr/>
           <p:nvPr/>
         </p:nvSpPr>
@@ -7889,7 +7889,7 @@
       </p:sp>
       <p:sp>
         <p:nvSpPr>
-          <p:cNvPr id="11" name="Text 7"/>
+          <p:cNvPr id="10" name="Text 7"/>
           <p:cNvSpPr/>
           <p:nvPr/>
         </p:nvSpPr>
@@ -7928,7 +7928,7 @@
       </p:sp>
       <p:sp>
         <p:nvSpPr>
-          <p:cNvPr id="12" name="Text 8"/>
+          <p:cNvPr id="11" name="Text 8"/>
           <p:cNvSpPr/>
           <p:nvPr/>
         </p:nvSpPr>
@@ -7970,7 +7970,7 @@
       </p:sp>
       <p:sp>
         <p:nvSpPr>
-          <p:cNvPr id="13" name="Shape 9"/>
+          <p:cNvPr id="12" name="Shape 9"/>
           <p:cNvSpPr/>
           <p:nvPr/>
         </p:nvSpPr>
@@ -7992,7 +7992,7 @@
       </p:sp>
       <p:sp>
         <p:nvSpPr>
-          <p:cNvPr id="14" name="Text 10"/>
+          <p:cNvPr id="13" name="Text 10"/>
           <p:cNvSpPr/>
           <p:nvPr/>
         </p:nvSpPr>
@@ -8031,7 +8031,7 @@
       </p:sp>
       <p:sp>
         <p:nvSpPr>
-          <p:cNvPr id="15" name="Text 11"/>
+          <p:cNvPr id="14" name="Text 11"/>
           <p:cNvSpPr/>
           <p:nvPr/>
         </p:nvSpPr>
@@ -8073,7 +8073,7 @@
       </p:sp>
       <p:sp>
         <p:nvSpPr>
-          <p:cNvPr id="16" name="Shape 12"/>
+          <p:cNvPr id="15" name="Shape 12"/>
           <p:cNvSpPr/>
           <p:nvPr/>
         </p:nvSpPr>
@@ -8095,7 +8095,7 @@
       </p:sp>
       <p:sp>
         <p:nvSpPr>
-          <p:cNvPr id="17" name="Text 13"/>
+          <p:cNvPr id="16" name="Text 13"/>
           <p:cNvSpPr/>
           <p:nvPr/>
         </p:nvSpPr>
@@ -8137,7 +8137,7 @@
       </p:sp>
       <p:sp>
         <p:nvSpPr>
-          <p:cNvPr id="18" name="Text 14"/>
+          <p:cNvPr id="17" name="Text 14"/>
           <p:cNvSpPr/>
           <p:nvPr/>
         </p:nvSpPr>
@@ -8480,7 +8480,7 @@
       </p:pic>
       <p:sp>
         <p:nvSpPr>
-          <p:cNvPr id="10" name="Shape 6"/>
+          <p:cNvPr id="9" name="Shape 6"/>
           <p:cNvSpPr/>
           <p:nvPr/>
         </p:nvSpPr>
@@ -8502,7 +8502,7 @@
       </p:sp>
       <p:sp>
         <p:nvSpPr>
-          <p:cNvPr id="11" name="Text 7"/>
+          <p:cNvPr id="10" name="Text 7"/>
           <p:cNvSpPr/>
           <p:nvPr/>
         </p:nvSpPr>
@@ -8541,7 +8541,7 @@
       </p:sp>
       <p:sp>
         <p:nvSpPr>
-          <p:cNvPr id="12" name="Text 8"/>
+          <p:cNvPr id="11" name="Text 8"/>
           <p:cNvSpPr/>
           <p:nvPr/>
         </p:nvSpPr>
@@ -8583,7 +8583,7 @@
       </p:sp>
       <p:sp>
         <p:nvSpPr>
-          <p:cNvPr id="13" name="Shape 9"/>
+          <p:cNvPr id="12" name="Shape 9"/>
           <p:cNvSpPr/>
           <p:nvPr/>
         </p:nvSpPr>
@@ -8605,7 +8605,7 @@
       </p:sp>
       <p:sp>
         <p:nvSpPr>
-          <p:cNvPr id="14" name="Text 10"/>
+          <p:cNvPr id="13" name="Text 10"/>
           <p:cNvSpPr/>
           <p:nvPr/>
         </p:nvSpPr>
@@ -8644,7 +8644,7 @@
       </p:sp>
       <p:sp>
         <p:nvSpPr>
-          <p:cNvPr id="15" name="Text 11"/>
+          <p:cNvPr id="14" name="Text 11"/>
           <p:cNvSpPr/>
           <p:nvPr/>
         </p:nvSpPr>
@@ -8686,7 +8686,7 @@
       </p:sp>
       <p:sp>
         <p:nvSpPr>
-          <p:cNvPr id="16" name="Shape 12"/>
+          <p:cNvPr id="15" name="Shape 12"/>
           <p:cNvSpPr/>
           <p:nvPr/>
         </p:nvSpPr>
@@ -8708,7 +8708,7 @@
       </p:sp>
       <p:sp>
         <p:nvSpPr>
-          <p:cNvPr id="17" name="Text 13"/>
+          <p:cNvPr id="16" name="Text 13"/>
           <p:cNvSpPr/>
           <p:nvPr/>
         </p:nvSpPr>
@@ -8747,7 +8747,7 @@
       </p:sp>
       <p:sp>
         <p:nvSpPr>
-          <p:cNvPr id="18" name="Text 14"/>
+          <p:cNvPr id="17" name="Text 14"/>
           <p:cNvSpPr/>
           <p:nvPr/>
         </p:nvSpPr>
@@ -8789,7 +8789,7 @@
       </p:sp>
       <p:sp>
         <p:nvSpPr>
-          <p:cNvPr id="19" name="Shape 15"/>
+          <p:cNvPr id="18" name="Shape 15"/>
           <p:cNvSpPr/>
           <p:nvPr/>
         </p:nvSpPr>
@@ -8816,7 +8816,7 @@
       </p:sp>
       <p:sp>
         <p:nvSpPr>
-          <p:cNvPr id="20" name="Text 16"/>
+          <p:cNvPr id="19" name="Text 16"/>
           <p:cNvSpPr/>
           <p:nvPr/>
         </p:nvSpPr>
@@ -9101,7 +9101,7 @@
       </p:pic>
       <p:sp>
         <p:nvSpPr>
-          <p:cNvPr id="8" name="Shape 4"/>
+          <p:cNvPr id="7" name="Shape 4"/>
           <p:cNvSpPr/>
           <p:nvPr/>
         </p:nvSpPr>
@@ -9123,7 +9123,7 @@
       </p:sp>
       <p:sp>
         <p:nvSpPr>
-          <p:cNvPr id="9" name="Text 5"/>
+          <p:cNvPr id="8" name="Text 5"/>
           <p:cNvSpPr/>
           <p:nvPr/>
         </p:nvSpPr>
@@ -9162,7 +9162,7 @@
       </p:sp>
       <p:sp>
         <p:nvSpPr>
-          <p:cNvPr id="10" name="Shape 6"/>
+          <p:cNvPr id="9" name="Shape 6"/>
           <p:cNvSpPr/>
           <p:nvPr/>
         </p:nvSpPr>
@@ -9185,7 +9185,7 @@
       </p:sp>
       <p:sp>
         <p:nvSpPr>
-          <p:cNvPr id="11" name="Shape 7"/>
+          <p:cNvPr id="10" name="Shape 7"/>
           <p:cNvSpPr/>
           <p:nvPr/>
         </p:nvSpPr>
@@ -9205,7 +9205,7 @@
       </p:sp>
       <p:sp>
         <p:nvSpPr>
-          <p:cNvPr id="12" name="Shape 8"/>
+          <p:cNvPr id="11" name="Shape 8"/>
           <p:cNvSpPr/>
           <p:nvPr/>
         </p:nvSpPr>
@@ -9232,7 +9232,7 @@
       </p:sp>
       <p:sp>
         <p:nvSpPr>
-          <p:cNvPr id="13" name="Text 9"/>
+          <p:cNvPr id="12" name="Text 9"/>
           <p:cNvSpPr/>
           <p:nvPr/>
         </p:nvSpPr>
@@ -9271,7 +9271,7 @@
       </p:sp>
       <p:sp>
         <p:nvSpPr>
-          <p:cNvPr id="14" name="Shape 10"/>
+          <p:cNvPr id="13" name="Shape 10"/>
           <p:cNvSpPr/>
           <p:nvPr/>
         </p:nvSpPr>
@@ -9294,7 +9294,7 @@
       </p:sp>
       <p:sp>
         <p:nvSpPr>
-          <p:cNvPr id="15" name="Shape 11"/>
+          <p:cNvPr id="14" name="Shape 11"/>
           <p:cNvSpPr/>
           <p:nvPr/>
         </p:nvSpPr>
@@ -9314,7 +9314,7 @@
       </p:sp>
       <p:sp>
         <p:nvSpPr>
-          <p:cNvPr id="16" name="Shape 12"/>
+          <p:cNvPr id="15" name="Shape 12"/>
           <p:cNvSpPr/>
           <p:nvPr/>
         </p:nvSpPr>
@@ -9336,7 +9336,7 @@
       </p:sp>
       <p:sp>
         <p:nvSpPr>
-          <p:cNvPr id="17" name="Text 13"/>
+          <p:cNvPr id="16" name="Text 13"/>
           <p:cNvSpPr/>
           <p:nvPr/>
         </p:nvSpPr>
@@ -9375,7 +9375,7 @@
       </p:sp>
       <p:sp>
         <p:nvSpPr>
-          <p:cNvPr id="18" name="Shape 14"/>
+          <p:cNvPr id="17" name="Shape 14"/>
           <p:cNvSpPr/>
           <p:nvPr/>
         </p:nvSpPr>
@@ -9398,7 +9398,7 @@
       </p:sp>
       <p:sp>
         <p:nvSpPr>
-          <p:cNvPr id="19" name="Shape 15"/>
+          <p:cNvPr id="18" name="Shape 15"/>
           <p:cNvSpPr/>
           <p:nvPr/>
         </p:nvSpPr>
@@ -9418,7 +9418,7 @@
       </p:sp>
       <p:sp>
         <p:nvSpPr>
-          <p:cNvPr id="20" name="Shape 16"/>
+          <p:cNvPr id="19" name="Shape 16"/>
           <p:cNvSpPr/>
           <p:nvPr/>
         </p:nvSpPr>
@@ -9440,7 +9440,7 @@
       </p:sp>
       <p:sp>
         <p:nvSpPr>
-          <p:cNvPr id="21" name="Text 17"/>
+          <p:cNvPr id="20" name="Text 17"/>
           <p:cNvSpPr/>
           <p:nvPr/>
         </p:nvSpPr>
@@ -9479,7 +9479,7 @@
       </p:sp>
       <p:sp>
         <p:nvSpPr>
-          <p:cNvPr id="22" name="Shape 18"/>
+          <p:cNvPr id="21" name="Shape 18"/>
           <p:cNvSpPr/>
           <p:nvPr/>
         </p:nvSpPr>
@@ -9501,7 +9501,7 @@
       </p:sp>
       <p:sp>
         <p:nvSpPr>
-          <p:cNvPr id="23" name="Text 19"/>
+          <p:cNvPr id="22" name="Text 19"/>
           <p:cNvSpPr/>
           <p:nvPr/>
         </p:nvSpPr>
@@ -9540,7 +9540,7 @@
       </p:sp>
       <p:sp>
         <p:nvSpPr>
-          <p:cNvPr id="24" name="Text 20"/>
+          <p:cNvPr id="23" name="Text 20"/>
           <p:cNvSpPr/>
           <p:nvPr/>
         </p:nvSpPr>
@@ -9582,7 +9582,7 @@
       </p:sp>
       <p:sp>
         <p:nvSpPr>
-          <p:cNvPr id="25" name="Shape 21"/>
+          <p:cNvPr id="24" name="Shape 21"/>
           <p:cNvSpPr/>
           <p:nvPr/>
         </p:nvSpPr>
@@ -9604,7 +9604,7 @@
       </p:sp>
       <p:sp>
         <p:nvSpPr>
-          <p:cNvPr id="26" name="Text 22"/>
+          <p:cNvPr id="25" name="Text 22"/>
           <p:cNvSpPr/>
           <p:nvPr/>
         </p:nvSpPr>
@@ -9850,7 +9850,7 @@
       </p:pic>
       <p:sp>
         <p:nvSpPr>
-          <p:cNvPr id="7" name="Shape 3"/>
+          <p:cNvPr id="6" name="Shape 3"/>
           <p:cNvSpPr/>
           <p:nvPr/>
         </p:nvSpPr>
@@ -9872,7 +9872,7 @@
       </p:sp>
       <p:sp>
         <p:nvSpPr>
-          <p:cNvPr id="8" name="Shape 4"/>
+          <p:cNvPr id="7" name="Shape 4"/>
           <p:cNvSpPr/>
           <p:nvPr/>
         </p:nvSpPr>
@@ -9892,7 +9892,7 @@
       </p:sp>
       <p:sp>
         <p:nvSpPr>
-          <p:cNvPr id="9" name="Text 5"/>
+          <p:cNvPr id="8" name="Text 5"/>
           <p:cNvSpPr/>
           <p:nvPr/>
         </p:nvSpPr>
@@ -9931,7 +9931,7 @@
       </p:sp>
       <p:sp>
         <p:nvSpPr>
-          <p:cNvPr id="10" name="Text 6"/>
+          <p:cNvPr id="9" name="Text 6"/>
           <p:cNvSpPr/>
           <p:nvPr/>
         </p:nvSpPr>
@@ -9970,7 +9970,7 @@
       </p:sp>
       <p:sp>
         <p:nvSpPr>
-          <p:cNvPr id="11" name="Text 7"/>
+          <p:cNvPr id="10" name="Text 7"/>
           <p:cNvSpPr/>
           <p:nvPr/>
         </p:nvSpPr>
@@ -10012,7 +10012,7 @@
       </p:sp>
       <p:sp>
         <p:nvSpPr>
-          <p:cNvPr id="12" name="Shape 8"/>
+          <p:cNvPr id="11" name="Shape 8"/>
           <p:cNvSpPr/>
           <p:nvPr/>
         </p:nvSpPr>
@@ -10034,7 +10034,7 @@
       </p:sp>
       <p:sp>
         <p:nvSpPr>
-          <p:cNvPr id="13" name="Shape 9"/>
+          <p:cNvPr id="12" name="Shape 9"/>
           <p:cNvSpPr/>
           <p:nvPr/>
         </p:nvSpPr>
@@ -10054,7 +10054,7 @@
       </p:sp>
       <p:sp>
         <p:nvSpPr>
-          <p:cNvPr id="14" name="Text 10"/>
+          <p:cNvPr id="13" name="Text 10"/>
           <p:cNvSpPr/>
           <p:nvPr/>
         </p:nvSpPr>
@@ -10093,7 +10093,7 @@
       </p:sp>
       <p:sp>
         <p:nvSpPr>
-          <p:cNvPr id="15" name="Text 11"/>
+          <p:cNvPr id="14" name="Text 11"/>
           <p:cNvSpPr/>
           <p:nvPr/>
         </p:nvSpPr>
@@ -10132,7 +10132,7 @@
       </p:sp>
       <p:sp>
         <p:nvSpPr>
-          <p:cNvPr id="16" name="Text 12"/>
+          <p:cNvPr id="15" name="Text 12"/>
           <p:cNvSpPr/>
           <p:nvPr/>
         </p:nvSpPr>
@@ -10174,7 +10174,7 @@
       </p:sp>
       <p:sp>
         <p:nvSpPr>
-          <p:cNvPr id="17" name="Shape 13"/>
+          <p:cNvPr id="16" name="Shape 13"/>
           <p:cNvSpPr/>
           <p:nvPr/>
         </p:nvSpPr>
@@ -10196,7 +10196,7 @@
       </p:sp>
       <p:sp>
         <p:nvSpPr>
-          <p:cNvPr id="18" name="Shape 14"/>
+          <p:cNvPr id="17" name="Shape 14"/>
           <p:cNvSpPr/>
           <p:nvPr/>
         </p:nvSpPr>
@@ -10216,7 +10216,7 @@
       </p:sp>
       <p:sp>
         <p:nvSpPr>
-          <p:cNvPr id="19" name="Text 15"/>
+          <p:cNvPr id="18" name="Text 15"/>
           <p:cNvSpPr/>
           <p:nvPr/>
         </p:nvSpPr>
@@ -10255,7 +10255,7 @@
       </p:sp>
       <p:sp>
         <p:nvSpPr>
-          <p:cNvPr id="20" name="Text 16"/>
+          <p:cNvPr id="19" name="Text 16"/>
           <p:cNvSpPr/>
           <p:nvPr/>
         </p:nvSpPr>
@@ -10294,7 +10294,7 @@
       </p:sp>
       <p:sp>
         <p:nvSpPr>
-          <p:cNvPr id="21" name="Text 17"/>
+          <p:cNvPr id="20" name="Text 17"/>
           <p:cNvSpPr/>
           <p:nvPr/>
         </p:nvSpPr>
@@ -10336,7 +10336,7 @@
       </p:sp>
       <p:sp>
         <p:nvSpPr>
-          <p:cNvPr id="22" name="Shape 18"/>
+          <p:cNvPr id="21" name="Shape 18"/>
           <p:cNvSpPr/>
           <p:nvPr/>
         </p:nvSpPr>
@@ -10358,7 +10358,7 @@
       </p:sp>
       <p:sp>
         <p:nvSpPr>
-          <p:cNvPr id="23" name="Shape 19"/>
+          <p:cNvPr id="22" name="Shape 19"/>
           <p:cNvSpPr/>
           <p:nvPr/>
         </p:nvSpPr>
@@ -10378,7 +10378,7 @@
       </p:sp>
       <p:sp>
         <p:nvSpPr>
-          <p:cNvPr id="24" name="Text 20"/>
+          <p:cNvPr id="23" name="Text 20"/>
           <p:cNvSpPr/>
           <p:nvPr/>
         </p:nvSpPr>
@@ -10417,7 +10417,7 @@
       </p:sp>
       <p:sp>
         <p:nvSpPr>
-          <p:cNvPr id="25" name="Text 21"/>
+          <p:cNvPr id="24" name="Text 21"/>
           <p:cNvSpPr/>
           <p:nvPr/>
         </p:nvSpPr>
@@ -10456,7 +10456,7 @@
       </p:sp>
       <p:sp>
         <p:nvSpPr>
-          <p:cNvPr id="26" name="Text 22"/>
+          <p:cNvPr id="25" name="Text 22"/>
           <p:cNvSpPr/>
           <p:nvPr/>
         </p:nvSpPr>
@@ -10498,7 +10498,7 @@
       </p:sp>
       <p:sp>
         <p:nvSpPr>
-          <p:cNvPr id="27" name="Shape 23"/>
+          <p:cNvPr id="26" name="Shape 23"/>
           <p:cNvSpPr/>
           <p:nvPr/>
         </p:nvSpPr>
@@ -10520,7 +10520,7 @@
       </p:sp>
       <p:sp>
         <p:nvSpPr>
-          <p:cNvPr id="28" name="Shape 24"/>
+          <p:cNvPr id="27" name="Shape 24"/>
           <p:cNvSpPr/>
           <p:nvPr/>
         </p:nvSpPr>
@@ -10540,7 +10540,7 @@
       </p:sp>
       <p:sp>
         <p:nvSpPr>
-          <p:cNvPr id="29" name="Text 25"/>
+          <p:cNvPr id="28" name="Text 25"/>
           <p:cNvSpPr/>
           <p:nvPr/>
         </p:nvSpPr>
@@ -10579,7 +10579,7 @@
       </p:sp>
       <p:sp>
         <p:nvSpPr>
-          <p:cNvPr id="30" name="Text 26"/>
+          <p:cNvPr id="29" name="Text 26"/>
           <p:cNvSpPr/>
           <p:nvPr/>
         </p:nvSpPr>
@@ -10618,7 +10618,7 @@
       </p:sp>
       <p:sp>
         <p:nvSpPr>
-          <p:cNvPr id="31" name="Text 27"/>
+          <p:cNvPr id="30" name="Text 27"/>
           <p:cNvSpPr/>
           <p:nvPr/>
         </p:nvSpPr>
@@ -10660,7 +10660,7 @@
       </p:sp>
       <p:sp>
         <p:nvSpPr>
-          <p:cNvPr id="32" name="Shape 28"/>
+          <p:cNvPr id="31" name="Shape 28"/>
           <p:cNvSpPr/>
           <p:nvPr/>
         </p:nvSpPr>
@@ -10682,7 +10682,7 @@
       </p:sp>
       <p:sp>
         <p:nvSpPr>
-          <p:cNvPr id="33" name="Text 29"/>
+          <p:cNvPr id="32" name="Text 29"/>
           <p:cNvSpPr/>
           <p:nvPr/>
         </p:nvSpPr>
@@ -10721,7 +10721,7 @@
       </p:sp>
       <p:sp>
         <p:nvSpPr>
-          <p:cNvPr id="34" name="Text 30"/>
+          <p:cNvPr id="33" name="Text 30"/>
           <p:cNvSpPr/>
           <p:nvPr/>
         </p:nvSpPr>
@@ -10967,7 +10967,7 @@
       </p:pic>
       <p:sp>
         <p:nvSpPr>
-          <p:cNvPr id="7" name="Shape 3"/>
+          <p:cNvPr id="6" name="Shape 3"/>
           <p:cNvSpPr/>
           <p:nvPr/>
         </p:nvSpPr>
@@ -10987,7 +10987,7 @@
       </p:sp>
       <p:sp>
         <p:nvSpPr>
-          <p:cNvPr id="8" name="Text 4"/>
+          <p:cNvPr id="7" name="Text 4"/>
           <p:cNvSpPr/>
           <p:nvPr/>
         </p:nvSpPr>
@@ -11026,7 +11026,7 @@
       </p:sp>
       <p:sp>
         <p:nvSpPr>
-          <p:cNvPr id="9" name="Text 5"/>
+          <p:cNvPr id="8" name="Text 5"/>
           <p:cNvSpPr/>
           <p:nvPr/>
         </p:nvSpPr>
@@ -11079,7 +11079,7 @@
       </p:sp>
       <p:sp>
         <p:nvSpPr>
-          <p:cNvPr id="10" name="Shape 6"/>
+          <p:cNvPr id="9" name="Shape 6"/>
           <p:cNvSpPr/>
           <p:nvPr/>
         </p:nvSpPr>
@@ -11099,7 +11099,7 @@
       </p:sp>
       <p:sp>
         <p:nvSpPr>
-          <p:cNvPr id="11" name="Text 7"/>
+          <p:cNvPr id="10" name="Text 7"/>
           <p:cNvSpPr/>
           <p:nvPr/>
         </p:nvSpPr>
@@ -11138,7 +11138,7 @@
       </p:sp>
       <p:sp>
         <p:nvSpPr>
-          <p:cNvPr id="12" name="Text 8"/>
+          <p:cNvPr id="11" name="Text 8"/>
           <p:cNvSpPr/>
           <p:nvPr/>
         </p:nvSpPr>
@@ -11191,7 +11191,7 @@
       </p:sp>
       <p:sp>
         <p:nvSpPr>
-          <p:cNvPr id="13" name="Shape 9"/>
+          <p:cNvPr id="12" name="Shape 9"/>
           <p:cNvSpPr/>
           <p:nvPr/>
         </p:nvSpPr>
@@ -11211,7 +11211,7 @@
       </p:sp>
       <p:sp>
         <p:nvSpPr>
-          <p:cNvPr id="14" name="Text 10"/>
+          <p:cNvPr id="13" name="Text 10"/>
           <p:cNvSpPr/>
           <p:nvPr/>
         </p:nvSpPr>
@@ -11250,7 +11250,7 @@
       </p:sp>
       <p:sp>
         <p:nvSpPr>
-          <p:cNvPr id="15" name="Text 11"/>
+          <p:cNvPr id="14" name="Text 11"/>
           <p:cNvSpPr/>
           <p:nvPr/>
         </p:nvSpPr>
@@ -11303,7 +11303,7 @@
       </p:sp>
       <p:sp>
         <p:nvSpPr>
-          <p:cNvPr id="16" name="Shape 12"/>
+          <p:cNvPr id="15" name="Shape 12"/>
           <p:cNvSpPr/>
           <p:nvPr/>
         </p:nvSpPr>
@@ -11323,7 +11323,7 @@
       </p:sp>
       <p:sp>
         <p:nvSpPr>
-          <p:cNvPr id="17" name="Text 13"/>
+          <p:cNvPr id="16" name="Text 13"/>
           <p:cNvSpPr/>
           <p:nvPr/>
         </p:nvSpPr>
@@ -11362,7 +11362,7 @@
       </p:sp>
       <p:sp>
         <p:nvSpPr>
-          <p:cNvPr id="18" name="Text 14"/>
+          <p:cNvPr id="17" name="Text 14"/>
           <p:cNvSpPr/>
           <p:nvPr/>
         </p:nvSpPr>
@@ -11415,7 +11415,7 @@
       </p:sp>
       <p:sp>
         <p:nvSpPr>
-          <p:cNvPr id="19" name="Shape 15"/>
+          <p:cNvPr id="18" name="Shape 15"/>
           <p:cNvSpPr/>
           <p:nvPr/>
         </p:nvSpPr>
@@ -11435,7 +11435,7 @@
       </p:sp>
       <p:sp>
         <p:nvSpPr>
-          <p:cNvPr id="20" name="Text 16"/>
+          <p:cNvPr id="19" name="Text 16"/>
           <p:cNvSpPr/>
           <p:nvPr/>
         </p:nvSpPr>
@@ -11474,7 +11474,7 @@
       </p:sp>
       <p:sp>
         <p:nvSpPr>
-          <p:cNvPr id="21" name="Text 17"/>
+          <p:cNvPr id="20" name="Text 17"/>
           <p:cNvSpPr/>
           <p:nvPr/>
         </p:nvSpPr>
@@ -11731,7 +11731,7 @@
       </p:pic>
       <p:sp>
         <p:nvSpPr>
-          <p:cNvPr id="7" name="Shape 3"/>
+          <p:cNvPr id="6" name="Shape 3"/>
           <p:cNvSpPr/>
           <p:nvPr/>
         </p:nvSpPr>
@@ -11753,7 +11753,7 @@
       </p:sp>
       <p:sp>
         <p:nvSpPr>
-          <p:cNvPr id="8" name="Text 4"/>
+          <p:cNvPr id="7" name="Text 4"/>
           <p:cNvSpPr/>
           <p:nvPr/>
         </p:nvSpPr>
@@ -11792,7 +11792,7 @@
       </p:sp>
       <p:sp>
         <p:nvSpPr>
-          <p:cNvPr id="9" name="Text 5"/>
+          <p:cNvPr id="8" name="Text 5"/>
           <p:cNvSpPr/>
           <p:nvPr/>
         </p:nvSpPr>
@@ -11834,7 +11834,7 @@
       </p:sp>
       <p:sp>
         <p:nvSpPr>
-          <p:cNvPr id="10" name="Shape 6"/>
+          <p:cNvPr id="9" name="Shape 6"/>
           <p:cNvSpPr/>
           <p:nvPr/>
         </p:nvSpPr>
@@ -11856,7 +11856,7 @@
       </p:sp>
       <p:sp>
         <p:nvSpPr>
-          <p:cNvPr id="11" name="Text 7"/>
+          <p:cNvPr id="10" name="Text 7"/>
           <p:cNvSpPr/>
           <p:nvPr/>
         </p:nvSpPr>
@@ -11895,7 +11895,7 @@
       </p:sp>
       <p:sp>
         <p:nvSpPr>
-          <p:cNvPr id="12" name="Text 8"/>
+          <p:cNvPr id="11" name="Text 8"/>
           <p:cNvSpPr/>
           <p:nvPr/>
         </p:nvSpPr>
@@ -11937,7 +11937,7 @@
       </p:sp>
       <p:sp>
         <p:nvSpPr>
-          <p:cNvPr id="13" name="Shape 9"/>
+          <p:cNvPr id="12" name="Shape 9"/>
           <p:cNvSpPr/>
           <p:nvPr/>
         </p:nvSpPr>
@@ -11964,7 +11964,7 @@
       </p:sp>
       <p:sp>
         <p:nvSpPr>
-          <p:cNvPr id="14" name="Text 10"/>
+          <p:cNvPr id="13" name="Text 10"/>
           <p:cNvSpPr/>
           <p:nvPr/>
         </p:nvSpPr>
@@ -12003,7 +12003,7 @@
       </p:sp>
       <p:sp>
         <p:nvSpPr>
-          <p:cNvPr id="15" name="Text 11"/>
+          <p:cNvPr id="14" name="Text 11"/>
           <p:cNvSpPr/>
           <p:nvPr/>
         </p:nvSpPr>
@@ -12045,7 +12045,7 @@
       </p:sp>
       <p:sp>
         <p:nvSpPr>
-          <p:cNvPr id="16" name="Shape 12"/>
+          <p:cNvPr id="15" name="Shape 12"/>
           <p:cNvSpPr/>
           <p:nvPr/>
         </p:nvSpPr>
@@ -12072,7 +12072,7 @@
       </p:sp>
       <p:sp>
         <p:nvSpPr>
-          <p:cNvPr id="17" name="Text 13"/>
+          <p:cNvPr id="16" name="Text 13"/>
           <p:cNvSpPr/>
           <p:nvPr/>
         </p:nvSpPr>
@@ -12360,7 +12360,7 @@
       </p:pic>
       <p:sp>
         <p:nvSpPr>
-          <p:cNvPr id="8" name="Shape 4"/>
+          <p:cNvPr id="7" name="Shape 4"/>
           <p:cNvSpPr/>
           <p:nvPr/>
         </p:nvSpPr>
@@ -12387,7 +12387,7 @@
       </p:sp>
       <p:sp>
         <p:nvSpPr>
-          <p:cNvPr id="9" name="Shape 5"/>
+          <p:cNvPr id="8" name="Shape 5"/>
           <p:cNvSpPr/>
           <p:nvPr/>
         </p:nvSpPr>
@@ -12407,7 +12407,7 @@
       </p:sp>
       <p:sp>
         <p:nvSpPr>
-          <p:cNvPr id="10" name="Text 6"/>
+          <p:cNvPr id="9" name="Text 6"/>
           <p:cNvSpPr/>
           <p:nvPr/>
         </p:nvSpPr>
@@ -12446,7 +12446,7 @@
       </p:sp>
       <p:sp>
         <p:nvSpPr>
-          <p:cNvPr id="11" name="Text 7"/>
+          <p:cNvPr id="10" name="Text 7"/>
           <p:cNvSpPr/>
           <p:nvPr/>
         </p:nvSpPr>
@@ -12485,7 +12485,7 @@
       </p:sp>
       <p:sp>
         <p:nvSpPr>
-          <p:cNvPr id="12" name="Text 8"/>
+          <p:cNvPr id="11" name="Text 8"/>
           <p:cNvSpPr/>
           <p:nvPr/>
         </p:nvSpPr>
@@ -12527,7 +12527,7 @@
       </p:sp>
       <p:sp>
         <p:nvSpPr>
-          <p:cNvPr id="13" name="Shape 9"/>
+          <p:cNvPr id="12" name="Shape 9"/>
           <p:cNvSpPr/>
           <p:nvPr/>
         </p:nvSpPr>
@@ -12554,7 +12554,7 @@
       </p:sp>
       <p:sp>
         <p:nvSpPr>
-          <p:cNvPr id="14" name="Shape 10"/>
+          <p:cNvPr id="13" name="Shape 10"/>
           <p:cNvSpPr/>
           <p:nvPr/>
         </p:nvSpPr>
@@ -12574,7 +12574,7 @@
       </p:sp>
       <p:sp>
         <p:nvSpPr>
-          <p:cNvPr id="15" name="Text 11"/>
+          <p:cNvPr id="14" name="Text 11"/>
           <p:cNvSpPr/>
           <p:nvPr/>
         </p:nvSpPr>
@@ -12613,7 +12613,7 @@
       </p:sp>
       <p:sp>
         <p:nvSpPr>
-          <p:cNvPr id="16" name="Text 12"/>
+          <p:cNvPr id="15" name="Text 12"/>
           <p:cNvSpPr/>
           <p:nvPr/>
         </p:nvSpPr>
@@ -12652,7 +12652,7 @@
       </p:sp>
       <p:sp>
         <p:nvSpPr>
-          <p:cNvPr id="17" name="Text 13"/>
+          <p:cNvPr id="16" name="Text 13"/>
           <p:cNvSpPr/>
           <p:nvPr/>
         </p:nvSpPr>
@@ -12694,7 +12694,7 @@
       </p:sp>
       <p:sp>
         <p:nvSpPr>
-          <p:cNvPr id="18" name="Shape 14"/>
+          <p:cNvPr id="17" name="Shape 14"/>
           <p:cNvSpPr/>
           <p:nvPr/>
         </p:nvSpPr>
@@ -12721,7 +12721,7 @@
       </p:sp>
       <p:sp>
         <p:nvSpPr>
-          <p:cNvPr id="19" name="Shape 15"/>
+          <p:cNvPr id="18" name="Shape 15"/>
           <p:cNvSpPr/>
           <p:nvPr/>
         </p:nvSpPr>
@@ -12741,7 +12741,7 @@
       </p:sp>
       <p:sp>
         <p:nvSpPr>
-          <p:cNvPr id="20" name="Text 16"/>
+          <p:cNvPr id="19" name="Text 16"/>
           <p:cNvSpPr/>
           <p:nvPr/>
         </p:nvSpPr>
@@ -12780,7 +12780,7 @@
       </p:sp>
       <p:sp>
         <p:nvSpPr>
-          <p:cNvPr id="21" name="Text 17"/>
+          <p:cNvPr id="20" name="Text 17"/>
           <p:cNvSpPr/>
           <p:nvPr/>
         </p:nvSpPr>
@@ -12819,7 +12819,7 @@
       </p:sp>
       <p:sp>
         <p:nvSpPr>
-          <p:cNvPr id="22" name="Text 18"/>
+          <p:cNvPr id="21" name="Text 18"/>
           <p:cNvSpPr/>
           <p:nvPr/>
         </p:nvSpPr>
@@ -12861,7 +12861,7 @@
       </p:sp>
       <p:sp>
         <p:nvSpPr>
-          <p:cNvPr id="23" name="Shape 19"/>
+          <p:cNvPr id="22" name="Shape 19"/>
           <p:cNvSpPr/>
           <p:nvPr/>
         </p:nvSpPr>
@@ -12888,7 +12888,7 @@
       </p:sp>
       <p:sp>
         <p:nvSpPr>
-          <p:cNvPr id="24" name="Shape 20"/>
+          <p:cNvPr id="23" name="Shape 20"/>
           <p:cNvSpPr/>
           <p:nvPr/>
         </p:nvSpPr>
@@ -12908,7 +12908,7 @@
       </p:sp>
       <p:sp>
         <p:nvSpPr>
-          <p:cNvPr id="25" name="Text 21"/>
+          <p:cNvPr id="24" name="Text 21"/>
           <p:cNvSpPr/>
           <p:nvPr/>
         </p:nvSpPr>
@@ -12947,7 +12947,7 @@
       </p:sp>
       <p:sp>
         <p:nvSpPr>
-          <p:cNvPr id="26" name="Text 22"/>
+          <p:cNvPr id="25" name="Text 22"/>
           <p:cNvSpPr/>
           <p:nvPr/>
         </p:nvSpPr>
@@ -12986,7 +12986,7 @@
       </p:sp>
       <p:sp>
         <p:nvSpPr>
-          <p:cNvPr id="27" name="Text 23"/>
+          <p:cNvPr id="26" name="Text 23"/>
           <p:cNvSpPr/>
           <p:nvPr/>
         </p:nvSpPr>
@@ -13028,7 +13028,7 @@
       </p:sp>
       <p:sp>
         <p:nvSpPr>
-          <p:cNvPr id="28" name="Shape 24"/>
+          <p:cNvPr id="27" name="Shape 24"/>
           <p:cNvSpPr/>
           <p:nvPr/>
         </p:nvSpPr>
@@ -13055,7 +13055,7 @@
       </p:sp>
       <p:sp>
         <p:nvSpPr>
-          <p:cNvPr id="29" name="Shape 25"/>
+          <p:cNvPr id="28" name="Shape 25"/>
           <p:cNvSpPr/>
           <p:nvPr/>
         </p:nvSpPr>
@@ -13075,7 +13075,7 @@
       </p:sp>
       <p:sp>
         <p:nvSpPr>
-          <p:cNvPr id="30" name="Text 26"/>
+          <p:cNvPr id="29" name="Text 26"/>
           <p:cNvSpPr/>
           <p:nvPr/>
         </p:nvSpPr>
@@ -13114,7 +13114,7 @@
       </p:sp>
       <p:sp>
         <p:nvSpPr>
-          <p:cNvPr id="31" name="Text 27"/>
+          <p:cNvPr id="30" name="Text 27"/>
           <p:cNvSpPr/>
           <p:nvPr/>
         </p:nvSpPr>
@@ -13153,7 +13153,7 @@
       </p:sp>
       <p:sp>
         <p:nvSpPr>
-          <p:cNvPr id="32" name="Text 28"/>
+          <p:cNvPr id="31" name="Text 28"/>
           <p:cNvSpPr/>
           <p:nvPr/>
         </p:nvSpPr>
@@ -13399,7 +13399,7 @@
       </p:pic>
       <p:sp>
         <p:nvSpPr>
-          <p:cNvPr id="7" name="Shape 3"/>
+          <p:cNvPr id="6" name="Shape 3"/>
           <p:cNvSpPr/>
           <p:nvPr/>
         </p:nvSpPr>
@@ -13426,7 +13426,7 @@
       </p:sp>
       <p:sp>
         <p:nvSpPr>
-          <p:cNvPr id="8" name="Shape 4"/>
+          <p:cNvPr id="7" name="Shape 4"/>
           <p:cNvSpPr/>
           <p:nvPr/>
         </p:nvSpPr>
@@ -13453,7 +13453,7 @@
       </p:sp>
       <p:sp>
         <p:nvSpPr>
-          <p:cNvPr id="9" name="Shape 5"/>
+          <p:cNvPr id="8" name="Shape 5"/>
           <p:cNvSpPr/>
           <p:nvPr/>
         </p:nvSpPr>
@@ -13473,7 +13473,7 @@
       </p:sp>
       <p:sp>
         <p:nvSpPr>
-          <p:cNvPr id="10" name="Shape 6"/>
+          <p:cNvPr id="9" name="Shape 6"/>
           <p:cNvSpPr/>
           <p:nvPr/>
         </p:nvSpPr>
@@ -13493,7 +13493,7 @@
       </p:sp>
       <p:sp>
         <p:nvSpPr>
-          <p:cNvPr id="11" name="Text 7"/>
+          <p:cNvPr id="10" name="Text 7"/>
           <p:cNvSpPr/>
           <p:nvPr/>
         </p:nvSpPr>
@@ -13532,7 +13532,7 @@
       </p:sp>
       <p:sp>
         <p:nvSpPr>
-          <p:cNvPr id="12" name="Shape 8"/>
+          <p:cNvPr id="11" name="Shape 8"/>
           <p:cNvSpPr/>
           <p:nvPr/>
         </p:nvSpPr>
@@ -13559,7 +13559,7 @@
       </p:sp>
       <p:sp>
         <p:nvSpPr>
-          <p:cNvPr id="13" name="Shape 9"/>
+          <p:cNvPr id="12" name="Shape 9"/>
           <p:cNvSpPr/>
           <p:nvPr/>
         </p:nvSpPr>
@@ -13579,7 +13579,7 @@
       </p:sp>
       <p:sp>
         <p:nvSpPr>
-          <p:cNvPr id="14" name="Shape 10"/>
+          <p:cNvPr id="13" name="Shape 10"/>
           <p:cNvSpPr/>
           <p:nvPr/>
         </p:nvSpPr>
@@ -13599,7 +13599,7 @@
       </p:sp>
       <p:sp>
         <p:nvSpPr>
-          <p:cNvPr id="15" name="Text 11"/>
+          <p:cNvPr id="14" name="Text 11"/>
           <p:cNvSpPr/>
           <p:nvPr/>
         </p:nvSpPr>
@@ -13638,7 +13638,7 @@
       </p:sp>
       <p:sp>
         <p:nvSpPr>
-          <p:cNvPr id="16" name="Shape 12"/>
+          <p:cNvPr id="15" name="Shape 12"/>
           <p:cNvSpPr/>
           <p:nvPr/>
         </p:nvSpPr>
@@ -13665,7 +13665,7 @@
       </p:sp>
       <p:sp>
         <p:nvSpPr>
-          <p:cNvPr id="17" name="Shape 13"/>
+          <p:cNvPr id="16" name="Shape 13"/>
           <p:cNvSpPr/>
           <p:nvPr/>
         </p:nvSpPr>
@@ -13685,7 +13685,7 @@
       </p:sp>
       <p:sp>
         <p:nvSpPr>
-          <p:cNvPr id="18" name="Shape 14"/>
+          <p:cNvPr id="17" name="Shape 14"/>
           <p:cNvSpPr/>
           <p:nvPr/>
         </p:nvSpPr>
@@ -13705,7 +13705,7 @@
       </p:sp>
       <p:sp>
         <p:nvSpPr>
-          <p:cNvPr id="19" name="Text 15"/>
+          <p:cNvPr id="18" name="Text 15"/>
           <p:cNvSpPr/>
           <p:nvPr/>
         </p:nvSpPr>
@@ -13744,7 +13744,7 @@
       </p:sp>
       <p:sp>
         <p:nvSpPr>
-          <p:cNvPr id="20" name="Shape 16"/>
+          <p:cNvPr id="19" name="Shape 16"/>
           <p:cNvSpPr/>
           <p:nvPr/>
         </p:nvSpPr>
@@ -13771,7 +13771,7 @@
       </p:sp>
       <p:sp>
         <p:nvSpPr>
-          <p:cNvPr id="21" name="Shape 17"/>
+          <p:cNvPr id="20" name="Shape 17"/>
           <p:cNvSpPr/>
           <p:nvPr/>
         </p:nvSpPr>
@@ -13791,7 +13791,7 @@
       </p:sp>
       <p:sp>
         <p:nvSpPr>
-          <p:cNvPr id="22" name="Shape 18"/>
+          <p:cNvPr id="21" name="Shape 18"/>
           <p:cNvSpPr/>
           <p:nvPr/>
         </p:nvSpPr>
@@ -13811,7 +13811,7 @@
       </p:sp>
       <p:sp>
         <p:nvSpPr>
-          <p:cNvPr id="23" name="Text 19"/>
+          <p:cNvPr id="22" name="Text 19"/>
           <p:cNvSpPr/>
           <p:nvPr/>
         </p:nvSpPr>
@@ -13850,7 +13850,7 @@
       </p:sp>
       <p:sp>
         <p:nvSpPr>
-          <p:cNvPr id="24" name="Shape 20"/>
+          <p:cNvPr id="23" name="Shape 20"/>
           <p:cNvSpPr/>
           <p:nvPr/>
         </p:nvSpPr>
@@ -13877,7 +13877,7 @@
       </p:sp>
       <p:sp>
         <p:nvSpPr>
-          <p:cNvPr id="25" name="Shape 21"/>
+          <p:cNvPr id="24" name="Shape 21"/>
           <p:cNvSpPr/>
           <p:nvPr/>
         </p:nvSpPr>
@@ -13897,7 +13897,7 @@
       </p:sp>
       <p:sp>
         <p:nvSpPr>
-          <p:cNvPr id="26" name="Shape 22"/>
+          <p:cNvPr id="25" name="Shape 22"/>
           <p:cNvSpPr/>
           <p:nvPr/>
         </p:nvSpPr>
@@ -13917,7 +13917,7 @@
       </p:sp>
       <p:sp>
         <p:nvSpPr>
-          <p:cNvPr id="27" name="Text 23"/>
+          <p:cNvPr id="26" name="Text 23"/>
           <p:cNvSpPr/>
           <p:nvPr/>
         </p:nvSpPr>
@@ -13956,7 +13956,7 @@
       </p:sp>
       <p:sp>
         <p:nvSpPr>
-          <p:cNvPr id="28" name="Text 24"/>
+          <p:cNvPr id="27" name="Text 24"/>
           <p:cNvSpPr/>
           <p:nvPr/>
         </p:nvSpPr>
@@ -14199,7 +14199,7 @@
       </p:pic>
       <p:sp>
         <p:nvSpPr>
-          <p:cNvPr id="7" name="Shape 3"/>
+          <p:cNvPr id="6" name="Shape 3"/>
           <p:cNvSpPr/>
           <p:nvPr/>
         </p:nvSpPr>
@@ -14226,7 +14226,7 @@
       </p:sp>
       <p:sp>
         <p:nvSpPr>
-          <p:cNvPr id="8" name="Shape 4"/>
+          <p:cNvPr id="7" name="Shape 4"/>
           <p:cNvSpPr/>
           <p:nvPr/>
         </p:nvSpPr>
@@ -14246,7 +14246,7 @@
       </p:sp>
       <p:sp>
         <p:nvSpPr>
-          <p:cNvPr id="9" name="Shape 5"/>
+          <p:cNvPr id="8" name="Shape 5"/>
           <p:cNvSpPr/>
           <p:nvPr/>
         </p:nvSpPr>
@@ -14266,7 +14266,7 @@
       </p:sp>
       <p:sp>
         <p:nvSpPr>
-          <p:cNvPr id="10" name="Shape 6"/>
+          <p:cNvPr id="9" name="Shape 6"/>
           <p:cNvSpPr/>
           <p:nvPr/>
         </p:nvSpPr>
@@ -14286,7 +14286,7 @@
       </p:sp>
       <p:sp>
         <p:nvSpPr>
-          <p:cNvPr id="11" name="Text 7"/>
+          <p:cNvPr id="10" name="Text 7"/>
           <p:cNvSpPr/>
           <p:nvPr/>
         </p:nvSpPr>
@@ -14339,7 +14339,7 @@
       </p:sp>
       <p:sp>
         <p:nvSpPr>
-          <p:cNvPr id="12" name="Shape 8"/>
+          <p:cNvPr id="11" name="Shape 8"/>
           <p:cNvSpPr/>
           <p:nvPr/>
         </p:nvSpPr>
@@ -14366,7 +14366,7 @@
       </p:sp>
       <p:sp>
         <p:nvSpPr>
-          <p:cNvPr id="13" name="Shape 9"/>
+          <p:cNvPr id="12" name="Shape 9"/>
           <p:cNvSpPr/>
           <p:nvPr/>
         </p:nvSpPr>
@@ -14386,7 +14386,7 @@
       </p:sp>
       <p:sp>
         <p:nvSpPr>
-          <p:cNvPr id="14" name="Shape 10"/>
+          <p:cNvPr id="13" name="Shape 10"/>
           <p:cNvSpPr/>
           <p:nvPr/>
         </p:nvSpPr>
@@ -14406,7 +14406,7 @@
       </p:sp>
       <p:sp>
         <p:nvSpPr>
-          <p:cNvPr id="15" name="Shape 11"/>
+          <p:cNvPr id="14" name="Shape 11"/>
           <p:cNvSpPr/>
           <p:nvPr/>
         </p:nvSpPr>
@@ -14426,7 +14426,7 @@
       </p:sp>
       <p:sp>
         <p:nvSpPr>
-          <p:cNvPr id="16" name="Text 12"/>
+          <p:cNvPr id="15" name="Text 12"/>
           <p:cNvSpPr/>
           <p:nvPr/>
         </p:nvSpPr>
@@ -14479,7 +14479,7 @@
       </p:sp>
       <p:sp>
         <p:nvSpPr>
-          <p:cNvPr id="17" name="Shape 13"/>
+          <p:cNvPr id="16" name="Shape 13"/>
           <p:cNvSpPr/>
           <p:nvPr/>
         </p:nvSpPr>
@@ -14506,7 +14506,7 @@
       </p:sp>
       <p:sp>
         <p:nvSpPr>
-          <p:cNvPr id="18" name="Shape 14"/>
+          <p:cNvPr id="17" name="Shape 14"/>
           <p:cNvSpPr/>
           <p:nvPr/>
         </p:nvSpPr>
@@ -14526,7 +14526,7 @@
       </p:sp>
       <p:sp>
         <p:nvSpPr>
-          <p:cNvPr id="19" name="Shape 15"/>
+          <p:cNvPr id="18" name="Shape 15"/>
           <p:cNvSpPr/>
           <p:nvPr/>
         </p:nvSpPr>
@@ -14546,7 +14546,7 @@
       </p:sp>
       <p:sp>
         <p:nvSpPr>
-          <p:cNvPr id="20" name="Shape 16"/>
+          <p:cNvPr id="19" name="Shape 16"/>
           <p:cNvSpPr/>
           <p:nvPr/>
         </p:nvSpPr>
@@ -14566,7 +14566,7 @@
       </p:sp>
       <p:sp>
         <p:nvSpPr>
-          <p:cNvPr id="21" name="Text 17"/>
+          <p:cNvPr id="20" name="Text 17"/>
           <p:cNvSpPr/>
           <p:nvPr/>
         </p:nvSpPr>
@@ -14619,7 +14619,7 @@
       </p:sp>
       <p:sp>
         <p:nvSpPr>
-          <p:cNvPr id="22" name="Shape 18"/>
+          <p:cNvPr id="21" name="Shape 18"/>
           <p:cNvSpPr/>
           <p:nvPr/>
         </p:nvSpPr>
@@ -14646,7 +14646,7 @@
       </p:sp>
       <p:sp>
         <p:nvSpPr>
-          <p:cNvPr id="23" name="Shape 19"/>
+          <p:cNvPr id="22" name="Shape 19"/>
           <p:cNvSpPr/>
           <p:nvPr/>
         </p:nvSpPr>
@@ -14666,7 +14666,7 @@
       </p:sp>
       <p:sp>
         <p:nvSpPr>
-          <p:cNvPr id="24" name="Shape 20"/>
+          <p:cNvPr id="23" name="Shape 20"/>
           <p:cNvSpPr/>
           <p:nvPr/>
         </p:nvSpPr>
@@ -14686,7 +14686,7 @@
       </p:sp>
       <p:sp>
         <p:nvSpPr>
-          <p:cNvPr id="25" name="Shape 21"/>
+          <p:cNvPr id="24" name="Shape 21"/>
           <p:cNvSpPr/>
           <p:nvPr/>
         </p:nvSpPr>
@@ -14706,7 +14706,7 @@
       </p:sp>
       <p:sp>
         <p:nvSpPr>
-          <p:cNvPr id="26" name="Text 22"/>
+          <p:cNvPr id="25" name="Text 22"/>
           <p:cNvSpPr/>
           <p:nvPr/>
         </p:nvSpPr>
@@ -14759,7 +14759,7 @@
       </p:sp>
       <p:sp>
         <p:nvSpPr>
-          <p:cNvPr id="27" name="Shape 23"/>
+          <p:cNvPr id="26" name="Shape 23"/>
           <p:cNvSpPr/>
           <p:nvPr/>
         </p:nvSpPr>
@@ -14786,7 +14786,7 @@
       </p:sp>
       <p:sp>
         <p:nvSpPr>
-          <p:cNvPr id="28" name="Shape 24"/>
+          <p:cNvPr id="27" name="Shape 24"/>
           <p:cNvSpPr/>
           <p:nvPr/>
         </p:nvSpPr>
@@ -14806,7 +14806,7 @@
       </p:sp>
       <p:sp>
         <p:nvSpPr>
-          <p:cNvPr id="29" name="Shape 25"/>
+          <p:cNvPr id="28" name="Shape 25"/>
           <p:cNvSpPr/>
           <p:nvPr/>
         </p:nvSpPr>
@@ -14826,7 +14826,7 @@
       </p:sp>
       <p:sp>
         <p:nvSpPr>
-          <p:cNvPr id="30" name="Shape 26"/>
+          <p:cNvPr id="29" name="Shape 26"/>
           <p:cNvSpPr/>
           <p:nvPr/>
         </p:nvSpPr>
@@ -14846,7 +14846,7 @@
       </p:sp>
       <p:sp>
         <p:nvSpPr>
-          <p:cNvPr id="31" name="Text 27"/>
+          <p:cNvPr id="30" name="Text 27"/>
           <p:cNvSpPr/>
           <p:nvPr/>
         </p:nvSpPr>
@@ -15103,7 +15103,7 @@
       </p:pic>
       <p:sp>
         <p:nvSpPr>
-          <p:cNvPr id="7" name="Shape 3"/>
+          <p:cNvPr id="6" name="Shape 3"/>
           <p:cNvSpPr/>
           <p:nvPr/>
         </p:nvSpPr>
@@ -15130,7 +15130,7 @@
       </p:sp>
       <p:sp>
         <p:nvSpPr>
-          <p:cNvPr id="8" name="Text 4"/>
+          <p:cNvPr id="7" name="Text 4"/>
           <p:cNvSpPr/>
           <p:nvPr/>
         </p:nvSpPr>
@@ -15169,7 +15169,7 @@
       </p:sp>
       <p:sp>
         <p:nvSpPr>
-          <p:cNvPr id="9" name="Text 5"/>
+          <p:cNvPr id="8" name="Text 5"/>
           <p:cNvSpPr/>
           <p:nvPr/>
         </p:nvSpPr>
@@ -15208,7 +15208,7 @@
       </p:sp>
       <p:sp>
         <p:nvSpPr>
-          <p:cNvPr id="10" name="Text 6"/>
+          <p:cNvPr id="9" name="Text 6"/>
           <p:cNvSpPr/>
           <p:nvPr/>
         </p:nvSpPr>
@@ -15247,7 +15247,7 @@
       </p:sp>
       <p:sp>
         <p:nvSpPr>
-          <p:cNvPr id="11" name="Text 7"/>
+          <p:cNvPr id="10" name="Text 7"/>
           <p:cNvSpPr/>
           <p:nvPr/>
         </p:nvSpPr>
@@ -15300,7 +15300,7 @@
       </p:sp>
       <p:sp>
         <p:nvSpPr>
-          <p:cNvPr id="12" name="Text 8"/>
+          <p:cNvPr id="11" name="Text 8"/>
           <p:cNvSpPr/>
           <p:nvPr/>
         </p:nvSpPr>
@@ -15353,7 +15353,7 @@
       </p:sp>
       <p:sp>
         <p:nvSpPr>
-          <p:cNvPr id="13" name="Text 9"/>
+          <p:cNvPr id="12" name="Text 9"/>
           <p:cNvSpPr/>
           <p:nvPr/>
         </p:nvSpPr>
@@ -15406,7 +15406,7 @@
       </p:sp>
       <p:sp>
         <p:nvSpPr>
-          <p:cNvPr id="14" name="Shape 10"/>
+          <p:cNvPr id="13" name="Shape 10"/>
           <p:cNvSpPr/>
           <p:nvPr/>
         </p:nvSpPr>
@@ -15428,7 +15428,7 @@
       </p:sp>
       <p:sp>
         <p:nvSpPr>
-          <p:cNvPr id="15" name="Text 11"/>
+          <p:cNvPr id="14" name="Text 11"/>
           <p:cNvSpPr/>
           <p:nvPr/>
         </p:nvSpPr>
@@ -15467,7 +15467,7 @@
       </p:sp>
       <p:sp>
         <p:nvSpPr>
-          <p:cNvPr id="16" name="Text 12"/>
+          <p:cNvPr id="15" name="Text 12"/>
           <p:cNvSpPr/>
           <p:nvPr/>
         </p:nvSpPr>
@@ -16256,7 +16256,7 @@
       </p:pic>
       <p:sp>
         <p:nvSpPr>
-          <p:cNvPr id="7" name="Shape 3"/>
+          <p:cNvPr id="6" name="Shape 3"/>
           <p:cNvSpPr/>
           <p:nvPr/>
         </p:nvSpPr>
@@ -16283,7 +16283,7 @@
       </p:sp>
       <p:sp>
         <p:nvSpPr>
-          <p:cNvPr id="8" name="Shape 4"/>
+          <p:cNvPr id="7" name="Shape 4"/>
           <p:cNvSpPr/>
           <p:nvPr/>
         </p:nvSpPr>
@@ -16303,7 +16303,7 @@
       </p:sp>
       <p:sp>
         <p:nvSpPr>
-          <p:cNvPr id="9" name="Text 5"/>
+          <p:cNvPr id="8" name="Text 5"/>
           <p:cNvSpPr/>
           <p:nvPr/>
         </p:nvSpPr>
@@ -16342,7 +16342,7 @@
       </p:sp>
       <p:sp>
         <p:nvSpPr>
-          <p:cNvPr id="10" name="Text 6"/>
+          <p:cNvPr id="9" name="Text 6"/>
           <p:cNvSpPr/>
           <p:nvPr/>
         </p:nvSpPr>
@@ -16381,7 +16381,7 @@
       </p:sp>
       <p:sp>
         <p:nvSpPr>
-          <p:cNvPr id="11" name="Shape 7"/>
+          <p:cNvPr id="10" name="Shape 7"/>
           <p:cNvSpPr/>
           <p:nvPr/>
         </p:nvSpPr>
@@ -16408,7 +16408,7 @@
       </p:sp>
       <p:sp>
         <p:nvSpPr>
-          <p:cNvPr id="12" name="Shape 8"/>
+          <p:cNvPr id="11" name="Shape 8"/>
           <p:cNvSpPr/>
           <p:nvPr/>
         </p:nvSpPr>
@@ -16428,7 +16428,7 @@
       </p:sp>
       <p:sp>
         <p:nvSpPr>
-          <p:cNvPr id="13" name="Text 9"/>
+          <p:cNvPr id="12" name="Text 9"/>
           <p:cNvSpPr/>
           <p:nvPr/>
         </p:nvSpPr>
@@ -16467,7 +16467,7 @@
       </p:sp>
       <p:sp>
         <p:nvSpPr>
-          <p:cNvPr id="14" name="Text 10"/>
+          <p:cNvPr id="13" name="Text 10"/>
           <p:cNvSpPr/>
           <p:nvPr/>
         </p:nvSpPr>
@@ -16506,7 +16506,7 @@
       </p:sp>
       <p:sp>
         <p:nvSpPr>
-          <p:cNvPr id="15" name="Shape 11"/>
+          <p:cNvPr id="14" name="Shape 11"/>
           <p:cNvSpPr/>
           <p:nvPr/>
         </p:nvSpPr>
@@ -16533,7 +16533,7 @@
       </p:sp>
       <p:sp>
         <p:nvSpPr>
-          <p:cNvPr id="16" name="Shape 12"/>
+          <p:cNvPr id="15" name="Shape 12"/>
           <p:cNvSpPr/>
           <p:nvPr/>
         </p:nvSpPr>
@@ -16553,7 +16553,7 @@
       </p:sp>
       <p:sp>
         <p:nvSpPr>
-          <p:cNvPr id="17" name="Text 13"/>
+          <p:cNvPr id="16" name="Text 13"/>
           <p:cNvSpPr/>
           <p:nvPr/>
         </p:nvSpPr>
@@ -16592,7 +16592,7 @@
       </p:sp>
       <p:sp>
         <p:nvSpPr>
-          <p:cNvPr id="18" name="Text 14"/>
+          <p:cNvPr id="17" name="Text 14"/>
           <p:cNvSpPr/>
           <p:nvPr/>
         </p:nvSpPr>
@@ -16631,7 +16631,7 @@
       </p:sp>
       <p:sp>
         <p:nvSpPr>
-          <p:cNvPr id="19" name="Shape 15"/>
+          <p:cNvPr id="18" name="Shape 15"/>
           <p:cNvSpPr/>
           <p:nvPr/>
         </p:nvSpPr>
@@ -16658,7 +16658,7 @@
       </p:sp>
       <p:sp>
         <p:nvSpPr>
-          <p:cNvPr id="20" name="Shape 16"/>
+          <p:cNvPr id="19" name="Shape 16"/>
           <p:cNvSpPr/>
           <p:nvPr/>
         </p:nvSpPr>
@@ -16678,7 +16678,7 @@
       </p:sp>
       <p:sp>
         <p:nvSpPr>
-          <p:cNvPr id="21" name="Text 17"/>
+          <p:cNvPr id="20" name="Text 17"/>
           <p:cNvSpPr/>
           <p:nvPr/>
         </p:nvSpPr>
@@ -16717,7 +16717,7 @@
       </p:sp>
       <p:sp>
         <p:nvSpPr>
-          <p:cNvPr id="22" name="Text 18"/>
+          <p:cNvPr id="21" name="Text 18"/>
           <p:cNvSpPr/>
           <p:nvPr/>
         </p:nvSpPr>
@@ -16756,7 +16756,7 @@
       </p:sp>
       <p:sp>
         <p:nvSpPr>
-          <p:cNvPr id="23" name="Shape 19"/>
+          <p:cNvPr id="22" name="Shape 19"/>
           <p:cNvSpPr/>
           <p:nvPr/>
         </p:nvSpPr>
@@ -16783,7 +16783,7 @@
       </p:sp>
       <p:sp>
         <p:nvSpPr>
-          <p:cNvPr id="24" name="Shape 20"/>
+          <p:cNvPr id="23" name="Shape 20"/>
           <p:cNvSpPr/>
           <p:nvPr/>
         </p:nvSpPr>
@@ -16803,7 +16803,7 @@
       </p:sp>
       <p:sp>
         <p:nvSpPr>
-          <p:cNvPr id="25" name="Text 21"/>
+          <p:cNvPr id="24" name="Text 21"/>
           <p:cNvSpPr/>
           <p:nvPr/>
         </p:nvSpPr>
@@ -16842,7 +16842,7 @@
       </p:sp>
       <p:sp>
         <p:nvSpPr>
-          <p:cNvPr id="26" name="Text 22"/>
+          <p:cNvPr id="25" name="Text 22"/>
           <p:cNvSpPr/>
           <p:nvPr/>
         </p:nvSpPr>
@@ -16881,7 +16881,7 @@
       </p:sp>
       <p:sp>
         <p:nvSpPr>
-          <p:cNvPr id="27" name="Shape 23"/>
+          <p:cNvPr id="26" name="Shape 23"/>
           <p:cNvSpPr/>
           <p:nvPr/>
         </p:nvSpPr>
@@ -16908,7 +16908,7 @@
       </p:sp>
       <p:sp>
         <p:nvSpPr>
-          <p:cNvPr id="28" name="Shape 24"/>
+          <p:cNvPr id="27" name="Shape 24"/>
           <p:cNvSpPr/>
           <p:nvPr/>
         </p:nvSpPr>
@@ -16928,7 +16928,7 @@
       </p:sp>
       <p:sp>
         <p:nvSpPr>
-          <p:cNvPr id="29" name="Text 25"/>
+          <p:cNvPr id="28" name="Text 25"/>
           <p:cNvSpPr/>
           <p:nvPr/>
         </p:nvSpPr>
@@ -16967,7 +16967,7 @@
       </p:sp>
       <p:sp>
         <p:nvSpPr>
-          <p:cNvPr id="30" name="Text 26"/>
+          <p:cNvPr id="29" name="Text 26"/>
           <p:cNvSpPr/>
           <p:nvPr/>
         </p:nvSpPr>
@@ -17006,7 +17006,7 @@
       </p:sp>
       <p:sp>
         <p:nvSpPr>
-          <p:cNvPr id="31" name="Shape 27"/>
+          <p:cNvPr id="30" name="Shape 27"/>
           <p:cNvSpPr/>
           <p:nvPr/>
         </p:nvSpPr>
@@ -17033,7 +17033,7 @@
       </p:sp>
       <p:sp>
         <p:nvSpPr>
-          <p:cNvPr id="32" name="Shape 28"/>
+          <p:cNvPr id="31" name="Shape 28"/>
           <p:cNvSpPr/>
           <p:nvPr/>
         </p:nvSpPr>
@@ -17053,7 +17053,7 @@
       </p:sp>
       <p:sp>
         <p:nvSpPr>
-          <p:cNvPr id="33" name="Text 29"/>
+          <p:cNvPr id="32" name="Text 29"/>
           <p:cNvSpPr/>
           <p:nvPr/>
         </p:nvSpPr>
@@ -17092,7 +17092,7 @@
       </p:sp>
       <p:sp>
         <p:nvSpPr>
-          <p:cNvPr id="34" name="Text 30"/>
+          <p:cNvPr id="33" name="Text 30"/>
           <p:cNvSpPr/>
           <p:nvPr/>
         </p:nvSpPr>
@@ -17131,7 +17131,7 @@
       </p:sp>
       <p:sp>
         <p:nvSpPr>
-          <p:cNvPr id="35" name="Shape 31"/>
+          <p:cNvPr id="34" name="Shape 31"/>
           <p:cNvSpPr/>
           <p:nvPr/>
         </p:nvSpPr>
@@ -17158,7 +17158,7 @@
       </p:sp>
       <p:sp>
         <p:nvSpPr>
-          <p:cNvPr id="36" name="Shape 32"/>
+          <p:cNvPr id="35" name="Shape 32"/>
           <p:cNvSpPr/>
           <p:nvPr/>
         </p:nvSpPr>
@@ -17178,7 +17178,7 @@
       </p:sp>
       <p:sp>
         <p:nvSpPr>
-          <p:cNvPr id="37" name="Text 33"/>
+          <p:cNvPr id="36" name="Text 33"/>
           <p:cNvSpPr/>
           <p:nvPr/>
         </p:nvSpPr>
@@ -17217,7 +17217,7 @@
       </p:sp>
       <p:sp>
         <p:nvSpPr>
-          <p:cNvPr id="38" name="Text 34"/>
+          <p:cNvPr id="37" name="Text 34"/>
           <p:cNvSpPr/>
           <p:nvPr/>
         </p:nvSpPr>
@@ -17256,7 +17256,7 @@
       </p:sp>
       <p:sp>
         <p:nvSpPr>
-          <p:cNvPr id="39" name="Shape 35"/>
+          <p:cNvPr id="38" name="Shape 35"/>
           <p:cNvSpPr/>
           <p:nvPr/>
         </p:nvSpPr>
@@ -17278,7 +17278,7 @@
       </p:sp>
       <p:sp>
         <p:nvSpPr>
-          <p:cNvPr id="40" name="Shape 36"/>
+          <p:cNvPr id="39" name="Shape 36"/>
           <p:cNvSpPr/>
           <p:nvPr/>
         </p:nvSpPr>
@@ -17298,7 +17298,7 @@
       </p:sp>
       <p:sp>
         <p:nvSpPr>
-          <p:cNvPr id="41" name="Text 37"/>
+          <p:cNvPr id="40" name="Text 37"/>
           <p:cNvSpPr/>
           <p:nvPr/>
         </p:nvSpPr>
@@ -17337,7 +17337,7 @@
       </p:sp>
       <p:sp>
         <p:nvSpPr>
-          <p:cNvPr id="42" name="Text 38"/>
+          <p:cNvPr id="41" name="Text 38"/>
           <p:cNvSpPr/>
           <p:nvPr/>
         </p:nvSpPr>
@@ -17376,7 +17376,7 @@
       </p:sp>
       <p:sp>
         <p:nvSpPr>
-          <p:cNvPr id="43" name="Shape 39"/>
+          <p:cNvPr id="42" name="Shape 39"/>
           <p:cNvSpPr/>
           <p:nvPr/>
         </p:nvSpPr>
@@ -17403,7 +17403,7 @@
       </p:sp>
       <p:sp>
         <p:nvSpPr>
-          <p:cNvPr id="44" name="Shape 40"/>
+          <p:cNvPr id="43" name="Shape 40"/>
           <p:cNvSpPr/>
           <p:nvPr/>
         </p:nvSpPr>
@@ -17423,7 +17423,7 @@
       </p:sp>
       <p:sp>
         <p:nvSpPr>
-          <p:cNvPr id="45" name="Text 41"/>
+          <p:cNvPr id="44" name="Text 41"/>
           <p:cNvSpPr/>
           <p:nvPr/>
         </p:nvSpPr>
@@ -17462,7 +17462,7 @@
       </p:sp>
       <p:sp>
         <p:nvSpPr>
-          <p:cNvPr id="46" name="Text 42"/>
+          <p:cNvPr id="45" name="Text 42"/>
           <p:cNvSpPr/>
           <p:nvPr/>
         </p:nvSpPr>
@@ -17501,7 +17501,7 @@
       </p:sp>
       <p:sp>
         <p:nvSpPr>
-          <p:cNvPr id="47" name="Shape 43"/>
+          <p:cNvPr id="46" name="Shape 43"/>
           <p:cNvSpPr/>
           <p:nvPr/>
         </p:nvSpPr>
@@ -17528,7 +17528,7 @@
       </p:sp>
       <p:sp>
         <p:nvSpPr>
-          <p:cNvPr id="48" name="Shape 44"/>
+          <p:cNvPr id="47" name="Shape 44"/>
           <p:cNvSpPr/>
           <p:nvPr/>
         </p:nvSpPr>
@@ -17548,7 +17548,7 @@
       </p:sp>
       <p:sp>
         <p:nvSpPr>
-          <p:cNvPr id="49" name="Text 45"/>
+          <p:cNvPr id="48" name="Text 45"/>
           <p:cNvSpPr/>
           <p:nvPr/>
         </p:nvSpPr>
@@ -17587,7 +17587,7 @@
       </p:sp>
       <p:sp>
         <p:nvSpPr>
-          <p:cNvPr id="50" name="Text 46"/>
+          <p:cNvPr id="49" name="Text 46"/>
           <p:cNvSpPr/>
           <p:nvPr/>
         </p:nvSpPr>
@@ -17626,7 +17626,7 @@
       </p:sp>
       <p:sp>
         <p:nvSpPr>
-          <p:cNvPr id="51" name="Shape 47"/>
+          <p:cNvPr id="50" name="Shape 47"/>
           <p:cNvSpPr/>
           <p:nvPr/>
         </p:nvSpPr>
@@ -17653,7 +17653,7 @@
       </p:sp>
       <p:sp>
         <p:nvSpPr>
-          <p:cNvPr id="52" name="Shape 48"/>
+          <p:cNvPr id="51" name="Shape 48"/>
           <p:cNvSpPr/>
           <p:nvPr/>
         </p:nvSpPr>
@@ -17673,7 +17673,7 @@
       </p:sp>
       <p:sp>
         <p:nvSpPr>
-          <p:cNvPr id="53" name="Text 49"/>
+          <p:cNvPr id="52" name="Text 49"/>
           <p:cNvSpPr/>
           <p:nvPr/>
         </p:nvSpPr>
@@ -17712,7 +17712,7 @@
       </p:sp>
       <p:sp>
         <p:nvSpPr>
-          <p:cNvPr id="54" name="Text 50"/>
+          <p:cNvPr id="53" name="Text 50"/>
           <p:cNvSpPr/>
           <p:nvPr/>
         </p:nvSpPr>
@@ -17751,7 +17751,7 @@
       </p:sp>
       <p:sp>
         <p:nvSpPr>
-          <p:cNvPr id="55" name="Shape 51"/>
+          <p:cNvPr id="54" name="Shape 51"/>
           <p:cNvSpPr/>
           <p:nvPr/>
         </p:nvSpPr>
@@ -17778,7 +17778,7 @@
       </p:sp>
       <p:sp>
         <p:nvSpPr>
-          <p:cNvPr id="56" name="Text 52"/>
+          <p:cNvPr id="55" name="Text 52"/>
           <p:cNvSpPr/>
           <p:nvPr/>
         </p:nvSpPr>
@@ -18066,7 +18066,7 @@
       </p:pic>
       <p:sp>
         <p:nvSpPr>
-          <p:cNvPr id="8" name="Shape 4"/>
+          <p:cNvPr id="7" name="Shape 4"/>
           <p:cNvSpPr/>
           <p:nvPr/>
         </p:nvSpPr>
@@ -18093,7 +18093,7 @@
       </p:sp>
       <p:sp>
         <p:nvSpPr>
-          <p:cNvPr id="9" name="Text 5"/>
+          <p:cNvPr id="8" name="Text 5"/>
           <p:cNvSpPr/>
           <p:nvPr/>
         </p:nvSpPr>
@@ -18132,7 +18132,7 @@
       </p:sp>
       <p:sp>
         <p:nvSpPr>
-          <p:cNvPr id="10" name="Text 6"/>
+          <p:cNvPr id="9" name="Text 6"/>
           <p:cNvSpPr/>
           <p:nvPr/>
         </p:nvSpPr>
@@ -18174,7 +18174,7 @@
       </p:sp>
       <p:sp>
         <p:nvSpPr>
-          <p:cNvPr id="11" name="Shape 7"/>
+          <p:cNvPr id="10" name="Shape 7"/>
           <p:cNvSpPr/>
           <p:nvPr/>
         </p:nvSpPr>
@@ -18201,7 +18201,7 @@
       </p:sp>
       <p:sp>
         <p:nvSpPr>
-          <p:cNvPr id="12" name="Text 8"/>
+          <p:cNvPr id="11" name="Text 8"/>
           <p:cNvSpPr/>
           <p:nvPr/>
         </p:nvSpPr>
@@ -18240,7 +18240,7 @@
       </p:sp>
       <p:sp>
         <p:nvSpPr>
-          <p:cNvPr id="13" name="Text 9"/>
+          <p:cNvPr id="12" name="Text 9"/>
           <p:cNvSpPr/>
           <p:nvPr/>
         </p:nvSpPr>
@@ -18282,7 +18282,7 @@
       </p:sp>
       <p:sp>
         <p:nvSpPr>
-          <p:cNvPr id="14" name="Shape 10"/>
+          <p:cNvPr id="13" name="Shape 10"/>
           <p:cNvSpPr/>
           <p:nvPr/>
         </p:nvSpPr>
@@ -18309,7 +18309,7 @@
       </p:sp>
       <p:sp>
         <p:nvSpPr>
-          <p:cNvPr id="15" name="Text 11"/>
+          <p:cNvPr id="14" name="Text 11"/>
           <p:cNvSpPr/>
           <p:nvPr/>
         </p:nvSpPr>
@@ -18348,7 +18348,7 @@
       </p:sp>
       <p:sp>
         <p:nvSpPr>
-          <p:cNvPr id="16" name="Text 12"/>
+          <p:cNvPr id="15" name="Text 12"/>
           <p:cNvSpPr/>
           <p:nvPr/>
         </p:nvSpPr>
@@ -18390,7 +18390,7 @@
       </p:sp>
       <p:sp>
         <p:nvSpPr>
-          <p:cNvPr id="17" name="Shape 13"/>
+          <p:cNvPr id="16" name="Shape 13"/>
           <p:cNvSpPr/>
           <p:nvPr/>
         </p:nvSpPr>
@@ -18417,7 +18417,7 @@
       </p:sp>
       <p:sp>
         <p:nvSpPr>
-          <p:cNvPr id="18" name="Text 14"/>
+          <p:cNvPr id="17" name="Text 14"/>
           <p:cNvSpPr/>
           <p:nvPr/>
         </p:nvSpPr>
@@ -18456,7 +18456,7 @@
       </p:sp>
       <p:sp>
         <p:nvSpPr>
-          <p:cNvPr id="19" name="Text 15"/>
+          <p:cNvPr id="18" name="Text 15"/>
           <p:cNvSpPr/>
           <p:nvPr/>
         </p:nvSpPr>
@@ -18498,7 +18498,7 @@
       </p:sp>
       <p:sp>
         <p:nvSpPr>
-          <p:cNvPr id="20" name="Shape 16"/>
+          <p:cNvPr id="19" name="Shape 16"/>
           <p:cNvSpPr/>
           <p:nvPr/>
         </p:nvSpPr>
@@ -18525,7 +18525,7 @@
       </p:sp>
       <p:sp>
         <p:nvSpPr>
-          <p:cNvPr id="21" name="Text 17"/>
+          <p:cNvPr id="20" name="Text 17"/>
           <p:cNvSpPr/>
           <p:nvPr/>
         </p:nvSpPr>
@@ -18564,7 +18564,7 @@
       </p:sp>
       <p:sp>
         <p:nvSpPr>
-          <p:cNvPr id="22" name="Text 18"/>
+          <p:cNvPr id="21" name="Text 18"/>
           <p:cNvSpPr/>
           <p:nvPr/>
         </p:nvSpPr>
@@ -18606,7 +18606,7 @@
       </p:sp>
       <p:sp>
         <p:nvSpPr>
-          <p:cNvPr id="23" name="Shape 19"/>
+          <p:cNvPr id="22" name="Shape 19"/>
           <p:cNvSpPr/>
           <p:nvPr/>
         </p:nvSpPr>
@@ -18633,7 +18633,7 @@
       </p:sp>
       <p:sp>
         <p:nvSpPr>
-          <p:cNvPr id="24" name="Text 20"/>
+          <p:cNvPr id="23" name="Text 20"/>
           <p:cNvSpPr/>
           <p:nvPr/>
         </p:nvSpPr>
@@ -18672,7 +18672,7 @@
       </p:sp>
       <p:sp>
         <p:nvSpPr>
-          <p:cNvPr id="25" name="Text 21"/>
+          <p:cNvPr id="24" name="Text 21"/>
           <p:cNvSpPr/>
           <p:nvPr/>
         </p:nvSpPr>
@@ -18714,7 +18714,7 @@
       </p:sp>
       <p:sp>
         <p:nvSpPr>
-          <p:cNvPr id="26" name="Shape 22"/>
+          <p:cNvPr id="25" name="Shape 22"/>
           <p:cNvSpPr/>
           <p:nvPr/>
         </p:nvSpPr>
@@ -18741,7 +18741,7 @@
       </p:sp>
       <p:sp>
         <p:nvSpPr>
-          <p:cNvPr id="27" name="Text 23"/>
+          <p:cNvPr id="26" name="Text 23"/>
           <p:cNvSpPr/>
           <p:nvPr/>
         </p:nvSpPr>
@@ -19026,7 +19026,7 @@
       </p:pic>
       <p:sp>
         <p:nvSpPr>
-          <p:cNvPr id="8" name="Shape 4"/>
+          <p:cNvPr id="7" name="Shape 4"/>
           <p:cNvSpPr/>
           <p:nvPr/>
         </p:nvSpPr>
@@ -19048,7 +19048,7 @@
       </p:sp>
       <p:sp>
         <p:nvSpPr>
-          <p:cNvPr id="9" name="Shape 5"/>
+          <p:cNvPr id="8" name="Shape 5"/>
           <p:cNvSpPr/>
           <p:nvPr/>
         </p:nvSpPr>
@@ -19068,7 +19068,7 @@
       </p:sp>
       <p:sp>
         <p:nvSpPr>
-          <p:cNvPr id="10" name="Text 6"/>
+          <p:cNvPr id="9" name="Text 6"/>
           <p:cNvSpPr/>
           <p:nvPr/>
         </p:nvSpPr>
@@ -19107,7 +19107,7 @@
       </p:sp>
       <p:sp>
         <p:nvSpPr>
-          <p:cNvPr id="11" name="Text 7"/>
+          <p:cNvPr id="10" name="Text 7"/>
           <p:cNvSpPr/>
           <p:nvPr/>
         </p:nvSpPr>
@@ -19146,7 +19146,7 @@
       </p:sp>
       <p:sp>
         <p:nvSpPr>
-          <p:cNvPr id="12" name="Text 8"/>
+          <p:cNvPr id="11" name="Text 8"/>
           <p:cNvSpPr/>
           <p:nvPr/>
         </p:nvSpPr>
@@ -19188,7 +19188,7 @@
       </p:sp>
       <p:sp>
         <p:nvSpPr>
-          <p:cNvPr id="13" name="Shape 9"/>
+          <p:cNvPr id="12" name="Shape 9"/>
           <p:cNvSpPr/>
           <p:nvPr/>
         </p:nvSpPr>
@@ -19210,7 +19210,7 @@
       </p:sp>
       <p:sp>
         <p:nvSpPr>
-          <p:cNvPr id="14" name="Shape 10"/>
+          <p:cNvPr id="13" name="Shape 10"/>
           <p:cNvSpPr/>
           <p:nvPr/>
         </p:nvSpPr>
@@ -19230,7 +19230,7 @@
       </p:sp>
       <p:sp>
         <p:nvSpPr>
-          <p:cNvPr id="15" name="Text 11"/>
+          <p:cNvPr id="14" name="Text 11"/>
           <p:cNvSpPr/>
           <p:nvPr/>
         </p:nvSpPr>
@@ -19269,7 +19269,7 @@
       </p:sp>
       <p:sp>
         <p:nvSpPr>
-          <p:cNvPr id="16" name="Text 12"/>
+          <p:cNvPr id="15" name="Text 12"/>
           <p:cNvSpPr/>
           <p:nvPr/>
         </p:nvSpPr>
@@ -19308,7 +19308,7 @@
       </p:sp>
       <p:sp>
         <p:nvSpPr>
-          <p:cNvPr id="17" name="Text 13"/>
+          <p:cNvPr id="16" name="Text 13"/>
           <p:cNvSpPr/>
           <p:nvPr/>
         </p:nvSpPr>
@@ -19350,7 +19350,7 @@
       </p:sp>
       <p:sp>
         <p:nvSpPr>
-          <p:cNvPr id="18" name="Shape 14"/>
+          <p:cNvPr id="17" name="Shape 14"/>
           <p:cNvSpPr/>
           <p:nvPr/>
         </p:nvSpPr>
@@ -19372,7 +19372,7 @@
       </p:sp>
       <p:sp>
         <p:nvSpPr>
-          <p:cNvPr id="19" name="Shape 15"/>
+          <p:cNvPr id="18" name="Shape 15"/>
           <p:cNvSpPr/>
           <p:nvPr/>
         </p:nvSpPr>
@@ -19392,7 +19392,7 @@
       </p:sp>
       <p:sp>
         <p:nvSpPr>
-          <p:cNvPr id="20" name="Text 16"/>
+          <p:cNvPr id="19" name="Text 16"/>
           <p:cNvSpPr/>
           <p:nvPr/>
         </p:nvSpPr>
@@ -19431,7 +19431,7 @@
       </p:sp>
       <p:sp>
         <p:nvSpPr>
-          <p:cNvPr id="21" name="Text 17"/>
+          <p:cNvPr id="20" name="Text 17"/>
           <p:cNvSpPr/>
           <p:nvPr/>
         </p:nvSpPr>
@@ -19470,7 +19470,7 @@
       </p:sp>
       <p:sp>
         <p:nvSpPr>
-          <p:cNvPr id="22" name="Text 18"/>
+          <p:cNvPr id="21" name="Text 18"/>
           <p:cNvSpPr/>
           <p:nvPr/>
         </p:nvSpPr>
@@ -19512,7 +19512,7 @@
       </p:sp>
       <p:sp>
         <p:nvSpPr>
-          <p:cNvPr id="23" name="Text 19"/>
+          <p:cNvPr id="22" name="Text 19"/>
           <p:cNvSpPr/>
           <p:nvPr/>
         </p:nvSpPr>
@@ -19551,7 +19551,7 @@
       </p:sp>
       <p:sp>
         <p:nvSpPr>
-          <p:cNvPr id="24" name="Shape 20"/>
+          <p:cNvPr id="23" name="Shape 20"/>
           <p:cNvSpPr/>
           <p:nvPr/>
         </p:nvSpPr>
@@ -19573,7 +19573,7 @@
       </p:sp>
       <p:sp>
         <p:nvSpPr>
-          <p:cNvPr id="25" name="Text 21"/>
+          <p:cNvPr id="24" name="Text 21"/>
           <p:cNvSpPr/>
           <p:nvPr/>
         </p:nvSpPr>
@@ -19612,7 +19612,7 @@
       </p:sp>
       <p:sp>
         <p:nvSpPr>
-          <p:cNvPr id="26" name="Text 22"/>
+          <p:cNvPr id="25" name="Text 22"/>
           <p:cNvSpPr/>
           <p:nvPr/>
         </p:nvSpPr>
@@ -19897,7 +19897,7 @@
       </p:pic>
       <p:sp>
         <p:nvSpPr>
-          <p:cNvPr id="8" name="Shape 4"/>
+          <p:cNvPr id="7" name="Shape 4"/>
           <p:cNvSpPr/>
           <p:nvPr/>
         </p:nvSpPr>
@@ -19919,7 +19919,7 @@
       </p:sp>
       <p:sp>
         <p:nvSpPr>
-          <p:cNvPr id="9" name="Text 5"/>
+          <p:cNvPr id="8" name="Text 5"/>
           <p:cNvSpPr/>
           <p:nvPr/>
         </p:nvSpPr>
@@ -19958,7 +19958,7 @@
       </p:sp>
       <p:sp>
         <p:nvSpPr>
-          <p:cNvPr id="10" name="Text 6"/>
+          <p:cNvPr id="9" name="Text 6"/>
           <p:cNvSpPr/>
           <p:nvPr/>
         </p:nvSpPr>
@@ -19997,7 +19997,7 @@
       </p:sp>
       <p:sp>
         <p:nvSpPr>
-          <p:cNvPr id="11" name="Shape 7"/>
+          <p:cNvPr id="10" name="Shape 7"/>
           <p:cNvSpPr/>
           <p:nvPr/>
         </p:nvSpPr>
@@ -20019,7 +20019,7 @@
       </p:sp>
       <p:sp>
         <p:nvSpPr>
-          <p:cNvPr id="12" name="Text 8"/>
+          <p:cNvPr id="11" name="Text 8"/>
           <p:cNvSpPr/>
           <p:nvPr/>
         </p:nvSpPr>
@@ -20058,7 +20058,7 @@
       </p:sp>
       <p:sp>
         <p:nvSpPr>
-          <p:cNvPr id="13" name="Text 9"/>
+          <p:cNvPr id="12" name="Text 9"/>
           <p:cNvSpPr/>
           <p:nvPr/>
         </p:nvSpPr>
@@ -20097,7 +20097,7 @@
       </p:sp>
       <p:sp>
         <p:nvSpPr>
-          <p:cNvPr id="14" name="Shape 10"/>
+          <p:cNvPr id="13" name="Shape 10"/>
           <p:cNvSpPr/>
           <p:nvPr/>
         </p:nvSpPr>
@@ -20119,7 +20119,7 @@
       </p:sp>
       <p:sp>
         <p:nvSpPr>
-          <p:cNvPr id="15" name="Text 11"/>
+          <p:cNvPr id="14" name="Text 11"/>
           <p:cNvSpPr/>
           <p:nvPr/>
         </p:nvSpPr>
@@ -20158,7 +20158,7 @@
       </p:sp>
       <p:sp>
         <p:nvSpPr>
-          <p:cNvPr id="16" name="Text 12"/>
+          <p:cNvPr id="15" name="Text 12"/>
           <p:cNvSpPr/>
           <p:nvPr/>
         </p:nvSpPr>
@@ -20197,7 +20197,7 @@
       </p:sp>
       <p:sp>
         <p:nvSpPr>
-          <p:cNvPr id="17" name="Shape 13"/>
+          <p:cNvPr id="16" name="Shape 13"/>
           <p:cNvSpPr/>
           <p:nvPr/>
         </p:nvSpPr>
@@ -20219,7 +20219,7 @@
       </p:sp>
       <p:sp>
         <p:nvSpPr>
-          <p:cNvPr id="18" name="Text 14"/>
+          <p:cNvPr id="17" name="Text 14"/>
           <p:cNvSpPr/>
           <p:nvPr/>
         </p:nvSpPr>
@@ -20258,7 +20258,7 @@
       </p:sp>
       <p:sp>
         <p:nvSpPr>
-          <p:cNvPr id="19" name="Text 15"/>
+          <p:cNvPr id="18" name="Text 15"/>
           <p:cNvSpPr/>
           <p:nvPr/>
         </p:nvSpPr>
@@ -20300,7 +20300,7 @@
       </p:sp>
       <p:sp>
         <p:nvSpPr>
-          <p:cNvPr id="20" name="Shape 16"/>
+          <p:cNvPr id="19" name="Shape 16"/>
           <p:cNvSpPr/>
           <p:nvPr/>
         </p:nvSpPr>
@@ -20327,7 +20327,7 @@
       </p:sp>
       <p:sp>
         <p:nvSpPr>
-          <p:cNvPr id="21" name="Text 17"/>
+          <p:cNvPr id="20" name="Text 17"/>
           <p:cNvSpPr/>
           <p:nvPr/>
         </p:nvSpPr>
@@ -20612,7 +20612,7 @@
       </p:pic>
       <p:sp>
         <p:nvSpPr>
-          <p:cNvPr id="8" name="Shape 4"/>
+          <p:cNvPr id="7" name="Shape 4"/>
           <p:cNvSpPr/>
           <p:nvPr/>
         </p:nvSpPr>
@@ -20634,7 +20634,7 @@
       </p:sp>
       <p:sp>
         <p:nvSpPr>
-          <p:cNvPr id="9" name="Text 5"/>
+          <p:cNvPr id="8" name="Text 5"/>
           <p:cNvSpPr/>
           <p:nvPr/>
         </p:nvSpPr>
@@ -20673,7 +20673,7 @@
       </p:sp>
       <p:sp>
         <p:nvSpPr>
-          <p:cNvPr id="10" name="Text 6"/>
+          <p:cNvPr id="9" name="Text 6"/>
           <p:cNvSpPr/>
           <p:nvPr/>
         </p:nvSpPr>
@@ -20715,7 +20715,7 @@
       </p:sp>
       <p:sp>
         <p:nvSpPr>
-          <p:cNvPr id="11" name="Shape 7"/>
+          <p:cNvPr id="10" name="Shape 7"/>
           <p:cNvSpPr/>
           <p:nvPr/>
         </p:nvSpPr>
@@ -20737,7 +20737,7 @@
       </p:sp>
       <p:sp>
         <p:nvSpPr>
-          <p:cNvPr id="12" name="Text 8"/>
+          <p:cNvPr id="11" name="Text 8"/>
           <p:cNvSpPr/>
           <p:nvPr/>
         </p:nvSpPr>
@@ -20776,7 +20776,7 @@
       </p:sp>
       <p:sp>
         <p:nvSpPr>
-          <p:cNvPr id="13" name="Text 9"/>
+          <p:cNvPr id="12" name="Text 9"/>
           <p:cNvSpPr/>
           <p:nvPr/>
         </p:nvSpPr>
@@ -20818,7 +20818,7 @@
       </p:sp>
       <p:sp>
         <p:nvSpPr>
-          <p:cNvPr id="14" name="Text 10"/>
+          <p:cNvPr id="13" name="Text 10"/>
           <p:cNvSpPr/>
           <p:nvPr/>
         </p:nvSpPr>
@@ -20857,7 +20857,7 @@
       </p:sp>
       <p:sp>
         <p:nvSpPr>
-          <p:cNvPr id="15" name="Shape 11"/>
+          <p:cNvPr id="14" name="Shape 11"/>
           <p:cNvSpPr/>
           <p:nvPr/>
         </p:nvSpPr>
@@ -20879,7 +20879,7 @@
       </p:sp>
       <p:sp>
         <p:nvSpPr>
-          <p:cNvPr id="16" name="Text 12"/>
+          <p:cNvPr id="15" name="Text 12"/>
           <p:cNvSpPr/>
           <p:nvPr/>
         </p:nvSpPr>
@@ -20918,7 +20918,7 @@
       </p:sp>
       <p:sp>
         <p:nvSpPr>
-          <p:cNvPr id="17" name="Text 13"/>
+          <p:cNvPr id="16" name="Text 13"/>
           <p:cNvSpPr/>
           <p:nvPr/>
         </p:nvSpPr>
@@ -21203,7 +21203,7 @@
       </p:pic>
       <p:sp>
         <p:nvSpPr>
-          <p:cNvPr id="8" name="Shape 4"/>
+          <p:cNvPr id="7" name="Shape 4"/>
           <p:cNvSpPr/>
           <p:nvPr/>
         </p:nvSpPr>
@@ -21230,7 +21230,7 @@
       </p:sp>
       <p:sp>
         <p:nvSpPr>
-          <p:cNvPr id="9" name="Text 5"/>
+          <p:cNvPr id="8" name="Text 5"/>
           <p:cNvSpPr/>
           <p:nvPr/>
         </p:nvSpPr>
@@ -21372,7 +21372,7 @@
       </p:sp>
       <p:sp>
         <p:nvSpPr>
-          <p:cNvPr id="10" name="Text 6"/>
+          <p:cNvPr id="9" name="Text 6"/>
           <p:cNvSpPr/>
           <p:nvPr/>
         </p:nvSpPr>
@@ -21411,7 +21411,7 @@
       </p:sp>
       <p:sp>
         <p:nvSpPr>
-          <p:cNvPr id="11" name="Text 7"/>
+          <p:cNvPr id="10" name="Text 7"/>
           <p:cNvSpPr/>
           <p:nvPr/>
         </p:nvSpPr>
@@ -21450,7 +21450,7 @@
       </p:sp>
       <p:sp>
         <p:nvSpPr>
-          <p:cNvPr id="12" name="Shape 8"/>
+          <p:cNvPr id="11" name="Shape 8"/>
           <p:cNvSpPr/>
           <p:nvPr/>
         </p:nvSpPr>
@@ -21472,7 +21472,7 @@
       </p:sp>
       <p:sp>
         <p:nvSpPr>
-          <p:cNvPr id="13" name="Text 9"/>
+          <p:cNvPr id="12" name="Text 9"/>
           <p:cNvSpPr/>
           <p:nvPr/>
         </p:nvSpPr>
@@ -21511,7 +21511,7 @@
       </p:sp>
       <p:sp>
         <p:nvSpPr>
-          <p:cNvPr id="14" name="Text 10"/>
+          <p:cNvPr id="13" name="Text 10"/>
           <p:cNvSpPr/>
           <p:nvPr/>
         </p:nvSpPr>
@@ -21550,7 +21550,7 @@
       </p:sp>
       <p:sp>
         <p:nvSpPr>
-          <p:cNvPr id="15" name="Text 11"/>
+          <p:cNvPr id="14" name="Text 11"/>
           <p:cNvSpPr/>
           <p:nvPr/>
         </p:nvSpPr>
@@ -21589,7 +21589,7 @@
       </p:sp>
       <p:sp>
         <p:nvSpPr>
-          <p:cNvPr id="16" name="Shape 12"/>
+          <p:cNvPr id="15" name="Shape 12"/>
           <p:cNvSpPr/>
           <p:nvPr/>
         </p:nvSpPr>
@@ -21611,7 +21611,7 @@
       </p:sp>
       <p:sp>
         <p:nvSpPr>
-          <p:cNvPr id="17" name="Text 13"/>
+          <p:cNvPr id="16" name="Text 13"/>
           <p:cNvSpPr/>
           <p:nvPr/>
         </p:nvSpPr>
@@ -21650,7 +21650,7 @@
       </p:sp>
       <p:sp>
         <p:nvSpPr>
-          <p:cNvPr id="18" name="Text 14"/>
+          <p:cNvPr id="17" name="Text 14"/>
           <p:cNvSpPr/>
           <p:nvPr/>
         </p:nvSpPr>
@@ -21689,7 +21689,7 @@
       </p:sp>
       <p:sp>
         <p:nvSpPr>
-          <p:cNvPr id="19" name="Text 15"/>
+          <p:cNvPr id="18" name="Text 15"/>
           <p:cNvSpPr/>
           <p:nvPr/>
         </p:nvSpPr>
@@ -21728,7 +21728,7 @@
       </p:sp>
       <p:sp>
         <p:nvSpPr>
-          <p:cNvPr id="20" name="Shape 16"/>
+          <p:cNvPr id="19" name="Shape 16"/>
           <p:cNvSpPr/>
           <p:nvPr/>
         </p:nvSpPr>
@@ -21750,7 +21750,7 @@
       </p:sp>
       <p:sp>
         <p:nvSpPr>
-          <p:cNvPr id="21" name="Text 17"/>
+          <p:cNvPr id="20" name="Text 17"/>
           <p:cNvSpPr/>
           <p:nvPr/>
         </p:nvSpPr>
@@ -21789,7 +21789,7 @@
       </p:sp>
       <p:sp>
         <p:nvSpPr>
-          <p:cNvPr id="22" name="Text 18"/>
+          <p:cNvPr id="21" name="Text 18"/>
           <p:cNvSpPr/>
           <p:nvPr/>
         </p:nvSpPr>
@@ -21828,7 +21828,7 @@
       </p:sp>
       <p:sp>
         <p:nvSpPr>
-          <p:cNvPr id="23" name="Text 19"/>
+          <p:cNvPr id="22" name="Text 19"/>
           <p:cNvSpPr/>
           <p:nvPr/>
         </p:nvSpPr>
@@ -21867,7 +21867,7 @@
       </p:sp>
       <p:sp>
         <p:nvSpPr>
-          <p:cNvPr id="24" name="Shape 20"/>
+          <p:cNvPr id="23" name="Shape 20"/>
           <p:cNvSpPr/>
           <p:nvPr/>
         </p:nvSpPr>
@@ -21889,7 +21889,7 @@
       </p:sp>
       <p:sp>
         <p:nvSpPr>
-          <p:cNvPr id="25" name="Text 21"/>
+          <p:cNvPr id="24" name="Text 21"/>
           <p:cNvSpPr/>
           <p:nvPr/>
         </p:nvSpPr>
@@ -22171,7 +22171,7 @@
       </p:pic>
       <p:sp>
         <p:nvSpPr>
-          <p:cNvPr id="8" name="Shape 4"/>
+          <p:cNvPr id="7" name="Shape 4"/>
           <p:cNvSpPr/>
           <p:nvPr/>
         </p:nvSpPr>
@@ -22193,7 +22193,7 @@
       </p:sp>
       <p:sp>
         <p:nvSpPr>
-          <p:cNvPr id="9" name="Text 5"/>
+          <p:cNvPr id="8" name="Text 5"/>
           <p:cNvSpPr/>
           <p:nvPr/>
         </p:nvSpPr>
@@ -22232,7 +22232,7 @@
       </p:sp>
       <p:sp>
         <p:nvSpPr>
-          <p:cNvPr id="10" name="Text 6"/>
+          <p:cNvPr id="9" name="Text 6"/>
           <p:cNvSpPr/>
           <p:nvPr/>
         </p:nvSpPr>
@@ -22274,7 +22274,7 @@
       </p:sp>
       <p:sp>
         <p:nvSpPr>
-          <p:cNvPr id="11" name="Shape 7"/>
+          <p:cNvPr id="10" name="Shape 7"/>
           <p:cNvSpPr/>
           <p:nvPr/>
         </p:nvSpPr>
@@ -22296,7 +22296,7 @@
       </p:sp>
       <p:sp>
         <p:nvSpPr>
-          <p:cNvPr id="12" name="Text 8"/>
+          <p:cNvPr id="11" name="Text 8"/>
           <p:cNvSpPr/>
           <p:nvPr/>
         </p:nvSpPr>
@@ -22335,7 +22335,7 @@
       </p:sp>
       <p:sp>
         <p:nvSpPr>
-          <p:cNvPr id="13" name="Text 9"/>
+          <p:cNvPr id="12" name="Text 9"/>
           <p:cNvSpPr/>
           <p:nvPr/>
         </p:nvSpPr>
@@ -22374,7 +22374,7 @@
       </p:sp>
       <p:sp>
         <p:nvSpPr>
-          <p:cNvPr id="14" name="Shape 10"/>
+          <p:cNvPr id="13" name="Shape 10"/>
           <p:cNvSpPr/>
           <p:nvPr/>
         </p:nvSpPr>
@@ -22396,7 +22396,7 @@
       </p:sp>
       <p:sp>
         <p:nvSpPr>
-          <p:cNvPr id="15" name="Text 11"/>
+          <p:cNvPr id="14" name="Text 11"/>
           <p:cNvSpPr/>
           <p:nvPr/>
         </p:nvSpPr>
@@ -22435,7 +22435,7 @@
       </p:sp>
       <p:sp>
         <p:nvSpPr>
-          <p:cNvPr id="16" name="Text 12"/>
+          <p:cNvPr id="15" name="Text 12"/>
           <p:cNvSpPr/>
           <p:nvPr/>
         </p:nvSpPr>
@@ -22474,7 +22474,7 @@
       </p:sp>
       <p:sp>
         <p:nvSpPr>
-          <p:cNvPr id="17" name="Shape 13"/>
+          <p:cNvPr id="16" name="Shape 13"/>
           <p:cNvSpPr/>
           <p:nvPr/>
         </p:nvSpPr>
@@ -22496,7 +22496,7 @@
       </p:sp>
       <p:sp>
         <p:nvSpPr>
-          <p:cNvPr id="18" name="Text 14"/>
+          <p:cNvPr id="17" name="Text 14"/>
           <p:cNvSpPr/>
           <p:nvPr/>
         </p:nvSpPr>
@@ -22535,7 +22535,7 @@
       </p:sp>
       <p:sp>
         <p:nvSpPr>
-          <p:cNvPr id="19" name="Text 15"/>
+          <p:cNvPr id="18" name="Text 15"/>
           <p:cNvSpPr/>
           <p:nvPr/>
         </p:nvSpPr>
@@ -22577,7 +22577,7 @@
       </p:sp>
       <p:sp>
         <p:nvSpPr>
-          <p:cNvPr id="20" name="Shape 16"/>
+          <p:cNvPr id="19" name="Shape 16"/>
           <p:cNvSpPr/>
           <p:nvPr/>
         </p:nvSpPr>
@@ -22599,7 +22599,7 @@
       </p:sp>
       <p:sp>
         <p:nvSpPr>
-          <p:cNvPr id="21" name="Text 17"/>
+          <p:cNvPr id="20" name="Text 17"/>
           <p:cNvSpPr/>
           <p:nvPr/>
         </p:nvSpPr>
@@ -22638,7 +22638,7 @@
       </p:sp>
       <p:sp>
         <p:nvSpPr>
-          <p:cNvPr id="22" name="Text 18"/>
+          <p:cNvPr id="21" name="Text 18"/>
           <p:cNvSpPr/>
           <p:nvPr/>
         </p:nvSpPr>

--- a/docs/decks/L10.pptx
+++ b/docs/decks/L10.pptx
@@ -6972,11 +6972,11 @@
         <p:spPr>
           <a:xfrm>
             <a:off x="566928" y="1783080"/>
-            <a:ext cx="3566160" cy="1463040"/>
+            <a:ext cx="3566160" cy="1280160"/>
           </a:xfrm>
           <a:prstGeom prst="roundRect">
             <a:avLst>
-              <a:gd name="adj" fmla="val 7500"/>
+              <a:gd name="adj" fmla="val 8571"/>
             </a:avLst>
           </a:prstGeom>
           <a:solidFill>
@@ -6994,7 +6994,7 @@
         <p:spPr>
           <a:xfrm>
             <a:off x="713232" y="1892808"/>
-            <a:ext cx="3273552" cy="760781"/>
+            <a:ext cx="3273552" cy="665683"/>
           </a:xfrm>
           <a:prstGeom prst="rect">
             <a:avLst/>
@@ -7032,8 +7032,8 @@
         </p:nvSpPr>
         <p:spPr>
           <a:xfrm>
-            <a:off x="713232" y="2631643"/>
-            <a:ext cx="3273552" cy="526694"/>
+            <a:off x="713232" y="2525573"/>
+            <a:ext cx="3273552" cy="460858"/>
           </a:xfrm>
           <a:prstGeom prst="rect">
             <a:avLst/>
@@ -7072,11 +7072,11 @@
         <p:spPr>
           <a:xfrm>
             <a:off x="4315968" y="1783080"/>
-            <a:ext cx="7315200" cy="1463040"/>
+            <a:ext cx="7315200" cy="1280160"/>
           </a:xfrm>
           <a:prstGeom prst="roundRect">
             <a:avLst>
-              <a:gd name="adj" fmla="val 7500"/>
+              <a:gd name="adj" fmla="val 8571"/>
             </a:avLst>
           </a:prstGeom>
           <a:solidFill>
@@ -7138,7 +7138,7 @@
         <p:spPr>
           <a:xfrm>
             <a:off x="4517136" y="2468880"/>
-            <a:ext cx="6912864" cy="621792"/>
+            <a:ext cx="6912864" cy="438912"/>
           </a:xfrm>
           <a:prstGeom prst="rect">
             <a:avLst/>
@@ -7179,30 +7179,380 @@
         </p:nvSpPr>
         <p:spPr>
           <a:xfrm>
-            <a:off x="566928" y="3429000"/>
-            <a:ext cx="11064240" cy="658368"/>
+            <a:off x="566928" y="3273552"/>
+            <a:ext cx="420624" cy="420624"/>
           </a:xfrm>
           <a:prstGeom prst="roundRect">
             <a:avLst>
-              <a:gd name="adj" fmla="val 13889"/>
+              <a:gd name="adj" fmla="val 17391"/>
             </a:avLst>
           </a:prstGeom>
           <a:solidFill>
-            <a:srgbClr val="F8F0E2"/>
-          </a:solidFill>
-          <a:ln/>
-        </p:spPr>
-      </p:sp>
-      <p:sp>
-        <p:nvSpPr>
-          <p:cNvPr id="14" name="Text 11"/>
-          <p:cNvSpPr/>
-          <p:nvPr/>
-        </p:nvSpPr>
-        <p:spPr>
-          <a:xfrm>
-            <a:off x="786384" y="3429000"/>
-            <a:ext cx="3761842" cy="658368"/>
+            <a:srgbClr val="E9F4EF"/>
+          </a:solidFill>
+          <a:ln/>
+        </p:spPr>
+      </p:sp>
+      <p:sp>
+        <p:nvSpPr>
+          <p:cNvPr id="14" name="Shape 11"/>
+          <p:cNvSpPr/>
+          <p:nvPr/>
+        </p:nvSpPr>
+        <p:spPr>
+          <a:xfrm rot="2700000">
+            <a:off x="712043" y="3495294"/>
+            <a:ext cx="58156" cy="27432"/>
+          </a:xfrm>
+          <a:prstGeom prst="rect">
+            <a:avLst/>
+          </a:prstGeom>
+          <a:solidFill>
+            <a:srgbClr val="1B8A5A"/>
+          </a:solidFill>
+          <a:ln/>
+        </p:spPr>
+      </p:sp>
+      <p:sp>
+        <p:nvSpPr>
+          <p:cNvPr id="15" name="Shape 12"/>
+          <p:cNvSpPr/>
+          <p:nvPr/>
+        </p:nvSpPr>
+        <p:spPr>
+          <a:xfrm rot="-3000000">
+            <a:off x="739841" y="3469234"/>
+            <a:ext cx="121432" cy="27432"/>
+          </a:xfrm>
+          <a:prstGeom prst="rect">
+            <a:avLst/>
+          </a:prstGeom>
+          <a:solidFill>
+            <a:srgbClr val="1B8A5A"/>
+          </a:solidFill>
+          <a:ln/>
+        </p:spPr>
+      </p:sp>
+      <p:sp>
+        <p:nvSpPr>
+          <p:cNvPr id="16" name="Shape 13"/>
+          <p:cNvSpPr/>
+          <p:nvPr/>
+        </p:nvSpPr>
+        <p:spPr>
+          <a:xfrm>
+            <a:off x="1097280" y="3273552"/>
+            <a:ext cx="420624" cy="420624"/>
+          </a:xfrm>
+          <a:prstGeom prst="roundRect">
+            <a:avLst>
+              <a:gd name="adj" fmla="val 17391"/>
+            </a:avLst>
+          </a:prstGeom>
+          <a:solidFill>
+            <a:srgbClr val="E9F4EF"/>
+          </a:solidFill>
+          <a:ln/>
+        </p:spPr>
+      </p:sp>
+      <p:sp>
+        <p:nvSpPr>
+          <p:cNvPr id="17" name="Shape 14"/>
+          <p:cNvSpPr/>
+          <p:nvPr/>
+        </p:nvSpPr>
+        <p:spPr>
+          <a:xfrm rot="2700000">
+            <a:off x="1242395" y="3495294"/>
+            <a:ext cx="58156" cy="27432"/>
+          </a:xfrm>
+          <a:prstGeom prst="rect">
+            <a:avLst/>
+          </a:prstGeom>
+          <a:solidFill>
+            <a:srgbClr val="1B8A5A"/>
+          </a:solidFill>
+          <a:ln/>
+        </p:spPr>
+      </p:sp>
+      <p:sp>
+        <p:nvSpPr>
+          <p:cNvPr id="18" name="Shape 15"/>
+          <p:cNvSpPr/>
+          <p:nvPr/>
+        </p:nvSpPr>
+        <p:spPr>
+          <a:xfrm rot="-3000000">
+            <a:off x="1270193" y="3469234"/>
+            <a:ext cx="121432" cy="27432"/>
+          </a:xfrm>
+          <a:prstGeom prst="rect">
+            <a:avLst/>
+          </a:prstGeom>
+          <a:solidFill>
+            <a:srgbClr val="1B8A5A"/>
+          </a:solidFill>
+          <a:ln/>
+        </p:spPr>
+      </p:sp>
+      <p:sp>
+        <p:nvSpPr>
+          <p:cNvPr id="19" name="Shape 16"/>
+          <p:cNvSpPr/>
+          <p:nvPr/>
+        </p:nvSpPr>
+        <p:spPr>
+          <a:xfrm>
+            <a:off x="1627632" y="3273552"/>
+            <a:ext cx="420624" cy="420624"/>
+          </a:xfrm>
+          <a:prstGeom prst="roundRect">
+            <a:avLst>
+              <a:gd name="adj" fmla="val 17391"/>
+            </a:avLst>
+          </a:prstGeom>
+          <a:solidFill>
+            <a:srgbClr val="E9F4EF"/>
+          </a:solidFill>
+          <a:ln/>
+        </p:spPr>
+      </p:sp>
+      <p:sp>
+        <p:nvSpPr>
+          <p:cNvPr id="20" name="Shape 17"/>
+          <p:cNvSpPr/>
+          <p:nvPr/>
+        </p:nvSpPr>
+        <p:spPr>
+          <a:xfrm rot="2700000">
+            <a:off x="1772747" y="3495294"/>
+            <a:ext cx="58156" cy="27432"/>
+          </a:xfrm>
+          <a:prstGeom prst="rect">
+            <a:avLst/>
+          </a:prstGeom>
+          <a:solidFill>
+            <a:srgbClr val="1B8A5A"/>
+          </a:solidFill>
+          <a:ln/>
+        </p:spPr>
+      </p:sp>
+      <p:sp>
+        <p:nvSpPr>
+          <p:cNvPr id="21" name="Shape 18"/>
+          <p:cNvSpPr/>
+          <p:nvPr/>
+        </p:nvSpPr>
+        <p:spPr>
+          <a:xfrm rot="-3000000">
+            <a:off x="1800545" y="3469234"/>
+            <a:ext cx="121432" cy="27432"/>
+          </a:xfrm>
+          <a:prstGeom prst="rect">
+            <a:avLst/>
+          </a:prstGeom>
+          <a:solidFill>
+            <a:srgbClr val="1B8A5A"/>
+          </a:solidFill>
+          <a:ln/>
+        </p:spPr>
+      </p:sp>
+      <p:sp>
+        <p:nvSpPr>
+          <p:cNvPr id="22" name="Shape 19"/>
+          <p:cNvSpPr/>
+          <p:nvPr/>
+        </p:nvSpPr>
+        <p:spPr>
+          <a:xfrm>
+            <a:off x="2157984" y="3273552"/>
+            <a:ext cx="420624" cy="420624"/>
+          </a:xfrm>
+          <a:prstGeom prst="roundRect">
+            <a:avLst>
+              <a:gd name="adj" fmla="val 17391"/>
+            </a:avLst>
+          </a:prstGeom>
+          <a:solidFill>
+            <a:srgbClr val="E9F4EF"/>
+          </a:solidFill>
+          <a:ln/>
+        </p:spPr>
+      </p:sp>
+      <p:sp>
+        <p:nvSpPr>
+          <p:cNvPr id="23" name="Shape 20"/>
+          <p:cNvSpPr/>
+          <p:nvPr/>
+        </p:nvSpPr>
+        <p:spPr>
+          <a:xfrm rot="2700000">
+            <a:off x="2303099" y="3495294"/>
+            <a:ext cx="58156" cy="27432"/>
+          </a:xfrm>
+          <a:prstGeom prst="rect">
+            <a:avLst/>
+          </a:prstGeom>
+          <a:solidFill>
+            <a:srgbClr val="1B8A5A"/>
+          </a:solidFill>
+          <a:ln/>
+        </p:spPr>
+      </p:sp>
+      <p:sp>
+        <p:nvSpPr>
+          <p:cNvPr id="24" name="Shape 21"/>
+          <p:cNvSpPr/>
+          <p:nvPr/>
+        </p:nvSpPr>
+        <p:spPr>
+          <a:xfrm rot="-3000000">
+            <a:off x="2330897" y="3469234"/>
+            <a:ext cx="121432" cy="27432"/>
+          </a:xfrm>
+          <a:prstGeom prst="rect">
+            <a:avLst/>
+          </a:prstGeom>
+          <a:solidFill>
+            <a:srgbClr val="1B8A5A"/>
+          </a:solidFill>
+          <a:ln/>
+        </p:spPr>
+      </p:sp>
+      <p:sp>
+        <p:nvSpPr>
+          <p:cNvPr id="25" name="Shape 22"/>
+          <p:cNvSpPr/>
+          <p:nvPr/>
+        </p:nvSpPr>
+        <p:spPr>
+          <a:xfrm>
+            <a:off x="2688336" y="3273552"/>
+            <a:ext cx="420624" cy="420624"/>
+          </a:xfrm>
+          <a:prstGeom prst="roundRect">
+            <a:avLst>
+              <a:gd name="adj" fmla="val 17391"/>
+            </a:avLst>
+          </a:prstGeom>
+          <a:solidFill>
+            <a:srgbClr val="E9F4EF"/>
+          </a:solidFill>
+          <a:ln/>
+        </p:spPr>
+      </p:sp>
+      <p:sp>
+        <p:nvSpPr>
+          <p:cNvPr id="26" name="Shape 23"/>
+          <p:cNvSpPr/>
+          <p:nvPr/>
+        </p:nvSpPr>
+        <p:spPr>
+          <a:xfrm rot="2700000">
+            <a:off x="2833451" y="3495294"/>
+            <a:ext cx="58156" cy="27432"/>
+          </a:xfrm>
+          <a:prstGeom prst="rect">
+            <a:avLst/>
+          </a:prstGeom>
+          <a:solidFill>
+            <a:srgbClr val="1B8A5A"/>
+          </a:solidFill>
+          <a:ln/>
+        </p:spPr>
+      </p:sp>
+      <p:sp>
+        <p:nvSpPr>
+          <p:cNvPr id="27" name="Shape 24"/>
+          <p:cNvSpPr/>
+          <p:nvPr/>
+        </p:nvSpPr>
+        <p:spPr>
+          <a:xfrm rot="-3000000">
+            <a:off x="2861249" y="3469234"/>
+            <a:ext cx="121432" cy="27432"/>
+          </a:xfrm>
+          <a:prstGeom prst="rect">
+            <a:avLst/>
+          </a:prstGeom>
+          <a:solidFill>
+            <a:srgbClr val="1B8A5A"/>
+          </a:solidFill>
+          <a:ln/>
+        </p:spPr>
+      </p:sp>
+      <p:sp>
+        <p:nvSpPr>
+          <p:cNvPr id="28" name="Shape 25"/>
+          <p:cNvSpPr/>
+          <p:nvPr/>
+        </p:nvSpPr>
+        <p:spPr>
+          <a:xfrm>
+            <a:off x="3218688" y="3273552"/>
+            <a:ext cx="420624" cy="420624"/>
+          </a:xfrm>
+          <a:prstGeom prst="roundRect">
+            <a:avLst>
+              <a:gd name="adj" fmla="val 17391"/>
+            </a:avLst>
+          </a:prstGeom>
+          <a:solidFill>
+            <a:srgbClr val="FBE9E9"/>
+          </a:solidFill>
+          <a:ln/>
+        </p:spPr>
+      </p:sp>
+      <p:sp>
+        <p:nvSpPr>
+          <p:cNvPr id="29" name="Shape 26"/>
+          <p:cNvSpPr/>
+          <p:nvPr/>
+        </p:nvSpPr>
+        <p:spPr>
+          <a:xfrm rot="2700000">
+            <a:off x="3361700" y="3471867"/>
+            <a:ext cx="134600" cy="23994"/>
+          </a:xfrm>
+          <a:prstGeom prst="rect">
+            <a:avLst/>
+          </a:prstGeom>
+          <a:solidFill>
+            <a:srgbClr val="C62A2A"/>
+          </a:solidFill>
+          <a:ln/>
+        </p:spPr>
+      </p:sp>
+      <p:sp>
+        <p:nvSpPr>
+          <p:cNvPr id="30" name="Shape 27"/>
+          <p:cNvSpPr/>
+          <p:nvPr/>
+        </p:nvSpPr>
+        <p:spPr>
+          <a:xfrm rot="-2700000">
+            <a:off x="3361700" y="3471867"/>
+            <a:ext cx="134600" cy="23994"/>
+          </a:xfrm>
+          <a:prstGeom prst="rect">
+            <a:avLst/>
+          </a:prstGeom>
+          <a:solidFill>
+            <a:srgbClr val="C62A2A"/>
+          </a:solidFill>
+          <a:ln/>
+        </p:spPr>
+      </p:sp>
+      <p:sp>
+        <p:nvSpPr>
+          <p:cNvPr id="31" name="Text 28"/>
+          <p:cNvSpPr/>
+          <p:nvPr/>
+        </p:nvSpPr>
+        <p:spPr>
+          <a:xfrm>
+            <a:off x="4069080" y="3273552"/>
+            <a:ext cx="7562088" cy="420624"/>
           </a:xfrm>
           <a:prstGeom prst="rect">
             <a:avLst/>
@@ -7218,91 +7568,66 @@
               <a:buNone/>
             </a:pPr>
             <a:r>
-              <a:rPr lang="en-US" sz="1350" b="1" dirty="0">
-                <a:solidFill>
-                  <a:srgbClr val="9A5B12"/>
+              <a:rPr lang="en-US" sz="1250" b="1" dirty="0">
+                <a:solidFill>
+                  <a:srgbClr val="1B8A5A"/>
                 </a:solidFill>
                 <a:latin typeface="Montserrat" pitchFamily="34" charset="0"/>
                 <a:ea typeface="Montserrat" pitchFamily="34" charset="-122"/>
                 <a:cs typeface="Montserrat" pitchFamily="34" charset="-120"/>
               </a:rPr>
-              <a:t>Поріг у двох місцях</a:t>
-            </a:r>
-            <a:endParaRPr lang="en-US" sz="1350" dirty="0"/>
-          </a:p>
-        </p:txBody>
-      </p:sp>
-      <p:sp>
-        <p:nvSpPr>
-          <p:cNvPr id="15" name="Text 12"/>
-          <p:cNvSpPr/>
-          <p:nvPr/>
-        </p:nvSpPr>
-        <p:spPr>
-          <a:xfrm>
-            <a:off x="4548226" y="3429000"/>
-            <a:ext cx="6640373" cy="658368"/>
-          </a:xfrm>
-          <a:prstGeom prst="rect">
-            <a:avLst/>
-          </a:prstGeom>
-          <a:noFill/>
-          <a:ln/>
-        </p:spPr>
-        <p:txBody>
-          <a:bodyPr wrap="square" lIns="0" tIns="0" rIns="0" bIns="0" rtlCol="0" anchor="ctr"/>
-          <a:lstStyle/>
-          <a:p>
+              <a:t>прогін зелений  </a:t>
+            </a:r>
             <a:pPr indent="0" marL="0">
               <a:buNone/>
             </a:pPr>
             <a:r>
-              <a:rPr lang="en-US" sz="1150" dirty="0">
-                <a:solidFill>
-                  <a:srgbClr val="111318"/>
+              <a:rPr lang="en-US" sz="1250" dirty="0">
+                <a:solidFill>
+                  <a:srgbClr val="555B66"/>
                 </a:solidFill>
                 <a:latin typeface="Montserrat" pitchFamily="34" charset="0"/>
                 <a:ea typeface="Montserrat" pitchFamily="34" charset="-122"/>
                 <a:cs typeface="Montserrat" pitchFamily="34" charset="-120"/>
               </a:rPr>
-              <a:t>у команді прогону і в CI — вони мусять збігатися</a:t>
-            </a:r>
-            <a:endParaRPr lang="en-US" sz="1150" dirty="0"/>
-          </a:p>
-        </p:txBody>
-      </p:sp>
-      <p:sp>
-        <p:nvSpPr>
-          <p:cNvPr id="16" name="Shape 13"/>
-          <p:cNvSpPr/>
-          <p:nvPr/>
-        </p:nvSpPr>
-        <p:spPr>
-          <a:xfrm>
-            <a:off x="566928" y="4197096"/>
-            <a:ext cx="11064240" cy="658368"/>
+              <a:t>— один кейс має право впасти, і поріг це визнає заздалегідь</a:t>
+            </a:r>
+            <a:endParaRPr lang="en-US" sz="1250" dirty="0"/>
+          </a:p>
+        </p:txBody>
+      </p:sp>
+      <p:sp>
+        <p:nvSpPr>
+          <p:cNvPr id="32" name="Shape 29"/>
+          <p:cNvSpPr/>
+          <p:nvPr/>
+        </p:nvSpPr>
+        <p:spPr>
+          <a:xfrm>
+            <a:off x="566928" y="4005072"/>
+            <a:ext cx="11064240" cy="603504"/>
           </a:xfrm>
           <a:prstGeom prst="roundRect">
             <a:avLst>
-              <a:gd name="adj" fmla="val 13889"/>
+              <a:gd name="adj" fmla="val 15152"/>
             </a:avLst>
           </a:prstGeom>
           <a:solidFill>
-            <a:srgbClr val="FBE9E9"/>
-          </a:solidFill>
-          <a:ln/>
-        </p:spPr>
-      </p:sp>
-      <p:sp>
-        <p:nvSpPr>
-          <p:cNvPr id="17" name="Text 14"/>
-          <p:cNvSpPr/>
-          <p:nvPr/>
-        </p:nvSpPr>
-        <p:spPr>
-          <a:xfrm>
-            <a:off x="786384" y="4197096"/>
-            <a:ext cx="3761842" cy="658368"/>
+            <a:srgbClr val="F8F0E2"/>
+          </a:solidFill>
+          <a:ln/>
+        </p:spPr>
+      </p:sp>
+      <p:sp>
+        <p:nvSpPr>
+          <p:cNvPr id="33" name="Text 30"/>
+          <p:cNvSpPr/>
+          <p:nvPr/>
+        </p:nvSpPr>
+        <p:spPr>
+          <a:xfrm>
+            <a:off x="786384" y="4005072"/>
+            <a:ext cx="3761842" cy="603504"/>
           </a:xfrm>
           <a:prstGeom prst="rect">
             <a:avLst/>
@@ -7320,13 +7645,13 @@
             <a:r>
               <a:rPr lang="en-US" sz="1350" b="1" dirty="0">
                 <a:solidFill>
-                  <a:srgbClr val="C62A2A"/>
+                  <a:srgbClr val="9A5B12"/>
                 </a:solidFill>
                 <a:latin typeface="Montserrat" pitchFamily="34" charset="0"/>
                 <a:ea typeface="Montserrat" pitchFamily="34" charset="-122"/>
                 <a:cs typeface="Montserrat" pitchFamily="34" charset="-120"/>
               </a:rPr>
-              <a:t>Зміна порогу — реліз</a:t>
+              <a:t>Поріг у двох місцях</a:t>
             </a:r>
             <a:endParaRPr lang="en-US" sz="1350" dirty="0"/>
           </a:p>
@@ -7334,14 +7659,14 @@
       </p:sp>
       <p:sp>
         <p:nvSpPr>
-          <p:cNvPr id="18" name="Text 15"/>
-          <p:cNvSpPr/>
-          <p:nvPr/>
-        </p:nvSpPr>
-        <p:spPr>
-          <a:xfrm>
-            <a:off x="4548226" y="4197096"/>
-            <a:ext cx="6640373" cy="658368"/>
+          <p:cNvPr id="34" name="Text 31"/>
+          <p:cNvSpPr/>
+          <p:nvPr/>
+        </p:nvSpPr>
+        <p:spPr>
+          <a:xfrm>
+            <a:off x="4548226" y="4005072"/>
+            <a:ext cx="6640373" cy="603504"/>
           </a:xfrm>
           <a:prstGeom prst="rect">
             <a:avLst/>
@@ -7365,7 +7690,7 @@
                 <a:ea typeface="Montserrat" pitchFamily="34" charset="-122"/>
                 <a:cs typeface="Montserrat" pitchFamily="34" charset="-120"/>
               </a:rPr>
-              <a:t>обговорена зміна контракту, а не правка «щоб позеленіло»</a:t>
+              <a:t>у команді прогону і в CI — вони мусять збігатися</a:t>
             </a:r>
             <a:endParaRPr lang="en-US" sz="1150" dirty="0"/>
           </a:p>
@@ -7373,21 +7698,121 @@
       </p:sp>
       <p:sp>
         <p:nvSpPr>
-          <p:cNvPr id="19" name="Shape 16"/>
-          <p:cNvSpPr/>
-          <p:nvPr/>
-        </p:nvSpPr>
-        <p:spPr>
-          <a:xfrm>
-            <a:off x="566928" y="4892040"/>
-            <a:ext cx="11064240" cy="960120"/>
+          <p:cNvPr id="35" name="Shape 32"/>
+          <p:cNvSpPr/>
+          <p:nvPr/>
+        </p:nvSpPr>
+        <p:spPr>
+          <a:xfrm>
+            <a:off x="566928" y="4718304"/>
+            <a:ext cx="11064240" cy="603504"/>
           </a:xfrm>
           <a:prstGeom prst="roundRect">
             <a:avLst>
-              <a:gd name="adj" fmla="val 11429"/>
+              <a:gd name="adj" fmla="val 15152"/>
             </a:avLst>
           </a:prstGeom>
           <a:solidFill>
+            <a:srgbClr val="FBE9E9"/>
+          </a:solidFill>
+          <a:ln/>
+        </p:spPr>
+      </p:sp>
+      <p:sp>
+        <p:nvSpPr>
+          <p:cNvPr id="36" name="Text 33"/>
+          <p:cNvSpPr/>
+          <p:nvPr/>
+        </p:nvSpPr>
+        <p:spPr>
+          <a:xfrm>
+            <a:off x="786384" y="4718304"/>
+            <a:ext cx="3761842" cy="603504"/>
+          </a:xfrm>
+          <a:prstGeom prst="rect">
+            <a:avLst/>
+          </a:prstGeom>
+          <a:noFill/>
+          <a:ln/>
+        </p:spPr>
+        <p:txBody>
+          <a:bodyPr wrap="square" lIns="0" tIns="0" rIns="0" bIns="0" rtlCol="0" anchor="ctr"/>
+          <a:lstStyle/>
+          <a:p>
+            <a:pPr indent="0" marL="0">
+              <a:buNone/>
+            </a:pPr>
+            <a:r>
+              <a:rPr lang="en-US" sz="1350" b="1" dirty="0">
+                <a:solidFill>
+                  <a:srgbClr val="C62A2A"/>
+                </a:solidFill>
+                <a:latin typeface="Montserrat" pitchFamily="34" charset="0"/>
+                <a:ea typeface="Montserrat" pitchFamily="34" charset="-122"/>
+                <a:cs typeface="Montserrat" pitchFamily="34" charset="-120"/>
+              </a:rPr>
+              <a:t>Зміна порогу — реліз</a:t>
+            </a:r>
+            <a:endParaRPr lang="en-US" sz="1350" dirty="0"/>
+          </a:p>
+        </p:txBody>
+      </p:sp>
+      <p:sp>
+        <p:nvSpPr>
+          <p:cNvPr id="37" name="Text 34"/>
+          <p:cNvSpPr/>
+          <p:nvPr/>
+        </p:nvSpPr>
+        <p:spPr>
+          <a:xfrm>
+            <a:off x="4548226" y="4718304"/>
+            <a:ext cx="6640373" cy="603504"/>
+          </a:xfrm>
+          <a:prstGeom prst="rect">
+            <a:avLst/>
+          </a:prstGeom>
+          <a:noFill/>
+          <a:ln/>
+        </p:spPr>
+        <p:txBody>
+          <a:bodyPr wrap="square" lIns="0" tIns="0" rIns="0" bIns="0" rtlCol="0" anchor="ctr"/>
+          <a:lstStyle/>
+          <a:p>
+            <a:pPr indent="0" marL="0">
+              <a:buNone/>
+            </a:pPr>
+            <a:r>
+              <a:rPr lang="en-US" sz="1150" dirty="0">
+                <a:solidFill>
+                  <a:srgbClr val="111318"/>
+                </a:solidFill>
+                <a:latin typeface="Montserrat" pitchFamily="34" charset="0"/>
+                <a:ea typeface="Montserrat" pitchFamily="34" charset="-122"/>
+                <a:cs typeface="Montserrat" pitchFamily="34" charset="-120"/>
+              </a:rPr>
+              <a:t>обговорена зміна контракту, а не правка «щоб позеленіло»</a:t>
+            </a:r>
+            <a:endParaRPr lang="en-US" sz="1150" dirty="0"/>
+          </a:p>
+        </p:txBody>
+      </p:sp>
+      <p:sp>
+        <p:nvSpPr>
+          <p:cNvPr id="38" name="Shape 35"/>
+          <p:cNvSpPr/>
+          <p:nvPr/>
+        </p:nvSpPr>
+        <p:spPr>
+          <a:xfrm>
+            <a:off x="566928" y="5440680"/>
+            <a:ext cx="11064240" cy="685800"/>
+          </a:xfrm>
+          <a:prstGeom prst="roundRect">
+            <a:avLst>
+              <a:gd name="adj" fmla="val 16000"/>
+            </a:avLst>
+          </a:prstGeom>
+          <a:solidFill>
             <a:srgbClr val="E9F4EF"/>
           </a:solidFill>
           <a:ln/>
@@ -7395,14 +7820,14 @@
       </p:sp>
       <p:sp>
         <p:nvSpPr>
-          <p:cNvPr id="20" name="Text 17"/>
-          <p:cNvSpPr/>
-          <p:nvPr/>
-        </p:nvSpPr>
-        <p:spPr>
-          <a:xfrm>
-            <a:off x="786384" y="5038344"/>
-            <a:ext cx="10625328" cy="667512"/>
+          <p:cNvPr id="39" name="Text 36"/>
+          <p:cNvSpPr/>
+          <p:nvPr/>
+        </p:nvSpPr>
+        <p:spPr>
+          <a:xfrm>
+            <a:off x="786384" y="5586984"/>
+            <a:ext cx="10625328" cy="393192"/>
           </a:xfrm>
           <a:prstGeom prst="rect">
             <a:avLst/>

--- a/docs/decks/L10.pptx
+++ b/docs/decks/L10.pptx
@@ -20329,11 +20329,11 @@
         <p:spPr>
           <a:xfrm>
             <a:off x="566928" y="1783080"/>
-            <a:ext cx="11064240" cy="713232"/>
+            <a:ext cx="11064240" cy="603504"/>
           </a:xfrm>
           <a:prstGeom prst="roundRect">
             <a:avLst>
-              <a:gd name="adj" fmla="val 12821"/>
+              <a:gd name="adj" fmla="val 15152"/>
             </a:avLst>
           </a:prstGeom>
           <a:solidFill>
@@ -20351,7 +20351,7 @@
         <p:spPr>
           <a:xfrm>
             <a:off x="786384" y="1783080"/>
-            <a:ext cx="3761842" cy="713232"/>
+            <a:ext cx="3761842" cy="603504"/>
           </a:xfrm>
           <a:prstGeom prst="rect">
             <a:avLst/>
@@ -20390,7 +20390,7 @@
         <p:spPr>
           <a:xfrm>
             <a:off x="4548226" y="1783080"/>
-            <a:ext cx="6640373" cy="713232"/>
+            <a:ext cx="6640373" cy="603504"/>
           </a:xfrm>
           <a:prstGeom prst="rect">
             <a:avLst/>
@@ -20428,12 +20428,12 @@
         </p:nvSpPr>
         <p:spPr>
           <a:xfrm>
-            <a:off x="566928" y="2606040"/>
-            <a:ext cx="11064240" cy="713232"/>
+            <a:off x="566928" y="2496312"/>
+            <a:ext cx="11064240" cy="603504"/>
           </a:xfrm>
           <a:prstGeom prst="roundRect">
             <a:avLst>
-              <a:gd name="adj" fmla="val 12821"/>
+              <a:gd name="adj" fmla="val 15152"/>
             </a:avLst>
           </a:prstGeom>
           <a:solidFill>
@@ -20450,8 +20450,8 @@
         </p:nvSpPr>
         <p:spPr>
           <a:xfrm>
-            <a:off x="786384" y="2606040"/>
-            <a:ext cx="3761842" cy="713232"/>
+            <a:off x="786384" y="2496312"/>
+            <a:ext cx="3761842" cy="603504"/>
           </a:xfrm>
           <a:prstGeom prst="rect">
             <a:avLst/>
@@ -20489,8 +20489,8 @@
         </p:nvSpPr>
         <p:spPr>
           <a:xfrm>
-            <a:off x="4548226" y="2606040"/>
-            <a:ext cx="6640373" cy="713232"/>
+            <a:off x="4548226" y="2496312"/>
+            <a:ext cx="6640373" cy="603504"/>
           </a:xfrm>
           <a:prstGeom prst="rect">
             <a:avLst/>
@@ -20528,12 +20528,12 @@
         </p:nvSpPr>
         <p:spPr>
           <a:xfrm>
-            <a:off x="566928" y="3429000"/>
-            <a:ext cx="11064240" cy="713232"/>
+            <a:off x="566928" y="3209544"/>
+            <a:ext cx="11064240" cy="603504"/>
           </a:xfrm>
           <a:prstGeom prst="roundRect">
             <a:avLst>
-              <a:gd name="adj" fmla="val 12821"/>
+              <a:gd name="adj" fmla="val 15152"/>
             </a:avLst>
           </a:prstGeom>
           <a:solidFill>
@@ -20550,8 +20550,8 @@
         </p:nvSpPr>
         <p:spPr>
           <a:xfrm>
-            <a:off x="786384" y="3429000"/>
-            <a:ext cx="3761842" cy="713232"/>
+            <a:off x="786384" y="3209544"/>
+            <a:ext cx="3761842" cy="603504"/>
           </a:xfrm>
           <a:prstGeom prst="rect">
             <a:avLst/>
@@ -20589,8 +20589,8 @@
         </p:nvSpPr>
         <p:spPr>
           <a:xfrm>
-            <a:off x="4548226" y="3429000"/>
-            <a:ext cx="6640373" cy="713232"/>
+            <a:off x="4548226" y="3209544"/>
+            <a:ext cx="6640373" cy="603504"/>
           </a:xfrm>
           <a:prstGeom prst="rect">
             <a:avLst/>
@@ -20628,115 +20628,12 @@
         </p:nvSpPr>
         <p:spPr>
           <a:xfrm>
-            <a:off x="566928" y="4297680"/>
-            <a:ext cx="11064240" cy="1280160"/>
+            <a:off x="566928" y="4087368"/>
+            <a:ext cx="2560320" cy="438912"/>
           </a:xfrm>
           <a:prstGeom prst="roundRect">
             <a:avLst>
-              <a:gd name="adj" fmla="val 8571"/>
-            </a:avLst>
-          </a:prstGeom>
-          <a:solidFill>
-            <a:srgbClr val="E9F4EF"/>
-          </a:solidFill>
-          <a:ln/>
-        </p:spPr>
-      </p:sp>
-      <p:sp>
-        <p:nvSpPr>
-          <p:cNvPr id="17" name="Text 14"/>
-          <p:cNvSpPr/>
-          <p:nvPr/>
-        </p:nvSpPr>
-        <p:spPr>
-          <a:xfrm>
-            <a:off x="786384" y="4425696"/>
-            <a:ext cx="10625328" cy="219456"/>
-          </a:xfrm>
-          <a:prstGeom prst="rect">
-            <a:avLst/>
-          </a:prstGeom>
-          <a:noFill/>
-          <a:ln/>
-        </p:spPr>
-        <p:txBody>
-          <a:bodyPr wrap="square" lIns="0" tIns="0" rIns="0" bIns="0" rtlCol="0" anchor="ctr"/>
-          <a:lstStyle/>
-          <a:p>
-            <a:pPr indent="0" marL="0">
-              <a:buNone/>
-            </a:pPr>
-            <a:r>
-              <a:rPr lang="en-US" sz="950" b="1" spc="150" kern="0" dirty="0">
-                <a:solidFill>
-                  <a:srgbClr val="1B8A5A"/>
-                </a:solidFill>
-                <a:latin typeface="Courier New" pitchFamily="34" charset="0"/>
-                <a:ea typeface="Courier New" pitchFamily="34" charset="-122"/>
-                <a:cs typeface="Courier New" pitchFamily="34" charset="-120"/>
-              </a:rPr>
-              <a:t>ПРИНЦИП</a:t>
-            </a:r>
-            <a:endParaRPr lang="en-US" sz="950" dirty="0"/>
-          </a:p>
-        </p:txBody>
-      </p:sp>
-      <p:sp>
-        <p:nvSpPr>
-          <p:cNvPr id="18" name="Text 15"/>
-          <p:cNvSpPr/>
-          <p:nvPr/>
-        </p:nvSpPr>
-        <p:spPr>
-          <a:xfrm>
-            <a:off x="786384" y="4681728"/>
-            <a:ext cx="10625328" cy="768096"/>
-          </a:xfrm>
-          <a:prstGeom prst="rect">
-            <a:avLst/>
-          </a:prstGeom>
-          <a:noFill/>
-          <a:ln/>
-        </p:spPr>
-        <p:txBody>
-          <a:bodyPr wrap="square" lIns="0" tIns="0" rIns="0" bIns="0" rtlCol="0" anchor="ctr"/>
-          <a:lstStyle/>
-          <a:p>
-            <a:pPr indent="0" marL="0">
-              <a:lnSpc>
-                <a:spcPct val="112000"/>
-              </a:lnSpc>
-              <a:buNone/>
-            </a:pPr>
-            <a:r>
-              <a:rPr lang="en-US" sz="1300" dirty="0">
-                <a:solidFill>
-                  <a:srgbClr val="111318"/>
-                </a:solidFill>
-                <a:latin typeface="Montserrat" pitchFamily="34" charset="0"/>
-                <a:ea typeface="Montserrat" pitchFamily="34" charset="-122"/>
-                <a:cs typeface="Montserrat" pitchFamily="34" charset="-120"/>
-              </a:rPr>
-              <a:t>Якість — це перелік перевірюваних тверджень, а не відчуття.</a:t>
-            </a:r>
-            <a:endParaRPr lang="en-US" sz="1300" dirty="0"/>
-          </a:p>
-        </p:txBody>
-      </p:sp>
-      <p:sp>
-        <p:nvSpPr>
-          <p:cNvPr id="19" name="Shape 16"/>
-          <p:cNvSpPr/>
-          <p:nvPr/>
-        </p:nvSpPr>
-        <p:spPr>
-          <a:xfrm>
-            <a:off x="566928" y="5669280"/>
-            <a:ext cx="11064240" cy="548640"/>
-          </a:xfrm>
-          <a:prstGeom prst="roundRect">
-            <a:avLst>
-              <a:gd name="adj" fmla="val 20000"/>
+              <a:gd name="adj" fmla="val 14583"/>
             </a:avLst>
           </a:prstGeom>
           <a:solidFill>
@@ -20752,14 +20649,513 @@
       </p:sp>
       <p:sp>
         <p:nvSpPr>
-          <p:cNvPr id="20" name="Text 17"/>
-          <p:cNvSpPr/>
-          <p:nvPr/>
-        </p:nvSpPr>
-        <p:spPr>
-          <a:xfrm>
-            <a:off x="786384" y="5815584"/>
-            <a:ext cx="10625328" cy="256032"/>
+          <p:cNvPr id="17" name="Text 14"/>
+          <p:cNvSpPr/>
+          <p:nvPr/>
+        </p:nvSpPr>
+        <p:spPr>
+          <a:xfrm>
+            <a:off x="566928" y="4087368"/>
+            <a:ext cx="2560320" cy="438912"/>
+          </a:xfrm>
+          <a:prstGeom prst="rect">
+            <a:avLst/>
+          </a:prstGeom>
+          <a:noFill/>
+          <a:ln/>
+        </p:spPr>
+        <p:txBody>
+          <a:bodyPr wrap="square" lIns="0" tIns="0" rIns="0" bIns="0" rtlCol="0" anchor="ctr"/>
+          <a:lstStyle/>
+          <a:p>
+            <a:pPr algn="ctr" indent="0" marL="0">
+              <a:buNone/>
+            </a:pPr>
+            <a:r>
+              <a:rPr lang="en-US" sz="950" b="1" dirty="0">
+                <a:solidFill>
+                  <a:srgbClr val="111318"/>
+                </a:solidFill>
+                <a:latin typeface="Courier New" pitchFamily="34" charset="0"/>
+                <a:ea typeface="Courier New" pitchFamily="34" charset="-122"/>
+                <a:cs typeface="Courier New" pitchFamily="34" charset="-120"/>
+              </a:rPr>
+              <a:t>відповідь моделі</a:t>
+            </a:r>
+            <a:endParaRPr lang="en-US" sz="950" dirty="0"/>
+          </a:p>
+        </p:txBody>
+      </p:sp>
+      <p:sp>
+        <p:nvSpPr>
+          <p:cNvPr id="18" name="Shape 15"/>
+          <p:cNvSpPr/>
+          <p:nvPr/>
+        </p:nvSpPr>
+        <p:spPr>
+          <a:xfrm>
+            <a:off x="3218688" y="4306824"/>
+            <a:ext cx="237744" cy="0"/>
+          </a:xfrm>
+          <a:prstGeom prst="line">
+            <a:avLst/>
+          </a:prstGeom>
+          <a:noFill/>
+          <a:ln w="15875">
+            <a:solidFill>
+              <a:srgbClr val="C9B8FB"/>
+            </a:solidFill>
+            <a:prstDash val="solid"/>
+          </a:ln>
+        </p:spPr>
+      </p:sp>
+      <p:sp>
+        <p:nvSpPr>
+          <p:cNvPr id="19" name="Shape 16"/>
+          <p:cNvSpPr/>
+          <p:nvPr/>
+        </p:nvSpPr>
+        <p:spPr>
+          <a:xfrm rot="5400000">
+            <a:off x="3419856" y="4238244"/>
+            <a:ext cx="146304" cy="137160"/>
+          </a:xfrm>
+          <a:prstGeom prst="triangle">
+            <a:avLst/>
+          </a:prstGeom>
+          <a:solidFill>
+            <a:srgbClr val="C9B8FB"/>
+          </a:solidFill>
+          <a:ln/>
+        </p:spPr>
+      </p:sp>
+      <p:sp>
+        <p:nvSpPr>
+          <p:cNvPr id="20" name="Shape 17"/>
+          <p:cNvSpPr/>
+          <p:nvPr/>
+        </p:nvSpPr>
+        <p:spPr>
+          <a:xfrm>
+            <a:off x="3611880" y="3977640"/>
+            <a:ext cx="3291840" cy="201168"/>
+          </a:xfrm>
+          <a:prstGeom prst="roundRect">
+            <a:avLst>
+              <a:gd name="adj" fmla="val 31818"/>
+            </a:avLst>
+          </a:prstGeom>
+          <a:solidFill>
+            <a:srgbClr val="E9F4EF"/>
+          </a:solidFill>
+          <a:ln/>
+        </p:spPr>
+      </p:sp>
+      <p:sp>
+        <p:nvSpPr>
+          <p:cNvPr id="21" name="Text 18"/>
+          <p:cNvSpPr/>
+          <p:nvPr/>
+        </p:nvSpPr>
+        <p:spPr>
+          <a:xfrm>
+            <a:off x="3611880" y="3977640"/>
+            <a:ext cx="3291840" cy="201168"/>
+          </a:xfrm>
+          <a:prstGeom prst="rect">
+            <a:avLst/>
+          </a:prstGeom>
+          <a:noFill/>
+          <a:ln/>
+        </p:spPr>
+        <p:txBody>
+          <a:bodyPr wrap="square" lIns="0" tIns="0" rIns="0" bIns="0" rtlCol="0" anchor="ctr"/>
+          <a:lstStyle/>
+          <a:p>
+            <a:pPr algn="ctr" indent="0" marL="0">
+              <a:buNone/>
+            </a:pPr>
+            <a:r>
+              <a:rPr lang="en-US" sz="950" b="1" dirty="0">
+                <a:solidFill>
+                  <a:srgbClr val="1B8A5A"/>
+                </a:solidFill>
+                <a:latin typeface="Courier New" pitchFamily="34" charset="0"/>
+                <a:ea typeface="Courier New" pitchFamily="34" charset="-122"/>
+                <a:cs typeface="Courier New" pitchFamily="34" charset="-120"/>
+              </a:rPr>
+              <a:t>expect</a:t>
+            </a:r>
+            <a:endParaRPr lang="en-US" sz="950" dirty="0"/>
+          </a:p>
+        </p:txBody>
+      </p:sp>
+      <p:sp>
+        <p:nvSpPr>
+          <p:cNvPr id="22" name="Shape 19"/>
+          <p:cNvSpPr/>
+          <p:nvPr/>
+        </p:nvSpPr>
+        <p:spPr>
+          <a:xfrm>
+            <a:off x="3611880" y="4206240"/>
+            <a:ext cx="3291840" cy="201168"/>
+          </a:xfrm>
+          <a:prstGeom prst="roundRect">
+            <a:avLst>
+              <a:gd name="adj" fmla="val 31818"/>
+            </a:avLst>
+          </a:prstGeom>
+          <a:solidFill>
+            <a:srgbClr val="FBE9E9"/>
+          </a:solidFill>
+          <a:ln/>
+        </p:spPr>
+      </p:sp>
+      <p:sp>
+        <p:nvSpPr>
+          <p:cNvPr id="23" name="Text 20"/>
+          <p:cNvSpPr/>
+          <p:nvPr/>
+        </p:nvSpPr>
+        <p:spPr>
+          <a:xfrm>
+            <a:off x="3611880" y="4206240"/>
+            <a:ext cx="3291840" cy="201168"/>
+          </a:xfrm>
+          <a:prstGeom prst="rect">
+            <a:avLst/>
+          </a:prstGeom>
+          <a:noFill/>
+          <a:ln/>
+        </p:spPr>
+        <p:txBody>
+          <a:bodyPr wrap="square" lIns="0" tIns="0" rIns="0" bIns="0" rtlCol="0" anchor="ctr"/>
+          <a:lstStyle/>
+          <a:p>
+            <a:pPr algn="ctr" indent="0" marL="0">
+              <a:buNone/>
+            </a:pPr>
+            <a:r>
+              <a:rPr lang="en-US" sz="950" b="1" dirty="0">
+                <a:solidFill>
+                  <a:srgbClr val="C62A2A"/>
+                </a:solidFill>
+                <a:latin typeface="Courier New" pitchFamily="34" charset="0"/>
+                <a:ea typeface="Courier New" pitchFamily="34" charset="-122"/>
+                <a:cs typeface="Courier New" pitchFamily="34" charset="-120"/>
+              </a:rPr>
+              <a:t>forbid</a:t>
+            </a:r>
+            <a:endParaRPr lang="en-US" sz="950" dirty="0"/>
+          </a:p>
+        </p:txBody>
+      </p:sp>
+      <p:sp>
+        <p:nvSpPr>
+          <p:cNvPr id="24" name="Shape 21"/>
+          <p:cNvSpPr/>
+          <p:nvPr/>
+        </p:nvSpPr>
+        <p:spPr>
+          <a:xfrm>
+            <a:off x="3611880" y="4434840"/>
+            <a:ext cx="3291840" cy="201168"/>
+          </a:xfrm>
+          <a:prstGeom prst="roundRect">
+            <a:avLst>
+              <a:gd name="adj" fmla="val 31818"/>
+            </a:avLst>
+          </a:prstGeom>
+          <a:solidFill>
+            <a:srgbClr val="EFEAFE"/>
+          </a:solidFill>
+          <a:ln/>
+        </p:spPr>
+      </p:sp>
+      <p:sp>
+        <p:nvSpPr>
+          <p:cNvPr id="25" name="Text 22"/>
+          <p:cNvSpPr/>
+          <p:nvPr/>
+        </p:nvSpPr>
+        <p:spPr>
+          <a:xfrm>
+            <a:off x="3611880" y="4434840"/>
+            <a:ext cx="3291840" cy="201168"/>
+          </a:xfrm>
+          <a:prstGeom prst="rect">
+            <a:avLst/>
+          </a:prstGeom>
+          <a:noFill/>
+          <a:ln/>
+        </p:spPr>
+        <p:txBody>
+          <a:bodyPr wrap="square" lIns="0" tIns="0" rIns="0" bIns="0" rtlCol="0" anchor="ctr"/>
+          <a:lstStyle/>
+          <a:p>
+            <a:pPr algn="ctr" indent="0" marL="0">
+              <a:buNone/>
+            </a:pPr>
+            <a:r>
+              <a:rPr lang="en-US" sz="950" b="1" dirty="0">
+                <a:solidFill>
+                  <a:srgbClr val="5A05F4"/>
+                </a:solidFill>
+                <a:latin typeface="Courier New" pitchFamily="34" charset="0"/>
+                <a:ea typeface="Courier New" pitchFamily="34" charset="-122"/>
+                <a:cs typeface="Courier New" pitchFamily="34" charset="-120"/>
+              </a:rPr>
+              <a:t>expect_refusal</a:t>
+            </a:r>
+            <a:endParaRPr lang="en-US" sz="950" dirty="0"/>
+          </a:p>
+        </p:txBody>
+      </p:sp>
+      <p:sp>
+        <p:nvSpPr>
+          <p:cNvPr id="26" name="Shape 23"/>
+          <p:cNvSpPr/>
+          <p:nvPr/>
+        </p:nvSpPr>
+        <p:spPr>
+          <a:xfrm>
+            <a:off x="6995160" y="4306824"/>
+            <a:ext cx="237744" cy="0"/>
+          </a:xfrm>
+          <a:prstGeom prst="line">
+            <a:avLst/>
+          </a:prstGeom>
+          <a:noFill/>
+          <a:ln w="15875">
+            <a:solidFill>
+              <a:srgbClr val="C9B8FB"/>
+            </a:solidFill>
+            <a:prstDash val="solid"/>
+          </a:ln>
+        </p:spPr>
+      </p:sp>
+      <p:sp>
+        <p:nvSpPr>
+          <p:cNvPr id="27" name="Shape 24"/>
+          <p:cNvSpPr/>
+          <p:nvPr/>
+        </p:nvSpPr>
+        <p:spPr>
+          <a:xfrm rot="5400000">
+            <a:off x="7196328" y="4238244"/>
+            <a:ext cx="146304" cy="137160"/>
+          </a:xfrm>
+          <a:prstGeom prst="triangle">
+            <a:avLst/>
+          </a:prstGeom>
+          <a:solidFill>
+            <a:srgbClr val="C9B8FB"/>
+          </a:solidFill>
+          <a:ln/>
+        </p:spPr>
+      </p:sp>
+      <p:sp>
+        <p:nvSpPr>
+          <p:cNvPr id="28" name="Shape 25"/>
+          <p:cNvSpPr/>
+          <p:nvPr/>
+        </p:nvSpPr>
+        <p:spPr>
+          <a:xfrm>
+            <a:off x="7406640" y="4087368"/>
+            <a:ext cx="4224528" cy="438912"/>
+          </a:xfrm>
+          <a:prstGeom prst="roundRect">
+            <a:avLst>
+              <a:gd name="adj" fmla="val 14583"/>
+            </a:avLst>
+          </a:prstGeom>
+          <a:solidFill>
+            <a:srgbClr val="E9F4EF"/>
+          </a:solidFill>
+          <a:ln/>
+        </p:spPr>
+      </p:sp>
+      <p:sp>
+        <p:nvSpPr>
+          <p:cNvPr id="29" name="Text 26"/>
+          <p:cNvSpPr/>
+          <p:nvPr/>
+        </p:nvSpPr>
+        <p:spPr>
+          <a:xfrm>
+            <a:off x="7406640" y="4087368"/>
+            <a:ext cx="4224528" cy="438912"/>
+          </a:xfrm>
+          <a:prstGeom prst="rect">
+            <a:avLst/>
+          </a:prstGeom>
+          <a:noFill/>
+          <a:ln/>
+        </p:spPr>
+        <p:txBody>
+          <a:bodyPr wrap="square" lIns="0" tIns="0" rIns="0" bIns="0" rtlCol="0" anchor="ctr"/>
+          <a:lstStyle/>
+          <a:p>
+            <a:pPr algn="ctr" indent="0" marL="0">
+              <a:buNone/>
+            </a:pPr>
+            <a:r>
+              <a:rPr lang="en-US" sz="950" b="1" dirty="0">
+                <a:solidFill>
+                  <a:srgbClr val="1B8A5A"/>
+                </a:solidFill>
+                <a:latin typeface="Courier New" pitchFamily="34" charset="0"/>
+                <a:ea typeface="Courier New" pitchFamily="34" charset="-122"/>
+                <a:cs typeface="Courier New" pitchFamily="34" charset="-120"/>
+              </a:rPr>
+              <a:t>усі три справдилися — кейс пройшов</a:t>
+            </a:r>
+            <a:endParaRPr lang="en-US" sz="950" dirty="0"/>
+          </a:p>
+        </p:txBody>
+      </p:sp>
+      <p:sp>
+        <p:nvSpPr>
+          <p:cNvPr id="30" name="Shape 27"/>
+          <p:cNvSpPr/>
+          <p:nvPr/>
+        </p:nvSpPr>
+        <p:spPr>
+          <a:xfrm>
+            <a:off x="566928" y="4800600"/>
+            <a:ext cx="11064240" cy="822960"/>
+          </a:xfrm>
+          <a:prstGeom prst="roundRect">
+            <a:avLst>
+              <a:gd name="adj" fmla="val 13333"/>
+            </a:avLst>
+          </a:prstGeom>
+          <a:solidFill>
+            <a:srgbClr val="E9F4EF"/>
+          </a:solidFill>
+          <a:ln/>
+        </p:spPr>
+      </p:sp>
+      <p:sp>
+        <p:nvSpPr>
+          <p:cNvPr id="31" name="Text 28"/>
+          <p:cNvSpPr/>
+          <p:nvPr/>
+        </p:nvSpPr>
+        <p:spPr>
+          <a:xfrm>
+            <a:off x="786384" y="4928616"/>
+            <a:ext cx="10625328" cy="219456"/>
+          </a:xfrm>
+          <a:prstGeom prst="rect">
+            <a:avLst/>
+          </a:prstGeom>
+          <a:noFill/>
+          <a:ln/>
+        </p:spPr>
+        <p:txBody>
+          <a:bodyPr wrap="square" lIns="0" tIns="0" rIns="0" bIns="0" rtlCol="0" anchor="ctr"/>
+          <a:lstStyle/>
+          <a:p>
+            <a:pPr indent="0" marL="0">
+              <a:buNone/>
+            </a:pPr>
+            <a:r>
+              <a:rPr lang="en-US" sz="950" b="1" spc="150" kern="0" dirty="0">
+                <a:solidFill>
+                  <a:srgbClr val="1B8A5A"/>
+                </a:solidFill>
+                <a:latin typeface="Courier New" pitchFamily="34" charset="0"/>
+                <a:ea typeface="Courier New" pitchFamily="34" charset="-122"/>
+                <a:cs typeface="Courier New" pitchFamily="34" charset="-120"/>
+              </a:rPr>
+              <a:t>ПРИНЦИП</a:t>
+            </a:r>
+            <a:endParaRPr lang="en-US" sz="950" dirty="0"/>
+          </a:p>
+        </p:txBody>
+      </p:sp>
+      <p:sp>
+        <p:nvSpPr>
+          <p:cNvPr id="32" name="Text 29"/>
+          <p:cNvSpPr/>
+          <p:nvPr/>
+        </p:nvSpPr>
+        <p:spPr>
+          <a:xfrm>
+            <a:off x="786384" y="5184648"/>
+            <a:ext cx="10625328" cy="310896"/>
+          </a:xfrm>
+          <a:prstGeom prst="rect">
+            <a:avLst/>
+          </a:prstGeom>
+          <a:noFill/>
+          <a:ln/>
+        </p:spPr>
+        <p:txBody>
+          <a:bodyPr wrap="square" lIns="0" tIns="0" rIns="0" bIns="0" rtlCol="0" anchor="ctr"/>
+          <a:lstStyle/>
+          <a:p>
+            <a:pPr indent="0" marL="0">
+              <a:lnSpc>
+                <a:spcPct val="112000"/>
+              </a:lnSpc>
+              <a:buNone/>
+            </a:pPr>
+            <a:r>
+              <a:rPr lang="en-US" sz="1300" dirty="0">
+                <a:solidFill>
+                  <a:srgbClr val="111318"/>
+                </a:solidFill>
+                <a:latin typeface="Montserrat" pitchFamily="34" charset="0"/>
+                <a:ea typeface="Montserrat" pitchFamily="34" charset="-122"/>
+                <a:cs typeface="Montserrat" pitchFamily="34" charset="-120"/>
+              </a:rPr>
+              <a:t>Якість — це перелік перевірюваних тверджень, а не відчуття.</a:t>
+            </a:r>
+            <a:endParaRPr lang="en-US" sz="1300" dirty="0"/>
+          </a:p>
+        </p:txBody>
+      </p:sp>
+      <p:sp>
+        <p:nvSpPr>
+          <p:cNvPr id="33" name="Shape 30"/>
+          <p:cNvSpPr/>
+          <p:nvPr/>
+        </p:nvSpPr>
+        <p:spPr>
+          <a:xfrm>
+            <a:off x="566928" y="5715000"/>
+            <a:ext cx="11064240" cy="457200"/>
+          </a:xfrm>
+          <a:prstGeom prst="roundRect">
+            <a:avLst>
+              <a:gd name="adj" fmla="val 24000"/>
+            </a:avLst>
+          </a:prstGeom>
+          <a:solidFill>
+            <a:srgbClr val="FFFFFF"/>
+          </a:solidFill>
+          <a:ln w="12700">
+            <a:solidFill>
+              <a:srgbClr val="E6E7EC"/>
+            </a:solidFill>
+            <a:prstDash val="solid"/>
+          </a:ln>
+        </p:spPr>
+      </p:sp>
+      <p:sp>
+        <p:nvSpPr>
+          <p:cNvPr id="34" name="Text 31"/>
+          <p:cNvSpPr/>
+          <p:nvPr/>
+        </p:nvSpPr>
+        <p:spPr>
+          <a:xfrm>
+            <a:off x="786384" y="5861304"/>
+            <a:ext cx="10625328" cy="164592"/>
           </a:xfrm>
           <a:prstGeom prst="rect">
             <a:avLst/>

--- a/docs/decks/L10.pptx
+++ b/docs/decks/L10.pptx
@@ -2536,7 +2536,7 @@
         </p:nvSpPr>
         <p:spPr>
           <a:xfrm>
-            <a:off x="11368735" y="6437376"/>
+            <a:off x="11368735" y="6327648"/>
             <a:ext cx="365760" cy="274320"/>
           </a:xfrm>
           <a:prstGeom prst="rect">
@@ -2572,6 +2572,62 @@
           </a:p>
         </p:txBody>
       </p:sp>
+    </p:spTree>
+  </p:cSld>
+  <p:clrMapOvr>
+    <a:masterClrMapping/>
+  </p:clrMapOvr>
+</p:sldLayout>
+</file>
+
+<file path=ppt/slideLayouts/slideLayout2.xml><?xml version="1.0" encoding="utf-8"?>
+<p:sldLayout xmlns:a="http://schemas.openxmlformats.org/drawingml/2006/main" xmlns:r="http://schemas.openxmlformats.org/officeDocument/2006/relationships" xmlns:p="http://schemas.openxmlformats.org/presentationml/2006/main" preserve="1">
+  <p:cSld name="NEO">
+    <p:bg>
+      <p:bgPr>
+        <a:solidFill>
+          <a:srgbClr val="000000"/>
+        </a:solidFill>
+      </p:bgPr>
+    </p:bg>
+    <p:spTree>
+      <p:nvGrpSpPr>
+        <p:cNvPr id="1" name=""/>
+        <p:cNvGrpSpPr/>
+        <p:nvPr/>
+      </p:nvGrpSpPr>
+      <p:grpSpPr>
+        <a:xfrm>
+          <a:off x="0" y="0"/>
+          <a:ext cx="0" cy="0"/>
+          <a:chOff x="0" y="0"/>
+          <a:chExt cx="0" cy="0"/>
+        </a:xfrm>
+      </p:grpSpPr>
+      <p:pic>
+        <p:nvPicPr>
+          <p:cNvPr id="2" name="Image 0" descr="preencoded.png">    </p:cNvPr>
+          <p:cNvPicPr>
+            <a:picLocks noChangeAspect="1"/>
+          </p:cNvPicPr>
+          <p:nvPr/>
+        </p:nvPicPr>
+        <p:blipFill>
+          <a:blip r:embed="rId1"/>
+          <a:stretch>
+            <a:fillRect/>
+          </a:stretch>
+        </p:blipFill>
+        <p:spPr>
+          <a:xfrm>
+            <a:off x="0" y="0"/>
+            <a:ext cx="12191695" cy="6858000"/>
+          </a:xfrm>
+          <a:prstGeom prst="rect">
+            <a:avLst/>
+          </a:prstGeom>
+        </p:spPr>
+      </p:pic>
     </p:spTree>
   </p:cSld>
   <p:clrMapOvr>
@@ -2609,7 +2665,7 @@
         </p:nvSpPr>
         <p:spPr>
           <a:xfrm>
-            <a:off x="11368735" y="6437376"/>
+            <a:off x="11368735" y="6327648"/>
             <a:ext cx="365760" cy="274320"/>
           </a:xfrm>
           <a:prstGeom prst="rect">
@@ -2650,6 +2706,7 @@
   <p:clrMap bg1="lt1" tx1="dk1" bg2="lt2" tx2="dk2" accent1="accent1" accent2="accent2" accent3="accent3" accent4="accent4" accent5="accent5" accent6="accent6" hlink="hlink" folHlink="folHlink"/>
   <p:sldLayoutIdLst>
     <p:sldLayoutId id="2147483649" r:id="rId1"/>
+    <p:sldLayoutId id="2147483650" r:id="rId2"/>
   </p:sldLayoutIdLst>
   <p:hf sldNum="0" hdr="0" ftr="0" dt="0"/>
   <p:txStyles>
@@ -2908,13 +2965,6 @@
 <file path=ppt/slides/slide1.xml><?xml version="1.0" encoding="utf-8"?>
 <p:sld xmlns:a="http://schemas.openxmlformats.org/drawingml/2006/main" xmlns:r="http://schemas.openxmlformats.org/officeDocument/2006/relationships" xmlns:p="http://schemas.openxmlformats.org/presentationml/2006/main">
   <p:cSld name="Slide 1">
-    <p:bg>
-      <p:bgPr>
-        <a:solidFill>
-          <a:srgbClr val="1B0942"/>
-        </a:solidFill>
-      </p:bgPr>
-    </p:bg>
     <p:spTree>
       <p:nvGrpSpPr>
         <p:cNvPr id="1" name=""/>
@@ -3586,13 +3636,6 @@
 <file path=ppt/slides/slide10.xml><?xml version="1.0" encoding="utf-8"?>
 <p:sld xmlns:a="http://schemas.openxmlformats.org/drawingml/2006/main" xmlns:r="http://schemas.openxmlformats.org/officeDocument/2006/relationships" xmlns:p="http://schemas.openxmlformats.org/presentationml/2006/main">
   <p:cSld name="Slide 10">
-    <p:bg>
-      <p:bgPr>
-        <a:solidFill>
-          <a:srgbClr val="FFFFFF"/>
-        </a:solidFill>
-      </p:bgPr>
-    </p:bg>
     <p:spTree>
       <p:nvGrpSpPr>
         <p:cNvPr id="1" name=""/>
@@ -3609,7 +3652,29 @@
       </p:grpSpPr>
       <p:sp>
         <p:nvSpPr>
-          <p:cNvPr id="2" name="Text 0"/>
+          <p:cNvPr id="2" name="Shape 0"/>
+          <p:cNvSpPr/>
+          <p:nvPr/>
+        </p:nvSpPr>
+        <p:spPr>
+          <a:xfrm>
+            <a:off x="231343" y="194767"/>
+            <a:ext cx="11716207" cy="6473952"/>
+          </a:xfrm>
+          <a:prstGeom prst="roundRect">
+            <a:avLst>
+              <a:gd name="adj" fmla="val 3107"/>
+            </a:avLst>
+          </a:prstGeom>
+          <a:solidFill>
+            <a:srgbClr val="FFFFFF"/>
+          </a:solidFill>
+          <a:ln/>
+        </p:spPr>
+      </p:sp>
+      <p:sp>
+        <p:nvSpPr>
+          <p:cNvPr id="3" name="Text 1"/>
           <p:cNvSpPr/>
           <p:nvPr/>
         </p:nvSpPr>
@@ -3648,7 +3713,7 @@
       </p:sp>
       <p:sp>
         <p:nvSpPr>
-          <p:cNvPr id="3" name="Text 1"/>
+          <p:cNvPr id="4" name="Text 2"/>
           <p:cNvSpPr/>
           <p:nvPr/>
         </p:nvSpPr>
@@ -3687,7 +3752,7 @@
       </p:sp>
       <p:sp>
         <p:nvSpPr>
-          <p:cNvPr id="4" name="Shape 2"/>
+          <p:cNvPr id="5" name="Shape 3"/>
           <p:cNvSpPr/>
           <p:nvPr/>
         </p:nvSpPr>
@@ -3709,7 +3774,7 @@
       </p:sp>
       <p:sp>
         <p:nvSpPr>
-          <p:cNvPr id="5" name="Text 3"/>
+          <p:cNvPr id="6" name="Text 4"/>
           <p:cNvSpPr/>
           <p:nvPr/>
         </p:nvSpPr>
@@ -3748,7 +3813,7 @@
       </p:sp>
       <p:pic>
         <p:nvPicPr>
-          <p:cNvPr id="6" name="Image 0" descr="preencoded.png">    </p:cNvPr>
+          <p:cNvPr id="7" name="Image 0" descr="preencoded.png">    </p:cNvPr>
           <p:cNvPicPr>
             <a:picLocks noChangeAspect="1"/>
           </p:cNvPicPr>
@@ -3762,7 +3827,7 @@
         </p:blipFill>
         <p:spPr>
           <a:xfrm>
-            <a:off x="566928" y="6254496"/>
+            <a:off x="566928" y="6126480"/>
             <a:ext cx="1481328" cy="457200"/>
           </a:xfrm>
           <a:prstGeom prst="rect">
@@ -4627,7 +4692,7 @@
       </p:graphicFrame>
       <p:sp>
         <p:nvSpPr>
-          <p:cNvPr id="8" name="Shape 4"/>
+          <p:cNvPr id="9" name="Shape 5"/>
           <p:cNvSpPr/>
           <p:nvPr/>
         </p:nvSpPr>
@@ -4649,7 +4714,7 @@
       </p:sp>
       <p:sp>
         <p:nvSpPr>
-          <p:cNvPr id="9" name="Text 5"/>
+          <p:cNvPr id="10" name="Text 6"/>
           <p:cNvSpPr/>
           <p:nvPr/>
         </p:nvSpPr>
@@ -4688,7 +4753,7 @@
       </p:sp>
       <p:sp>
         <p:nvSpPr>
-          <p:cNvPr id="10" name="Text 6"/>
+          <p:cNvPr id="11" name="Text 7"/>
           <p:cNvSpPr/>
           <p:nvPr/>
         </p:nvSpPr>
@@ -4740,7 +4805,7 @@
         </p:nvSpPr>
         <p:spPr>
           <a:xfrm>
-            <a:off x="11368735" y="6437376"/>
+            <a:off x="11368735" y="6327648"/>
             <a:ext cx="365760" cy="274320"/>
           </a:xfrm>
           <a:prstGeom prst="rect">
@@ -4787,13 +4852,6 @@
 <file path=ppt/slides/slide11.xml><?xml version="1.0" encoding="utf-8"?>
 <p:sld xmlns:a="http://schemas.openxmlformats.org/drawingml/2006/main" xmlns:r="http://schemas.openxmlformats.org/officeDocument/2006/relationships" xmlns:p="http://schemas.openxmlformats.org/presentationml/2006/main">
   <p:cSld name="Slide 11">
-    <p:bg>
-      <p:bgPr>
-        <a:solidFill>
-          <a:srgbClr val="FFFFFF"/>
-        </a:solidFill>
-      </p:bgPr>
-    </p:bg>
     <p:spTree>
       <p:nvGrpSpPr>
         <p:cNvPr id="1" name=""/>
@@ -4810,7 +4868,29 @@
       </p:grpSpPr>
       <p:sp>
         <p:nvSpPr>
-          <p:cNvPr id="2" name="Text 0"/>
+          <p:cNvPr id="2" name="Shape 0"/>
+          <p:cNvSpPr/>
+          <p:nvPr/>
+        </p:nvSpPr>
+        <p:spPr>
+          <a:xfrm>
+            <a:off x="231343" y="194767"/>
+            <a:ext cx="11716207" cy="6473952"/>
+          </a:xfrm>
+          <a:prstGeom prst="roundRect">
+            <a:avLst>
+              <a:gd name="adj" fmla="val 3107"/>
+            </a:avLst>
+          </a:prstGeom>
+          <a:solidFill>
+            <a:srgbClr val="FFFFFF"/>
+          </a:solidFill>
+          <a:ln/>
+        </p:spPr>
+      </p:sp>
+      <p:sp>
+        <p:nvSpPr>
+          <p:cNvPr id="3" name="Text 1"/>
           <p:cNvSpPr/>
           <p:nvPr/>
         </p:nvSpPr>
@@ -4849,7 +4929,7 @@
       </p:sp>
       <p:sp>
         <p:nvSpPr>
-          <p:cNvPr id="3" name="Text 1"/>
+          <p:cNvPr id="4" name="Text 2"/>
           <p:cNvSpPr/>
           <p:nvPr/>
         </p:nvSpPr>
@@ -4888,7 +4968,7 @@
       </p:sp>
       <p:sp>
         <p:nvSpPr>
-          <p:cNvPr id="4" name="Shape 2"/>
+          <p:cNvPr id="5" name="Shape 3"/>
           <p:cNvSpPr/>
           <p:nvPr/>
         </p:nvSpPr>
@@ -4910,7 +4990,7 @@
       </p:sp>
       <p:sp>
         <p:nvSpPr>
-          <p:cNvPr id="5" name="Text 3"/>
+          <p:cNvPr id="6" name="Text 4"/>
           <p:cNvSpPr/>
           <p:nvPr/>
         </p:nvSpPr>
@@ -4949,7 +5029,7 @@
       </p:sp>
       <p:pic>
         <p:nvPicPr>
-          <p:cNvPr id="6" name="Image 0" descr="preencoded.png">    </p:cNvPr>
+          <p:cNvPr id="7" name="Image 0" descr="preencoded.png">    </p:cNvPr>
           <p:cNvPicPr>
             <a:picLocks noChangeAspect="1"/>
           </p:cNvPicPr>
@@ -4963,7 +5043,7 @@
         </p:blipFill>
         <p:spPr>
           <a:xfrm>
-            <a:off x="566928" y="6254496"/>
+            <a:off x="566928" y="6126480"/>
             <a:ext cx="1481328" cy="457200"/>
           </a:xfrm>
           <a:prstGeom prst="rect">
@@ -4973,7 +5053,7 @@
       </p:pic>
       <p:sp>
         <p:nvSpPr>
-          <p:cNvPr id="7" name="Shape 4"/>
+          <p:cNvPr id="8" name="Shape 5"/>
           <p:cNvSpPr/>
           <p:nvPr/>
         </p:nvSpPr>
@@ -5000,7 +5080,7 @@
       </p:sp>
       <p:sp>
         <p:nvSpPr>
-          <p:cNvPr id="8" name="Text 5"/>
+          <p:cNvPr id="9" name="Text 6"/>
           <p:cNvSpPr/>
           <p:nvPr/>
         </p:nvSpPr>
@@ -5182,7 +5262,7 @@
       </p:sp>
       <p:sp>
         <p:nvSpPr>
-          <p:cNvPr id="9" name="Shape 6"/>
+          <p:cNvPr id="10" name="Shape 7"/>
           <p:cNvSpPr/>
           <p:nvPr/>
         </p:nvSpPr>
@@ -5204,7 +5284,7 @@
       </p:sp>
       <p:sp>
         <p:nvSpPr>
-          <p:cNvPr id="10" name="Shape 7"/>
+          <p:cNvPr id="11" name="Shape 8"/>
           <p:cNvSpPr/>
           <p:nvPr/>
         </p:nvSpPr>
@@ -5224,7 +5304,7 @@
       </p:sp>
       <p:sp>
         <p:nvSpPr>
-          <p:cNvPr id="11" name="Text 8"/>
+          <p:cNvPr id="12" name="Text 9"/>
           <p:cNvSpPr/>
           <p:nvPr/>
         </p:nvSpPr>
@@ -5263,7 +5343,7 @@
       </p:sp>
       <p:sp>
         <p:nvSpPr>
-          <p:cNvPr id="12" name="Text 9"/>
+          <p:cNvPr id="13" name="Text 10"/>
           <p:cNvSpPr/>
           <p:nvPr/>
         </p:nvSpPr>
@@ -5302,7 +5382,7 @@
       </p:sp>
       <p:sp>
         <p:nvSpPr>
-          <p:cNvPr id="13" name="Text 10"/>
+          <p:cNvPr id="14" name="Text 11"/>
           <p:cNvSpPr/>
           <p:nvPr/>
         </p:nvSpPr>
@@ -5344,7 +5424,7 @@
       </p:sp>
       <p:sp>
         <p:nvSpPr>
-          <p:cNvPr id="14" name="Shape 11"/>
+          <p:cNvPr id="15" name="Shape 12"/>
           <p:cNvSpPr/>
           <p:nvPr/>
         </p:nvSpPr>
@@ -5366,7 +5446,7 @@
       </p:sp>
       <p:sp>
         <p:nvSpPr>
-          <p:cNvPr id="15" name="Shape 12"/>
+          <p:cNvPr id="16" name="Shape 13"/>
           <p:cNvSpPr/>
           <p:nvPr/>
         </p:nvSpPr>
@@ -5386,7 +5466,7 @@
       </p:sp>
       <p:sp>
         <p:nvSpPr>
-          <p:cNvPr id="16" name="Text 13"/>
+          <p:cNvPr id="17" name="Text 14"/>
           <p:cNvSpPr/>
           <p:nvPr/>
         </p:nvSpPr>
@@ -5425,7 +5505,7 @@
       </p:sp>
       <p:sp>
         <p:nvSpPr>
-          <p:cNvPr id="17" name="Text 14"/>
+          <p:cNvPr id="18" name="Text 15"/>
           <p:cNvSpPr/>
           <p:nvPr/>
         </p:nvSpPr>
@@ -5464,7 +5544,7 @@
       </p:sp>
       <p:sp>
         <p:nvSpPr>
-          <p:cNvPr id="18" name="Text 15"/>
+          <p:cNvPr id="19" name="Text 16"/>
           <p:cNvSpPr/>
           <p:nvPr/>
         </p:nvSpPr>
@@ -5506,7 +5586,7 @@
       </p:sp>
       <p:sp>
         <p:nvSpPr>
-          <p:cNvPr id="19" name="Shape 16"/>
+          <p:cNvPr id="20" name="Shape 17"/>
           <p:cNvSpPr/>
           <p:nvPr/>
         </p:nvSpPr>
@@ -5528,7 +5608,7 @@
       </p:sp>
       <p:sp>
         <p:nvSpPr>
-          <p:cNvPr id="20" name="Shape 17"/>
+          <p:cNvPr id="21" name="Shape 18"/>
           <p:cNvSpPr/>
           <p:nvPr/>
         </p:nvSpPr>
@@ -5548,7 +5628,7 @@
       </p:sp>
       <p:sp>
         <p:nvSpPr>
-          <p:cNvPr id="21" name="Text 18"/>
+          <p:cNvPr id="22" name="Text 19"/>
           <p:cNvSpPr/>
           <p:nvPr/>
         </p:nvSpPr>
@@ -5587,7 +5667,7 @@
       </p:sp>
       <p:sp>
         <p:nvSpPr>
-          <p:cNvPr id="22" name="Text 19"/>
+          <p:cNvPr id="23" name="Text 20"/>
           <p:cNvSpPr/>
           <p:nvPr/>
         </p:nvSpPr>
@@ -5626,7 +5706,7 @@
       </p:sp>
       <p:sp>
         <p:nvSpPr>
-          <p:cNvPr id="23" name="Text 20"/>
+          <p:cNvPr id="24" name="Text 21"/>
           <p:cNvSpPr/>
           <p:nvPr/>
         </p:nvSpPr>
@@ -5678,7 +5758,7 @@
         </p:nvSpPr>
         <p:spPr>
           <a:xfrm>
-            <a:off x="11368735" y="6437376"/>
+            <a:off x="11368735" y="6327648"/>
             <a:ext cx="365760" cy="274320"/>
           </a:xfrm>
           <a:prstGeom prst="rect">
@@ -5725,13 +5805,6 @@
 <file path=ppt/slides/slide12.xml><?xml version="1.0" encoding="utf-8"?>
 <p:sld xmlns:a="http://schemas.openxmlformats.org/drawingml/2006/main" xmlns:r="http://schemas.openxmlformats.org/officeDocument/2006/relationships" xmlns:p="http://schemas.openxmlformats.org/presentationml/2006/main">
   <p:cSld name="Slide 12">
-    <p:bg>
-      <p:bgPr>
-        <a:solidFill>
-          <a:srgbClr val="FFFFFF"/>
-        </a:solidFill>
-      </p:bgPr>
-    </p:bg>
     <p:spTree>
       <p:nvGrpSpPr>
         <p:cNvPr id="1" name=""/>
@@ -5748,7 +5821,29 @@
       </p:grpSpPr>
       <p:sp>
         <p:nvSpPr>
-          <p:cNvPr id="2" name="Text 0"/>
+          <p:cNvPr id="2" name="Shape 0"/>
+          <p:cNvSpPr/>
+          <p:nvPr/>
+        </p:nvSpPr>
+        <p:spPr>
+          <a:xfrm>
+            <a:off x="231343" y="194767"/>
+            <a:ext cx="11716207" cy="6473952"/>
+          </a:xfrm>
+          <a:prstGeom prst="roundRect">
+            <a:avLst>
+              <a:gd name="adj" fmla="val 3107"/>
+            </a:avLst>
+          </a:prstGeom>
+          <a:solidFill>
+            <a:srgbClr val="FFFFFF"/>
+          </a:solidFill>
+          <a:ln/>
+        </p:spPr>
+      </p:sp>
+      <p:sp>
+        <p:nvSpPr>
+          <p:cNvPr id="3" name="Text 1"/>
           <p:cNvSpPr/>
           <p:nvPr/>
         </p:nvSpPr>
@@ -5787,7 +5882,7 @@
       </p:sp>
       <p:sp>
         <p:nvSpPr>
-          <p:cNvPr id="3" name="Text 1"/>
+          <p:cNvPr id="4" name="Text 2"/>
           <p:cNvSpPr/>
           <p:nvPr/>
         </p:nvSpPr>
@@ -5826,7 +5921,7 @@
       </p:sp>
       <p:sp>
         <p:nvSpPr>
-          <p:cNvPr id="4" name="Shape 2"/>
+          <p:cNvPr id="5" name="Shape 3"/>
           <p:cNvSpPr/>
           <p:nvPr/>
         </p:nvSpPr>
@@ -5848,7 +5943,7 @@
       </p:sp>
       <p:sp>
         <p:nvSpPr>
-          <p:cNvPr id="5" name="Text 3"/>
+          <p:cNvPr id="6" name="Text 4"/>
           <p:cNvSpPr/>
           <p:nvPr/>
         </p:nvSpPr>
@@ -5887,7 +5982,7 @@
       </p:sp>
       <p:pic>
         <p:nvPicPr>
-          <p:cNvPr id="6" name="Image 0" descr="preencoded.png">    </p:cNvPr>
+          <p:cNvPr id="7" name="Image 0" descr="preencoded.png">    </p:cNvPr>
           <p:cNvPicPr>
             <a:picLocks noChangeAspect="1"/>
           </p:cNvPicPr>
@@ -5901,7 +5996,7 @@
         </p:blipFill>
         <p:spPr>
           <a:xfrm>
-            <a:off x="566928" y="6254496"/>
+            <a:off x="566928" y="6126480"/>
             <a:ext cx="1481328" cy="457200"/>
           </a:xfrm>
           <a:prstGeom prst="rect">
@@ -5911,7 +6006,7 @@
       </p:pic>
       <p:sp>
         <p:nvSpPr>
-          <p:cNvPr id="7" name="Shape 4"/>
+          <p:cNvPr id="8" name="Shape 5"/>
           <p:cNvSpPr/>
           <p:nvPr/>
         </p:nvSpPr>
@@ -5933,7 +6028,7 @@
       </p:sp>
       <p:sp>
         <p:nvSpPr>
-          <p:cNvPr id="8" name="Text 5"/>
+          <p:cNvPr id="9" name="Text 6"/>
           <p:cNvSpPr/>
           <p:nvPr/>
         </p:nvSpPr>
@@ -5972,7 +6067,7 @@
       </p:sp>
       <p:sp>
         <p:nvSpPr>
-          <p:cNvPr id="9" name="Shape 6"/>
+          <p:cNvPr id="10" name="Shape 7"/>
           <p:cNvSpPr/>
           <p:nvPr/>
         </p:nvSpPr>
@@ -5995,7 +6090,7 @@
       </p:sp>
       <p:sp>
         <p:nvSpPr>
-          <p:cNvPr id="10" name="Shape 7"/>
+          <p:cNvPr id="11" name="Shape 8"/>
           <p:cNvSpPr/>
           <p:nvPr/>
         </p:nvSpPr>
@@ -6015,7 +6110,7 @@
       </p:sp>
       <p:sp>
         <p:nvSpPr>
-          <p:cNvPr id="11" name="Shape 8"/>
+          <p:cNvPr id="12" name="Shape 9"/>
           <p:cNvSpPr/>
           <p:nvPr/>
         </p:nvSpPr>
@@ -6042,7 +6137,7 @@
       </p:sp>
       <p:sp>
         <p:nvSpPr>
-          <p:cNvPr id="12" name="Text 9"/>
+          <p:cNvPr id="13" name="Text 10"/>
           <p:cNvSpPr/>
           <p:nvPr/>
         </p:nvSpPr>
@@ -6081,7 +6176,7 @@
       </p:sp>
       <p:sp>
         <p:nvSpPr>
-          <p:cNvPr id="13" name="Shape 10"/>
+          <p:cNvPr id="14" name="Shape 11"/>
           <p:cNvSpPr/>
           <p:nvPr/>
         </p:nvSpPr>
@@ -6104,7 +6199,7 @@
       </p:sp>
       <p:sp>
         <p:nvSpPr>
-          <p:cNvPr id="14" name="Shape 11"/>
+          <p:cNvPr id="15" name="Shape 12"/>
           <p:cNvSpPr/>
           <p:nvPr/>
         </p:nvSpPr>
@@ -6124,7 +6219,7 @@
       </p:sp>
       <p:sp>
         <p:nvSpPr>
-          <p:cNvPr id="15" name="Shape 12"/>
+          <p:cNvPr id="16" name="Shape 13"/>
           <p:cNvSpPr/>
           <p:nvPr/>
         </p:nvSpPr>
@@ -6151,7 +6246,7 @@
       </p:sp>
       <p:sp>
         <p:nvSpPr>
-          <p:cNvPr id="16" name="Text 13"/>
+          <p:cNvPr id="17" name="Text 14"/>
           <p:cNvSpPr/>
           <p:nvPr/>
         </p:nvSpPr>
@@ -6190,7 +6285,7 @@
       </p:sp>
       <p:sp>
         <p:nvSpPr>
-          <p:cNvPr id="17" name="Shape 14"/>
+          <p:cNvPr id="18" name="Shape 15"/>
           <p:cNvSpPr/>
           <p:nvPr/>
         </p:nvSpPr>
@@ -6213,7 +6308,7 @@
       </p:sp>
       <p:sp>
         <p:nvSpPr>
-          <p:cNvPr id="18" name="Shape 15"/>
+          <p:cNvPr id="19" name="Shape 16"/>
           <p:cNvSpPr/>
           <p:nvPr/>
         </p:nvSpPr>
@@ -6233,7 +6328,7 @@
       </p:sp>
       <p:sp>
         <p:nvSpPr>
-          <p:cNvPr id="19" name="Shape 16"/>
+          <p:cNvPr id="20" name="Shape 17"/>
           <p:cNvSpPr/>
           <p:nvPr/>
         </p:nvSpPr>
@@ -6260,7 +6355,7 @@
       </p:sp>
       <p:sp>
         <p:nvSpPr>
-          <p:cNvPr id="20" name="Text 17"/>
+          <p:cNvPr id="21" name="Text 18"/>
           <p:cNvSpPr/>
           <p:nvPr/>
         </p:nvSpPr>
@@ -6299,7 +6394,7 @@
       </p:sp>
       <p:sp>
         <p:nvSpPr>
-          <p:cNvPr id="21" name="Shape 18"/>
+          <p:cNvPr id="22" name="Shape 19"/>
           <p:cNvSpPr/>
           <p:nvPr/>
         </p:nvSpPr>
@@ -6322,7 +6417,7 @@
       </p:sp>
       <p:sp>
         <p:nvSpPr>
-          <p:cNvPr id="22" name="Shape 19"/>
+          <p:cNvPr id="23" name="Shape 20"/>
           <p:cNvSpPr/>
           <p:nvPr/>
         </p:nvSpPr>
@@ -6342,7 +6437,7 @@
       </p:sp>
       <p:sp>
         <p:nvSpPr>
-          <p:cNvPr id="23" name="Shape 20"/>
+          <p:cNvPr id="24" name="Shape 21"/>
           <p:cNvSpPr/>
           <p:nvPr/>
         </p:nvSpPr>
@@ -6364,7 +6459,7 @@
       </p:sp>
       <p:sp>
         <p:nvSpPr>
-          <p:cNvPr id="24" name="Text 21"/>
+          <p:cNvPr id="25" name="Text 22"/>
           <p:cNvSpPr/>
           <p:nvPr/>
         </p:nvSpPr>
@@ -6403,7 +6498,7 @@
       </p:sp>
       <p:sp>
         <p:nvSpPr>
-          <p:cNvPr id="25" name="Text 22"/>
+          <p:cNvPr id="26" name="Text 23"/>
           <p:cNvSpPr/>
           <p:nvPr/>
         </p:nvSpPr>
@@ -6442,7 +6537,7 @@
       </p:sp>
       <p:sp>
         <p:nvSpPr>
-          <p:cNvPr id="26" name="Shape 23"/>
+          <p:cNvPr id="27" name="Shape 24"/>
           <p:cNvSpPr/>
           <p:nvPr/>
         </p:nvSpPr>
@@ -6469,7 +6564,7 @@
       </p:sp>
       <p:sp>
         <p:nvSpPr>
-          <p:cNvPr id="27" name="Text 24"/>
+          <p:cNvPr id="28" name="Text 25"/>
           <p:cNvSpPr/>
           <p:nvPr/>
         </p:nvSpPr>
@@ -6508,7 +6603,7 @@
       </p:sp>
       <p:sp>
         <p:nvSpPr>
-          <p:cNvPr id="28" name="Text 25"/>
+          <p:cNvPr id="29" name="Text 26"/>
           <p:cNvSpPr/>
           <p:nvPr/>
         </p:nvSpPr>
@@ -6550,7 +6645,7 @@
       </p:sp>
       <p:sp>
         <p:nvSpPr>
-          <p:cNvPr id="29" name="Shape 26"/>
+          <p:cNvPr id="30" name="Shape 27"/>
           <p:cNvSpPr/>
           <p:nvPr/>
         </p:nvSpPr>
@@ -6572,7 +6667,7 @@
       </p:sp>
       <p:sp>
         <p:nvSpPr>
-          <p:cNvPr id="30" name="Text 27"/>
+          <p:cNvPr id="31" name="Text 28"/>
           <p:cNvSpPr/>
           <p:nvPr/>
         </p:nvSpPr>
@@ -6611,7 +6706,7 @@
       </p:sp>
       <p:sp>
         <p:nvSpPr>
-          <p:cNvPr id="31" name="Text 28"/>
+          <p:cNvPr id="32" name="Text 29"/>
           <p:cNvSpPr/>
           <p:nvPr/>
         </p:nvSpPr>
@@ -6653,7 +6748,7 @@
       </p:sp>
       <p:sp>
         <p:nvSpPr>
-          <p:cNvPr id="32" name="Shape 29"/>
+          <p:cNvPr id="33" name="Shape 30"/>
           <p:cNvSpPr/>
           <p:nvPr/>
         </p:nvSpPr>
@@ -6680,7 +6775,7 @@
       </p:sp>
       <p:sp>
         <p:nvSpPr>
-          <p:cNvPr id="33" name="Text 30"/>
+          <p:cNvPr id="34" name="Text 31"/>
           <p:cNvSpPr/>
           <p:nvPr/>
         </p:nvSpPr>
@@ -6732,7 +6827,7 @@
         </p:nvSpPr>
         <p:spPr>
           <a:xfrm>
-            <a:off x="11368735" y="6437376"/>
+            <a:off x="11368735" y="6327648"/>
             <a:ext cx="365760" cy="274320"/>
           </a:xfrm>
           <a:prstGeom prst="rect">
@@ -6779,13 +6874,6 @@
 <file path=ppt/slides/slide13.xml><?xml version="1.0" encoding="utf-8"?>
 <p:sld xmlns:a="http://schemas.openxmlformats.org/drawingml/2006/main" xmlns:r="http://schemas.openxmlformats.org/officeDocument/2006/relationships" xmlns:p="http://schemas.openxmlformats.org/presentationml/2006/main">
   <p:cSld name="Slide 13">
-    <p:bg>
-      <p:bgPr>
-        <a:solidFill>
-          <a:srgbClr val="FFFFFF"/>
-        </a:solidFill>
-      </p:bgPr>
-    </p:bg>
     <p:spTree>
       <p:nvGrpSpPr>
         <p:cNvPr id="1" name=""/>
@@ -6802,7 +6890,29 @@
       </p:grpSpPr>
       <p:sp>
         <p:nvSpPr>
-          <p:cNvPr id="2" name="Text 0"/>
+          <p:cNvPr id="2" name="Shape 0"/>
+          <p:cNvSpPr/>
+          <p:nvPr/>
+        </p:nvSpPr>
+        <p:spPr>
+          <a:xfrm>
+            <a:off x="231343" y="194767"/>
+            <a:ext cx="11716207" cy="6473952"/>
+          </a:xfrm>
+          <a:prstGeom prst="roundRect">
+            <a:avLst>
+              <a:gd name="adj" fmla="val 3107"/>
+            </a:avLst>
+          </a:prstGeom>
+          <a:solidFill>
+            <a:srgbClr val="FFFFFF"/>
+          </a:solidFill>
+          <a:ln/>
+        </p:spPr>
+      </p:sp>
+      <p:sp>
+        <p:nvSpPr>
+          <p:cNvPr id="3" name="Text 1"/>
           <p:cNvSpPr/>
           <p:nvPr/>
         </p:nvSpPr>
@@ -6841,7 +6951,7 @@
       </p:sp>
       <p:sp>
         <p:nvSpPr>
-          <p:cNvPr id="3" name="Text 1"/>
+          <p:cNvPr id="4" name="Text 2"/>
           <p:cNvSpPr/>
           <p:nvPr/>
         </p:nvSpPr>
@@ -6880,7 +6990,7 @@
       </p:sp>
       <p:sp>
         <p:nvSpPr>
-          <p:cNvPr id="4" name="Shape 2"/>
+          <p:cNvPr id="5" name="Shape 3"/>
           <p:cNvSpPr/>
           <p:nvPr/>
         </p:nvSpPr>
@@ -6902,7 +7012,7 @@
       </p:sp>
       <p:sp>
         <p:nvSpPr>
-          <p:cNvPr id="5" name="Text 3"/>
+          <p:cNvPr id="6" name="Text 4"/>
           <p:cNvSpPr/>
           <p:nvPr/>
         </p:nvSpPr>
@@ -6941,7 +7051,7 @@
       </p:sp>
       <p:pic>
         <p:nvPicPr>
-          <p:cNvPr id="6" name="Image 0" descr="preencoded.png">    </p:cNvPr>
+          <p:cNvPr id="7" name="Image 0" descr="preencoded.png">    </p:cNvPr>
           <p:cNvPicPr>
             <a:picLocks noChangeAspect="1"/>
           </p:cNvPicPr>
@@ -6955,7 +7065,7 @@
         </p:blipFill>
         <p:spPr>
           <a:xfrm>
-            <a:off x="566928" y="6254496"/>
+            <a:off x="566928" y="6126480"/>
             <a:ext cx="1481328" cy="457200"/>
           </a:xfrm>
           <a:prstGeom prst="rect">
@@ -6965,7 +7075,7 @@
       </p:pic>
       <p:sp>
         <p:nvSpPr>
-          <p:cNvPr id="7" name="Shape 4"/>
+          <p:cNvPr id="8" name="Shape 5"/>
           <p:cNvSpPr/>
           <p:nvPr/>
         </p:nvSpPr>
@@ -6987,7 +7097,7 @@
       </p:sp>
       <p:sp>
         <p:nvSpPr>
-          <p:cNvPr id="8" name="Text 5"/>
+          <p:cNvPr id="9" name="Text 6"/>
           <p:cNvSpPr/>
           <p:nvPr/>
         </p:nvSpPr>
@@ -7026,7 +7136,7 @@
       </p:sp>
       <p:sp>
         <p:nvSpPr>
-          <p:cNvPr id="9" name="Text 6"/>
+          <p:cNvPr id="10" name="Text 7"/>
           <p:cNvSpPr/>
           <p:nvPr/>
         </p:nvSpPr>
@@ -7065,7 +7175,7 @@
       </p:sp>
       <p:sp>
         <p:nvSpPr>
-          <p:cNvPr id="10" name="Shape 7"/>
+          <p:cNvPr id="11" name="Shape 8"/>
           <p:cNvSpPr/>
           <p:nvPr/>
         </p:nvSpPr>
@@ -7092,7 +7202,7 @@
       </p:sp>
       <p:sp>
         <p:nvSpPr>
-          <p:cNvPr id="11" name="Text 8"/>
+          <p:cNvPr id="12" name="Text 9"/>
           <p:cNvSpPr/>
           <p:nvPr/>
         </p:nvSpPr>
@@ -7131,7 +7241,7 @@
       </p:sp>
       <p:sp>
         <p:nvSpPr>
-          <p:cNvPr id="12" name="Text 9"/>
+          <p:cNvPr id="13" name="Text 10"/>
           <p:cNvSpPr/>
           <p:nvPr/>
         </p:nvSpPr>
@@ -7173,7 +7283,7 @@
       </p:sp>
       <p:sp>
         <p:nvSpPr>
-          <p:cNvPr id="13" name="Shape 10"/>
+          <p:cNvPr id="14" name="Shape 11"/>
           <p:cNvSpPr/>
           <p:nvPr/>
         </p:nvSpPr>
@@ -7195,7 +7305,7 @@
       </p:sp>
       <p:sp>
         <p:nvSpPr>
-          <p:cNvPr id="14" name="Shape 11"/>
+          <p:cNvPr id="15" name="Shape 12"/>
           <p:cNvSpPr/>
           <p:nvPr/>
         </p:nvSpPr>
@@ -7215,7 +7325,7 @@
       </p:sp>
       <p:sp>
         <p:nvSpPr>
-          <p:cNvPr id="15" name="Shape 12"/>
+          <p:cNvPr id="16" name="Shape 13"/>
           <p:cNvSpPr/>
           <p:nvPr/>
         </p:nvSpPr>
@@ -7235,7 +7345,7 @@
       </p:sp>
       <p:sp>
         <p:nvSpPr>
-          <p:cNvPr id="16" name="Shape 13"/>
+          <p:cNvPr id="17" name="Shape 14"/>
           <p:cNvSpPr/>
           <p:nvPr/>
         </p:nvSpPr>
@@ -7257,7 +7367,7 @@
       </p:sp>
       <p:sp>
         <p:nvSpPr>
-          <p:cNvPr id="17" name="Shape 14"/>
+          <p:cNvPr id="18" name="Shape 15"/>
           <p:cNvSpPr/>
           <p:nvPr/>
         </p:nvSpPr>
@@ -7277,7 +7387,7 @@
       </p:sp>
       <p:sp>
         <p:nvSpPr>
-          <p:cNvPr id="18" name="Shape 15"/>
+          <p:cNvPr id="19" name="Shape 16"/>
           <p:cNvSpPr/>
           <p:nvPr/>
         </p:nvSpPr>
@@ -7297,7 +7407,7 @@
       </p:sp>
       <p:sp>
         <p:nvSpPr>
-          <p:cNvPr id="19" name="Shape 16"/>
+          <p:cNvPr id="20" name="Shape 17"/>
           <p:cNvSpPr/>
           <p:nvPr/>
         </p:nvSpPr>
@@ -7319,7 +7429,7 @@
       </p:sp>
       <p:sp>
         <p:nvSpPr>
-          <p:cNvPr id="20" name="Shape 17"/>
+          <p:cNvPr id="21" name="Shape 18"/>
           <p:cNvSpPr/>
           <p:nvPr/>
         </p:nvSpPr>
@@ -7339,7 +7449,7 @@
       </p:sp>
       <p:sp>
         <p:nvSpPr>
-          <p:cNvPr id="21" name="Shape 18"/>
+          <p:cNvPr id="22" name="Shape 19"/>
           <p:cNvSpPr/>
           <p:nvPr/>
         </p:nvSpPr>
@@ -7359,7 +7469,7 @@
       </p:sp>
       <p:sp>
         <p:nvSpPr>
-          <p:cNvPr id="22" name="Shape 19"/>
+          <p:cNvPr id="23" name="Shape 20"/>
           <p:cNvSpPr/>
           <p:nvPr/>
         </p:nvSpPr>
@@ -7381,7 +7491,7 @@
       </p:sp>
       <p:sp>
         <p:nvSpPr>
-          <p:cNvPr id="23" name="Shape 20"/>
+          <p:cNvPr id="24" name="Shape 21"/>
           <p:cNvSpPr/>
           <p:nvPr/>
         </p:nvSpPr>
@@ -7401,7 +7511,7 @@
       </p:sp>
       <p:sp>
         <p:nvSpPr>
-          <p:cNvPr id="24" name="Shape 21"/>
+          <p:cNvPr id="25" name="Shape 22"/>
           <p:cNvSpPr/>
           <p:nvPr/>
         </p:nvSpPr>
@@ -7421,7 +7531,7 @@
       </p:sp>
       <p:sp>
         <p:nvSpPr>
-          <p:cNvPr id="25" name="Shape 22"/>
+          <p:cNvPr id="26" name="Shape 23"/>
           <p:cNvSpPr/>
           <p:nvPr/>
         </p:nvSpPr>
@@ -7443,7 +7553,7 @@
       </p:sp>
       <p:sp>
         <p:nvSpPr>
-          <p:cNvPr id="26" name="Shape 23"/>
+          <p:cNvPr id="27" name="Shape 24"/>
           <p:cNvSpPr/>
           <p:nvPr/>
         </p:nvSpPr>
@@ -7463,7 +7573,7 @@
       </p:sp>
       <p:sp>
         <p:nvSpPr>
-          <p:cNvPr id="27" name="Shape 24"/>
+          <p:cNvPr id="28" name="Shape 25"/>
           <p:cNvSpPr/>
           <p:nvPr/>
         </p:nvSpPr>
@@ -7483,7 +7593,7 @@
       </p:sp>
       <p:sp>
         <p:nvSpPr>
-          <p:cNvPr id="28" name="Shape 25"/>
+          <p:cNvPr id="29" name="Shape 26"/>
           <p:cNvSpPr/>
           <p:nvPr/>
         </p:nvSpPr>
@@ -7505,7 +7615,7 @@
       </p:sp>
       <p:sp>
         <p:nvSpPr>
-          <p:cNvPr id="29" name="Shape 26"/>
+          <p:cNvPr id="30" name="Shape 27"/>
           <p:cNvSpPr/>
           <p:nvPr/>
         </p:nvSpPr>
@@ -7525,7 +7635,7 @@
       </p:sp>
       <p:sp>
         <p:nvSpPr>
-          <p:cNvPr id="30" name="Shape 27"/>
+          <p:cNvPr id="31" name="Shape 28"/>
           <p:cNvSpPr/>
           <p:nvPr/>
         </p:nvSpPr>
@@ -7545,7 +7655,7 @@
       </p:sp>
       <p:sp>
         <p:nvSpPr>
-          <p:cNvPr id="31" name="Text 28"/>
+          <p:cNvPr id="32" name="Text 29"/>
           <p:cNvSpPr/>
           <p:nvPr/>
         </p:nvSpPr>
@@ -7598,7 +7708,7 @@
       </p:sp>
       <p:sp>
         <p:nvSpPr>
-          <p:cNvPr id="32" name="Shape 29"/>
+          <p:cNvPr id="33" name="Shape 30"/>
           <p:cNvSpPr/>
           <p:nvPr/>
         </p:nvSpPr>
@@ -7620,7 +7730,7 @@
       </p:sp>
       <p:sp>
         <p:nvSpPr>
-          <p:cNvPr id="33" name="Text 30"/>
+          <p:cNvPr id="34" name="Text 31"/>
           <p:cNvSpPr/>
           <p:nvPr/>
         </p:nvSpPr>
@@ -7659,7 +7769,7 @@
       </p:sp>
       <p:sp>
         <p:nvSpPr>
-          <p:cNvPr id="34" name="Text 31"/>
+          <p:cNvPr id="35" name="Text 32"/>
           <p:cNvSpPr/>
           <p:nvPr/>
         </p:nvSpPr>
@@ -7698,7 +7808,7 @@
       </p:sp>
       <p:sp>
         <p:nvSpPr>
-          <p:cNvPr id="35" name="Shape 32"/>
+          <p:cNvPr id="36" name="Shape 33"/>
           <p:cNvSpPr/>
           <p:nvPr/>
         </p:nvSpPr>
@@ -7720,7 +7830,7 @@
       </p:sp>
       <p:sp>
         <p:nvSpPr>
-          <p:cNvPr id="36" name="Text 33"/>
+          <p:cNvPr id="37" name="Text 34"/>
           <p:cNvSpPr/>
           <p:nvPr/>
         </p:nvSpPr>
@@ -7759,7 +7869,7 @@
       </p:sp>
       <p:sp>
         <p:nvSpPr>
-          <p:cNvPr id="37" name="Text 34"/>
+          <p:cNvPr id="38" name="Text 35"/>
           <p:cNvSpPr/>
           <p:nvPr/>
         </p:nvSpPr>
@@ -7798,7 +7908,7 @@
       </p:sp>
       <p:sp>
         <p:nvSpPr>
-          <p:cNvPr id="38" name="Shape 35"/>
+          <p:cNvPr id="39" name="Shape 36"/>
           <p:cNvSpPr/>
           <p:nvPr/>
         </p:nvSpPr>
@@ -7820,7 +7930,7 @@
       </p:sp>
       <p:sp>
         <p:nvSpPr>
-          <p:cNvPr id="39" name="Text 36"/>
+          <p:cNvPr id="40" name="Text 37"/>
           <p:cNvSpPr/>
           <p:nvPr/>
         </p:nvSpPr>
@@ -7872,7 +7982,7 @@
         </p:nvSpPr>
         <p:spPr>
           <a:xfrm>
-            <a:off x="11368735" y="6437376"/>
+            <a:off x="11368735" y="6327648"/>
             <a:ext cx="365760" cy="274320"/>
           </a:xfrm>
           <a:prstGeom prst="rect">
@@ -7919,13 +8029,6 @@
 <file path=ppt/slides/slide14.xml><?xml version="1.0" encoding="utf-8"?>
 <p:sld xmlns:a="http://schemas.openxmlformats.org/drawingml/2006/main" xmlns:r="http://schemas.openxmlformats.org/officeDocument/2006/relationships" xmlns:p="http://schemas.openxmlformats.org/presentationml/2006/main">
   <p:cSld name="Slide 14">
-    <p:bg>
-      <p:bgPr>
-        <a:solidFill>
-          <a:srgbClr val="FFFFFF"/>
-        </a:solidFill>
-      </p:bgPr>
-    </p:bg>
     <p:spTree>
       <p:nvGrpSpPr>
         <p:cNvPr id="1" name=""/>
@@ -7942,7 +8045,29 @@
       </p:grpSpPr>
       <p:sp>
         <p:nvSpPr>
-          <p:cNvPr id="2" name="Text 0"/>
+          <p:cNvPr id="2" name="Shape 0"/>
+          <p:cNvSpPr/>
+          <p:nvPr/>
+        </p:nvSpPr>
+        <p:spPr>
+          <a:xfrm>
+            <a:off x="231343" y="194767"/>
+            <a:ext cx="11716207" cy="6473952"/>
+          </a:xfrm>
+          <a:prstGeom prst="roundRect">
+            <a:avLst>
+              <a:gd name="adj" fmla="val 3107"/>
+            </a:avLst>
+          </a:prstGeom>
+          <a:solidFill>
+            <a:srgbClr val="FFFFFF"/>
+          </a:solidFill>
+          <a:ln/>
+        </p:spPr>
+      </p:sp>
+      <p:sp>
+        <p:nvSpPr>
+          <p:cNvPr id="3" name="Text 1"/>
           <p:cNvSpPr/>
           <p:nvPr/>
         </p:nvSpPr>
@@ -7981,7 +8106,7 @@
       </p:sp>
       <p:sp>
         <p:nvSpPr>
-          <p:cNvPr id="3" name="Text 1"/>
+          <p:cNvPr id="4" name="Text 2"/>
           <p:cNvSpPr/>
           <p:nvPr/>
         </p:nvSpPr>
@@ -8020,7 +8145,7 @@
       </p:sp>
       <p:sp>
         <p:nvSpPr>
-          <p:cNvPr id="4" name="Shape 2"/>
+          <p:cNvPr id="5" name="Shape 3"/>
           <p:cNvSpPr/>
           <p:nvPr/>
         </p:nvSpPr>
@@ -8042,7 +8167,7 @@
       </p:sp>
       <p:sp>
         <p:nvSpPr>
-          <p:cNvPr id="5" name="Text 3"/>
+          <p:cNvPr id="6" name="Text 4"/>
           <p:cNvSpPr/>
           <p:nvPr/>
         </p:nvSpPr>
@@ -8081,7 +8206,7 @@
       </p:sp>
       <p:pic>
         <p:nvPicPr>
-          <p:cNvPr id="6" name="Image 0" descr="preencoded.png">    </p:cNvPr>
+          <p:cNvPr id="7" name="Image 0" descr="preencoded.png">    </p:cNvPr>
           <p:cNvPicPr>
             <a:picLocks noChangeAspect="1"/>
           </p:cNvPicPr>
@@ -8095,7 +8220,7 @@
         </p:blipFill>
         <p:spPr>
           <a:xfrm>
-            <a:off x="566928" y="6254496"/>
+            <a:off x="566928" y="6126480"/>
             <a:ext cx="1481328" cy="457200"/>
           </a:xfrm>
           <a:prstGeom prst="rect">
@@ -8105,7 +8230,7 @@
       </p:pic>
       <p:sp>
         <p:nvSpPr>
-          <p:cNvPr id="7" name="Shape 4"/>
+          <p:cNvPr id="8" name="Shape 5"/>
           <p:cNvSpPr/>
           <p:nvPr/>
         </p:nvSpPr>
@@ -8132,7 +8257,7 @@
       </p:sp>
       <p:sp>
         <p:nvSpPr>
-          <p:cNvPr id="8" name="Text 5"/>
+          <p:cNvPr id="9" name="Text 6"/>
           <p:cNvSpPr/>
           <p:nvPr/>
         </p:nvSpPr>
@@ -8292,7 +8417,7 @@
       </p:sp>
       <p:sp>
         <p:nvSpPr>
-          <p:cNvPr id="9" name="Shape 6"/>
+          <p:cNvPr id="10" name="Shape 7"/>
           <p:cNvSpPr/>
           <p:nvPr/>
         </p:nvSpPr>
@@ -8314,7 +8439,7 @@
       </p:sp>
       <p:sp>
         <p:nvSpPr>
-          <p:cNvPr id="10" name="Text 7"/>
+          <p:cNvPr id="11" name="Text 8"/>
           <p:cNvSpPr/>
           <p:nvPr/>
         </p:nvSpPr>
@@ -8353,7 +8478,7 @@
       </p:sp>
       <p:sp>
         <p:nvSpPr>
-          <p:cNvPr id="11" name="Text 8"/>
+          <p:cNvPr id="12" name="Text 9"/>
           <p:cNvSpPr/>
           <p:nvPr/>
         </p:nvSpPr>
@@ -8395,7 +8520,7 @@
       </p:sp>
       <p:sp>
         <p:nvSpPr>
-          <p:cNvPr id="12" name="Shape 9"/>
+          <p:cNvPr id="13" name="Shape 10"/>
           <p:cNvSpPr/>
           <p:nvPr/>
         </p:nvSpPr>
@@ -8417,7 +8542,7 @@
       </p:sp>
       <p:sp>
         <p:nvSpPr>
-          <p:cNvPr id="13" name="Text 10"/>
+          <p:cNvPr id="14" name="Text 11"/>
           <p:cNvSpPr/>
           <p:nvPr/>
         </p:nvSpPr>
@@ -8456,7 +8581,7 @@
       </p:sp>
       <p:sp>
         <p:nvSpPr>
-          <p:cNvPr id="14" name="Text 11"/>
+          <p:cNvPr id="15" name="Text 12"/>
           <p:cNvSpPr/>
           <p:nvPr/>
         </p:nvSpPr>
@@ -8498,7 +8623,7 @@
       </p:sp>
       <p:sp>
         <p:nvSpPr>
-          <p:cNvPr id="15" name="Shape 12"/>
+          <p:cNvPr id="16" name="Shape 13"/>
           <p:cNvSpPr/>
           <p:nvPr/>
         </p:nvSpPr>
@@ -8520,7 +8645,7 @@
       </p:sp>
       <p:sp>
         <p:nvSpPr>
-          <p:cNvPr id="16" name="Text 13"/>
+          <p:cNvPr id="17" name="Text 14"/>
           <p:cNvSpPr/>
           <p:nvPr/>
         </p:nvSpPr>
@@ -8562,7 +8687,7 @@
       </p:sp>
       <p:sp>
         <p:nvSpPr>
-          <p:cNvPr id="17" name="Text 14"/>
+          <p:cNvPr id="18" name="Text 15"/>
           <p:cNvSpPr/>
           <p:nvPr/>
         </p:nvSpPr>
@@ -8611,7 +8736,7 @@
         </p:nvSpPr>
         <p:spPr>
           <a:xfrm>
-            <a:off x="11368735" y="6437376"/>
+            <a:off x="11368735" y="6327648"/>
             <a:ext cx="365760" cy="274320"/>
           </a:xfrm>
           <a:prstGeom prst="rect">
@@ -8658,13 +8783,6 @@
 <file path=ppt/slides/slide15.xml><?xml version="1.0" encoding="utf-8"?>
 <p:sld xmlns:a="http://schemas.openxmlformats.org/drawingml/2006/main" xmlns:r="http://schemas.openxmlformats.org/officeDocument/2006/relationships" xmlns:p="http://schemas.openxmlformats.org/presentationml/2006/main">
   <p:cSld name="Slide 15">
-    <p:bg>
-      <p:bgPr>
-        <a:solidFill>
-          <a:srgbClr val="FFFFFF"/>
-        </a:solidFill>
-      </p:bgPr>
-    </p:bg>
     <p:spTree>
       <p:nvGrpSpPr>
         <p:cNvPr id="1" name=""/>
@@ -8681,7 +8799,29 @@
       </p:grpSpPr>
       <p:sp>
         <p:nvSpPr>
-          <p:cNvPr id="2" name="Text 0"/>
+          <p:cNvPr id="2" name="Shape 0"/>
+          <p:cNvSpPr/>
+          <p:nvPr/>
+        </p:nvSpPr>
+        <p:spPr>
+          <a:xfrm>
+            <a:off x="231343" y="194767"/>
+            <a:ext cx="11716207" cy="6473952"/>
+          </a:xfrm>
+          <a:prstGeom prst="roundRect">
+            <a:avLst>
+              <a:gd name="adj" fmla="val 3107"/>
+            </a:avLst>
+          </a:prstGeom>
+          <a:solidFill>
+            <a:srgbClr val="FFFFFF"/>
+          </a:solidFill>
+          <a:ln/>
+        </p:spPr>
+      </p:sp>
+      <p:sp>
+        <p:nvSpPr>
+          <p:cNvPr id="3" name="Text 1"/>
           <p:cNvSpPr/>
           <p:nvPr/>
         </p:nvSpPr>
@@ -8720,7 +8860,7 @@
       </p:sp>
       <p:sp>
         <p:nvSpPr>
-          <p:cNvPr id="3" name="Text 1"/>
+          <p:cNvPr id="4" name="Text 2"/>
           <p:cNvSpPr/>
           <p:nvPr/>
         </p:nvSpPr>
@@ -8759,7 +8899,7 @@
       </p:sp>
       <p:sp>
         <p:nvSpPr>
-          <p:cNvPr id="4" name="Shape 2"/>
+          <p:cNvPr id="5" name="Shape 3"/>
           <p:cNvSpPr/>
           <p:nvPr/>
         </p:nvSpPr>
@@ -8781,7 +8921,7 @@
       </p:sp>
       <p:sp>
         <p:nvSpPr>
-          <p:cNvPr id="5" name="Text 3"/>
+          <p:cNvPr id="6" name="Text 4"/>
           <p:cNvSpPr/>
           <p:nvPr/>
         </p:nvSpPr>
@@ -8820,7 +8960,7 @@
       </p:sp>
       <p:sp>
         <p:nvSpPr>
-          <p:cNvPr id="6" name="Shape 4"/>
+          <p:cNvPr id="7" name="Shape 5"/>
           <p:cNvSpPr/>
           <p:nvPr/>
         </p:nvSpPr>
@@ -8842,7 +8982,7 @@
       </p:sp>
       <p:sp>
         <p:nvSpPr>
-          <p:cNvPr id="7" name="Text 5"/>
+          <p:cNvPr id="8" name="Text 6"/>
           <p:cNvSpPr/>
           <p:nvPr/>
         </p:nvSpPr>
@@ -8881,7 +9021,7 @@
       </p:sp>
       <p:pic>
         <p:nvPicPr>
-          <p:cNvPr id="8" name="Image 0" descr="preencoded.png">    </p:cNvPr>
+          <p:cNvPr id="9" name="Image 0" descr="preencoded.png">    </p:cNvPr>
           <p:cNvPicPr>
             <a:picLocks noChangeAspect="1"/>
           </p:cNvPicPr>
@@ -8895,7 +9035,7 @@
         </p:blipFill>
         <p:spPr>
           <a:xfrm>
-            <a:off x="566928" y="6254496"/>
+            <a:off x="566928" y="6126480"/>
             <a:ext cx="1481328" cy="457200"/>
           </a:xfrm>
           <a:prstGeom prst="rect">
@@ -8905,7 +9045,7 @@
       </p:pic>
       <p:sp>
         <p:nvSpPr>
-          <p:cNvPr id="9" name="Shape 6"/>
+          <p:cNvPr id="10" name="Shape 7"/>
           <p:cNvSpPr/>
           <p:nvPr/>
         </p:nvSpPr>
@@ -8927,7 +9067,7 @@
       </p:sp>
       <p:sp>
         <p:nvSpPr>
-          <p:cNvPr id="10" name="Text 7"/>
+          <p:cNvPr id="11" name="Text 8"/>
           <p:cNvSpPr/>
           <p:nvPr/>
         </p:nvSpPr>
@@ -8966,7 +9106,7 @@
       </p:sp>
       <p:sp>
         <p:nvSpPr>
-          <p:cNvPr id="11" name="Text 8"/>
+          <p:cNvPr id="12" name="Text 9"/>
           <p:cNvSpPr/>
           <p:nvPr/>
         </p:nvSpPr>
@@ -9008,7 +9148,7 @@
       </p:sp>
       <p:sp>
         <p:nvSpPr>
-          <p:cNvPr id="12" name="Shape 9"/>
+          <p:cNvPr id="13" name="Shape 10"/>
           <p:cNvSpPr/>
           <p:nvPr/>
         </p:nvSpPr>
@@ -9030,7 +9170,7 @@
       </p:sp>
       <p:sp>
         <p:nvSpPr>
-          <p:cNvPr id="13" name="Text 10"/>
+          <p:cNvPr id="14" name="Text 11"/>
           <p:cNvSpPr/>
           <p:nvPr/>
         </p:nvSpPr>
@@ -9069,7 +9209,7 @@
       </p:sp>
       <p:sp>
         <p:nvSpPr>
-          <p:cNvPr id="14" name="Text 11"/>
+          <p:cNvPr id="15" name="Text 12"/>
           <p:cNvSpPr/>
           <p:nvPr/>
         </p:nvSpPr>
@@ -9111,7 +9251,7 @@
       </p:sp>
       <p:sp>
         <p:nvSpPr>
-          <p:cNvPr id="15" name="Shape 12"/>
+          <p:cNvPr id="16" name="Shape 13"/>
           <p:cNvSpPr/>
           <p:nvPr/>
         </p:nvSpPr>
@@ -9133,7 +9273,7 @@
       </p:sp>
       <p:sp>
         <p:nvSpPr>
-          <p:cNvPr id="16" name="Text 13"/>
+          <p:cNvPr id="17" name="Text 14"/>
           <p:cNvSpPr/>
           <p:nvPr/>
         </p:nvSpPr>
@@ -9172,7 +9312,7 @@
       </p:sp>
       <p:sp>
         <p:nvSpPr>
-          <p:cNvPr id="17" name="Text 14"/>
+          <p:cNvPr id="18" name="Text 15"/>
           <p:cNvSpPr/>
           <p:nvPr/>
         </p:nvSpPr>
@@ -9214,7 +9354,7 @@
       </p:sp>
       <p:sp>
         <p:nvSpPr>
-          <p:cNvPr id="18" name="Shape 15"/>
+          <p:cNvPr id="19" name="Shape 16"/>
           <p:cNvSpPr/>
           <p:nvPr/>
         </p:nvSpPr>
@@ -9241,7 +9381,7 @@
       </p:sp>
       <p:sp>
         <p:nvSpPr>
-          <p:cNvPr id="19" name="Text 16"/>
+          <p:cNvPr id="20" name="Text 17"/>
           <p:cNvSpPr/>
           <p:nvPr/>
         </p:nvSpPr>
@@ -9293,7 +9433,7 @@
         </p:nvSpPr>
         <p:spPr>
           <a:xfrm>
-            <a:off x="11368735" y="6437376"/>
+            <a:off x="11368735" y="6327648"/>
             <a:ext cx="365760" cy="274320"/>
           </a:xfrm>
           <a:prstGeom prst="rect">
@@ -9340,13 +9480,6 @@
 <file path=ppt/slides/slide16.xml><?xml version="1.0" encoding="utf-8"?>
 <p:sld xmlns:a="http://schemas.openxmlformats.org/drawingml/2006/main" xmlns:r="http://schemas.openxmlformats.org/officeDocument/2006/relationships" xmlns:p="http://schemas.openxmlformats.org/presentationml/2006/main">
   <p:cSld name="Slide 16">
-    <p:bg>
-      <p:bgPr>
-        <a:solidFill>
-          <a:srgbClr val="FFFFFF"/>
-        </a:solidFill>
-      </p:bgPr>
-    </p:bg>
     <p:spTree>
       <p:nvGrpSpPr>
         <p:cNvPr id="1" name=""/>
@@ -9363,7 +9496,29 @@
       </p:grpSpPr>
       <p:sp>
         <p:nvSpPr>
-          <p:cNvPr id="2" name="Text 0"/>
+          <p:cNvPr id="2" name="Shape 0"/>
+          <p:cNvSpPr/>
+          <p:nvPr/>
+        </p:nvSpPr>
+        <p:spPr>
+          <a:xfrm>
+            <a:off x="231343" y="194767"/>
+            <a:ext cx="11716207" cy="6473952"/>
+          </a:xfrm>
+          <a:prstGeom prst="roundRect">
+            <a:avLst>
+              <a:gd name="adj" fmla="val 3107"/>
+            </a:avLst>
+          </a:prstGeom>
+          <a:solidFill>
+            <a:srgbClr val="FFFFFF"/>
+          </a:solidFill>
+          <a:ln/>
+        </p:spPr>
+      </p:sp>
+      <p:sp>
+        <p:nvSpPr>
+          <p:cNvPr id="3" name="Text 1"/>
           <p:cNvSpPr/>
           <p:nvPr/>
         </p:nvSpPr>
@@ -9402,7 +9557,7 @@
       </p:sp>
       <p:sp>
         <p:nvSpPr>
-          <p:cNvPr id="3" name="Text 1"/>
+          <p:cNvPr id="4" name="Text 2"/>
           <p:cNvSpPr/>
           <p:nvPr/>
         </p:nvSpPr>
@@ -9441,7 +9596,7 @@
       </p:sp>
       <p:sp>
         <p:nvSpPr>
-          <p:cNvPr id="4" name="Shape 2"/>
+          <p:cNvPr id="5" name="Shape 3"/>
           <p:cNvSpPr/>
           <p:nvPr/>
         </p:nvSpPr>
@@ -9463,7 +9618,7 @@
       </p:sp>
       <p:sp>
         <p:nvSpPr>
-          <p:cNvPr id="5" name="Text 3"/>
+          <p:cNvPr id="6" name="Text 4"/>
           <p:cNvSpPr/>
           <p:nvPr/>
         </p:nvSpPr>
@@ -9502,7 +9657,7 @@
       </p:sp>
       <p:pic>
         <p:nvPicPr>
-          <p:cNvPr id="6" name="Image 0" descr="preencoded.png">    </p:cNvPr>
+          <p:cNvPr id="7" name="Image 0" descr="preencoded.png">    </p:cNvPr>
           <p:cNvPicPr>
             <a:picLocks noChangeAspect="1"/>
           </p:cNvPicPr>
@@ -9516,7 +9671,7 @@
         </p:blipFill>
         <p:spPr>
           <a:xfrm>
-            <a:off x="566928" y="6254496"/>
+            <a:off x="566928" y="6126480"/>
             <a:ext cx="1481328" cy="457200"/>
           </a:xfrm>
           <a:prstGeom prst="rect">
@@ -9526,7 +9681,7 @@
       </p:pic>
       <p:sp>
         <p:nvSpPr>
-          <p:cNvPr id="7" name="Shape 4"/>
+          <p:cNvPr id="8" name="Shape 5"/>
           <p:cNvSpPr/>
           <p:nvPr/>
         </p:nvSpPr>
@@ -9548,7 +9703,7 @@
       </p:sp>
       <p:sp>
         <p:nvSpPr>
-          <p:cNvPr id="8" name="Text 5"/>
+          <p:cNvPr id="9" name="Text 6"/>
           <p:cNvSpPr/>
           <p:nvPr/>
         </p:nvSpPr>
@@ -9587,7 +9742,7 @@
       </p:sp>
       <p:sp>
         <p:nvSpPr>
-          <p:cNvPr id="9" name="Shape 6"/>
+          <p:cNvPr id="10" name="Shape 7"/>
           <p:cNvSpPr/>
           <p:nvPr/>
         </p:nvSpPr>
@@ -9610,7 +9765,7 @@
       </p:sp>
       <p:sp>
         <p:nvSpPr>
-          <p:cNvPr id="10" name="Shape 7"/>
+          <p:cNvPr id="11" name="Shape 8"/>
           <p:cNvSpPr/>
           <p:nvPr/>
         </p:nvSpPr>
@@ -9630,7 +9785,7 @@
       </p:sp>
       <p:sp>
         <p:nvSpPr>
-          <p:cNvPr id="11" name="Shape 8"/>
+          <p:cNvPr id="12" name="Shape 9"/>
           <p:cNvSpPr/>
           <p:nvPr/>
         </p:nvSpPr>
@@ -9657,7 +9812,7 @@
       </p:sp>
       <p:sp>
         <p:nvSpPr>
-          <p:cNvPr id="12" name="Text 9"/>
+          <p:cNvPr id="13" name="Text 10"/>
           <p:cNvSpPr/>
           <p:nvPr/>
         </p:nvSpPr>
@@ -9696,7 +9851,7 @@
       </p:sp>
       <p:sp>
         <p:nvSpPr>
-          <p:cNvPr id="13" name="Shape 10"/>
+          <p:cNvPr id="14" name="Shape 11"/>
           <p:cNvSpPr/>
           <p:nvPr/>
         </p:nvSpPr>
@@ -9719,7 +9874,7 @@
       </p:sp>
       <p:sp>
         <p:nvSpPr>
-          <p:cNvPr id="14" name="Shape 11"/>
+          <p:cNvPr id="15" name="Shape 12"/>
           <p:cNvSpPr/>
           <p:nvPr/>
         </p:nvSpPr>
@@ -9739,7 +9894,7 @@
       </p:sp>
       <p:sp>
         <p:nvSpPr>
-          <p:cNvPr id="15" name="Shape 12"/>
+          <p:cNvPr id="16" name="Shape 13"/>
           <p:cNvSpPr/>
           <p:nvPr/>
         </p:nvSpPr>
@@ -9761,7 +9916,7 @@
       </p:sp>
       <p:sp>
         <p:nvSpPr>
-          <p:cNvPr id="16" name="Text 13"/>
+          <p:cNvPr id="17" name="Text 14"/>
           <p:cNvSpPr/>
           <p:nvPr/>
         </p:nvSpPr>
@@ -9800,7 +9955,7 @@
       </p:sp>
       <p:sp>
         <p:nvSpPr>
-          <p:cNvPr id="17" name="Shape 14"/>
+          <p:cNvPr id="18" name="Shape 15"/>
           <p:cNvSpPr/>
           <p:nvPr/>
         </p:nvSpPr>
@@ -9823,7 +9978,7 @@
       </p:sp>
       <p:sp>
         <p:nvSpPr>
-          <p:cNvPr id="18" name="Shape 15"/>
+          <p:cNvPr id="19" name="Shape 16"/>
           <p:cNvSpPr/>
           <p:nvPr/>
         </p:nvSpPr>
@@ -9843,7 +9998,7 @@
       </p:sp>
       <p:sp>
         <p:nvSpPr>
-          <p:cNvPr id="19" name="Shape 16"/>
+          <p:cNvPr id="20" name="Shape 17"/>
           <p:cNvSpPr/>
           <p:nvPr/>
         </p:nvSpPr>
@@ -9865,7 +10020,7 @@
       </p:sp>
       <p:sp>
         <p:nvSpPr>
-          <p:cNvPr id="20" name="Text 17"/>
+          <p:cNvPr id="21" name="Text 18"/>
           <p:cNvSpPr/>
           <p:nvPr/>
         </p:nvSpPr>
@@ -9904,7 +10059,7 @@
       </p:sp>
       <p:sp>
         <p:nvSpPr>
-          <p:cNvPr id="21" name="Shape 18"/>
+          <p:cNvPr id="22" name="Shape 19"/>
           <p:cNvSpPr/>
           <p:nvPr/>
         </p:nvSpPr>
@@ -9926,7 +10081,7 @@
       </p:sp>
       <p:sp>
         <p:nvSpPr>
-          <p:cNvPr id="22" name="Text 19"/>
+          <p:cNvPr id="23" name="Text 20"/>
           <p:cNvSpPr/>
           <p:nvPr/>
         </p:nvSpPr>
@@ -9965,7 +10120,7 @@
       </p:sp>
       <p:sp>
         <p:nvSpPr>
-          <p:cNvPr id="23" name="Text 20"/>
+          <p:cNvPr id="24" name="Text 21"/>
           <p:cNvSpPr/>
           <p:nvPr/>
         </p:nvSpPr>
@@ -10007,7 +10162,7 @@
       </p:sp>
       <p:sp>
         <p:nvSpPr>
-          <p:cNvPr id="24" name="Shape 21"/>
+          <p:cNvPr id="25" name="Shape 22"/>
           <p:cNvSpPr/>
           <p:nvPr/>
         </p:nvSpPr>
@@ -10029,7 +10184,7 @@
       </p:sp>
       <p:sp>
         <p:nvSpPr>
-          <p:cNvPr id="25" name="Text 22"/>
+          <p:cNvPr id="26" name="Text 23"/>
           <p:cNvSpPr/>
           <p:nvPr/>
         </p:nvSpPr>
@@ -10081,7 +10236,7 @@
         </p:nvSpPr>
         <p:spPr>
           <a:xfrm>
-            <a:off x="11368735" y="6437376"/>
+            <a:off x="11368735" y="6327648"/>
             <a:ext cx="365760" cy="274320"/>
           </a:xfrm>
           <a:prstGeom prst="rect">
@@ -10128,13 +10283,6 @@
 <file path=ppt/slides/slide17.xml><?xml version="1.0" encoding="utf-8"?>
 <p:sld xmlns:a="http://schemas.openxmlformats.org/drawingml/2006/main" xmlns:r="http://schemas.openxmlformats.org/officeDocument/2006/relationships" xmlns:p="http://schemas.openxmlformats.org/presentationml/2006/main">
   <p:cSld name="Slide 17">
-    <p:bg>
-      <p:bgPr>
-        <a:solidFill>
-          <a:srgbClr val="FFFFFF"/>
-        </a:solidFill>
-      </p:bgPr>
-    </p:bg>
     <p:spTree>
       <p:nvGrpSpPr>
         <p:cNvPr id="1" name=""/>
@@ -10151,7 +10299,29 @@
       </p:grpSpPr>
       <p:sp>
         <p:nvSpPr>
-          <p:cNvPr id="2" name="Text 0"/>
+          <p:cNvPr id="2" name="Shape 0"/>
+          <p:cNvSpPr/>
+          <p:nvPr/>
+        </p:nvSpPr>
+        <p:spPr>
+          <a:xfrm>
+            <a:off x="231343" y="194767"/>
+            <a:ext cx="11716207" cy="6473952"/>
+          </a:xfrm>
+          <a:prstGeom prst="roundRect">
+            <a:avLst>
+              <a:gd name="adj" fmla="val 3107"/>
+            </a:avLst>
+          </a:prstGeom>
+          <a:solidFill>
+            <a:srgbClr val="FFFFFF"/>
+          </a:solidFill>
+          <a:ln/>
+        </p:spPr>
+      </p:sp>
+      <p:sp>
+        <p:nvSpPr>
+          <p:cNvPr id="3" name="Text 1"/>
           <p:cNvSpPr/>
           <p:nvPr/>
         </p:nvSpPr>
@@ -10190,7 +10360,7 @@
       </p:sp>
       <p:sp>
         <p:nvSpPr>
-          <p:cNvPr id="3" name="Shape 1"/>
+          <p:cNvPr id="4" name="Shape 2"/>
           <p:cNvSpPr/>
           <p:nvPr/>
         </p:nvSpPr>
@@ -10212,7 +10382,7 @@
       </p:sp>
       <p:sp>
         <p:nvSpPr>
-          <p:cNvPr id="4" name="Text 2"/>
+          <p:cNvPr id="5" name="Text 3"/>
           <p:cNvSpPr/>
           <p:nvPr/>
         </p:nvSpPr>
@@ -10251,7 +10421,7 @@
       </p:sp>
       <p:pic>
         <p:nvPicPr>
-          <p:cNvPr id="5" name="Image 0" descr="preencoded.png">    </p:cNvPr>
+          <p:cNvPr id="6" name="Image 0" descr="preencoded.png">    </p:cNvPr>
           <p:cNvPicPr>
             <a:picLocks noChangeAspect="1"/>
           </p:cNvPicPr>
@@ -10265,7 +10435,7 @@
         </p:blipFill>
         <p:spPr>
           <a:xfrm>
-            <a:off x="566928" y="6254496"/>
+            <a:off x="566928" y="6126480"/>
             <a:ext cx="1481328" cy="457200"/>
           </a:xfrm>
           <a:prstGeom prst="rect">
@@ -10275,7 +10445,7 @@
       </p:pic>
       <p:sp>
         <p:nvSpPr>
-          <p:cNvPr id="6" name="Shape 3"/>
+          <p:cNvPr id="7" name="Shape 4"/>
           <p:cNvSpPr/>
           <p:nvPr/>
         </p:nvSpPr>
@@ -10297,7 +10467,7 @@
       </p:sp>
       <p:sp>
         <p:nvSpPr>
-          <p:cNvPr id="7" name="Shape 4"/>
+          <p:cNvPr id="8" name="Shape 5"/>
           <p:cNvSpPr/>
           <p:nvPr/>
         </p:nvSpPr>
@@ -10317,7 +10487,7 @@
       </p:sp>
       <p:sp>
         <p:nvSpPr>
-          <p:cNvPr id="8" name="Text 5"/>
+          <p:cNvPr id="9" name="Text 6"/>
           <p:cNvSpPr/>
           <p:nvPr/>
         </p:nvSpPr>
@@ -10356,7 +10526,7 @@
       </p:sp>
       <p:sp>
         <p:nvSpPr>
-          <p:cNvPr id="9" name="Text 6"/>
+          <p:cNvPr id="10" name="Text 7"/>
           <p:cNvSpPr/>
           <p:nvPr/>
         </p:nvSpPr>
@@ -10395,7 +10565,7 @@
       </p:sp>
       <p:sp>
         <p:nvSpPr>
-          <p:cNvPr id="10" name="Text 7"/>
+          <p:cNvPr id="11" name="Text 8"/>
           <p:cNvSpPr/>
           <p:nvPr/>
         </p:nvSpPr>
@@ -10437,7 +10607,7 @@
       </p:sp>
       <p:sp>
         <p:nvSpPr>
-          <p:cNvPr id="11" name="Shape 8"/>
+          <p:cNvPr id="12" name="Shape 9"/>
           <p:cNvSpPr/>
           <p:nvPr/>
         </p:nvSpPr>
@@ -10459,7 +10629,7 @@
       </p:sp>
       <p:sp>
         <p:nvSpPr>
-          <p:cNvPr id="12" name="Shape 9"/>
+          <p:cNvPr id="13" name="Shape 10"/>
           <p:cNvSpPr/>
           <p:nvPr/>
         </p:nvSpPr>
@@ -10479,7 +10649,7 @@
       </p:sp>
       <p:sp>
         <p:nvSpPr>
-          <p:cNvPr id="13" name="Text 10"/>
+          <p:cNvPr id="14" name="Text 11"/>
           <p:cNvSpPr/>
           <p:nvPr/>
         </p:nvSpPr>
@@ -10518,7 +10688,7 @@
       </p:sp>
       <p:sp>
         <p:nvSpPr>
-          <p:cNvPr id="14" name="Text 11"/>
+          <p:cNvPr id="15" name="Text 12"/>
           <p:cNvSpPr/>
           <p:nvPr/>
         </p:nvSpPr>
@@ -10557,7 +10727,7 @@
       </p:sp>
       <p:sp>
         <p:nvSpPr>
-          <p:cNvPr id="15" name="Text 12"/>
+          <p:cNvPr id="16" name="Text 13"/>
           <p:cNvSpPr/>
           <p:nvPr/>
         </p:nvSpPr>
@@ -10599,7 +10769,7 @@
       </p:sp>
       <p:sp>
         <p:nvSpPr>
-          <p:cNvPr id="16" name="Shape 13"/>
+          <p:cNvPr id="17" name="Shape 14"/>
           <p:cNvSpPr/>
           <p:nvPr/>
         </p:nvSpPr>
@@ -10621,7 +10791,7 @@
       </p:sp>
       <p:sp>
         <p:nvSpPr>
-          <p:cNvPr id="17" name="Shape 14"/>
+          <p:cNvPr id="18" name="Shape 15"/>
           <p:cNvSpPr/>
           <p:nvPr/>
         </p:nvSpPr>
@@ -10641,7 +10811,7 @@
       </p:sp>
       <p:sp>
         <p:nvSpPr>
-          <p:cNvPr id="18" name="Text 15"/>
+          <p:cNvPr id="19" name="Text 16"/>
           <p:cNvSpPr/>
           <p:nvPr/>
         </p:nvSpPr>
@@ -10680,7 +10850,7 @@
       </p:sp>
       <p:sp>
         <p:nvSpPr>
-          <p:cNvPr id="19" name="Text 16"/>
+          <p:cNvPr id="20" name="Text 17"/>
           <p:cNvSpPr/>
           <p:nvPr/>
         </p:nvSpPr>
@@ -10719,7 +10889,7 @@
       </p:sp>
       <p:sp>
         <p:nvSpPr>
-          <p:cNvPr id="20" name="Text 17"/>
+          <p:cNvPr id="21" name="Text 18"/>
           <p:cNvSpPr/>
           <p:nvPr/>
         </p:nvSpPr>
@@ -10761,7 +10931,7 @@
       </p:sp>
       <p:sp>
         <p:nvSpPr>
-          <p:cNvPr id="21" name="Shape 18"/>
+          <p:cNvPr id="22" name="Shape 19"/>
           <p:cNvSpPr/>
           <p:nvPr/>
         </p:nvSpPr>
@@ -10783,7 +10953,7 @@
       </p:sp>
       <p:sp>
         <p:nvSpPr>
-          <p:cNvPr id="22" name="Shape 19"/>
+          <p:cNvPr id="23" name="Shape 20"/>
           <p:cNvSpPr/>
           <p:nvPr/>
         </p:nvSpPr>
@@ -10803,7 +10973,7 @@
       </p:sp>
       <p:sp>
         <p:nvSpPr>
-          <p:cNvPr id="23" name="Text 20"/>
+          <p:cNvPr id="24" name="Text 21"/>
           <p:cNvSpPr/>
           <p:nvPr/>
         </p:nvSpPr>
@@ -10842,7 +11012,7 @@
       </p:sp>
       <p:sp>
         <p:nvSpPr>
-          <p:cNvPr id="24" name="Text 21"/>
+          <p:cNvPr id="25" name="Text 22"/>
           <p:cNvSpPr/>
           <p:nvPr/>
         </p:nvSpPr>
@@ -10881,7 +11051,7 @@
       </p:sp>
       <p:sp>
         <p:nvSpPr>
-          <p:cNvPr id="25" name="Text 22"/>
+          <p:cNvPr id="26" name="Text 23"/>
           <p:cNvSpPr/>
           <p:nvPr/>
         </p:nvSpPr>
@@ -10923,7 +11093,7 @@
       </p:sp>
       <p:sp>
         <p:nvSpPr>
-          <p:cNvPr id="26" name="Shape 23"/>
+          <p:cNvPr id="27" name="Shape 24"/>
           <p:cNvSpPr/>
           <p:nvPr/>
         </p:nvSpPr>
@@ -10945,7 +11115,7 @@
       </p:sp>
       <p:sp>
         <p:nvSpPr>
-          <p:cNvPr id="27" name="Shape 24"/>
+          <p:cNvPr id="28" name="Shape 25"/>
           <p:cNvSpPr/>
           <p:nvPr/>
         </p:nvSpPr>
@@ -10965,7 +11135,7 @@
       </p:sp>
       <p:sp>
         <p:nvSpPr>
-          <p:cNvPr id="28" name="Text 25"/>
+          <p:cNvPr id="29" name="Text 26"/>
           <p:cNvSpPr/>
           <p:nvPr/>
         </p:nvSpPr>
@@ -11004,7 +11174,7 @@
       </p:sp>
       <p:sp>
         <p:nvSpPr>
-          <p:cNvPr id="29" name="Text 26"/>
+          <p:cNvPr id="30" name="Text 27"/>
           <p:cNvSpPr/>
           <p:nvPr/>
         </p:nvSpPr>
@@ -11043,7 +11213,7 @@
       </p:sp>
       <p:sp>
         <p:nvSpPr>
-          <p:cNvPr id="30" name="Text 27"/>
+          <p:cNvPr id="31" name="Text 28"/>
           <p:cNvSpPr/>
           <p:nvPr/>
         </p:nvSpPr>
@@ -11085,7 +11255,7 @@
       </p:sp>
       <p:sp>
         <p:nvSpPr>
-          <p:cNvPr id="31" name="Shape 28"/>
+          <p:cNvPr id="32" name="Shape 29"/>
           <p:cNvSpPr/>
           <p:nvPr/>
         </p:nvSpPr>
@@ -11107,7 +11277,7 @@
       </p:sp>
       <p:sp>
         <p:nvSpPr>
-          <p:cNvPr id="32" name="Text 29"/>
+          <p:cNvPr id="33" name="Text 30"/>
           <p:cNvSpPr/>
           <p:nvPr/>
         </p:nvSpPr>
@@ -11146,7 +11316,7 @@
       </p:sp>
       <p:sp>
         <p:nvSpPr>
-          <p:cNvPr id="33" name="Text 30"/>
+          <p:cNvPr id="34" name="Text 31"/>
           <p:cNvSpPr/>
           <p:nvPr/>
         </p:nvSpPr>
@@ -11198,7 +11368,7 @@
         </p:nvSpPr>
         <p:spPr>
           <a:xfrm>
-            <a:off x="11368735" y="6437376"/>
+            <a:off x="11368735" y="6327648"/>
             <a:ext cx="365760" cy="274320"/>
           </a:xfrm>
           <a:prstGeom prst="rect">
@@ -11245,13 +11415,6 @@
 <file path=ppt/slides/slide18.xml><?xml version="1.0" encoding="utf-8"?>
 <p:sld xmlns:a="http://schemas.openxmlformats.org/drawingml/2006/main" xmlns:r="http://schemas.openxmlformats.org/officeDocument/2006/relationships" xmlns:p="http://schemas.openxmlformats.org/presentationml/2006/main">
   <p:cSld name="Slide 18">
-    <p:bg>
-      <p:bgPr>
-        <a:solidFill>
-          <a:srgbClr val="FFFFFF"/>
-        </a:solidFill>
-      </p:bgPr>
-    </p:bg>
     <p:spTree>
       <p:nvGrpSpPr>
         <p:cNvPr id="1" name=""/>
@@ -11268,7 +11431,29 @@
       </p:grpSpPr>
       <p:sp>
         <p:nvSpPr>
-          <p:cNvPr id="2" name="Text 0"/>
+          <p:cNvPr id="2" name="Shape 0"/>
+          <p:cNvSpPr/>
+          <p:nvPr/>
+        </p:nvSpPr>
+        <p:spPr>
+          <a:xfrm>
+            <a:off x="231343" y="194767"/>
+            <a:ext cx="11716207" cy="6473952"/>
+          </a:xfrm>
+          <a:prstGeom prst="roundRect">
+            <a:avLst>
+              <a:gd name="adj" fmla="val 3107"/>
+            </a:avLst>
+          </a:prstGeom>
+          <a:solidFill>
+            <a:srgbClr val="FFFFFF"/>
+          </a:solidFill>
+          <a:ln/>
+        </p:spPr>
+      </p:sp>
+      <p:sp>
+        <p:nvSpPr>
+          <p:cNvPr id="3" name="Text 1"/>
           <p:cNvSpPr/>
           <p:nvPr/>
         </p:nvSpPr>
@@ -11307,7 +11492,7 @@
       </p:sp>
       <p:sp>
         <p:nvSpPr>
-          <p:cNvPr id="3" name="Shape 1"/>
+          <p:cNvPr id="4" name="Shape 2"/>
           <p:cNvSpPr/>
           <p:nvPr/>
         </p:nvSpPr>
@@ -11329,7 +11514,7 @@
       </p:sp>
       <p:sp>
         <p:nvSpPr>
-          <p:cNvPr id="4" name="Text 2"/>
+          <p:cNvPr id="5" name="Text 3"/>
           <p:cNvSpPr/>
           <p:nvPr/>
         </p:nvSpPr>
@@ -11368,7 +11553,7 @@
       </p:sp>
       <p:pic>
         <p:nvPicPr>
-          <p:cNvPr id="5" name="Image 0" descr="preencoded.png">    </p:cNvPr>
+          <p:cNvPr id="6" name="Image 0" descr="preencoded.png">    </p:cNvPr>
           <p:cNvPicPr>
             <a:picLocks noChangeAspect="1"/>
           </p:cNvPicPr>
@@ -11382,7 +11567,7 @@
         </p:blipFill>
         <p:spPr>
           <a:xfrm>
-            <a:off x="566928" y="6254496"/>
+            <a:off x="566928" y="6126480"/>
             <a:ext cx="1481328" cy="457200"/>
           </a:xfrm>
           <a:prstGeom prst="rect">
@@ -11392,7 +11577,7 @@
       </p:pic>
       <p:sp>
         <p:nvSpPr>
-          <p:cNvPr id="6" name="Shape 3"/>
+          <p:cNvPr id="7" name="Shape 4"/>
           <p:cNvSpPr/>
           <p:nvPr/>
         </p:nvSpPr>
@@ -11412,7 +11597,7 @@
       </p:sp>
       <p:sp>
         <p:nvSpPr>
-          <p:cNvPr id="7" name="Text 4"/>
+          <p:cNvPr id="8" name="Text 5"/>
           <p:cNvSpPr/>
           <p:nvPr/>
         </p:nvSpPr>
@@ -11451,7 +11636,7 @@
       </p:sp>
       <p:sp>
         <p:nvSpPr>
-          <p:cNvPr id="8" name="Text 5"/>
+          <p:cNvPr id="9" name="Text 6"/>
           <p:cNvSpPr/>
           <p:nvPr/>
         </p:nvSpPr>
@@ -11504,7 +11689,7 @@
       </p:sp>
       <p:sp>
         <p:nvSpPr>
-          <p:cNvPr id="9" name="Shape 6"/>
+          <p:cNvPr id="10" name="Shape 7"/>
           <p:cNvSpPr/>
           <p:nvPr/>
         </p:nvSpPr>
@@ -11524,7 +11709,7 @@
       </p:sp>
       <p:sp>
         <p:nvSpPr>
-          <p:cNvPr id="10" name="Text 7"/>
+          <p:cNvPr id="11" name="Text 8"/>
           <p:cNvSpPr/>
           <p:nvPr/>
         </p:nvSpPr>
@@ -11563,7 +11748,7 @@
       </p:sp>
       <p:sp>
         <p:nvSpPr>
-          <p:cNvPr id="11" name="Text 8"/>
+          <p:cNvPr id="12" name="Text 9"/>
           <p:cNvSpPr/>
           <p:nvPr/>
         </p:nvSpPr>
@@ -11616,7 +11801,7 @@
       </p:sp>
       <p:sp>
         <p:nvSpPr>
-          <p:cNvPr id="12" name="Shape 9"/>
+          <p:cNvPr id="13" name="Shape 10"/>
           <p:cNvSpPr/>
           <p:nvPr/>
         </p:nvSpPr>
@@ -11636,7 +11821,7 @@
       </p:sp>
       <p:sp>
         <p:nvSpPr>
-          <p:cNvPr id="13" name="Text 10"/>
+          <p:cNvPr id="14" name="Text 11"/>
           <p:cNvSpPr/>
           <p:nvPr/>
         </p:nvSpPr>
@@ -11675,7 +11860,7 @@
       </p:sp>
       <p:sp>
         <p:nvSpPr>
-          <p:cNvPr id="14" name="Text 11"/>
+          <p:cNvPr id="15" name="Text 12"/>
           <p:cNvSpPr/>
           <p:nvPr/>
         </p:nvSpPr>
@@ -11728,7 +11913,7 @@
       </p:sp>
       <p:sp>
         <p:nvSpPr>
-          <p:cNvPr id="15" name="Shape 12"/>
+          <p:cNvPr id="16" name="Shape 13"/>
           <p:cNvSpPr/>
           <p:nvPr/>
         </p:nvSpPr>
@@ -11748,7 +11933,7 @@
       </p:sp>
       <p:sp>
         <p:nvSpPr>
-          <p:cNvPr id="16" name="Text 13"/>
+          <p:cNvPr id="17" name="Text 14"/>
           <p:cNvSpPr/>
           <p:nvPr/>
         </p:nvSpPr>
@@ -11787,7 +11972,7 @@
       </p:sp>
       <p:sp>
         <p:nvSpPr>
-          <p:cNvPr id="17" name="Text 14"/>
+          <p:cNvPr id="18" name="Text 15"/>
           <p:cNvSpPr/>
           <p:nvPr/>
         </p:nvSpPr>
@@ -11840,7 +12025,7 @@
       </p:sp>
       <p:sp>
         <p:nvSpPr>
-          <p:cNvPr id="18" name="Shape 15"/>
+          <p:cNvPr id="19" name="Shape 16"/>
           <p:cNvSpPr/>
           <p:nvPr/>
         </p:nvSpPr>
@@ -11860,7 +12045,7 @@
       </p:sp>
       <p:sp>
         <p:nvSpPr>
-          <p:cNvPr id="19" name="Text 16"/>
+          <p:cNvPr id="20" name="Text 17"/>
           <p:cNvSpPr/>
           <p:nvPr/>
         </p:nvSpPr>
@@ -11899,7 +12084,7 @@
       </p:sp>
       <p:sp>
         <p:nvSpPr>
-          <p:cNvPr id="20" name="Text 17"/>
+          <p:cNvPr id="21" name="Text 18"/>
           <p:cNvSpPr/>
           <p:nvPr/>
         </p:nvSpPr>
@@ -11962,7 +12147,7 @@
         </p:nvSpPr>
         <p:spPr>
           <a:xfrm>
-            <a:off x="11368735" y="6437376"/>
+            <a:off x="11368735" y="6327648"/>
             <a:ext cx="365760" cy="274320"/>
           </a:xfrm>
           <a:prstGeom prst="rect">
@@ -12009,13 +12194,6 @@
 <file path=ppt/slides/slide19.xml><?xml version="1.0" encoding="utf-8"?>
 <p:sld xmlns:a="http://schemas.openxmlformats.org/drawingml/2006/main" xmlns:r="http://schemas.openxmlformats.org/officeDocument/2006/relationships" xmlns:p="http://schemas.openxmlformats.org/presentationml/2006/main">
   <p:cSld name="Slide 19">
-    <p:bg>
-      <p:bgPr>
-        <a:solidFill>
-          <a:srgbClr val="FFFFFF"/>
-        </a:solidFill>
-      </p:bgPr>
-    </p:bg>
     <p:spTree>
       <p:nvGrpSpPr>
         <p:cNvPr id="1" name=""/>
@@ -12032,7 +12210,29 @@
       </p:grpSpPr>
       <p:sp>
         <p:nvSpPr>
-          <p:cNvPr id="2" name="Text 0"/>
+          <p:cNvPr id="2" name="Shape 0"/>
+          <p:cNvSpPr/>
+          <p:nvPr/>
+        </p:nvSpPr>
+        <p:spPr>
+          <a:xfrm>
+            <a:off x="231343" y="194767"/>
+            <a:ext cx="11716207" cy="6473952"/>
+          </a:xfrm>
+          <a:prstGeom prst="roundRect">
+            <a:avLst>
+              <a:gd name="adj" fmla="val 3107"/>
+            </a:avLst>
+          </a:prstGeom>
+          <a:solidFill>
+            <a:srgbClr val="FFFFFF"/>
+          </a:solidFill>
+          <a:ln/>
+        </p:spPr>
+      </p:sp>
+      <p:sp>
+        <p:nvSpPr>
+          <p:cNvPr id="3" name="Text 1"/>
           <p:cNvSpPr/>
           <p:nvPr/>
         </p:nvSpPr>
@@ -12071,7 +12271,7 @@
       </p:sp>
       <p:sp>
         <p:nvSpPr>
-          <p:cNvPr id="3" name="Shape 1"/>
+          <p:cNvPr id="4" name="Shape 2"/>
           <p:cNvSpPr/>
           <p:nvPr/>
         </p:nvSpPr>
@@ -12093,7 +12293,7 @@
       </p:sp>
       <p:sp>
         <p:nvSpPr>
-          <p:cNvPr id="4" name="Text 2"/>
+          <p:cNvPr id="5" name="Text 3"/>
           <p:cNvSpPr/>
           <p:nvPr/>
         </p:nvSpPr>
@@ -12132,7 +12332,7 @@
       </p:sp>
       <p:pic>
         <p:nvPicPr>
-          <p:cNvPr id="5" name="Image 0" descr="preencoded.png">    </p:cNvPr>
+          <p:cNvPr id="6" name="Image 0" descr="preencoded.png">    </p:cNvPr>
           <p:cNvPicPr>
             <a:picLocks noChangeAspect="1"/>
           </p:cNvPicPr>
@@ -12146,7 +12346,7 @@
         </p:blipFill>
         <p:spPr>
           <a:xfrm>
-            <a:off x="566928" y="6254496"/>
+            <a:off x="566928" y="6126480"/>
             <a:ext cx="1481328" cy="457200"/>
           </a:xfrm>
           <a:prstGeom prst="rect">
@@ -12156,7 +12356,7 @@
       </p:pic>
       <p:sp>
         <p:nvSpPr>
-          <p:cNvPr id="6" name="Shape 3"/>
+          <p:cNvPr id="7" name="Shape 4"/>
           <p:cNvSpPr/>
           <p:nvPr/>
         </p:nvSpPr>
@@ -12178,7 +12378,7 @@
       </p:sp>
       <p:sp>
         <p:nvSpPr>
-          <p:cNvPr id="7" name="Text 4"/>
+          <p:cNvPr id="8" name="Text 5"/>
           <p:cNvSpPr/>
           <p:nvPr/>
         </p:nvSpPr>
@@ -12217,7 +12417,7 @@
       </p:sp>
       <p:sp>
         <p:nvSpPr>
-          <p:cNvPr id="8" name="Text 5"/>
+          <p:cNvPr id="9" name="Text 6"/>
           <p:cNvSpPr/>
           <p:nvPr/>
         </p:nvSpPr>
@@ -12259,7 +12459,7 @@
       </p:sp>
       <p:sp>
         <p:nvSpPr>
-          <p:cNvPr id="9" name="Shape 6"/>
+          <p:cNvPr id="10" name="Shape 7"/>
           <p:cNvSpPr/>
           <p:nvPr/>
         </p:nvSpPr>
@@ -12281,7 +12481,7 @@
       </p:sp>
       <p:sp>
         <p:nvSpPr>
-          <p:cNvPr id="10" name="Text 7"/>
+          <p:cNvPr id="11" name="Text 8"/>
           <p:cNvSpPr/>
           <p:nvPr/>
         </p:nvSpPr>
@@ -12320,7 +12520,7 @@
       </p:sp>
       <p:sp>
         <p:nvSpPr>
-          <p:cNvPr id="11" name="Text 8"/>
+          <p:cNvPr id="12" name="Text 9"/>
           <p:cNvSpPr/>
           <p:nvPr/>
         </p:nvSpPr>
@@ -12362,7 +12562,7 @@
       </p:sp>
       <p:sp>
         <p:nvSpPr>
-          <p:cNvPr id="12" name="Shape 9"/>
+          <p:cNvPr id="13" name="Shape 10"/>
           <p:cNvSpPr/>
           <p:nvPr/>
         </p:nvSpPr>
@@ -12389,7 +12589,7 @@
       </p:sp>
       <p:sp>
         <p:nvSpPr>
-          <p:cNvPr id="13" name="Text 10"/>
+          <p:cNvPr id="14" name="Text 11"/>
           <p:cNvSpPr/>
           <p:nvPr/>
         </p:nvSpPr>
@@ -12428,7 +12628,7 @@
       </p:sp>
       <p:sp>
         <p:nvSpPr>
-          <p:cNvPr id="14" name="Text 11"/>
+          <p:cNvPr id="15" name="Text 12"/>
           <p:cNvSpPr/>
           <p:nvPr/>
         </p:nvSpPr>
@@ -12470,7 +12670,7 @@
       </p:sp>
       <p:sp>
         <p:nvSpPr>
-          <p:cNvPr id="15" name="Shape 12"/>
+          <p:cNvPr id="16" name="Shape 13"/>
           <p:cNvSpPr/>
           <p:nvPr/>
         </p:nvSpPr>
@@ -12497,7 +12697,7 @@
       </p:sp>
       <p:sp>
         <p:nvSpPr>
-          <p:cNvPr id="16" name="Text 13"/>
+          <p:cNvPr id="17" name="Text 14"/>
           <p:cNvSpPr/>
           <p:nvPr/>
         </p:nvSpPr>
@@ -12549,7 +12749,7 @@
         </p:nvSpPr>
         <p:spPr>
           <a:xfrm>
-            <a:off x="11368735" y="6437376"/>
+            <a:off x="11368735" y="6327648"/>
             <a:ext cx="365760" cy="274320"/>
           </a:xfrm>
           <a:prstGeom prst="rect">
@@ -12596,13 +12796,6 @@
 <file path=ppt/slides/slide2.xml><?xml version="1.0" encoding="utf-8"?>
 <p:sld xmlns:a="http://schemas.openxmlformats.org/drawingml/2006/main" xmlns:r="http://schemas.openxmlformats.org/officeDocument/2006/relationships" xmlns:p="http://schemas.openxmlformats.org/presentationml/2006/main">
   <p:cSld name="Slide 2">
-    <p:bg>
-      <p:bgPr>
-        <a:solidFill>
-          <a:srgbClr val="FFFFFF"/>
-        </a:solidFill>
-      </p:bgPr>
-    </p:bg>
     <p:spTree>
       <p:nvGrpSpPr>
         <p:cNvPr id="1" name=""/>
@@ -12619,7 +12812,29 @@
       </p:grpSpPr>
       <p:sp>
         <p:nvSpPr>
-          <p:cNvPr id="2" name="Text 0"/>
+          <p:cNvPr id="2" name="Shape 0"/>
+          <p:cNvSpPr/>
+          <p:nvPr/>
+        </p:nvSpPr>
+        <p:spPr>
+          <a:xfrm>
+            <a:off x="231343" y="194767"/>
+            <a:ext cx="11716207" cy="6473952"/>
+          </a:xfrm>
+          <a:prstGeom prst="roundRect">
+            <a:avLst>
+              <a:gd name="adj" fmla="val 3107"/>
+            </a:avLst>
+          </a:prstGeom>
+          <a:solidFill>
+            <a:srgbClr val="FFFFFF"/>
+          </a:solidFill>
+          <a:ln/>
+        </p:spPr>
+      </p:sp>
+      <p:sp>
+        <p:nvSpPr>
+          <p:cNvPr id="3" name="Text 1"/>
           <p:cNvSpPr/>
           <p:nvPr/>
         </p:nvSpPr>
@@ -12658,7 +12873,7 @@
       </p:sp>
       <p:sp>
         <p:nvSpPr>
-          <p:cNvPr id="3" name="Text 1"/>
+          <p:cNvPr id="4" name="Text 2"/>
           <p:cNvSpPr/>
           <p:nvPr/>
         </p:nvSpPr>
@@ -12700,7 +12915,7 @@
       </p:sp>
       <p:sp>
         <p:nvSpPr>
-          <p:cNvPr id="4" name="Shape 2"/>
+          <p:cNvPr id="5" name="Shape 3"/>
           <p:cNvSpPr/>
           <p:nvPr/>
         </p:nvSpPr>
@@ -12722,7 +12937,7 @@
       </p:sp>
       <p:sp>
         <p:nvSpPr>
-          <p:cNvPr id="5" name="Text 3"/>
+          <p:cNvPr id="6" name="Text 4"/>
           <p:cNvSpPr/>
           <p:nvPr/>
         </p:nvSpPr>
@@ -12761,7 +12976,7 @@
       </p:sp>
       <p:pic>
         <p:nvPicPr>
-          <p:cNvPr id="6" name="Image 0" descr="preencoded.png">    </p:cNvPr>
+          <p:cNvPr id="7" name="Image 0" descr="preencoded.png">    </p:cNvPr>
           <p:cNvPicPr>
             <a:picLocks noChangeAspect="1"/>
           </p:cNvPicPr>
@@ -12775,7 +12990,7 @@
         </p:blipFill>
         <p:spPr>
           <a:xfrm>
-            <a:off x="566928" y="6254496"/>
+            <a:off x="566928" y="6126480"/>
             <a:ext cx="1481328" cy="457200"/>
           </a:xfrm>
           <a:prstGeom prst="rect">
@@ -12785,7 +13000,7 @@
       </p:pic>
       <p:sp>
         <p:nvSpPr>
-          <p:cNvPr id="7" name="Shape 4"/>
+          <p:cNvPr id="8" name="Shape 5"/>
           <p:cNvSpPr/>
           <p:nvPr/>
         </p:nvSpPr>
@@ -12812,7 +13027,7 @@
       </p:sp>
       <p:sp>
         <p:nvSpPr>
-          <p:cNvPr id="8" name="Shape 5"/>
+          <p:cNvPr id="9" name="Shape 6"/>
           <p:cNvSpPr/>
           <p:nvPr/>
         </p:nvSpPr>
@@ -12832,7 +13047,7 @@
       </p:sp>
       <p:sp>
         <p:nvSpPr>
-          <p:cNvPr id="9" name="Text 6"/>
+          <p:cNvPr id="10" name="Text 7"/>
           <p:cNvSpPr/>
           <p:nvPr/>
         </p:nvSpPr>
@@ -12871,7 +13086,7 @@
       </p:sp>
       <p:sp>
         <p:nvSpPr>
-          <p:cNvPr id="10" name="Text 7"/>
+          <p:cNvPr id="11" name="Text 8"/>
           <p:cNvSpPr/>
           <p:nvPr/>
         </p:nvSpPr>
@@ -12910,7 +13125,7 @@
       </p:sp>
       <p:sp>
         <p:nvSpPr>
-          <p:cNvPr id="11" name="Text 8"/>
+          <p:cNvPr id="12" name="Text 9"/>
           <p:cNvSpPr/>
           <p:nvPr/>
         </p:nvSpPr>
@@ -12952,7 +13167,7 @@
       </p:sp>
       <p:sp>
         <p:nvSpPr>
-          <p:cNvPr id="12" name="Shape 9"/>
+          <p:cNvPr id="13" name="Shape 10"/>
           <p:cNvSpPr/>
           <p:nvPr/>
         </p:nvSpPr>
@@ -12979,7 +13194,7 @@
       </p:sp>
       <p:sp>
         <p:nvSpPr>
-          <p:cNvPr id="13" name="Shape 10"/>
+          <p:cNvPr id="14" name="Shape 11"/>
           <p:cNvSpPr/>
           <p:nvPr/>
         </p:nvSpPr>
@@ -12999,7 +13214,7 @@
       </p:sp>
       <p:sp>
         <p:nvSpPr>
-          <p:cNvPr id="14" name="Text 11"/>
+          <p:cNvPr id="15" name="Text 12"/>
           <p:cNvSpPr/>
           <p:nvPr/>
         </p:nvSpPr>
@@ -13038,7 +13253,7 @@
       </p:sp>
       <p:sp>
         <p:nvSpPr>
-          <p:cNvPr id="15" name="Text 12"/>
+          <p:cNvPr id="16" name="Text 13"/>
           <p:cNvSpPr/>
           <p:nvPr/>
         </p:nvSpPr>
@@ -13077,7 +13292,7 @@
       </p:sp>
       <p:sp>
         <p:nvSpPr>
-          <p:cNvPr id="16" name="Text 13"/>
+          <p:cNvPr id="17" name="Text 14"/>
           <p:cNvSpPr/>
           <p:nvPr/>
         </p:nvSpPr>
@@ -13119,7 +13334,7 @@
       </p:sp>
       <p:sp>
         <p:nvSpPr>
-          <p:cNvPr id="17" name="Shape 14"/>
+          <p:cNvPr id="18" name="Shape 15"/>
           <p:cNvSpPr/>
           <p:nvPr/>
         </p:nvSpPr>
@@ -13146,7 +13361,7 @@
       </p:sp>
       <p:sp>
         <p:nvSpPr>
-          <p:cNvPr id="18" name="Shape 15"/>
+          <p:cNvPr id="19" name="Shape 16"/>
           <p:cNvSpPr/>
           <p:nvPr/>
         </p:nvSpPr>
@@ -13166,7 +13381,7 @@
       </p:sp>
       <p:sp>
         <p:nvSpPr>
-          <p:cNvPr id="19" name="Text 16"/>
+          <p:cNvPr id="20" name="Text 17"/>
           <p:cNvSpPr/>
           <p:nvPr/>
         </p:nvSpPr>
@@ -13205,7 +13420,7 @@
       </p:sp>
       <p:sp>
         <p:nvSpPr>
-          <p:cNvPr id="20" name="Text 17"/>
+          <p:cNvPr id="21" name="Text 18"/>
           <p:cNvSpPr/>
           <p:nvPr/>
         </p:nvSpPr>
@@ -13244,7 +13459,7 @@
       </p:sp>
       <p:sp>
         <p:nvSpPr>
-          <p:cNvPr id="21" name="Text 18"/>
+          <p:cNvPr id="22" name="Text 19"/>
           <p:cNvSpPr/>
           <p:nvPr/>
         </p:nvSpPr>
@@ -13286,7 +13501,7 @@
       </p:sp>
       <p:sp>
         <p:nvSpPr>
-          <p:cNvPr id="22" name="Shape 19"/>
+          <p:cNvPr id="23" name="Shape 20"/>
           <p:cNvSpPr/>
           <p:nvPr/>
         </p:nvSpPr>
@@ -13313,7 +13528,7 @@
       </p:sp>
       <p:sp>
         <p:nvSpPr>
-          <p:cNvPr id="23" name="Shape 20"/>
+          <p:cNvPr id="24" name="Shape 21"/>
           <p:cNvSpPr/>
           <p:nvPr/>
         </p:nvSpPr>
@@ -13333,7 +13548,7 @@
       </p:sp>
       <p:sp>
         <p:nvSpPr>
-          <p:cNvPr id="24" name="Text 21"/>
+          <p:cNvPr id="25" name="Text 22"/>
           <p:cNvSpPr/>
           <p:nvPr/>
         </p:nvSpPr>
@@ -13372,7 +13587,7 @@
       </p:sp>
       <p:sp>
         <p:nvSpPr>
-          <p:cNvPr id="25" name="Text 22"/>
+          <p:cNvPr id="26" name="Text 23"/>
           <p:cNvSpPr/>
           <p:nvPr/>
         </p:nvSpPr>
@@ -13411,7 +13626,7 @@
       </p:sp>
       <p:sp>
         <p:nvSpPr>
-          <p:cNvPr id="26" name="Text 23"/>
+          <p:cNvPr id="27" name="Text 24"/>
           <p:cNvSpPr/>
           <p:nvPr/>
         </p:nvSpPr>
@@ -13453,7 +13668,7 @@
       </p:sp>
       <p:sp>
         <p:nvSpPr>
-          <p:cNvPr id="27" name="Shape 24"/>
+          <p:cNvPr id="28" name="Shape 25"/>
           <p:cNvSpPr/>
           <p:nvPr/>
         </p:nvSpPr>
@@ -13480,7 +13695,7 @@
       </p:sp>
       <p:sp>
         <p:nvSpPr>
-          <p:cNvPr id="28" name="Shape 25"/>
+          <p:cNvPr id="29" name="Shape 26"/>
           <p:cNvSpPr/>
           <p:nvPr/>
         </p:nvSpPr>
@@ -13500,7 +13715,7 @@
       </p:sp>
       <p:sp>
         <p:nvSpPr>
-          <p:cNvPr id="29" name="Text 26"/>
+          <p:cNvPr id="30" name="Text 27"/>
           <p:cNvSpPr/>
           <p:nvPr/>
         </p:nvSpPr>
@@ -13539,7 +13754,7 @@
       </p:sp>
       <p:sp>
         <p:nvSpPr>
-          <p:cNvPr id="30" name="Text 27"/>
+          <p:cNvPr id="31" name="Text 28"/>
           <p:cNvSpPr/>
           <p:nvPr/>
         </p:nvSpPr>
@@ -13578,7 +13793,7 @@
       </p:sp>
       <p:sp>
         <p:nvSpPr>
-          <p:cNvPr id="31" name="Text 28"/>
+          <p:cNvPr id="32" name="Text 29"/>
           <p:cNvSpPr/>
           <p:nvPr/>
         </p:nvSpPr>
@@ -13630,7 +13845,7 @@
         </p:nvSpPr>
         <p:spPr>
           <a:xfrm>
-            <a:off x="11368735" y="6437376"/>
+            <a:off x="11368735" y="6327648"/>
             <a:ext cx="365760" cy="274320"/>
           </a:xfrm>
           <a:prstGeom prst="rect">
@@ -13677,13 +13892,6 @@
 <file path=ppt/slides/slide20.xml><?xml version="1.0" encoding="utf-8"?>
 <p:sld xmlns:a="http://schemas.openxmlformats.org/drawingml/2006/main" xmlns:r="http://schemas.openxmlformats.org/officeDocument/2006/relationships" xmlns:p="http://schemas.openxmlformats.org/presentationml/2006/main">
   <p:cSld name="Slide 20">
-    <p:bg>
-      <p:bgPr>
-        <a:solidFill>
-          <a:srgbClr val="FFFFFF"/>
-        </a:solidFill>
-      </p:bgPr>
-    </p:bg>
     <p:spTree>
       <p:nvGrpSpPr>
         <p:cNvPr id="1" name=""/>
@@ -13700,7 +13908,29 @@
       </p:grpSpPr>
       <p:sp>
         <p:nvSpPr>
-          <p:cNvPr id="2" name="Text 0"/>
+          <p:cNvPr id="2" name="Shape 0"/>
+          <p:cNvSpPr/>
+          <p:nvPr/>
+        </p:nvSpPr>
+        <p:spPr>
+          <a:xfrm>
+            <a:off x="231343" y="194767"/>
+            <a:ext cx="11716207" cy="6473952"/>
+          </a:xfrm>
+          <a:prstGeom prst="roundRect">
+            <a:avLst>
+              <a:gd name="adj" fmla="val 3107"/>
+            </a:avLst>
+          </a:prstGeom>
+          <a:solidFill>
+            <a:srgbClr val="FFFFFF"/>
+          </a:solidFill>
+          <a:ln/>
+        </p:spPr>
+      </p:sp>
+      <p:sp>
+        <p:nvSpPr>
+          <p:cNvPr id="3" name="Text 1"/>
           <p:cNvSpPr/>
           <p:nvPr/>
         </p:nvSpPr>
@@ -13739,7 +13969,7 @@
       </p:sp>
       <p:sp>
         <p:nvSpPr>
-          <p:cNvPr id="3" name="Shape 1"/>
+          <p:cNvPr id="4" name="Shape 2"/>
           <p:cNvSpPr/>
           <p:nvPr/>
         </p:nvSpPr>
@@ -13761,7 +13991,7 @@
       </p:sp>
       <p:sp>
         <p:nvSpPr>
-          <p:cNvPr id="4" name="Text 2"/>
+          <p:cNvPr id="5" name="Text 3"/>
           <p:cNvSpPr/>
           <p:nvPr/>
         </p:nvSpPr>
@@ -13800,7 +14030,7 @@
       </p:sp>
       <p:pic>
         <p:nvPicPr>
-          <p:cNvPr id="5" name="Image 0" descr="preencoded.png">    </p:cNvPr>
+          <p:cNvPr id="6" name="Image 0" descr="preencoded.png">    </p:cNvPr>
           <p:cNvPicPr>
             <a:picLocks noChangeAspect="1"/>
           </p:cNvPicPr>
@@ -13814,7 +14044,7 @@
         </p:blipFill>
         <p:spPr>
           <a:xfrm>
-            <a:off x="566928" y="6254496"/>
+            <a:off x="566928" y="6126480"/>
             <a:ext cx="1481328" cy="457200"/>
           </a:xfrm>
           <a:prstGeom prst="rect">
@@ -13824,7 +14054,7 @@
       </p:pic>
       <p:sp>
         <p:nvSpPr>
-          <p:cNvPr id="6" name="Shape 3"/>
+          <p:cNvPr id="7" name="Shape 4"/>
           <p:cNvSpPr/>
           <p:nvPr/>
         </p:nvSpPr>
@@ -13851,7 +14081,7 @@
       </p:sp>
       <p:sp>
         <p:nvSpPr>
-          <p:cNvPr id="7" name="Shape 4"/>
+          <p:cNvPr id="8" name="Shape 5"/>
           <p:cNvSpPr/>
           <p:nvPr/>
         </p:nvSpPr>
@@ -13878,7 +14108,7 @@
       </p:sp>
       <p:sp>
         <p:nvSpPr>
-          <p:cNvPr id="8" name="Shape 5"/>
+          <p:cNvPr id="9" name="Shape 6"/>
           <p:cNvSpPr/>
           <p:nvPr/>
         </p:nvSpPr>
@@ -13898,7 +14128,7 @@
       </p:sp>
       <p:sp>
         <p:nvSpPr>
-          <p:cNvPr id="9" name="Shape 6"/>
+          <p:cNvPr id="10" name="Shape 7"/>
           <p:cNvSpPr/>
           <p:nvPr/>
         </p:nvSpPr>
@@ -13918,7 +14148,7 @@
       </p:sp>
       <p:sp>
         <p:nvSpPr>
-          <p:cNvPr id="10" name="Text 7"/>
+          <p:cNvPr id="11" name="Text 8"/>
           <p:cNvSpPr/>
           <p:nvPr/>
         </p:nvSpPr>
@@ -13957,7 +14187,7 @@
       </p:sp>
       <p:sp>
         <p:nvSpPr>
-          <p:cNvPr id="11" name="Shape 8"/>
+          <p:cNvPr id="12" name="Shape 9"/>
           <p:cNvSpPr/>
           <p:nvPr/>
         </p:nvSpPr>
@@ -13984,7 +14214,7 @@
       </p:sp>
       <p:sp>
         <p:nvSpPr>
-          <p:cNvPr id="12" name="Shape 9"/>
+          <p:cNvPr id="13" name="Shape 10"/>
           <p:cNvSpPr/>
           <p:nvPr/>
         </p:nvSpPr>
@@ -14004,7 +14234,7 @@
       </p:sp>
       <p:sp>
         <p:nvSpPr>
-          <p:cNvPr id="13" name="Shape 10"/>
+          <p:cNvPr id="14" name="Shape 11"/>
           <p:cNvSpPr/>
           <p:nvPr/>
         </p:nvSpPr>
@@ -14024,7 +14254,7 @@
       </p:sp>
       <p:sp>
         <p:nvSpPr>
-          <p:cNvPr id="14" name="Text 11"/>
+          <p:cNvPr id="15" name="Text 12"/>
           <p:cNvSpPr/>
           <p:nvPr/>
         </p:nvSpPr>
@@ -14063,7 +14293,7 @@
       </p:sp>
       <p:sp>
         <p:nvSpPr>
-          <p:cNvPr id="15" name="Shape 12"/>
+          <p:cNvPr id="16" name="Shape 13"/>
           <p:cNvSpPr/>
           <p:nvPr/>
         </p:nvSpPr>
@@ -14090,7 +14320,7 @@
       </p:sp>
       <p:sp>
         <p:nvSpPr>
-          <p:cNvPr id="16" name="Shape 13"/>
+          <p:cNvPr id="17" name="Shape 14"/>
           <p:cNvSpPr/>
           <p:nvPr/>
         </p:nvSpPr>
@@ -14110,7 +14340,7 @@
       </p:sp>
       <p:sp>
         <p:nvSpPr>
-          <p:cNvPr id="17" name="Shape 14"/>
+          <p:cNvPr id="18" name="Shape 15"/>
           <p:cNvSpPr/>
           <p:nvPr/>
         </p:nvSpPr>
@@ -14130,7 +14360,7 @@
       </p:sp>
       <p:sp>
         <p:nvSpPr>
-          <p:cNvPr id="18" name="Text 15"/>
+          <p:cNvPr id="19" name="Text 16"/>
           <p:cNvSpPr/>
           <p:nvPr/>
         </p:nvSpPr>
@@ -14169,7 +14399,7 @@
       </p:sp>
       <p:sp>
         <p:nvSpPr>
-          <p:cNvPr id="19" name="Shape 16"/>
+          <p:cNvPr id="20" name="Shape 17"/>
           <p:cNvSpPr/>
           <p:nvPr/>
         </p:nvSpPr>
@@ -14196,7 +14426,7 @@
       </p:sp>
       <p:sp>
         <p:nvSpPr>
-          <p:cNvPr id="20" name="Shape 17"/>
+          <p:cNvPr id="21" name="Shape 18"/>
           <p:cNvSpPr/>
           <p:nvPr/>
         </p:nvSpPr>
@@ -14216,7 +14446,7 @@
       </p:sp>
       <p:sp>
         <p:nvSpPr>
-          <p:cNvPr id="21" name="Shape 18"/>
+          <p:cNvPr id="22" name="Shape 19"/>
           <p:cNvSpPr/>
           <p:nvPr/>
         </p:nvSpPr>
@@ -14236,7 +14466,7 @@
       </p:sp>
       <p:sp>
         <p:nvSpPr>
-          <p:cNvPr id="22" name="Text 19"/>
+          <p:cNvPr id="23" name="Text 20"/>
           <p:cNvSpPr/>
           <p:nvPr/>
         </p:nvSpPr>
@@ -14275,7 +14505,7 @@
       </p:sp>
       <p:sp>
         <p:nvSpPr>
-          <p:cNvPr id="23" name="Shape 20"/>
+          <p:cNvPr id="24" name="Shape 21"/>
           <p:cNvSpPr/>
           <p:nvPr/>
         </p:nvSpPr>
@@ -14302,7 +14532,7 @@
       </p:sp>
       <p:sp>
         <p:nvSpPr>
-          <p:cNvPr id="24" name="Shape 21"/>
+          <p:cNvPr id="25" name="Shape 22"/>
           <p:cNvSpPr/>
           <p:nvPr/>
         </p:nvSpPr>
@@ -14322,7 +14552,7 @@
       </p:sp>
       <p:sp>
         <p:nvSpPr>
-          <p:cNvPr id="25" name="Shape 22"/>
+          <p:cNvPr id="26" name="Shape 23"/>
           <p:cNvSpPr/>
           <p:nvPr/>
         </p:nvSpPr>
@@ -14342,7 +14572,7 @@
       </p:sp>
       <p:sp>
         <p:nvSpPr>
-          <p:cNvPr id="26" name="Text 23"/>
+          <p:cNvPr id="27" name="Text 24"/>
           <p:cNvSpPr/>
           <p:nvPr/>
         </p:nvSpPr>
@@ -14381,7 +14611,7 @@
       </p:sp>
       <p:sp>
         <p:nvSpPr>
-          <p:cNvPr id="27" name="Text 24"/>
+          <p:cNvPr id="28" name="Text 25"/>
           <p:cNvSpPr/>
           <p:nvPr/>
         </p:nvSpPr>
@@ -14430,7 +14660,7 @@
         </p:nvSpPr>
         <p:spPr>
           <a:xfrm>
-            <a:off x="11368735" y="6437376"/>
+            <a:off x="11368735" y="6327648"/>
             <a:ext cx="365760" cy="274320"/>
           </a:xfrm>
           <a:prstGeom prst="rect">
@@ -14477,13 +14707,6 @@
 <file path=ppt/slides/slide21.xml><?xml version="1.0" encoding="utf-8"?>
 <p:sld xmlns:a="http://schemas.openxmlformats.org/drawingml/2006/main" xmlns:r="http://schemas.openxmlformats.org/officeDocument/2006/relationships" xmlns:p="http://schemas.openxmlformats.org/presentationml/2006/main">
   <p:cSld name="Slide 21">
-    <p:bg>
-      <p:bgPr>
-        <a:solidFill>
-          <a:srgbClr val="FFFFFF"/>
-        </a:solidFill>
-      </p:bgPr>
-    </p:bg>
     <p:spTree>
       <p:nvGrpSpPr>
         <p:cNvPr id="1" name=""/>
@@ -14500,7 +14723,29 @@
       </p:grpSpPr>
       <p:sp>
         <p:nvSpPr>
-          <p:cNvPr id="2" name="Text 0"/>
+          <p:cNvPr id="2" name="Shape 0"/>
+          <p:cNvSpPr/>
+          <p:nvPr/>
+        </p:nvSpPr>
+        <p:spPr>
+          <a:xfrm>
+            <a:off x="231343" y="194767"/>
+            <a:ext cx="11716207" cy="6473952"/>
+          </a:xfrm>
+          <a:prstGeom prst="roundRect">
+            <a:avLst>
+              <a:gd name="adj" fmla="val 3107"/>
+            </a:avLst>
+          </a:prstGeom>
+          <a:solidFill>
+            <a:srgbClr val="FFFFFF"/>
+          </a:solidFill>
+          <a:ln/>
+        </p:spPr>
+      </p:sp>
+      <p:sp>
+        <p:nvSpPr>
+          <p:cNvPr id="3" name="Text 1"/>
           <p:cNvSpPr/>
           <p:nvPr/>
         </p:nvSpPr>
@@ -14539,7 +14784,7 @@
       </p:sp>
       <p:sp>
         <p:nvSpPr>
-          <p:cNvPr id="3" name="Shape 1"/>
+          <p:cNvPr id="4" name="Shape 2"/>
           <p:cNvSpPr/>
           <p:nvPr/>
         </p:nvSpPr>
@@ -14561,7 +14806,7 @@
       </p:sp>
       <p:sp>
         <p:nvSpPr>
-          <p:cNvPr id="4" name="Text 2"/>
+          <p:cNvPr id="5" name="Text 3"/>
           <p:cNvSpPr/>
           <p:nvPr/>
         </p:nvSpPr>
@@ -14600,7 +14845,7 @@
       </p:sp>
       <p:pic>
         <p:nvPicPr>
-          <p:cNvPr id="5" name="Image 0" descr="preencoded.png">    </p:cNvPr>
+          <p:cNvPr id="6" name="Image 0" descr="preencoded.png">    </p:cNvPr>
           <p:cNvPicPr>
             <a:picLocks noChangeAspect="1"/>
           </p:cNvPicPr>
@@ -14614,7 +14859,7 @@
         </p:blipFill>
         <p:spPr>
           <a:xfrm>
-            <a:off x="566928" y="6254496"/>
+            <a:off x="566928" y="6126480"/>
             <a:ext cx="1481328" cy="457200"/>
           </a:xfrm>
           <a:prstGeom prst="rect">
@@ -14624,7 +14869,7 @@
       </p:pic>
       <p:sp>
         <p:nvSpPr>
-          <p:cNvPr id="6" name="Shape 3"/>
+          <p:cNvPr id="7" name="Shape 4"/>
           <p:cNvSpPr/>
           <p:nvPr/>
         </p:nvSpPr>
@@ -14651,7 +14896,7 @@
       </p:sp>
       <p:sp>
         <p:nvSpPr>
-          <p:cNvPr id="7" name="Shape 4"/>
+          <p:cNvPr id="8" name="Shape 5"/>
           <p:cNvSpPr/>
           <p:nvPr/>
         </p:nvSpPr>
@@ -14671,7 +14916,7 @@
       </p:sp>
       <p:sp>
         <p:nvSpPr>
-          <p:cNvPr id="8" name="Shape 5"/>
+          <p:cNvPr id="9" name="Shape 6"/>
           <p:cNvSpPr/>
           <p:nvPr/>
         </p:nvSpPr>
@@ -14691,7 +14936,7 @@
       </p:sp>
       <p:sp>
         <p:nvSpPr>
-          <p:cNvPr id="9" name="Shape 6"/>
+          <p:cNvPr id="10" name="Shape 7"/>
           <p:cNvSpPr/>
           <p:nvPr/>
         </p:nvSpPr>
@@ -14711,7 +14956,7 @@
       </p:sp>
       <p:sp>
         <p:nvSpPr>
-          <p:cNvPr id="10" name="Text 7"/>
+          <p:cNvPr id="11" name="Text 8"/>
           <p:cNvSpPr/>
           <p:nvPr/>
         </p:nvSpPr>
@@ -14764,7 +15009,7 @@
       </p:sp>
       <p:sp>
         <p:nvSpPr>
-          <p:cNvPr id="11" name="Shape 8"/>
+          <p:cNvPr id="12" name="Shape 9"/>
           <p:cNvSpPr/>
           <p:nvPr/>
         </p:nvSpPr>
@@ -14791,7 +15036,7 @@
       </p:sp>
       <p:sp>
         <p:nvSpPr>
-          <p:cNvPr id="12" name="Shape 9"/>
+          <p:cNvPr id="13" name="Shape 10"/>
           <p:cNvSpPr/>
           <p:nvPr/>
         </p:nvSpPr>
@@ -14811,7 +15056,7 @@
       </p:sp>
       <p:sp>
         <p:nvSpPr>
-          <p:cNvPr id="13" name="Shape 10"/>
+          <p:cNvPr id="14" name="Shape 11"/>
           <p:cNvSpPr/>
           <p:nvPr/>
         </p:nvSpPr>
@@ -14831,7 +15076,7 @@
       </p:sp>
       <p:sp>
         <p:nvSpPr>
-          <p:cNvPr id="14" name="Shape 11"/>
+          <p:cNvPr id="15" name="Shape 12"/>
           <p:cNvSpPr/>
           <p:nvPr/>
         </p:nvSpPr>
@@ -14851,7 +15096,7 @@
       </p:sp>
       <p:sp>
         <p:nvSpPr>
-          <p:cNvPr id="15" name="Text 12"/>
+          <p:cNvPr id="16" name="Text 13"/>
           <p:cNvSpPr/>
           <p:nvPr/>
         </p:nvSpPr>
@@ -14904,7 +15149,7 @@
       </p:sp>
       <p:sp>
         <p:nvSpPr>
-          <p:cNvPr id="16" name="Shape 13"/>
+          <p:cNvPr id="17" name="Shape 14"/>
           <p:cNvSpPr/>
           <p:nvPr/>
         </p:nvSpPr>
@@ -14931,7 +15176,7 @@
       </p:sp>
       <p:sp>
         <p:nvSpPr>
-          <p:cNvPr id="17" name="Shape 14"/>
+          <p:cNvPr id="18" name="Shape 15"/>
           <p:cNvSpPr/>
           <p:nvPr/>
         </p:nvSpPr>
@@ -14951,7 +15196,7 @@
       </p:sp>
       <p:sp>
         <p:nvSpPr>
-          <p:cNvPr id="18" name="Shape 15"/>
+          <p:cNvPr id="19" name="Shape 16"/>
           <p:cNvSpPr/>
           <p:nvPr/>
         </p:nvSpPr>
@@ -14971,7 +15216,7 @@
       </p:sp>
       <p:sp>
         <p:nvSpPr>
-          <p:cNvPr id="19" name="Shape 16"/>
+          <p:cNvPr id="20" name="Shape 17"/>
           <p:cNvSpPr/>
           <p:nvPr/>
         </p:nvSpPr>
@@ -14991,7 +15236,7 @@
       </p:sp>
       <p:sp>
         <p:nvSpPr>
-          <p:cNvPr id="20" name="Text 17"/>
+          <p:cNvPr id="21" name="Text 18"/>
           <p:cNvSpPr/>
           <p:nvPr/>
         </p:nvSpPr>
@@ -15044,7 +15289,7 @@
       </p:sp>
       <p:sp>
         <p:nvSpPr>
-          <p:cNvPr id="21" name="Shape 18"/>
+          <p:cNvPr id="22" name="Shape 19"/>
           <p:cNvSpPr/>
           <p:nvPr/>
         </p:nvSpPr>
@@ -15071,7 +15316,7 @@
       </p:sp>
       <p:sp>
         <p:nvSpPr>
-          <p:cNvPr id="22" name="Shape 19"/>
+          <p:cNvPr id="23" name="Shape 20"/>
           <p:cNvSpPr/>
           <p:nvPr/>
         </p:nvSpPr>
@@ -15091,7 +15336,7 @@
       </p:sp>
       <p:sp>
         <p:nvSpPr>
-          <p:cNvPr id="23" name="Shape 20"/>
+          <p:cNvPr id="24" name="Shape 21"/>
           <p:cNvSpPr/>
           <p:nvPr/>
         </p:nvSpPr>
@@ -15111,7 +15356,7 @@
       </p:sp>
       <p:sp>
         <p:nvSpPr>
-          <p:cNvPr id="24" name="Shape 21"/>
+          <p:cNvPr id="25" name="Shape 22"/>
           <p:cNvSpPr/>
           <p:nvPr/>
         </p:nvSpPr>
@@ -15131,7 +15376,7 @@
       </p:sp>
       <p:sp>
         <p:nvSpPr>
-          <p:cNvPr id="25" name="Text 22"/>
+          <p:cNvPr id="26" name="Text 23"/>
           <p:cNvSpPr/>
           <p:nvPr/>
         </p:nvSpPr>
@@ -15184,7 +15429,7 @@
       </p:sp>
       <p:sp>
         <p:nvSpPr>
-          <p:cNvPr id="26" name="Shape 23"/>
+          <p:cNvPr id="27" name="Shape 24"/>
           <p:cNvSpPr/>
           <p:nvPr/>
         </p:nvSpPr>
@@ -15211,7 +15456,7 @@
       </p:sp>
       <p:sp>
         <p:nvSpPr>
-          <p:cNvPr id="27" name="Shape 24"/>
+          <p:cNvPr id="28" name="Shape 25"/>
           <p:cNvSpPr/>
           <p:nvPr/>
         </p:nvSpPr>
@@ -15231,7 +15476,7 @@
       </p:sp>
       <p:sp>
         <p:nvSpPr>
-          <p:cNvPr id="28" name="Shape 25"/>
+          <p:cNvPr id="29" name="Shape 26"/>
           <p:cNvSpPr/>
           <p:nvPr/>
         </p:nvSpPr>
@@ -15251,7 +15496,7 @@
       </p:sp>
       <p:sp>
         <p:nvSpPr>
-          <p:cNvPr id="29" name="Shape 26"/>
+          <p:cNvPr id="30" name="Shape 27"/>
           <p:cNvSpPr/>
           <p:nvPr/>
         </p:nvSpPr>
@@ -15271,7 +15516,7 @@
       </p:sp>
       <p:sp>
         <p:nvSpPr>
-          <p:cNvPr id="30" name="Text 27"/>
+          <p:cNvPr id="31" name="Text 28"/>
           <p:cNvSpPr/>
           <p:nvPr/>
         </p:nvSpPr>
@@ -15334,7 +15579,7 @@
         </p:nvSpPr>
         <p:spPr>
           <a:xfrm>
-            <a:off x="11368735" y="6437376"/>
+            <a:off x="11368735" y="6327648"/>
             <a:ext cx="365760" cy="274320"/>
           </a:xfrm>
           <a:prstGeom prst="rect">
@@ -15381,13 +15626,6 @@
 <file path=ppt/slides/slide22.xml><?xml version="1.0" encoding="utf-8"?>
 <p:sld xmlns:a="http://schemas.openxmlformats.org/drawingml/2006/main" xmlns:r="http://schemas.openxmlformats.org/officeDocument/2006/relationships" xmlns:p="http://schemas.openxmlformats.org/presentationml/2006/main">
   <p:cSld name="Slide 22">
-    <p:bg>
-      <p:bgPr>
-        <a:solidFill>
-          <a:srgbClr val="FFFFFF"/>
-        </a:solidFill>
-      </p:bgPr>
-    </p:bg>
     <p:spTree>
       <p:nvGrpSpPr>
         <p:cNvPr id="1" name=""/>
@@ -15404,7 +15642,29 @@
       </p:grpSpPr>
       <p:sp>
         <p:nvSpPr>
-          <p:cNvPr id="2" name="Text 0"/>
+          <p:cNvPr id="2" name="Shape 0"/>
+          <p:cNvSpPr/>
+          <p:nvPr/>
+        </p:nvSpPr>
+        <p:spPr>
+          <a:xfrm>
+            <a:off x="231343" y="194767"/>
+            <a:ext cx="11716207" cy="6473952"/>
+          </a:xfrm>
+          <a:prstGeom prst="roundRect">
+            <a:avLst>
+              <a:gd name="adj" fmla="val 3107"/>
+            </a:avLst>
+          </a:prstGeom>
+          <a:solidFill>
+            <a:srgbClr val="FFFFFF"/>
+          </a:solidFill>
+          <a:ln/>
+        </p:spPr>
+      </p:sp>
+      <p:sp>
+        <p:nvSpPr>
+          <p:cNvPr id="3" name="Text 1"/>
           <p:cNvSpPr/>
           <p:nvPr/>
         </p:nvSpPr>
@@ -15443,7 +15703,7 @@
       </p:sp>
       <p:sp>
         <p:nvSpPr>
-          <p:cNvPr id="3" name="Shape 1"/>
+          <p:cNvPr id="4" name="Shape 2"/>
           <p:cNvSpPr/>
           <p:nvPr/>
         </p:nvSpPr>
@@ -15465,7 +15725,7 @@
       </p:sp>
       <p:sp>
         <p:nvSpPr>
-          <p:cNvPr id="4" name="Text 2"/>
+          <p:cNvPr id="5" name="Text 3"/>
           <p:cNvSpPr/>
           <p:nvPr/>
         </p:nvSpPr>
@@ -15504,7 +15764,7 @@
       </p:sp>
       <p:pic>
         <p:nvPicPr>
-          <p:cNvPr id="5" name="Image 0" descr="preencoded.png">    </p:cNvPr>
+          <p:cNvPr id="6" name="Image 0" descr="preencoded.png">    </p:cNvPr>
           <p:cNvPicPr>
             <a:picLocks noChangeAspect="1"/>
           </p:cNvPicPr>
@@ -15518,7 +15778,7 @@
         </p:blipFill>
         <p:spPr>
           <a:xfrm>
-            <a:off x="566928" y="6254496"/>
+            <a:off x="566928" y="6126480"/>
             <a:ext cx="1481328" cy="457200"/>
           </a:xfrm>
           <a:prstGeom prst="rect">
@@ -15528,7 +15788,7 @@
       </p:pic>
       <p:sp>
         <p:nvSpPr>
-          <p:cNvPr id="6" name="Shape 3"/>
+          <p:cNvPr id="7" name="Shape 4"/>
           <p:cNvSpPr/>
           <p:nvPr/>
         </p:nvSpPr>
@@ -15555,7 +15815,7 @@
       </p:sp>
       <p:sp>
         <p:nvSpPr>
-          <p:cNvPr id="7" name="Text 4"/>
+          <p:cNvPr id="8" name="Text 5"/>
           <p:cNvSpPr/>
           <p:nvPr/>
         </p:nvSpPr>
@@ -15594,7 +15854,7 @@
       </p:sp>
       <p:sp>
         <p:nvSpPr>
-          <p:cNvPr id="8" name="Text 5"/>
+          <p:cNvPr id="9" name="Text 6"/>
           <p:cNvSpPr/>
           <p:nvPr/>
         </p:nvSpPr>
@@ -15633,7 +15893,7 @@
       </p:sp>
       <p:sp>
         <p:nvSpPr>
-          <p:cNvPr id="9" name="Text 6"/>
+          <p:cNvPr id="10" name="Text 7"/>
           <p:cNvSpPr/>
           <p:nvPr/>
         </p:nvSpPr>
@@ -15672,7 +15932,7 @@
       </p:sp>
       <p:sp>
         <p:nvSpPr>
-          <p:cNvPr id="10" name="Text 7"/>
+          <p:cNvPr id="11" name="Text 8"/>
           <p:cNvSpPr/>
           <p:nvPr/>
         </p:nvSpPr>
@@ -15725,7 +15985,7 @@
       </p:sp>
       <p:sp>
         <p:nvSpPr>
-          <p:cNvPr id="11" name="Text 8"/>
+          <p:cNvPr id="12" name="Text 9"/>
           <p:cNvSpPr/>
           <p:nvPr/>
         </p:nvSpPr>
@@ -15778,7 +16038,7 @@
       </p:sp>
       <p:sp>
         <p:nvSpPr>
-          <p:cNvPr id="12" name="Text 9"/>
+          <p:cNvPr id="13" name="Text 10"/>
           <p:cNvSpPr/>
           <p:nvPr/>
         </p:nvSpPr>
@@ -15831,7 +16091,7 @@
       </p:sp>
       <p:sp>
         <p:nvSpPr>
-          <p:cNvPr id="13" name="Shape 10"/>
+          <p:cNvPr id="14" name="Shape 11"/>
           <p:cNvSpPr/>
           <p:nvPr/>
         </p:nvSpPr>
@@ -15853,7 +16113,7 @@
       </p:sp>
       <p:sp>
         <p:nvSpPr>
-          <p:cNvPr id="14" name="Text 11"/>
+          <p:cNvPr id="15" name="Text 12"/>
           <p:cNvSpPr/>
           <p:nvPr/>
         </p:nvSpPr>
@@ -15892,7 +16152,7 @@
       </p:sp>
       <p:sp>
         <p:nvSpPr>
-          <p:cNvPr id="15" name="Text 12"/>
+          <p:cNvPr id="16" name="Text 13"/>
           <p:cNvSpPr/>
           <p:nvPr/>
         </p:nvSpPr>
@@ -15964,7 +16224,7 @@
         </p:nvSpPr>
         <p:spPr>
           <a:xfrm>
-            <a:off x="11368735" y="6437376"/>
+            <a:off x="11368735" y="6327648"/>
             <a:ext cx="365760" cy="274320"/>
           </a:xfrm>
           <a:prstGeom prst="rect">
@@ -16011,13 +16271,6 @@
 <file path=ppt/slides/slide23.xml><?xml version="1.0" encoding="utf-8"?>
 <p:sld xmlns:a="http://schemas.openxmlformats.org/drawingml/2006/main" xmlns:r="http://schemas.openxmlformats.org/officeDocument/2006/relationships" xmlns:p="http://schemas.openxmlformats.org/presentationml/2006/main">
   <p:cSld name="Slide 23">
-    <p:bg>
-      <p:bgPr>
-        <a:solidFill>
-          <a:srgbClr val="1B0942"/>
-        </a:solidFill>
-      </p:bgPr>
-    </p:bg>
     <p:spTree>
       <p:nvGrpSpPr>
         <p:cNvPr id="1" name=""/>
@@ -16534,13 +16787,6 @@
 <file path=ppt/slides/slide3.xml><?xml version="1.0" encoding="utf-8"?>
 <p:sld xmlns:a="http://schemas.openxmlformats.org/drawingml/2006/main" xmlns:r="http://schemas.openxmlformats.org/officeDocument/2006/relationships" xmlns:p="http://schemas.openxmlformats.org/presentationml/2006/main">
   <p:cSld name="Slide 3">
-    <p:bg>
-      <p:bgPr>
-        <a:solidFill>
-          <a:srgbClr val="FFFFFF"/>
-        </a:solidFill>
-      </p:bgPr>
-    </p:bg>
     <p:spTree>
       <p:nvGrpSpPr>
         <p:cNvPr id="1" name=""/>
@@ -16557,7 +16803,29 @@
       </p:grpSpPr>
       <p:sp>
         <p:nvSpPr>
-          <p:cNvPr id="2" name="Text 0"/>
+          <p:cNvPr id="2" name="Shape 0"/>
+          <p:cNvSpPr/>
+          <p:nvPr/>
+        </p:nvSpPr>
+        <p:spPr>
+          <a:xfrm>
+            <a:off x="231343" y="194767"/>
+            <a:ext cx="11716207" cy="6473952"/>
+          </a:xfrm>
+          <a:prstGeom prst="roundRect">
+            <a:avLst>
+              <a:gd name="adj" fmla="val 3107"/>
+            </a:avLst>
+          </a:prstGeom>
+          <a:solidFill>
+            <a:srgbClr val="FFFFFF"/>
+          </a:solidFill>
+          <a:ln/>
+        </p:spPr>
+      </p:sp>
+      <p:sp>
+        <p:nvSpPr>
+          <p:cNvPr id="3" name="Text 1"/>
           <p:cNvSpPr/>
           <p:nvPr/>
         </p:nvSpPr>
@@ -16596,7 +16864,7 @@
       </p:sp>
       <p:sp>
         <p:nvSpPr>
-          <p:cNvPr id="3" name="Shape 1"/>
+          <p:cNvPr id="4" name="Shape 2"/>
           <p:cNvSpPr/>
           <p:nvPr/>
         </p:nvSpPr>
@@ -16618,7 +16886,7 @@
       </p:sp>
       <p:sp>
         <p:nvSpPr>
-          <p:cNvPr id="4" name="Text 2"/>
+          <p:cNvPr id="5" name="Text 3"/>
           <p:cNvSpPr/>
           <p:nvPr/>
         </p:nvSpPr>
@@ -16657,7 +16925,7 @@
       </p:sp>
       <p:pic>
         <p:nvPicPr>
-          <p:cNvPr id="5" name="Image 0" descr="preencoded.png">    </p:cNvPr>
+          <p:cNvPr id="6" name="Image 0" descr="preencoded.png">    </p:cNvPr>
           <p:cNvPicPr>
             <a:picLocks noChangeAspect="1"/>
           </p:cNvPicPr>
@@ -16671,7 +16939,7 @@
         </p:blipFill>
         <p:spPr>
           <a:xfrm>
-            <a:off x="566928" y="6254496"/>
+            <a:off x="566928" y="6126480"/>
             <a:ext cx="1481328" cy="457200"/>
           </a:xfrm>
           <a:prstGeom prst="rect">
@@ -16681,7 +16949,7 @@
       </p:pic>
       <p:sp>
         <p:nvSpPr>
-          <p:cNvPr id="6" name="Shape 3"/>
+          <p:cNvPr id="7" name="Shape 4"/>
           <p:cNvSpPr/>
           <p:nvPr/>
         </p:nvSpPr>
@@ -16708,7 +16976,7 @@
       </p:sp>
       <p:sp>
         <p:nvSpPr>
-          <p:cNvPr id="7" name="Shape 4"/>
+          <p:cNvPr id="8" name="Shape 5"/>
           <p:cNvSpPr/>
           <p:nvPr/>
         </p:nvSpPr>
@@ -16728,7 +16996,7 @@
       </p:sp>
       <p:sp>
         <p:nvSpPr>
-          <p:cNvPr id="8" name="Text 5"/>
+          <p:cNvPr id="9" name="Text 6"/>
           <p:cNvSpPr/>
           <p:nvPr/>
         </p:nvSpPr>
@@ -16767,7 +17035,7 @@
       </p:sp>
       <p:sp>
         <p:nvSpPr>
-          <p:cNvPr id="9" name="Text 6"/>
+          <p:cNvPr id="10" name="Text 7"/>
           <p:cNvSpPr/>
           <p:nvPr/>
         </p:nvSpPr>
@@ -16806,7 +17074,7 @@
       </p:sp>
       <p:sp>
         <p:nvSpPr>
-          <p:cNvPr id="10" name="Shape 7"/>
+          <p:cNvPr id="11" name="Shape 8"/>
           <p:cNvSpPr/>
           <p:nvPr/>
         </p:nvSpPr>
@@ -16833,7 +17101,7 @@
       </p:sp>
       <p:sp>
         <p:nvSpPr>
-          <p:cNvPr id="11" name="Shape 8"/>
+          <p:cNvPr id="12" name="Shape 9"/>
           <p:cNvSpPr/>
           <p:nvPr/>
         </p:nvSpPr>
@@ -16853,7 +17121,7 @@
       </p:sp>
       <p:sp>
         <p:nvSpPr>
-          <p:cNvPr id="12" name="Text 9"/>
+          <p:cNvPr id="13" name="Text 10"/>
           <p:cNvSpPr/>
           <p:nvPr/>
         </p:nvSpPr>
@@ -16892,7 +17160,7 @@
       </p:sp>
       <p:sp>
         <p:nvSpPr>
-          <p:cNvPr id="13" name="Text 10"/>
+          <p:cNvPr id="14" name="Text 11"/>
           <p:cNvSpPr/>
           <p:nvPr/>
         </p:nvSpPr>
@@ -16931,7 +17199,7 @@
       </p:sp>
       <p:sp>
         <p:nvSpPr>
-          <p:cNvPr id="14" name="Shape 11"/>
+          <p:cNvPr id="15" name="Shape 12"/>
           <p:cNvSpPr/>
           <p:nvPr/>
         </p:nvSpPr>
@@ -16958,7 +17226,7 @@
       </p:sp>
       <p:sp>
         <p:nvSpPr>
-          <p:cNvPr id="15" name="Shape 12"/>
+          <p:cNvPr id="16" name="Shape 13"/>
           <p:cNvSpPr/>
           <p:nvPr/>
         </p:nvSpPr>
@@ -16978,7 +17246,7 @@
       </p:sp>
       <p:sp>
         <p:nvSpPr>
-          <p:cNvPr id="16" name="Text 13"/>
+          <p:cNvPr id="17" name="Text 14"/>
           <p:cNvSpPr/>
           <p:nvPr/>
         </p:nvSpPr>
@@ -17017,7 +17285,7 @@
       </p:sp>
       <p:sp>
         <p:nvSpPr>
-          <p:cNvPr id="17" name="Text 14"/>
+          <p:cNvPr id="18" name="Text 15"/>
           <p:cNvSpPr/>
           <p:nvPr/>
         </p:nvSpPr>
@@ -17056,7 +17324,7 @@
       </p:sp>
       <p:sp>
         <p:nvSpPr>
-          <p:cNvPr id="18" name="Shape 15"/>
+          <p:cNvPr id="19" name="Shape 16"/>
           <p:cNvSpPr/>
           <p:nvPr/>
         </p:nvSpPr>
@@ -17083,7 +17351,7 @@
       </p:sp>
       <p:sp>
         <p:nvSpPr>
-          <p:cNvPr id="19" name="Shape 16"/>
+          <p:cNvPr id="20" name="Shape 17"/>
           <p:cNvSpPr/>
           <p:nvPr/>
         </p:nvSpPr>
@@ -17103,7 +17371,7 @@
       </p:sp>
       <p:sp>
         <p:nvSpPr>
-          <p:cNvPr id="20" name="Text 17"/>
+          <p:cNvPr id="21" name="Text 18"/>
           <p:cNvSpPr/>
           <p:nvPr/>
         </p:nvSpPr>
@@ -17142,7 +17410,7 @@
       </p:sp>
       <p:sp>
         <p:nvSpPr>
-          <p:cNvPr id="21" name="Text 18"/>
+          <p:cNvPr id="22" name="Text 19"/>
           <p:cNvSpPr/>
           <p:nvPr/>
         </p:nvSpPr>
@@ -17181,7 +17449,7 @@
       </p:sp>
       <p:sp>
         <p:nvSpPr>
-          <p:cNvPr id="22" name="Shape 19"/>
+          <p:cNvPr id="23" name="Shape 20"/>
           <p:cNvSpPr/>
           <p:nvPr/>
         </p:nvSpPr>
@@ -17208,7 +17476,7 @@
       </p:sp>
       <p:sp>
         <p:nvSpPr>
-          <p:cNvPr id="23" name="Shape 20"/>
+          <p:cNvPr id="24" name="Shape 21"/>
           <p:cNvSpPr/>
           <p:nvPr/>
         </p:nvSpPr>
@@ -17228,7 +17496,7 @@
       </p:sp>
       <p:sp>
         <p:nvSpPr>
-          <p:cNvPr id="24" name="Text 21"/>
+          <p:cNvPr id="25" name="Text 22"/>
           <p:cNvSpPr/>
           <p:nvPr/>
         </p:nvSpPr>
@@ -17267,7 +17535,7 @@
       </p:sp>
       <p:sp>
         <p:nvSpPr>
-          <p:cNvPr id="25" name="Text 22"/>
+          <p:cNvPr id="26" name="Text 23"/>
           <p:cNvSpPr/>
           <p:nvPr/>
         </p:nvSpPr>
@@ -17306,7 +17574,7 @@
       </p:sp>
       <p:sp>
         <p:nvSpPr>
-          <p:cNvPr id="26" name="Shape 23"/>
+          <p:cNvPr id="27" name="Shape 24"/>
           <p:cNvSpPr/>
           <p:nvPr/>
         </p:nvSpPr>
@@ -17333,7 +17601,7 @@
       </p:sp>
       <p:sp>
         <p:nvSpPr>
-          <p:cNvPr id="27" name="Shape 24"/>
+          <p:cNvPr id="28" name="Shape 25"/>
           <p:cNvSpPr/>
           <p:nvPr/>
         </p:nvSpPr>
@@ -17353,7 +17621,7 @@
       </p:sp>
       <p:sp>
         <p:nvSpPr>
-          <p:cNvPr id="28" name="Text 25"/>
+          <p:cNvPr id="29" name="Text 26"/>
           <p:cNvSpPr/>
           <p:nvPr/>
         </p:nvSpPr>
@@ -17392,7 +17660,7 @@
       </p:sp>
       <p:sp>
         <p:nvSpPr>
-          <p:cNvPr id="29" name="Text 26"/>
+          <p:cNvPr id="30" name="Text 27"/>
           <p:cNvSpPr/>
           <p:nvPr/>
         </p:nvSpPr>
@@ -17431,7 +17699,7 @@
       </p:sp>
       <p:sp>
         <p:nvSpPr>
-          <p:cNvPr id="30" name="Shape 27"/>
+          <p:cNvPr id="31" name="Shape 28"/>
           <p:cNvSpPr/>
           <p:nvPr/>
         </p:nvSpPr>
@@ -17458,7 +17726,7 @@
       </p:sp>
       <p:sp>
         <p:nvSpPr>
-          <p:cNvPr id="31" name="Shape 28"/>
+          <p:cNvPr id="32" name="Shape 29"/>
           <p:cNvSpPr/>
           <p:nvPr/>
         </p:nvSpPr>
@@ -17478,7 +17746,7 @@
       </p:sp>
       <p:sp>
         <p:nvSpPr>
-          <p:cNvPr id="32" name="Text 29"/>
+          <p:cNvPr id="33" name="Text 30"/>
           <p:cNvSpPr/>
           <p:nvPr/>
         </p:nvSpPr>
@@ -17517,7 +17785,7 @@
       </p:sp>
       <p:sp>
         <p:nvSpPr>
-          <p:cNvPr id="33" name="Text 30"/>
+          <p:cNvPr id="34" name="Text 31"/>
           <p:cNvSpPr/>
           <p:nvPr/>
         </p:nvSpPr>
@@ -17556,7 +17824,7 @@
       </p:sp>
       <p:sp>
         <p:nvSpPr>
-          <p:cNvPr id="34" name="Shape 31"/>
+          <p:cNvPr id="35" name="Shape 32"/>
           <p:cNvSpPr/>
           <p:nvPr/>
         </p:nvSpPr>
@@ -17583,7 +17851,7 @@
       </p:sp>
       <p:sp>
         <p:nvSpPr>
-          <p:cNvPr id="35" name="Shape 32"/>
+          <p:cNvPr id="36" name="Shape 33"/>
           <p:cNvSpPr/>
           <p:nvPr/>
         </p:nvSpPr>
@@ -17603,7 +17871,7 @@
       </p:sp>
       <p:sp>
         <p:nvSpPr>
-          <p:cNvPr id="36" name="Text 33"/>
+          <p:cNvPr id="37" name="Text 34"/>
           <p:cNvSpPr/>
           <p:nvPr/>
         </p:nvSpPr>
@@ -17642,7 +17910,7 @@
       </p:sp>
       <p:sp>
         <p:nvSpPr>
-          <p:cNvPr id="37" name="Text 34"/>
+          <p:cNvPr id="38" name="Text 35"/>
           <p:cNvSpPr/>
           <p:nvPr/>
         </p:nvSpPr>
@@ -17681,7 +17949,7 @@
       </p:sp>
       <p:sp>
         <p:nvSpPr>
-          <p:cNvPr id="38" name="Shape 35"/>
+          <p:cNvPr id="39" name="Shape 36"/>
           <p:cNvSpPr/>
           <p:nvPr/>
         </p:nvSpPr>
@@ -17703,7 +17971,7 @@
       </p:sp>
       <p:sp>
         <p:nvSpPr>
-          <p:cNvPr id="39" name="Shape 36"/>
+          <p:cNvPr id="40" name="Shape 37"/>
           <p:cNvSpPr/>
           <p:nvPr/>
         </p:nvSpPr>
@@ -17723,7 +17991,7 @@
       </p:sp>
       <p:sp>
         <p:nvSpPr>
-          <p:cNvPr id="40" name="Text 37"/>
+          <p:cNvPr id="41" name="Text 38"/>
           <p:cNvSpPr/>
           <p:nvPr/>
         </p:nvSpPr>
@@ -17762,7 +18030,7 @@
       </p:sp>
       <p:sp>
         <p:nvSpPr>
-          <p:cNvPr id="41" name="Text 38"/>
+          <p:cNvPr id="42" name="Text 39"/>
           <p:cNvSpPr/>
           <p:nvPr/>
         </p:nvSpPr>
@@ -17801,7 +18069,7 @@
       </p:sp>
       <p:sp>
         <p:nvSpPr>
-          <p:cNvPr id="42" name="Shape 39"/>
+          <p:cNvPr id="43" name="Shape 40"/>
           <p:cNvSpPr/>
           <p:nvPr/>
         </p:nvSpPr>
@@ -17828,7 +18096,7 @@
       </p:sp>
       <p:sp>
         <p:nvSpPr>
-          <p:cNvPr id="43" name="Shape 40"/>
+          <p:cNvPr id="44" name="Shape 41"/>
           <p:cNvSpPr/>
           <p:nvPr/>
         </p:nvSpPr>
@@ -17848,7 +18116,7 @@
       </p:sp>
       <p:sp>
         <p:nvSpPr>
-          <p:cNvPr id="44" name="Text 41"/>
+          <p:cNvPr id="45" name="Text 42"/>
           <p:cNvSpPr/>
           <p:nvPr/>
         </p:nvSpPr>
@@ -17887,7 +18155,7 @@
       </p:sp>
       <p:sp>
         <p:nvSpPr>
-          <p:cNvPr id="45" name="Text 42"/>
+          <p:cNvPr id="46" name="Text 43"/>
           <p:cNvSpPr/>
           <p:nvPr/>
         </p:nvSpPr>
@@ -17926,7 +18194,7 @@
       </p:sp>
       <p:sp>
         <p:nvSpPr>
-          <p:cNvPr id="46" name="Shape 43"/>
+          <p:cNvPr id="47" name="Shape 44"/>
           <p:cNvSpPr/>
           <p:nvPr/>
         </p:nvSpPr>
@@ -17953,7 +18221,7 @@
       </p:sp>
       <p:sp>
         <p:nvSpPr>
-          <p:cNvPr id="47" name="Shape 44"/>
+          <p:cNvPr id="48" name="Shape 45"/>
           <p:cNvSpPr/>
           <p:nvPr/>
         </p:nvSpPr>
@@ -17973,7 +18241,7 @@
       </p:sp>
       <p:sp>
         <p:nvSpPr>
-          <p:cNvPr id="48" name="Text 45"/>
+          <p:cNvPr id="49" name="Text 46"/>
           <p:cNvSpPr/>
           <p:nvPr/>
         </p:nvSpPr>
@@ -18012,7 +18280,7 @@
       </p:sp>
       <p:sp>
         <p:nvSpPr>
-          <p:cNvPr id="49" name="Text 46"/>
+          <p:cNvPr id="50" name="Text 47"/>
           <p:cNvSpPr/>
           <p:nvPr/>
         </p:nvSpPr>
@@ -18051,7 +18319,7 @@
       </p:sp>
       <p:sp>
         <p:nvSpPr>
-          <p:cNvPr id="50" name="Shape 47"/>
+          <p:cNvPr id="51" name="Shape 48"/>
           <p:cNvSpPr/>
           <p:nvPr/>
         </p:nvSpPr>
@@ -18078,7 +18346,7 @@
       </p:sp>
       <p:sp>
         <p:nvSpPr>
-          <p:cNvPr id="51" name="Shape 48"/>
+          <p:cNvPr id="52" name="Shape 49"/>
           <p:cNvSpPr/>
           <p:nvPr/>
         </p:nvSpPr>
@@ -18098,7 +18366,7 @@
       </p:sp>
       <p:sp>
         <p:nvSpPr>
-          <p:cNvPr id="52" name="Text 49"/>
+          <p:cNvPr id="53" name="Text 50"/>
           <p:cNvSpPr/>
           <p:nvPr/>
         </p:nvSpPr>
@@ -18137,7 +18405,7 @@
       </p:sp>
       <p:sp>
         <p:nvSpPr>
-          <p:cNvPr id="53" name="Text 50"/>
+          <p:cNvPr id="54" name="Text 51"/>
           <p:cNvSpPr/>
           <p:nvPr/>
         </p:nvSpPr>
@@ -18176,7 +18444,7 @@
       </p:sp>
       <p:sp>
         <p:nvSpPr>
-          <p:cNvPr id="54" name="Shape 51"/>
+          <p:cNvPr id="55" name="Shape 52"/>
           <p:cNvSpPr/>
           <p:nvPr/>
         </p:nvSpPr>
@@ -18203,7 +18471,7 @@
       </p:sp>
       <p:sp>
         <p:nvSpPr>
-          <p:cNvPr id="55" name="Text 52"/>
+          <p:cNvPr id="56" name="Text 53"/>
           <p:cNvSpPr/>
           <p:nvPr/>
         </p:nvSpPr>
@@ -18255,7 +18523,7 @@
         </p:nvSpPr>
         <p:spPr>
           <a:xfrm>
-            <a:off x="11368735" y="6437376"/>
+            <a:off x="11368735" y="6327648"/>
             <a:ext cx="365760" cy="274320"/>
           </a:xfrm>
           <a:prstGeom prst="rect">
@@ -18302,13 +18570,6 @@
 <file path=ppt/slides/slide4.xml><?xml version="1.0" encoding="utf-8"?>
 <p:sld xmlns:a="http://schemas.openxmlformats.org/drawingml/2006/main" xmlns:r="http://schemas.openxmlformats.org/officeDocument/2006/relationships" xmlns:p="http://schemas.openxmlformats.org/presentationml/2006/main">
   <p:cSld name="Slide 4">
-    <p:bg>
-      <p:bgPr>
-        <a:solidFill>
-          <a:srgbClr val="FFFFFF"/>
-        </a:solidFill>
-      </p:bgPr>
-    </p:bg>
     <p:spTree>
       <p:nvGrpSpPr>
         <p:cNvPr id="1" name=""/>
@@ -18325,7 +18586,29 @@
       </p:grpSpPr>
       <p:sp>
         <p:nvSpPr>
-          <p:cNvPr id="2" name="Text 0"/>
+          <p:cNvPr id="2" name="Shape 0"/>
+          <p:cNvSpPr/>
+          <p:nvPr/>
+        </p:nvSpPr>
+        <p:spPr>
+          <a:xfrm>
+            <a:off x="231343" y="194767"/>
+            <a:ext cx="11716207" cy="6473952"/>
+          </a:xfrm>
+          <a:prstGeom prst="roundRect">
+            <a:avLst>
+              <a:gd name="adj" fmla="val 3107"/>
+            </a:avLst>
+          </a:prstGeom>
+          <a:solidFill>
+            <a:srgbClr val="FFFFFF"/>
+          </a:solidFill>
+          <a:ln/>
+        </p:spPr>
+      </p:sp>
+      <p:sp>
+        <p:nvSpPr>
+          <p:cNvPr id="3" name="Text 1"/>
           <p:cNvSpPr/>
           <p:nvPr/>
         </p:nvSpPr>
@@ -18364,7 +18647,7 @@
       </p:sp>
       <p:sp>
         <p:nvSpPr>
-          <p:cNvPr id="3" name="Text 1"/>
+          <p:cNvPr id="4" name="Text 2"/>
           <p:cNvSpPr/>
           <p:nvPr/>
         </p:nvSpPr>
@@ -18406,7 +18689,7 @@
       </p:sp>
       <p:sp>
         <p:nvSpPr>
-          <p:cNvPr id="4" name="Shape 2"/>
+          <p:cNvPr id="5" name="Shape 3"/>
           <p:cNvSpPr/>
           <p:nvPr/>
         </p:nvSpPr>
@@ -18428,7 +18711,7 @@
       </p:sp>
       <p:sp>
         <p:nvSpPr>
-          <p:cNvPr id="5" name="Text 3"/>
+          <p:cNvPr id="6" name="Text 4"/>
           <p:cNvSpPr/>
           <p:nvPr/>
         </p:nvSpPr>
@@ -18467,7 +18750,7 @@
       </p:sp>
       <p:pic>
         <p:nvPicPr>
-          <p:cNvPr id="6" name="Image 0" descr="preencoded.png">    </p:cNvPr>
+          <p:cNvPr id="7" name="Image 0" descr="preencoded.png">    </p:cNvPr>
           <p:cNvPicPr>
             <a:picLocks noChangeAspect="1"/>
           </p:cNvPicPr>
@@ -18481,7 +18764,7 @@
         </p:blipFill>
         <p:spPr>
           <a:xfrm>
-            <a:off x="566928" y="6254496"/>
+            <a:off x="566928" y="6126480"/>
             <a:ext cx="1481328" cy="457200"/>
           </a:xfrm>
           <a:prstGeom prst="rect">
@@ -18491,7 +18774,7 @@
       </p:pic>
       <p:sp>
         <p:nvSpPr>
-          <p:cNvPr id="7" name="Shape 4"/>
+          <p:cNvPr id="8" name="Shape 5"/>
           <p:cNvSpPr/>
           <p:nvPr/>
         </p:nvSpPr>
@@ -18518,7 +18801,7 @@
       </p:sp>
       <p:sp>
         <p:nvSpPr>
-          <p:cNvPr id="8" name="Text 5"/>
+          <p:cNvPr id="9" name="Text 6"/>
           <p:cNvSpPr/>
           <p:nvPr/>
         </p:nvSpPr>
@@ -18557,7 +18840,7 @@
       </p:sp>
       <p:sp>
         <p:nvSpPr>
-          <p:cNvPr id="9" name="Text 6"/>
+          <p:cNvPr id="10" name="Text 7"/>
           <p:cNvSpPr/>
           <p:nvPr/>
         </p:nvSpPr>
@@ -18599,7 +18882,7 @@
       </p:sp>
       <p:sp>
         <p:nvSpPr>
-          <p:cNvPr id="10" name="Shape 7"/>
+          <p:cNvPr id="11" name="Shape 8"/>
           <p:cNvSpPr/>
           <p:nvPr/>
         </p:nvSpPr>
@@ -18626,7 +18909,7 @@
       </p:sp>
       <p:sp>
         <p:nvSpPr>
-          <p:cNvPr id="11" name="Text 8"/>
+          <p:cNvPr id="12" name="Text 9"/>
           <p:cNvSpPr/>
           <p:nvPr/>
         </p:nvSpPr>
@@ -18665,7 +18948,7 @@
       </p:sp>
       <p:sp>
         <p:nvSpPr>
-          <p:cNvPr id="12" name="Text 9"/>
+          <p:cNvPr id="13" name="Text 10"/>
           <p:cNvSpPr/>
           <p:nvPr/>
         </p:nvSpPr>
@@ -18707,7 +18990,7 @@
       </p:sp>
       <p:sp>
         <p:nvSpPr>
-          <p:cNvPr id="13" name="Shape 10"/>
+          <p:cNvPr id="14" name="Shape 11"/>
           <p:cNvSpPr/>
           <p:nvPr/>
         </p:nvSpPr>
@@ -18734,7 +19017,7 @@
       </p:sp>
       <p:sp>
         <p:nvSpPr>
-          <p:cNvPr id="14" name="Text 11"/>
+          <p:cNvPr id="15" name="Text 12"/>
           <p:cNvSpPr/>
           <p:nvPr/>
         </p:nvSpPr>
@@ -18773,7 +19056,7 @@
       </p:sp>
       <p:sp>
         <p:nvSpPr>
-          <p:cNvPr id="15" name="Text 12"/>
+          <p:cNvPr id="16" name="Text 13"/>
           <p:cNvSpPr/>
           <p:nvPr/>
         </p:nvSpPr>
@@ -18815,7 +19098,7 @@
       </p:sp>
       <p:sp>
         <p:nvSpPr>
-          <p:cNvPr id="16" name="Shape 13"/>
+          <p:cNvPr id="17" name="Shape 14"/>
           <p:cNvSpPr/>
           <p:nvPr/>
         </p:nvSpPr>
@@ -18842,7 +19125,7 @@
       </p:sp>
       <p:sp>
         <p:nvSpPr>
-          <p:cNvPr id="17" name="Text 14"/>
+          <p:cNvPr id="18" name="Text 15"/>
           <p:cNvSpPr/>
           <p:nvPr/>
         </p:nvSpPr>
@@ -18881,7 +19164,7 @@
       </p:sp>
       <p:sp>
         <p:nvSpPr>
-          <p:cNvPr id="18" name="Text 15"/>
+          <p:cNvPr id="19" name="Text 16"/>
           <p:cNvSpPr/>
           <p:nvPr/>
         </p:nvSpPr>
@@ -18923,7 +19206,7 @@
       </p:sp>
       <p:sp>
         <p:nvSpPr>
-          <p:cNvPr id="19" name="Shape 16"/>
+          <p:cNvPr id="20" name="Shape 17"/>
           <p:cNvSpPr/>
           <p:nvPr/>
         </p:nvSpPr>
@@ -18950,7 +19233,7 @@
       </p:sp>
       <p:sp>
         <p:nvSpPr>
-          <p:cNvPr id="20" name="Text 17"/>
+          <p:cNvPr id="21" name="Text 18"/>
           <p:cNvSpPr/>
           <p:nvPr/>
         </p:nvSpPr>
@@ -18989,7 +19272,7 @@
       </p:sp>
       <p:sp>
         <p:nvSpPr>
-          <p:cNvPr id="21" name="Text 18"/>
+          <p:cNvPr id="22" name="Text 19"/>
           <p:cNvSpPr/>
           <p:nvPr/>
         </p:nvSpPr>
@@ -19031,7 +19314,7 @@
       </p:sp>
       <p:sp>
         <p:nvSpPr>
-          <p:cNvPr id="22" name="Shape 19"/>
+          <p:cNvPr id="23" name="Shape 20"/>
           <p:cNvSpPr/>
           <p:nvPr/>
         </p:nvSpPr>
@@ -19058,7 +19341,7 @@
       </p:sp>
       <p:sp>
         <p:nvSpPr>
-          <p:cNvPr id="23" name="Text 20"/>
+          <p:cNvPr id="24" name="Text 21"/>
           <p:cNvSpPr/>
           <p:nvPr/>
         </p:nvSpPr>
@@ -19097,7 +19380,7 @@
       </p:sp>
       <p:sp>
         <p:nvSpPr>
-          <p:cNvPr id="24" name="Text 21"/>
+          <p:cNvPr id="25" name="Text 22"/>
           <p:cNvSpPr/>
           <p:nvPr/>
         </p:nvSpPr>
@@ -19139,7 +19422,7 @@
       </p:sp>
       <p:sp>
         <p:nvSpPr>
-          <p:cNvPr id="25" name="Shape 22"/>
+          <p:cNvPr id="26" name="Shape 23"/>
           <p:cNvSpPr/>
           <p:nvPr/>
         </p:nvSpPr>
@@ -19166,7 +19449,7 @@
       </p:sp>
       <p:sp>
         <p:nvSpPr>
-          <p:cNvPr id="26" name="Text 23"/>
+          <p:cNvPr id="27" name="Text 24"/>
           <p:cNvSpPr/>
           <p:nvPr/>
         </p:nvSpPr>
@@ -19218,7 +19501,7 @@
         </p:nvSpPr>
         <p:spPr>
           <a:xfrm>
-            <a:off x="11368735" y="6437376"/>
+            <a:off x="11368735" y="6327648"/>
             <a:ext cx="365760" cy="274320"/>
           </a:xfrm>
           <a:prstGeom prst="rect">
@@ -19265,13 +19548,6 @@
 <file path=ppt/slides/slide5.xml><?xml version="1.0" encoding="utf-8"?>
 <p:sld xmlns:a="http://schemas.openxmlformats.org/drawingml/2006/main" xmlns:r="http://schemas.openxmlformats.org/officeDocument/2006/relationships" xmlns:p="http://schemas.openxmlformats.org/presentationml/2006/main">
   <p:cSld name="Slide 5">
-    <p:bg>
-      <p:bgPr>
-        <a:solidFill>
-          <a:srgbClr val="FFFFFF"/>
-        </a:solidFill>
-      </p:bgPr>
-    </p:bg>
     <p:spTree>
       <p:nvGrpSpPr>
         <p:cNvPr id="1" name=""/>
@@ -19288,7 +19564,29 @@
       </p:grpSpPr>
       <p:sp>
         <p:nvSpPr>
-          <p:cNvPr id="2" name="Text 0"/>
+          <p:cNvPr id="2" name="Shape 0"/>
+          <p:cNvSpPr/>
+          <p:nvPr/>
+        </p:nvSpPr>
+        <p:spPr>
+          <a:xfrm>
+            <a:off x="231343" y="194767"/>
+            <a:ext cx="11716207" cy="6473952"/>
+          </a:xfrm>
+          <a:prstGeom prst="roundRect">
+            <a:avLst>
+              <a:gd name="adj" fmla="val 3107"/>
+            </a:avLst>
+          </a:prstGeom>
+          <a:solidFill>
+            <a:srgbClr val="FFFFFF"/>
+          </a:solidFill>
+          <a:ln/>
+        </p:spPr>
+      </p:sp>
+      <p:sp>
+        <p:nvSpPr>
+          <p:cNvPr id="3" name="Text 1"/>
           <p:cNvSpPr/>
           <p:nvPr/>
         </p:nvSpPr>
@@ -19327,7 +19625,7 @@
       </p:sp>
       <p:sp>
         <p:nvSpPr>
-          <p:cNvPr id="3" name="Text 1"/>
+          <p:cNvPr id="4" name="Text 2"/>
           <p:cNvSpPr/>
           <p:nvPr/>
         </p:nvSpPr>
@@ -19366,7 +19664,7 @@
       </p:sp>
       <p:sp>
         <p:nvSpPr>
-          <p:cNvPr id="4" name="Shape 2"/>
+          <p:cNvPr id="5" name="Shape 3"/>
           <p:cNvSpPr/>
           <p:nvPr/>
         </p:nvSpPr>
@@ -19388,7 +19686,7 @@
       </p:sp>
       <p:sp>
         <p:nvSpPr>
-          <p:cNvPr id="5" name="Text 3"/>
+          <p:cNvPr id="6" name="Text 4"/>
           <p:cNvSpPr/>
           <p:nvPr/>
         </p:nvSpPr>
@@ -19427,7 +19725,7 @@
       </p:sp>
       <p:pic>
         <p:nvPicPr>
-          <p:cNvPr id="6" name="Image 0" descr="preencoded.png">    </p:cNvPr>
+          <p:cNvPr id="7" name="Image 0" descr="preencoded.png">    </p:cNvPr>
           <p:cNvPicPr>
             <a:picLocks noChangeAspect="1"/>
           </p:cNvPicPr>
@@ -19441,7 +19739,7 @@
         </p:blipFill>
         <p:spPr>
           <a:xfrm>
-            <a:off x="566928" y="6254496"/>
+            <a:off x="566928" y="6126480"/>
             <a:ext cx="1481328" cy="457200"/>
           </a:xfrm>
           <a:prstGeom prst="rect">
@@ -19451,7 +19749,7 @@
       </p:pic>
       <p:sp>
         <p:nvSpPr>
-          <p:cNvPr id="7" name="Shape 4"/>
+          <p:cNvPr id="8" name="Shape 5"/>
           <p:cNvSpPr/>
           <p:nvPr/>
         </p:nvSpPr>
@@ -19473,7 +19771,7 @@
       </p:sp>
       <p:sp>
         <p:nvSpPr>
-          <p:cNvPr id="8" name="Shape 5"/>
+          <p:cNvPr id="9" name="Shape 6"/>
           <p:cNvSpPr/>
           <p:nvPr/>
         </p:nvSpPr>
@@ -19493,7 +19791,7 @@
       </p:sp>
       <p:sp>
         <p:nvSpPr>
-          <p:cNvPr id="9" name="Text 6"/>
+          <p:cNvPr id="10" name="Text 7"/>
           <p:cNvSpPr/>
           <p:nvPr/>
         </p:nvSpPr>
@@ -19532,7 +19830,7 @@
       </p:sp>
       <p:sp>
         <p:nvSpPr>
-          <p:cNvPr id="10" name="Text 7"/>
+          <p:cNvPr id="11" name="Text 8"/>
           <p:cNvSpPr/>
           <p:nvPr/>
         </p:nvSpPr>
@@ -19571,7 +19869,7 @@
       </p:sp>
       <p:sp>
         <p:nvSpPr>
-          <p:cNvPr id="11" name="Text 8"/>
+          <p:cNvPr id="12" name="Text 9"/>
           <p:cNvSpPr/>
           <p:nvPr/>
         </p:nvSpPr>
@@ -19613,7 +19911,7 @@
       </p:sp>
       <p:sp>
         <p:nvSpPr>
-          <p:cNvPr id="12" name="Shape 9"/>
+          <p:cNvPr id="13" name="Shape 10"/>
           <p:cNvSpPr/>
           <p:nvPr/>
         </p:nvSpPr>
@@ -19635,7 +19933,7 @@
       </p:sp>
       <p:sp>
         <p:nvSpPr>
-          <p:cNvPr id="13" name="Shape 10"/>
+          <p:cNvPr id="14" name="Shape 11"/>
           <p:cNvSpPr/>
           <p:nvPr/>
         </p:nvSpPr>
@@ -19655,7 +19953,7 @@
       </p:sp>
       <p:sp>
         <p:nvSpPr>
-          <p:cNvPr id="14" name="Text 11"/>
+          <p:cNvPr id="15" name="Text 12"/>
           <p:cNvSpPr/>
           <p:nvPr/>
         </p:nvSpPr>
@@ -19694,7 +19992,7 @@
       </p:sp>
       <p:sp>
         <p:nvSpPr>
-          <p:cNvPr id="15" name="Text 12"/>
+          <p:cNvPr id="16" name="Text 13"/>
           <p:cNvSpPr/>
           <p:nvPr/>
         </p:nvSpPr>
@@ -19733,7 +20031,7 @@
       </p:sp>
       <p:sp>
         <p:nvSpPr>
-          <p:cNvPr id="16" name="Text 13"/>
+          <p:cNvPr id="17" name="Text 14"/>
           <p:cNvSpPr/>
           <p:nvPr/>
         </p:nvSpPr>
@@ -19775,7 +20073,7 @@
       </p:sp>
       <p:sp>
         <p:nvSpPr>
-          <p:cNvPr id="17" name="Shape 14"/>
+          <p:cNvPr id="18" name="Shape 15"/>
           <p:cNvSpPr/>
           <p:nvPr/>
         </p:nvSpPr>
@@ -19797,7 +20095,7 @@
       </p:sp>
       <p:sp>
         <p:nvSpPr>
-          <p:cNvPr id="18" name="Shape 15"/>
+          <p:cNvPr id="19" name="Shape 16"/>
           <p:cNvSpPr/>
           <p:nvPr/>
         </p:nvSpPr>
@@ -19817,7 +20115,7 @@
       </p:sp>
       <p:sp>
         <p:nvSpPr>
-          <p:cNvPr id="19" name="Text 16"/>
+          <p:cNvPr id="20" name="Text 17"/>
           <p:cNvSpPr/>
           <p:nvPr/>
         </p:nvSpPr>
@@ -19856,7 +20154,7 @@
       </p:sp>
       <p:sp>
         <p:nvSpPr>
-          <p:cNvPr id="20" name="Text 17"/>
+          <p:cNvPr id="21" name="Text 18"/>
           <p:cNvSpPr/>
           <p:nvPr/>
         </p:nvSpPr>
@@ -19895,7 +20193,7 @@
       </p:sp>
       <p:sp>
         <p:nvSpPr>
-          <p:cNvPr id="21" name="Text 18"/>
+          <p:cNvPr id="22" name="Text 19"/>
           <p:cNvSpPr/>
           <p:nvPr/>
         </p:nvSpPr>
@@ -19937,7 +20235,7 @@
       </p:sp>
       <p:sp>
         <p:nvSpPr>
-          <p:cNvPr id="22" name="Text 19"/>
+          <p:cNvPr id="23" name="Text 20"/>
           <p:cNvSpPr/>
           <p:nvPr/>
         </p:nvSpPr>
@@ -19976,7 +20274,7 @@
       </p:sp>
       <p:sp>
         <p:nvSpPr>
-          <p:cNvPr id="23" name="Shape 20"/>
+          <p:cNvPr id="24" name="Shape 21"/>
           <p:cNvSpPr/>
           <p:nvPr/>
         </p:nvSpPr>
@@ -19998,7 +20296,7 @@
       </p:sp>
       <p:sp>
         <p:nvSpPr>
-          <p:cNvPr id="24" name="Text 21"/>
+          <p:cNvPr id="25" name="Text 22"/>
           <p:cNvSpPr/>
           <p:nvPr/>
         </p:nvSpPr>
@@ -20037,7 +20335,7 @@
       </p:sp>
       <p:sp>
         <p:nvSpPr>
-          <p:cNvPr id="25" name="Text 22"/>
+          <p:cNvPr id="26" name="Text 23"/>
           <p:cNvSpPr/>
           <p:nvPr/>
         </p:nvSpPr>
@@ -20089,7 +20387,7 @@
         </p:nvSpPr>
         <p:spPr>
           <a:xfrm>
-            <a:off x="11368735" y="6437376"/>
+            <a:off x="11368735" y="6327648"/>
             <a:ext cx="365760" cy="274320"/>
           </a:xfrm>
           <a:prstGeom prst="rect">
@@ -20136,13 +20434,6 @@
 <file path=ppt/slides/slide6.xml><?xml version="1.0" encoding="utf-8"?>
 <p:sld xmlns:a="http://schemas.openxmlformats.org/drawingml/2006/main" xmlns:r="http://schemas.openxmlformats.org/officeDocument/2006/relationships" xmlns:p="http://schemas.openxmlformats.org/presentationml/2006/main">
   <p:cSld name="Slide 6">
-    <p:bg>
-      <p:bgPr>
-        <a:solidFill>
-          <a:srgbClr val="FFFFFF"/>
-        </a:solidFill>
-      </p:bgPr>
-    </p:bg>
     <p:spTree>
       <p:nvGrpSpPr>
         <p:cNvPr id="1" name=""/>
@@ -20159,7 +20450,29 @@
       </p:grpSpPr>
       <p:sp>
         <p:nvSpPr>
-          <p:cNvPr id="2" name="Text 0"/>
+          <p:cNvPr id="2" name="Shape 0"/>
+          <p:cNvSpPr/>
+          <p:nvPr/>
+        </p:nvSpPr>
+        <p:spPr>
+          <a:xfrm>
+            <a:off x="231343" y="194767"/>
+            <a:ext cx="11716207" cy="6473952"/>
+          </a:xfrm>
+          <a:prstGeom prst="roundRect">
+            <a:avLst>
+              <a:gd name="adj" fmla="val 3107"/>
+            </a:avLst>
+          </a:prstGeom>
+          <a:solidFill>
+            <a:srgbClr val="FFFFFF"/>
+          </a:solidFill>
+          <a:ln/>
+        </p:spPr>
+      </p:sp>
+      <p:sp>
+        <p:nvSpPr>
+          <p:cNvPr id="3" name="Text 1"/>
           <p:cNvSpPr/>
           <p:nvPr/>
         </p:nvSpPr>
@@ -20198,7 +20511,7 @@
       </p:sp>
       <p:sp>
         <p:nvSpPr>
-          <p:cNvPr id="3" name="Text 1"/>
+          <p:cNvPr id="4" name="Text 2"/>
           <p:cNvSpPr/>
           <p:nvPr/>
         </p:nvSpPr>
@@ -20237,7 +20550,7 @@
       </p:sp>
       <p:sp>
         <p:nvSpPr>
-          <p:cNvPr id="4" name="Shape 2"/>
+          <p:cNvPr id="5" name="Shape 3"/>
           <p:cNvSpPr/>
           <p:nvPr/>
         </p:nvSpPr>
@@ -20259,7 +20572,7 @@
       </p:sp>
       <p:sp>
         <p:nvSpPr>
-          <p:cNvPr id="5" name="Text 3"/>
+          <p:cNvPr id="6" name="Text 4"/>
           <p:cNvSpPr/>
           <p:nvPr/>
         </p:nvSpPr>
@@ -20298,7 +20611,7 @@
       </p:sp>
       <p:pic>
         <p:nvPicPr>
-          <p:cNvPr id="6" name="Image 0" descr="preencoded.png">    </p:cNvPr>
+          <p:cNvPr id="7" name="Image 0" descr="preencoded.png">    </p:cNvPr>
           <p:cNvPicPr>
             <a:picLocks noChangeAspect="1"/>
           </p:cNvPicPr>
@@ -20312,7 +20625,7 @@
         </p:blipFill>
         <p:spPr>
           <a:xfrm>
-            <a:off x="566928" y="6254496"/>
+            <a:off x="566928" y="6126480"/>
             <a:ext cx="1481328" cy="457200"/>
           </a:xfrm>
           <a:prstGeom prst="rect">
@@ -20322,7 +20635,7 @@
       </p:pic>
       <p:sp>
         <p:nvSpPr>
-          <p:cNvPr id="7" name="Shape 4"/>
+          <p:cNvPr id="8" name="Shape 5"/>
           <p:cNvSpPr/>
           <p:nvPr/>
         </p:nvSpPr>
@@ -20344,7 +20657,7 @@
       </p:sp>
       <p:sp>
         <p:nvSpPr>
-          <p:cNvPr id="8" name="Text 5"/>
+          <p:cNvPr id="9" name="Text 6"/>
           <p:cNvSpPr/>
           <p:nvPr/>
         </p:nvSpPr>
@@ -20383,7 +20696,7 @@
       </p:sp>
       <p:sp>
         <p:nvSpPr>
-          <p:cNvPr id="9" name="Text 6"/>
+          <p:cNvPr id="10" name="Text 7"/>
           <p:cNvSpPr/>
           <p:nvPr/>
         </p:nvSpPr>
@@ -20422,7 +20735,7 @@
       </p:sp>
       <p:sp>
         <p:nvSpPr>
-          <p:cNvPr id="10" name="Shape 7"/>
+          <p:cNvPr id="11" name="Shape 8"/>
           <p:cNvSpPr/>
           <p:nvPr/>
         </p:nvSpPr>
@@ -20444,7 +20757,7 @@
       </p:sp>
       <p:sp>
         <p:nvSpPr>
-          <p:cNvPr id="11" name="Text 8"/>
+          <p:cNvPr id="12" name="Text 9"/>
           <p:cNvSpPr/>
           <p:nvPr/>
         </p:nvSpPr>
@@ -20483,7 +20796,7 @@
       </p:sp>
       <p:sp>
         <p:nvSpPr>
-          <p:cNvPr id="12" name="Text 9"/>
+          <p:cNvPr id="13" name="Text 10"/>
           <p:cNvSpPr/>
           <p:nvPr/>
         </p:nvSpPr>
@@ -20522,7 +20835,7 @@
       </p:sp>
       <p:sp>
         <p:nvSpPr>
-          <p:cNvPr id="13" name="Shape 10"/>
+          <p:cNvPr id="14" name="Shape 11"/>
           <p:cNvSpPr/>
           <p:nvPr/>
         </p:nvSpPr>
@@ -20544,7 +20857,7 @@
       </p:sp>
       <p:sp>
         <p:nvSpPr>
-          <p:cNvPr id="14" name="Text 11"/>
+          <p:cNvPr id="15" name="Text 12"/>
           <p:cNvSpPr/>
           <p:nvPr/>
         </p:nvSpPr>
@@ -20583,7 +20896,7 @@
       </p:sp>
       <p:sp>
         <p:nvSpPr>
-          <p:cNvPr id="15" name="Text 12"/>
+          <p:cNvPr id="16" name="Text 13"/>
           <p:cNvSpPr/>
           <p:nvPr/>
         </p:nvSpPr>
@@ -20622,7 +20935,7 @@
       </p:sp>
       <p:sp>
         <p:nvSpPr>
-          <p:cNvPr id="16" name="Shape 13"/>
+          <p:cNvPr id="17" name="Shape 14"/>
           <p:cNvSpPr/>
           <p:nvPr/>
         </p:nvSpPr>
@@ -20649,7 +20962,7 @@
       </p:sp>
       <p:sp>
         <p:nvSpPr>
-          <p:cNvPr id="17" name="Text 14"/>
+          <p:cNvPr id="18" name="Text 15"/>
           <p:cNvSpPr/>
           <p:nvPr/>
         </p:nvSpPr>
@@ -20688,7 +21001,7 @@
       </p:sp>
       <p:sp>
         <p:nvSpPr>
-          <p:cNvPr id="18" name="Shape 15"/>
+          <p:cNvPr id="19" name="Shape 16"/>
           <p:cNvSpPr/>
           <p:nvPr/>
         </p:nvSpPr>
@@ -20711,7 +21024,7 @@
       </p:sp>
       <p:sp>
         <p:nvSpPr>
-          <p:cNvPr id="19" name="Shape 16"/>
+          <p:cNvPr id="20" name="Shape 17"/>
           <p:cNvSpPr/>
           <p:nvPr/>
         </p:nvSpPr>
@@ -20731,7 +21044,7 @@
       </p:sp>
       <p:sp>
         <p:nvSpPr>
-          <p:cNvPr id="20" name="Shape 17"/>
+          <p:cNvPr id="21" name="Shape 18"/>
           <p:cNvSpPr/>
           <p:nvPr/>
         </p:nvSpPr>
@@ -20753,7 +21066,7 @@
       </p:sp>
       <p:sp>
         <p:nvSpPr>
-          <p:cNvPr id="21" name="Text 18"/>
+          <p:cNvPr id="22" name="Text 19"/>
           <p:cNvSpPr/>
           <p:nvPr/>
         </p:nvSpPr>
@@ -20792,7 +21105,7 @@
       </p:sp>
       <p:sp>
         <p:nvSpPr>
-          <p:cNvPr id="22" name="Shape 19"/>
+          <p:cNvPr id="23" name="Shape 20"/>
           <p:cNvSpPr/>
           <p:nvPr/>
         </p:nvSpPr>
@@ -20814,7 +21127,7 @@
       </p:sp>
       <p:sp>
         <p:nvSpPr>
-          <p:cNvPr id="23" name="Text 20"/>
+          <p:cNvPr id="24" name="Text 21"/>
           <p:cNvSpPr/>
           <p:nvPr/>
         </p:nvSpPr>
@@ -20853,7 +21166,7 @@
       </p:sp>
       <p:sp>
         <p:nvSpPr>
-          <p:cNvPr id="24" name="Shape 21"/>
+          <p:cNvPr id="25" name="Shape 22"/>
           <p:cNvSpPr/>
           <p:nvPr/>
         </p:nvSpPr>
@@ -20875,7 +21188,7 @@
       </p:sp>
       <p:sp>
         <p:nvSpPr>
-          <p:cNvPr id="25" name="Text 22"/>
+          <p:cNvPr id="26" name="Text 23"/>
           <p:cNvSpPr/>
           <p:nvPr/>
         </p:nvSpPr>
@@ -20914,7 +21227,7 @@
       </p:sp>
       <p:sp>
         <p:nvSpPr>
-          <p:cNvPr id="26" name="Shape 23"/>
+          <p:cNvPr id="27" name="Shape 24"/>
           <p:cNvSpPr/>
           <p:nvPr/>
         </p:nvSpPr>
@@ -20937,7 +21250,7 @@
       </p:sp>
       <p:sp>
         <p:nvSpPr>
-          <p:cNvPr id="27" name="Shape 24"/>
+          <p:cNvPr id="28" name="Shape 25"/>
           <p:cNvSpPr/>
           <p:nvPr/>
         </p:nvSpPr>
@@ -20957,7 +21270,7 @@
       </p:sp>
       <p:sp>
         <p:nvSpPr>
-          <p:cNvPr id="28" name="Shape 25"/>
+          <p:cNvPr id="29" name="Shape 26"/>
           <p:cNvSpPr/>
           <p:nvPr/>
         </p:nvSpPr>
@@ -20979,7 +21292,7 @@
       </p:sp>
       <p:sp>
         <p:nvSpPr>
-          <p:cNvPr id="29" name="Text 26"/>
+          <p:cNvPr id="30" name="Text 27"/>
           <p:cNvSpPr/>
           <p:nvPr/>
         </p:nvSpPr>
@@ -21018,7 +21331,7 @@
       </p:sp>
       <p:sp>
         <p:nvSpPr>
-          <p:cNvPr id="30" name="Shape 27"/>
+          <p:cNvPr id="31" name="Shape 28"/>
           <p:cNvSpPr/>
           <p:nvPr/>
         </p:nvSpPr>
@@ -21040,7 +21353,7 @@
       </p:sp>
       <p:sp>
         <p:nvSpPr>
-          <p:cNvPr id="31" name="Text 28"/>
+          <p:cNvPr id="32" name="Text 29"/>
           <p:cNvSpPr/>
           <p:nvPr/>
         </p:nvSpPr>
@@ -21079,7 +21392,7 @@
       </p:sp>
       <p:sp>
         <p:nvSpPr>
-          <p:cNvPr id="32" name="Text 29"/>
+          <p:cNvPr id="33" name="Text 30"/>
           <p:cNvSpPr/>
           <p:nvPr/>
         </p:nvSpPr>
@@ -21121,7 +21434,7 @@
       </p:sp>
       <p:sp>
         <p:nvSpPr>
-          <p:cNvPr id="33" name="Shape 30"/>
+          <p:cNvPr id="34" name="Shape 31"/>
           <p:cNvSpPr/>
           <p:nvPr/>
         </p:nvSpPr>
@@ -21148,7 +21461,7 @@
       </p:sp>
       <p:sp>
         <p:nvSpPr>
-          <p:cNvPr id="34" name="Text 31"/>
+          <p:cNvPr id="35" name="Text 32"/>
           <p:cNvSpPr/>
           <p:nvPr/>
         </p:nvSpPr>
@@ -21200,7 +21513,7 @@
         </p:nvSpPr>
         <p:spPr>
           <a:xfrm>
-            <a:off x="11368735" y="6437376"/>
+            <a:off x="11368735" y="6327648"/>
             <a:ext cx="365760" cy="274320"/>
           </a:xfrm>
           <a:prstGeom prst="rect">
@@ -21247,13 +21560,6 @@
 <file path=ppt/slides/slide7.xml><?xml version="1.0" encoding="utf-8"?>
 <p:sld xmlns:a="http://schemas.openxmlformats.org/drawingml/2006/main" xmlns:r="http://schemas.openxmlformats.org/officeDocument/2006/relationships" xmlns:p="http://schemas.openxmlformats.org/presentationml/2006/main">
   <p:cSld name="Slide 7">
-    <p:bg>
-      <p:bgPr>
-        <a:solidFill>
-          <a:srgbClr val="FFFFFF"/>
-        </a:solidFill>
-      </p:bgPr>
-    </p:bg>
     <p:spTree>
       <p:nvGrpSpPr>
         <p:cNvPr id="1" name=""/>
@@ -21270,7 +21576,29 @@
       </p:grpSpPr>
       <p:sp>
         <p:nvSpPr>
-          <p:cNvPr id="2" name="Text 0"/>
+          <p:cNvPr id="2" name="Shape 0"/>
+          <p:cNvSpPr/>
+          <p:nvPr/>
+        </p:nvSpPr>
+        <p:spPr>
+          <a:xfrm>
+            <a:off x="231343" y="194767"/>
+            <a:ext cx="11716207" cy="6473952"/>
+          </a:xfrm>
+          <a:prstGeom prst="roundRect">
+            <a:avLst>
+              <a:gd name="adj" fmla="val 3107"/>
+            </a:avLst>
+          </a:prstGeom>
+          <a:solidFill>
+            <a:srgbClr val="FFFFFF"/>
+          </a:solidFill>
+          <a:ln/>
+        </p:spPr>
+      </p:sp>
+      <p:sp>
+        <p:nvSpPr>
+          <p:cNvPr id="3" name="Text 1"/>
           <p:cNvSpPr/>
           <p:nvPr/>
         </p:nvSpPr>
@@ -21309,7 +21637,7 @@
       </p:sp>
       <p:sp>
         <p:nvSpPr>
-          <p:cNvPr id="3" name="Text 1"/>
+          <p:cNvPr id="4" name="Text 2"/>
           <p:cNvSpPr/>
           <p:nvPr/>
         </p:nvSpPr>
@@ -21348,7 +21676,7 @@
       </p:sp>
       <p:sp>
         <p:nvSpPr>
-          <p:cNvPr id="4" name="Shape 2"/>
+          <p:cNvPr id="5" name="Shape 3"/>
           <p:cNvSpPr/>
           <p:nvPr/>
         </p:nvSpPr>
@@ -21370,7 +21698,7 @@
       </p:sp>
       <p:sp>
         <p:nvSpPr>
-          <p:cNvPr id="5" name="Text 3"/>
+          <p:cNvPr id="6" name="Text 4"/>
           <p:cNvSpPr/>
           <p:nvPr/>
         </p:nvSpPr>
@@ -21409,7 +21737,7 @@
       </p:sp>
       <p:pic>
         <p:nvPicPr>
-          <p:cNvPr id="6" name="Image 0" descr="preencoded.png">    </p:cNvPr>
+          <p:cNvPr id="7" name="Image 0" descr="preencoded.png">    </p:cNvPr>
           <p:cNvPicPr>
             <a:picLocks noChangeAspect="1"/>
           </p:cNvPicPr>
@@ -21423,7 +21751,7 @@
         </p:blipFill>
         <p:spPr>
           <a:xfrm>
-            <a:off x="566928" y="6254496"/>
+            <a:off x="566928" y="6126480"/>
             <a:ext cx="1481328" cy="457200"/>
           </a:xfrm>
           <a:prstGeom prst="rect">
@@ -21433,7 +21761,7 @@
       </p:pic>
       <p:sp>
         <p:nvSpPr>
-          <p:cNvPr id="7" name="Shape 4"/>
+          <p:cNvPr id="8" name="Shape 5"/>
           <p:cNvSpPr/>
           <p:nvPr/>
         </p:nvSpPr>
@@ -21455,7 +21783,7 @@
       </p:sp>
       <p:sp>
         <p:nvSpPr>
-          <p:cNvPr id="8" name="Text 5"/>
+          <p:cNvPr id="9" name="Text 6"/>
           <p:cNvSpPr/>
           <p:nvPr/>
         </p:nvSpPr>
@@ -21494,7 +21822,7 @@
       </p:sp>
       <p:sp>
         <p:nvSpPr>
-          <p:cNvPr id="9" name="Text 6"/>
+          <p:cNvPr id="10" name="Text 7"/>
           <p:cNvSpPr/>
           <p:nvPr/>
         </p:nvSpPr>
@@ -21536,7 +21864,7 @@
       </p:sp>
       <p:sp>
         <p:nvSpPr>
-          <p:cNvPr id="10" name="Shape 7"/>
+          <p:cNvPr id="11" name="Shape 8"/>
           <p:cNvSpPr/>
           <p:nvPr/>
         </p:nvSpPr>
@@ -21558,7 +21886,7 @@
       </p:sp>
       <p:sp>
         <p:nvSpPr>
-          <p:cNvPr id="11" name="Text 8"/>
+          <p:cNvPr id="12" name="Text 9"/>
           <p:cNvSpPr/>
           <p:nvPr/>
         </p:nvSpPr>
@@ -21597,7 +21925,7 @@
       </p:sp>
       <p:sp>
         <p:nvSpPr>
-          <p:cNvPr id="12" name="Text 9"/>
+          <p:cNvPr id="13" name="Text 10"/>
           <p:cNvSpPr/>
           <p:nvPr/>
         </p:nvSpPr>
@@ -21639,7 +21967,7 @@
       </p:sp>
       <p:sp>
         <p:nvSpPr>
-          <p:cNvPr id="13" name="Text 10"/>
+          <p:cNvPr id="14" name="Text 11"/>
           <p:cNvSpPr/>
           <p:nvPr/>
         </p:nvSpPr>
@@ -21678,7 +22006,7 @@
       </p:sp>
       <p:sp>
         <p:nvSpPr>
-          <p:cNvPr id="14" name="Shape 11"/>
+          <p:cNvPr id="15" name="Shape 12"/>
           <p:cNvSpPr/>
           <p:nvPr/>
         </p:nvSpPr>
@@ -21700,7 +22028,7 @@
       </p:sp>
       <p:sp>
         <p:nvSpPr>
-          <p:cNvPr id="15" name="Text 12"/>
+          <p:cNvPr id="16" name="Text 13"/>
           <p:cNvSpPr/>
           <p:nvPr/>
         </p:nvSpPr>
@@ -21739,7 +22067,7 @@
       </p:sp>
       <p:sp>
         <p:nvSpPr>
-          <p:cNvPr id="16" name="Text 13"/>
+          <p:cNvPr id="17" name="Text 14"/>
           <p:cNvSpPr/>
           <p:nvPr/>
         </p:nvSpPr>
@@ -21791,7 +22119,7 @@
         </p:nvSpPr>
         <p:spPr>
           <a:xfrm>
-            <a:off x="11368735" y="6437376"/>
+            <a:off x="11368735" y="6327648"/>
             <a:ext cx="365760" cy="274320"/>
           </a:xfrm>
           <a:prstGeom prst="rect">
@@ -21838,13 +22166,6 @@
 <file path=ppt/slides/slide8.xml><?xml version="1.0" encoding="utf-8"?>
 <p:sld xmlns:a="http://schemas.openxmlformats.org/drawingml/2006/main" xmlns:r="http://schemas.openxmlformats.org/officeDocument/2006/relationships" xmlns:p="http://schemas.openxmlformats.org/presentationml/2006/main">
   <p:cSld name="Slide 8">
-    <p:bg>
-      <p:bgPr>
-        <a:solidFill>
-          <a:srgbClr val="FFFFFF"/>
-        </a:solidFill>
-      </p:bgPr>
-    </p:bg>
     <p:spTree>
       <p:nvGrpSpPr>
         <p:cNvPr id="1" name=""/>
@@ -21861,7 +22182,29 @@
       </p:grpSpPr>
       <p:sp>
         <p:nvSpPr>
-          <p:cNvPr id="2" name="Text 0"/>
+          <p:cNvPr id="2" name="Shape 0"/>
+          <p:cNvSpPr/>
+          <p:nvPr/>
+        </p:nvSpPr>
+        <p:spPr>
+          <a:xfrm>
+            <a:off x="231343" y="194767"/>
+            <a:ext cx="11716207" cy="6473952"/>
+          </a:xfrm>
+          <a:prstGeom prst="roundRect">
+            <a:avLst>
+              <a:gd name="adj" fmla="val 3107"/>
+            </a:avLst>
+          </a:prstGeom>
+          <a:solidFill>
+            <a:srgbClr val="FFFFFF"/>
+          </a:solidFill>
+          <a:ln/>
+        </p:spPr>
+      </p:sp>
+      <p:sp>
+        <p:nvSpPr>
+          <p:cNvPr id="3" name="Text 1"/>
           <p:cNvSpPr/>
           <p:nvPr/>
         </p:nvSpPr>
@@ -21900,7 +22243,7 @@
       </p:sp>
       <p:sp>
         <p:nvSpPr>
-          <p:cNvPr id="3" name="Text 1"/>
+          <p:cNvPr id="4" name="Text 2"/>
           <p:cNvSpPr/>
           <p:nvPr/>
         </p:nvSpPr>
@@ -21939,7 +22282,7 @@
       </p:sp>
       <p:sp>
         <p:nvSpPr>
-          <p:cNvPr id="4" name="Shape 2"/>
+          <p:cNvPr id="5" name="Shape 3"/>
           <p:cNvSpPr/>
           <p:nvPr/>
         </p:nvSpPr>
@@ -21961,7 +22304,7 @@
       </p:sp>
       <p:sp>
         <p:nvSpPr>
-          <p:cNvPr id="5" name="Text 3"/>
+          <p:cNvPr id="6" name="Text 4"/>
           <p:cNvSpPr/>
           <p:nvPr/>
         </p:nvSpPr>
@@ -22000,7 +22343,7 @@
       </p:sp>
       <p:pic>
         <p:nvPicPr>
-          <p:cNvPr id="6" name="Image 0" descr="preencoded.png">    </p:cNvPr>
+          <p:cNvPr id="7" name="Image 0" descr="preencoded.png">    </p:cNvPr>
           <p:cNvPicPr>
             <a:picLocks noChangeAspect="1"/>
           </p:cNvPicPr>
@@ -22014,7 +22357,7 @@
         </p:blipFill>
         <p:spPr>
           <a:xfrm>
-            <a:off x="566928" y="6254496"/>
+            <a:off x="566928" y="6126480"/>
             <a:ext cx="1481328" cy="457200"/>
           </a:xfrm>
           <a:prstGeom prst="rect">
@@ -22024,7 +22367,7 @@
       </p:pic>
       <p:sp>
         <p:nvSpPr>
-          <p:cNvPr id="7" name="Shape 4"/>
+          <p:cNvPr id="8" name="Shape 5"/>
           <p:cNvSpPr/>
           <p:nvPr/>
         </p:nvSpPr>
@@ -22051,7 +22394,7 @@
       </p:sp>
       <p:sp>
         <p:nvSpPr>
-          <p:cNvPr id="8" name="Text 5"/>
+          <p:cNvPr id="9" name="Text 6"/>
           <p:cNvSpPr/>
           <p:nvPr/>
         </p:nvSpPr>
@@ -22193,7 +22536,7 @@
       </p:sp>
       <p:sp>
         <p:nvSpPr>
-          <p:cNvPr id="9" name="Text 6"/>
+          <p:cNvPr id="10" name="Text 7"/>
           <p:cNvSpPr/>
           <p:nvPr/>
         </p:nvSpPr>
@@ -22232,7 +22575,7 @@
       </p:sp>
       <p:sp>
         <p:nvSpPr>
-          <p:cNvPr id="10" name="Text 7"/>
+          <p:cNvPr id="11" name="Text 8"/>
           <p:cNvSpPr/>
           <p:nvPr/>
         </p:nvSpPr>
@@ -22271,7 +22614,7 @@
       </p:sp>
       <p:sp>
         <p:nvSpPr>
-          <p:cNvPr id="11" name="Shape 8"/>
+          <p:cNvPr id="12" name="Shape 9"/>
           <p:cNvSpPr/>
           <p:nvPr/>
         </p:nvSpPr>
@@ -22293,7 +22636,7 @@
       </p:sp>
       <p:sp>
         <p:nvSpPr>
-          <p:cNvPr id="12" name="Text 9"/>
+          <p:cNvPr id="13" name="Text 10"/>
           <p:cNvSpPr/>
           <p:nvPr/>
         </p:nvSpPr>
@@ -22332,7 +22675,7 @@
       </p:sp>
       <p:sp>
         <p:nvSpPr>
-          <p:cNvPr id="13" name="Text 10"/>
+          <p:cNvPr id="14" name="Text 11"/>
           <p:cNvSpPr/>
           <p:nvPr/>
         </p:nvSpPr>
@@ -22371,7 +22714,7 @@
       </p:sp>
       <p:sp>
         <p:nvSpPr>
-          <p:cNvPr id="14" name="Text 11"/>
+          <p:cNvPr id="15" name="Text 12"/>
           <p:cNvSpPr/>
           <p:nvPr/>
         </p:nvSpPr>
@@ -22410,7 +22753,7 @@
       </p:sp>
       <p:sp>
         <p:nvSpPr>
-          <p:cNvPr id="15" name="Shape 12"/>
+          <p:cNvPr id="16" name="Shape 13"/>
           <p:cNvSpPr/>
           <p:nvPr/>
         </p:nvSpPr>
@@ -22432,7 +22775,7 @@
       </p:sp>
       <p:sp>
         <p:nvSpPr>
-          <p:cNvPr id="16" name="Text 13"/>
+          <p:cNvPr id="17" name="Text 14"/>
           <p:cNvSpPr/>
           <p:nvPr/>
         </p:nvSpPr>
@@ -22471,7 +22814,7 @@
       </p:sp>
       <p:sp>
         <p:nvSpPr>
-          <p:cNvPr id="17" name="Text 14"/>
+          <p:cNvPr id="18" name="Text 15"/>
           <p:cNvSpPr/>
           <p:nvPr/>
         </p:nvSpPr>
@@ -22510,7 +22853,7 @@
       </p:sp>
       <p:sp>
         <p:nvSpPr>
-          <p:cNvPr id="18" name="Text 15"/>
+          <p:cNvPr id="19" name="Text 16"/>
           <p:cNvSpPr/>
           <p:nvPr/>
         </p:nvSpPr>
@@ -22549,7 +22892,7 @@
       </p:sp>
       <p:sp>
         <p:nvSpPr>
-          <p:cNvPr id="19" name="Shape 16"/>
+          <p:cNvPr id="20" name="Shape 17"/>
           <p:cNvSpPr/>
           <p:nvPr/>
         </p:nvSpPr>
@@ -22571,7 +22914,7 @@
       </p:sp>
       <p:sp>
         <p:nvSpPr>
-          <p:cNvPr id="20" name="Text 17"/>
+          <p:cNvPr id="21" name="Text 18"/>
           <p:cNvSpPr/>
           <p:nvPr/>
         </p:nvSpPr>
@@ -22610,7 +22953,7 @@
       </p:sp>
       <p:sp>
         <p:nvSpPr>
-          <p:cNvPr id="21" name="Text 18"/>
+          <p:cNvPr id="22" name="Text 19"/>
           <p:cNvSpPr/>
           <p:nvPr/>
         </p:nvSpPr>
@@ -22649,7 +22992,7 @@
       </p:sp>
       <p:sp>
         <p:nvSpPr>
-          <p:cNvPr id="22" name="Text 19"/>
+          <p:cNvPr id="23" name="Text 20"/>
           <p:cNvSpPr/>
           <p:nvPr/>
         </p:nvSpPr>
@@ -22688,7 +23031,7 @@
       </p:sp>
       <p:sp>
         <p:nvSpPr>
-          <p:cNvPr id="23" name="Shape 20"/>
+          <p:cNvPr id="24" name="Shape 21"/>
           <p:cNvSpPr/>
           <p:nvPr/>
         </p:nvSpPr>
@@ -22710,7 +23053,7 @@
       </p:sp>
       <p:sp>
         <p:nvSpPr>
-          <p:cNvPr id="24" name="Text 21"/>
+          <p:cNvPr id="25" name="Text 22"/>
           <p:cNvSpPr/>
           <p:nvPr/>
         </p:nvSpPr>
@@ -22759,7 +23102,7 @@
         </p:nvSpPr>
         <p:spPr>
           <a:xfrm>
-            <a:off x="11368735" y="6437376"/>
+            <a:off x="11368735" y="6327648"/>
             <a:ext cx="365760" cy="274320"/>
           </a:xfrm>
           <a:prstGeom prst="rect">
@@ -22806,13 +23149,6 @@
 <file path=ppt/slides/slide9.xml><?xml version="1.0" encoding="utf-8"?>
 <p:sld xmlns:a="http://schemas.openxmlformats.org/drawingml/2006/main" xmlns:r="http://schemas.openxmlformats.org/officeDocument/2006/relationships" xmlns:p="http://schemas.openxmlformats.org/presentationml/2006/main">
   <p:cSld name="Slide 9">
-    <p:bg>
-      <p:bgPr>
-        <a:solidFill>
-          <a:srgbClr val="FFFFFF"/>
-        </a:solidFill>
-      </p:bgPr>
-    </p:bg>
     <p:spTree>
       <p:nvGrpSpPr>
         <p:cNvPr id="1" name=""/>
@@ -22829,7 +23165,29 @@
       </p:grpSpPr>
       <p:sp>
         <p:nvSpPr>
-          <p:cNvPr id="2" name="Text 0"/>
+          <p:cNvPr id="2" name="Shape 0"/>
+          <p:cNvSpPr/>
+          <p:nvPr/>
+        </p:nvSpPr>
+        <p:spPr>
+          <a:xfrm>
+            <a:off x="231343" y="194767"/>
+            <a:ext cx="11716207" cy="6473952"/>
+          </a:xfrm>
+          <a:prstGeom prst="roundRect">
+            <a:avLst>
+              <a:gd name="adj" fmla="val 3107"/>
+            </a:avLst>
+          </a:prstGeom>
+          <a:solidFill>
+            <a:srgbClr val="FFFFFF"/>
+          </a:solidFill>
+          <a:ln/>
+        </p:spPr>
+      </p:sp>
+      <p:sp>
+        <p:nvSpPr>
+          <p:cNvPr id="3" name="Text 1"/>
           <p:cNvSpPr/>
           <p:nvPr/>
         </p:nvSpPr>
@@ -22868,7 +23226,7 @@
       </p:sp>
       <p:sp>
         <p:nvSpPr>
-          <p:cNvPr id="3" name="Text 1"/>
+          <p:cNvPr id="4" name="Text 2"/>
           <p:cNvSpPr/>
           <p:nvPr/>
         </p:nvSpPr>
@@ -22907,7 +23265,7 @@
       </p:sp>
       <p:sp>
         <p:nvSpPr>
-          <p:cNvPr id="4" name="Shape 2"/>
+          <p:cNvPr id="5" name="Shape 3"/>
           <p:cNvSpPr/>
           <p:nvPr/>
         </p:nvSpPr>
@@ -22929,7 +23287,7 @@
       </p:sp>
       <p:sp>
         <p:nvSpPr>
-          <p:cNvPr id="5" name="Text 3"/>
+          <p:cNvPr id="6" name="Text 4"/>
           <p:cNvSpPr/>
           <p:nvPr/>
         </p:nvSpPr>
@@ -22968,7 +23326,7 @@
       </p:sp>
       <p:pic>
         <p:nvPicPr>
-          <p:cNvPr id="6" name="Image 0" descr="preencoded.png">    </p:cNvPr>
+          <p:cNvPr id="7" name="Image 0" descr="preencoded.png">    </p:cNvPr>
           <p:cNvPicPr>
             <a:picLocks noChangeAspect="1"/>
           </p:cNvPicPr>
@@ -22982,7 +23340,7 @@
         </p:blipFill>
         <p:spPr>
           <a:xfrm>
-            <a:off x="566928" y="6254496"/>
+            <a:off x="566928" y="6126480"/>
             <a:ext cx="1481328" cy="457200"/>
           </a:xfrm>
           <a:prstGeom prst="rect">
@@ -22992,7 +23350,7 @@
       </p:pic>
       <p:sp>
         <p:nvSpPr>
-          <p:cNvPr id="7" name="Shape 4"/>
+          <p:cNvPr id="8" name="Shape 5"/>
           <p:cNvSpPr/>
           <p:nvPr/>
         </p:nvSpPr>
@@ -23014,7 +23372,7 @@
       </p:sp>
       <p:sp>
         <p:nvSpPr>
-          <p:cNvPr id="8" name="Text 5"/>
+          <p:cNvPr id="9" name="Text 6"/>
           <p:cNvSpPr/>
           <p:nvPr/>
         </p:nvSpPr>
@@ -23053,7 +23411,7 @@
       </p:sp>
       <p:sp>
         <p:nvSpPr>
-          <p:cNvPr id="9" name="Text 6"/>
+          <p:cNvPr id="10" name="Text 7"/>
           <p:cNvSpPr/>
           <p:nvPr/>
         </p:nvSpPr>
@@ -23095,7 +23453,7 @@
       </p:sp>
       <p:sp>
         <p:nvSpPr>
-          <p:cNvPr id="10" name="Shape 7"/>
+          <p:cNvPr id="11" name="Shape 8"/>
           <p:cNvSpPr/>
           <p:nvPr/>
         </p:nvSpPr>
@@ -23117,7 +23475,7 @@
       </p:sp>
       <p:sp>
         <p:nvSpPr>
-          <p:cNvPr id="11" name="Text 8"/>
+          <p:cNvPr id="12" name="Text 9"/>
           <p:cNvSpPr/>
           <p:nvPr/>
         </p:nvSpPr>
@@ -23156,7 +23514,7 @@
       </p:sp>
       <p:sp>
         <p:nvSpPr>
-          <p:cNvPr id="12" name="Text 9"/>
+          <p:cNvPr id="13" name="Text 10"/>
           <p:cNvSpPr/>
           <p:nvPr/>
         </p:nvSpPr>
@@ -23195,7 +23553,7 @@
       </p:sp>
       <p:sp>
         <p:nvSpPr>
-          <p:cNvPr id="13" name="Shape 10"/>
+          <p:cNvPr id="14" name="Shape 11"/>
           <p:cNvSpPr/>
           <p:nvPr/>
         </p:nvSpPr>
@@ -23217,7 +23575,7 @@
       </p:sp>
       <p:sp>
         <p:nvSpPr>
-          <p:cNvPr id="14" name="Text 11"/>
+          <p:cNvPr id="15" name="Text 12"/>
           <p:cNvSpPr/>
           <p:nvPr/>
         </p:nvSpPr>
@@ -23256,7 +23614,7 @@
       </p:sp>
       <p:sp>
         <p:nvSpPr>
-          <p:cNvPr id="15" name="Text 12"/>
+          <p:cNvPr id="16" name="Text 13"/>
           <p:cNvSpPr/>
           <p:nvPr/>
         </p:nvSpPr>
@@ -23295,7 +23653,7 @@
       </p:sp>
       <p:sp>
         <p:nvSpPr>
-          <p:cNvPr id="16" name="Shape 13"/>
+          <p:cNvPr id="17" name="Shape 14"/>
           <p:cNvSpPr/>
           <p:nvPr/>
         </p:nvSpPr>
@@ -23317,7 +23675,7 @@
       </p:sp>
       <p:sp>
         <p:nvSpPr>
-          <p:cNvPr id="17" name="Text 14"/>
+          <p:cNvPr id="18" name="Text 15"/>
           <p:cNvSpPr/>
           <p:nvPr/>
         </p:nvSpPr>
@@ -23356,7 +23714,7 @@
       </p:sp>
       <p:sp>
         <p:nvSpPr>
-          <p:cNvPr id="18" name="Text 15"/>
+          <p:cNvPr id="19" name="Text 16"/>
           <p:cNvSpPr/>
           <p:nvPr/>
         </p:nvSpPr>
@@ -23398,7 +23756,7 @@
       </p:sp>
       <p:sp>
         <p:nvSpPr>
-          <p:cNvPr id="19" name="Shape 16"/>
+          <p:cNvPr id="20" name="Shape 17"/>
           <p:cNvSpPr/>
           <p:nvPr/>
         </p:nvSpPr>
@@ -23420,7 +23778,7 @@
       </p:sp>
       <p:sp>
         <p:nvSpPr>
-          <p:cNvPr id="20" name="Text 17"/>
+          <p:cNvPr id="21" name="Text 18"/>
           <p:cNvSpPr/>
           <p:nvPr/>
         </p:nvSpPr>
@@ -23459,7 +23817,7 @@
       </p:sp>
       <p:sp>
         <p:nvSpPr>
-          <p:cNvPr id="21" name="Text 18"/>
+          <p:cNvPr id="22" name="Text 19"/>
           <p:cNvSpPr/>
           <p:nvPr/>
         </p:nvSpPr>
@@ -23511,7 +23869,7 @@
         </p:nvSpPr>
         <p:spPr>
           <a:xfrm>
-            <a:off x="11368735" y="6437376"/>
+            <a:off x="11368735" y="6327648"/>
             <a:ext cx="365760" cy="274320"/>
           </a:xfrm>
           <a:prstGeom prst="rect">

--- a/docs/decks/L10.pptx
+++ b/docs/decks/L10.pptx
@@ -2536,7 +2536,7 @@
         </p:nvSpPr>
         <p:spPr>
           <a:xfrm>
-            <a:off x="11368735" y="6327648"/>
+            <a:off x="11368735" y="6437376"/>
             <a:ext cx="365760" cy="274320"/>
           </a:xfrm>
           <a:prstGeom prst="rect">
@@ -2665,7 +2665,7 @@
         </p:nvSpPr>
         <p:spPr>
           <a:xfrm>
-            <a:off x="11368735" y="6327648"/>
+            <a:off x="11368735" y="6437376"/>
             <a:ext cx="365760" cy="274320"/>
           </a:xfrm>
           <a:prstGeom prst="rect">
@@ -3805,7 +3805,7 @@
         </p:blipFill>
         <p:spPr>
           <a:xfrm>
-            <a:off x="566928" y="6126480"/>
+            <a:off x="566928" y="6254496"/>
             <a:ext cx="1481328" cy="457200"/>
           </a:xfrm>
           <a:prstGeom prst="rect">
@@ -4783,7 +4783,7 @@
         </p:nvSpPr>
         <p:spPr>
           <a:xfrm>
-            <a:off x="11368735" y="6327648"/>
+            <a:off x="11368735" y="6437376"/>
             <a:ext cx="365760" cy="274320"/>
           </a:xfrm>
           <a:prstGeom prst="rect">
@@ -4999,7 +4999,7 @@
         </p:blipFill>
         <p:spPr>
           <a:xfrm>
-            <a:off x="566928" y="6126480"/>
+            <a:off x="566928" y="6254496"/>
             <a:ext cx="1481328" cy="457200"/>
           </a:xfrm>
           <a:prstGeom prst="rect">
@@ -5714,7 +5714,7 @@
         </p:nvSpPr>
         <p:spPr>
           <a:xfrm>
-            <a:off x="11368735" y="6327648"/>
+            <a:off x="11368735" y="6437376"/>
             <a:ext cx="365760" cy="274320"/>
           </a:xfrm>
           <a:prstGeom prst="rect">
@@ -5930,7 +5930,7 @@
         </p:blipFill>
         <p:spPr>
           <a:xfrm>
-            <a:off x="566928" y="6126480"/>
+            <a:off x="566928" y="6254496"/>
             <a:ext cx="1481328" cy="457200"/>
           </a:xfrm>
           <a:prstGeom prst="rect">
@@ -6761,7 +6761,7 @@
         </p:nvSpPr>
         <p:spPr>
           <a:xfrm>
-            <a:off x="11368735" y="6327648"/>
+            <a:off x="11368735" y="6437376"/>
             <a:ext cx="365760" cy="274320"/>
           </a:xfrm>
           <a:prstGeom prst="rect">
@@ -6977,7 +6977,7 @@
         </p:blipFill>
         <p:spPr>
           <a:xfrm>
-            <a:off x="566928" y="6126480"/>
+            <a:off x="566928" y="6254496"/>
             <a:ext cx="1481328" cy="457200"/>
           </a:xfrm>
           <a:prstGeom prst="rect">
@@ -7894,7 +7894,7 @@
         </p:nvSpPr>
         <p:spPr>
           <a:xfrm>
-            <a:off x="11368735" y="6327648"/>
+            <a:off x="11368735" y="6437376"/>
             <a:ext cx="365760" cy="274320"/>
           </a:xfrm>
           <a:prstGeom prst="rect">
@@ -8110,7 +8110,7 @@
         </p:blipFill>
         <p:spPr>
           <a:xfrm>
-            <a:off x="566928" y="6126480"/>
+            <a:off x="566928" y="6254496"/>
             <a:ext cx="1481328" cy="457200"/>
           </a:xfrm>
           <a:prstGeom prst="rect">
@@ -8626,7 +8626,7 @@
         </p:nvSpPr>
         <p:spPr>
           <a:xfrm>
-            <a:off x="11368735" y="6327648"/>
+            <a:off x="11368735" y="6437376"/>
             <a:ext cx="365760" cy="274320"/>
           </a:xfrm>
           <a:prstGeom prst="rect">
@@ -8903,7 +8903,7 @@
         </p:blipFill>
         <p:spPr>
           <a:xfrm>
-            <a:off x="566928" y="6126480"/>
+            <a:off x="566928" y="6254496"/>
             <a:ext cx="1481328" cy="457200"/>
           </a:xfrm>
           <a:prstGeom prst="rect">
@@ -9301,7 +9301,7 @@
         </p:nvSpPr>
         <p:spPr>
           <a:xfrm>
-            <a:off x="11368735" y="6327648"/>
+            <a:off x="11368735" y="6437376"/>
             <a:ext cx="365760" cy="274320"/>
           </a:xfrm>
           <a:prstGeom prst="rect">
@@ -9517,7 +9517,7 @@
         </p:blipFill>
         <p:spPr>
           <a:xfrm>
-            <a:off x="566928" y="6126480"/>
+            <a:off x="566928" y="6254496"/>
             <a:ext cx="1481328" cy="457200"/>
           </a:xfrm>
           <a:prstGeom prst="rect">
@@ -10082,7 +10082,7 @@
         </p:nvSpPr>
         <p:spPr>
           <a:xfrm>
-            <a:off x="11368735" y="6327648"/>
+            <a:off x="11368735" y="6437376"/>
             <a:ext cx="365760" cy="274320"/>
           </a:xfrm>
           <a:prstGeom prst="rect">
@@ -10259,7 +10259,7 @@
         </p:blipFill>
         <p:spPr>
           <a:xfrm>
-            <a:off x="566928" y="6126480"/>
+            <a:off x="566928" y="6254496"/>
             <a:ext cx="1481328" cy="457200"/>
           </a:xfrm>
           <a:prstGeom prst="rect">
@@ -11192,7 +11192,7 @@
         </p:nvSpPr>
         <p:spPr>
           <a:xfrm>
-            <a:off x="11368735" y="6327648"/>
+            <a:off x="11368735" y="6437376"/>
             <a:ext cx="365760" cy="274320"/>
           </a:xfrm>
           <a:prstGeom prst="rect">
@@ -11369,7 +11369,7 @@
         </p:blipFill>
         <p:spPr>
           <a:xfrm>
-            <a:off x="566928" y="6126480"/>
+            <a:off x="566928" y="6254496"/>
             <a:ext cx="1481328" cy="457200"/>
           </a:xfrm>
           <a:prstGeom prst="rect">
@@ -11949,7 +11949,7 @@
         </p:nvSpPr>
         <p:spPr>
           <a:xfrm>
-            <a:off x="11368735" y="6327648"/>
+            <a:off x="11368735" y="6437376"/>
             <a:ext cx="365760" cy="274320"/>
           </a:xfrm>
           <a:prstGeom prst="rect">
@@ -12126,7 +12126,7 @@
         </p:blipFill>
         <p:spPr>
           <a:xfrm>
-            <a:off x="566928" y="6126480"/>
+            <a:off x="566928" y="6254496"/>
             <a:ext cx="1481328" cy="457200"/>
           </a:xfrm>
           <a:prstGeom prst="rect">
@@ -12529,7 +12529,7 @@
         </p:nvSpPr>
         <p:spPr>
           <a:xfrm>
-            <a:off x="11368735" y="6327648"/>
+            <a:off x="11368735" y="6437376"/>
             <a:ext cx="365760" cy="274320"/>
           </a:xfrm>
           <a:prstGeom prst="rect">
@@ -12748,7 +12748,7 @@
         </p:blipFill>
         <p:spPr>
           <a:xfrm>
-            <a:off x="566928" y="6126480"/>
+            <a:off x="566928" y="6254496"/>
             <a:ext cx="1481328" cy="457200"/>
           </a:xfrm>
           <a:prstGeom prst="rect">
@@ -13603,7 +13603,7 @@
         </p:nvSpPr>
         <p:spPr>
           <a:xfrm>
-            <a:off x="11368735" y="6327648"/>
+            <a:off x="11368735" y="6437376"/>
             <a:ext cx="365760" cy="274320"/>
           </a:xfrm>
           <a:prstGeom prst="rect">
@@ -13780,7 +13780,7 @@
         </p:blipFill>
         <p:spPr>
           <a:xfrm>
-            <a:off x="566928" y="6126480"/>
+            <a:off x="566928" y="6254496"/>
             <a:ext cx="1481328" cy="457200"/>
           </a:xfrm>
           <a:prstGeom prst="rect">
@@ -14396,7 +14396,7 @@
         </p:nvSpPr>
         <p:spPr>
           <a:xfrm>
-            <a:off x="11368735" y="6327648"/>
+            <a:off x="11368735" y="6437376"/>
             <a:ext cx="365760" cy="274320"/>
           </a:xfrm>
           <a:prstGeom prst="rect">
@@ -14573,7 +14573,7 @@
         </p:blipFill>
         <p:spPr>
           <a:xfrm>
-            <a:off x="566928" y="6126480"/>
+            <a:off x="566928" y="6254496"/>
             <a:ext cx="1481328" cy="457200"/>
           </a:xfrm>
           <a:prstGeom prst="rect">
@@ -15293,7 +15293,7 @@
         </p:nvSpPr>
         <p:spPr>
           <a:xfrm>
-            <a:off x="11368735" y="6327648"/>
+            <a:off x="11368735" y="6437376"/>
             <a:ext cx="365760" cy="274320"/>
           </a:xfrm>
           <a:prstGeom prst="rect">
@@ -15470,7 +15470,7 @@
         </p:blipFill>
         <p:spPr>
           <a:xfrm>
-            <a:off x="566928" y="6126480"/>
+            <a:off x="566928" y="6254496"/>
             <a:ext cx="1481328" cy="457200"/>
           </a:xfrm>
           <a:prstGeom prst="rect">
@@ -15916,7 +15916,7 @@
         </p:nvSpPr>
         <p:spPr>
           <a:xfrm>
-            <a:off x="11368735" y="6327648"/>
+            <a:off x="11368735" y="6437376"/>
             <a:ext cx="365760" cy="274320"/>
           </a:xfrm>
           <a:prstGeom prst="rect">
@@ -16614,7 +16614,7 @@
         </p:blipFill>
         <p:spPr>
           <a:xfrm>
-            <a:off x="566928" y="6126480"/>
+            <a:off x="566928" y="6254496"/>
             <a:ext cx="1481328" cy="457200"/>
           </a:xfrm>
           <a:prstGeom prst="rect">
@@ -18198,7 +18198,7 @@
         </p:nvSpPr>
         <p:spPr>
           <a:xfrm>
-            <a:off x="11368735" y="6327648"/>
+            <a:off x="11368735" y="6437376"/>
             <a:ext cx="365760" cy="274320"/>
           </a:xfrm>
           <a:prstGeom prst="rect">
@@ -18417,7 +18417,7 @@
         </p:blipFill>
         <p:spPr>
           <a:xfrm>
-            <a:off x="566928" y="6126480"/>
+            <a:off x="566928" y="6254496"/>
             <a:ext cx="1481328" cy="457200"/>
           </a:xfrm>
           <a:prstGeom prst="rect">
@@ -19154,7 +19154,7 @@
         </p:nvSpPr>
         <p:spPr>
           <a:xfrm>
-            <a:off x="11368735" y="6327648"/>
+            <a:off x="11368735" y="6437376"/>
             <a:ext cx="365760" cy="274320"/>
           </a:xfrm>
           <a:prstGeom prst="rect">
@@ -19370,7 +19370,7 @@
         </p:blipFill>
         <p:spPr>
           <a:xfrm>
-            <a:off x="566928" y="6126480"/>
+            <a:off x="566928" y="6254496"/>
             <a:ext cx="1481328" cy="457200"/>
           </a:xfrm>
           <a:prstGeom prst="rect">
@@ -20018,7 +20018,7 @@
         </p:nvSpPr>
         <p:spPr>
           <a:xfrm>
-            <a:off x="11368735" y="6327648"/>
+            <a:off x="11368735" y="6437376"/>
             <a:ext cx="365760" cy="274320"/>
           </a:xfrm>
           <a:prstGeom prst="rect">
@@ -20234,7 +20234,7 @@
         </p:blipFill>
         <p:spPr>
           <a:xfrm>
-            <a:off x="566928" y="6126480"/>
+            <a:off x="566928" y="6254496"/>
             <a:ext cx="1481328" cy="457200"/>
           </a:xfrm>
           <a:prstGeom prst="rect">
@@ -21122,7 +21122,7 @@
         </p:nvSpPr>
         <p:spPr>
           <a:xfrm>
-            <a:off x="11368735" y="6327648"/>
+            <a:off x="11368735" y="6437376"/>
             <a:ext cx="365760" cy="274320"/>
           </a:xfrm>
           <a:prstGeom prst="rect">
@@ -21338,7 +21338,7 @@
         </p:blipFill>
         <p:spPr>
           <a:xfrm>
-            <a:off x="566928" y="6126480"/>
+            <a:off x="566928" y="6254496"/>
             <a:ext cx="1481328" cy="457200"/>
           </a:xfrm>
           <a:prstGeom prst="rect">
@@ -21706,7 +21706,7 @@
         </p:nvSpPr>
         <p:spPr>
           <a:xfrm>
-            <a:off x="11368735" y="6327648"/>
+            <a:off x="11368735" y="6437376"/>
             <a:ext cx="365760" cy="274320"/>
           </a:xfrm>
           <a:prstGeom prst="rect">
@@ -21922,7 +21922,7 @@
         </p:blipFill>
         <p:spPr>
           <a:xfrm>
-            <a:off x="566928" y="6126480"/>
+            <a:off x="566928" y="6254496"/>
             <a:ext cx="1481328" cy="457200"/>
           </a:xfrm>
           <a:prstGeom prst="rect">
@@ -22667,7 +22667,7 @@
         </p:nvSpPr>
         <p:spPr>
           <a:xfrm>
-            <a:off x="11368735" y="6327648"/>
+            <a:off x="11368735" y="6437376"/>
             <a:ext cx="365760" cy="274320"/>
           </a:xfrm>
           <a:prstGeom prst="rect">
@@ -22883,7 +22883,7 @@
         </p:blipFill>
         <p:spPr>
           <a:xfrm>
-            <a:off x="566928" y="6126480"/>
+            <a:off x="566928" y="6254496"/>
             <a:ext cx="1481328" cy="457200"/>
           </a:xfrm>
           <a:prstGeom prst="rect">
@@ -23412,7 +23412,7 @@
         </p:nvSpPr>
         <p:spPr>
           <a:xfrm>
-            <a:off x="11368735" y="6327648"/>
+            <a:off x="11368735" y="6437376"/>
             <a:ext cx="365760" cy="274320"/>
           </a:xfrm>
           <a:prstGeom prst="rect">

--- a/docs/decks/L10.pptx
+++ b/docs/decks/L10.pptx
@@ -3163,17 +3163,17 @@
               <a:buNone/>
             </a:pPr>
             <a:r>
-              <a:rPr lang="en-US" sz="4000" b="1" dirty="0">
+              <a:rPr lang="en-US" sz="3600" dirty="0">
                 <a:solidFill>
                   <a:srgbClr val="FFFFFF"/>
                 </a:solidFill>
-                <a:latin typeface="Montserrat" pitchFamily="34" charset="0"/>
-                <a:ea typeface="Montserrat" pitchFamily="34" charset="-122"/>
-                <a:cs typeface="Montserrat" pitchFamily="34" charset="-120"/>
+                <a:latin typeface="Unbounded" pitchFamily="34" charset="0"/>
+                <a:ea typeface="Unbounded" pitchFamily="34" charset="-122"/>
+                <a:cs typeface="Unbounded" pitchFamily="34" charset="-120"/>
               </a:rPr>
               <a:t>Golden dataset</a:t>
             </a:r>
-            <a:endParaRPr lang="en-US" sz="4000" dirty="0"/>
+            <a:endParaRPr lang="en-US" sz="3600" dirty="0"/>
           </a:p>
           <a:p>
             <a:pPr indent="0" marL="0">
@@ -3183,17 +3183,17 @@
               <a:buNone/>
             </a:pPr>
             <a:r>
-              <a:rPr lang="en-US" sz="4000" b="1" dirty="0">
+              <a:rPr lang="en-US" sz="3600" dirty="0">
                 <a:solidFill>
                   <a:srgbClr val="FFFFFF"/>
                 </a:solidFill>
-                <a:latin typeface="Montserrat" pitchFamily="34" charset="0"/>
-                <a:ea typeface="Montserrat" pitchFamily="34" charset="-122"/>
-                <a:cs typeface="Montserrat" pitchFamily="34" charset="-120"/>
+                <a:latin typeface="Unbounded" pitchFamily="34" charset="0"/>
+                <a:ea typeface="Unbounded" pitchFamily="34" charset="-122"/>
+                <a:cs typeface="Unbounded" pitchFamily="34" charset="-120"/>
               </a:rPr>
               <a:t>і eval suite</a:t>
             </a:r>
-            <a:endParaRPr lang="en-US" sz="4000" dirty="0"/>
+            <a:endParaRPr lang="en-US" sz="3600" dirty="0"/>
           </a:p>
         </p:txBody>
       </p:sp>
@@ -3714,13 +3714,13 @@
               <a:buNone/>
             </a:pPr>
             <a:r>
-              <a:rPr lang="en-US" sz="2400" b="1" dirty="0">
+              <a:rPr lang="en-US" sz="2400" dirty="0">
                 <a:solidFill>
                   <a:srgbClr val="FFFFFF"/>
                 </a:solidFill>
-                <a:latin typeface="Montserrat" pitchFamily="34" charset="0"/>
-                <a:ea typeface="Montserrat" pitchFamily="34" charset="-122"/>
-                <a:cs typeface="Montserrat" pitchFamily="34" charset="-120"/>
+                <a:latin typeface="Unbounded" pitchFamily="34" charset="0"/>
+                <a:ea typeface="Unbounded" pitchFamily="34" charset="-122"/>
+                <a:cs typeface="Unbounded" pitchFamily="34" charset="-120"/>
               </a:rPr>
               <a:t>Звідки беруться кейси — і скільки їх треба</a:t>
             </a:r>
@@ -3736,7 +3736,7 @@
         </p:nvSpPr>
         <p:spPr>
           <a:xfrm>
-            <a:off x="1280160" y="1193140"/>
+            <a:off x="1280160" y="1218895"/>
             <a:ext cx="777240" cy="256032"/>
           </a:xfrm>
           <a:prstGeom prst="roundRect">
@@ -3758,7 +3758,7 @@
         </p:nvSpPr>
         <p:spPr>
           <a:xfrm>
-            <a:off x="1280160" y="1193140"/>
+            <a:off x="1280160" y="1218895"/>
             <a:ext cx="777240" cy="256032"/>
           </a:xfrm>
           <a:prstGeom prst="rect">
@@ -4908,13 +4908,13 @@
               <a:buNone/>
             </a:pPr>
             <a:r>
-              <a:rPr lang="en-US" sz="2400" b="1" dirty="0">
+              <a:rPr lang="en-US" sz="2400" dirty="0">
                 <a:solidFill>
                   <a:srgbClr val="FFFFFF"/>
                 </a:solidFill>
-                <a:latin typeface="Montserrat" pitchFamily="34" charset="0"/>
-                <a:ea typeface="Montserrat" pitchFamily="34" charset="-122"/>
-                <a:cs typeface="Montserrat" pitchFamily="34" charset="-120"/>
+                <a:latin typeface="Unbounded" pitchFamily="34" charset="0"/>
+                <a:ea typeface="Unbounded" pitchFamily="34" charset="-122"/>
+                <a:cs typeface="Unbounded" pitchFamily="34" charset="-120"/>
               </a:rPr>
               <a:t>Rule-based grader: дешево і детерміновано</a:t>
             </a:r>
@@ -4930,7 +4930,7 @@
         </p:nvSpPr>
         <p:spPr>
           <a:xfrm>
-            <a:off x="1280160" y="1193140"/>
+            <a:off x="1280160" y="1218895"/>
             <a:ext cx="777240" cy="256032"/>
           </a:xfrm>
           <a:prstGeom prst="roundRect">
@@ -4952,7 +4952,7 @@
         </p:nvSpPr>
         <p:spPr>
           <a:xfrm>
-            <a:off x="1280160" y="1193140"/>
+            <a:off x="1280160" y="1218895"/>
             <a:ext cx="777240" cy="256032"/>
           </a:xfrm>
           <a:prstGeom prst="rect">
@@ -5839,13 +5839,13 @@
               <a:buNone/>
             </a:pPr>
             <a:r>
-              <a:rPr lang="en-US" sz="2400" b="1" dirty="0">
+              <a:rPr lang="en-US" sz="2400" dirty="0">
                 <a:solidFill>
                   <a:srgbClr val="FFFFFF"/>
                 </a:solidFill>
-                <a:latin typeface="Montserrat" pitchFamily="34" charset="0"/>
-                <a:ea typeface="Montserrat" pitchFamily="34" charset="-122"/>
-                <a:cs typeface="Montserrat" pitchFamily="34" charset="-120"/>
+                <a:latin typeface="Unbounded" pitchFamily="34" charset="0"/>
+                <a:ea typeface="Unbounded" pitchFamily="34" charset="-122"/>
+                <a:cs typeface="Unbounded" pitchFamily="34" charset="-120"/>
               </a:rPr>
               <a:t>Runner: число для людини, exit code для машин</a:t>
             </a:r>
@@ -5861,7 +5861,7 @@
         </p:nvSpPr>
         <p:spPr>
           <a:xfrm>
-            <a:off x="1280160" y="1193140"/>
+            <a:off x="1280160" y="1218895"/>
             <a:ext cx="777240" cy="256032"/>
           </a:xfrm>
           <a:prstGeom prst="roundRect">
@@ -5883,7 +5883,7 @@
         </p:nvSpPr>
         <p:spPr>
           <a:xfrm>
-            <a:off x="1280160" y="1193140"/>
+            <a:off x="1280160" y="1218895"/>
             <a:ext cx="777240" cy="256032"/>
           </a:xfrm>
           <a:prstGeom prst="rect">
@@ -6886,13 +6886,13 @@
               <a:buNone/>
             </a:pPr>
             <a:r>
-              <a:rPr lang="en-US" sz="2400" b="1" dirty="0">
+              <a:rPr lang="en-US" sz="2400" dirty="0">
                 <a:solidFill>
                   <a:srgbClr val="FFFFFF"/>
                 </a:solidFill>
-                <a:latin typeface="Montserrat" pitchFamily="34" charset="0"/>
-                <a:ea typeface="Montserrat" pitchFamily="34" charset="-122"/>
-                <a:cs typeface="Montserrat" pitchFamily="34" charset="-120"/>
+                <a:latin typeface="Unbounded" pitchFamily="34" charset="0"/>
+                <a:ea typeface="Unbounded" pitchFamily="34" charset="-122"/>
+                <a:cs typeface="Unbounded" pitchFamily="34" charset="-120"/>
               </a:rPr>
               <a:t>Поріг: чому не 100%</a:t>
             </a:r>
@@ -8019,13 +8019,13 @@
               <a:buNone/>
             </a:pPr>
             <a:r>
-              <a:rPr lang="en-US" sz="2400" b="1" dirty="0">
+              <a:rPr lang="en-US" sz="2400" dirty="0">
                 <a:solidFill>
                   <a:srgbClr val="FFFFFF"/>
                 </a:solidFill>
-                <a:latin typeface="Montserrat" pitchFamily="34" charset="0"/>
-                <a:ea typeface="Montserrat" pitchFamily="34" charset="-122"/>
-                <a:cs typeface="Montserrat" pitchFamily="34" charset="-120"/>
+                <a:latin typeface="Unbounded" pitchFamily="34" charset="0"/>
+                <a:ea typeface="Unbounded" pitchFamily="34" charset="-122"/>
+                <a:cs typeface="Unbounded" pitchFamily="34" charset="-120"/>
               </a:rPr>
               <a:t>Та сама регресія — тепер командою</a:t>
             </a:r>
@@ -8041,7 +8041,7 @@
         </p:nvSpPr>
         <p:spPr>
           <a:xfrm>
-            <a:off x="1280160" y="1024128"/>
+            <a:off x="1280160" y="1218895"/>
             <a:ext cx="777240" cy="256032"/>
           </a:xfrm>
           <a:prstGeom prst="roundRect">
@@ -8063,7 +8063,7 @@
         </p:nvSpPr>
         <p:spPr>
           <a:xfrm>
-            <a:off x="1280160" y="1024128"/>
+            <a:off x="1280160" y="1218895"/>
             <a:ext cx="777240" cy="256032"/>
           </a:xfrm>
           <a:prstGeom prst="rect">
@@ -8751,13 +8751,13 @@
               <a:buNone/>
             </a:pPr>
             <a:r>
-              <a:rPr lang="en-US" sz="2400" b="1" dirty="0">
+              <a:rPr lang="en-US" sz="2400" dirty="0">
                 <a:solidFill>
                   <a:srgbClr val="FFFFFF"/>
                 </a:solidFill>
-                <a:latin typeface="Montserrat" pitchFamily="34" charset="0"/>
-                <a:ea typeface="Montserrat" pitchFamily="34" charset="-122"/>
-                <a:cs typeface="Montserrat" pitchFamily="34" charset="-120"/>
+                <a:latin typeface="Unbounded" pitchFamily="34" charset="0"/>
+                <a:ea typeface="Unbounded" pitchFamily="34" charset="-122"/>
+                <a:cs typeface="Unbounded" pitchFamily="34" charset="-120"/>
               </a:rPr>
               <a:t>LLM-as-judge: два цінники</a:t>
             </a:r>
@@ -9426,13 +9426,13 @@
               <a:buNone/>
             </a:pPr>
             <a:r>
-              <a:rPr lang="en-US" sz="2400" b="1" dirty="0">
+              <a:rPr lang="en-US" sz="2400" dirty="0">
                 <a:solidFill>
                   <a:srgbClr val="FFFFFF"/>
                 </a:solidFill>
-                <a:latin typeface="Montserrat" pitchFamily="34" charset="0"/>
-                <a:ea typeface="Montserrat" pitchFamily="34" charset="-122"/>
-                <a:cs typeface="Montserrat" pitchFamily="34" charset="-120"/>
+                <a:latin typeface="Unbounded" pitchFamily="34" charset="0"/>
+                <a:ea typeface="Unbounded" pitchFamily="34" charset="-122"/>
+                <a:cs typeface="Unbounded" pitchFamily="34" charset="-120"/>
               </a:rPr>
               <a:t>Ріст датасету: «полагодили» і «злякалися»</a:t>
             </a:r>
@@ -9448,7 +9448,7 @@
         </p:nvSpPr>
         <p:spPr>
           <a:xfrm>
-            <a:off x="1280160" y="1193140"/>
+            <a:off x="1280160" y="1218895"/>
             <a:ext cx="777240" cy="256032"/>
           </a:xfrm>
           <a:prstGeom prst="roundRect">
@@ -9470,7 +9470,7 @@
         </p:nvSpPr>
         <p:spPr>
           <a:xfrm>
-            <a:off x="1280160" y="1193140"/>
+            <a:off x="1280160" y="1218895"/>
             <a:ext cx="777240" cy="256032"/>
           </a:xfrm>
           <a:prstGeom prst="rect">
@@ -10168,13 +10168,13 @@
               <a:buNone/>
             </a:pPr>
             <a:r>
-              <a:rPr lang="en-US" sz="2400" b="1" dirty="0">
+              <a:rPr lang="en-US" sz="2400" dirty="0">
                 <a:solidFill>
                   <a:srgbClr val="FFFFFF"/>
                 </a:solidFill>
-                <a:latin typeface="Montserrat" pitchFamily="34" charset="0"/>
-                <a:ea typeface="Montserrat" pitchFamily="34" charset="-122"/>
-                <a:cs typeface="Montserrat" pitchFamily="34" charset="-120"/>
+                <a:latin typeface="Unbounded" pitchFamily="34" charset="0"/>
+                <a:ea typeface="Unbounded" pitchFamily="34" charset="-122"/>
+                <a:cs typeface="Unbounded" pitchFamily="34" charset="-120"/>
               </a:rPr>
               <a:t>Зараз ви побачите — і навіщо</a:t>
             </a:r>
@@ -11278,13 +11278,13 @@
               <a:buNone/>
             </a:pPr>
             <a:r>
-              <a:rPr lang="en-US" sz="2400" b="1" dirty="0">
+              <a:rPr lang="en-US" sz="2400" dirty="0">
                 <a:solidFill>
                   <a:srgbClr val="FFFFFF"/>
                 </a:solidFill>
-                <a:latin typeface="Montserrat" pitchFamily="34" charset="0"/>
-                <a:ea typeface="Montserrat" pitchFamily="34" charset="-122"/>
-                <a:cs typeface="Montserrat" pitchFamily="34" charset="-120"/>
+                <a:latin typeface="Unbounded" pitchFamily="34" charset="0"/>
+                <a:ea typeface="Unbounded" pitchFamily="34" charset="-122"/>
+                <a:cs typeface="Unbounded" pitchFamily="34" charset="-120"/>
               </a:rPr>
               <a:t>Лабораторна: чотири кроки + опційний</a:t>
             </a:r>
@@ -11300,7 +11300,7 @@
         </p:nvSpPr>
         <p:spPr>
           <a:xfrm>
-            <a:off x="566928" y="1024128"/>
+            <a:off x="566928" y="1218895"/>
             <a:ext cx="950976" cy="256032"/>
           </a:xfrm>
           <a:prstGeom prst="roundRect">
@@ -11322,7 +11322,7 @@
         </p:nvSpPr>
         <p:spPr>
           <a:xfrm>
-            <a:off x="566928" y="1024128"/>
+            <a:off x="566928" y="1218895"/>
             <a:ext cx="950976" cy="256032"/>
           </a:xfrm>
           <a:prstGeom prst="rect">
@@ -12035,13 +12035,13 @@
               <a:buNone/>
             </a:pPr>
             <a:r>
-              <a:rPr lang="en-US" sz="2400" b="1" dirty="0">
+              <a:rPr lang="en-US" sz="2400" dirty="0">
                 <a:solidFill>
                   <a:srgbClr val="FFFFFF"/>
                 </a:solidFill>
-                <a:latin typeface="Montserrat" pitchFamily="34" charset="0"/>
-                <a:ea typeface="Montserrat" pitchFamily="34" charset="-122"/>
-                <a:cs typeface="Montserrat" pitchFamily="34" charset="-120"/>
+                <a:latin typeface="Unbounded" pitchFamily="34" charset="0"/>
+                <a:ea typeface="Unbounded" pitchFamily="34" charset="-122"/>
+                <a:cs typeface="Unbounded" pitchFamily="34" charset="-120"/>
               </a:rPr>
               <a:t>Що це довело</a:t>
             </a:r>
@@ -12615,13 +12615,13 @@
               <a:buNone/>
             </a:pPr>
             <a:r>
-              <a:rPr lang="en-US" sz="2400" b="1" dirty="0">
+              <a:rPr lang="en-US" sz="2400" dirty="0">
                 <a:solidFill>
                   <a:srgbClr val="FFFFFF"/>
                 </a:solidFill>
-                <a:latin typeface="Montserrat" pitchFamily="34" charset="0"/>
-                <a:ea typeface="Montserrat" pitchFamily="34" charset="-122"/>
-                <a:cs typeface="Montserrat" pitchFamily="34" charset="-120"/>
+                <a:latin typeface="Unbounded" pitchFamily="34" charset="0"/>
+                <a:ea typeface="Unbounded" pitchFamily="34" charset="-122"/>
+                <a:cs typeface="Unbounded" pitchFamily="34" charset="-120"/>
               </a:rPr>
               <a:t>Що ви зможете після уроку</a:t>
             </a:r>
@@ -13689,13 +13689,13 @@
               <a:buNone/>
             </a:pPr>
             <a:r>
-              <a:rPr lang="en-US" sz="2400" b="1" dirty="0">
+              <a:rPr lang="en-US" sz="2400" dirty="0">
                 <a:solidFill>
                   <a:srgbClr val="FFFFFF"/>
                 </a:solidFill>
-                <a:latin typeface="Montserrat" pitchFamily="34" charset="0"/>
-                <a:ea typeface="Montserrat" pitchFamily="34" charset="-122"/>
-                <a:cs typeface="Montserrat" pitchFamily="34" charset="-120"/>
+                <a:latin typeface="Unbounded" pitchFamily="34" charset="0"/>
+                <a:ea typeface="Unbounded" pitchFamily="34" charset="-122"/>
+                <a:cs typeface="Unbounded" pitchFamily="34" charset="-120"/>
               </a:rPr>
               <a:t>Перевір себе</a:t>
             </a:r>
@@ -14482,13 +14482,13 @@
               <a:buNone/>
             </a:pPr>
             <a:r>
-              <a:rPr lang="en-US" sz="2400" b="1" dirty="0">
+              <a:rPr lang="en-US" sz="2400" dirty="0">
                 <a:solidFill>
                   <a:srgbClr val="FFFFFF"/>
                 </a:solidFill>
-                <a:latin typeface="Montserrat" pitchFamily="34" charset="0"/>
-                <a:ea typeface="Montserrat" pitchFamily="34" charset="-122"/>
-                <a:cs typeface="Montserrat" pitchFamily="34" charset="-120"/>
+                <a:latin typeface="Unbounded" pitchFamily="34" charset="0"/>
+                <a:ea typeface="Unbounded" pitchFamily="34" charset="-122"/>
+                <a:cs typeface="Unbounded" pitchFamily="34" charset="-120"/>
               </a:rPr>
               <a:t>Антипатерни тижня</a:t>
             </a:r>
@@ -15379,13 +15379,13 @@
               <a:buNone/>
             </a:pPr>
             <a:r>
-              <a:rPr lang="en-US" sz="2400" b="1" dirty="0">
+              <a:rPr lang="en-US" sz="2400" dirty="0">
                 <a:solidFill>
                   <a:srgbClr val="FFFFFF"/>
                 </a:solidFill>
-                <a:latin typeface="Montserrat" pitchFamily="34" charset="0"/>
-                <a:ea typeface="Montserrat" pitchFamily="34" charset="-122"/>
-                <a:cs typeface="Montserrat" pitchFamily="34" charset="-120"/>
+                <a:latin typeface="Unbounded" pitchFamily="34" charset="0"/>
+                <a:ea typeface="Unbounded" pitchFamily="34" charset="-122"/>
+                <a:cs typeface="Unbounded" pitchFamily="34" charset="-120"/>
               </a:rPr>
               <a:t>Домашнє завдання</a:t>
             </a:r>
@@ -16523,13 +16523,13 @@
               <a:buNone/>
             </a:pPr>
             <a:r>
-              <a:rPr lang="en-US" sz="2400" b="1" dirty="0">
+              <a:rPr lang="en-US" sz="2400" dirty="0">
                 <a:solidFill>
                   <a:srgbClr val="FFFFFF"/>
                 </a:solidFill>
-                <a:latin typeface="Montserrat" pitchFamily="34" charset="0"/>
-                <a:ea typeface="Montserrat" pitchFamily="34" charset="-122"/>
-                <a:cs typeface="Montserrat" pitchFamily="34" charset="-120"/>
+                <a:latin typeface="Unbounded" pitchFamily="34" charset="0"/>
+                <a:ea typeface="Unbounded" pitchFamily="34" charset="-122"/>
+                <a:cs typeface="Unbounded" pitchFamily="34" charset="-120"/>
               </a:rPr>
               <a:t>Маршрут на сьогодні</a:t>
             </a:r>
@@ -18284,13 +18284,13 @@
               <a:buNone/>
             </a:pPr>
             <a:r>
-              <a:rPr lang="en-US" sz="2400" b="1" dirty="0">
+              <a:rPr lang="en-US" sz="2400" dirty="0">
                 <a:solidFill>
                   <a:srgbClr val="FFFFFF"/>
                 </a:solidFill>
-                <a:latin typeface="Montserrat" pitchFamily="34" charset="0"/>
-                <a:ea typeface="Montserrat" pitchFamily="34" charset="-122"/>
-                <a:cs typeface="Montserrat" pitchFamily="34" charset="-120"/>
+                <a:latin typeface="Unbounded" pitchFamily="34" charset="0"/>
+                <a:ea typeface="Unbounded" pitchFamily="34" charset="-122"/>
+                <a:cs typeface="Unbounded" pitchFamily="34" charset="-120"/>
               </a:rPr>
               <a:t>Терміни, якими користуватимемось</a:t>
             </a:r>
@@ -18306,7 +18306,7 @@
         </p:nvSpPr>
         <p:spPr>
           <a:xfrm>
-            <a:off x="566928" y="1005840"/>
+            <a:off x="566928" y="1200607"/>
             <a:ext cx="6839712" cy="256032"/>
           </a:xfrm>
           <a:prstGeom prst="rect">
@@ -18348,7 +18348,7 @@
         </p:nvSpPr>
         <p:spPr>
           <a:xfrm>
-            <a:off x="566928" y="1271016"/>
+            <a:off x="566928" y="1465783"/>
             <a:ext cx="777240" cy="256032"/>
           </a:xfrm>
           <a:prstGeom prst="roundRect">
@@ -18370,7 +18370,7 @@
         </p:nvSpPr>
         <p:spPr>
           <a:xfrm>
-            <a:off x="566928" y="1271016"/>
+            <a:off x="566928" y="1465783"/>
             <a:ext cx="777240" cy="256032"/>
           </a:xfrm>
           <a:prstGeom prst="rect">
@@ -19279,13 +19279,13 @@
               <a:buNone/>
             </a:pPr>
             <a:r>
-              <a:rPr lang="en-US" sz="2400" b="1" dirty="0">
+              <a:rPr lang="en-US" sz="2400" dirty="0">
                 <a:solidFill>
                   <a:srgbClr val="FFFFFF"/>
                 </a:solidFill>
-                <a:latin typeface="Montserrat" pitchFamily="34" charset="0"/>
-                <a:ea typeface="Montserrat" pitchFamily="34" charset="-122"/>
-                <a:cs typeface="Montserrat" pitchFamily="34" charset="-120"/>
+                <a:latin typeface="Unbounded" pitchFamily="34" charset="0"/>
+                <a:ea typeface="Unbounded" pitchFamily="34" charset="-122"/>
+                <a:cs typeface="Unbounded" pitchFamily="34" charset="-120"/>
               </a:rPr>
               <a:t>«Ніби норм» — це настрій, а не перевірка</a:t>
             </a:r>
@@ -19301,7 +19301,7 @@
         </p:nvSpPr>
         <p:spPr>
           <a:xfrm>
-            <a:off x="1280160" y="1193140"/>
+            <a:off x="1280160" y="1218895"/>
             <a:ext cx="777240" cy="256032"/>
           </a:xfrm>
           <a:prstGeom prst="roundRect">
@@ -19323,7 +19323,7 @@
         </p:nvSpPr>
         <p:spPr>
           <a:xfrm>
-            <a:off x="1280160" y="1193140"/>
+            <a:off x="1280160" y="1218895"/>
             <a:ext cx="777240" cy="256032"/>
           </a:xfrm>
           <a:prstGeom prst="rect">
@@ -20143,13 +20143,13 @@
               <a:buNone/>
             </a:pPr>
             <a:r>
-              <a:rPr lang="en-US" sz="2400" b="1" dirty="0">
+              <a:rPr lang="en-US" sz="2400" dirty="0">
                 <a:solidFill>
                   <a:srgbClr val="FFFFFF"/>
                 </a:solidFill>
-                <a:latin typeface="Montserrat" pitchFamily="34" charset="0"/>
-                <a:ea typeface="Montserrat" pitchFamily="34" charset="-122"/>
-                <a:cs typeface="Montserrat" pitchFamily="34" charset="-120"/>
+                <a:latin typeface="Unbounded" pitchFamily="34" charset="0"/>
+                <a:ea typeface="Unbounded" pitchFamily="34" charset="-122"/>
+                <a:cs typeface="Unbounded" pitchFamily="34" charset="-120"/>
               </a:rPr>
               <a:t>Golden dataset — контракт поведінки</a:t>
             </a:r>
@@ -20165,7 +20165,7 @@
         </p:nvSpPr>
         <p:spPr>
           <a:xfrm>
-            <a:off x="1280160" y="1193140"/>
+            <a:off x="1280160" y="1218895"/>
             <a:ext cx="777240" cy="256032"/>
           </a:xfrm>
           <a:prstGeom prst="roundRect">
@@ -20187,7 +20187,7 @@
         </p:nvSpPr>
         <p:spPr>
           <a:xfrm>
-            <a:off x="1280160" y="1193140"/>
+            <a:off x="1280160" y="1218895"/>
             <a:ext cx="777240" cy="256032"/>
           </a:xfrm>
           <a:prstGeom prst="rect">
@@ -21247,13 +21247,13 @@
               <a:buNone/>
             </a:pPr>
             <a:r>
-              <a:rPr lang="en-US" sz="2400" b="1" dirty="0">
+              <a:rPr lang="en-US" sz="2400" dirty="0">
                 <a:solidFill>
                   <a:srgbClr val="FFFFFF"/>
                 </a:solidFill>
-                <a:latin typeface="Montserrat" pitchFamily="34" charset="0"/>
-                <a:ea typeface="Montserrat" pitchFamily="34" charset="-122"/>
-                <a:cs typeface="Montserrat" pitchFamily="34" charset="-120"/>
+                <a:latin typeface="Unbounded" pitchFamily="34" charset="0"/>
+                <a:ea typeface="Unbounded" pitchFamily="34" charset="-122"/>
+                <a:cs typeface="Unbounded" pitchFamily="34" charset="-120"/>
               </a:rPr>
               <a:t>Звідки репрезентативність — і як писати очікування</a:t>
             </a:r>
@@ -21269,7 +21269,7 @@
         </p:nvSpPr>
         <p:spPr>
           <a:xfrm>
-            <a:off x="1280160" y="1193140"/>
+            <a:off x="1280160" y="1218895"/>
             <a:ext cx="777240" cy="256032"/>
           </a:xfrm>
           <a:prstGeom prst="roundRect">
@@ -21291,7 +21291,7 @@
         </p:nvSpPr>
         <p:spPr>
           <a:xfrm>
-            <a:off x="1280160" y="1193140"/>
+            <a:off x="1280160" y="1218895"/>
             <a:ext cx="777240" cy="256032"/>
           </a:xfrm>
           <a:prstGeom prst="rect">
@@ -21831,13 +21831,13 @@
               <a:buNone/>
             </a:pPr>
             <a:r>
-              <a:rPr lang="en-US" sz="2400" b="1" dirty="0">
+              <a:rPr lang="en-US" sz="2400" dirty="0">
                 <a:solidFill>
                   <a:srgbClr val="FFFFFF"/>
                 </a:solidFill>
-                <a:latin typeface="Montserrat" pitchFamily="34" charset="0"/>
-                <a:ea typeface="Montserrat" pitchFamily="34" charset="-122"/>
-                <a:cs typeface="Montserrat" pitchFamily="34" charset="-120"/>
+                <a:latin typeface="Unbounded" pitchFamily="34" charset="0"/>
+                <a:ea typeface="Unbounded" pitchFamily="34" charset="-122"/>
+                <a:cs typeface="Unbounded" pitchFamily="34" charset="-120"/>
               </a:rPr>
               <a:t>Шість кейсів = специфікація п'яти тижнів</a:t>
             </a:r>
@@ -21853,7 +21853,7 @@
         </p:nvSpPr>
         <p:spPr>
           <a:xfrm>
-            <a:off x="1280160" y="1193140"/>
+            <a:off x="1280160" y="1218895"/>
             <a:ext cx="777240" cy="256032"/>
           </a:xfrm>
           <a:prstGeom prst="roundRect">
@@ -21875,7 +21875,7 @@
         </p:nvSpPr>
         <p:spPr>
           <a:xfrm>
-            <a:off x="1280160" y="1193140"/>
+            <a:off x="1280160" y="1218895"/>
             <a:ext cx="777240" cy="256032"/>
           </a:xfrm>
           <a:prstGeom prst="rect">
@@ -22792,13 +22792,13 @@
               <a:buNone/>
             </a:pPr>
             <a:r>
-              <a:rPr lang="en-US" sz="2400" b="1" dirty="0">
+              <a:rPr lang="en-US" sz="2400" dirty="0">
                 <a:solidFill>
                   <a:srgbClr val="FFFFFF"/>
                 </a:solidFill>
-                <a:latin typeface="Montserrat" pitchFamily="34" charset="0"/>
-                <a:ea typeface="Montserrat" pitchFamily="34" charset="-122"/>
-                <a:cs typeface="Montserrat" pitchFamily="34" charset="-120"/>
+                <a:latin typeface="Unbounded" pitchFamily="34" charset="0"/>
+                <a:ea typeface="Unbounded" pitchFamily="34" charset="-122"/>
+                <a:cs typeface="Unbounded" pitchFamily="34" charset="-120"/>
               </a:rPr>
               <a:t>Найкоштовніший баг — кейс, що зеленіє без причини</a:t>
             </a:r>
@@ -22814,7 +22814,7 @@
         </p:nvSpPr>
         <p:spPr>
           <a:xfrm>
-            <a:off x="1280160" y="1193140"/>
+            <a:off x="1280160" y="1218895"/>
             <a:ext cx="777240" cy="256032"/>
           </a:xfrm>
           <a:prstGeom prst="roundRect">
@@ -22836,7 +22836,7 @@
         </p:nvSpPr>
         <p:spPr>
           <a:xfrm>
-            <a:off x="1280160" y="1193140"/>
+            <a:off x="1280160" y="1218895"/>
             <a:ext cx="777240" cy="256032"/>
           </a:xfrm>
           <a:prstGeom prst="rect">

--- a/docs/decks/L10.pptx
+++ b/docs/decks/L10.pptx
@@ -2554,7 +2554,7 @@
             <a:lvl1pPr>
               <a:defRPr sz="850">
                 <a:solidFill>
-                  <a:srgbClr val="8A82A0"/>
+                  <a:srgbClr val="9A94AA"/>
                 </a:solidFill>
                 <a:latin typeface="Courier New"/>
                 <a:ea typeface="Courier New"/>
@@ -2636,6 +2636,62 @@
 </p:sldLayout>
 </file>
 
+<file path=ppt/slideLayouts/slideLayout3.xml><?xml version="1.0" encoding="utf-8"?>
+<p:sldLayout xmlns:a="http://schemas.openxmlformats.org/drawingml/2006/main" xmlns:r="http://schemas.openxmlformats.org/officeDocument/2006/relationships" xmlns:p="http://schemas.openxmlformats.org/presentationml/2006/main" preserve="1">
+  <p:cSld name="NEO_COVER">
+    <p:bg>
+      <p:bgPr>
+        <a:solidFill>
+          <a:srgbClr val="000000"/>
+        </a:solidFill>
+      </p:bgPr>
+    </p:bg>
+    <p:spTree>
+      <p:nvGrpSpPr>
+        <p:cNvPr id="1" name=""/>
+        <p:cNvGrpSpPr/>
+        <p:nvPr/>
+      </p:nvGrpSpPr>
+      <p:grpSpPr>
+        <a:xfrm>
+          <a:off x="0" y="0"/>
+          <a:ext cx="0" cy="0"/>
+          <a:chOff x="0" y="0"/>
+          <a:chExt cx="0" cy="0"/>
+        </a:xfrm>
+      </p:grpSpPr>
+      <p:pic>
+        <p:nvPicPr>
+          <p:cNvPr id="2" name="Image 0" descr="preencoded.png">    </p:cNvPr>
+          <p:cNvPicPr>
+            <a:picLocks noChangeAspect="1"/>
+          </p:cNvPicPr>
+          <p:nvPr/>
+        </p:nvPicPr>
+        <p:blipFill>
+          <a:blip r:embed="rId1"/>
+          <a:stretch>
+            <a:fillRect/>
+          </a:stretch>
+        </p:blipFill>
+        <p:spPr>
+          <a:xfrm>
+            <a:off x="0" y="0"/>
+            <a:ext cx="12191695" cy="6858000"/>
+          </a:xfrm>
+          <a:prstGeom prst="rect">
+            <a:avLst/>
+          </a:prstGeom>
+        </p:spPr>
+      </p:pic>
+    </p:spTree>
+  </p:cSld>
+  <p:clrMapOvr>
+    <a:masterClrMapping/>
+  </p:clrMapOvr>
+</p:sldLayout>
+</file>
+
 <file path=ppt/slideMasters/slideMaster1.xml><?xml version="1.0" encoding="utf-8"?>
 <p:sldMaster xmlns:a="http://schemas.openxmlformats.org/drawingml/2006/main" xmlns:r="http://schemas.openxmlformats.org/officeDocument/2006/relationships" xmlns:p="http://schemas.openxmlformats.org/presentationml/2006/main">
   <p:cSld>
@@ -2683,7 +2739,7 @@
             <a:lvl1pPr>
               <a:defRPr sz="850">
                 <a:solidFill>
-                  <a:srgbClr val="8A82A0"/>
+                  <a:srgbClr val="9A94AA"/>
                 </a:solidFill>
                 <a:latin typeface="Courier New"/>
                 <a:ea typeface="Courier New"/>
@@ -2707,6 +2763,7 @@
   <p:sldLayoutIdLst>
     <p:sldLayoutId id="2147483649" r:id="rId1"/>
     <p:sldLayoutId id="2147483650" r:id="rId2"/>
+    <p:sldLayoutId id="2147483651" r:id="rId3"/>
   </p:sldLayoutIdLst>
   <p:hf sldNum="0" hdr="0" ftr="0" dt="0"/>
   <p:txStyles>
@@ -3036,7 +3093,7 @@
           </a:prstGeom>
           <a:ln w="12700">
             <a:solidFill>
-              <a:srgbClr val="9B7BE8">
+              <a:srgbClr val="8F72E6">
                 <a:alpha val="24000"/>
               </a:srgbClr>
             </a:solidFill>
@@ -3062,7 +3119,7 @@
           </a:prstGeom>
           <a:ln w="12700">
             <a:solidFill>
-              <a:srgbClr val="9B7BE8">
+              <a:srgbClr val="8F72E6">
                 <a:alpha val="42000"/>
               </a:srgbClr>
             </a:solidFill>
@@ -3088,7 +3145,7 @@
           </a:prstGeom>
           <a:ln w="12700">
             <a:solidFill>
-              <a:srgbClr val="9B7BE8">
+              <a:srgbClr val="8F72E6">
                 <a:alpha val="66000"/>
               </a:srgbClr>
             </a:solidFill>
@@ -3123,7 +3180,7 @@
             <a:r>
               <a:rPr lang="en-US" sz="1200" b="1" spc="300" kern="0" dirty="0">
                 <a:solidFill>
-                  <a:srgbClr val="C9B8FB"/>
+                  <a:srgbClr val="C4B3F5"/>
                 </a:solidFill>
                 <a:latin typeface="Courier New" pitchFamily="34" charset="0"/>
                 <a:ea typeface="Courier New" pitchFamily="34" charset="-122"/>
@@ -3227,7 +3284,7 @@
             <a:r>
               <a:rPr lang="en-US" sz="1500" dirty="0">
                 <a:solidFill>
-                  <a:srgbClr val="C9B8FB"/>
+                  <a:srgbClr val="C4B3F5"/>
                 </a:solidFill>
                 <a:latin typeface="Montserrat" pitchFamily="34" charset="0"/>
                 <a:ea typeface="Montserrat" pitchFamily="34" charset="-122"/>
@@ -3257,7 +3314,7 @@
           </a:prstGeom>
           <a:ln w="12700">
             <a:solidFill>
-              <a:srgbClr val="9B7BE8">
+              <a:srgbClr val="8F72E6">
                 <a:alpha val="60000"/>
               </a:srgbClr>
             </a:solidFill>
@@ -3292,7 +3349,7 @@
             <a:r>
               <a:rPr lang="en-US" sz="900" dirty="0">
                 <a:solidFill>
-                  <a:srgbClr val="C9B8FB"/>
+                  <a:srgbClr val="C4B3F5"/>
                 </a:solidFill>
                 <a:latin typeface="Courier New" pitchFamily="34" charset="0"/>
                 <a:ea typeface="Courier New" pitchFamily="34" charset="-122"/>
@@ -3322,7 +3379,7 @@
           </a:prstGeom>
           <a:ln w="12700">
             <a:solidFill>
-              <a:srgbClr val="9B7BE8">
+              <a:srgbClr val="8F72E6">
                 <a:alpha val="60000"/>
               </a:srgbClr>
             </a:solidFill>
@@ -3357,7 +3414,7 @@
             <a:r>
               <a:rPr lang="en-US" sz="900" dirty="0">
                 <a:solidFill>
-                  <a:srgbClr val="C9B8FB"/>
+                  <a:srgbClr val="C4B3F5"/>
                 </a:solidFill>
                 <a:latin typeface="Courier New" pitchFamily="34" charset="0"/>
                 <a:ea typeface="Courier New" pitchFamily="34" charset="-122"/>
@@ -3387,7 +3444,7 @@
           </a:prstGeom>
           <a:ln w="12700">
             <a:solidFill>
-              <a:srgbClr val="9B7BE8">
+              <a:srgbClr val="8F72E6">
                 <a:alpha val="60000"/>
               </a:srgbClr>
             </a:solidFill>
@@ -3422,7 +3479,7 @@
             <a:r>
               <a:rPr lang="en-US" sz="900" dirty="0">
                 <a:solidFill>
-                  <a:srgbClr val="C9B8FB"/>
+                  <a:srgbClr val="C4B3F5"/>
                 </a:solidFill>
                 <a:latin typeface="Courier New" pitchFamily="34" charset="0"/>
                 <a:ea typeface="Courier New" pitchFamily="34" charset="-122"/>
@@ -3452,7 +3509,7 @@
           </a:prstGeom>
           <a:ln w="12700">
             <a:solidFill>
-              <a:srgbClr val="9B7BE8">
+              <a:srgbClr val="8F72E6">
                 <a:alpha val="60000"/>
               </a:srgbClr>
             </a:solidFill>
@@ -3487,7 +3544,7 @@
             <a:r>
               <a:rPr lang="en-US" sz="900" dirty="0">
                 <a:solidFill>
-                  <a:srgbClr val="C9B8FB"/>
+                  <a:srgbClr val="C4B3F5"/>
                 </a:solidFill>
                 <a:latin typeface="Courier New" pitchFamily="34" charset="0"/>
                 <a:ea typeface="Courier New" pitchFamily="34" charset="-122"/>
@@ -3578,7 +3635,7 @@
           </a:prstGeom>
           <a:ln w="12700">
             <a:solidFill>
-              <a:srgbClr val="9B7BE8">
+              <a:srgbClr val="8F72E6">
                 <a:alpha val="60000"/>
               </a:srgbClr>
             </a:solidFill>
@@ -3613,7 +3670,7 @@
             <a:r>
               <a:rPr lang="en-US" sz="900" dirty="0">
                 <a:solidFill>
-                  <a:srgbClr val="C9B8FB"/>
+                  <a:srgbClr val="C4B3F5"/>
                 </a:solidFill>
                 <a:latin typeface="Courier New" pitchFamily="34" charset="0"/>
                 <a:ea typeface="Courier New" pitchFamily="34" charset="-122"/>
@@ -3677,7 +3734,7 @@
             <a:r>
               <a:rPr lang="en-US" sz="2600" b="1" dirty="0">
                 <a:solidFill>
-                  <a:srgbClr val="C9A6FF"/>
+                  <a:srgbClr val="A98BFF"/>
                 </a:solidFill>
                 <a:latin typeface="Courier New" pitchFamily="34" charset="0"/>
                 <a:ea typeface="Courier New" pitchFamily="34" charset="-122"/>
@@ -3745,9 +3802,14 @@
             </a:avLst>
           </a:prstGeom>
           <a:solidFill>
-            <a:srgbClr val="C9A6FF"/>
-          </a:solidFill>
-          <a:ln/>
+            <a:srgbClr val="1A0B3D"/>
+          </a:solidFill>
+          <a:ln w="12700">
+            <a:solidFill>
+              <a:srgbClr val="5A05F4"/>
+            </a:solidFill>
+            <a:prstDash val="solid"/>
+          </a:ln>
         </p:spPr>
       </p:sp>
       <p:sp>
@@ -3777,7 +3839,7 @@
             <a:r>
               <a:rPr lang="en-US" sz="900" b="1" spc="100" kern="0" dirty="0">
                 <a:solidFill>
-                  <a:srgbClr val="1C1140"/>
+                  <a:srgbClr val="A98BFF"/>
                 </a:solidFill>
                 <a:latin typeface="Courier New" pitchFamily="34" charset="0"/>
                 <a:ea typeface="Courier New" pitchFamily="34" charset="-122"/>
@@ -3852,7 +3914,7 @@
                       <a:r>
                         <a:rPr lang="en-US" sz="900" b="1" spc="100" kern="0" dirty="0">
                           <a:solidFill>
-                            <a:srgbClr val="AFA9BE"/>
+                            <a:srgbClr val="C9C4D6"/>
                           </a:solidFill>
                           <a:latin typeface="Courier New" pitchFamily="34" charset="0"/>
                           <a:ea typeface="Courier New" pitchFamily="34" charset="-122"/>
@@ -3870,7 +3932,7 @@
                   <a:tcPr marL="73152" marR="73152" marT="73152" marB="73152" anchor="ctr">
                     <a:lnL w="6350" cap="flat" cmpd="sng" algn="ctr">
                       <a:solidFill>
-                        <a:srgbClr val="2E2A3A"/>
+                        <a:srgbClr val="5E4F85"/>
                       </a:solidFill>
                       <a:prstDash val="solid"/>
                       <a:round/>
@@ -3879,7 +3941,7 @@
                     </a:lnL>
                     <a:lnR w="6350" cap="flat" cmpd="sng" algn="ctr">
                       <a:solidFill>
-                        <a:srgbClr val="2E2A3A"/>
+                        <a:srgbClr val="5E4F85"/>
                       </a:solidFill>
                       <a:prstDash val="solid"/>
                       <a:round/>
@@ -3888,7 +3950,7 @@
                     </a:lnR>
                     <a:lnT w="6350" cap="flat" cmpd="sng" algn="ctr">
                       <a:solidFill>
-                        <a:srgbClr val="2E2A3A"/>
+                        <a:srgbClr val="5E4F85"/>
                       </a:solidFill>
                       <a:prstDash val="solid"/>
                       <a:round/>
@@ -3897,7 +3959,7 @@
                     </a:lnT>
                     <a:lnB w="6350" cap="flat" cmpd="sng" algn="ctr">
                       <a:solidFill>
-                        <a:srgbClr val="2E2A3A"/>
+                        <a:srgbClr val="5E4F85"/>
                       </a:solidFill>
                       <a:prstDash val="solid"/>
                       <a:round/>
@@ -3905,7 +3967,7 @@
                       <a:tailEnd type="none" w="med" len="med"/>
                     </a:lnB>
                     <a:solidFill>
-                      <a:srgbClr val="1F1B2A"/>
+                      <a:srgbClr val="1A0B3D"/>
                     </a:solidFill>
                   </a:tcPr>
                 </a:tc>
@@ -3920,7 +3982,7 @@
                       <a:r>
                         <a:rPr lang="en-US" sz="900" b="1" spc="100" kern="0" dirty="0">
                           <a:solidFill>
-                            <a:srgbClr val="AFA9BE"/>
+                            <a:srgbClr val="C9C4D6"/>
                           </a:solidFill>
                           <a:latin typeface="Courier New" pitchFamily="34" charset="0"/>
                           <a:ea typeface="Courier New" pitchFamily="34" charset="-122"/>
@@ -3938,7 +4000,7 @@
                   <a:tcPr marL="73152" marR="73152" marT="73152" marB="73152" anchor="ctr">
                     <a:lnL w="6350" cap="flat" cmpd="sng" algn="ctr">
                       <a:solidFill>
-                        <a:srgbClr val="2E2A3A"/>
+                        <a:srgbClr val="5E4F85"/>
                       </a:solidFill>
                       <a:prstDash val="solid"/>
                       <a:round/>
@@ -3947,7 +4009,7 @@
                     </a:lnL>
                     <a:lnR w="6350" cap="flat" cmpd="sng" algn="ctr">
                       <a:solidFill>
-                        <a:srgbClr val="2E2A3A"/>
+                        <a:srgbClr val="5E4F85"/>
                       </a:solidFill>
                       <a:prstDash val="solid"/>
                       <a:round/>
@@ -3956,7 +4018,7 @@
                     </a:lnR>
                     <a:lnT w="6350" cap="flat" cmpd="sng" algn="ctr">
                       <a:solidFill>
-                        <a:srgbClr val="2E2A3A"/>
+                        <a:srgbClr val="5E4F85"/>
                       </a:solidFill>
                       <a:prstDash val="solid"/>
                       <a:round/>
@@ -3965,7 +4027,7 @@
                     </a:lnT>
                     <a:lnB w="6350" cap="flat" cmpd="sng" algn="ctr">
                       <a:solidFill>
-                        <a:srgbClr val="2E2A3A"/>
+                        <a:srgbClr val="5E4F85"/>
                       </a:solidFill>
                       <a:prstDash val="solid"/>
                       <a:round/>
@@ -3973,7 +4035,7 @@
                       <a:tailEnd type="none" w="med" len="med"/>
                     </a:lnB>
                     <a:solidFill>
-                      <a:srgbClr val="1F1B2A"/>
+                      <a:srgbClr val="1A0B3D"/>
                     </a:solidFill>
                   </a:tcPr>
                 </a:tc>
@@ -3988,7 +4050,7 @@
                       <a:r>
                         <a:rPr lang="en-US" sz="900" b="1" spc="100" kern="0" dirty="0">
                           <a:solidFill>
-                            <a:srgbClr val="AFA9BE"/>
+                            <a:srgbClr val="C9C4D6"/>
                           </a:solidFill>
                           <a:latin typeface="Courier New" pitchFamily="34" charset="0"/>
                           <a:ea typeface="Courier New" pitchFamily="34" charset="-122"/>
@@ -4006,7 +4068,7 @@
                   <a:tcPr marL="73152" marR="73152" marT="73152" marB="73152" anchor="ctr">
                     <a:lnL w="6350" cap="flat" cmpd="sng" algn="ctr">
                       <a:solidFill>
-                        <a:srgbClr val="2E2A3A"/>
+                        <a:srgbClr val="5E4F85"/>
                       </a:solidFill>
                       <a:prstDash val="solid"/>
                       <a:round/>
@@ -4015,7 +4077,7 @@
                     </a:lnL>
                     <a:lnR w="6350" cap="flat" cmpd="sng" algn="ctr">
                       <a:solidFill>
-                        <a:srgbClr val="2E2A3A"/>
+                        <a:srgbClr val="5E4F85"/>
                       </a:solidFill>
                       <a:prstDash val="solid"/>
                       <a:round/>
@@ -4024,7 +4086,7 @@
                     </a:lnR>
                     <a:lnT w="6350" cap="flat" cmpd="sng" algn="ctr">
                       <a:solidFill>
-                        <a:srgbClr val="2E2A3A"/>
+                        <a:srgbClr val="5E4F85"/>
                       </a:solidFill>
                       <a:prstDash val="solid"/>
                       <a:round/>
@@ -4033,7 +4095,7 @@
                     </a:lnT>
                     <a:lnB w="6350" cap="flat" cmpd="sng" algn="ctr">
                       <a:solidFill>
-                        <a:srgbClr val="2E2A3A"/>
+                        <a:srgbClr val="5E4F85"/>
                       </a:solidFill>
                       <a:prstDash val="solid"/>
                       <a:round/>
@@ -4041,7 +4103,7 @@
                       <a:tailEnd type="none" w="med" len="med"/>
                     </a:lnB>
                     <a:solidFill>
-                      <a:srgbClr val="1F1B2A"/>
+                      <a:srgbClr val="1A0B3D"/>
                     </a:solidFill>
                   </a:tcPr>
                 </a:tc>
@@ -4058,7 +4120,7 @@
                       <a:r>
                         <a:rPr lang="en-US" sz="1150" b="1" dirty="0">
                           <a:solidFill>
-                            <a:srgbClr val="C9A6FF"/>
+                            <a:srgbClr val="A98BFF"/>
                           </a:solidFill>
                           <a:latin typeface="Montserrat" pitchFamily="34" charset="0"/>
                           <a:ea typeface="Montserrat" pitchFamily="34" charset="-122"/>
@@ -4076,7 +4138,7 @@
                   <a:tcPr marL="73152" marR="73152" marT="73152" marB="73152" anchor="ctr">
                     <a:lnL w="6350" cap="flat" cmpd="sng" algn="ctr">
                       <a:solidFill>
-                        <a:srgbClr val="2E2A3A"/>
+                        <a:srgbClr val="5E4F85"/>
                       </a:solidFill>
                       <a:prstDash val="solid"/>
                       <a:round/>
@@ -4085,7 +4147,7 @@
                     </a:lnL>
                     <a:lnR w="6350" cap="flat" cmpd="sng" algn="ctr">
                       <a:solidFill>
-                        <a:srgbClr val="2E2A3A"/>
+                        <a:srgbClr val="5E4F85"/>
                       </a:solidFill>
                       <a:prstDash val="solid"/>
                       <a:round/>
@@ -4094,7 +4156,7 @@
                     </a:lnR>
                     <a:lnT w="6350" cap="flat" cmpd="sng" algn="ctr">
                       <a:solidFill>
-                        <a:srgbClr val="2E2A3A"/>
+                        <a:srgbClr val="5E4F85"/>
                       </a:solidFill>
                       <a:prstDash val="solid"/>
                       <a:round/>
@@ -4103,7 +4165,7 @@
                     </a:lnT>
                     <a:lnB w="6350" cap="flat" cmpd="sng" algn="ctr">
                       <a:solidFill>
-                        <a:srgbClr val="2E2A3A"/>
+                        <a:srgbClr val="5E4F85"/>
                       </a:solidFill>
                       <a:prstDash val="solid"/>
                       <a:round/>
@@ -4111,7 +4173,7 @@
                       <a:tailEnd type="none" w="med" len="med"/>
                     </a:lnB>
                     <a:solidFill>
-                      <a:srgbClr val="1C1140"/>
+                      <a:srgbClr val="1A0B3D"/>
                     </a:solidFill>
                   </a:tcPr>
                 </a:tc>
@@ -4144,7 +4206,7 @@
                   <a:tcPr marL="73152" marR="73152" marT="73152" marB="73152" anchor="ctr">
                     <a:lnL w="6350" cap="flat" cmpd="sng" algn="ctr">
                       <a:solidFill>
-                        <a:srgbClr val="2E2A3A"/>
+                        <a:srgbClr val="5E4F85"/>
                       </a:solidFill>
                       <a:prstDash val="solid"/>
                       <a:round/>
@@ -4153,7 +4215,7 @@
                     </a:lnL>
                     <a:lnR w="6350" cap="flat" cmpd="sng" algn="ctr">
                       <a:solidFill>
-                        <a:srgbClr val="2E2A3A"/>
+                        <a:srgbClr val="5E4F85"/>
                       </a:solidFill>
                       <a:prstDash val="solid"/>
                       <a:round/>
@@ -4162,7 +4224,7 @@
                     </a:lnR>
                     <a:lnT w="6350" cap="flat" cmpd="sng" algn="ctr">
                       <a:solidFill>
-                        <a:srgbClr val="2E2A3A"/>
+                        <a:srgbClr val="5E4F85"/>
                       </a:solidFill>
                       <a:prstDash val="solid"/>
                       <a:round/>
@@ -4171,7 +4233,7 @@
                     </a:lnT>
                     <a:lnB w="6350" cap="flat" cmpd="sng" algn="ctr">
                       <a:solidFill>
-                        <a:srgbClr val="2E2A3A"/>
+                        <a:srgbClr val="5E4F85"/>
                       </a:solidFill>
                       <a:prstDash val="solid"/>
                       <a:round/>
@@ -4179,7 +4241,7 @@
                       <a:tailEnd type="none" w="med" len="med"/>
                     </a:lnB>
                     <a:solidFill>
-                      <a:srgbClr val="1C1140"/>
+                      <a:srgbClr val="1A0B3D"/>
                     </a:solidFill>
                   </a:tcPr>
                 </a:tc>
@@ -4212,7 +4274,7 @@
                   <a:tcPr marL="73152" marR="73152" marT="73152" marB="73152" anchor="ctr">
                     <a:lnL w="6350" cap="flat" cmpd="sng" algn="ctr">
                       <a:solidFill>
-                        <a:srgbClr val="2E2A3A"/>
+                        <a:srgbClr val="5E4F85"/>
                       </a:solidFill>
                       <a:prstDash val="solid"/>
                       <a:round/>
@@ -4221,7 +4283,7 @@
                     </a:lnL>
                     <a:lnR w="6350" cap="flat" cmpd="sng" algn="ctr">
                       <a:solidFill>
-                        <a:srgbClr val="2E2A3A"/>
+                        <a:srgbClr val="5E4F85"/>
                       </a:solidFill>
                       <a:prstDash val="solid"/>
                       <a:round/>
@@ -4230,7 +4292,7 @@
                     </a:lnR>
                     <a:lnT w="6350" cap="flat" cmpd="sng" algn="ctr">
                       <a:solidFill>
-                        <a:srgbClr val="2E2A3A"/>
+                        <a:srgbClr val="5E4F85"/>
                       </a:solidFill>
                       <a:prstDash val="solid"/>
                       <a:round/>
@@ -4239,7 +4301,7 @@
                     </a:lnT>
                     <a:lnB w="6350" cap="flat" cmpd="sng" algn="ctr">
                       <a:solidFill>
-                        <a:srgbClr val="2E2A3A"/>
+                        <a:srgbClr val="5E4F85"/>
                       </a:solidFill>
                       <a:prstDash val="solid"/>
                       <a:round/>
@@ -4247,7 +4309,7 @@
                       <a:tailEnd type="none" w="med" len="med"/>
                     </a:lnB>
                     <a:solidFill>
-                      <a:srgbClr val="1C1140"/>
+                      <a:srgbClr val="1A0B3D"/>
                     </a:solidFill>
                   </a:tcPr>
                 </a:tc>
@@ -4264,7 +4326,7 @@
                       <a:r>
                         <a:rPr lang="en-US" sz="1150" b="1" dirty="0">
                           <a:solidFill>
-                            <a:srgbClr val="5FD6A0"/>
+                            <a:srgbClr val="3FCF8E"/>
                           </a:solidFill>
                           <a:latin typeface="Montserrat" pitchFamily="34" charset="0"/>
                           <a:ea typeface="Montserrat" pitchFamily="34" charset="-122"/>
@@ -4282,7 +4344,7 @@
                   <a:tcPr marL="73152" marR="73152" marT="73152" marB="73152" anchor="ctr">
                     <a:lnL w="6350" cap="flat" cmpd="sng" algn="ctr">
                       <a:solidFill>
-                        <a:srgbClr val="2E2A3A"/>
+                        <a:srgbClr val="5E4F85"/>
                       </a:solidFill>
                       <a:prstDash val="solid"/>
                       <a:round/>
@@ -4291,7 +4353,7 @@
                     </a:lnL>
                     <a:lnR w="6350" cap="flat" cmpd="sng" algn="ctr">
                       <a:solidFill>
-                        <a:srgbClr val="2E2A3A"/>
+                        <a:srgbClr val="5E4F85"/>
                       </a:solidFill>
                       <a:prstDash val="solid"/>
                       <a:round/>
@@ -4300,7 +4362,7 @@
                     </a:lnR>
                     <a:lnT w="6350" cap="flat" cmpd="sng" algn="ctr">
                       <a:solidFill>
-                        <a:srgbClr val="2E2A3A"/>
+                        <a:srgbClr val="5E4F85"/>
                       </a:solidFill>
                       <a:prstDash val="solid"/>
                       <a:round/>
@@ -4309,7 +4371,7 @@
                     </a:lnT>
                     <a:lnB w="6350" cap="flat" cmpd="sng" algn="ctr">
                       <a:solidFill>
-                        <a:srgbClr val="2E2A3A"/>
+                        <a:srgbClr val="5E4F85"/>
                       </a:solidFill>
                       <a:prstDash val="solid"/>
                       <a:round/>
@@ -4317,7 +4379,7 @@
                       <a:tailEnd type="none" w="med" len="med"/>
                     </a:lnB>
                     <a:solidFill>
-                      <a:srgbClr val="102A20"/>
+                      <a:srgbClr val="06180F"/>
                     </a:solidFill>
                   </a:tcPr>
                 </a:tc>
@@ -4350,7 +4412,7 @@
                   <a:tcPr marL="73152" marR="73152" marT="73152" marB="73152" anchor="ctr">
                     <a:lnL w="6350" cap="flat" cmpd="sng" algn="ctr">
                       <a:solidFill>
-                        <a:srgbClr val="2E2A3A"/>
+                        <a:srgbClr val="5E4F85"/>
                       </a:solidFill>
                       <a:prstDash val="solid"/>
                       <a:round/>
@@ -4359,7 +4421,7 @@
                     </a:lnL>
                     <a:lnR w="6350" cap="flat" cmpd="sng" algn="ctr">
                       <a:solidFill>
-                        <a:srgbClr val="2E2A3A"/>
+                        <a:srgbClr val="5E4F85"/>
                       </a:solidFill>
                       <a:prstDash val="solid"/>
                       <a:round/>
@@ -4368,7 +4430,7 @@
                     </a:lnR>
                     <a:lnT w="6350" cap="flat" cmpd="sng" algn="ctr">
                       <a:solidFill>
-                        <a:srgbClr val="2E2A3A"/>
+                        <a:srgbClr val="5E4F85"/>
                       </a:solidFill>
                       <a:prstDash val="solid"/>
                       <a:round/>
@@ -4377,7 +4439,7 @@
                     </a:lnT>
                     <a:lnB w="6350" cap="flat" cmpd="sng" algn="ctr">
                       <a:solidFill>
-                        <a:srgbClr val="2E2A3A"/>
+                        <a:srgbClr val="5E4F85"/>
                       </a:solidFill>
                       <a:prstDash val="solid"/>
                       <a:round/>
@@ -4385,7 +4447,7 @@
                       <a:tailEnd type="none" w="med" len="med"/>
                     </a:lnB>
                     <a:solidFill>
-                      <a:srgbClr val="102A20"/>
+                      <a:srgbClr val="06180F"/>
                     </a:solidFill>
                   </a:tcPr>
                 </a:tc>
@@ -4418,7 +4480,7 @@
                   <a:tcPr marL="73152" marR="73152" marT="73152" marB="73152" anchor="ctr">
                     <a:lnL w="6350" cap="flat" cmpd="sng" algn="ctr">
                       <a:solidFill>
-                        <a:srgbClr val="2E2A3A"/>
+                        <a:srgbClr val="5E4F85"/>
                       </a:solidFill>
                       <a:prstDash val="solid"/>
                       <a:round/>
@@ -4427,7 +4489,7 @@
                     </a:lnL>
                     <a:lnR w="6350" cap="flat" cmpd="sng" algn="ctr">
                       <a:solidFill>
-                        <a:srgbClr val="2E2A3A"/>
+                        <a:srgbClr val="5E4F85"/>
                       </a:solidFill>
                       <a:prstDash val="solid"/>
                       <a:round/>
@@ -4436,7 +4498,7 @@
                     </a:lnR>
                     <a:lnT w="6350" cap="flat" cmpd="sng" algn="ctr">
                       <a:solidFill>
-                        <a:srgbClr val="2E2A3A"/>
+                        <a:srgbClr val="5E4F85"/>
                       </a:solidFill>
                       <a:prstDash val="solid"/>
                       <a:round/>
@@ -4445,7 +4507,7 @@
                     </a:lnT>
                     <a:lnB w="6350" cap="flat" cmpd="sng" algn="ctr">
                       <a:solidFill>
-                        <a:srgbClr val="2E2A3A"/>
+                        <a:srgbClr val="5E4F85"/>
                       </a:solidFill>
                       <a:prstDash val="solid"/>
                       <a:round/>
@@ -4453,7 +4515,7 @@
                       <a:tailEnd type="none" w="med" len="med"/>
                     </a:lnB>
                     <a:solidFill>
-                      <a:srgbClr val="102A20"/>
+                      <a:srgbClr val="06180F"/>
                     </a:solidFill>
                   </a:tcPr>
                 </a:tc>
@@ -4488,7 +4550,7 @@
                   <a:tcPr marL="73152" marR="73152" marT="73152" marB="73152" anchor="ctr">
                     <a:lnL w="6350" cap="flat" cmpd="sng" algn="ctr">
                       <a:solidFill>
-                        <a:srgbClr val="2E2A3A"/>
+                        <a:srgbClr val="5E4F85"/>
                       </a:solidFill>
                       <a:prstDash val="solid"/>
                       <a:round/>
@@ -4497,7 +4559,7 @@
                     </a:lnL>
                     <a:lnR w="6350" cap="flat" cmpd="sng" algn="ctr">
                       <a:solidFill>
-                        <a:srgbClr val="2E2A3A"/>
+                        <a:srgbClr val="5E4F85"/>
                       </a:solidFill>
                       <a:prstDash val="solid"/>
                       <a:round/>
@@ -4506,7 +4568,7 @@
                     </a:lnR>
                     <a:lnT w="6350" cap="flat" cmpd="sng" algn="ctr">
                       <a:solidFill>
-                        <a:srgbClr val="2E2A3A"/>
+                        <a:srgbClr val="5E4F85"/>
                       </a:solidFill>
                       <a:prstDash val="solid"/>
                       <a:round/>
@@ -4515,7 +4577,7 @@
                     </a:lnT>
                     <a:lnB w="6350" cap="flat" cmpd="sng" algn="ctr">
                       <a:solidFill>
-                        <a:srgbClr val="2E2A3A"/>
+                        <a:srgbClr val="5E4F85"/>
                       </a:solidFill>
                       <a:prstDash val="solid"/>
                       <a:round/>
@@ -4523,7 +4585,7 @@
                       <a:tailEnd type="none" w="med" len="med"/>
                     </a:lnB>
                     <a:solidFill>
-                      <a:srgbClr val="17141F"/>
+                      <a:srgbClr val="000000"/>
                     </a:solidFill>
                   </a:tcPr>
                 </a:tc>
@@ -4556,7 +4618,7 @@
                   <a:tcPr marL="73152" marR="73152" marT="73152" marB="73152" anchor="ctr">
                     <a:lnL w="6350" cap="flat" cmpd="sng" algn="ctr">
                       <a:solidFill>
-                        <a:srgbClr val="2E2A3A"/>
+                        <a:srgbClr val="5E4F85"/>
                       </a:solidFill>
                       <a:prstDash val="solid"/>
                       <a:round/>
@@ -4565,7 +4627,7 @@
                     </a:lnL>
                     <a:lnR w="6350" cap="flat" cmpd="sng" algn="ctr">
                       <a:solidFill>
-                        <a:srgbClr val="2E2A3A"/>
+                        <a:srgbClr val="5E4F85"/>
                       </a:solidFill>
                       <a:prstDash val="solid"/>
                       <a:round/>
@@ -4574,7 +4636,7 @@
                     </a:lnR>
                     <a:lnT w="6350" cap="flat" cmpd="sng" algn="ctr">
                       <a:solidFill>
-                        <a:srgbClr val="2E2A3A"/>
+                        <a:srgbClr val="5E4F85"/>
                       </a:solidFill>
                       <a:prstDash val="solid"/>
                       <a:round/>
@@ -4583,7 +4645,7 @@
                     </a:lnT>
                     <a:lnB w="6350" cap="flat" cmpd="sng" algn="ctr">
                       <a:solidFill>
-                        <a:srgbClr val="2E2A3A"/>
+                        <a:srgbClr val="5E4F85"/>
                       </a:solidFill>
                       <a:prstDash val="solid"/>
                       <a:round/>
@@ -4591,7 +4653,7 @@
                       <a:tailEnd type="none" w="med" len="med"/>
                     </a:lnB>
                     <a:solidFill>
-                      <a:srgbClr val="17141F"/>
+                      <a:srgbClr val="000000"/>
                     </a:solidFill>
                   </a:tcPr>
                 </a:tc>
@@ -4624,7 +4686,7 @@
                   <a:tcPr marL="73152" marR="73152" marT="73152" marB="73152" anchor="ctr">
                     <a:lnL w="6350" cap="flat" cmpd="sng" algn="ctr">
                       <a:solidFill>
-                        <a:srgbClr val="2E2A3A"/>
+                        <a:srgbClr val="5E4F85"/>
                       </a:solidFill>
                       <a:prstDash val="solid"/>
                       <a:round/>
@@ -4633,7 +4695,7 @@
                     </a:lnL>
                     <a:lnR w="6350" cap="flat" cmpd="sng" algn="ctr">
                       <a:solidFill>
-                        <a:srgbClr val="2E2A3A"/>
+                        <a:srgbClr val="5E4F85"/>
                       </a:solidFill>
                       <a:prstDash val="solid"/>
                       <a:round/>
@@ -4642,7 +4704,7 @@
                     </a:lnR>
                     <a:lnT w="6350" cap="flat" cmpd="sng" algn="ctr">
                       <a:solidFill>
-                        <a:srgbClr val="2E2A3A"/>
+                        <a:srgbClr val="5E4F85"/>
                       </a:solidFill>
                       <a:prstDash val="solid"/>
                       <a:round/>
@@ -4651,7 +4713,7 @@
                     </a:lnT>
                     <a:lnB w="6350" cap="flat" cmpd="sng" algn="ctr">
                       <a:solidFill>
-                        <a:srgbClr val="2E2A3A"/>
+                        <a:srgbClr val="5E4F85"/>
                       </a:solidFill>
                       <a:prstDash val="solid"/>
                       <a:round/>
@@ -4659,7 +4721,7 @@
                       <a:tailEnd type="none" w="med" len="med"/>
                     </a:lnB>
                     <a:solidFill>
-                      <a:srgbClr val="17141F"/>
+                      <a:srgbClr val="000000"/>
                     </a:solidFill>
                   </a:tcPr>
                 </a:tc>
@@ -4685,9 +4747,14 @@
             </a:avLst>
           </a:prstGeom>
           <a:solidFill>
-            <a:srgbClr val="102A20"/>
-          </a:solidFill>
-          <a:ln/>
+            <a:srgbClr val="06180F"/>
+          </a:solidFill>
+          <a:ln w="12700">
+            <a:solidFill>
+              <a:srgbClr val="3FCF8E"/>
+            </a:solidFill>
+            <a:prstDash val="solid"/>
+          </a:ln>
         </p:spPr>
       </p:sp>
       <p:sp>
@@ -4717,7 +4784,7 @@
             <a:r>
               <a:rPr lang="en-US" sz="950" b="1" spc="150" kern="0" dirty="0">
                 <a:solidFill>
-                  <a:srgbClr val="5FD6A0"/>
+                  <a:srgbClr val="3FCF8E"/>
                 </a:solidFill>
                 <a:latin typeface="Courier New" pitchFamily="34" charset="0"/>
                 <a:ea typeface="Courier New" pitchFamily="34" charset="-122"/>
@@ -4801,7 +4868,7 @@
             <a:lvl1pPr>
               <a:defRPr sz="850">
                 <a:solidFill>
-                  <a:srgbClr val="8A82A0"/>
+                  <a:srgbClr val="9A94AA"/>
                 </a:solidFill>
                 <a:latin typeface="Courier New"/>
                 <a:ea typeface="Courier New"/>
@@ -4871,7 +4938,7 @@
             <a:r>
               <a:rPr lang="en-US" sz="2600" b="1" dirty="0">
                 <a:solidFill>
-                  <a:srgbClr val="C9A6FF"/>
+                  <a:srgbClr val="A98BFF"/>
                 </a:solidFill>
                 <a:latin typeface="Courier New" pitchFamily="34" charset="0"/>
                 <a:ea typeface="Courier New" pitchFamily="34" charset="-122"/>
@@ -4939,9 +5006,14 @@
             </a:avLst>
           </a:prstGeom>
           <a:solidFill>
-            <a:srgbClr val="C9A6FF"/>
-          </a:solidFill>
-          <a:ln/>
+            <a:srgbClr val="1A0B3D"/>
+          </a:solidFill>
+          <a:ln w="12700">
+            <a:solidFill>
+              <a:srgbClr val="5A05F4"/>
+            </a:solidFill>
+            <a:prstDash val="solid"/>
+          </a:ln>
         </p:spPr>
       </p:sp>
       <p:sp>
@@ -4971,7 +5043,7 @@
             <a:r>
               <a:rPr lang="en-US" sz="900" b="1" spc="100" kern="0" dirty="0">
                 <a:solidFill>
-                  <a:srgbClr val="1C1140"/>
+                  <a:srgbClr val="A98BFF"/>
                 </a:solidFill>
                 <a:latin typeface="Courier New" pitchFamily="34" charset="0"/>
                 <a:ea typeface="Courier New" pitchFamily="34" charset="-122"/>
@@ -5024,11 +5096,11 @@
             </a:avLst>
           </a:prstGeom>
           <a:solidFill>
-            <a:srgbClr val="12101A"/>
+            <a:srgbClr val="07060C"/>
           </a:solidFill>
           <a:ln w="12700">
             <a:solidFill>
-              <a:srgbClr val="2E2A3A"/>
+              <a:srgbClr val="5E4F85"/>
             </a:solidFill>
             <a:prstDash val="solid"/>
           </a:ln>
@@ -5064,7 +5136,7 @@
             <a:r>
               <a:rPr lang="en-US" sz="1150" dirty="0">
                 <a:solidFill>
-                  <a:srgbClr val="C9A6FF"/>
+                  <a:srgbClr val="A98BFF"/>
                 </a:solidFill>
                 <a:latin typeface="Courier New" pitchFamily="34" charset="0"/>
                 <a:ea typeface="Courier New" pitchFamily="34" charset="-122"/>
@@ -5104,7 +5176,7 @@
             <a:r>
               <a:rPr lang="en-US" sz="1150" dirty="0">
                 <a:solidFill>
-                  <a:srgbClr val="C9A6FF"/>
+                  <a:srgbClr val="A98BFF"/>
                 </a:solidFill>
                 <a:latin typeface="Courier New" pitchFamily="34" charset="0"/>
                 <a:ea typeface="Courier New" pitchFamily="34" charset="-122"/>
@@ -5124,7 +5196,7 @@
             <a:r>
               <a:rPr lang="en-US" sz="1150" dirty="0">
                 <a:solidFill>
-                  <a:srgbClr val="7FD9A6"/>
+                  <a:srgbClr val="6BA0F8"/>
                 </a:solidFill>
                 <a:latin typeface="Courier New" pitchFamily="34" charset="0"/>
                 <a:ea typeface="Courier New" pitchFamily="34" charset="-122"/>
@@ -5144,7 +5216,7 @@
             <a:r>
               <a:rPr lang="en-US" sz="1150" dirty="0">
                 <a:solidFill>
-                  <a:srgbClr val="C9A6FF"/>
+                  <a:srgbClr val="A98BFF"/>
                 </a:solidFill>
                 <a:latin typeface="Courier New" pitchFamily="34" charset="0"/>
                 <a:ea typeface="Courier New" pitchFamily="34" charset="-122"/>
@@ -5164,7 +5236,7 @@
             <a:r>
               <a:rPr lang="en-US" sz="1150" dirty="0">
                 <a:solidFill>
-                  <a:srgbClr val="F0B36B"/>
+                  <a:srgbClr val="C9C4D6"/>
                 </a:solidFill>
                 <a:latin typeface="Courier New" pitchFamily="34" charset="0"/>
                 <a:ea typeface="Courier New" pitchFamily="34" charset="-122"/>
@@ -5184,7 +5256,7 @@
             <a:r>
               <a:rPr lang="en-US" sz="1150" dirty="0">
                 <a:solidFill>
-                  <a:srgbClr val="C9A6FF"/>
+                  <a:srgbClr val="A98BFF"/>
                 </a:solidFill>
                 <a:latin typeface="Courier New" pitchFamily="34" charset="0"/>
                 <a:ea typeface="Courier New" pitchFamily="34" charset="-122"/>
@@ -5204,7 +5276,7 @@
             <a:r>
               <a:rPr lang="en-US" sz="1150" dirty="0">
                 <a:solidFill>
-                  <a:srgbClr val="F0B36B"/>
+                  <a:srgbClr val="C9C4D6"/>
                 </a:solidFill>
                 <a:latin typeface="Courier New" pitchFamily="34" charset="0"/>
                 <a:ea typeface="Courier New" pitchFamily="34" charset="-122"/>
@@ -5233,9 +5305,14 @@
             </a:avLst>
           </a:prstGeom>
           <a:solidFill>
-            <a:srgbClr val="102A20"/>
-          </a:solidFill>
-          <a:ln/>
+            <a:srgbClr val="06180F"/>
+          </a:solidFill>
+          <a:ln w="12700">
+            <a:solidFill>
+              <a:srgbClr val="3FCF8E"/>
+            </a:solidFill>
+            <a:prstDash val="solid"/>
+          </a:ln>
         </p:spPr>
       </p:sp>
       <p:sp>
@@ -5253,7 +5330,7 @@
             <a:avLst/>
           </a:prstGeom>
           <a:solidFill>
-            <a:srgbClr val="5FD6A0"/>
+            <a:srgbClr val="5A05F4"/>
           </a:solidFill>
           <a:ln/>
         </p:spPr>
@@ -5285,7 +5362,7 @@
             <a:r>
               <a:rPr lang="en-US" sz="1200" b="1" dirty="0">
                 <a:solidFill>
-                  <a:srgbClr val="102A20"/>
+                  <a:srgbClr val="FFFFFF"/>
                 </a:solidFill>
                 <a:latin typeface="Courier New" pitchFamily="34" charset="0"/>
                 <a:ea typeface="Courier New" pitchFamily="34" charset="-122"/>
@@ -5324,7 +5401,7 @@
             <a:r>
               <a:rPr lang="en-US" sz="1450" b="1" dirty="0">
                 <a:solidFill>
-                  <a:srgbClr val="5FD6A0"/>
+                  <a:srgbClr val="3FCF8E"/>
                 </a:solidFill>
                 <a:latin typeface="Montserrat" pitchFamily="34" charset="0"/>
                 <a:ea typeface="Montserrat" pitchFamily="34" charset="-122"/>
@@ -5366,7 +5443,7 @@
             <a:r>
               <a:rPr lang="en-US" sz="1200" dirty="0">
                 <a:solidFill>
-                  <a:srgbClr val="FFFFFF"/>
+                  <a:srgbClr val="C9C4D6"/>
                 </a:solidFill>
                 <a:latin typeface="Montserrat" pitchFamily="34" charset="0"/>
                 <a:ea typeface="Montserrat" pitchFamily="34" charset="-122"/>
@@ -5395,9 +5472,14 @@
             </a:avLst>
           </a:prstGeom>
           <a:solidFill>
-            <a:srgbClr val="102A20"/>
-          </a:solidFill>
-          <a:ln/>
+            <a:srgbClr val="06180F"/>
+          </a:solidFill>
+          <a:ln w="12700">
+            <a:solidFill>
+              <a:srgbClr val="3FCF8E"/>
+            </a:solidFill>
+            <a:prstDash val="solid"/>
+          </a:ln>
         </p:spPr>
       </p:sp>
       <p:sp>
@@ -5415,7 +5497,7 @@
             <a:avLst/>
           </a:prstGeom>
           <a:solidFill>
-            <a:srgbClr val="5FD6A0"/>
+            <a:srgbClr val="5A05F4"/>
           </a:solidFill>
           <a:ln/>
         </p:spPr>
@@ -5447,7 +5529,7 @@
             <a:r>
               <a:rPr lang="en-US" sz="1200" b="1" dirty="0">
                 <a:solidFill>
-                  <a:srgbClr val="102A20"/>
+                  <a:srgbClr val="FFFFFF"/>
                 </a:solidFill>
                 <a:latin typeface="Courier New" pitchFamily="34" charset="0"/>
                 <a:ea typeface="Courier New" pitchFamily="34" charset="-122"/>
@@ -5486,7 +5568,7 @@
             <a:r>
               <a:rPr lang="en-US" sz="1450" b="1" dirty="0">
                 <a:solidFill>
-                  <a:srgbClr val="5FD6A0"/>
+                  <a:srgbClr val="3FCF8E"/>
                 </a:solidFill>
                 <a:latin typeface="Montserrat" pitchFamily="34" charset="0"/>
                 <a:ea typeface="Montserrat" pitchFamily="34" charset="-122"/>
@@ -5528,7 +5610,7 @@
             <a:r>
               <a:rPr lang="en-US" sz="1200" dirty="0">
                 <a:solidFill>
-                  <a:srgbClr val="FFFFFF"/>
+                  <a:srgbClr val="C9C4D6"/>
                 </a:solidFill>
                 <a:latin typeface="Montserrat" pitchFamily="34" charset="0"/>
                 <a:ea typeface="Montserrat" pitchFamily="34" charset="-122"/>
@@ -5557,9 +5639,14 @@
             </a:avLst>
           </a:prstGeom>
           <a:solidFill>
-            <a:srgbClr val="2A2010"/>
-          </a:solidFill>
-          <a:ln/>
+            <a:srgbClr val="0B1A38"/>
+          </a:solidFill>
+          <a:ln w="12700">
+            <a:solidFill>
+              <a:srgbClr val="6BA0F8"/>
+            </a:solidFill>
+            <a:prstDash val="solid"/>
+          </a:ln>
         </p:spPr>
       </p:sp>
       <p:sp>
@@ -5577,7 +5664,7 @@
             <a:avLst/>
           </a:prstGeom>
           <a:solidFill>
-            <a:srgbClr val="E8A857"/>
+            <a:srgbClr val="5A05F4"/>
           </a:solidFill>
           <a:ln/>
         </p:spPr>
@@ -5609,7 +5696,7 @@
             <a:r>
               <a:rPr lang="en-US" sz="1200" b="1" dirty="0">
                 <a:solidFill>
-                  <a:srgbClr val="2A2010"/>
+                  <a:srgbClr val="FFFFFF"/>
                 </a:solidFill>
                 <a:latin typeface="Courier New" pitchFamily="34" charset="0"/>
                 <a:ea typeface="Courier New" pitchFamily="34" charset="-122"/>
@@ -5648,7 +5735,7 @@
             <a:r>
               <a:rPr lang="en-US" sz="1450" b="1" dirty="0">
                 <a:solidFill>
-                  <a:srgbClr val="E8A857"/>
+                  <a:srgbClr val="6BA0F8"/>
                 </a:solidFill>
                 <a:latin typeface="Montserrat" pitchFamily="34" charset="0"/>
                 <a:ea typeface="Montserrat" pitchFamily="34" charset="-122"/>
@@ -5690,7 +5777,7 @@
             <a:r>
               <a:rPr lang="en-US" sz="1200" dirty="0">
                 <a:solidFill>
-                  <a:srgbClr val="FFFFFF"/>
+                  <a:srgbClr val="C9C4D6"/>
                 </a:solidFill>
                 <a:latin typeface="Montserrat" pitchFamily="34" charset="0"/>
                 <a:ea typeface="Montserrat" pitchFamily="34" charset="-122"/>
@@ -5732,7 +5819,7 @@
             <a:lvl1pPr>
               <a:defRPr sz="850">
                 <a:solidFill>
-                  <a:srgbClr val="8A82A0"/>
+                  <a:srgbClr val="9A94AA"/>
                 </a:solidFill>
                 <a:latin typeface="Courier New"/>
                 <a:ea typeface="Courier New"/>
@@ -5802,7 +5889,7 @@
             <a:r>
               <a:rPr lang="en-US" sz="2600" b="1" dirty="0">
                 <a:solidFill>
-                  <a:srgbClr val="C9A6FF"/>
+                  <a:srgbClr val="A98BFF"/>
                 </a:solidFill>
                 <a:latin typeface="Courier New" pitchFamily="34" charset="0"/>
                 <a:ea typeface="Courier New" pitchFamily="34" charset="-122"/>
@@ -5870,9 +5957,14 @@
             </a:avLst>
           </a:prstGeom>
           <a:solidFill>
-            <a:srgbClr val="C9A6FF"/>
-          </a:solidFill>
-          <a:ln/>
+            <a:srgbClr val="1A0B3D"/>
+          </a:solidFill>
+          <a:ln w="12700">
+            <a:solidFill>
+              <a:srgbClr val="5A05F4"/>
+            </a:solidFill>
+            <a:prstDash val="solid"/>
+          </a:ln>
         </p:spPr>
       </p:sp>
       <p:sp>
@@ -5902,7 +5994,7 @@
             <a:r>
               <a:rPr lang="en-US" sz="900" b="1" spc="100" kern="0" dirty="0">
                 <a:solidFill>
-                  <a:srgbClr val="1C1140"/>
+                  <a:srgbClr val="A98BFF"/>
                 </a:solidFill>
                 <a:latin typeface="Courier New" pitchFamily="34" charset="0"/>
                 <a:ea typeface="Courier New" pitchFamily="34" charset="-122"/>
@@ -5955,9 +6047,14 @@
             </a:avLst>
           </a:prstGeom>
           <a:solidFill>
-            <a:srgbClr val="1C1140"/>
-          </a:solidFill>
-          <a:ln/>
+            <a:srgbClr val="1A0B3D"/>
+          </a:solidFill>
+          <a:ln w="12700">
+            <a:solidFill>
+              <a:srgbClr val="5A05F4"/>
+            </a:solidFill>
+            <a:prstDash val="solid"/>
+          </a:ln>
         </p:spPr>
       </p:sp>
       <p:sp>
@@ -5987,7 +6084,7 @@
             <a:r>
               <a:rPr lang="en-US" sz="1050" b="1" dirty="0">
                 <a:solidFill>
-                  <a:srgbClr val="C9A6FF"/>
+                  <a:srgbClr val="A98BFF"/>
                 </a:solidFill>
                 <a:latin typeface="Courier New" pitchFamily="34" charset="0"/>
                 <a:ea typeface="Courier New" pitchFamily="34" charset="-122"/>
@@ -6016,7 +6113,7 @@
           <a:noFill/>
           <a:ln w="15875">
             <a:solidFill>
-              <a:srgbClr val="9B7BE8"/>
+              <a:srgbClr val="8F72E6"/>
             </a:solidFill>
             <a:prstDash val="solid"/>
           </a:ln>
@@ -6037,7 +6134,7 @@
             <a:avLst/>
           </a:prstGeom>
           <a:solidFill>
-            <a:srgbClr val="9B7BE8"/>
+            <a:srgbClr val="8F72E6"/>
           </a:solidFill>
           <a:ln/>
         </p:spPr>
@@ -6059,11 +6156,11 @@
             </a:avLst>
           </a:prstGeom>
           <a:solidFill>
-            <a:srgbClr val="17141F"/>
+            <a:srgbClr val="000000"/>
           </a:solidFill>
           <a:ln w="12700">
             <a:solidFill>
-              <a:srgbClr val="2E2A3A"/>
+              <a:srgbClr val="5E4F85"/>
             </a:solidFill>
             <a:prstDash val="solid"/>
           </a:ln>
@@ -6125,7 +6222,7 @@
           <a:noFill/>
           <a:ln w="15875">
             <a:solidFill>
-              <a:srgbClr val="9B7BE8"/>
+              <a:srgbClr val="8F72E6"/>
             </a:solidFill>
             <a:prstDash val="solid"/>
           </a:ln>
@@ -6146,7 +6243,7 @@
             <a:avLst/>
           </a:prstGeom>
           <a:solidFill>
-            <a:srgbClr val="9B7BE8"/>
+            <a:srgbClr val="8F72E6"/>
           </a:solidFill>
           <a:ln/>
         </p:spPr>
@@ -6168,11 +6265,11 @@
             </a:avLst>
           </a:prstGeom>
           <a:solidFill>
-            <a:srgbClr val="17141F"/>
+            <a:srgbClr val="000000"/>
           </a:solidFill>
           <a:ln w="12700">
             <a:solidFill>
-              <a:srgbClr val="2E2A3A"/>
+              <a:srgbClr val="5E4F85"/>
             </a:solidFill>
             <a:prstDash val="solid"/>
           </a:ln>
@@ -6234,7 +6331,7 @@
           <a:noFill/>
           <a:ln w="15875">
             <a:solidFill>
-              <a:srgbClr val="9B7BE8"/>
+              <a:srgbClr val="8F72E6"/>
             </a:solidFill>
             <a:prstDash val="solid"/>
           </a:ln>
@@ -6255,7 +6352,7 @@
             <a:avLst/>
           </a:prstGeom>
           <a:solidFill>
-            <a:srgbClr val="9B7BE8"/>
+            <a:srgbClr val="8F72E6"/>
           </a:solidFill>
           <a:ln/>
         </p:spPr>
@@ -6277,11 +6374,11 @@
             </a:avLst>
           </a:prstGeom>
           <a:solidFill>
-            <a:srgbClr val="17141F"/>
+            <a:srgbClr val="000000"/>
           </a:solidFill>
           <a:ln w="12700">
             <a:solidFill>
-              <a:srgbClr val="2E2A3A"/>
+              <a:srgbClr val="5E4F85"/>
             </a:solidFill>
             <a:prstDash val="solid"/>
           </a:ln>
@@ -6343,7 +6440,7 @@
           <a:noFill/>
           <a:ln w="15875">
             <a:solidFill>
-              <a:srgbClr val="9B7BE8"/>
+              <a:srgbClr val="8F72E6"/>
             </a:solidFill>
             <a:prstDash val="solid"/>
           </a:ln>
@@ -6364,7 +6461,7 @@
             <a:avLst/>
           </a:prstGeom>
           <a:solidFill>
-            <a:srgbClr val="9B7BE8"/>
+            <a:srgbClr val="8F72E6"/>
           </a:solidFill>
           <a:ln/>
         </p:spPr>
@@ -6386,9 +6483,14 @@
             </a:avLst>
           </a:prstGeom>
           <a:solidFill>
-            <a:srgbClr val="102A20"/>
-          </a:solidFill>
-          <a:ln/>
+            <a:srgbClr val="06180F"/>
+          </a:solidFill>
+          <a:ln w="12700">
+            <a:solidFill>
+              <a:srgbClr val="3FCF8E"/>
+            </a:solidFill>
+            <a:prstDash val="solid"/>
+          </a:ln>
         </p:spPr>
       </p:sp>
       <p:sp>
@@ -6418,7 +6520,7 @@
             <a:r>
               <a:rPr lang="en-US" sz="1050" b="1" dirty="0">
                 <a:solidFill>
-                  <a:srgbClr val="5FD6A0"/>
+                  <a:srgbClr val="3FCF8E"/>
                 </a:solidFill>
                 <a:latin typeface="Courier New" pitchFamily="34" charset="0"/>
                 <a:ea typeface="Courier New" pitchFamily="34" charset="-122"/>
@@ -6457,7 +6559,7 @@
             <a:r>
               <a:rPr lang="en-US" sz="1200" i="1" dirty="0">
                 <a:solidFill>
-                  <a:srgbClr val="AFA9BE"/>
+                  <a:srgbClr val="C9C4D6"/>
                 </a:solidFill>
                 <a:latin typeface="Montserrat" pitchFamily="34" charset="0"/>
                 <a:ea typeface="Montserrat" pitchFamily="34" charset="-122"/>
@@ -6486,11 +6588,11 @@
             </a:avLst>
           </a:prstGeom>
           <a:solidFill>
-            <a:srgbClr val="17141F"/>
+            <a:srgbClr val="000000"/>
           </a:solidFill>
           <a:ln w="12700">
             <a:solidFill>
-              <a:srgbClr val="2E2A3A"/>
+              <a:srgbClr val="5E4F85"/>
             </a:solidFill>
             <a:prstDash val="solid"/>
           </a:ln>
@@ -6565,7 +6667,7 @@
             <a:r>
               <a:rPr lang="en-US" sz="1200" dirty="0">
                 <a:solidFill>
-                  <a:srgbClr val="AFA9BE"/>
+                  <a:srgbClr val="C9C4D6"/>
                 </a:solidFill>
                 <a:latin typeface="Montserrat" pitchFamily="34" charset="0"/>
                 <a:ea typeface="Montserrat" pitchFamily="34" charset="-122"/>
@@ -6594,9 +6696,14 @@
             </a:avLst>
           </a:prstGeom>
           <a:solidFill>
-            <a:srgbClr val="102A20"/>
-          </a:solidFill>
-          <a:ln/>
+            <a:srgbClr val="06180F"/>
+          </a:solidFill>
+          <a:ln w="12700">
+            <a:solidFill>
+              <a:srgbClr val="3FCF8E"/>
+            </a:solidFill>
+            <a:prstDash val="solid"/>
+          </a:ln>
         </p:spPr>
       </p:sp>
       <p:sp>
@@ -6626,7 +6733,7 @@
             <a:r>
               <a:rPr lang="en-US" sz="1450" b="1" dirty="0">
                 <a:solidFill>
-                  <a:srgbClr val="5FD6A0"/>
+                  <a:srgbClr val="3FCF8E"/>
                 </a:solidFill>
                 <a:latin typeface="Montserrat" pitchFamily="34" charset="0"/>
                 <a:ea typeface="Montserrat" pitchFamily="34" charset="-122"/>
@@ -6668,7 +6775,7 @@
             <a:r>
               <a:rPr lang="en-US" sz="1200" dirty="0">
                 <a:solidFill>
-                  <a:srgbClr val="FFFFFF"/>
+                  <a:srgbClr val="C9C4D6"/>
                 </a:solidFill>
                 <a:latin typeface="Montserrat" pitchFamily="34" charset="0"/>
                 <a:ea typeface="Montserrat" pitchFamily="34" charset="-122"/>
@@ -6697,11 +6804,11 @@
             </a:avLst>
           </a:prstGeom>
           <a:solidFill>
-            <a:srgbClr val="17141F"/>
+            <a:srgbClr val="000000"/>
           </a:solidFill>
           <a:ln w="12700">
             <a:solidFill>
-              <a:srgbClr val="2E2A3A"/>
+              <a:srgbClr val="5E4F85"/>
             </a:solidFill>
             <a:prstDash val="solid"/>
           </a:ln>
@@ -6779,7 +6886,7 @@
             <a:lvl1pPr>
               <a:defRPr sz="850">
                 <a:solidFill>
-                  <a:srgbClr val="8A82A0"/>
+                  <a:srgbClr val="9A94AA"/>
                 </a:solidFill>
                 <a:latin typeface="Courier New"/>
                 <a:ea typeface="Courier New"/>
@@ -6849,7 +6956,7 @@
             <a:r>
               <a:rPr lang="en-US" sz="2600" b="1" dirty="0">
                 <a:solidFill>
-                  <a:srgbClr val="C9A6FF"/>
+                  <a:srgbClr val="A98BFF"/>
                 </a:solidFill>
                 <a:latin typeface="Courier New" pitchFamily="34" charset="0"/>
                 <a:ea typeface="Courier New" pitchFamily="34" charset="-122"/>
@@ -6917,9 +7024,14 @@
             </a:avLst>
           </a:prstGeom>
           <a:solidFill>
-            <a:srgbClr val="C9A6FF"/>
-          </a:solidFill>
-          <a:ln/>
+            <a:srgbClr val="1A0B3D"/>
+          </a:solidFill>
+          <a:ln w="12700">
+            <a:solidFill>
+              <a:srgbClr val="5A05F4"/>
+            </a:solidFill>
+            <a:prstDash val="solid"/>
+          </a:ln>
         </p:spPr>
       </p:sp>
       <p:sp>
@@ -6949,7 +7061,7 @@
             <a:r>
               <a:rPr lang="en-US" sz="900" b="1" spc="100" kern="0" dirty="0">
                 <a:solidFill>
-                  <a:srgbClr val="1C1140"/>
+                  <a:srgbClr val="A98BFF"/>
                 </a:solidFill>
                 <a:latin typeface="Courier New" pitchFamily="34" charset="0"/>
                 <a:ea typeface="Courier New" pitchFamily="34" charset="-122"/>
@@ -7002,9 +7114,14 @@
             </a:avLst>
           </a:prstGeom>
           <a:solidFill>
-            <a:srgbClr val="1C1140"/>
-          </a:solidFill>
-          <a:ln/>
+            <a:srgbClr val="1A0B3D"/>
+          </a:solidFill>
+          <a:ln w="12700">
+            <a:solidFill>
+              <a:srgbClr val="5A05F4"/>
+            </a:solidFill>
+            <a:prstDash val="solid"/>
+          </a:ln>
         </p:spPr>
       </p:sp>
       <p:sp>
@@ -7034,7 +7151,7 @@
             <a:r>
               <a:rPr lang="en-US" sz="3400" b="1" dirty="0">
                 <a:solidFill>
-                  <a:srgbClr val="C9A6FF"/>
+                  <a:srgbClr val="A98BFF"/>
                 </a:solidFill>
                 <a:latin typeface="Montserrat" pitchFamily="34" charset="0"/>
                 <a:ea typeface="Montserrat" pitchFamily="34" charset="-122"/>
@@ -7073,7 +7190,7 @@
             <a:r>
               <a:rPr lang="en-US" sz="1150" dirty="0">
                 <a:solidFill>
-                  <a:srgbClr val="C9A6FF"/>
+                  <a:srgbClr val="C9C4D6"/>
                 </a:solidFill>
                 <a:latin typeface="Montserrat" pitchFamily="34" charset="0"/>
                 <a:ea typeface="Montserrat" pitchFamily="34" charset="-122"/>
@@ -7102,11 +7219,11 @@
             </a:avLst>
           </a:prstGeom>
           <a:solidFill>
-            <a:srgbClr val="17141F"/>
+            <a:srgbClr val="000000"/>
           </a:solidFill>
           <a:ln w="12700">
             <a:solidFill>
-              <a:srgbClr val="2E2A3A"/>
+              <a:srgbClr val="5E4F85"/>
             </a:solidFill>
             <a:prstDash val="solid"/>
           </a:ln>
@@ -7181,7 +7298,7 @@
             <a:r>
               <a:rPr lang="en-US" sz="1200" dirty="0">
                 <a:solidFill>
-                  <a:srgbClr val="AFA9BE"/>
+                  <a:srgbClr val="C9C4D6"/>
                 </a:solidFill>
                 <a:latin typeface="Montserrat" pitchFamily="34" charset="0"/>
                 <a:ea typeface="Montserrat" pitchFamily="34" charset="-122"/>
@@ -7210,7 +7327,7 @@
             </a:avLst>
           </a:prstGeom>
           <a:solidFill>
-            <a:srgbClr val="102A20"/>
+            <a:srgbClr val="06180F"/>
           </a:solidFill>
           <a:ln/>
         </p:spPr>
@@ -7230,7 +7347,7 @@
             <a:avLst/>
           </a:prstGeom>
           <a:solidFill>
-            <a:srgbClr val="5FD6A0"/>
+            <a:srgbClr val="3FCF8E"/>
           </a:solidFill>
           <a:ln/>
         </p:spPr>
@@ -7250,7 +7367,7 @@
             <a:avLst/>
           </a:prstGeom>
           <a:solidFill>
-            <a:srgbClr val="5FD6A0"/>
+            <a:srgbClr val="3FCF8E"/>
           </a:solidFill>
           <a:ln/>
         </p:spPr>
@@ -7272,7 +7389,7 @@
             </a:avLst>
           </a:prstGeom>
           <a:solidFill>
-            <a:srgbClr val="102A20"/>
+            <a:srgbClr val="06180F"/>
           </a:solidFill>
           <a:ln/>
         </p:spPr>
@@ -7292,7 +7409,7 @@
             <a:avLst/>
           </a:prstGeom>
           <a:solidFill>
-            <a:srgbClr val="5FD6A0"/>
+            <a:srgbClr val="3FCF8E"/>
           </a:solidFill>
           <a:ln/>
         </p:spPr>
@@ -7312,7 +7429,7 @@
             <a:avLst/>
           </a:prstGeom>
           <a:solidFill>
-            <a:srgbClr val="5FD6A0"/>
+            <a:srgbClr val="3FCF8E"/>
           </a:solidFill>
           <a:ln/>
         </p:spPr>
@@ -7334,7 +7451,7 @@
             </a:avLst>
           </a:prstGeom>
           <a:solidFill>
-            <a:srgbClr val="102A20"/>
+            <a:srgbClr val="06180F"/>
           </a:solidFill>
           <a:ln/>
         </p:spPr>
@@ -7354,7 +7471,7 @@
             <a:avLst/>
           </a:prstGeom>
           <a:solidFill>
-            <a:srgbClr val="5FD6A0"/>
+            <a:srgbClr val="3FCF8E"/>
           </a:solidFill>
           <a:ln/>
         </p:spPr>
@@ -7374,7 +7491,7 @@
             <a:avLst/>
           </a:prstGeom>
           <a:solidFill>
-            <a:srgbClr val="5FD6A0"/>
+            <a:srgbClr val="3FCF8E"/>
           </a:solidFill>
           <a:ln/>
         </p:spPr>
@@ -7396,7 +7513,7 @@
             </a:avLst>
           </a:prstGeom>
           <a:solidFill>
-            <a:srgbClr val="102A20"/>
+            <a:srgbClr val="06180F"/>
           </a:solidFill>
           <a:ln/>
         </p:spPr>
@@ -7416,7 +7533,7 @@
             <a:avLst/>
           </a:prstGeom>
           <a:solidFill>
-            <a:srgbClr val="5FD6A0"/>
+            <a:srgbClr val="3FCF8E"/>
           </a:solidFill>
           <a:ln/>
         </p:spPr>
@@ -7436,7 +7553,7 @@
             <a:avLst/>
           </a:prstGeom>
           <a:solidFill>
-            <a:srgbClr val="5FD6A0"/>
+            <a:srgbClr val="3FCF8E"/>
           </a:solidFill>
           <a:ln/>
         </p:spPr>
@@ -7458,7 +7575,7 @@
             </a:avLst>
           </a:prstGeom>
           <a:solidFill>
-            <a:srgbClr val="102A20"/>
+            <a:srgbClr val="06180F"/>
           </a:solidFill>
           <a:ln/>
         </p:spPr>
@@ -7478,7 +7595,7 @@
             <a:avLst/>
           </a:prstGeom>
           <a:solidFill>
-            <a:srgbClr val="5FD6A0"/>
+            <a:srgbClr val="3FCF8E"/>
           </a:solidFill>
           <a:ln/>
         </p:spPr>
@@ -7498,7 +7615,7 @@
             <a:avLst/>
           </a:prstGeom>
           <a:solidFill>
-            <a:srgbClr val="5FD6A0"/>
+            <a:srgbClr val="3FCF8E"/>
           </a:solidFill>
           <a:ln/>
         </p:spPr>
@@ -7520,7 +7637,7 @@
             </a:avLst>
           </a:prstGeom>
           <a:solidFill>
-            <a:srgbClr val="2E1418"/>
+            <a:srgbClr val="1A0808"/>
           </a:solidFill>
           <a:ln/>
         </p:spPr>
@@ -7540,7 +7657,7 @@
             <a:avLst/>
           </a:prstGeom>
           <a:solidFill>
-            <a:srgbClr val="FF7B7B"/>
+            <a:srgbClr val="FF6B6B"/>
           </a:solidFill>
           <a:ln/>
         </p:spPr>
@@ -7560,7 +7677,7 @@
             <a:avLst/>
           </a:prstGeom>
           <a:solidFill>
-            <a:srgbClr val="FF7B7B"/>
+            <a:srgbClr val="FF6B6B"/>
           </a:solidFill>
           <a:ln/>
         </p:spPr>
@@ -7592,7 +7709,7 @@
             <a:r>
               <a:rPr lang="en-US" sz="1250" b="1" dirty="0">
                 <a:solidFill>
-                  <a:srgbClr val="5FD6A0"/>
+                  <a:srgbClr val="3FCF8E"/>
                 </a:solidFill>
                 <a:latin typeface="Montserrat" pitchFamily="34" charset="0"/>
                 <a:ea typeface="Montserrat" pitchFamily="34" charset="-122"/>
@@ -7606,7 +7723,7 @@
             <a:r>
               <a:rPr lang="en-US" sz="1250" dirty="0">
                 <a:solidFill>
-                  <a:srgbClr val="AFA9BE"/>
+                  <a:srgbClr val="C9C4D6"/>
                 </a:solidFill>
                 <a:latin typeface="Montserrat" pitchFamily="34" charset="0"/>
                 <a:ea typeface="Montserrat" pitchFamily="34" charset="-122"/>
@@ -7635,9 +7752,14 @@
             </a:avLst>
           </a:prstGeom>
           <a:solidFill>
-            <a:srgbClr val="2A2010"/>
-          </a:solidFill>
-          <a:ln/>
+            <a:srgbClr val="0B1A38"/>
+          </a:solidFill>
+          <a:ln w="12700">
+            <a:solidFill>
+              <a:srgbClr val="6BA0F8"/>
+            </a:solidFill>
+            <a:prstDash val="solid"/>
+          </a:ln>
         </p:spPr>
       </p:sp>
       <p:sp>
@@ -7667,7 +7789,7 @@
             <a:r>
               <a:rPr lang="en-US" sz="1350" b="1" dirty="0">
                 <a:solidFill>
-                  <a:srgbClr val="E8A857"/>
+                  <a:srgbClr val="6BA0F8"/>
                 </a:solidFill>
                 <a:latin typeface="Montserrat" pitchFamily="34" charset="0"/>
                 <a:ea typeface="Montserrat" pitchFamily="34" charset="-122"/>
@@ -7706,7 +7828,7 @@
             <a:r>
               <a:rPr lang="en-US" sz="1150" dirty="0">
                 <a:solidFill>
-                  <a:srgbClr val="FFFFFF"/>
+                  <a:srgbClr val="C9C4D6"/>
                 </a:solidFill>
                 <a:latin typeface="Montserrat" pitchFamily="34" charset="0"/>
                 <a:ea typeface="Montserrat" pitchFamily="34" charset="-122"/>
@@ -7735,9 +7857,14 @@
             </a:avLst>
           </a:prstGeom>
           <a:solidFill>
-            <a:srgbClr val="2E1418"/>
-          </a:solidFill>
-          <a:ln/>
+            <a:srgbClr val="1A0808"/>
+          </a:solidFill>
+          <a:ln w="12700">
+            <a:solidFill>
+              <a:srgbClr val="FF6B6B"/>
+            </a:solidFill>
+            <a:prstDash val="solid"/>
+          </a:ln>
         </p:spPr>
       </p:sp>
       <p:sp>
@@ -7767,7 +7894,7 @@
             <a:r>
               <a:rPr lang="en-US" sz="1350" b="1" dirty="0">
                 <a:solidFill>
-                  <a:srgbClr val="FF7B7B"/>
+                  <a:srgbClr val="FF6B6B"/>
                 </a:solidFill>
                 <a:latin typeface="Montserrat" pitchFamily="34" charset="0"/>
                 <a:ea typeface="Montserrat" pitchFamily="34" charset="-122"/>
@@ -7806,7 +7933,7 @@
             <a:r>
               <a:rPr lang="en-US" sz="1150" dirty="0">
                 <a:solidFill>
-                  <a:srgbClr val="FFFFFF"/>
+                  <a:srgbClr val="C9C4D6"/>
                 </a:solidFill>
                 <a:latin typeface="Montserrat" pitchFamily="34" charset="0"/>
                 <a:ea typeface="Montserrat" pitchFamily="34" charset="-122"/>
@@ -7835,9 +7962,14 @@
             </a:avLst>
           </a:prstGeom>
           <a:solidFill>
-            <a:srgbClr val="102A20"/>
-          </a:solidFill>
-          <a:ln/>
+            <a:srgbClr val="06180F"/>
+          </a:solidFill>
+          <a:ln w="12700">
+            <a:solidFill>
+              <a:srgbClr val="3FCF8E"/>
+            </a:solidFill>
+            <a:prstDash val="solid"/>
+          </a:ln>
         </p:spPr>
       </p:sp>
       <p:sp>
@@ -7912,7 +8044,7 @@
             <a:lvl1pPr>
               <a:defRPr sz="850">
                 <a:solidFill>
-                  <a:srgbClr val="8A82A0"/>
+                  <a:srgbClr val="9A94AA"/>
                 </a:solidFill>
                 <a:latin typeface="Courier New"/>
                 <a:ea typeface="Courier New"/>
@@ -7982,7 +8114,7 @@
             <a:r>
               <a:rPr lang="en-US" sz="2600" b="1" dirty="0">
                 <a:solidFill>
-                  <a:srgbClr val="C9A6FF"/>
+                  <a:srgbClr val="A98BFF"/>
                 </a:solidFill>
                 <a:latin typeface="Courier New" pitchFamily="34" charset="0"/>
                 <a:ea typeface="Courier New" pitchFamily="34" charset="-122"/>
@@ -8050,9 +8182,14 @@
             </a:avLst>
           </a:prstGeom>
           <a:solidFill>
-            <a:srgbClr val="C9A6FF"/>
-          </a:solidFill>
-          <a:ln/>
+            <a:srgbClr val="1A0B3D"/>
+          </a:solidFill>
+          <a:ln w="12700">
+            <a:solidFill>
+              <a:srgbClr val="5A05F4"/>
+            </a:solidFill>
+            <a:prstDash val="solid"/>
+          </a:ln>
         </p:spPr>
       </p:sp>
       <p:sp>
@@ -8082,7 +8219,7 @@
             <a:r>
               <a:rPr lang="en-US" sz="900" b="1" spc="100" kern="0" dirty="0">
                 <a:solidFill>
-                  <a:srgbClr val="1C1140"/>
+                  <a:srgbClr val="A98BFF"/>
                 </a:solidFill>
                 <a:latin typeface="Courier New" pitchFamily="34" charset="0"/>
                 <a:ea typeface="Courier New" pitchFamily="34" charset="-122"/>
@@ -8135,11 +8272,11 @@
             </a:avLst>
           </a:prstGeom>
           <a:solidFill>
-            <a:srgbClr val="12101A"/>
+            <a:srgbClr val="07060C"/>
           </a:solidFill>
           <a:ln w="12700">
             <a:solidFill>
-              <a:srgbClr val="2E2A3A"/>
+              <a:srgbClr val="5E4F85"/>
             </a:solidFill>
             <a:prstDash val="solid"/>
           </a:ln>
@@ -8175,7 +8312,7 @@
             <a:r>
               <a:rPr lang="en-US" sz="1100" dirty="0">
                 <a:solidFill>
-                  <a:srgbClr val="C9A6FF"/>
+                  <a:srgbClr val="A98BFF"/>
                 </a:solidFill>
                 <a:latin typeface="Courier New" pitchFamily="34" charset="0"/>
                 <a:ea typeface="Courier New" pitchFamily="34" charset="-122"/>
@@ -8195,7 +8332,7 @@
             <a:r>
               <a:rPr lang="en-US" sz="1100" dirty="0">
                 <a:solidFill>
-                  <a:srgbClr val="7FD9A6"/>
+                  <a:srgbClr val="6BA0F8"/>
                 </a:solidFill>
                 <a:latin typeface="Courier New" pitchFamily="34" charset="0"/>
                 <a:ea typeface="Courier New" pitchFamily="34" charset="-122"/>
@@ -8224,7 +8361,7 @@
             <a:r>
               <a:rPr lang="en-US" sz="1100" dirty="0">
                 <a:solidFill>
-                  <a:srgbClr val="C9A6FF"/>
+                  <a:srgbClr val="A98BFF"/>
                 </a:solidFill>
                 <a:latin typeface="Courier New" pitchFamily="34" charset="0"/>
                 <a:ea typeface="Courier New" pitchFamily="34" charset="-122"/>
@@ -8244,7 +8381,7 @@
             <a:r>
               <a:rPr lang="en-US" sz="1100" dirty="0">
                 <a:solidFill>
-                  <a:srgbClr val="F0B36B"/>
+                  <a:srgbClr val="C9C4D6"/>
                 </a:solidFill>
                 <a:latin typeface="Courier New" pitchFamily="34" charset="0"/>
                 <a:ea typeface="Courier New" pitchFamily="34" charset="-122"/>
@@ -8273,7 +8410,7 @@
             <a:r>
               <a:rPr lang="en-US" sz="1100" dirty="0">
                 <a:solidFill>
-                  <a:srgbClr val="C9A6FF"/>
+                  <a:srgbClr val="A98BFF"/>
                 </a:solidFill>
                 <a:latin typeface="Courier New" pitchFamily="34" charset="0"/>
                 <a:ea typeface="Courier New" pitchFamily="34" charset="-122"/>
@@ -8293,7 +8430,7 @@
             <a:r>
               <a:rPr lang="en-US" sz="1100" dirty="0">
                 <a:solidFill>
-                  <a:srgbClr val="7FD9A6"/>
+                  <a:srgbClr val="6BA0F8"/>
                 </a:solidFill>
                 <a:latin typeface="Courier New" pitchFamily="34" charset="0"/>
                 <a:ea typeface="Courier New" pitchFamily="34" charset="-122"/>
@@ -8322,9 +8459,14 @@
             </a:avLst>
           </a:prstGeom>
           <a:solidFill>
-            <a:srgbClr val="2A2010"/>
-          </a:solidFill>
-          <a:ln/>
+            <a:srgbClr val="0B1A38"/>
+          </a:solidFill>
+          <a:ln w="12700">
+            <a:solidFill>
+              <a:srgbClr val="6BA0F8"/>
+            </a:solidFill>
+            <a:prstDash val="solid"/>
+          </a:ln>
         </p:spPr>
       </p:sp>
       <p:sp>
@@ -8354,7 +8496,7 @@
             <a:r>
               <a:rPr lang="en-US" sz="1450" b="1" dirty="0">
                 <a:solidFill>
-                  <a:srgbClr val="E8A857"/>
+                  <a:srgbClr val="6BA0F8"/>
                 </a:solidFill>
                 <a:latin typeface="Montserrat" pitchFamily="34" charset="0"/>
                 <a:ea typeface="Montserrat" pitchFamily="34" charset="-122"/>
@@ -8396,7 +8538,7 @@
             <a:r>
               <a:rPr lang="en-US" sz="1200" dirty="0">
                 <a:solidFill>
-                  <a:srgbClr val="FFFFFF"/>
+                  <a:srgbClr val="C9C4D6"/>
                 </a:solidFill>
                 <a:latin typeface="Montserrat" pitchFamily="34" charset="0"/>
                 <a:ea typeface="Montserrat" pitchFamily="34" charset="-122"/>
@@ -8425,9 +8567,14 @@
             </a:avLst>
           </a:prstGeom>
           <a:solidFill>
-            <a:srgbClr val="102A20"/>
-          </a:solidFill>
-          <a:ln/>
+            <a:srgbClr val="06180F"/>
+          </a:solidFill>
+          <a:ln w="12700">
+            <a:solidFill>
+              <a:srgbClr val="3FCF8E"/>
+            </a:solidFill>
+            <a:prstDash val="solid"/>
+          </a:ln>
         </p:spPr>
       </p:sp>
       <p:sp>
@@ -8457,7 +8604,7 @@
             <a:r>
               <a:rPr lang="en-US" sz="1450" b="1" dirty="0">
                 <a:solidFill>
-                  <a:srgbClr val="5FD6A0"/>
+                  <a:srgbClr val="3FCF8E"/>
                 </a:solidFill>
                 <a:latin typeface="Montserrat" pitchFamily="34" charset="0"/>
                 <a:ea typeface="Montserrat" pitchFamily="34" charset="-122"/>
@@ -8499,7 +8646,7 @@
             <a:r>
               <a:rPr lang="en-US" sz="1200" dirty="0">
                 <a:solidFill>
-                  <a:srgbClr val="FFFFFF"/>
+                  <a:srgbClr val="C9C4D6"/>
                 </a:solidFill>
                 <a:latin typeface="Montserrat" pitchFamily="34" charset="0"/>
                 <a:ea typeface="Montserrat" pitchFamily="34" charset="-122"/>
@@ -8602,7 +8749,7 @@
             <a:r>
               <a:rPr lang="en-US" sz="1150" i="1" dirty="0">
                 <a:solidFill>
-                  <a:srgbClr val="AFA9BE"/>
+                  <a:srgbClr val="C9C4D6"/>
                 </a:solidFill>
                 <a:latin typeface="Montserrat" pitchFamily="34" charset="0"/>
                 <a:ea typeface="Montserrat" pitchFamily="34" charset="-122"/>
@@ -8644,7 +8791,7 @@
             <a:lvl1pPr>
               <a:defRPr sz="850">
                 <a:solidFill>
-                  <a:srgbClr val="8A82A0"/>
+                  <a:srgbClr val="9A94AA"/>
                 </a:solidFill>
                 <a:latin typeface="Courier New"/>
                 <a:ea typeface="Courier New"/>
@@ -8714,7 +8861,7 @@
             <a:r>
               <a:rPr lang="en-US" sz="2600" b="1" dirty="0">
                 <a:solidFill>
-                  <a:srgbClr val="C9A6FF"/>
+                  <a:srgbClr val="A98BFF"/>
                 </a:solidFill>
                 <a:latin typeface="Courier New" pitchFamily="34" charset="0"/>
                 <a:ea typeface="Courier New" pitchFamily="34" charset="-122"/>
@@ -8782,9 +8929,14 @@
             </a:avLst>
           </a:prstGeom>
           <a:solidFill>
-            <a:srgbClr val="C9A6FF"/>
-          </a:solidFill>
-          <a:ln/>
+            <a:srgbClr val="1A0B3D"/>
+          </a:solidFill>
+          <a:ln w="12700">
+            <a:solidFill>
+              <a:srgbClr val="5A05F4"/>
+            </a:solidFill>
+            <a:prstDash val="solid"/>
+          </a:ln>
         </p:spPr>
       </p:sp>
       <p:sp>
@@ -8814,7 +8966,7 @@
             <a:r>
               <a:rPr lang="en-US" sz="900" b="1" spc="100" kern="0" dirty="0">
                 <a:solidFill>
-                  <a:srgbClr val="1C1140"/>
+                  <a:srgbClr val="A98BFF"/>
                 </a:solidFill>
                 <a:latin typeface="Courier New" pitchFamily="34" charset="0"/>
                 <a:ea typeface="Courier New" pitchFamily="34" charset="-122"/>
@@ -8843,9 +8995,14 @@
             </a:avLst>
           </a:prstGeom>
           <a:solidFill>
-            <a:srgbClr val="2A2010"/>
-          </a:solidFill>
-          <a:ln/>
+            <a:srgbClr val="000000"/>
+          </a:solidFill>
+          <a:ln w="12700">
+            <a:solidFill>
+              <a:srgbClr val="5E4F85"/>
+            </a:solidFill>
+            <a:prstDash val="solid"/>
+          </a:ln>
         </p:spPr>
       </p:sp>
       <p:sp>
@@ -8875,7 +9032,7 @@
             <a:r>
               <a:rPr lang="en-US" sz="900" b="1" spc="100" kern="0" dirty="0">
                 <a:solidFill>
-                  <a:srgbClr val="E8A857"/>
+                  <a:srgbClr val="C9C4D6"/>
                 </a:solidFill>
                 <a:latin typeface="Courier New" pitchFamily="34" charset="0"/>
                 <a:ea typeface="Courier New" pitchFamily="34" charset="-122"/>
@@ -8928,9 +9085,14 @@
             </a:avLst>
           </a:prstGeom>
           <a:solidFill>
-            <a:srgbClr val="2A2010"/>
-          </a:solidFill>
-          <a:ln/>
+            <a:srgbClr val="0B1A38"/>
+          </a:solidFill>
+          <a:ln w="12700">
+            <a:solidFill>
+              <a:srgbClr val="6BA0F8"/>
+            </a:solidFill>
+            <a:prstDash val="solid"/>
+          </a:ln>
         </p:spPr>
       </p:sp>
       <p:sp>
@@ -8960,7 +9122,7 @@
             <a:r>
               <a:rPr lang="en-US" sz="1450" b="1" dirty="0">
                 <a:solidFill>
-                  <a:srgbClr val="E8A857"/>
+                  <a:srgbClr val="6BA0F8"/>
                 </a:solidFill>
                 <a:latin typeface="Montserrat" pitchFamily="34" charset="0"/>
                 <a:ea typeface="Montserrat" pitchFamily="34" charset="-122"/>
@@ -9002,7 +9164,7 @@
             <a:r>
               <a:rPr lang="en-US" sz="1200" dirty="0">
                 <a:solidFill>
-                  <a:srgbClr val="FFFFFF"/>
+                  <a:srgbClr val="C9C4D6"/>
                 </a:solidFill>
                 <a:latin typeface="Montserrat" pitchFamily="34" charset="0"/>
                 <a:ea typeface="Montserrat" pitchFamily="34" charset="-122"/>
@@ -9031,9 +9193,14 @@
             </a:avLst>
           </a:prstGeom>
           <a:solidFill>
-            <a:srgbClr val="2E1418"/>
-          </a:solidFill>
-          <a:ln/>
+            <a:srgbClr val="1A0808"/>
+          </a:solidFill>
+          <a:ln w="12700">
+            <a:solidFill>
+              <a:srgbClr val="FF6B6B"/>
+            </a:solidFill>
+            <a:prstDash val="solid"/>
+          </a:ln>
         </p:spPr>
       </p:sp>
       <p:sp>
@@ -9063,7 +9230,7 @@
             <a:r>
               <a:rPr lang="en-US" sz="1450" b="1" dirty="0">
                 <a:solidFill>
-                  <a:srgbClr val="FF7B7B"/>
+                  <a:srgbClr val="FF6B6B"/>
                 </a:solidFill>
                 <a:latin typeface="Montserrat" pitchFamily="34" charset="0"/>
                 <a:ea typeface="Montserrat" pitchFamily="34" charset="-122"/>
@@ -9105,7 +9272,7 @@
             <a:r>
               <a:rPr lang="en-US" sz="1200" dirty="0">
                 <a:solidFill>
-                  <a:srgbClr val="FFFFFF"/>
+                  <a:srgbClr val="C9C4D6"/>
                 </a:solidFill>
                 <a:latin typeface="Montserrat" pitchFamily="34" charset="0"/>
                 <a:ea typeface="Montserrat" pitchFamily="34" charset="-122"/>
@@ -9134,9 +9301,14 @@
             </a:avLst>
           </a:prstGeom>
           <a:solidFill>
-            <a:srgbClr val="102A20"/>
-          </a:solidFill>
-          <a:ln/>
+            <a:srgbClr val="06180F"/>
+          </a:solidFill>
+          <a:ln w="12700">
+            <a:solidFill>
+              <a:srgbClr val="3FCF8E"/>
+            </a:solidFill>
+            <a:prstDash val="solid"/>
+          </a:ln>
         </p:spPr>
       </p:sp>
       <p:sp>
@@ -9166,7 +9338,7 @@
             <a:r>
               <a:rPr lang="en-US" sz="950" b="1" spc="150" kern="0" dirty="0">
                 <a:solidFill>
-                  <a:srgbClr val="5FD6A0"/>
+                  <a:srgbClr val="3FCF8E"/>
                 </a:solidFill>
                 <a:latin typeface="Courier New" pitchFamily="34" charset="0"/>
                 <a:ea typeface="Courier New" pitchFamily="34" charset="-122"/>
@@ -9237,11 +9409,11 @@
             </a:avLst>
           </a:prstGeom>
           <a:solidFill>
-            <a:srgbClr val="17141F"/>
+            <a:srgbClr val="000000"/>
           </a:solidFill>
           <a:ln w="12700">
             <a:solidFill>
-              <a:srgbClr val="2E2A3A"/>
+              <a:srgbClr val="5E4F85"/>
             </a:solidFill>
             <a:prstDash val="solid"/>
           </a:ln>
@@ -9319,7 +9491,7 @@
             <a:lvl1pPr>
               <a:defRPr sz="850">
                 <a:solidFill>
-                  <a:srgbClr val="8A82A0"/>
+                  <a:srgbClr val="9A94AA"/>
                 </a:solidFill>
                 <a:latin typeface="Courier New"/>
                 <a:ea typeface="Courier New"/>
@@ -9389,7 +9561,7 @@
             <a:r>
               <a:rPr lang="en-US" sz="2600" b="1" dirty="0">
                 <a:solidFill>
-                  <a:srgbClr val="C9A6FF"/>
+                  <a:srgbClr val="A98BFF"/>
                 </a:solidFill>
                 <a:latin typeface="Courier New" pitchFamily="34" charset="0"/>
                 <a:ea typeface="Courier New" pitchFamily="34" charset="-122"/>
@@ -9457,9 +9629,14 @@
             </a:avLst>
           </a:prstGeom>
           <a:solidFill>
-            <a:srgbClr val="C9A6FF"/>
-          </a:solidFill>
-          <a:ln/>
+            <a:srgbClr val="1A0B3D"/>
+          </a:solidFill>
+          <a:ln w="12700">
+            <a:solidFill>
+              <a:srgbClr val="5A05F4"/>
+            </a:solidFill>
+            <a:prstDash val="solid"/>
+          </a:ln>
         </p:spPr>
       </p:sp>
       <p:sp>
@@ -9489,7 +9666,7 @@
             <a:r>
               <a:rPr lang="en-US" sz="900" b="1" spc="100" kern="0" dirty="0">
                 <a:solidFill>
-                  <a:srgbClr val="1C1140"/>
+                  <a:srgbClr val="A98BFF"/>
                 </a:solidFill>
                 <a:latin typeface="Courier New" pitchFamily="34" charset="0"/>
                 <a:ea typeface="Courier New" pitchFamily="34" charset="-122"/>
@@ -9542,9 +9719,14 @@
             </a:avLst>
           </a:prstGeom>
           <a:solidFill>
-            <a:srgbClr val="2E1418"/>
-          </a:solidFill>
-          <a:ln/>
+            <a:srgbClr val="1A0808"/>
+          </a:solidFill>
+          <a:ln w="12700">
+            <a:solidFill>
+              <a:srgbClr val="FF6B6B"/>
+            </a:solidFill>
+            <a:prstDash val="solid"/>
+          </a:ln>
         </p:spPr>
       </p:sp>
       <p:sp>
@@ -9574,7 +9756,7 @@
             <a:r>
               <a:rPr lang="en-US" sz="1100" b="1" dirty="0">
                 <a:solidFill>
-                  <a:srgbClr val="FF7B7B"/>
+                  <a:srgbClr val="FF6B6B"/>
                 </a:solidFill>
                 <a:latin typeface="Courier New" pitchFamily="34" charset="0"/>
                 <a:ea typeface="Courier New" pitchFamily="34" charset="-122"/>
@@ -9603,7 +9785,7 @@
           <a:noFill/>
           <a:ln w="15875">
             <a:solidFill>
-              <a:srgbClr val="9B7BE8"/>
+              <a:srgbClr val="8F72E6"/>
             </a:solidFill>
             <a:prstDash val="solid"/>
           </a:ln>
@@ -9624,7 +9806,7 @@
             <a:avLst/>
           </a:prstGeom>
           <a:solidFill>
-            <a:srgbClr val="9B7BE8"/>
+            <a:srgbClr val="8F72E6"/>
           </a:solidFill>
           <a:ln/>
         </p:spPr>
@@ -9646,11 +9828,11 @@
             </a:avLst>
           </a:prstGeom>
           <a:solidFill>
-            <a:srgbClr val="17141F"/>
+            <a:srgbClr val="000000"/>
           </a:solidFill>
           <a:ln w="12700">
             <a:solidFill>
-              <a:srgbClr val="2E2A3A"/>
+              <a:srgbClr val="5E4F85"/>
             </a:solidFill>
             <a:prstDash val="solid"/>
           </a:ln>
@@ -9712,7 +9894,7 @@
           <a:noFill/>
           <a:ln w="15875">
             <a:solidFill>
-              <a:srgbClr val="9B7BE8"/>
+              <a:srgbClr val="8F72E6"/>
             </a:solidFill>
             <a:prstDash val="solid"/>
           </a:ln>
@@ -9733,7 +9915,7 @@
             <a:avLst/>
           </a:prstGeom>
           <a:solidFill>
-            <a:srgbClr val="9B7BE8"/>
+            <a:srgbClr val="8F72E6"/>
           </a:solidFill>
           <a:ln/>
         </p:spPr>
@@ -9755,9 +9937,14 @@
             </a:avLst>
           </a:prstGeom>
           <a:solidFill>
-            <a:srgbClr val="102A20"/>
-          </a:solidFill>
-          <a:ln/>
+            <a:srgbClr val="06180F"/>
+          </a:solidFill>
+          <a:ln w="12700">
+            <a:solidFill>
+              <a:srgbClr val="3FCF8E"/>
+            </a:solidFill>
+            <a:prstDash val="solid"/>
+          </a:ln>
         </p:spPr>
       </p:sp>
       <p:sp>
@@ -9787,7 +9974,7 @@
             <a:r>
               <a:rPr lang="en-US" sz="1100" b="1" dirty="0">
                 <a:solidFill>
-                  <a:srgbClr val="5FD6A0"/>
+                  <a:srgbClr val="3FCF8E"/>
                 </a:solidFill>
                 <a:latin typeface="Courier New" pitchFamily="34" charset="0"/>
                 <a:ea typeface="Courier New" pitchFamily="34" charset="-122"/>
@@ -9816,7 +10003,7 @@
           <a:noFill/>
           <a:ln w="15875">
             <a:solidFill>
-              <a:srgbClr val="9B7BE8"/>
+              <a:srgbClr val="8F72E6"/>
             </a:solidFill>
             <a:prstDash val="solid"/>
           </a:ln>
@@ -9837,7 +10024,7 @@
             <a:avLst/>
           </a:prstGeom>
           <a:solidFill>
-            <a:srgbClr val="9B7BE8"/>
+            <a:srgbClr val="8F72E6"/>
           </a:solidFill>
           <a:ln/>
         </p:spPr>
@@ -9859,9 +10046,14 @@
             </a:avLst>
           </a:prstGeom>
           <a:solidFill>
-            <a:srgbClr val="102A20"/>
-          </a:solidFill>
-          <a:ln/>
+            <a:srgbClr val="06180F"/>
+          </a:solidFill>
+          <a:ln w="12700">
+            <a:solidFill>
+              <a:srgbClr val="3FCF8E"/>
+            </a:solidFill>
+            <a:prstDash val="solid"/>
+          </a:ln>
         </p:spPr>
       </p:sp>
       <p:sp>
@@ -9891,7 +10083,7 @@
             <a:r>
               <a:rPr lang="en-US" sz="1100" b="1" dirty="0">
                 <a:solidFill>
-                  <a:srgbClr val="5FD6A0"/>
+                  <a:srgbClr val="3FCF8E"/>
                 </a:solidFill>
                 <a:latin typeface="Courier New" pitchFamily="34" charset="0"/>
                 <a:ea typeface="Courier New" pitchFamily="34" charset="-122"/>
@@ -9920,9 +10112,14 @@
             </a:avLst>
           </a:prstGeom>
           <a:solidFill>
-            <a:srgbClr val="2A2010"/>
-          </a:solidFill>
-          <a:ln/>
+            <a:srgbClr val="0B1A38"/>
+          </a:solidFill>
+          <a:ln w="12700">
+            <a:solidFill>
+              <a:srgbClr val="6BA0F8"/>
+            </a:solidFill>
+            <a:prstDash val="solid"/>
+          </a:ln>
         </p:spPr>
       </p:sp>
       <p:sp>
@@ -9952,7 +10149,7 @@
             <a:r>
               <a:rPr lang="en-US" sz="950" b="1" spc="150" kern="0" dirty="0">
                 <a:solidFill>
-                  <a:srgbClr val="E8A857"/>
+                  <a:srgbClr val="6BA0F8"/>
                 </a:solidFill>
                 <a:latin typeface="Courier New" pitchFamily="34" charset="0"/>
                 <a:ea typeface="Courier New" pitchFamily="34" charset="-122"/>
@@ -10100,7 +10297,7 @@
             <a:lvl1pPr>
               <a:defRPr sz="850">
                 <a:solidFill>
-                  <a:srgbClr val="8A82A0"/>
+                  <a:srgbClr val="9A94AA"/>
                 </a:solidFill>
                 <a:latin typeface="Courier New"/>
                 <a:ea typeface="Courier New"/>
@@ -10199,7 +10396,7 @@
             </a:avLst>
           </a:prstGeom>
           <a:solidFill>
-            <a:srgbClr val="5FD6A0"/>
+            <a:srgbClr val="5A05F4"/>
           </a:solidFill>
           <a:ln/>
         </p:spPr>
@@ -10231,7 +10428,7 @@
             <a:r>
               <a:rPr lang="en-US" sz="900" b="1" spc="100" kern="0" dirty="0">
                 <a:solidFill>
-                  <a:srgbClr val="102A20"/>
+                  <a:srgbClr val="FFFFFF"/>
                 </a:solidFill>
                 <a:latin typeface="Courier New" pitchFamily="34" charset="0"/>
                 <a:ea typeface="Courier New" pitchFamily="34" charset="-122"/>
@@ -10284,9 +10481,14 @@
             </a:avLst>
           </a:prstGeom>
           <a:solidFill>
-            <a:srgbClr val="102A20"/>
-          </a:solidFill>
-          <a:ln/>
+            <a:srgbClr val="06180F"/>
+          </a:solidFill>
+          <a:ln w="12700">
+            <a:solidFill>
+              <a:srgbClr val="3FCF8E"/>
+            </a:solidFill>
+            <a:prstDash val="solid"/>
+          </a:ln>
         </p:spPr>
       </p:sp>
       <p:sp>
@@ -10304,7 +10506,7 @@
             <a:avLst/>
           </a:prstGeom>
           <a:solidFill>
-            <a:srgbClr val="5FD6A0"/>
+            <a:srgbClr val="5A05F4"/>
           </a:solidFill>
           <a:ln/>
         </p:spPr>
@@ -10336,7 +10538,7 @@
             <a:r>
               <a:rPr lang="en-US" sz="1200" b="1" dirty="0">
                 <a:solidFill>
-                  <a:srgbClr val="102A20"/>
+                  <a:srgbClr val="FFFFFF"/>
                 </a:solidFill>
                 <a:latin typeface="Courier New" pitchFamily="34" charset="0"/>
                 <a:ea typeface="Courier New" pitchFamily="34" charset="-122"/>
@@ -10375,7 +10577,7 @@
             <a:r>
               <a:rPr lang="en-US" sz="1450" b="1" dirty="0">
                 <a:solidFill>
-                  <a:srgbClr val="5FD6A0"/>
+                  <a:srgbClr val="3FCF8E"/>
                 </a:solidFill>
                 <a:latin typeface="Montserrat" pitchFamily="34" charset="0"/>
                 <a:ea typeface="Montserrat" pitchFamily="34" charset="-122"/>
@@ -10417,7 +10619,7 @@
             <a:r>
               <a:rPr lang="en-US" sz="1200" dirty="0">
                 <a:solidFill>
-                  <a:srgbClr val="FFFFFF"/>
+                  <a:srgbClr val="C9C4D6"/>
                 </a:solidFill>
                 <a:latin typeface="Montserrat" pitchFamily="34" charset="0"/>
                 <a:ea typeface="Montserrat" pitchFamily="34" charset="-122"/>
@@ -10446,9 +10648,14 @@
             </a:avLst>
           </a:prstGeom>
           <a:solidFill>
-            <a:srgbClr val="102A20"/>
-          </a:solidFill>
-          <a:ln/>
+            <a:srgbClr val="06180F"/>
+          </a:solidFill>
+          <a:ln w="12700">
+            <a:solidFill>
+              <a:srgbClr val="3FCF8E"/>
+            </a:solidFill>
+            <a:prstDash val="solid"/>
+          </a:ln>
         </p:spPr>
       </p:sp>
       <p:sp>
@@ -10466,7 +10673,7 @@
             <a:avLst/>
           </a:prstGeom>
           <a:solidFill>
-            <a:srgbClr val="5FD6A0"/>
+            <a:srgbClr val="5A05F4"/>
           </a:solidFill>
           <a:ln/>
         </p:spPr>
@@ -10498,7 +10705,7 @@
             <a:r>
               <a:rPr lang="en-US" sz="1200" b="1" dirty="0">
                 <a:solidFill>
-                  <a:srgbClr val="102A20"/>
+                  <a:srgbClr val="FFFFFF"/>
                 </a:solidFill>
                 <a:latin typeface="Courier New" pitchFamily="34" charset="0"/>
                 <a:ea typeface="Courier New" pitchFamily="34" charset="-122"/>
@@ -10537,7 +10744,7 @@
             <a:r>
               <a:rPr lang="en-US" sz="1450" b="1" dirty="0">
                 <a:solidFill>
-                  <a:srgbClr val="5FD6A0"/>
+                  <a:srgbClr val="3FCF8E"/>
                 </a:solidFill>
                 <a:latin typeface="Montserrat" pitchFamily="34" charset="0"/>
                 <a:ea typeface="Montserrat" pitchFamily="34" charset="-122"/>
@@ -10579,7 +10786,7 @@
             <a:r>
               <a:rPr lang="en-US" sz="1200" dirty="0">
                 <a:solidFill>
-                  <a:srgbClr val="FFFFFF"/>
+                  <a:srgbClr val="C9C4D6"/>
                 </a:solidFill>
                 <a:latin typeface="Montserrat" pitchFamily="34" charset="0"/>
                 <a:ea typeface="Montserrat" pitchFamily="34" charset="-122"/>
@@ -10608,9 +10815,14 @@
             </a:avLst>
           </a:prstGeom>
           <a:solidFill>
-            <a:srgbClr val="2E1418"/>
-          </a:solidFill>
-          <a:ln/>
+            <a:srgbClr val="1A0808"/>
+          </a:solidFill>
+          <a:ln w="12700">
+            <a:solidFill>
+              <a:srgbClr val="FF6B6B"/>
+            </a:solidFill>
+            <a:prstDash val="solid"/>
+          </a:ln>
         </p:spPr>
       </p:sp>
       <p:sp>
@@ -10628,7 +10840,7 @@
             <a:avLst/>
           </a:prstGeom>
           <a:solidFill>
-            <a:srgbClr val="FF7B7B"/>
+            <a:srgbClr val="5A05F4"/>
           </a:solidFill>
           <a:ln/>
         </p:spPr>
@@ -10660,7 +10872,7 @@
             <a:r>
               <a:rPr lang="en-US" sz="1200" b="1" dirty="0">
                 <a:solidFill>
-                  <a:srgbClr val="2E1418"/>
+                  <a:srgbClr val="FFFFFF"/>
                 </a:solidFill>
                 <a:latin typeface="Courier New" pitchFamily="34" charset="0"/>
                 <a:ea typeface="Courier New" pitchFamily="34" charset="-122"/>
@@ -10699,7 +10911,7 @@
             <a:r>
               <a:rPr lang="en-US" sz="1450" b="1" dirty="0">
                 <a:solidFill>
-                  <a:srgbClr val="FF7B7B"/>
+                  <a:srgbClr val="FF6B6B"/>
                 </a:solidFill>
                 <a:latin typeface="Montserrat" pitchFamily="34" charset="0"/>
                 <a:ea typeface="Montserrat" pitchFamily="34" charset="-122"/>
@@ -10741,7 +10953,7 @@
             <a:r>
               <a:rPr lang="en-US" sz="1200" dirty="0">
                 <a:solidFill>
-                  <a:srgbClr val="FFFFFF"/>
+                  <a:srgbClr val="C9C4D6"/>
                 </a:solidFill>
                 <a:latin typeface="Montserrat" pitchFamily="34" charset="0"/>
                 <a:ea typeface="Montserrat" pitchFamily="34" charset="-122"/>
@@ -10770,9 +10982,14 @@
             </a:avLst>
           </a:prstGeom>
           <a:solidFill>
-            <a:srgbClr val="102A20"/>
-          </a:solidFill>
-          <a:ln/>
+            <a:srgbClr val="06180F"/>
+          </a:solidFill>
+          <a:ln w="12700">
+            <a:solidFill>
+              <a:srgbClr val="3FCF8E"/>
+            </a:solidFill>
+            <a:prstDash val="solid"/>
+          </a:ln>
         </p:spPr>
       </p:sp>
       <p:sp>
@@ -10790,7 +11007,7 @@
             <a:avLst/>
           </a:prstGeom>
           <a:solidFill>
-            <a:srgbClr val="5FD6A0"/>
+            <a:srgbClr val="5A05F4"/>
           </a:solidFill>
           <a:ln/>
         </p:spPr>
@@ -10822,7 +11039,7 @@
             <a:r>
               <a:rPr lang="en-US" sz="1200" b="1" dirty="0">
                 <a:solidFill>
-                  <a:srgbClr val="102A20"/>
+                  <a:srgbClr val="FFFFFF"/>
                 </a:solidFill>
                 <a:latin typeface="Courier New" pitchFamily="34" charset="0"/>
                 <a:ea typeface="Courier New" pitchFamily="34" charset="-122"/>
@@ -10861,7 +11078,7 @@
             <a:r>
               <a:rPr lang="en-US" sz="1450" b="1" dirty="0">
                 <a:solidFill>
-                  <a:srgbClr val="5FD6A0"/>
+                  <a:srgbClr val="3FCF8E"/>
                 </a:solidFill>
                 <a:latin typeface="Montserrat" pitchFamily="34" charset="0"/>
                 <a:ea typeface="Montserrat" pitchFamily="34" charset="-122"/>
@@ -10903,7 +11120,7 @@
             <a:r>
               <a:rPr lang="en-US" sz="1200" dirty="0">
                 <a:solidFill>
-                  <a:srgbClr val="FFFFFF"/>
+                  <a:srgbClr val="C9C4D6"/>
                 </a:solidFill>
                 <a:latin typeface="Montserrat" pitchFamily="34" charset="0"/>
                 <a:ea typeface="Montserrat" pitchFamily="34" charset="-122"/>
@@ -10932,9 +11149,14 @@
             </a:avLst>
           </a:prstGeom>
           <a:solidFill>
-            <a:srgbClr val="102A20"/>
-          </a:solidFill>
-          <a:ln/>
+            <a:srgbClr val="06180F"/>
+          </a:solidFill>
+          <a:ln w="12700">
+            <a:solidFill>
+              <a:srgbClr val="3FCF8E"/>
+            </a:solidFill>
+            <a:prstDash val="solid"/>
+          </a:ln>
         </p:spPr>
       </p:sp>
       <p:sp>
@@ -10952,7 +11174,7 @@
             <a:avLst/>
           </a:prstGeom>
           <a:solidFill>
-            <a:srgbClr val="5FD6A0"/>
+            <a:srgbClr val="5A05F4"/>
           </a:solidFill>
           <a:ln/>
         </p:spPr>
@@ -10984,7 +11206,7 @@
             <a:r>
               <a:rPr lang="en-US" sz="1200" b="1" dirty="0">
                 <a:solidFill>
-                  <a:srgbClr val="102A20"/>
+                  <a:srgbClr val="FFFFFF"/>
                 </a:solidFill>
                 <a:latin typeface="Courier New" pitchFamily="34" charset="0"/>
                 <a:ea typeface="Courier New" pitchFamily="34" charset="-122"/>
@@ -11023,7 +11245,7 @@
             <a:r>
               <a:rPr lang="en-US" sz="1450" b="1" dirty="0">
                 <a:solidFill>
-                  <a:srgbClr val="5FD6A0"/>
+                  <a:srgbClr val="3FCF8E"/>
                 </a:solidFill>
                 <a:latin typeface="Montserrat" pitchFamily="34" charset="0"/>
                 <a:ea typeface="Montserrat" pitchFamily="34" charset="-122"/>
@@ -11065,7 +11287,7 @@
             <a:r>
               <a:rPr lang="en-US" sz="1200" dirty="0">
                 <a:solidFill>
-                  <a:srgbClr val="FFFFFF"/>
+                  <a:srgbClr val="C9C4D6"/>
                 </a:solidFill>
                 <a:latin typeface="Montserrat" pitchFamily="34" charset="0"/>
                 <a:ea typeface="Montserrat" pitchFamily="34" charset="-122"/>
@@ -11210,7 +11432,7 @@
             <a:lvl1pPr>
               <a:defRPr sz="850">
                 <a:solidFill>
-                  <a:srgbClr val="8A82A0"/>
+                  <a:srgbClr val="9A94AA"/>
                 </a:solidFill>
                 <a:latin typeface="Courier New"/>
                 <a:ea typeface="Courier New"/>
@@ -11309,7 +11531,7 @@
             </a:avLst>
           </a:prstGeom>
           <a:solidFill>
-            <a:srgbClr val="5FD6A0"/>
+            <a:srgbClr val="5A05F4"/>
           </a:solidFill>
           <a:ln/>
         </p:spPr>
@@ -11341,7 +11563,7 @@
             <a:r>
               <a:rPr lang="en-US" sz="900" b="1" spc="100" kern="0" dirty="0">
                 <a:solidFill>
-                  <a:srgbClr val="102A20"/>
+                  <a:srgbClr val="FFFFFF"/>
                 </a:solidFill>
                 <a:latin typeface="Courier New" pitchFamily="34" charset="0"/>
                 <a:ea typeface="Courier New" pitchFamily="34" charset="-122"/>
@@ -11392,7 +11614,7 @@
             <a:avLst/>
           </a:prstGeom>
           <a:solidFill>
-            <a:srgbClr val="C9A6FF"/>
+            <a:srgbClr val="A98BFF"/>
           </a:solidFill>
           <a:ln/>
         </p:spPr>
@@ -11424,7 +11646,7 @@
             <a:r>
               <a:rPr lang="en-US" sz="1300" b="1" dirty="0">
                 <a:solidFill>
-                  <a:srgbClr val="1C1140"/>
+                  <a:srgbClr val="1A0B3D"/>
                 </a:solidFill>
                 <a:latin typeface="Courier New" pitchFamily="34" charset="0"/>
                 <a:ea typeface="Courier New" pitchFamily="34" charset="-122"/>
@@ -11477,7 +11699,7 @@
             <a:r>
               <a:rPr lang="en-US" sz="1200" dirty="0">
                 <a:solidFill>
-                  <a:srgbClr val="AFA9BE"/>
+                  <a:srgbClr val="C9C4D6"/>
                 </a:solidFill>
                 <a:latin typeface="Montserrat" pitchFamily="34" charset="0"/>
                 <a:ea typeface="Montserrat" pitchFamily="34" charset="-122"/>
@@ -11504,7 +11726,7 @@
             <a:avLst/>
           </a:prstGeom>
           <a:solidFill>
-            <a:srgbClr val="C9A6FF"/>
+            <a:srgbClr val="A98BFF"/>
           </a:solidFill>
           <a:ln/>
         </p:spPr>
@@ -11536,7 +11758,7 @@
             <a:r>
               <a:rPr lang="en-US" sz="1300" b="1" dirty="0">
                 <a:solidFill>
-                  <a:srgbClr val="1C1140"/>
+                  <a:srgbClr val="1A0B3D"/>
                 </a:solidFill>
                 <a:latin typeface="Courier New" pitchFamily="34" charset="0"/>
                 <a:ea typeface="Courier New" pitchFamily="34" charset="-122"/>
@@ -11589,7 +11811,7 @@
             <a:r>
               <a:rPr lang="en-US" sz="1200" dirty="0">
                 <a:solidFill>
-                  <a:srgbClr val="AFA9BE"/>
+                  <a:srgbClr val="C9C4D6"/>
                 </a:solidFill>
                 <a:latin typeface="Montserrat" pitchFamily="34" charset="0"/>
                 <a:ea typeface="Montserrat" pitchFamily="34" charset="-122"/>
@@ -11616,7 +11838,7 @@
             <a:avLst/>
           </a:prstGeom>
           <a:solidFill>
-            <a:srgbClr val="C9A6FF"/>
+            <a:srgbClr val="A98BFF"/>
           </a:solidFill>
           <a:ln/>
         </p:spPr>
@@ -11648,7 +11870,7 @@
             <a:r>
               <a:rPr lang="en-US" sz="1300" b="1" dirty="0">
                 <a:solidFill>
-                  <a:srgbClr val="1C1140"/>
+                  <a:srgbClr val="1A0B3D"/>
                 </a:solidFill>
                 <a:latin typeface="Courier New" pitchFamily="34" charset="0"/>
                 <a:ea typeface="Courier New" pitchFamily="34" charset="-122"/>
@@ -11701,7 +11923,7 @@
             <a:r>
               <a:rPr lang="en-US" sz="1200" dirty="0">
                 <a:solidFill>
-                  <a:srgbClr val="AFA9BE"/>
+                  <a:srgbClr val="C9C4D6"/>
                 </a:solidFill>
                 <a:latin typeface="Montserrat" pitchFamily="34" charset="0"/>
                 <a:ea typeface="Montserrat" pitchFamily="34" charset="-122"/>
@@ -11728,7 +11950,7 @@
             <a:avLst/>
           </a:prstGeom>
           <a:solidFill>
-            <a:srgbClr val="C9A6FF"/>
+            <a:srgbClr val="A98BFF"/>
           </a:solidFill>
           <a:ln/>
         </p:spPr>
@@ -11760,7 +11982,7 @@
             <a:r>
               <a:rPr lang="en-US" sz="1300" b="1" dirty="0">
                 <a:solidFill>
-                  <a:srgbClr val="1C1140"/>
+                  <a:srgbClr val="1A0B3D"/>
                 </a:solidFill>
                 <a:latin typeface="Courier New" pitchFamily="34" charset="0"/>
                 <a:ea typeface="Courier New" pitchFamily="34" charset="-122"/>
@@ -11813,7 +12035,7 @@
             <a:r>
               <a:rPr lang="en-US" sz="1200" dirty="0">
                 <a:solidFill>
-                  <a:srgbClr val="AFA9BE"/>
+                  <a:srgbClr val="C9C4D6"/>
                 </a:solidFill>
                 <a:latin typeface="Montserrat" pitchFamily="34" charset="0"/>
                 <a:ea typeface="Montserrat" pitchFamily="34" charset="-122"/>
@@ -11840,7 +12062,7 @@
             <a:avLst/>
           </a:prstGeom>
           <a:solidFill>
-            <a:srgbClr val="E8A857"/>
+            <a:srgbClr val="6BA0F8"/>
           </a:solidFill>
           <a:ln/>
         </p:spPr>
@@ -11872,7 +12094,7 @@
             <a:r>
               <a:rPr lang="en-US" sz="1300" b="1" dirty="0">
                 <a:solidFill>
-                  <a:srgbClr val="2A2010"/>
+                  <a:srgbClr val="0B1A38"/>
                 </a:solidFill>
                 <a:latin typeface="Courier New" pitchFamily="34" charset="0"/>
                 <a:ea typeface="Courier New" pitchFamily="34" charset="-122"/>
@@ -11911,7 +12133,7 @@
             <a:r>
               <a:rPr lang="en-US" sz="1400" b="1" dirty="0">
                 <a:solidFill>
-                  <a:srgbClr val="E8A857"/>
+                  <a:srgbClr val="6BA0F8"/>
                 </a:solidFill>
                 <a:latin typeface="Montserrat" pitchFamily="34" charset="0"/>
                 <a:ea typeface="Montserrat" pitchFamily="34" charset="-122"/>
@@ -11925,7 +12147,7 @@
             <a:r>
               <a:rPr lang="en-US" sz="1200" dirty="0">
                 <a:solidFill>
-                  <a:srgbClr val="AFA9BE"/>
+                  <a:srgbClr val="C9C4D6"/>
                 </a:solidFill>
                 <a:latin typeface="Montserrat" pitchFamily="34" charset="0"/>
                 <a:ea typeface="Montserrat" pitchFamily="34" charset="-122"/>
@@ -11967,7 +12189,7 @@
             <a:lvl1pPr>
               <a:defRPr sz="850">
                 <a:solidFill>
-                  <a:srgbClr val="8A82A0"/>
+                  <a:srgbClr val="9A94AA"/>
                 </a:solidFill>
                 <a:latin typeface="Courier New"/>
                 <a:ea typeface="Courier New"/>
@@ -12066,9 +12288,14 @@
             </a:avLst>
           </a:prstGeom>
           <a:solidFill>
-            <a:srgbClr val="E8A857"/>
-          </a:solidFill>
-          <a:ln/>
+            <a:srgbClr val="0B1A38"/>
+          </a:solidFill>
+          <a:ln w="12700">
+            <a:solidFill>
+              <a:srgbClr val="6BA0F8"/>
+            </a:solidFill>
+            <a:prstDash val="solid"/>
+          </a:ln>
         </p:spPr>
       </p:sp>
       <p:sp>
@@ -12098,7 +12325,7 @@
             <a:r>
               <a:rPr lang="en-US" sz="900" b="1" spc="100" kern="0" dirty="0">
                 <a:solidFill>
-                  <a:srgbClr val="2A2010"/>
+                  <a:srgbClr val="6BA0F8"/>
                 </a:solidFill>
                 <a:latin typeface="Courier New" pitchFamily="34" charset="0"/>
                 <a:ea typeface="Courier New" pitchFamily="34" charset="-122"/>
@@ -12151,9 +12378,14 @@
             </a:avLst>
           </a:prstGeom>
           <a:solidFill>
-            <a:srgbClr val="102A20"/>
-          </a:solidFill>
-          <a:ln/>
+            <a:srgbClr val="06180F"/>
+          </a:solidFill>
+          <a:ln w="12700">
+            <a:solidFill>
+              <a:srgbClr val="3FCF8E"/>
+            </a:solidFill>
+            <a:prstDash val="solid"/>
+          </a:ln>
         </p:spPr>
       </p:sp>
       <p:sp>
@@ -12183,7 +12415,7 @@
             <a:r>
               <a:rPr lang="en-US" sz="1450" b="1" dirty="0">
                 <a:solidFill>
-                  <a:srgbClr val="5FD6A0"/>
+                  <a:srgbClr val="3FCF8E"/>
                 </a:solidFill>
                 <a:latin typeface="Montserrat" pitchFamily="34" charset="0"/>
                 <a:ea typeface="Montserrat" pitchFamily="34" charset="-122"/>
@@ -12225,7 +12457,7 @@
             <a:r>
               <a:rPr lang="en-US" sz="1200" dirty="0">
                 <a:solidFill>
-                  <a:srgbClr val="FFFFFF"/>
+                  <a:srgbClr val="C9C4D6"/>
                 </a:solidFill>
                 <a:latin typeface="Montserrat" pitchFamily="34" charset="0"/>
                 <a:ea typeface="Montserrat" pitchFamily="34" charset="-122"/>
@@ -12254,9 +12486,14 @@
             </a:avLst>
           </a:prstGeom>
           <a:solidFill>
-            <a:srgbClr val="1C1140"/>
-          </a:solidFill>
-          <a:ln/>
+            <a:srgbClr val="1A0B3D"/>
+          </a:solidFill>
+          <a:ln w="12700">
+            <a:solidFill>
+              <a:srgbClr val="5A05F4"/>
+            </a:solidFill>
+            <a:prstDash val="solid"/>
+          </a:ln>
         </p:spPr>
       </p:sp>
       <p:sp>
@@ -12286,7 +12523,7 @@
             <a:r>
               <a:rPr lang="en-US" sz="1450" b="1" dirty="0">
                 <a:solidFill>
-                  <a:srgbClr val="C9A6FF"/>
+                  <a:srgbClr val="A98BFF"/>
                 </a:solidFill>
                 <a:latin typeface="Montserrat" pitchFamily="34" charset="0"/>
                 <a:ea typeface="Montserrat" pitchFamily="34" charset="-122"/>
@@ -12328,7 +12565,7 @@
             <a:r>
               <a:rPr lang="en-US" sz="1200" dirty="0">
                 <a:solidFill>
-                  <a:srgbClr val="FFFFFF"/>
+                  <a:srgbClr val="C9C4D6"/>
                 </a:solidFill>
                 <a:latin typeface="Montserrat" pitchFamily="34" charset="0"/>
                 <a:ea typeface="Montserrat" pitchFamily="34" charset="-122"/>
@@ -12357,11 +12594,11 @@
             </a:avLst>
           </a:prstGeom>
           <a:solidFill>
-            <a:srgbClr val="17141F"/>
+            <a:srgbClr val="000000"/>
           </a:solidFill>
           <a:ln w="12700">
             <a:solidFill>
-              <a:srgbClr val="2E2A3A"/>
+              <a:srgbClr val="5E4F85"/>
             </a:solidFill>
             <a:prstDash val="solid"/>
           </a:ln>
@@ -12436,7 +12673,7 @@
             <a:r>
               <a:rPr lang="en-US" sz="1200" dirty="0">
                 <a:solidFill>
-                  <a:srgbClr val="AFA9BE"/>
+                  <a:srgbClr val="C9C4D6"/>
                 </a:solidFill>
                 <a:latin typeface="Montserrat" pitchFamily="34" charset="0"/>
                 <a:ea typeface="Montserrat" pitchFamily="34" charset="-122"/>
@@ -12465,11 +12702,11 @@
             </a:avLst>
           </a:prstGeom>
           <a:solidFill>
-            <a:srgbClr val="17141F"/>
+            <a:srgbClr val="000000"/>
           </a:solidFill>
           <a:ln w="12700">
             <a:solidFill>
-              <a:srgbClr val="2E2A3A"/>
+              <a:srgbClr val="5E4F85"/>
             </a:solidFill>
             <a:prstDash val="solid"/>
           </a:ln>
@@ -12547,7 +12784,7 @@
             <a:lvl1pPr>
               <a:defRPr sz="850">
                 <a:solidFill>
-                  <a:srgbClr val="8A82A0"/>
+                  <a:srgbClr val="9A94AA"/>
                 </a:solidFill>
                 <a:latin typeface="Courier New"/>
                 <a:ea typeface="Courier New"/>
@@ -12659,7 +12896,7 @@
             <a:r>
               <a:rPr lang="en-US" sz="1300" dirty="0">
                 <a:solidFill>
-                  <a:srgbClr val="AFA9BE"/>
+                  <a:srgbClr val="C9C4D6"/>
                 </a:solidFill>
                 <a:latin typeface="Montserrat" pitchFamily="34" charset="0"/>
                 <a:ea typeface="Montserrat" pitchFamily="34" charset="-122"/>
@@ -12688,9 +12925,14 @@
             </a:avLst>
           </a:prstGeom>
           <a:solidFill>
-            <a:srgbClr val="C9A6FF"/>
-          </a:solidFill>
-          <a:ln/>
+            <a:srgbClr val="1A0B3D"/>
+          </a:solidFill>
+          <a:ln w="12700">
+            <a:solidFill>
+              <a:srgbClr val="5A05F4"/>
+            </a:solidFill>
+            <a:prstDash val="solid"/>
+          </a:ln>
         </p:spPr>
       </p:sp>
       <p:sp>
@@ -12720,7 +12962,7 @@
             <a:r>
               <a:rPr lang="en-US" sz="900" b="1" spc="100" kern="0" dirty="0">
                 <a:solidFill>
-                  <a:srgbClr val="1C1140"/>
+                  <a:srgbClr val="A98BFF"/>
                 </a:solidFill>
                 <a:latin typeface="Courier New" pitchFamily="34" charset="0"/>
                 <a:ea typeface="Courier New" pitchFamily="34" charset="-122"/>
@@ -12773,11 +13015,11 @@
             </a:avLst>
           </a:prstGeom>
           <a:solidFill>
-            <a:srgbClr val="17141F"/>
+            <a:srgbClr val="000000"/>
           </a:solidFill>
           <a:ln w="12700">
             <a:solidFill>
-              <a:srgbClr val="2E2A3A"/>
+              <a:srgbClr val="5E4F85"/>
             </a:solidFill>
             <a:prstDash val="solid"/>
           </a:ln>
@@ -12911,7 +13153,7 @@
             <a:r>
               <a:rPr lang="en-US" sz="1200" dirty="0">
                 <a:solidFill>
-                  <a:srgbClr val="AFA9BE"/>
+                  <a:srgbClr val="C9C4D6"/>
                 </a:solidFill>
                 <a:latin typeface="Montserrat" pitchFamily="34" charset="0"/>
                 <a:ea typeface="Montserrat" pitchFamily="34" charset="-122"/>
@@ -12940,11 +13182,11 @@
             </a:avLst>
           </a:prstGeom>
           <a:solidFill>
-            <a:srgbClr val="17141F"/>
+            <a:srgbClr val="000000"/>
           </a:solidFill>
           <a:ln w="12700">
             <a:solidFill>
-              <a:srgbClr val="2E2A3A"/>
+              <a:srgbClr val="5E4F85"/>
             </a:solidFill>
             <a:prstDash val="solid"/>
           </a:ln>
@@ -13078,7 +13320,7 @@
             <a:r>
               <a:rPr lang="en-US" sz="1200" dirty="0">
                 <a:solidFill>
-                  <a:srgbClr val="AFA9BE"/>
+                  <a:srgbClr val="C9C4D6"/>
                 </a:solidFill>
                 <a:latin typeface="Montserrat" pitchFamily="34" charset="0"/>
                 <a:ea typeface="Montserrat" pitchFamily="34" charset="-122"/>
@@ -13107,11 +13349,11 @@
             </a:avLst>
           </a:prstGeom>
           <a:solidFill>
-            <a:srgbClr val="17141F"/>
+            <a:srgbClr val="000000"/>
           </a:solidFill>
           <a:ln w="12700">
             <a:solidFill>
-              <a:srgbClr val="2E2A3A"/>
+              <a:srgbClr val="5E4F85"/>
             </a:solidFill>
             <a:prstDash val="solid"/>
           </a:ln>
@@ -13245,7 +13487,7 @@
             <a:r>
               <a:rPr lang="en-US" sz="1200" dirty="0">
                 <a:solidFill>
-                  <a:srgbClr val="AFA9BE"/>
+                  <a:srgbClr val="C9C4D6"/>
                 </a:solidFill>
                 <a:latin typeface="Montserrat" pitchFamily="34" charset="0"/>
                 <a:ea typeface="Montserrat" pitchFamily="34" charset="-122"/>
@@ -13274,11 +13516,11 @@
             </a:avLst>
           </a:prstGeom>
           <a:solidFill>
-            <a:srgbClr val="17141F"/>
+            <a:srgbClr val="000000"/>
           </a:solidFill>
           <a:ln w="12700">
             <a:solidFill>
-              <a:srgbClr val="2E2A3A"/>
+              <a:srgbClr val="5E4F85"/>
             </a:solidFill>
             <a:prstDash val="solid"/>
           </a:ln>
@@ -13412,7 +13654,7 @@
             <a:r>
               <a:rPr lang="en-US" sz="1200" dirty="0">
                 <a:solidFill>
-                  <a:srgbClr val="AFA9BE"/>
+                  <a:srgbClr val="C9C4D6"/>
                 </a:solidFill>
                 <a:latin typeface="Montserrat" pitchFamily="34" charset="0"/>
                 <a:ea typeface="Montserrat" pitchFamily="34" charset="-122"/>
@@ -13441,11 +13683,11 @@
             </a:avLst>
           </a:prstGeom>
           <a:solidFill>
-            <a:srgbClr val="17141F"/>
+            <a:srgbClr val="000000"/>
           </a:solidFill>
           <a:ln w="12700">
             <a:solidFill>
-              <a:srgbClr val="2E2A3A"/>
+              <a:srgbClr val="5E4F85"/>
             </a:solidFill>
             <a:prstDash val="solid"/>
           </a:ln>
@@ -13579,7 +13821,7 @@
             <a:r>
               <a:rPr lang="en-US" sz="1200" dirty="0">
                 <a:solidFill>
-                  <a:srgbClr val="AFA9BE"/>
+                  <a:srgbClr val="C9C4D6"/>
                 </a:solidFill>
                 <a:latin typeface="Montserrat" pitchFamily="34" charset="0"/>
                 <a:ea typeface="Montserrat" pitchFamily="34" charset="-122"/>
@@ -13621,7 +13863,7 @@
             <a:lvl1pPr>
               <a:defRPr sz="850">
                 <a:solidFill>
-                  <a:srgbClr val="8A82A0"/>
+                  <a:srgbClr val="9A94AA"/>
                 </a:solidFill>
                 <a:latin typeface="Courier New"/>
                 <a:ea typeface="Courier New"/>
@@ -13720,9 +13962,14 @@
             </a:avLst>
           </a:prstGeom>
           <a:solidFill>
-            <a:srgbClr val="E8A857"/>
-          </a:solidFill>
-          <a:ln/>
+            <a:srgbClr val="0B1A38"/>
+          </a:solidFill>
+          <a:ln w="12700">
+            <a:solidFill>
+              <a:srgbClr val="6BA0F8"/>
+            </a:solidFill>
+            <a:prstDash val="solid"/>
+          </a:ln>
         </p:spPr>
       </p:sp>
       <p:sp>
@@ -13752,7 +13999,7 @@
             <a:r>
               <a:rPr lang="en-US" sz="900" b="1" spc="100" kern="0" dirty="0">
                 <a:solidFill>
-                  <a:srgbClr val="2A2010"/>
+                  <a:srgbClr val="6BA0F8"/>
                 </a:solidFill>
                 <a:latin typeface="Courier New" pitchFamily="34" charset="0"/>
                 <a:ea typeface="Courier New" pitchFamily="34" charset="-122"/>
@@ -13805,11 +14052,11 @@
             </a:avLst>
           </a:prstGeom>
           <a:solidFill>
-            <a:srgbClr val="17141F"/>
+            <a:srgbClr val="000000"/>
           </a:solidFill>
           <a:ln w="12700">
             <a:solidFill>
-              <a:srgbClr val="2E2A3A"/>
+              <a:srgbClr val="5E4F85"/>
             </a:solidFill>
             <a:prstDash val="solid"/>
           </a:ln>
@@ -13832,11 +14079,11 @@
             </a:avLst>
           </a:prstGeom>
           <a:solidFill>
-            <a:srgbClr val="1C1140"/>
+            <a:srgbClr val="1A0B3D"/>
           </a:solidFill>
           <a:ln w="12700">
             <a:solidFill>
-              <a:srgbClr val="C9A6FF"/>
+              <a:srgbClr val="A98BFF"/>
             </a:solidFill>
             <a:prstDash val="solid"/>
           </a:ln>
@@ -13857,7 +14104,7 @@
             <a:avLst/>
           </a:prstGeom>
           <a:solidFill>
-            <a:srgbClr val="C9A6FF"/>
+            <a:srgbClr val="A98BFF"/>
           </a:solidFill>
           <a:ln/>
         </p:spPr>
@@ -13877,7 +14124,7 @@
             <a:avLst/>
           </a:prstGeom>
           <a:solidFill>
-            <a:srgbClr val="C9A6FF"/>
+            <a:srgbClr val="A98BFF"/>
           </a:solidFill>
           <a:ln/>
         </p:spPr>
@@ -13938,11 +14185,11 @@
             </a:avLst>
           </a:prstGeom>
           <a:solidFill>
-            <a:srgbClr val="1C1140"/>
+            <a:srgbClr val="1A0B3D"/>
           </a:solidFill>
           <a:ln w="12700">
             <a:solidFill>
-              <a:srgbClr val="C9A6FF"/>
+              <a:srgbClr val="A98BFF"/>
             </a:solidFill>
             <a:prstDash val="solid"/>
           </a:ln>
@@ -13963,7 +14210,7 @@
             <a:avLst/>
           </a:prstGeom>
           <a:solidFill>
-            <a:srgbClr val="C9A6FF"/>
+            <a:srgbClr val="A98BFF"/>
           </a:solidFill>
           <a:ln/>
         </p:spPr>
@@ -13983,7 +14230,7 @@
             <a:avLst/>
           </a:prstGeom>
           <a:solidFill>
-            <a:srgbClr val="C9A6FF"/>
+            <a:srgbClr val="A98BFF"/>
           </a:solidFill>
           <a:ln/>
         </p:spPr>
@@ -14044,11 +14291,11 @@
             </a:avLst>
           </a:prstGeom>
           <a:solidFill>
-            <a:srgbClr val="1C1140"/>
+            <a:srgbClr val="1A0B3D"/>
           </a:solidFill>
           <a:ln w="12700">
             <a:solidFill>
-              <a:srgbClr val="C9A6FF"/>
+              <a:srgbClr val="A98BFF"/>
             </a:solidFill>
             <a:prstDash val="solid"/>
           </a:ln>
@@ -14069,7 +14316,7 @@
             <a:avLst/>
           </a:prstGeom>
           <a:solidFill>
-            <a:srgbClr val="C9A6FF"/>
+            <a:srgbClr val="A98BFF"/>
           </a:solidFill>
           <a:ln/>
         </p:spPr>
@@ -14089,7 +14336,7 @@
             <a:avLst/>
           </a:prstGeom>
           <a:solidFill>
-            <a:srgbClr val="C9A6FF"/>
+            <a:srgbClr val="A98BFF"/>
           </a:solidFill>
           <a:ln/>
         </p:spPr>
@@ -14150,11 +14397,11 @@
             </a:avLst>
           </a:prstGeom>
           <a:solidFill>
-            <a:srgbClr val="1C1140"/>
+            <a:srgbClr val="1A0B3D"/>
           </a:solidFill>
           <a:ln w="12700">
             <a:solidFill>
-              <a:srgbClr val="C9A6FF"/>
+              <a:srgbClr val="A98BFF"/>
             </a:solidFill>
             <a:prstDash val="solid"/>
           </a:ln>
@@ -14175,7 +14422,7 @@
             <a:avLst/>
           </a:prstGeom>
           <a:solidFill>
-            <a:srgbClr val="C9A6FF"/>
+            <a:srgbClr val="A98BFF"/>
           </a:solidFill>
           <a:ln/>
         </p:spPr>
@@ -14195,7 +14442,7 @@
             <a:avLst/>
           </a:prstGeom>
           <a:solidFill>
-            <a:srgbClr val="C9A6FF"/>
+            <a:srgbClr val="A98BFF"/>
           </a:solidFill>
           <a:ln/>
         </p:spPr>
@@ -14256,11 +14503,11 @@
             </a:avLst>
           </a:prstGeom>
           <a:solidFill>
-            <a:srgbClr val="1C1140"/>
+            <a:srgbClr val="1A0B3D"/>
           </a:solidFill>
           <a:ln w="12700">
             <a:solidFill>
-              <a:srgbClr val="C9A6FF"/>
+              <a:srgbClr val="A98BFF"/>
             </a:solidFill>
             <a:prstDash val="solid"/>
           </a:ln>
@@ -14281,7 +14528,7 @@
             <a:avLst/>
           </a:prstGeom>
           <a:solidFill>
-            <a:srgbClr val="C9A6FF"/>
+            <a:srgbClr val="A98BFF"/>
           </a:solidFill>
           <a:ln/>
         </p:spPr>
@@ -14301,7 +14548,7 @@
             <a:avLst/>
           </a:prstGeom>
           <a:solidFill>
-            <a:srgbClr val="C9A6FF"/>
+            <a:srgbClr val="A98BFF"/>
           </a:solidFill>
           <a:ln/>
         </p:spPr>
@@ -14372,7 +14619,7 @@
             <a:r>
               <a:rPr lang="en-US" sz="1200" i="1" dirty="0">
                 <a:solidFill>
-                  <a:srgbClr val="8A82A0"/>
+                  <a:srgbClr val="9A94AA"/>
                 </a:solidFill>
                 <a:latin typeface="Montserrat" pitchFamily="34" charset="0"/>
                 <a:ea typeface="Montserrat" pitchFamily="34" charset="-122"/>
@@ -14414,7 +14661,7 @@
             <a:lvl1pPr>
               <a:defRPr sz="850">
                 <a:solidFill>
-                  <a:srgbClr val="8A82A0"/>
+                  <a:srgbClr val="9A94AA"/>
                 </a:solidFill>
                 <a:latin typeface="Courier New"/>
                 <a:ea typeface="Courier New"/>
@@ -14513,9 +14760,14 @@
             </a:avLst>
           </a:prstGeom>
           <a:solidFill>
-            <a:srgbClr val="E8A857"/>
-          </a:solidFill>
-          <a:ln/>
+            <a:srgbClr val="0B1A38"/>
+          </a:solidFill>
+          <a:ln w="12700">
+            <a:solidFill>
+              <a:srgbClr val="6BA0F8"/>
+            </a:solidFill>
+            <a:prstDash val="solid"/>
+          </a:ln>
         </p:spPr>
       </p:sp>
       <p:sp>
@@ -14545,7 +14797,7 @@
             <a:r>
               <a:rPr lang="en-US" sz="900" b="1" spc="100" kern="0" dirty="0">
                 <a:solidFill>
-                  <a:srgbClr val="2A2010"/>
+                  <a:srgbClr val="6BA0F8"/>
                 </a:solidFill>
                 <a:latin typeface="Courier New" pitchFamily="34" charset="0"/>
                 <a:ea typeface="Courier New" pitchFamily="34" charset="-122"/>
@@ -14598,11 +14850,11 @@
             </a:avLst>
           </a:prstGeom>
           <a:solidFill>
-            <a:srgbClr val="17141F"/>
+            <a:srgbClr val="000000"/>
           </a:solidFill>
           <a:ln w="12700">
             <a:solidFill>
-              <a:srgbClr val="2E2A3A"/>
+              <a:srgbClr val="5E4F85"/>
             </a:solidFill>
             <a:prstDash val="solid"/>
           </a:ln>
@@ -14623,7 +14875,7 @@
             <a:avLst/>
           </a:prstGeom>
           <a:solidFill>
-            <a:srgbClr val="2E1418"/>
+            <a:srgbClr val="1A0808"/>
           </a:solidFill>
           <a:ln/>
         </p:spPr>
@@ -14643,7 +14895,7 @@
             <a:avLst/>
           </a:prstGeom>
           <a:solidFill>
-            <a:srgbClr val="FF7B7B"/>
+            <a:srgbClr val="FF6B6B"/>
           </a:solidFill>
           <a:ln/>
         </p:spPr>
@@ -14663,7 +14915,7 @@
             <a:avLst/>
           </a:prstGeom>
           <a:solidFill>
-            <a:srgbClr val="FF7B7B"/>
+            <a:srgbClr val="FF6B6B"/>
           </a:solidFill>
           <a:ln/>
         </p:spPr>
@@ -14709,7 +14961,7 @@
             <a:r>
               <a:rPr lang="en-US" sz="1150" dirty="0">
                 <a:solidFill>
-                  <a:srgbClr val="AFA9BE"/>
+                  <a:srgbClr val="C9C4D6"/>
                 </a:solidFill>
                 <a:latin typeface="Montserrat" pitchFamily="34" charset="0"/>
                 <a:ea typeface="Montserrat" pitchFamily="34" charset="-122"/>
@@ -14738,11 +14990,11 @@
             </a:avLst>
           </a:prstGeom>
           <a:solidFill>
-            <a:srgbClr val="17141F"/>
+            <a:srgbClr val="000000"/>
           </a:solidFill>
           <a:ln w="12700">
             <a:solidFill>
-              <a:srgbClr val="2E2A3A"/>
+              <a:srgbClr val="5E4F85"/>
             </a:solidFill>
             <a:prstDash val="solid"/>
           </a:ln>
@@ -14763,7 +15015,7 @@
             <a:avLst/>
           </a:prstGeom>
           <a:solidFill>
-            <a:srgbClr val="2E1418"/>
+            <a:srgbClr val="1A0808"/>
           </a:solidFill>
           <a:ln/>
         </p:spPr>
@@ -14783,7 +15035,7 @@
             <a:avLst/>
           </a:prstGeom>
           <a:solidFill>
-            <a:srgbClr val="FF7B7B"/>
+            <a:srgbClr val="FF6B6B"/>
           </a:solidFill>
           <a:ln/>
         </p:spPr>
@@ -14803,7 +15055,7 @@
             <a:avLst/>
           </a:prstGeom>
           <a:solidFill>
-            <a:srgbClr val="FF7B7B"/>
+            <a:srgbClr val="FF6B6B"/>
           </a:solidFill>
           <a:ln/>
         </p:spPr>
@@ -14849,7 +15101,7 @@
             <a:r>
               <a:rPr lang="en-US" sz="1150" dirty="0">
                 <a:solidFill>
-                  <a:srgbClr val="AFA9BE"/>
+                  <a:srgbClr val="C9C4D6"/>
                 </a:solidFill>
                 <a:latin typeface="Montserrat" pitchFamily="34" charset="0"/>
                 <a:ea typeface="Montserrat" pitchFamily="34" charset="-122"/>
@@ -14878,11 +15130,11 @@
             </a:avLst>
           </a:prstGeom>
           <a:solidFill>
-            <a:srgbClr val="17141F"/>
+            <a:srgbClr val="000000"/>
           </a:solidFill>
           <a:ln w="12700">
             <a:solidFill>
-              <a:srgbClr val="2E2A3A"/>
+              <a:srgbClr val="5E4F85"/>
             </a:solidFill>
             <a:prstDash val="solid"/>
           </a:ln>
@@ -14903,7 +15155,7 @@
             <a:avLst/>
           </a:prstGeom>
           <a:solidFill>
-            <a:srgbClr val="2E1418"/>
+            <a:srgbClr val="1A0808"/>
           </a:solidFill>
           <a:ln/>
         </p:spPr>
@@ -14923,7 +15175,7 @@
             <a:avLst/>
           </a:prstGeom>
           <a:solidFill>
-            <a:srgbClr val="FF7B7B"/>
+            <a:srgbClr val="FF6B6B"/>
           </a:solidFill>
           <a:ln/>
         </p:spPr>
@@ -14943,7 +15195,7 @@
             <a:avLst/>
           </a:prstGeom>
           <a:solidFill>
-            <a:srgbClr val="FF7B7B"/>
+            <a:srgbClr val="FF6B6B"/>
           </a:solidFill>
           <a:ln/>
         </p:spPr>
@@ -14989,7 +15241,7 @@
             <a:r>
               <a:rPr lang="en-US" sz="1150" dirty="0">
                 <a:solidFill>
-                  <a:srgbClr val="AFA9BE"/>
+                  <a:srgbClr val="C9C4D6"/>
                 </a:solidFill>
                 <a:latin typeface="Montserrat" pitchFamily="34" charset="0"/>
                 <a:ea typeface="Montserrat" pitchFamily="34" charset="-122"/>
@@ -15018,11 +15270,11 @@
             </a:avLst>
           </a:prstGeom>
           <a:solidFill>
-            <a:srgbClr val="17141F"/>
+            <a:srgbClr val="000000"/>
           </a:solidFill>
           <a:ln w="12700">
             <a:solidFill>
-              <a:srgbClr val="2E2A3A"/>
+              <a:srgbClr val="5E4F85"/>
             </a:solidFill>
             <a:prstDash val="solid"/>
           </a:ln>
@@ -15043,7 +15295,7 @@
             <a:avLst/>
           </a:prstGeom>
           <a:solidFill>
-            <a:srgbClr val="2E1418"/>
+            <a:srgbClr val="1A0808"/>
           </a:solidFill>
           <a:ln/>
         </p:spPr>
@@ -15063,7 +15315,7 @@
             <a:avLst/>
           </a:prstGeom>
           <a:solidFill>
-            <a:srgbClr val="FF7B7B"/>
+            <a:srgbClr val="FF6B6B"/>
           </a:solidFill>
           <a:ln/>
         </p:spPr>
@@ -15083,7 +15335,7 @@
             <a:avLst/>
           </a:prstGeom>
           <a:solidFill>
-            <a:srgbClr val="FF7B7B"/>
+            <a:srgbClr val="FF6B6B"/>
           </a:solidFill>
           <a:ln/>
         </p:spPr>
@@ -15129,7 +15381,7 @@
             <a:r>
               <a:rPr lang="en-US" sz="1150" dirty="0">
                 <a:solidFill>
-                  <a:srgbClr val="AFA9BE"/>
+                  <a:srgbClr val="C9C4D6"/>
                 </a:solidFill>
                 <a:latin typeface="Montserrat" pitchFamily="34" charset="0"/>
                 <a:ea typeface="Montserrat" pitchFamily="34" charset="-122"/>
@@ -15158,11 +15410,11 @@
             </a:avLst>
           </a:prstGeom>
           <a:solidFill>
-            <a:srgbClr val="17141F"/>
+            <a:srgbClr val="000000"/>
           </a:solidFill>
           <a:ln w="12700">
             <a:solidFill>
-              <a:srgbClr val="2E2A3A"/>
+              <a:srgbClr val="5E4F85"/>
             </a:solidFill>
             <a:prstDash val="solid"/>
           </a:ln>
@@ -15183,7 +15435,7 @@
             <a:avLst/>
           </a:prstGeom>
           <a:solidFill>
-            <a:srgbClr val="2E1418"/>
+            <a:srgbClr val="1A0808"/>
           </a:solidFill>
           <a:ln/>
         </p:spPr>
@@ -15203,7 +15455,7 @@
             <a:avLst/>
           </a:prstGeom>
           <a:solidFill>
-            <a:srgbClr val="FF7B7B"/>
+            <a:srgbClr val="FF6B6B"/>
           </a:solidFill>
           <a:ln/>
         </p:spPr>
@@ -15223,7 +15475,7 @@
             <a:avLst/>
           </a:prstGeom>
           <a:solidFill>
-            <a:srgbClr val="FF7B7B"/>
+            <a:srgbClr val="FF6B6B"/>
           </a:solidFill>
           <a:ln/>
         </p:spPr>
@@ -15269,7 +15521,7 @@
             <a:r>
               <a:rPr lang="en-US" sz="1150" dirty="0">
                 <a:solidFill>
-                  <a:srgbClr val="AFA9BE"/>
+                  <a:srgbClr val="C9C4D6"/>
                 </a:solidFill>
                 <a:latin typeface="Montserrat" pitchFamily="34" charset="0"/>
                 <a:ea typeface="Montserrat" pitchFamily="34" charset="-122"/>
@@ -15311,7 +15563,7 @@
             <a:lvl1pPr>
               <a:defRPr sz="850">
                 <a:solidFill>
-                  <a:srgbClr val="8A82A0"/>
+                  <a:srgbClr val="9A94AA"/>
                 </a:solidFill>
                 <a:latin typeface="Courier New"/>
                 <a:ea typeface="Courier New"/>
@@ -15410,7 +15662,7 @@
             </a:avLst>
           </a:prstGeom>
           <a:solidFill>
-            <a:srgbClr val="5FD6A0"/>
+            <a:srgbClr val="5A05F4"/>
           </a:solidFill>
           <a:ln/>
         </p:spPr>
@@ -15442,7 +15694,7 @@
             <a:r>
               <a:rPr lang="en-US" sz="900" b="1" spc="100" kern="0" dirty="0">
                 <a:solidFill>
-                  <a:srgbClr val="102A20"/>
+                  <a:srgbClr val="FFFFFF"/>
                 </a:solidFill>
                 <a:latin typeface="Courier New" pitchFamily="34" charset="0"/>
                 <a:ea typeface="Courier New" pitchFamily="34" charset="-122"/>
@@ -15495,11 +15747,11 @@
             </a:avLst>
           </a:prstGeom>
           <a:solidFill>
-            <a:srgbClr val="17141F"/>
+            <a:srgbClr val="000000"/>
           </a:solidFill>
           <a:ln w="19050">
             <a:solidFill>
-              <a:srgbClr val="C9A6FF"/>
+              <a:srgbClr val="A98BFF"/>
             </a:solidFill>
             <a:prstDash val="solid"/>
           </a:ln>
@@ -15532,7 +15784,7 @@
             <a:r>
               <a:rPr lang="en-US" sz="1550" b="1" dirty="0">
                 <a:solidFill>
-                  <a:srgbClr val="C9A6FF"/>
+                  <a:srgbClr val="A98BFF"/>
                 </a:solidFill>
                 <a:latin typeface="Montserrat" pitchFamily="34" charset="0"/>
                 <a:ea typeface="Montserrat" pitchFamily="34" charset="-122"/>
@@ -15610,7 +15862,7 @@
             <a:r>
               <a:rPr lang="en-US" sz="950" b="1" spc="100" kern="0" dirty="0">
                 <a:solidFill>
-                  <a:srgbClr val="8A82A0"/>
+                  <a:srgbClr val="9A94AA"/>
                 </a:solidFill>
                 <a:latin typeface="Courier New" pitchFamily="34" charset="0"/>
                 <a:ea typeface="Courier New" pitchFamily="34" charset="-122"/>
@@ -15649,7 +15901,7 @@
             <a:r>
               <a:rPr lang="en-US" sz="1250" b="1" dirty="0">
                 <a:solidFill>
-                  <a:srgbClr val="C9A6FF"/>
+                  <a:srgbClr val="A98BFF"/>
                 </a:solidFill>
                 <a:latin typeface="Montserrat" pitchFamily="34" charset="0"/>
                 <a:ea typeface="Montserrat" pitchFamily="34" charset="-122"/>
@@ -15702,7 +15954,7 @@
             <a:r>
               <a:rPr lang="en-US" sz="1250" b="1" dirty="0">
                 <a:solidFill>
-                  <a:srgbClr val="C9A6FF"/>
+                  <a:srgbClr val="A98BFF"/>
                 </a:solidFill>
                 <a:latin typeface="Montserrat" pitchFamily="34" charset="0"/>
                 <a:ea typeface="Montserrat" pitchFamily="34" charset="-122"/>
@@ -15755,7 +16007,7 @@
             <a:r>
               <a:rPr lang="en-US" sz="1250" b="1" dirty="0">
                 <a:solidFill>
-                  <a:srgbClr val="C9A6FF"/>
+                  <a:srgbClr val="A98BFF"/>
                 </a:solidFill>
                 <a:latin typeface="Montserrat" pitchFamily="34" charset="0"/>
                 <a:ea typeface="Montserrat" pitchFamily="34" charset="-122"/>
@@ -15798,9 +16050,14 @@
             </a:avLst>
           </a:prstGeom>
           <a:solidFill>
-            <a:srgbClr val="2A2010"/>
-          </a:solidFill>
-          <a:ln/>
+            <a:srgbClr val="0B1A38"/>
+          </a:solidFill>
+          <a:ln w="12700">
+            <a:solidFill>
+              <a:srgbClr val="6BA0F8"/>
+            </a:solidFill>
+            <a:prstDash val="solid"/>
+          </a:ln>
         </p:spPr>
       </p:sp>
       <p:sp>
@@ -15830,7 +16087,7 @@
             <a:r>
               <a:rPr lang="en-US" sz="1450" b="1" dirty="0">
                 <a:solidFill>
-                  <a:srgbClr val="E8A857"/>
+                  <a:srgbClr val="6BA0F8"/>
                 </a:solidFill>
                 <a:latin typeface="Montserrat" pitchFamily="34" charset="0"/>
                 <a:ea typeface="Montserrat" pitchFamily="34" charset="-122"/>
@@ -15872,7 +16129,7 @@
             <a:r>
               <a:rPr lang="en-US" sz="1200" dirty="0">
                 <a:solidFill>
-                  <a:srgbClr val="FFFFFF"/>
+                  <a:srgbClr val="C9C4D6"/>
                 </a:solidFill>
                 <a:latin typeface="Montserrat" pitchFamily="34" charset="0"/>
                 <a:ea typeface="Montserrat" pitchFamily="34" charset="-122"/>
@@ -15892,7 +16149,7 @@
             <a:r>
               <a:rPr lang="en-US" sz="1200" dirty="0">
                 <a:solidFill>
-                  <a:srgbClr val="FFFFFF"/>
+                  <a:srgbClr val="C9C4D6"/>
                 </a:solidFill>
                 <a:latin typeface="Montserrat" pitchFamily="34" charset="0"/>
                 <a:ea typeface="Montserrat" pitchFamily="34" charset="-122"/>
@@ -15934,7 +16191,7 @@
             <a:lvl1pPr>
               <a:defRPr sz="850">
                 <a:solidFill>
-                  <a:srgbClr val="8A82A0"/>
+                  <a:srgbClr val="9A94AA"/>
                 </a:solidFill>
                 <a:latin typeface="Courier New"/>
                 <a:ea typeface="Courier New"/>
@@ -16043,7 +16300,7 @@
             <a:r>
               <a:rPr lang="en-US" sz="1100" b="1" spc="300" kern="0" dirty="0">
                 <a:solidFill>
-                  <a:srgbClr val="C9B8FB"/>
+                  <a:srgbClr val="C4B3F5"/>
                 </a:solidFill>
                 <a:latin typeface="Courier New" pitchFamily="34" charset="0"/>
                 <a:ea typeface="Courier New" pitchFamily="34" charset="-122"/>
@@ -16382,11 +16639,11 @@
             </a:avLst>
           </a:prstGeom>
           <a:solidFill>
-            <a:srgbClr val="17141F"/>
+            <a:srgbClr val="000000"/>
           </a:solidFill>
           <a:ln w="12700">
             <a:solidFill>
-              <a:srgbClr val="2E2A3A"/>
+              <a:srgbClr val="5E4F85"/>
             </a:solidFill>
             <a:prstDash val="solid"/>
           </a:ln>
@@ -16419,7 +16676,7 @@
             <a:r>
               <a:rPr lang="en-US" sz="1500" b="1" dirty="0">
                 <a:solidFill>
-                  <a:srgbClr val="C9A6FF"/>
+                  <a:srgbClr val="A98BFF"/>
                 </a:solidFill>
                 <a:latin typeface="Montserrat" pitchFamily="34" charset="0"/>
                 <a:ea typeface="Montserrat" pitchFamily="34" charset="-122"/>
@@ -16554,9 +16811,14 @@
             </a:avLst>
           </a:prstGeom>
           <a:solidFill>
-            <a:srgbClr val="C9A6FF"/>
-          </a:solidFill>
-          <a:ln/>
+            <a:srgbClr val="1A0B3D"/>
+          </a:solidFill>
+          <a:ln w="12700">
+            <a:solidFill>
+              <a:srgbClr val="5A05F4"/>
+            </a:solidFill>
+            <a:prstDash val="solid"/>
+          </a:ln>
         </p:spPr>
       </p:sp>
       <p:sp>
@@ -16586,7 +16848,7 @@
             <a:r>
               <a:rPr lang="en-US" sz="900" b="1" spc="100" kern="0" dirty="0">
                 <a:solidFill>
-                  <a:srgbClr val="1C1140"/>
+                  <a:srgbClr val="A98BFF"/>
                 </a:solidFill>
                 <a:latin typeface="Courier New" pitchFamily="34" charset="0"/>
                 <a:ea typeface="Courier New" pitchFamily="34" charset="-122"/>
@@ -16639,11 +16901,11 @@
             </a:avLst>
           </a:prstGeom>
           <a:solidFill>
-            <a:srgbClr val="17141F"/>
+            <a:srgbClr val="000000"/>
           </a:solidFill>
           <a:ln w="12700">
             <a:solidFill>
-              <a:srgbClr val="2E2A3A"/>
+              <a:srgbClr val="5E4F85"/>
             </a:solidFill>
             <a:prstDash val="solid"/>
           </a:ln>
@@ -16764,11 +17026,11 @@
             </a:avLst>
           </a:prstGeom>
           <a:solidFill>
-            <a:srgbClr val="17141F"/>
+            <a:srgbClr val="000000"/>
           </a:solidFill>
           <a:ln w="12700">
             <a:solidFill>
-              <a:srgbClr val="2E2A3A"/>
+              <a:srgbClr val="5E4F85"/>
             </a:solidFill>
             <a:prstDash val="solid"/>
           </a:ln>
@@ -16889,11 +17151,11 @@
             </a:avLst>
           </a:prstGeom>
           <a:solidFill>
-            <a:srgbClr val="17141F"/>
+            <a:srgbClr val="000000"/>
           </a:solidFill>
           <a:ln w="12700">
             <a:solidFill>
-              <a:srgbClr val="2E2A3A"/>
+              <a:srgbClr val="5E4F85"/>
             </a:solidFill>
             <a:prstDash val="solid"/>
           </a:ln>
@@ -17014,11 +17276,11 @@
             </a:avLst>
           </a:prstGeom>
           <a:solidFill>
-            <a:srgbClr val="17141F"/>
+            <a:srgbClr val="000000"/>
           </a:solidFill>
           <a:ln w="12700">
             <a:solidFill>
-              <a:srgbClr val="2E2A3A"/>
+              <a:srgbClr val="5E4F85"/>
             </a:solidFill>
             <a:prstDash val="solid"/>
           </a:ln>
@@ -17139,11 +17401,11 @@
             </a:avLst>
           </a:prstGeom>
           <a:solidFill>
-            <a:srgbClr val="17141F"/>
+            <a:srgbClr val="000000"/>
           </a:solidFill>
           <a:ln w="12700">
             <a:solidFill>
-              <a:srgbClr val="2E2A3A"/>
+              <a:srgbClr val="5E4F85"/>
             </a:solidFill>
             <a:prstDash val="solid"/>
           </a:ln>
@@ -17264,11 +17526,11 @@
             </a:avLst>
           </a:prstGeom>
           <a:solidFill>
-            <a:srgbClr val="17141F"/>
+            <a:srgbClr val="000000"/>
           </a:solidFill>
           <a:ln w="12700">
             <a:solidFill>
-              <a:srgbClr val="2E2A3A"/>
+              <a:srgbClr val="5E4F85"/>
             </a:solidFill>
             <a:prstDash val="solid"/>
           </a:ln>
@@ -17389,11 +17651,11 @@
             </a:avLst>
           </a:prstGeom>
           <a:solidFill>
-            <a:srgbClr val="17141F"/>
+            <a:srgbClr val="000000"/>
           </a:solidFill>
           <a:ln w="12700">
             <a:solidFill>
-              <a:srgbClr val="2E2A3A"/>
+              <a:srgbClr val="5E4F85"/>
             </a:solidFill>
             <a:prstDash val="solid"/>
           </a:ln>
@@ -17514,11 +17776,11 @@
             </a:avLst>
           </a:prstGeom>
           <a:solidFill>
-            <a:srgbClr val="17141F"/>
+            <a:srgbClr val="000000"/>
           </a:solidFill>
           <a:ln w="12700">
             <a:solidFill>
-              <a:srgbClr val="2E2A3A"/>
+              <a:srgbClr val="5E4F85"/>
             </a:solidFill>
             <a:prstDash val="solid"/>
           </a:ln>
@@ -17639,9 +17901,14 @@
             </a:avLst>
           </a:prstGeom>
           <a:solidFill>
-            <a:srgbClr val="2A2010"/>
-          </a:solidFill>
-          <a:ln/>
+            <a:srgbClr val="0B1A38"/>
+          </a:solidFill>
+          <a:ln w="12700">
+            <a:solidFill>
+              <a:srgbClr val="6BA0F8"/>
+            </a:solidFill>
+            <a:prstDash val="solid"/>
+          </a:ln>
         </p:spPr>
       </p:sp>
       <p:sp>
@@ -17659,7 +17926,7 @@
             <a:avLst/>
           </a:prstGeom>
           <a:solidFill>
-            <a:srgbClr val="E8A857"/>
+            <a:srgbClr val="5A05F4"/>
           </a:solidFill>
           <a:ln/>
         </p:spPr>
@@ -17691,7 +17958,7 @@
             <a:r>
               <a:rPr lang="en-US" sz="1200" b="1" dirty="0">
                 <a:solidFill>
-                  <a:srgbClr val="2A2010"/>
+                  <a:srgbClr val="FFFFFF"/>
                 </a:solidFill>
                 <a:latin typeface="Courier New" pitchFamily="34" charset="0"/>
                 <a:ea typeface="Courier New" pitchFamily="34" charset="-122"/>
@@ -17730,7 +17997,7 @@
             <a:r>
               <a:rPr lang="en-US" sz="1450" b="1" dirty="0">
                 <a:solidFill>
-                  <a:srgbClr val="E8A857"/>
+                  <a:srgbClr val="6BA0F8"/>
                 </a:solidFill>
                 <a:latin typeface="Montserrat" pitchFamily="34" charset="0"/>
                 <a:ea typeface="Montserrat" pitchFamily="34" charset="-122"/>
@@ -17759,11 +18026,11 @@
             </a:avLst>
           </a:prstGeom>
           <a:solidFill>
-            <a:srgbClr val="17141F"/>
+            <a:srgbClr val="000000"/>
           </a:solidFill>
           <a:ln w="12700">
             <a:solidFill>
-              <a:srgbClr val="2E2A3A"/>
+              <a:srgbClr val="5E4F85"/>
             </a:solidFill>
             <a:prstDash val="solid"/>
           </a:ln>
@@ -17884,11 +18151,11 @@
             </a:avLst>
           </a:prstGeom>
           <a:solidFill>
-            <a:srgbClr val="17141F"/>
+            <a:srgbClr val="000000"/>
           </a:solidFill>
           <a:ln w="12700">
             <a:solidFill>
-              <a:srgbClr val="2E2A3A"/>
+              <a:srgbClr val="5E4F85"/>
             </a:solidFill>
             <a:prstDash val="solid"/>
           </a:ln>
@@ -18009,11 +18276,11 @@
             </a:avLst>
           </a:prstGeom>
           <a:solidFill>
-            <a:srgbClr val="17141F"/>
+            <a:srgbClr val="000000"/>
           </a:solidFill>
           <a:ln w="12700">
             <a:solidFill>
-              <a:srgbClr val="2E2A3A"/>
+              <a:srgbClr val="5E4F85"/>
             </a:solidFill>
             <a:prstDash val="solid"/>
           </a:ln>
@@ -18134,11 +18401,11 @@
             </a:avLst>
           </a:prstGeom>
           <a:solidFill>
-            <a:srgbClr val="17141F"/>
+            <a:srgbClr val="000000"/>
           </a:solidFill>
           <a:ln w="12700">
             <a:solidFill>
-              <a:srgbClr val="2E2A3A"/>
+              <a:srgbClr val="5E4F85"/>
             </a:solidFill>
             <a:prstDash val="solid"/>
           </a:ln>
@@ -18216,7 +18483,7 @@
             <a:lvl1pPr>
               <a:defRPr sz="850">
                 <a:solidFill>
-                  <a:srgbClr val="8A82A0"/>
+                  <a:srgbClr val="9A94AA"/>
                 </a:solidFill>
                 <a:latin typeface="Courier New"/>
                 <a:ea typeface="Courier New"/>
@@ -18328,7 +18595,7 @@
             <a:r>
               <a:rPr lang="en-US" sz="1300" dirty="0">
                 <a:solidFill>
-                  <a:srgbClr val="AFA9BE"/>
+                  <a:srgbClr val="C9C4D6"/>
                 </a:solidFill>
                 <a:latin typeface="Montserrat" pitchFamily="34" charset="0"/>
                 <a:ea typeface="Montserrat" pitchFamily="34" charset="-122"/>
@@ -18357,9 +18624,14 @@
             </a:avLst>
           </a:prstGeom>
           <a:solidFill>
-            <a:srgbClr val="C9A6FF"/>
-          </a:solidFill>
-          <a:ln/>
+            <a:srgbClr val="1A0B3D"/>
+          </a:solidFill>
+          <a:ln w="12700">
+            <a:solidFill>
+              <a:srgbClr val="5A05F4"/>
+            </a:solidFill>
+            <a:prstDash val="solid"/>
+          </a:ln>
         </p:spPr>
       </p:sp>
       <p:sp>
@@ -18389,7 +18661,7 @@
             <a:r>
               <a:rPr lang="en-US" sz="900" b="1" spc="100" kern="0" dirty="0">
                 <a:solidFill>
-                  <a:srgbClr val="1C1140"/>
+                  <a:srgbClr val="A98BFF"/>
                 </a:solidFill>
                 <a:latin typeface="Courier New" pitchFamily="34" charset="0"/>
                 <a:ea typeface="Courier New" pitchFamily="34" charset="-122"/>
@@ -18442,11 +18714,11 @@
             </a:avLst>
           </a:prstGeom>
           <a:solidFill>
-            <a:srgbClr val="17141F"/>
+            <a:srgbClr val="000000"/>
           </a:solidFill>
           <a:ln w="12700">
             <a:solidFill>
-              <a:srgbClr val="2E2A3A"/>
+              <a:srgbClr val="5E4F85"/>
             </a:solidFill>
             <a:prstDash val="solid"/>
           </a:ln>
@@ -18479,7 +18751,7 @@
             <a:r>
               <a:rPr lang="en-US" sz="1250" b="1" dirty="0">
                 <a:solidFill>
-                  <a:srgbClr val="C9A6FF"/>
+                  <a:srgbClr val="A98BFF"/>
                 </a:solidFill>
                 <a:latin typeface="Courier New" pitchFamily="34" charset="0"/>
                 <a:ea typeface="Courier New" pitchFamily="34" charset="-122"/>
@@ -18521,7 +18793,7 @@
             <a:r>
               <a:rPr lang="en-US" sz="1150" dirty="0">
                 <a:solidFill>
-                  <a:srgbClr val="AFA9BE"/>
+                  <a:srgbClr val="C9C4D6"/>
                 </a:solidFill>
                 <a:latin typeface="Montserrat" pitchFamily="34" charset="0"/>
                 <a:ea typeface="Montserrat" pitchFamily="34" charset="-122"/>
@@ -18550,11 +18822,11 @@
             </a:avLst>
           </a:prstGeom>
           <a:solidFill>
-            <a:srgbClr val="17141F"/>
+            <a:srgbClr val="000000"/>
           </a:solidFill>
           <a:ln w="12700">
             <a:solidFill>
-              <a:srgbClr val="2E2A3A"/>
+              <a:srgbClr val="5E4F85"/>
             </a:solidFill>
             <a:prstDash val="solid"/>
           </a:ln>
@@ -18587,7 +18859,7 @@
             <a:r>
               <a:rPr lang="en-US" sz="1250" b="1" dirty="0">
                 <a:solidFill>
-                  <a:srgbClr val="C9A6FF"/>
+                  <a:srgbClr val="A98BFF"/>
                 </a:solidFill>
                 <a:latin typeface="Courier New" pitchFamily="34" charset="0"/>
                 <a:ea typeface="Courier New" pitchFamily="34" charset="-122"/>
@@ -18629,7 +18901,7 @@
             <a:r>
               <a:rPr lang="en-US" sz="1150" dirty="0">
                 <a:solidFill>
-                  <a:srgbClr val="AFA9BE"/>
+                  <a:srgbClr val="C9C4D6"/>
                 </a:solidFill>
                 <a:latin typeface="Montserrat" pitchFamily="34" charset="0"/>
                 <a:ea typeface="Montserrat" pitchFamily="34" charset="-122"/>
@@ -18658,11 +18930,11 @@
             </a:avLst>
           </a:prstGeom>
           <a:solidFill>
-            <a:srgbClr val="17141F"/>
+            <a:srgbClr val="000000"/>
           </a:solidFill>
           <a:ln w="12700">
             <a:solidFill>
-              <a:srgbClr val="2E2A3A"/>
+              <a:srgbClr val="5E4F85"/>
             </a:solidFill>
             <a:prstDash val="solid"/>
           </a:ln>
@@ -18695,7 +18967,7 @@
             <a:r>
               <a:rPr lang="en-US" sz="1250" b="1" dirty="0">
                 <a:solidFill>
-                  <a:srgbClr val="C9A6FF"/>
+                  <a:srgbClr val="A98BFF"/>
                 </a:solidFill>
                 <a:latin typeface="Courier New" pitchFamily="34" charset="0"/>
                 <a:ea typeface="Courier New" pitchFamily="34" charset="-122"/>
@@ -18737,7 +19009,7 @@
             <a:r>
               <a:rPr lang="en-US" sz="1150" dirty="0">
                 <a:solidFill>
-                  <a:srgbClr val="AFA9BE"/>
+                  <a:srgbClr val="C9C4D6"/>
                 </a:solidFill>
                 <a:latin typeface="Montserrat" pitchFamily="34" charset="0"/>
                 <a:ea typeface="Montserrat" pitchFamily="34" charset="-122"/>
@@ -18766,11 +19038,11 @@
             </a:avLst>
           </a:prstGeom>
           <a:solidFill>
-            <a:srgbClr val="17141F"/>
+            <a:srgbClr val="000000"/>
           </a:solidFill>
           <a:ln w="12700">
             <a:solidFill>
-              <a:srgbClr val="2E2A3A"/>
+              <a:srgbClr val="5E4F85"/>
             </a:solidFill>
             <a:prstDash val="solid"/>
           </a:ln>
@@ -18803,7 +19075,7 @@
             <a:r>
               <a:rPr lang="en-US" sz="1250" b="1" dirty="0">
                 <a:solidFill>
-                  <a:srgbClr val="C9A6FF"/>
+                  <a:srgbClr val="A98BFF"/>
                 </a:solidFill>
                 <a:latin typeface="Courier New" pitchFamily="34" charset="0"/>
                 <a:ea typeface="Courier New" pitchFamily="34" charset="-122"/>
@@ -18845,7 +19117,7 @@
             <a:r>
               <a:rPr lang="en-US" sz="1150" dirty="0">
                 <a:solidFill>
-                  <a:srgbClr val="AFA9BE"/>
+                  <a:srgbClr val="C9C4D6"/>
                 </a:solidFill>
                 <a:latin typeface="Montserrat" pitchFamily="34" charset="0"/>
                 <a:ea typeface="Montserrat" pitchFamily="34" charset="-122"/>
@@ -18874,11 +19146,11 @@
             </a:avLst>
           </a:prstGeom>
           <a:solidFill>
-            <a:srgbClr val="17141F"/>
+            <a:srgbClr val="000000"/>
           </a:solidFill>
           <a:ln w="12700">
             <a:solidFill>
-              <a:srgbClr val="2E2A3A"/>
+              <a:srgbClr val="5E4F85"/>
             </a:solidFill>
             <a:prstDash val="solid"/>
           </a:ln>
@@ -18911,7 +19183,7 @@
             <a:r>
               <a:rPr lang="en-US" sz="1250" b="1" dirty="0">
                 <a:solidFill>
-                  <a:srgbClr val="C9A6FF"/>
+                  <a:srgbClr val="A98BFF"/>
                 </a:solidFill>
                 <a:latin typeface="Courier New" pitchFamily="34" charset="0"/>
                 <a:ea typeface="Courier New" pitchFamily="34" charset="-122"/>
@@ -18953,7 +19225,7 @@
             <a:r>
               <a:rPr lang="en-US" sz="1150" dirty="0">
                 <a:solidFill>
-                  <a:srgbClr val="AFA9BE"/>
+                  <a:srgbClr val="C9C4D6"/>
                 </a:solidFill>
                 <a:latin typeface="Montserrat" pitchFamily="34" charset="0"/>
                 <a:ea typeface="Montserrat" pitchFamily="34" charset="-122"/>
@@ -18982,11 +19254,11 @@
             </a:avLst>
           </a:prstGeom>
           <a:solidFill>
-            <a:srgbClr val="17141F"/>
+            <a:srgbClr val="000000"/>
           </a:solidFill>
           <a:ln w="12700">
             <a:solidFill>
-              <a:srgbClr val="2E2A3A"/>
+              <a:srgbClr val="5E4F85"/>
             </a:solidFill>
             <a:prstDash val="solid"/>
           </a:ln>
@@ -19019,7 +19291,7 @@
             <a:r>
               <a:rPr lang="en-US" sz="1250" b="1" dirty="0">
                 <a:solidFill>
-                  <a:srgbClr val="C9A6FF"/>
+                  <a:srgbClr val="A98BFF"/>
                 </a:solidFill>
                 <a:latin typeface="Courier New" pitchFamily="34" charset="0"/>
                 <a:ea typeface="Courier New" pitchFamily="34" charset="-122"/>
@@ -19061,7 +19333,7 @@
             <a:r>
               <a:rPr lang="en-US" sz="1150" dirty="0">
                 <a:solidFill>
-                  <a:srgbClr val="AFA9BE"/>
+                  <a:srgbClr val="C9C4D6"/>
                 </a:solidFill>
                 <a:latin typeface="Montserrat" pitchFamily="34" charset="0"/>
                 <a:ea typeface="Montserrat" pitchFamily="34" charset="-122"/>
@@ -19090,11 +19362,11 @@
             </a:avLst>
           </a:prstGeom>
           <a:solidFill>
-            <a:srgbClr val="17141F"/>
+            <a:srgbClr val="000000"/>
           </a:solidFill>
           <a:ln w="12700">
             <a:solidFill>
-              <a:srgbClr val="2E2A3A"/>
+              <a:srgbClr val="5E4F85"/>
             </a:solidFill>
             <a:prstDash val="solid"/>
           </a:ln>
@@ -19172,7 +19444,7 @@
             <a:lvl1pPr>
               <a:defRPr sz="850">
                 <a:solidFill>
-                  <a:srgbClr val="8A82A0"/>
+                  <a:srgbClr val="9A94AA"/>
                 </a:solidFill>
                 <a:latin typeface="Courier New"/>
                 <a:ea typeface="Courier New"/>
@@ -19242,7 +19514,7 @@
             <a:r>
               <a:rPr lang="en-US" sz="2600" b="1" dirty="0">
                 <a:solidFill>
-                  <a:srgbClr val="C9A6FF"/>
+                  <a:srgbClr val="A98BFF"/>
                 </a:solidFill>
                 <a:latin typeface="Courier New" pitchFamily="34" charset="0"/>
                 <a:ea typeface="Courier New" pitchFamily="34" charset="-122"/>
@@ -19310,9 +19582,14 @@
             </a:avLst>
           </a:prstGeom>
           <a:solidFill>
-            <a:srgbClr val="C9A6FF"/>
-          </a:solidFill>
-          <a:ln/>
+            <a:srgbClr val="1A0B3D"/>
+          </a:solidFill>
+          <a:ln w="12700">
+            <a:solidFill>
+              <a:srgbClr val="5A05F4"/>
+            </a:solidFill>
+            <a:prstDash val="solid"/>
+          </a:ln>
         </p:spPr>
       </p:sp>
       <p:sp>
@@ -19342,7 +19619,7 @@
             <a:r>
               <a:rPr lang="en-US" sz="900" b="1" spc="100" kern="0" dirty="0">
                 <a:solidFill>
-                  <a:srgbClr val="1C1140"/>
+                  <a:srgbClr val="A98BFF"/>
                 </a:solidFill>
                 <a:latin typeface="Courier New" pitchFamily="34" charset="0"/>
                 <a:ea typeface="Courier New" pitchFamily="34" charset="-122"/>
@@ -19395,9 +19672,14 @@
             </a:avLst>
           </a:prstGeom>
           <a:solidFill>
-            <a:srgbClr val="2E1418"/>
-          </a:solidFill>
-          <a:ln/>
+            <a:srgbClr val="1A0808"/>
+          </a:solidFill>
+          <a:ln w="12700">
+            <a:solidFill>
+              <a:srgbClr val="FF6B6B"/>
+            </a:solidFill>
+            <a:prstDash val="solid"/>
+          </a:ln>
         </p:spPr>
       </p:sp>
       <p:sp>
@@ -19415,7 +19697,7 @@
             <a:avLst/>
           </a:prstGeom>
           <a:solidFill>
-            <a:srgbClr val="FF7B7B"/>
+            <a:srgbClr val="5A05F4"/>
           </a:solidFill>
           <a:ln/>
         </p:spPr>
@@ -19447,7 +19729,7 @@
             <a:r>
               <a:rPr lang="en-US" sz="1200" b="1" dirty="0">
                 <a:solidFill>
-                  <a:srgbClr val="2E1418"/>
+                  <a:srgbClr val="FFFFFF"/>
                 </a:solidFill>
                 <a:latin typeface="Courier New" pitchFamily="34" charset="0"/>
                 <a:ea typeface="Courier New" pitchFamily="34" charset="-122"/>
@@ -19486,7 +19768,7 @@
             <a:r>
               <a:rPr lang="en-US" sz="1450" b="1" dirty="0">
                 <a:solidFill>
-                  <a:srgbClr val="FF7B7B"/>
+                  <a:srgbClr val="FF6B6B"/>
                 </a:solidFill>
                 <a:latin typeface="Montserrat" pitchFamily="34" charset="0"/>
                 <a:ea typeface="Montserrat" pitchFamily="34" charset="-122"/>
@@ -19528,7 +19810,7 @@
             <a:r>
               <a:rPr lang="en-US" sz="1200" dirty="0">
                 <a:solidFill>
-                  <a:srgbClr val="FFFFFF"/>
+                  <a:srgbClr val="C9C4D6"/>
                 </a:solidFill>
                 <a:latin typeface="Montserrat" pitchFamily="34" charset="0"/>
                 <a:ea typeface="Montserrat" pitchFamily="34" charset="-122"/>
@@ -19557,9 +19839,14 @@
             </a:avLst>
           </a:prstGeom>
           <a:solidFill>
-            <a:srgbClr val="2E1418"/>
-          </a:solidFill>
-          <a:ln/>
+            <a:srgbClr val="1A0808"/>
+          </a:solidFill>
+          <a:ln w="12700">
+            <a:solidFill>
+              <a:srgbClr val="FF6B6B"/>
+            </a:solidFill>
+            <a:prstDash val="solid"/>
+          </a:ln>
         </p:spPr>
       </p:sp>
       <p:sp>
@@ -19577,7 +19864,7 @@
             <a:avLst/>
           </a:prstGeom>
           <a:solidFill>
-            <a:srgbClr val="FF7B7B"/>
+            <a:srgbClr val="5A05F4"/>
           </a:solidFill>
           <a:ln/>
         </p:spPr>
@@ -19609,7 +19896,7 @@
             <a:r>
               <a:rPr lang="en-US" sz="1200" b="1" dirty="0">
                 <a:solidFill>
-                  <a:srgbClr val="2E1418"/>
+                  <a:srgbClr val="FFFFFF"/>
                 </a:solidFill>
                 <a:latin typeface="Courier New" pitchFamily="34" charset="0"/>
                 <a:ea typeface="Courier New" pitchFamily="34" charset="-122"/>
@@ -19648,7 +19935,7 @@
             <a:r>
               <a:rPr lang="en-US" sz="1450" b="1" dirty="0">
                 <a:solidFill>
-                  <a:srgbClr val="FF7B7B"/>
+                  <a:srgbClr val="FF6B6B"/>
                 </a:solidFill>
                 <a:latin typeface="Montserrat" pitchFamily="34" charset="0"/>
                 <a:ea typeface="Montserrat" pitchFamily="34" charset="-122"/>
@@ -19690,7 +19977,7 @@
             <a:r>
               <a:rPr lang="en-US" sz="1200" dirty="0">
                 <a:solidFill>
-                  <a:srgbClr val="FFFFFF"/>
+                  <a:srgbClr val="C9C4D6"/>
                 </a:solidFill>
                 <a:latin typeface="Montserrat" pitchFamily="34" charset="0"/>
                 <a:ea typeface="Montserrat" pitchFamily="34" charset="-122"/>
@@ -19719,9 +20006,14 @@
             </a:avLst>
           </a:prstGeom>
           <a:solidFill>
-            <a:srgbClr val="2E1418"/>
-          </a:solidFill>
-          <a:ln/>
+            <a:srgbClr val="1A0808"/>
+          </a:solidFill>
+          <a:ln w="12700">
+            <a:solidFill>
+              <a:srgbClr val="FF6B6B"/>
+            </a:solidFill>
+            <a:prstDash val="solid"/>
+          </a:ln>
         </p:spPr>
       </p:sp>
       <p:sp>
@@ -19739,7 +20031,7 @@
             <a:avLst/>
           </a:prstGeom>
           <a:solidFill>
-            <a:srgbClr val="FF7B7B"/>
+            <a:srgbClr val="5A05F4"/>
           </a:solidFill>
           <a:ln/>
         </p:spPr>
@@ -19771,7 +20063,7 @@
             <a:r>
               <a:rPr lang="en-US" sz="1200" b="1" dirty="0">
                 <a:solidFill>
-                  <a:srgbClr val="2E1418"/>
+                  <a:srgbClr val="FFFFFF"/>
                 </a:solidFill>
                 <a:latin typeface="Courier New" pitchFamily="34" charset="0"/>
                 <a:ea typeface="Courier New" pitchFamily="34" charset="-122"/>
@@ -19810,7 +20102,7 @@
             <a:r>
               <a:rPr lang="en-US" sz="1450" b="1" dirty="0">
                 <a:solidFill>
-                  <a:srgbClr val="FF7B7B"/>
+                  <a:srgbClr val="FF6B6B"/>
                 </a:solidFill>
                 <a:latin typeface="Montserrat" pitchFamily="34" charset="0"/>
                 <a:ea typeface="Montserrat" pitchFamily="34" charset="-122"/>
@@ -19852,7 +20144,7 @@
             <a:r>
               <a:rPr lang="en-US" sz="1200" dirty="0">
                 <a:solidFill>
-                  <a:srgbClr val="FFFFFF"/>
+                  <a:srgbClr val="C9C4D6"/>
                 </a:solidFill>
                 <a:latin typeface="Montserrat" pitchFamily="34" charset="0"/>
                 <a:ea typeface="Montserrat" pitchFamily="34" charset="-122"/>
@@ -19891,7 +20183,7 @@
             <a:r>
               <a:rPr lang="en-US" sz="1200" i="1" dirty="0">
                 <a:solidFill>
-                  <a:srgbClr val="AFA9BE"/>
+                  <a:srgbClr val="C9C4D6"/>
                 </a:solidFill>
                 <a:latin typeface="Montserrat" pitchFamily="34" charset="0"/>
                 <a:ea typeface="Montserrat" pitchFamily="34" charset="-122"/>
@@ -20036,7 +20328,7 @@
             <a:lvl1pPr>
               <a:defRPr sz="850">
                 <a:solidFill>
-                  <a:srgbClr val="8A82A0"/>
+                  <a:srgbClr val="9A94AA"/>
                 </a:solidFill>
                 <a:latin typeface="Courier New"/>
                 <a:ea typeface="Courier New"/>
@@ -20106,7 +20398,7 @@
             <a:r>
               <a:rPr lang="en-US" sz="2600" b="1" dirty="0">
                 <a:solidFill>
-                  <a:srgbClr val="C9A6FF"/>
+                  <a:srgbClr val="A98BFF"/>
                 </a:solidFill>
                 <a:latin typeface="Courier New" pitchFamily="34" charset="0"/>
                 <a:ea typeface="Courier New" pitchFamily="34" charset="-122"/>
@@ -20174,9 +20466,14 @@
             </a:avLst>
           </a:prstGeom>
           <a:solidFill>
-            <a:srgbClr val="C9A6FF"/>
-          </a:solidFill>
-          <a:ln/>
+            <a:srgbClr val="1A0B3D"/>
+          </a:solidFill>
+          <a:ln w="12700">
+            <a:solidFill>
+              <a:srgbClr val="5A05F4"/>
+            </a:solidFill>
+            <a:prstDash val="solid"/>
+          </a:ln>
         </p:spPr>
       </p:sp>
       <p:sp>
@@ -20206,7 +20503,7 @@
             <a:r>
               <a:rPr lang="en-US" sz="900" b="1" spc="100" kern="0" dirty="0">
                 <a:solidFill>
-                  <a:srgbClr val="1C1140"/>
+                  <a:srgbClr val="A98BFF"/>
                 </a:solidFill>
                 <a:latin typeface="Courier New" pitchFamily="34" charset="0"/>
                 <a:ea typeface="Courier New" pitchFamily="34" charset="-122"/>
@@ -20259,9 +20556,14 @@
             </a:avLst>
           </a:prstGeom>
           <a:solidFill>
-            <a:srgbClr val="102A20"/>
-          </a:solidFill>
-          <a:ln/>
+            <a:srgbClr val="06180F"/>
+          </a:solidFill>
+          <a:ln w="12700">
+            <a:solidFill>
+              <a:srgbClr val="3FCF8E"/>
+            </a:solidFill>
+            <a:prstDash val="solid"/>
+          </a:ln>
         </p:spPr>
       </p:sp>
       <p:sp>
@@ -20291,7 +20593,7 @@
             <a:r>
               <a:rPr lang="en-US" sz="1350" b="1" dirty="0">
                 <a:solidFill>
-                  <a:srgbClr val="5FD6A0"/>
+                  <a:srgbClr val="3FCF8E"/>
                 </a:solidFill>
                 <a:latin typeface="Montserrat" pitchFamily="34" charset="0"/>
                 <a:ea typeface="Montserrat" pitchFamily="34" charset="-122"/>
@@ -20330,7 +20632,7 @@
             <a:r>
               <a:rPr lang="en-US" sz="1150" dirty="0">
                 <a:solidFill>
-                  <a:srgbClr val="FFFFFF"/>
+                  <a:srgbClr val="C9C4D6"/>
                 </a:solidFill>
                 <a:latin typeface="Montserrat" pitchFamily="34" charset="0"/>
                 <a:ea typeface="Montserrat" pitchFamily="34" charset="-122"/>
@@ -20359,9 +20661,14 @@
             </a:avLst>
           </a:prstGeom>
           <a:solidFill>
-            <a:srgbClr val="2E1418"/>
-          </a:solidFill>
-          <a:ln/>
+            <a:srgbClr val="1A0808"/>
+          </a:solidFill>
+          <a:ln w="12700">
+            <a:solidFill>
+              <a:srgbClr val="FF6B6B"/>
+            </a:solidFill>
+            <a:prstDash val="solid"/>
+          </a:ln>
         </p:spPr>
       </p:sp>
       <p:sp>
@@ -20391,7 +20698,7 @@
             <a:r>
               <a:rPr lang="en-US" sz="1350" b="1" dirty="0">
                 <a:solidFill>
-                  <a:srgbClr val="FF7B7B"/>
+                  <a:srgbClr val="FF6B6B"/>
                 </a:solidFill>
                 <a:latin typeface="Montserrat" pitchFamily="34" charset="0"/>
                 <a:ea typeface="Montserrat" pitchFamily="34" charset="-122"/>
@@ -20430,7 +20737,7 @@
             <a:r>
               <a:rPr lang="en-US" sz="1150" dirty="0">
                 <a:solidFill>
-                  <a:srgbClr val="FFFFFF"/>
+                  <a:srgbClr val="C9C4D6"/>
                 </a:solidFill>
                 <a:latin typeface="Montserrat" pitchFamily="34" charset="0"/>
                 <a:ea typeface="Montserrat" pitchFamily="34" charset="-122"/>
@@ -20459,9 +20766,14 @@
             </a:avLst>
           </a:prstGeom>
           <a:solidFill>
-            <a:srgbClr val="1C1140"/>
-          </a:solidFill>
-          <a:ln/>
+            <a:srgbClr val="1A0B3D"/>
+          </a:solidFill>
+          <a:ln w="12700">
+            <a:solidFill>
+              <a:srgbClr val="5A05F4"/>
+            </a:solidFill>
+            <a:prstDash val="solid"/>
+          </a:ln>
         </p:spPr>
       </p:sp>
       <p:sp>
@@ -20491,7 +20803,7 @@
             <a:r>
               <a:rPr lang="en-US" sz="1350" b="1" dirty="0">
                 <a:solidFill>
-                  <a:srgbClr val="C9A6FF"/>
+                  <a:srgbClr val="A98BFF"/>
                 </a:solidFill>
                 <a:latin typeface="Montserrat" pitchFamily="34" charset="0"/>
                 <a:ea typeface="Montserrat" pitchFamily="34" charset="-122"/>
@@ -20530,7 +20842,7 @@
             <a:r>
               <a:rPr lang="en-US" sz="1150" dirty="0">
                 <a:solidFill>
-                  <a:srgbClr val="FFFFFF"/>
+                  <a:srgbClr val="C9C4D6"/>
                 </a:solidFill>
                 <a:latin typeface="Montserrat" pitchFamily="34" charset="0"/>
                 <a:ea typeface="Montserrat" pitchFamily="34" charset="-122"/>
@@ -20559,11 +20871,11 @@
             </a:avLst>
           </a:prstGeom>
           <a:solidFill>
-            <a:srgbClr val="17141F"/>
+            <a:srgbClr val="000000"/>
           </a:solidFill>
           <a:ln w="12700">
             <a:solidFill>
-              <a:srgbClr val="2E2A3A"/>
+              <a:srgbClr val="5E4F85"/>
             </a:solidFill>
             <a:prstDash val="solid"/>
           </a:ln>
@@ -20625,7 +20937,7 @@
           <a:noFill/>
           <a:ln w="15875">
             <a:solidFill>
-              <a:srgbClr val="9B7BE8"/>
+              <a:srgbClr val="8F72E6"/>
             </a:solidFill>
             <a:prstDash val="solid"/>
           </a:ln>
@@ -20646,7 +20958,7 @@
             <a:avLst/>
           </a:prstGeom>
           <a:solidFill>
-            <a:srgbClr val="9B7BE8"/>
+            <a:srgbClr val="8F72E6"/>
           </a:solidFill>
           <a:ln/>
         </p:spPr>
@@ -20668,7 +20980,7 @@
             </a:avLst>
           </a:prstGeom>
           <a:solidFill>
-            <a:srgbClr val="102A20"/>
+            <a:srgbClr val="06180F"/>
           </a:solidFill>
           <a:ln/>
         </p:spPr>
@@ -20700,7 +21012,7 @@
             <a:r>
               <a:rPr lang="en-US" sz="950" b="1" dirty="0">
                 <a:solidFill>
-                  <a:srgbClr val="5FD6A0"/>
+                  <a:srgbClr val="3FCF8E"/>
                 </a:solidFill>
                 <a:latin typeface="Courier New" pitchFamily="34" charset="0"/>
                 <a:ea typeface="Courier New" pitchFamily="34" charset="-122"/>
@@ -20729,7 +21041,7 @@
             </a:avLst>
           </a:prstGeom>
           <a:solidFill>
-            <a:srgbClr val="2E1418"/>
+            <a:srgbClr val="1A0808"/>
           </a:solidFill>
           <a:ln/>
         </p:spPr>
@@ -20761,7 +21073,7 @@
             <a:r>
               <a:rPr lang="en-US" sz="950" b="1" dirty="0">
                 <a:solidFill>
-                  <a:srgbClr val="FF7B7B"/>
+                  <a:srgbClr val="FF6B6B"/>
                 </a:solidFill>
                 <a:latin typeface="Courier New" pitchFamily="34" charset="0"/>
                 <a:ea typeface="Courier New" pitchFamily="34" charset="-122"/>
@@ -20790,7 +21102,7 @@
             </a:avLst>
           </a:prstGeom>
           <a:solidFill>
-            <a:srgbClr val="1C1140"/>
+            <a:srgbClr val="1A0B3D"/>
           </a:solidFill>
           <a:ln/>
         </p:spPr>
@@ -20822,7 +21134,7 @@
             <a:r>
               <a:rPr lang="en-US" sz="950" b="1" dirty="0">
                 <a:solidFill>
-                  <a:srgbClr val="C9A6FF"/>
+                  <a:srgbClr val="A98BFF"/>
                 </a:solidFill>
                 <a:latin typeface="Courier New" pitchFamily="34" charset="0"/>
                 <a:ea typeface="Courier New" pitchFamily="34" charset="-122"/>
@@ -20851,7 +21163,7 @@
           <a:noFill/>
           <a:ln w="15875">
             <a:solidFill>
-              <a:srgbClr val="9B7BE8"/>
+              <a:srgbClr val="8F72E6"/>
             </a:solidFill>
             <a:prstDash val="solid"/>
           </a:ln>
@@ -20872,7 +21184,7 @@
             <a:avLst/>
           </a:prstGeom>
           <a:solidFill>
-            <a:srgbClr val="9B7BE8"/>
+            <a:srgbClr val="8F72E6"/>
           </a:solidFill>
           <a:ln/>
         </p:spPr>
@@ -20894,7 +21206,7 @@
             </a:avLst>
           </a:prstGeom>
           <a:solidFill>
-            <a:srgbClr val="102A20"/>
+            <a:srgbClr val="06180F"/>
           </a:solidFill>
           <a:ln/>
         </p:spPr>
@@ -20926,7 +21238,7 @@
             <a:r>
               <a:rPr lang="en-US" sz="950" b="1" dirty="0">
                 <a:solidFill>
-                  <a:srgbClr val="5FD6A0"/>
+                  <a:srgbClr val="3FCF8E"/>
                 </a:solidFill>
                 <a:latin typeface="Courier New" pitchFamily="34" charset="0"/>
                 <a:ea typeface="Courier New" pitchFamily="34" charset="-122"/>
@@ -20955,9 +21267,14 @@
             </a:avLst>
           </a:prstGeom>
           <a:solidFill>
-            <a:srgbClr val="102A20"/>
-          </a:solidFill>
-          <a:ln/>
+            <a:srgbClr val="06180F"/>
+          </a:solidFill>
+          <a:ln w="12700">
+            <a:solidFill>
+              <a:srgbClr val="3FCF8E"/>
+            </a:solidFill>
+            <a:prstDash val="solid"/>
+          </a:ln>
         </p:spPr>
       </p:sp>
       <p:sp>
@@ -20987,7 +21304,7 @@
             <a:r>
               <a:rPr lang="en-US" sz="950" b="1" spc="150" kern="0" dirty="0">
                 <a:solidFill>
-                  <a:srgbClr val="5FD6A0"/>
+                  <a:srgbClr val="3FCF8E"/>
                 </a:solidFill>
                 <a:latin typeface="Courier New" pitchFamily="34" charset="0"/>
                 <a:ea typeface="Courier New" pitchFamily="34" charset="-122"/>
@@ -21058,11 +21375,11 @@
             </a:avLst>
           </a:prstGeom>
           <a:solidFill>
-            <a:srgbClr val="17141F"/>
+            <a:srgbClr val="000000"/>
           </a:solidFill>
           <a:ln w="12700">
             <a:solidFill>
-              <a:srgbClr val="2E2A3A"/>
+              <a:srgbClr val="5E4F85"/>
             </a:solidFill>
             <a:prstDash val="solid"/>
           </a:ln>
@@ -21140,7 +21457,7 @@
             <a:lvl1pPr>
               <a:defRPr sz="850">
                 <a:solidFill>
-                  <a:srgbClr val="8A82A0"/>
+                  <a:srgbClr val="9A94AA"/>
                 </a:solidFill>
                 <a:latin typeface="Courier New"/>
                 <a:ea typeface="Courier New"/>
@@ -21210,7 +21527,7 @@
             <a:r>
               <a:rPr lang="en-US" sz="2600" b="1" dirty="0">
                 <a:solidFill>
-                  <a:srgbClr val="C9A6FF"/>
+                  <a:srgbClr val="A98BFF"/>
                 </a:solidFill>
                 <a:latin typeface="Courier New" pitchFamily="34" charset="0"/>
                 <a:ea typeface="Courier New" pitchFamily="34" charset="-122"/>
@@ -21278,9 +21595,14 @@
             </a:avLst>
           </a:prstGeom>
           <a:solidFill>
-            <a:srgbClr val="C9A6FF"/>
-          </a:solidFill>
-          <a:ln/>
+            <a:srgbClr val="1A0B3D"/>
+          </a:solidFill>
+          <a:ln w="12700">
+            <a:solidFill>
+              <a:srgbClr val="5A05F4"/>
+            </a:solidFill>
+            <a:prstDash val="solid"/>
+          </a:ln>
         </p:spPr>
       </p:sp>
       <p:sp>
@@ -21310,7 +21632,7 @@
             <a:r>
               <a:rPr lang="en-US" sz="900" b="1" spc="100" kern="0" dirty="0">
                 <a:solidFill>
-                  <a:srgbClr val="1C1140"/>
+                  <a:srgbClr val="A98BFF"/>
                 </a:solidFill>
                 <a:latin typeface="Courier New" pitchFamily="34" charset="0"/>
                 <a:ea typeface="Courier New" pitchFamily="34" charset="-122"/>
@@ -21363,9 +21685,14 @@
             </a:avLst>
           </a:prstGeom>
           <a:solidFill>
-            <a:srgbClr val="1C1140"/>
-          </a:solidFill>
-          <a:ln/>
+            <a:srgbClr val="1A0B3D"/>
+          </a:solidFill>
+          <a:ln w="12700">
+            <a:solidFill>
+              <a:srgbClr val="5A05F4"/>
+            </a:solidFill>
+            <a:prstDash val="solid"/>
+          </a:ln>
         </p:spPr>
       </p:sp>
       <p:sp>
@@ -21395,7 +21722,7 @@
             <a:r>
               <a:rPr lang="en-US" sz="1450" b="1" dirty="0">
                 <a:solidFill>
-                  <a:srgbClr val="C9A6FF"/>
+                  <a:srgbClr val="A98BFF"/>
                 </a:solidFill>
                 <a:latin typeface="Montserrat" pitchFamily="34" charset="0"/>
                 <a:ea typeface="Montserrat" pitchFamily="34" charset="-122"/>
@@ -21437,7 +21764,7 @@
             <a:r>
               <a:rPr lang="en-US" sz="1200" dirty="0">
                 <a:solidFill>
-                  <a:srgbClr val="FFFFFF"/>
+                  <a:srgbClr val="C9C4D6"/>
                 </a:solidFill>
                 <a:latin typeface="Montserrat" pitchFamily="34" charset="0"/>
                 <a:ea typeface="Montserrat" pitchFamily="34" charset="-122"/>
@@ -21466,9 +21793,14 @@
             </a:avLst>
           </a:prstGeom>
           <a:solidFill>
-            <a:srgbClr val="1C1140"/>
-          </a:solidFill>
-          <a:ln/>
+            <a:srgbClr val="1A0B3D"/>
+          </a:solidFill>
+          <a:ln w="12700">
+            <a:solidFill>
+              <a:srgbClr val="5A05F4"/>
+            </a:solidFill>
+            <a:prstDash val="solid"/>
+          </a:ln>
         </p:spPr>
       </p:sp>
       <p:sp>
@@ -21498,7 +21830,7 @@
             <a:r>
               <a:rPr lang="en-US" sz="1450" b="1" dirty="0">
                 <a:solidFill>
-                  <a:srgbClr val="C9A6FF"/>
+                  <a:srgbClr val="A98BFF"/>
                 </a:solidFill>
                 <a:latin typeface="Montserrat" pitchFamily="34" charset="0"/>
                 <a:ea typeface="Montserrat" pitchFamily="34" charset="-122"/>
@@ -21540,7 +21872,7 @@
             <a:r>
               <a:rPr lang="en-US" sz="1200" dirty="0">
                 <a:solidFill>
-                  <a:srgbClr val="FFFFFF"/>
+                  <a:srgbClr val="C9C4D6"/>
                 </a:solidFill>
                 <a:latin typeface="Montserrat" pitchFamily="34" charset="0"/>
                 <a:ea typeface="Montserrat" pitchFamily="34" charset="-122"/>
@@ -21579,7 +21911,7 @@
             <a:r>
               <a:rPr lang="en-US" sz="1250" i="1" dirty="0">
                 <a:solidFill>
-                  <a:srgbClr val="AFA9BE"/>
+                  <a:srgbClr val="C9C4D6"/>
                 </a:solidFill>
                 <a:latin typeface="Montserrat" pitchFamily="34" charset="0"/>
                 <a:ea typeface="Montserrat" pitchFamily="34" charset="-122"/>
@@ -21608,9 +21940,14 @@
             </a:avLst>
           </a:prstGeom>
           <a:solidFill>
-            <a:srgbClr val="2E1418"/>
-          </a:solidFill>
-          <a:ln/>
+            <a:srgbClr val="1A0808"/>
+          </a:solidFill>
+          <a:ln w="12700">
+            <a:solidFill>
+              <a:srgbClr val="FF6B6B"/>
+            </a:solidFill>
+            <a:prstDash val="solid"/>
+          </a:ln>
         </p:spPr>
       </p:sp>
       <p:sp>
@@ -21640,7 +21977,7 @@
             <a:r>
               <a:rPr lang="en-US" sz="950" b="1" spc="150" kern="0" dirty="0">
                 <a:solidFill>
-                  <a:srgbClr val="FF7B7B"/>
+                  <a:srgbClr val="FF6B6B"/>
                 </a:solidFill>
                 <a:latin typeface="Courier New" pitchFamily="34" charset="0"/>
                 <a:ea typeface="Courier New" pitchFamily="34" charset="-122"/>
@@ -21724,7 +22061,7 @@
             <a:lvl1pPr>
               <a:defRPr sz="850">
                 <a:solidFill>
-                  <a:srgbClr val="8A82A0"/>
+                  <a:srgbClr val="9A94AA"/>
                 </a:solidFill>
                 <a:latin typeface="Courier New"/>
                 <a:ea typeface="Courier New"/>
@@ -21794,7 +22131,7 @@
             <a:r>
               <a:rPr lang="en-US" sz="2600" b="1" dirty="0">
                 <a:solidFill>
-                  <a:srgbClr val="C9A6FF"/>
+                  <a:srgbClr val="A98BFF"/>
                 </a:solidFill>
                 <a:latin typeface="Courier New" pitchFamily="34" charset="0"/>
                 <a:ea typeface="Courier New" pitchFamily="34" charset="-122"/>
@@ -21862,9 +22199,14 @@
             </a:avLst>
           </a:prstGeom>
           <a:solidFill>
-            <a:srgbClr val="C9A6FF"/>
-          </a:solidFill>
-          <a:ln/>
+            <a:srgbClr val="1A0B3D"/>
+          </a:solidFill>
+          <a:ln w="12700">
+            <a:solidFill>
+              <a:srgbClr val="5A05F4"/>
+            </a:solidFill>
+            <a:prstDash val="solid"/>
+          </a:ln>
         </p:spPr>
       </p:sp>
       <p:sp>
@@ -21894,7 +22236,7 @@
             <a:r>
               <a:rPr lang="en-US" sz="900" b="1" spc="100" kern="0" dirty="0">
                 <a:solidFill>
-                  <a:srgbClr val="1C1140"/>
+                  <a:srgbClr val="A98BFF"/>
                 </a:solidFill>
                 <a:latin typeface="Courier New" pitchFamily="34" charset="0"/>
                 <a:ea typeface="Courier New" pitchFamily="34" charset="-122"/>
@@ -21947,11 +22289,11 @@
             </a:avLst>
           </a:prstGeom>
           <a:solidFill>
-            <a:srgbClr val="12101A"/>
+            <a:srgbClr val="07060C"/>
           </a:solidFill>
           <a:ln w="12700">
             <a:solidFill>
-              <a:srgbClr val="2E2A3A"/>
+              <a:srgbClr val="5E4F85"/>
             </a:solidFill>
             <a:prstDash val="solid"/>
           </a:ln>
@@ -21987,7 +22329,7 @@
             <a:r>
               <a:rPr lang="en-US" sz="1000" dirty="0">
                 <a:solidFill>
-                  <a:srgbClr val="7FD9A6"/>
+                  <a:srgbClr val="6BA0F8"/>
                 </a:solidFill>
                 <a:latin typeface="Courier New" pitchFamily="34" charset="0"/>
                 <a:ea typeface="Courier New" pitchFamily="34" charset="-122"/>
@@ -22007,7 +22349,7 @@
             <a:r>
               <a:rPr lang="en-US" sz="1000" dirty="0">
                 <a:solidFill>
-                  <a:srgbClr val="7FD9A6"/>
+                  <a:srgbClr val="6BA0F8"/>
                 </a:solidFill>
                 <a:latin typeface="Courier New" pitchFamily="34" charset="0"/>
                 <a:ea typeface="Courier New" pitchFamily="34" charset="-122"/>
@@ -22027,7 +22369,7 @@
             <a:r>
               <a:rPr lang="en-US" sz="1000" dirty="0">
                 <a:solidFill>
-                  <a:srgbClr val="C9A6FF"/>
+                  <a:srgbClr val="A98BFF"/>
                 </a:solidFill>
                 <a:latin typeface="Courier New" pitchFamily="34" charset="0"/>
                 <a:ea typeface="Courier New" pitchFamily="34" charset="-122"/>
@@ -22047,7 +22389,7 @@
             <a:r>
               <a:rPr lang="en-US" sz="1000" dirty="0">
                 <a:solidFill>
-                  <a:srgbClr val="C9A6FF"/>
+                  <a:srgbClr val="A98BFF"/>
                 </a:solidFill>
                 <a:latin typeface="Courier New" pitchFamily="34" charset="0"/>
                 <a:ea typeface="Courier New" pitchFamily="34" charset="-122"/>
@@ -22067,7 +22409,7 @@
             <a:r>
               <a:rPr lang="en-US" sz="1000" dirty="0">
                 <a:solidFill>
-                  <a:srgbClr val="F0B36B"/>
+                  <a:srgbClr val="C9C4D6"/>
                 </a:solidFill>
                 <a:latin typeface="Courier New" pitchFamily="34" charset="0"/>
                 <a:ea typeface="Courier New" pitchFamily="34" charset="-122"/>
@@ -22087,7 +22429,7 @@
             <a:r>
               <a:rPr lang="en-US" sz="1000" dirty="0">
                 <a:solidFill>
-                  <a:srgbClr val="7FD9A6"/>
+                  <a:srgbClr val="6BA0F8"/>
                 </a:solidFill>
                 <a:latin typeface="Courier New" pitchFamily="34" charset="0"/>
                 <a:ea typeface="Courier New" pitchFamily="34" charset="-122"/>
@@ -22126,7 +22468,7 @@
             <a:r>
               <a:rPr lang="en-US" sz="1050" b="1" dirty="0">
                 <a:solidFill>
-                  <a:srgbClr val="C9A6FF"/>
+                  <a:srgbClr val="A98BFF"/>
                 </a:solidFill>
                 <a:latin typeface="Courier New" pitchFamily="34" charset="0"/>
                 <a:ea typeface="Courier New" pitchFamily="34" charset="-122"/>
@@ -22194,7 +22536,7 @@
             </a:avLst>
           </a:prstGeom>
           <a:solidFill>
-            <a:srgbClr val="1C1140"/>
+            <a:srgbClr val="1A0B3D"/>
           </a:solidFill>
           <a:ln/>
         </p:spPr>
@@ -22226,7 +22568,7 @@
             <a:r>
               <a:rPr lang="en-US" sz="850" b="1" dirty="0">
                 <a:solidFill>
-                  <a:srgbClr val="C9A6FF"/>
+                  <a:srgbClr val="A98BFF"/>
                 </a:solidFill>
                 <a:latin typeface="Courier New" pitchFamily="34" charset="0"/>
                 <a:ea typeface="Courier New" pitchFamily="34" charset="-122"/>
@@ -22265,7 +22607,7 @@
             <a:r>
               <a:rPr lang="en-US" sz="1050" b="1" dirty="0">
                 <a:solidFill>
-                  <a:srgbClr val="C9A6FF"/>
+                  <a:srgbClr val="A98BFF"/>
                 </a:solidFill>
                 <a:latin typeface="Courier New" pitchFamily="34" charset="0"/>
                 <a:ea typeface="Courier New" pitchFamily="34" charset="-122"/>
@@ -22333,7 +22675,7 @@
             </a:avLst>
           </a:prstGeom>
           <a:solidFill>
-            <a:srgbClr val="1C1140"/>
+            <a:srgbClr val="1A0B3D"/>
           </a:solidFill>
           <a:ln/>
         </p:spPr>
@@ -22365,7 +22707,7 @@
             <a:r>
               <a:rPr lang="en-US" sz="850" b="1" dirty="0">
                 <a:solidFill>
-                  <a:srgbClr val="C9A6FF"/>
+                  <a:srgbClr val="A98BFF"/>
                 </a:solidFill>
                 <a:latin typeface="Courier New" pitchFamily="34" charset="0"/>
                 <a:ea typeface="Courier New" pitchFamily="34" charset="-122"/>
@@ -22404,7 +22746,7 @@
             <a:r>
               <a:rPr lang="en-US" sz="1050" b="1" dirty="0">
                 <a:solidFill>
-                  <a:srgbClr val="C9A6FF"/>
+                  <a:srgbClr val="A98BFF"/>
                 </a:solidFill>
                 <a:latin typeface="Courier New" pitchFamily="34" charset="0"/>
                 <a:ea typeface="Courier New" pitchFamily="34" charset="-122"/>
@@ -22472,7 +22814,7 @@
             </a:avLst>
           </a:prstGeom>
           <a:solidFill>
-            <a:srgbClr val="1C1140"/>
+            <a:srgbClr val="1A0B3D"/>
           </a:solidFill>
           <a:ln/>
         </p:spPr>
@@ -22504,7 +22846,7 @@
             <a:r>
               <a:rPr lang="en-US" sz="850" b="1" dirty="0">
                 <a:solidFill>
-                  <a:srgbClr val="C9A6FF"/>
+                  <a:srgbClr val="A98BFF"/>
                 </a:solidFill>
                 <a:latin typeface="Courier New" pitchFamily="34" charset="0"/>
                 <a:ea typeface="Courier New" pitchFamily="34" charset="-122"/>
@@ -22543,7 +22885,7 @@
             <a:r>
               <a:rPr lang="en-US" sz="1050" b="1" dirty="0">
                 <a:solidFill>
-                  <a:srgbClr val="C9A6FF"/>
+                  <a:srgbClr val="A98BFF"/>
                 </a:solidFill>
                 <a:latin typeface="Courier New" pitchFamily="34" charset="0"/>
                 <a:ea typeface="Courier New" pitchFamily="34" charset="-122"/>
@@ -22611,7 +22953,7 @@
             </a:avLst>
           </a:prstGeom>
           <a:solidFill>
-            <a:srgbClr val="1C1140"/>
+            <a:srgbClr val="1A0B3D"/>
           </a:solidFill>
           <a:ln/>
         </p:spPr>
@@ -22643,7 +22985,7 @@
             <a:r>
               <a:rPr lang="en-US" sz="850" b="1" dirty="0">
                 <a:solidFill>
-                  <a:srgbClr val="C9A6FF"/>
+                  <a:srgbClr val="A98BFF"/>
                 </a:solidFill>
                 <a:latin typeface="Courier New" pitchFamily="34" charset="0"/>
                 <a:ea typeface="Courier New" pitchFamily="34" charset="-122"/>
@@ -22685,7 +23027,7 @@
             <a:lvl1pPr>
               <a:defRPr sz="850">
                 <a:solidFill>
-                  <a:srgbClr val="8A82A0"/>
+                  <a:srgbClr val="9A94AA"/>
                 </a:solidFill>
                 <a:latin typeface="Courier New"/>
                 <a:ea typeface="Courier New"/>
@@ -22755,7 +23097,7 @@
             <a:r>
               <a:rPr lang="en-US" sz="2600" b="1" dirty="0">
                 <a:solidFill>
-                  <a:srgbClr val="C9A6FF"/>
+                  <a:srgbClr val="A98BFF"/>
                 </a:solidFill>
                 <a:latin typeface="Courier New" pitchFamily="34" charset="0"/>
                 <a:ea typeface="Courier New" pitchFamily="34" charset="-122"/>
@@ -22823,9 +23165,14 @@
             </a:avLst>
           </a:prstGeom>
           <a:solidFill>
-            <a:srgbClr val="C9A6FF"/>
-          </a:solidFill>
-          <a:ln/>
+            <a:srgbClr val="1A0B3D"/>
+          </a:solidFill>
+          <a:ln w="12700">
+            <a:solidFill>
+              <a:srgbClr val="5A05F4"/>
+            </a:solidFill>
+            <a:prstDash val="solid"/>
+          </a:ln>
         </p:spPr>
       </p:sp>
       <p:sp>
@@ -22855,7 +23202,7 @@
             <a:r>
               <a:rPr lang="en-US" sz="900" b="1" spc="100" kern="0" dirty="0">
                 <a:solidFill>
-                  <a:srgbClr val="1C1140"/>
+                  <a:srgbClr val="A98BFF"/>
                 </a:solidFill>
                 <a:latin typeface="Courier New" pitchFamily="34" charset="0"/>
                 <a:ea typeface="Courier New" pitchFamily="34" charset="-122"/>
@@ -22908,9 +23255,14 @@
             </a:avLst>
           </a:prstGeom>
           <a:solidFill>
-            <a:srgbClr val="2E1418"/>
-          </a:solidFill>
-          <a:ln/>
+            <a:srgbClr val="1A0808"/>
+          </a:solidFill>
+          <a:ln w="12700">
+            <a:solidFill>
+              <a:srgbClr val="FF6B6B"/>
+            </a:solidFill>
+            <a:prstDash val="solid"/>
+          </a:ln>
         </p:spPr>
       </p:sp>
       <p:sp>
@@ -22940,7 +23292,7 @@
             <a:r>
               <a:rPr lang="en-US" sz="950" b="1" spc="150" kern="0" dirty="0">
                 <a:solidFill>
-                  <a:srgbClr val="FF7B7B"/>
+                  <a:srgbClr val="FF6B6B"/>
                 </a:solidFill>
                 <a:latin typeface="Courier New" pitchFamily="34" charset="0"/>
                 <a:ea typeface="Courier New" pitchFamily="34" charset="-122"/>
@@ -23011,9 +23363,14 @@
             </a:avLst>
           </a:prstGeom>
           <a:solidFill>
-            <a:srgbClr val="2A2010"/>
-          </a:solidFill>
-          <a:ln/>
+            <a:srgbClr val="0B1A38"/>
+          </a:solidFill>
+          <a:ln w="12700">
+            <a:solidFill>
+              <a:srgbClr val="6BA0F8"/>
+            </a:solidFill>
+            <a:prstDash val="solid"/>
+          </a:ln>
         </p:spPr>
       </p:sp>
       <p:sp>
@@ -23043,7 +23400,7 @@
             <a:r>
               <a:rPr lang="en-US" sz="3200" b="1" dirty="0">
                 <a:solidFill>
-                  <a:srgbClr val="E8A857"/>
+                  <a:srgbClr val="6BA0F8"/>
                 </a:solidFill>
                 <a:latin typeface="Montserrat" pitchFamily="34" charset="0"/>
                 <a:ea typeface="Montserrat" pitchFamily="34" charset="-122"/>
@@ -23082,7 +23439,7 @@
             <a:r>
               <a:rPr lang="en-US" sz="1150" dirty="0">
                 <a:solidFill>
-                  <a:srgbClr val="E8A857"/>
+                  <a:srgbClr val="C9C4D6"/>
                 </a:solidFill>
                 <a:latin typeface="Montserrat" pitchFamily="34" charset="0"/>
                 <a:ea typeface="Montserrat" pitchFamily="34" charset="-122"/>
@@ -23111,9 +23468,14 @@
             </a:avLst>
           </a:prstGeom>
           <a:solidFill>
-            <a:srgbClr val="2E1418"/>
-          </a:solidFill>
-          <a:ln/>
+            <a:srgbClr val="1A0808"/>
+          </a:solidFill>
+          <a:ln w="12700">
+            <a:solidFill>
+              <a:srgbClr val="FF6B6B"/>
+            </a:solidFill>
+            <a:prstDash val="solid"/>
+          </a:ln>
         </p:spPr>
       </p:sp>
       <p:sp>
@@ -23143,7 +23505,7 @@
             <a:r>
               <a:rPr lang="en-US" sz="3200" b="1" dirty="0">
                 <a:solidFill>
-                  <a:srgbClr val="FF7B7B"/>
+                  <a:srgbClr val="FF6B6B"/>
                 </a:solidFill>
                 <a:latin typeface="Montserrat" pitchFamily="34" charset="0"/>
                 <a:ea typeface="Montserrat" pitchFamily="34" charset="-122"/>
@@ -23182,7 +23544,7 @@
             <a:r>
               <a:rPr lang="en-US" sz="1150" dirty="0">
                 <a:solidFill>
-                  <a:srgbClr val="FF7B7B"/>
+                  <a:srgbClr val="C9C4D6"/>
                 </a:solidFill>
                 <a:latin typeface="Montserrat" pitchFamily="34" charset="0"/>
                 <a:ea typeface="Montserrat" pitchFamily="34" charset="-122"/>
@@ -23211,9 +23573,14 @@
             </a:avLst>
           </a:prstGeom>
           <a:solidFill>
-            <a:srgbClr val="102A20"/>
-          </a:solidFill>
-          <a:ln/>
+            <a:srgbClr val="06180F"/>
+          </a:solidFill>
+          <a:ln w="12700">
+            <a:solidFill>
+              <a:srgbClr val="3FCF8E"/>
+            </a:solidFill>
+            <a:prstDash val="solid"/>
+          </a:ln>
         </p:spPr>
       </p:sp>
       <p:sp>
@@ -23243,7 +23610,7 @@
             <a:r>
               <a:rPr lang="en-US" sz="1450" b="1" dirty="0">
                 <a:solidFill>
-                  <a:srgbClr val="5FD6A0"/>
+                  <a:srgbClr val="3FCF8E"/>
                 </a:solidFill>
                 <a:latin typeface="Montserrat" pitchFamily="34" charset="0"/>
                 <a:ea typeface="Montserrat" pitchFamily="34" charset="-122"/>
@@ -23285,7 +23652,7 @@
             <a:r>
               <a:rPr lang="en-US" sz="1200" dirty="0">
                 <a:solidFill>
-                  <a:srgbClr val="FFFFFF"/>
+                  <a:srgbClr val="C9C4D6"/>
                 </a:solidFill>
                 <a:latin typeface="Montserrat" pitchFamily="34" charset="0"/>
                 <a:ea typeface="Montserrat" pitchFamily="34" charset="-122"/>
@@ -23314,9 +23681,14 @@
             </a:avLst>
           </a:prstGeom>
           <a:solidFill>
-            <a:srgbClr val="102A20"/>
-          </a:solidFill>
-          <a:ln/>
+            <a:srgbClr val="06180F"/>
+          </a:solidFill>
+          <a:ln w="12700">
+            <a:solidFill>
+              <a:srgbClr val="3FCF8E"/>
+            </a:solidFill>
+            <a:prstDash val="solid"/>
+          </a:ln>
         </p:spPr>
       </p:sp>
       <p:sp>
@@ -23346,7 +23718,7 @@
             <a:r>
               <a:rPr lang="en-US" sz="1450" b="1" dirty="0">
                 <a:solidFill>
-                  <a:srgbClr val="5FD6A0"/>
+                  <a:srgbClr val="3FCF8E"/>
                 </a:solidFill>
                 <a:latin typeface="Montserrat" pitchFamily="34" charset="0"/>
                 <a:ea typeface="Montserrat" pitchFamily="34" charset="-122"/>
@@ -23388,7 +23760,7 @@
             <a:r>
               <a:rPr lang="en-US" sz="1200" dirty="0">
                 <a:solidFill>
-                  <a:srgbClr val="FFFFFF"/>
+                  <a:srgbClr val="C9C4D6"/>
                 </a:solidFill>
                 <a:latin typeface="Montserrat" pitchFamily="34" charset="0"/>
                 <a:ea typeface="Montserrat" pitchFamily="34" charset="-122"/>
@@ -23430,7 +23802,7 @@
             <a:lvl1pPr>
               <a:defRPr sz="850">
                 <a:solidFill>
-                  <a:srgbClr val="8A82A0"/>
+                  <a:srgbClr val="9A94AA"/>
                 </a:solidFill>
                 <a:latin typeface="Courier New"/>
                 <a:ea typeface="Courier New"/>

--- a/docs/decks/L10.pptx
+++ b/docs/decks/L10.pptx
@@ -12944,11 +12944,11 @@
         <p:spPr>
           <a:xfrm>
             <a:off x="566928" y="1783080"/>
-            <a:ext cx="3520440" cy="1463040"/>
+            <a:ext cx="3520440" cy="1874520"/>
           </a:xfrm>
           <a:prstGeom prst="roundRect">
             <a:avLst>
-              <a:gd name="adj" fmla="val 7500"/>
+              <a:gd name="adj" fmla="val 5854"/>
             </a:avLst>
           </a:prstGeom>
           <a:solidFill>
@@ -13064,7 +13064,7 @@
         <p:spPr>
           <a:xfrm>
             <a:off x="768096" y="2468880"/>
-            <a:ext cx="3118104" cy="621792"/>
+            <a:ext cx="3118104" cy="1033272"/>
           </a:xfrm>
           <a:prstGeom prst="rect">
             <a:avLst/>
@@ -13106,11 +13106,11 @@
         <p:spPr>
           <a:xfrm>
             <a:off x="4270248" y="1783080"/>
-            <a:ext cx="3520440" cy="1463040"/>
+            <a:ext cx="3520440" cy="1874520"/>
           </a:xfrm>
           <a:prstGeom prst="roundRect">
             <a:avLst>
-              <a:gd name="adj" fmla="val 7500"/>
+              <a:gd name="adj" fmla="val 5854"/>
             </a:avLst>
           </a:prstGeom>
           <a:solidFill>
@@ -13226,7 +13226,7 @@
         <p:spPr>
           <a:xfrm>
             <a:off x="4471416" y="2468880"/>
-            <a:ext cx="3118104" cy="621792"/>
+            <a:ext cx="3118104" cy="1033272"/>
           </a:xfrm>
           <a:prstGeom prst="rect">
             <a:avLst/>
@@ -13268,11 +13268,11 @@
         <p:spPr>
           <a:xfrm>
             <a:off x="7973568" y="1783080"/>
-            <a:ext cx="3520440" cy="1463040"/>
+            <a:ext cx="3520440" cy="1874520"/>
           </a:xfrm>
           <a:prstGeom prst="roundRect">
             <a:avLst>
-              <a:gd name="adj" fmla="val 7500"/>
+              <a:gd name="adj" fmla="val 5854"/>
             </a:avLst>
           </a:prstGeom>
           <a:solidFill>
@@ -13388,7 +13388,7 @@
         <p:spPr>
           <a:xfrm>
             <a:off x="8174736" y="2468880"/>
-            <a:ext cx="3118104" cy="621792"/>
+            <a:ext cx="3118104" cy="1033272"/>
           </a:xfrm>
           <a:prstGeom prst="rect">
             <a:avLst/>
@@ -13429,12 +13429,12 @@
         </p:nvSpPr>
         <p:spPr>
           <a:xfrm>
-            <a:off x="566928" y="3520440"/>
-            <a:ext cx="3520440" cy="1463040"/>
+            <a:off x="566928" y="3886200"/>
+            <a:ext cx="3520440" cy="1874520"/>
           </a:xfrm>
           <a:prstGeom prst="roundRect">
             <a:avLst>
-              <a:gd name="adj" fmla="val 7500"/>
+              <a:gd name="adj" fmla="val 5854"/>
             </a:avLst>
           </a:prstGeom>
           <a:solidFill>
@@ -13451,7 +13451,7 @@
         </p:nvSpPr>
         <p:spPr>
           <a:xfrm>
-            <a:off x="768096" y="3703320"/>
+            <a:off x="768096" y="4069080"/>
             <a:ext cx="384048" cy="384048"/>
           </a:xfrm>
           <a:prstGeom prst="ellipse">
@@ -13471,7 +13471,7 @@
         </p:nvSpPr>
         <p:spPr>
           <a:xfrm>
-            <a:off x="768096" y="3703320"/>
+            <a:off x="768096" y="4069080"/>
             <a:ext cx="384048" cy="384048"/>
           </a:xfrm>
           <a:prstGeom prst="rect">
@@ -13510,7 +13510,7 @@
         </p:nvSpPr>
         <p:spPr>
           <a:xfrm>
-            <a:off x="1280160" y="3675888"/>
+            <a:off x="1280160" y="4041648"/>
             <a:ext cx="2606040" cy="438912"/>
           </a:xfrm>
           <a:prstGeom prst="rect">
@@ -13549,8 +13549,8 @@
         </p:nvSpPr>
         <p:spPr>
           <a:xfrm>
-            <a:off x="768096" y="4206240"/>
-            <a:ext cx="3118104" cy="621792"/>
+            <a:off x="768096" y="4572000"/>
+            <a:ext cx="3118104" cy="1033272"/>
           </a:xfrm>
           <a:prstGeom prst="rect">
             <a:avLst/>
@@ -13591,12 +13591,12 @@
         </p:nvSpPr>
         <p:spPr>
           <a:xfrm>
-            <a:off x="4270248" y="3520440"/>
-            <a:ext cx="3520440" cy="1463040"/>
+            <a:off x="4270248" y="3886200"/>
+            <a:ext cx="3520440" cy="1874520"/>
           </a:xfrm>
           <a:prstGeom prst="roundRect">
             <a:avLst>
-              <a:gd name="adj" fmla="val 7500"/>
+              <a:gd name="adj" fmla="val 5854"/>
             </a:avLst>
           </a:prstGeom>
           <a:solidFill>
@@ -13613,7 +13613,7 @@
         </p:nvSpPr>
         <p:spPr>
           <a:xfrm>
-            <a:off x="4471416" y="3703320"/>
+            <a:off x="4471416" y="4069080"/>
             <a:ext cx="384048" cy="384048"/>
           </a:xfrm>
           <a:prstGeom prst="ellipse">
@@ -13633,7 +13633,7 @@
         </p:nvSpPr>
         <p:spPr>
           <a:xfrm>
-            <a:off x="4471416" y="3703320"/>
+            <a:off x="4471416" y="4069080"/>
             <a:ext cx="384048" cy="384048"/>
           </a:xfrm>
           <a:prstGeom prst="rect">
@@ -13672,7 +13672,7 @@
         </p:nvSpPr>
         <p:spPr>
           <a:xfrm>
-            <a:off x="4983480" y="3675888"/>
+            <a:off x="4983480" y="4041648"/>
             <a:ext cx="2606040" cy="438912"/>
           </a:xfrm>
           <a:prstGeom prst="rect">
@@ -13711,8 +13711,8 @@
         </p:nvSpPr>
         <p:spPr>
           <a:xfrm>
-            <a:off x="4471416" y="4206240"/>
-            <a:ext cx="3118104" cy="621792"/>
+            <a:off x="4471416" y="4572000"/>
+            <a:ext cx="3118104" cy="1033272"/>
           </a:xfrm>
           <a:prstGeom prst="rect">
             <a:avLst/>
@@ -14899,11 +14899,11 @@
         <p:spPr>
           <a:xfrm>
             <a:off x="566928" y="1737360"/>
-            <a:ext cx="3566160" cy="1828800"/>
+            <a:ext cx="3566160" cy="2148840"/>
           </a:xfrm>
           <a:prstGeom prst="roundRect">
             <a:avLst>
-              <a:gd name="adj" fmla="val 6000"/>
+              <a:gd name="adj" fmla="val 5106"/>
             </a:avLst>
           </a:prstGeom>
           <a:solidFill>
@@ -14960,7 +14960,7 @@
         <p:spPr>
           <a:xfrm>
             <a:off x="768096" y="2423160"/>
-            <a:ext cx="3163824" cy="987552"/>
+            <a:ext cx="3163824" cy="1307592"/>
           </a:xfrm>
           <a:prstGeom prst="rect">
             <a:avLst/>
@@ -15002,11 +15002,11 @@
         <p:spPr>
           <a:xfrm>
             <a:off x="4315968" y="1737360"/>
-            <a:ext cx="3566160" cy="1828800"/>
+            <a:ext cx="3566160" cy="2148840"/>
           </a:xfrm>
           <a:prstGeom prst="roundRect">
             <a:avLst>
-              <a:gd name="adj" fmla="val 6000"/>
+              <a:gd name="adj" fmla="val 5106"/>
             </a:avLst>
           </a:prstGeom>
           <a:solidFill>
@@ -15063,7 +15063,7 @@
         <p:spPr>
           <a:xfrm>
             <a:off x="4517136" y="2423160"/>
-            <a:ext cx="3163824" cy="987552"/>
+            <a:ext cx="3163824" cy="1307592"/>
           </a:xfrm>
           <a:prstGeom prst="rect">
             <a:avLst/>
@@ -15105,11 +15105,11 @@
         <p:spPr>
           <a:xfrm>
             <a:off x="8065008" y="1737360"/>
-            <a:ext cx="3566160" cy="1828800"/>
+            <a:ext cx="3566160" cy="2148840"/>
           </a:xfrm>
           <a:prstGeom prst="roundRect">
             <a:avLst>
-              <a:gd name="adj" fmla="val 6000"/>
+              <a:gd name="adj" fmla="val 5106"/>
             </a:avLst>
           </a:prstGeom>
           <a:solidFill>
@@ -15166,7 +15166,7 @@
         <p:spPr>
           <a:xfrm>
             <a:off x="8266176" y="2423160"/>
-            <a:ext cx="3163824" cy="987552"/>
+            <a:ext cx="3163824" cy="1307592"/>
           </a:xfrm>
           <a:prstGeom prst="rect">
             <a:avLst/>
@@ -15207,12 +15207,12 @@
         </p:nvSpPr>
         <p:spPr>
           <a:xfrm>
-            <a:off x="566928" y="3977640"/>
-            <a:ext cx="11064240" cy="1234440"/>
+            <a:off x="566928" y="4297680"/>
+            <a:ext cx="11064240" cy="1600200"/>
           </a:xfrm>
           <a:prstGeom prst="roundRect">
             <a:avLst>
-              <a:gd name="adj" fmla="val 8889"/>
+              <a:gd name="adj" fmla="val 6857"/>
             </a:avLst>
           </a:prstGeom>
           <a:solidFill>
@@ -15234,8 +15234,8 @@
         </p:nvSpPr>
         <p:spPr>
           <a:xfrm>
-            <a:off x="786384" y="4123944"/>
-            <a:ext cx="10625328" cy="941832"/>
+            <a:off x="786384" y="4443984"/>
+            <a:ext cx="10625328" cy="1307592"/>
           </a:xfrm>
           <a:prstGeom prst="rect">
             <a:avLst/>
@@ -15501,11 +15501,11 @@
         <p:spPr>
           <a:xfrm>
             <a:off x="566928" y="1783080"/>
-            <a:ext cx="11064240" cy="2331720"/>
+            <a:ext cx="11064240" cy="3657600"/>
           </a:xfrm>
           <a:prstGeom prst="roundRect">
             <a:avLst>
-              <a:gd name="adj" fmla="val 4706"/>
+              <a:gd name="adj" fmla="val 3000"/>
             </a:avLst>
           </a:prstGeom>
           <a:solidFill>
@@ -15527,7 +15527,7 @@
         </p:nvSpPr>
         <p:spPr>
           <a:xfrm>
-            <a:off x="978408" y="2157984"/>
+            <a:off x="978408" y="2462784"/>
             <a:ext cx="256032" cy="256032"/>
           </a:xfrm>
           <a:prstGeom prst="roundRect">
@@ -15554,7 +15554,7 @@
         </p:nvSpPr>
         <p:spPr>
           <a:xfrm rot="2700000">
-            <a:off x="1041227" y="2297430"/>
+            <a:off x="1041227" y="2602230"/>
             <a:ext cx="58156" cy="27432"/>
           </a:xfrm>
           <a:prstGeom prst="rect">
@@ -15574,7 +15574,7 @@
         </p:nvSpPr>
         <p:spPr>
           <a:xfrm rot="-3000000">
-            <a:off x="1069025" y="2271370"/>
+            <a:off x="1069025" y="2576170"/>
             <a:ext cx="121432" cy="27432"/>
           </a:xfrm>
           <a:prstGeom prst="rect">
@@ -15594,8 +15594,8 @@
         </p:nvSpPr>
         <p:spPr>
           <a:xfrm>
-            <a:off x="1362456" y="2103120"/>
-            <a:ext cx="4617720" cy="384048"/>
+            <a:off x="1362456" y="2261616"/>
+            <a:ext cx="4617720" cy="658368"/>
           </a:xfrm>
           <a:prstGeom prst="rect">
             <a:avLst/>
@@ -15611,7 +15611,7 @@
               <a:buNone/>
             </a:pPr>
             <a:r>
-              <a:rPr lang="en-US" sz="1250" dirty="0">
+              <a:rPr lang="en-US" sz="1400" dirty="0">
                 <a:solidFill>
                   <a:srgbClr val="000000"/>
                 </a:solidFill>
@@ -15621,7 +15621,7 @@
               </a:rPr>
               <a:t>прогін дає число і правильний exit code</a:t>
             </a:r>
-            <a:endParaRPr lang="en-US" sz="1250" dirty="0"/>
+            <a:endParaRPr lang="en-US" sz="1400" dirty="0"/>
           </a:p>
         </p:txBody>
       </p:sp>
@@ -15633,7 +15633,7 @@
         </p:nvSpPr>
         <p:spPr>
           <a:xfrm>
-            <a:off x="978408" y="2724912"/>
+            <a:off x="978408" y="3438144"/>
             <a:ext cx="256032" cy="256032"/>
           </a:xfrm>
           <a:prstGeom prst="roundRect">
@@ -15660,7 +15660,7 @@
         </p:nvSpPr>
         <p:spPr>
           <a:xfrm rot="2700000">
-            <a:off x="1041227" y="2864358"/>
+            <a:off x="1041227" y="3577590"/>
             <a:ext cx="58156" cy="27432"/>
           </a:xfrm>
           <a:prstGeom prst="rect">
@@ -15680,7 +15680,7 @@
         </p:nvSpPr>
         <p:spPr>
           <a:xfrm rot="-3000000">
-            <a:off x="1069025" y="2838298"/>
+            <a:off x="1069025" y="3551530"/>
             <a:ext cx="121432" cy="27432"/>
           </a:xfrm>
           <a:prstGeom prst="rect">
@@ -15700,8 +15700,8 @@
         </p:nvSpPr>
         <p:spPr>
           <a:xfrm>
-            <a:off x="1362456" y="2670048"/>
-            <a:ext cx="4617720" cy="384048"/>
+            <a:off x="1362456" y="3236976"/>
+            <a:ext cx="4617720" cy="658368"/>
           </a:xfrm>
           <a:prstGeom prst="rect">
             <a:avLst/>
@@ -15717,7 +15717,7 @@
               <a:buNone/>
             </a:pPr>
             <a:r>
-              <a:rPr lang="en-US" sz="1250" dirty="0">
+              <a:rPr lang="en-US" sz="1400" dirty="0">
                 <a:solidFill>
                   <a:srgbClr val="000000"/>
                 </a:solidFill>
@@ -15727,7 +15727,7 @@
               </a:rPr>
               <a:t>rollback промпта робить прогін червоним</a:t>
             </a:r>
-            <a:endParaRPr lang="en-US" sz="1250" dirty="0"/>
+            <a:endParaRPr lang="en-US" sz="1400" dirty="0"/>
           </a:p>
         </p:txBody>
       </p:sp>
@@ -15739,7 +15739,7 @@
         </p:nvSpPr>
         <p:spPr>
           <a:xfrm>
-            <a:off x="978408" y="3291840"/>
+            <a:off x="978408" y="4413504"/>
             <a:ext cx="256032" cy="256032"/>
           </a:xfrm>
           <a:prstGeom prst="roundRect">
@@ -15766,7 +15766,7 @@
         </p:nvSpPr>
         <p:spPr>
           <a:xfrm rot="2700000">
-            <a:off x="1041227" y="3431286"/>
+            <a:off x="1041227" y="4552950"/>
             <a:ext cx="58156" cy="27432"/>
           </a:xfrm>
           <a:prstGeom prst="rect">
@@ -15786,7 +15786,7 @@
         </p:nvSpPr>
         <p:spPr>
           <a:xfrm rot="-3000000">
-            <a:off x="1069025" y="3405226"/>
+            <a:off x="1069025" y="4526890"/>
             <a:ext cx="121432" cy="27432"/>
           </a:xfrm>
           <a:prstGeom prst="rect">
@@ -15806,8 +15806,8 @@
         </p:nvSpPr>
         <p:spPr>
           <a:xfrm>
-            <a:off x="1362456" y="3236976"/>
-            <a:ext cx="4617720" cy="384048"/>
+            <a:off x="1362456" y="4212336"/>
+            <a:ext cx="4617720" cy="658368"/>
           </a:xfrm>
           <a:prstGeom prst="rect">
             <a:avLst/>
@@ -15823,7 +15823,7 @@
               <a:buNone/>
             </a:pPr>
             <a:r>
-              <a:rPr lang="en-US" sz="1250" dirty="0">
+              <a:rPr lang="en-US" sz="1400" dirty="0">
                 <a:solidFill>
                   <a:srgbClr val="000000"/>
                 </a:solidFill>
@@ -15833,7 +15833,7 @@
               </a:rPr>
               <a:t>у датасеті є мої власні кейси</a:t>
             </a:r>
-            <a:endParaRPr lang="en-US" sz="1250" dirty="0"/>
+            <a:endParaRPr lang="en-US" sz="1400" dirty="0"/>
           </a:p>
         </p:txBody>
       </p:sp>
@@ -15845,7 +15845,7 @@
         </p:nvSpPr>
         <p:spPr>
           <a:xfrm>
-            <a:off x="6144768" y="2157984"/>
+            <a:off x="6144768" y="2462784"/>
             <a:ext cx="256032" cy="256032"/>
           </a:xfrm>
           <a:prstGeom prst="roundRect">
@@ -15872,7 +15872,7 @@
         </p:nvSpPr>
         <p:spPr>
           <a:xfrm rot="2700000">
-            <a:off x="6207587" y="2297430"/>
+            <a:off x="6207587" y="2602230"/>
             <a:ext cx="58156" cy="27432"/>
           </a:xfrm>
           <a:prstGeom prst="rect">
@@ -15892,7 +15892,7 @@
         </p:nvSpPr>
         <p:spPr>
           <a:xfrm rot="-3000000">
-            <a:off x="6235385" y="2271370"/>
+            <a:off x="6235385" y="2576170"/>
             <a:ext cx="121432" cy="27432"/>
           </a:xfrm>
           <a:prstGeom prst="rect">
@@ -15912,8 +15912,8 @@
         </p:nvSpPr>
         <p:spPr>
           <a:xfrm>
-            <a:off x="6528816" y="2103120"/>
-            <a:ext cx="4617720" cy="384048"/>
+            <a:off x="6528816" y="2261616"/>
+            <a:ext cx="4617720" cy="658368"/>
           </a:xfrm>
           <a:prstGeom prst="rect">
             <a:avLst/>
@@ -15929,7 +15929,7 @@
               <a:buNone/>
             </a:pPr>
             <a:r>
-              <a:rPr lang="en-US" sz="1250" dirty="0">
+              <a:rPr lang="en-US" sz="1400" dirty="0">
                 <a:solidFill>
                   <a:srgbClr val="000000"/>
                 </a:solidFill>
@@ -15939,7 +15939,7 @@
               </a:rPr>
               <a:t>прогін із __fail_503 дає 0 пройдених</a:t>
             </a:r>
-            <a:endParaRPr lang="en-US" sz="1250" dirty="0"/>
+            <a:endParaRPr lang="en-US" sz="1400" dirty="0"/>
           </a:p>
         </p:txBody>
       </p:sp>
@@ -15951,7 +15951,7 @@
         </p:nvSpPr>
         <p:spPr>
           <a:xfrm>
-            <a:off x="6144768" y="2724912"/>
+            <a:off x="6144768" y="3438144"/>
             <a:ext cx="256032" cy="256032"/>
           </a:xfrm>
           <a:prstGeom prst="roundRect">
@@ -15978,7 +15978,7 @@
         </p:nvSpPr>
         <p:spPr>
           <a:xfrm rot="2700000">
-            <a:off x="6207587" y="2864358"/>
+            <a:off x="6207587" y="3577590"/>
             <a:ext cx="58156" cy="27432"/>
           </a:xfrm>
           <a:prstGeom prst="rect">
@@ -15998,7 +15998,7 @@
         </p:nvSpPr>
         <p:spPr>
           <a:xfrm rot="-3000000">
-            <a:off x="6235385" y="2838298"/>
+            <a:off x="6235385" y="3551530"/>
             <a:ext cx="121432" cy="27432"/>
           </a:xfrm>
           <a:prstGeom prst="rect">
@@ -16018,8 +16018,8 @@
         </p:nvSpPr>
         <p:spPr>
           <a:xfrm>
-            <a:off x="6528816" y="2670048"/>
-            <a:ext cx="4617720" cy="384048"/>
+            <a:off x="6528816" y="3236976"/>
+            <a:ext cx="4617720" cy="658368"/>
           </a:xfrm>
           <a:prstGeom prst="rect">
             <a:avLst/>
@@ -16035,7 +16035,7 @@
               <a:buNone/>
             </a:pPr>
             <a:r>
-              <a:rPr lang="en-US" sz="1250" dirty="0">
+              <a:rPr lang="en-US" sz="1400" dirty="0">
                 <a:solidFill>
                   <a:srgbClr val="000000"/>
                 </a:solidFill>
@@ -16045,7 +16045,7 @@
               </a:rPr>
               <a:t>поясню, чому поріг не 100%</a:t>
             </a:r>
-            <a:endParaRPr lang="en-US" sz="1250" dirty="0"/>
+            <a:endParaRPr lang="en-US" sz="1400" dirty="0"/>
           </a:p>
         </p:txBody>
       </p:sp>
@@ -16057,7 +16057,7 @@
         </p:nvSpPr>
         <p:spPr>
           <a:xfrm>
-            <a:off x="566928" y="4343400"/>
+            <a:off x="566928" y="5669280"/>
             <a:ext cx="10972800" cy="320040"/>
           </a:xfrm>
           <a:prstGeom prst="rect">
@@ -20211,11 +20211,11 @@
         <p:spPr>
           <a:xfrm>
             <a:off x="566928" y="1783080"/>
-            <a:ext cx="3553968" cy="1188720"/>
+            <a:ext cx="3553968" cy="1481328"/>
           </a:xfrm>
           <a:prstGeom prst="roundRect">
             <a:avLst>
-              <a:gd name="adj" fmla="val 7692"/>
+              <a:gd name="adj" fmla="val 6173"/>
             </a:avLst>
           </a:prstGeom>
           <a:solidFill>
@@ -20277,7 +20277,7 @@
         <p:spPr>
           <a:xfrm>
             <a:off x="749808" y="2203704"/>
-            <a:ext cx="3188208" cy="658368"/>
+            <a:ext cx="3188208" cy="950976"/>
           </a:xfrm>
           <a:prstGeom prst="rect">
             <a:avLst/>
@@ -20319,11 +20319,11 @@
         <p:spPr>
           <a:xfrm>
             <a:off x="4322064" y="1783080"/>
-            <a:ext cx="3553968" cy="1188720"/>
+            <a:ext cx="3553968" cy="1481328"/>
           </a:xfrm>
           <a:prstGeom prst="roundRect">
             <a:avLst>
-              <a:gd name="adj" fmla="val 7692"/>
+              <a:gd name="adj" fmla="val 6173"/>
             </a:avLst>
           </a:prstGeom>
           <a:solidFill>
@@ -20385,7 +20385,7 @@
         <p:spPr>
           <a:xfrm>
             <a:off x="4504944" y="2203704"/>
-            <a:ext cx="3188208" cy="658368"/>
+            <a:ext cx="3188208" cy="950976"/>
           </a:xfrm>
           <a:prstGeom prst="rect">
             <a:avLst/>
@@ -20427,11 +20427,11 @@
         <p:spPr>
           <a:xfrm>
             <a:off x="8077200" y="1783080"/>
-            <a:ext cx="3553968" cy="1188720"/>
+            <a:ext cx="3553968" cy="1481328"/>
           </a:xfrm>
           <a:prstGeom prst="roundRect">
             <a:avLst>
-              <a:gd name="adj" fmla="val 7692"/>
+              <a:gd name="adj" fmla="val 6173"/>
             </a:avLst>
           </a:prstGeom>
           <a:solidFill>
@@ -20493,7 +20493,7 @@
         <p:spPr>
           <a:xfrm>
             <a:off x="8260080" y="2203704"/>
-            <a:ext cx="3188208" cy="658368"/>
+            <a:ext cx="3188208" cy="950976"/>
           </a:xfrm>
           <a:prstGeom prst="rect">
             <a:avLst/>
@@ -20534,12 +20534,12 @@
         </p:nvSpPr>
         <p:spPr>
           <a:xfrm>
-            <a:off x="566928" y="3172968"/>
-            <a:ext cx="3553968" cy="1188720"/>
+            <a:off x="566928" y="3465576"/>
+            <a:ext cx="3553968" cy="1481328"/>
           </a:xfrm>
           <a:prstGeom prst="roundRect">
             <a:avLst>
-              <a:gd name="adj" fmla="val 7692"/>
+              <a:gd name="adj" fmla="val 6173"/>
             </a:avLst>
           </a:prstGeom>
           <a:solidFill>
@@ -20561,7 +20561,7 @@
         </p:nvSpPr>
         <p:spPr>
           <a:xfrm>
-            <a:off x="749808" y="3282696"/>
+            <a:off x="749808" y="3575304"/>
             <a:ext cx="3188208" cy="310896"/>
           </a:xfrm>
           <a:prstGeom prst="rect">
@@ -20600,8 +20600,8 @@
         </p:nvSpPr>
         <p:spPr>
           <a:xfrm>
-            <a:off x="749808" y="3593592"/>
-            <a:ext cx="3188208" cy="658368"/>
+            <a:off x="749808" y="3886200"/>
+            <a:ext cx="3188208" cy="950976"/>
           </a:xfrm>
           <a:prstGeom prst="rect">
             <a:avLst/>
@@ -20642,12 +20642,12 @@
         </p:nvSpPr>
         <p:spPr>
           <a:xfrm>
-            <a:off x="4322064" y="3172968"/>
-            <a:ext cx="3553968" cy="1188720"/>
+            <a:off x="4322064" y="3465576"/>
+            <a:ext cx="3553968" cy="1481328"/>
           </a:xfrm>
           <a:prstGeom prst="roundRect">
             <a:avLst>
-              <a:gd name="adj" fmla="val 7692"/>
+              <a:gd name="adj" fmla="val 6173"/>
             </a:avLst>
           </a:prstGeom>
           <a:solidFill>
@@ -20669,7 +20669,7 @@
         </p:nvSpPr>
         <p:spPr>
           <a:xfrm>
-            <a:off x="4504944" y="3282696"/>
+            <a:off x="4504944" y="3575304"/>
             <a:ext cx="3188208" cy="310896"/>
           </a:xfrm>
           <a:prstGeom prst="rect">
@@ -20708,8 +20708,8 @@
         </p:nvSpPr>
         <p:spPr>
           <a:xfrm>
-            <a:off x="4504944" y="3593592"/>
-            <a:ext cx="3188208" cy="658368"/>
+            <a:off x="4504944" y="3886200"/>
+            <a:ext cx="3188208" cy="950976"/>
           </a:xfrm>
           <a:prstGeom prst="rect">
             <a:avLst/>
@@ -20750,12 +20750,12 @@
         </p:nvSpPr>
         <p:spPr>
           <a:xfrm>
-            <a:off x="8077200" y="3172968"/>
-            <a:ext cx="3553968" cy="1188720"/>
+            <a:off x="8077200" y="3465576"/>
+            <a:ext cx="3553968" cy="1481328"/>
           </a:xfrm>
           <a:prstGeom prst="roundRect">
             <a:avLst>
-              <a:gd name="adj" fmla="val 7692"/>
+              <a:gd name="adj" fmla="val 6173"/>
             </a:avLst>
           </a:prstGeom>
           <a:solidFill>
@@ -20777,7 +20777,7 @@
         </p:nvSpPr>
         <p:spPr>
           <a:xfrm>
-            <a:off x="8260080" y="3282696"/>
+            <a:off x="8260080" y="3575304"/>
             <a:ext cx="3188208" cy="310896"/>
           </a:xfrm>
           <a:prstGeom prst="rect">
@@ -20816,8 +20816,8 @@
         </p:nvSpPr>
         <p:spPr>
           <a:xfrm>
-            <a:off x="8260080" y="3593592"/>
-            <a:ext cx="3188208" cy="658368"/>
+            <a:off x="8260080" y="3886200"/>
+            <a:ext cx="3188208" cy="950976"/>
           </a:xfrm>
           <a:prstGeom prst="rect">
             <a:avLst/>
@@ -20858,7 +20858,7 @@
         </p:nvSpPr>
         <p:spPr>
           <a:xfrm>
-            <a:off x="566928" y="4526280"/>
+            <a:off x="566928" y="5138928"/>
             <a:ext cx="11064240" cy="777240"/>
           </a:xfrm>
           <a:prstGeom prst="roundRect">
@@ -20885,7 +20885,7 @@
         </p:nvSpPr>
         <p:spPr>
           <a:xfrm>
-            <a:off x="786384" y="4672584"/>
+            <a:off x="786384" y="5285232"/>
             <a:ext cx="10625328" cy="484632"/>
           </a:xfrm>
           <a:prstGeom prst="rect">

--- a/docs/decks/L10.pptx
+++ b/docs/decks/L10.pptx
@@ -31,9 +31,10 @@
     <p:sldId id="279" r:id="rId25"/>
     <p:sldId id="280" r:id="rId26"/>
     <p:sldId id="281" r:id="rId27"/>
+    <p:sldId id="282" r:id="rId28"/>
   </p:sldIdLst>
   <p:notesMasterIdLst>
-    <p:notesMasterId r:id="rId28"/>
+    <p:notesMasterId r:id="rId29"/>
   </p:notesMasterIdLst>
   <p:sldSz cx="12192000" cy="6858000"/>
   <p:notesSz cx="6858000" cy="12192000"/>
@@ -2135,6 +2136,94 @@
             <a:fld id="{F7021451-1387-4CA6-816F-3879F97B5CBC}" type="slidenum">
               <a:rPr lang="en-US"/>
               <a:t>26</a:t>
+            </a:fld>
+            <a:endParaRPr lang="en-US"/>
+          </a:p>
+        </p:txBody>
+      </p:sp>
+    </p:spTree>
+    <p:extLst>
+      <p:ext uri="{BB962C8B-B14F-4D97-AF65-F5344CB8AC3E}">
+        <p14:creationId xmlns:p14="http://schemas.microsoft.com/office/powerpoint/2010/main" val="1024086991"/>
+      </p:ext>
+    </p:extLst>
+  </p:cSld>
+  <p:clrMapOvr>
+    <a:masterClrMapping/>
+  </p:clrMapOvr>
+</p:notes>
+</file>
+
+<file path=ppt/notesSlides/notesSlide27.xml><?xml version="1.0" encoding="utf-8"?>
+<p:notes xmlns:a="http://schemas.openxmlformats.org/drawingml/2006/main" xmlns:r="http://schemas.openxmlformats.org/officeDocument/2006/relationships" xmlns:p="http://schemas.openxmlformats.org/presentationml/2006/main">
+  <p:cSld>
+    <p:spTree>
+      <p:nvGrpSpPr>
+        <p:cNvPr id="1" name=""/>
+        <p:cNvGrpSpPr/>
+        <p:nvPr/>
+      </p:nvGrpSpPr>
+      <p:grpSpPr>
+        <a:xfrm>
+          <a:off x="0" y="0"/>
+          <a:ext cx="0" cy="0"/>
+          <a:chOff x="0" y="0"/>
+          <a:chExt cx="0" cy="0"/>
+        </a:xfrm>
+      </p:grpSpPr>
+      <p:sp>
+        <p:nvSpPr>
+          <p:cNvPr id="2" name="Slide Image Placeholder 1"/>
+          <p:cNvSpPr>
+            <a:spLocks noGrp="1" noRot="1" noChangeAspect="1"/>
+          </p:cNvSpPr>
+          <p:nvPr>
+            <p:ph type="sldImg"/>
+          </p:nvPr>
+        </p:nvSpPr>
+        <p:spPr/>
+      </p:sp>
+      <p:sp>
+        <p:nvSpPr>
+          <p:cNvPr id="3" name="Notes Placeholder 2"/>
+          <p:cNvSpPr>
+            <a:spLocks noGrp="1"/>
+          </p:cNvSpPr>
+          <p:nvPr>
+            <p:ph type="body" idx="1"/>
+          </p:nvPr>
+        </p:nvSpPr>
+        <p:spPr/>
+        <p:txBody>
+          <a:bodyPr/>
+          <a:lstStyle/>
+          <a:p>
+            <a:r>
+              <a:rPr lang="en-US" dirty="0"/>
+              <a:t/>
+            </a:r>
+            <a:endParaRPr lang="en-US" dirty="0"/>
+          </a:p>
+        </p:txBody>
+      </p:sp>
+      <p:sp>
+        <p:nvSpPr>
+          <p:cNvPr id="4" name="Slide Number Placeholder 3"/>
+          <p:cNvSpPr>
+            <a:spLocks noGrp="1"/>
+          </p:cNvSpPr>
+          <p:nvPr>
+            <p:ph type="sldNum" sz="quarter" idx="10"/>
+          </p:nvPr>
+        </p:nvSpPr>
+        <p:spPr/>
+        <p:txBody>
+          <a:bodyPr/>
+          <a:lstStyle/>
+          <a:p>
+            <a:fld id="{F7021451-1387-4CA6-816F-3879F97B5CBC}" type="slidenum">
+              <a:rPr lang="en-US"/>
+              <a:t>27</a:t>
             </a:fld>
             <a:endParaRPr lang="en-US"/>
           </a:p>
@@ -18259,6 +18348,109 @@
 </p:sld>
 </file>
 
+<file path=ppt/slides/slide27.xml><?xml version="1.0" encoding="utf-8"?>
+<p:sld xmlns:a="http://schemas.openxmlformats.org/drawingml/2006/main" xmlns:r="http://schemas.openxmlformats.org/officeDocument/2006/relationships" xmlns:p="http://schemas.openxmlformats.org/presentationml/2006/main">
+  <p:cSld name="Slide 27">
+    <p:spTree>
+      <p:nvGrpSpPr>
+        <p:cNvPr id="1" name=""/>
+        <p:cNvGrpSpPr/>
+        <p:nvPr/>
+      </p:nvGrpSpPr>
+      <p:grpSpPr>
+        <a:xfrm>
+          <a:off x="0" y="0"/>
+          <a:ext cx="0" cy="0"/>
+          <a:chOff x="0" y="0"/>
+          <a:chExt cx="0" cy="0"/>
+        </a:xfrm>
+      </p:grpSpPr>
+      <p:sp>
+        <p:nvSpPr>
+          <p:cNvPr id="2" name="Text 0"/>
+          <p:cNvSpPr/>
+          <p:nvPr/>
+        </p:nvSpPr>
+        <p:spPr>
+          <a:xfrm>
+            <a:off x="566928" y="384048"/>
+            <a:ext cx="5486400" cy="274320"/>
+          </a:xfrm>
+          <a:prstGeom prst="rect">
+            <a:avLst/>
+          </a:prstGeom>
+          <a:noFill/>
+          <a:ln/>
+        </p:spPr>
+        <p:txBody>
+          <a:bodyPr wrap="square" lIns="0" tIns="0" rIns="0" bIns="0" rtlCol="0" anchor="ctr"/>
+          <a:lstStyle/>
+          <a:p>
+            <a:pPr indent="0" marL="0">
+              <a:buNone/>
+            </a:pPr>
+            <a:r>
+              <a:rPr lang="en-US" sz="1200" b="1" spc="400" kern="0" dirty="0">
+                <a:solidFill>
+                  <a:srgbClr val="FFFFFF"/>
+                </a:solidFill>
+                <a:latin typeface="Montserrat" pitchFamily="34" charset="0"/>
+                <a:ea typeface="Montserrat" pitchFamily="34" charset="-122"/>
+                <a:cs typeface="Montserrat" pitchFamily="34" charset="-120"/>
+              </a:rPr>
+              <a:t>NEOVERSITY</a:t>
+            </a:r>
+            <a:endParaRPr lang="en-US" sz="1200" dirty="0"/>
+          </a:p>
+        </p:txBody>
+      </p:sp>
+      <p:sp>
+        <p:nvSpPr>
+          <p:cNvPr id="3" name="Text 1"/>
+          <p:cNvSpPr/>
+          <p:nvPr/>
+        </p:nvSpPr>
+        <p:spPr>
+          <a:xfrm>
+            <a:off x="566928" y="2834640"/>
+            <a:ext cx="11064240" cy="1463040"/>
+          </a:xfrm>
+          <a:prstGeom prst="rect">
+            <a:avLst/>
+          </a:prstGeom>
+          <a:noFill/>
+          <a:ln/>
+        </p:spPr>
+        <p:txBody>
+          <a:bodyPr wrap="square" lIns="0" tIns="0" rIns="0" bIns="0" rtlCol="0" anchor="ctr"/>
+          <a:lstStyle/>
+          <a:p>
+            <a:pPr indent="0" marL="0">
+              <a:buNone/>
+            </a:pPr>
+            <a:r>
+              <a:rPr lang="en-US" sz="7300" dirty="0">
+                <a:solidFill>
+                  <a:srgbClr val="FFFFFF"/>
+                </a:solidFill>
+                <a:latin typeface="Unbounded" pitchFamily="34" charset="0"/>
+                <a:ea typeface="Unbounded" pitchFamily="34" charset="-122"/>
+                <a:cs typeface="Unbounded" pitchFamily="34" charset="-120"/>
+              </a:rPr>
+              <a:t>ДЯКУЮ</a:t>
+            </a:r>
+            <a:endParaRPr lang="en-US" sz="7300" dirty="0"/>
+          </a:p>
+        </p:txBody>
+      </p:sp>
+    </p:spTree>
+  </p:cSld>
+  <p:clrMapOvr>
+    <a:masterClrMapping/>
+  </p:clrMapOvr>
+</p:sld>
+</file>
+
 <file path=ppt/slides/slide3.xml><?xml version="1.0" encoding="utf-8"?>
 <p:sld xmlns:a="http://schemas.openxmlformats.org/drawingml/2006/main" xmlns:r="http://schemas.openxmlformats.org/officeDocument/2006/relationships" xmlns:p="http://schemas.openxmlformats.org/presentationml/2006/main">
   <p:cSld name="Slide 3">

--- a/docs/decks/L10.pptx
+++ b/docs/decks/L10.pptx
@@ -5101,7 +5101,7 @@
                       <a:tailEnd type="none" w="med" len="med"/>
                     </a:lnB>
                     <a:solidFill>
-                      <a:srgbClr val="000000"/>
+                      <a:srgbClr val="5A05F4"/>
                     </a:solidFill>
                   </a:tcPr>
                 </a:tc>
@@ -5169,7 +5169,7 @@
                       <a:tailEnd type="none" w="med" len="med"/>
                     </a:lnB>
                     <a:solidFill>
-                      <a:srgbClr val="000000"/>
+                      <a:srgbClr val="5A05F4"/>
                     </a:solidFill>
                   </a:tcPr>
                 </a:tc>
@@ -5237,7 +5237,7 @@
                       <a:tailEnd type="none" w="med" len="med"/>
                     </a:lnB>
                     <a:solidFill>
-                      <a:srgbClr val="000000"/>
+                      <a:srgbClr val="5A05F4"/>
                     </a:solidFill>
                   </a:tcPr>
                 </a:tc>
@@ -5254,7 +5254,7 @@
                       <a:r>
                         <a:rPr lang="en-US" sz="1150" b="1" dirty="0">
                           <a:solidFill>
-                            <a:srgbClr val="A98BFF"/>
+                            <a:srgbClr val="5A05F4"/>
                           </a:solidFill>
                           <a:latin typeface="Montserrat" pitchFamily="34" charset="0"/>
                           <a:ea typeface="Montserrat" pitchFamily="34" charset="-122"/>
@@ -5307,7 +5307,7 @@
                       <a:tailEnd type="none" w="med" len="med"/>
                     </a:lnB>
                     <a:solidFill>
-                      <a:srgbClr val="000000"/>
+                      <a:srgbClr val="F5F3FA"/>
                     </a:solidFill>
                   </a:tcPr>
                 </a:tc>
@@ -5322,7 +5322,7 @@
                       <a:r>
                         <a:rPr lang="en-US" sz="1150" dirty="0">
                           <a:solidFill>
-                            <a:srgbClr val="A98BFF"/>
+                            <a:srgbClr val="5A05F4"/>
                           </a:solidFill>
                           <a:latin typeface="Montserrat" pitchFamily="34" charset="0"/>
                           <a:ea typeface="Montserrat" pitchFamily="34" charset="-122"/>
@@ -5375,7 +5375,7 @@
                       <a:tailEnd type="none" w="med" len="med"/>
                     </a:lnB>
                     <a:solidFill>
-                      <a:srgbClr val="000000"/>
+                      <a:srgbClr val="F5F3FA"/>
                     </a:solidFill>
                   </a:tcPr>
                 </a:tc>
@@ -5390,7 +5390,7 @@
                       <a:r>
                         <a:rPr lang="en-US" sz="1150" dirty="0">
                           <a:solidFill>
-                            <a:srgbClr val="A98BFF"/>
+                            <a:srgbClr val="5A05F4"/>
                           </a:solidFill>
                           <a:latin typeface="Montserrat" pitchFamily="34" charset="0"/>
                           <a:ea typeface="Montserrat" pitchFamily="34" charset="-122"/>
@@ -5443,7 +5443,7 @@
                       <a:tailEnd type="none" w="med" len="med"/>
                     </a:lnB>
                     <a:solidFill>
-                      <a:srgbClr val="000000"/>
+                      <a:srgbClr val="F5F3FA"/>
                     </a:solidFill>
                   </a:tcPr>
                 </a:tc>
@@ -5460,7 +5460,7 @@
                       <a:r>
                         <a:rPr lang="en-US" sz="1150" b="1" dirty="0">
                           <a:solidFill>
-                            <a:srgbClr val="3FCF8E"/>
+                            <a:srgbClr val="106B41"/>
                           </a:solidFill>
                           <a:latin typeface="Montserrat" pitchFamily="34" charset="0"/>
                           <a:ea typeface="Montserrat" pitchFamily="34" charset="-122"/>
@@ -5513,7 +5513,7 @@
                       <a:tailEnd type="none" w="med" len="med"/>
                     </a:lnB>
                     <a:solidFill>
-                      <a:srgbClr val="000000"/>
+                      <a:srgbClr val="F5F3FA"/>
                     </a:solidFill>
                   </a:tcPr>
                 </a:tc>
@@ -5528,7 +5528,7 @@
                       <a:r>
                         <a:rPr lang="en-US" sz="1150" dirty="0">
                           <a:solidFill>
-                            <a:srgbClr val="3FCF8E"/>
+                            <a:srgbClr val="106B41"/>
                           </a:solidFill>
                           <a:latin typeface="Montserrat" pitchFamily="34" charset="0"/>
                           <a:ea typeface="Montserrat" pitchFamily="34" charset="-122"/>
@@ -5581,7 +5581,7 @@
                       <a:tailEnd type="none" w="med" len="med"/>
                     </a:lnB>
                     <a:solidFill>
-                      <a:srgbClr val="000000"/>
+                      <a:srgbClr val="F5F3FA"/>
                     </a:solidFill>
                   </a:tcPr>
                 </a:tc>
@@ -5596,7 +5596,7 @@
                       <a:r>
                         <a:rPr lang="en-US" sz="1150" dirty="0">
                           <a:solidFill>
-                            <a:srgbClr val="3FCF8E"/>
+                            <a:srgbClr val="106B41"/>
                           </a:solidFill>
                           <a:latin typeface="Montserrat" pitchFamily="34" charset="0"/>
                           <a:ea typeface="Montserrat" pitchFamily="34" charset="-122"/>
@@ -5649,7 +5649,7 @@
                       <a:tailEnd type="none" w="med" len="med"/>
                     </a:lnB>
                     <a:solidFill>
-                      <a:srgbClr val="000000"/>
+                      <a:srgbClr val="F5F3FA"/>
                     </a:solidFill>
                   </a:tcPr>
                 </a:tc>

--- a/docs/decks/L10.pptx
+++ b/docs/decks/L10.pptx
@@ -5254,7 +5254,7 @@
                       <a:r>
                         <a:rPr lang="en-US" sz="1150" b="1" dirty="0">
                           <a:solidFill>
-                            <a:srgbClr val="5A05F4"/>
+                            <a:srgbClr val="000000"/>
                           </a:solidFill>
                           <a:latin typeface="Montserrat" pitchFamily="34" charset="0"/>
                           <a:ea typeface="Montserrat" pitchFamily="34" charset="-122"/>
@@ -5307,7 +5307,7 @@
                       <a:tailEnd type="none" w="med" len="med"/>
                     </a:lnB>
                     <a:solidFill>
-                      <a:srgbClr val="F5F3FA"/>
+                      <a:srgbClr val="FFFFFF"/>
                     </a:solidFill>
                   </a:tcPr>
                 </a:tc>
@@ -5322,7 +5322,7 @@
                       <a:r>
                         <a:rPr lang="en-US" sz="1150" dirty="0">
                           <a:solidFill>
-                            <a:srgbClr val="5A05F4"/>
+                            <a:srgbClr val="000000"/>
                           </a:solidFill>
                           <a:latin typeface="Montserrat" pitchFamily="34" charset="0"/>
                           <a:ea typeface="Montserrat" pitchFamily="34" charset="-122"/>
@@ -5375,7 +5375,7 @@
                       <a:tailEnd type="none" w="med" len="med"/>
                     </a:lnB>
                     <a:solidFill>
-                      <a:srgbClr val="F5F3FA"/>
+                      <a:srgbClr val="FFFFFF"/>
                     </a:solidFill>
                   </a:tcPr>
                 </a:tc>
@@ -5390,7 +5390,7 @@
                       <a:r>
                         <a:rPr lang="en-US" sz="1150" dirty="0">
                           <a:solidFill>
-                            <a:srgbClr val="5A05F4"/>
+                            <a:srgbClr val="000000"/>
                           </a:solidFill>
                           <a:latin typeface="Montserrat" pitchFamily="34" charset="0"/>
                           <a:ea typeface="Montserrat" pitchFamily="34" charset="-122"/>
@@ -5443,7 +5443,7 @@
                       <a:tailEnd type="none" w="med" len="med"/>
                     </a:lnB>
                     <a:solidFill>
-                      <a:srgbClr val="F5F3FA"/>
+                      <a:srgbClr val="FFFFFF"/>
                     </a:solidFill>
                   </a:tcPr>
                 </a:tc>
@@ -5460,7 +5460,7 @@
                       <a:r>
                         <a:rPr lang="en-US" sz="1150" b="1" dirty="0">
                           <a:solidFill>
-                            <a:srgbClr val="106B41"/>
+                            <a:srgbClr val="000000"/>
                           </a:solidFill>
                           <a:latin typeface="Montserrat" pitchFamily="34" charset="0"/>
                           <a:ea typeface="Montserrat" pitchFamily="34" charset="-122"/>
@@ -5513,7 +5513,7 @@
                       <a:tailEnd type="none" w="med" len="med"/>
                     </a:lnB>
                     <a:solidFill>
-                      <a:srgbClr val="F5F3FA"/>
+                      <a:srgbClr val="FFFFFF"/>
                     </a:solidFill>
                   </a:tcPr>
                 </a:tc>
@@ -5528,7 +5528,7 @@
                       <a:r>
                         <a:rPr lang="en-US" sz="1150" dirty="0">
                           <a:solidFill>
-                            <a:srgbClr val="106B41"/>
+                            <a:srgbClr val="000000"/>
                           </a:solidFill>
                           <a:latin typeface="Montserrat" pitchFamily="34" charset="0"/>
                           <a:ea typeface="Montserrat" pitchFamily="34" charset="-122"/>
@@ -5581,7 +5581,7 @@
                       <a:tailEnd type="none" w="med" len="med"/>
                     </a:lnB>
                     <a:solidFill>
-                      <a:srgbClr val="F5F3FA"/>
+                      <a:srgbClr val="FFFFFF"/>
                     </a:solidFill>
                   </a:tcPr>
                 </a:tc>
@@ -5596,7 +5596,7 @@
                       <a:r>
                         <a:rPr lang="en-US" sz="1150" dirty="0">
                           <a:solidFill>
-                            <a:srgbClr val="106B41"/>
+                            <a:srgbClr val="000000"/>
                           </a:solidFill>
                           <a:latin typeface="Montserrat" pitchFamily="34" charset="0"/>
                           <a:ea typeface="Montserrat" pitchFamily="34" charset="-122"/>
@@ -5649,7 +5649,7 @@
                       <a:tailEnd type="none" w="med" len="med"/>
                     </a:lnB>
                     <a:solidFill>
-                      <a:srgbClr val="F5F3FA"/>
+                      <a:srgbClr val="FFFFFF"/>
                     </a:solidFill>
                   </a:tcPr>
                 </a:tc>

--- a/docs/decks/L10.pptx
+++ b/docs/decks/L10.pptx
@@ -5042,7 +5042,7 @@
                     <a:bodyPr/>
                     <a:lstStyle/>
                     <a:p>
-                      <a:pPr indent="0" marL="0">
+                      <a:pPr algn="ctr" indent="0" marL="0">
                         <a:buNone/>
                       </a:pPr>
                       <a:r>
@@ -5110,7 +5110,7 @@
                     <a:bodyPr/>
                     <a:lstStyle/>
                     <a:p>
-                      <a:pPr indent="0" marL="0">
+                      <a:pPr algn="ctr" indent="0" marL="0">
                         <a:buNone/>
                       </a:pPr>
                       <a:r>
@@ -5178,7 +5178,7 @@
                     <a:bodyPr/>
                     <a:lstStyle/>
                     <a:p>
-                      <a:pPr indent="0" marL="0">
+                      <a:pPr algn="ctr" indent="0" marL="0">
                         <a:buNone/>
                       </a:pPr>
                       <a:r>

--- a/docs/decks/L10.pptx
+++ b/docs/decks/L10.pptx
@@ -4,6 +4,9 @@
   <p:sldMasterIdLst>
     <p:sldMasterId id="2147483648" r:id="rId1"/>
   </p:sldMasterIdLst>
+  <p:notesMasterIdLst>
+    <p:notesMasterId r:id="rId29"/>
+  </p:notesMasterIdLst>
   <p:sldIdLst>
     <p:sldId id="256" r:id="rId2"/>
     <p:sldId id="257" r:id="rId3"/>
@@ -33,9 +36,6 @@
     <p:sldId id="281" r:id="rId27"/>
     <p:sldId id="282" r:id="rId28"/>
   </p:sldIdLst>
-  <p:notesMasterIdLst>
-    <p:notesMasterId r:id="rId29"/>
-  </p:notesMasterIdLst>
   <p:sldSz cx="12192000" cy="6858000"/>
   <p:notesSz cx="6858000" cy="12192000"/>
   <p:defaultTextStyle>
@@ -130,6 +130,11 @@
       </a:defRPr>
     </a:lvl9pPr>
   </p:defaultTextStyle>
+  <p:extLst>
+    <p:ext uri="{EFAFB233-063F-42B5-8137-9DF3F51BA10A}">
+      <p15:sldGuideLst xmlns:p15="http://schemas.microsoft.com/office/powerpoint/2012/main"/>
+    </p:ext>
+  </p:extLst>
 </p:presentation>
 </file>
 
@@ -155,234 +160,10 @@
           <a:chExt cx="0" cy="0"/>
         </a:xfrm>
       </p:grpSpPr>
-      <p:sp>
-        <p:nvSpPr>
-          <p:cNvPr id="2" name="Header Placeholder 1"/>
-          <p:cNvSpPr>
-            <a:spLocks noGrp="1"/>
-          </p:cNvSpPr>
-          <p:nvPr>
-            <p:ph type="hdr" sz="quarter"/>
-          </p:nvPr>
-        </p:nvSpPr>
-        <p:spPr>
-          <a:xfrm>
-            <a:off x="0" y="0"/>
-            <a:ext cx="2971800" cy="458788"/>
-          </a:xfrm>
-          <a:prstGeom prst="rect">
-            <a:avLst/>
-          </a:prstGeom>
-        </p:spPr>
-        <p:txBody>
-          <a:bodyPr vert="horz" lIns="91440" tIns="45720" rIns="91440" bIns="45720" rtlCol="0"/>
-          <a:lstStyle>
-            <a:lvl1pPr algn="l">
-              <a:defRPr sz="1200"/>
-            </a:lvl1pPr>
-          </a:lstStyle>
-          <a:p>
-            <a:endParaRPr lang="en-US"/>
-          </a:p>
-        </p:txBody>
-      </p:sp>
-      <p:sp>
-        <p:nvSpPr>
-          <p:cNvPr id="3" name="Date Placeholder 2"/>
-          <p:cNvSpPr>
-            <a:spLocks noGrp="1"/>
-          </p:cNvSpPr>
-          <p:nvPr>
-            <p:ph type="dt" idx="1"/>
-          </p:nvPr>
-        </p:nvSpPr>
-        <p:spPr>
-          <a:xfrm>
-            <a:off x="3884613" y="0"/>
-            <a:ext cx="2971800" cy="458788"/>
-          </a:xfrm>
-          <a:prstGeom prst="rect">
-            <a:avLst/>
-          </a:prstGeom>
-        </p:spPr>
-        <p:txBody>
-          <a:bodyPr vert="horz" lIns="91440" tIns="45720" rIns="91440" bIns="45720" rtlCol="0"/>
-          <a:lstStyle>
-            <a:lvl1pPr algn="r">
-              <a:defRPr sz="1200"/>
-            </a:lvl1pPr>
-          </a:lstStyle>
-          <a:p>
-            <a:fld id="{5282F153-3F37-0F45-9E97-73ACFA13230C}" type="datetimeFigureOut">
-              <a:rPr lang="en-US"/>
-              <a:t>7/23/19</a:t>
-            </a:fld>
-            <a:endParaRPr lang="en-US"/>
-          </a:p>
-        </p:txBody>
-      </p:sp>
-      <p:sp>
-        <p:nvSpPr>
-          <p:cNvPr id="4" name="Slide Image Placeholder 3"/>
-          <p:cNvSpPr>
-            <a:spLocks noGrp="1" noRot="1" noChangeAspect="1"/>
-          </p:cNvSpPr>
-          <p:nvPr>
-            <p:ph type="sldImg" idx="2"/>
-          </p:nvPr>
-        </p:nvSpPr>
-        <p:spPr>
-          <a:xfrm>
-            <a:off x="685800" y="1143000"/>
-            <a:ext cx="5486400" cy="3086100"/>
-          </a:xfrm>
-          <a:prstGeom prst="rect">
-            <a:avLst/>
-          </a:prstGeom>
-          <a:noFill/>
-          <a:ln w="12700">
-            <a:solidFill>
-              <a:prstClr val="black"/>
-            </a:solidFill>
-          </a:ln>
-        </p:spPr>
-        <p:txBody>
-          <a:bodyPr vert="horz" lIns="91440" tIns="45720" rIns="91440" bIns="45720" rtlCol="0" anchor="ctr"/>
-          <a:lstStyle/>
-          <a:p>
-            <a:endParaRPr lang="en-US"/>
-          </a:p>
-        </p:txBody>
-      </p:sp>
-      <p:sp>
-        <p:nvSpPr>
-          <p:cNvPr id="5" name="Notes Placeholder 4"/>
-          <p:cNvSpPr>
-            <a:spLocks noGrp="1"/>
-          </p:cNvSpPr>
-          <p:nvPr>
-            <p:ph type="body" sz="quarter" idx="3"/>
-          </p:nvPr>
-        </p:nvSpPr>
-        <p:spPr>
-          <a:xfrm>
-            <a:off x="685800" y="4400550"/>
-            <a:ext cx="5486400" cy="3600450"/>
-          </a:xfrm>
-          <a:prstGeom prst="rect">
-            <a:avLst/>
-          </a:prstGeom>
-        </p:spPr>
-        <p:txBody>
-          <a:bodyPr vert="horz" lIns="91440" tIns="45720" rIns="91440" bIns="45720" rtlCol="0"/>
-          <a:lstStyle/>
-          <a:p>
-            <a:pPr lvl="0"/>
-            <a:r>
-              <a:rPr lang="en-US"/>
-              <a:t>Click to edit Master text styles</a:t>
-            </a:r>
-          </a:p>
-          <a:p>
-            <a:pPr lvl="1"/>
-            <a:r>
-              <a:rPr lang="en-US"/>
-              <a:t>Second level</a:t>
-            </a:r>
-          </a:p>
-          <a:p>
-            <a:pPr lvl="2"/>
-            <a:r>
-              <a:rPr lang="en-US"/>
-              <a:t>Third level</a:t>
-            </a:r>
-          </a:p>
-          <a:p>
-            <a:pPr lvl="3"/>
-            <a:r>
-              <a:rPr lang="en-US"/>
-              <a:t>Fourth level</a:t>
-            </a:r>
-          </a:p>
-          <a:p>
-            <a:pPr lvl="4"/>
-            <a:r>
-              <a:rPr lang="en-US"/>
-              <a:t>Fifth level</a:t>
-            </a:r>
-          </a:p>
-        </p:txBody>
-      </p:sp>
-      <p:sp>
-        <p:nvSpPr>
-          <p:cNvPr id="6" name="Footer Placeholder 5"/>
-          <p:cNvSpPr>
-            <a:spLocks noGrp="1"/>
-          </p:cNvSpPr>
-          <p:nvPr>
-            <p:ph type="ftr" sz="quarter" idx="4"/>
-          </p:nvPr>
-        </p:nvSpPr>
-        <p:spPr>
-          <a:xfrm>
-            <a:off x="0" y="8685213"/>
-            <a:ext cx="2971800" cy="458787"/>
-          </a:xfrm>
-          <a:prstGeom prst="rect">
-            <a:avLst/>
-          </a:prstGeom>
-        </p:spPr>
-        <p:txBody>
-          <a:bodyPr vert="horz" lIns="91440" tIns="45720" rIns="91440" bIns="45720" rtlCol="0" anchor="b"/>
-          <a:lstStyle>
-            <a:lvl1pPr algn="l">
-              <a:defRPr sz="1200"/>
-            </a:lvl1pPr>
-          </a:lstStyle>
-          <a:p>
-            <a:endParaRPr lang="en-US"/>
-          </a:p>
-        </p:txBody>
-      </p:sp>
-      <p:sp>
-        <p:nvSpPr>
-          <p:cNvPr id="7" name="Slide Number Placeholder 6"/>
-          <p:cNvSpPr>
-            <a:spLocks noGrp="1"/>
-          </p:cNvSpPr>
-          <p:nvPr>
-            <p:ph type="sldNum" sz="quarter" idx="5"/>
-          </p:nvPr>
-        </p:nvSpPr>
-        <p:spPr>
-          <a:xfrm>
-            <a:off x="3884613" y="8685213"/>
-            <a:ext cx="2971800" cy="458787"/>
-          </a:xfrm>
-          <a:prstGeom prst="rect">
-            <a:avLst/>
-          </a:prstGeom>
-        </p:spPr>
-        <p:txBody>
-          <a:bodyPr vert="horz" lIns="91440" tIns="45720" rIns="91440" bIns="45720" rtlCol="0" anchor="b"/>
-          <a:lstStyle>
-            <a:lvl1pPr algn="r">
-              <a:defRPr sz="1200"/>
-            </a:lvl1pPr>
-          </a:lstStyle>
-          <a:p>
-            <a:fld id="{CE5E9CC1-C706-0F49-92D6-E571CC5EEA8F}" type="slidenum">
-              <a:rPr lang="en-US"/>
-              <a:t>‹#›</a:t>
-            </a:fld>
-            <a:endParaRPr lang="en-US"/>
-          </a:p>
-        </p:txBody>
-      </p:sp>
     </p:spTree>
     <p:extLst>
       <p:ext uri="{BB962C8B-B14F-4D97-AF65-F5344CB8AC3E}">
-        <p14:creationId xmlns:p14="http://schemas.microsoft.com/office/powerpoint/2010/main" val="1024086991"/>
+        <p14:creationId xmlns:p14="http://schemas.microsoft.com/office/powerpoint/2010/main" val="791583179"/>
       </p:ext>
     </p:extLst>
   </p:cSld>
@@ -526,10 +307,6 @@
           <a:bodyPr/>
           <a:lstStyle/>
           <a:p>
-            <a:r>
-              <a:rPr lang="en-US" dirty="0"/>
-              <a:t/>
-            </a:r>
             <a:endParaRPr lang="en-US" dirty="0"/>
           </a:p>
         </p:txBody>
@@ -614,10 +391,6 @@
           <a:bodyPr/>
           <a:lstStyle/>
           <a:p>
-            <a:r>
-              <a:rPr lang="en-US" dirty="0"/>
-              <a:t/>
-            </a:r>
             <a:endParaRPr lang="en-US" dirty="0"/>
           </a:p>
         </p:txBody>
@@ -702,10 +475,6 @@
           <a:bodyPr/>
           <a:lstStyle/>
           <a:p>
-            <a:r>
-              <a:rPr lang="en-US" dirty="0"/>
-              <a:t/>
-            </a:r>
             <a:endParaRPr lang="en-US" dirty="0"/>
           </a:p>
         </p:txBody>
@@ -790,10 +559,6 @@
           <a:bodyPr/>
           <a:lstStyle/>
           <a:p>
-            <a:r>
-              <a:rPr lang="en-US" dirty="0"/>
-              <a:t/>
-            </a:r>
             <a:endParaRPr lang="en-US" dirty="0"/>
           </a:p>
         </p:txBody>
@@ -878,10 +643,6 @@
           <a:bodyPr/>
           <a:lstStyle/>
           <a:p>
-            <a:r>
-              <a:rPr lang="en-US" dirty="0"/>
-              <a:t/>
-            </a:r>
             <a:endParaRPr lang="en-US" dirty="0"/>
           </a:p>
         </p:txBody>
@@ -966,10 +727,6 @@
           <a:bodyPr/>
           <a:lstStyle/>
           <a:p>
-            <a:r>
-              <a:rPr lang="en-US" dirty="0"/>
-              <a:t/>
-            </a:r>
             <a:endParaRPr lang="en-US" dirty="0"/>
           </a:p>
         </p:txBody>
@@ -1054,10 +811,6 @@
           <a:bodyPr/>
           <a:lstStyle/>
           <a:p>
-            <a:r>
-              <a:rPr lang="en-US" dirty="0"/>
-              <a:t/>
-            </a:r>
             <a:endParaRPr lang="en-US" dirty="0"/>
           </a:p>
         </p:txBody>
@@ -1142,10 +895,6 @@
           <a:bodyPr/>
           <a:lstStyle/>
           <a:p>
-            <a:r>
-              <a:rPr lang="en-US" dirty="0"/>
-              <a:t/>
-            </a:r>
             <a:endParaRPr lang="en-US" dirty="0"/>
           </a:p>
         </p:txBody>
@@ -1230,10 +979,6 @@
           <a:bodyPr/>
           <a:lstStyle/>
           <a:p>
-            <a:r>
-              <a:rPr lang="en-US" dirty="0"/>
-              <a:t/>
-            </a:r>
             <a:endParaRPr lang="en-US" dirty="0"/>
           </a:p>
         </p:txBody>
@@ -1318,10 +1063,6 @@
           <a:bodyPr/>
           <a:lstStyle/>
           <a:p>
-            <a:r>
-              <a:rPr lang="en-US" dirty="0"/>
-              <a:t/>
-            </a:r>
             <a:endParaRPr lang="en-US" dirty="0"/>
           </a:p>
         </p:txBody>
@@ -1406,10 +1147,6 @@
           <a:bodyPr/>
           <a:lstStyle/>
           <a:p>
-            <a:r>
-              <a:rPr lang="en-US" dirty="0"/>
-              <a:t/>
-            </a:r>
             <a:endParaRPr lang="en-US" dirty="0"/>
           </a:p>
         </p:txBody>
@@ -1494,10 +1231,6 @@
           <a:bodyPr/>
           <a:lstStyle/>
           <a:p>
-            <a:r>
-              <a:rPr lang="en-US" dirty="0"/>
-              <a:t/>
-            </a:r>
             <a:endParaRPr lang="en-US" dirty="0"/>
           </a:p>
         </p:txBody>
@@ -1582,10 +1315,6 @@
           <a:bodyPr/>
           <a:lstStyle/>
           <a:p>
-            <a:r>
-              <a:rPr lang="en-US" dirty="0"/>
-              <a:t/>
-            </a:r>
             <a:endParaRPr lang="en-US" dirty="0"/>
           </a:p>
         </p:txBody>
@@ -1670,10 +1399,6 @@
           <a:bodyPr/>
           <a:lstStyle/>
           <a:p>
-            <a:r>
-              <a:rPr lang="en-US" dirty="0"/>
-              <a:t/>
-            </a:r>
             <a:endParaRPr lang="en-US" dirty="0"/>
           </a:p>
         </p:txBody>
@@ -1758,10 +1483,6 @@
           <a:bodyPr/>
           <a:lstStyle/>
           <a:p>
-            <a:r>
-              <a:rPr lang="en-US" dirty="0"/>
-              <a:t/>
-            </a:r>
             <a:endParaRPr lang="en-US" dirty="0"/>
           </a:p>
         </p:txBody>
@@ -1846,10 +1567,6 @@
           <a:bodyPr/>
           <a:lstStyle/>
           <a:p>
-            <a:r>
-              <a:rPr lang="en-US" dirty="0"/>
-              <a:t/>
-            </a:r>
             <a:endParaRPr lang="en-US" dirty="0"/>
           </a:p>
         </p:txBody>
@@ -1934,10 +1651,6 @@
           <a:bodyPr/>
           <a:lstStyle/>
           <a:p>
-            <a:r>
-              <a:rPr lang="en-US" dirty="0"/>
-              <a:t/>
-            </a:r>
             <a:endParaRPr lang="en-US" dirty="0"/>
           </a:p>
         </p:txBody>
@@ -2022,10 +1735,6 @@
           <a:bodyPr/>
           <a:lstStyle/>
           <a:p>
-            <a:r>
-              <a:rPr lang="en-US" dirty="0"/>
-              <a:t/>
-            </a:r>
             <a:endParaRPr lang="en-US" dirty="0"/>
           </a:p>
         </p:txBody>
@@ -2110,10 +1819,6 @@
           <a:bodyPr/>
           <a:lstStyle/>
           <a:p>
-            <a:r>
-              <a:rPr lang="en-US" dirty="0"/>
-              <a:t/>
-            </a:r>
             <a:endParaRPr lang="en-US" dirty="0"/>
           </a:p>
         </p:txBody>
@@ -2198,10 +1903,6 @@
           <a:bodyPr/>
           <a:lstStyle/>
           <a:p>
-            <a:r>
-              <a:rPr lang="en-US" dirty="0"/>
-              <a:t/>
-            </a:r>
             <a:endParaRPr lang="en-US" dirty="0"/>
           </a:p>
         </p:txBody>
@@ -2286,10 +1987,6 @@
           <a:bodyPr/>
           <a:lstStyle/>
           <a:p>
-            <a:r>
-              <a:rPr lang="en-US" dirty="0"/>
-              <a:t/>
-            </a:r>
             <a:endParaRPr lang="en-US" dirty="0"/>
           </a:p>
         </p:txBody>
@@ -2374,10 +2071,6 @@
           <a:bodyPr/>
           <a:lstStyle/>
           <a:p>
-            <a:r>
-              <a:rPr lang="en-US" dirty="0"/>
-              <a:t/>
-            </a:r>
             <a:endParaRPr lang="en-US" dirty="0"/>
           </a:p>
         </p:txBody>
@@ -2462,10 +2155,6 @@
           <a:bodyPr/>
           <a:lstStyle/>
           <a:p>
-            <a:r>
-              <a:rPr lang="en-US" dirty="0"/>
-              <a:t/>
-            </a:r>
             <a:endParaRPr lang="en-US" dirty="0"/>
           </a:p>
         </p:txBody>
@@ -2550,10 +2239,6 @@
           <a:bodyPr/>
           <a:lstStyle/>
           <a:p>
-            <a:r>
-              <a:rPr lang="en-US" dirty="0"/>
-              <a:t/>
-            </a:r>
             <a:endParaRPr lang="en-US" dirty="0"/>
           </a:p>
         </p:txBody>
@@ -2638,10 +2323,6 @@
           <a:bodyPr/>
           <a:lstStyle/>
           <a:p>
-            <a:r>
-              <a:rPr lang="en-US" dirty="0"/>
-              <a:t/>
-            </a:r>
             <a:endParaRPr lang="en-US" dirty="0"/>
           </a:p>
         </p:txBody>
@@ -2726,10 +2407,6 @@
           <a:bodyPr/>
           <a:lstStyle/>
           <a:p>
-            <a:r>
-              <a:rPr lang="en-US" dirty="0"/>
-              <a:t/>
-            </a:r>
             <a:endParaRPr lang="en-US" dirty="0"/>
           </a:p>
         </p:txBody>
@@ -2814,10 +2491,6 @@
           <a:bodyPr/>
           <a:lstStyle/>
           <a:p>
-            <a:r>
-              <a:rPr lang="en-US" dirty="0"/>
-              <a:t/>
-            </a:r>
             <a:endParaRPr lang="en-US" dirty="0"/>
           </a:p>
         </p:txBody>
@@ -2900,7 +2573,7 @@
           </a:prstGeom>
           <a:extLst>
             <a:ext uri="{C572A759-6A51-4108-AA02-DFA0A04FC94B}">
-              <ma14:wrappingTextBoxFlag xmlns:ma14="http://schemas.microsoft.com/office/mac/drawingml/2011/main" val="0"/>
+              <ma14:wrappingTextBoxFlag xmlns:ma14="http://schemas.microsoft.com/office/mac/drawingml/2011/main" xmlns="" val="0"/>
             </a:ext>
           </a:extLst>
         </p:spPr>
@@ -2921,8 +2594,8 @@
           <a:p>
             <a:pPr algn="l"/>
             <a:fld id="{F7021451-1387-4CA6-816F-3879F97B5CBC}" type="slidenum">
-              <a:rPr b="0" lang="en-US"/>
-              <a:t>1000</a:t>
+              <a:rPr lang="en-US" b="0"/>
+              <a:t>‹#›</a:t>
             </a:fld>
             <a:endParaRPr lang="en-US"/>
           </a:p>
@@ -2944,6 +2617,7 @@
         <a:solidFill>
           <a:srgbClr val="000000"/>
         </a:solidFill>
+        <a:effectLst/>
       </p:bgPr>
     </p:bg>
     <p:spTree>
@@ -2962,14 +2636,14 @@
       </p:grpSpPr>
       <p:pic>
         <p:nvPicPr>
-          <p:cNvPr id="2" name="Image 0" descr="preencoded.png">    </p:cNvPr>
+          <p:cNvPr id="2" name="Image 0" descr="preencoded.png"/>
           <p:cNvPicPr>
             <a:picLocks noChangeAspect="1"/>
           </p:cNvPicPr>
           <p:nvPr/>
         </p:nvPicPr>
         <p:blipFill>
-          <a:blip r:embed="rId1"/>
+          <a:blip r:embed="rId2"/>
           <a:stretch>
             <a:fillRect/>
           </a:stretch>
@@ -3000,6 +2674,7 @@
         <a:solidFill>
           <a:srgbClr val="000000"/>
         </a:solidFill>
+        <a:effectLst/>
       </p:bgPr>
     </p:bg>
     <p:spTree>
@@ -3018,14 +2693,14 @@
       </p:grpSpPr>
       <p:pic>
         <p:nvPicPr>
-          <p:cNvPr id="2" name="Image 0" descr="preencoded.png">    </p:cNvPr>
+          <p:cNvPr id="2" name="Image 0" descr="preencoded.png"/>
           <p:cNvPicPr>
             <a:picLocks noChangeAspect="1"/>
           </p:cNvPicPr>
           <p:nvPr/>
         </p:nvPicPr>
         <p:blipFill>
-          <a:blip r:embed="rId1"/>
+          <a:blip r:embed="rId2"/>
           <a:stretch>
             <a:fillRect/>
           </a:stretch>
@@ -3056,6 +2731,7 @@
         <a:solidFill>
           <a:srgbClr val="000000"/>
         </a:solidFill>
+        <a:effectLst/>
       </p:bgPr>
     </p:bg>
     <p:spTree>
@@ -3074,14 +2750,14 @@
       </p:grpSpPr>
       <p:pic>
         <p:nvPicPr>
-          <p:cNvPr id="2" name="Image 0" descr="preencoded.png">    </p:cNvPr>
+          <p:cNvPr id="2" name="Image 0" descr="preencoded.png"/>
           <p:cNvPicPr>
             <a:picLocks noChangeAspect="1"/>
           </p:cNvPicPr>
           <p:nvPr/>
         </p:nvPicPr>
         <p:blipFill>
-          <a:blip r:embed="rId1"/>
+          <a:blip r:embed="rId2"/>
           <a:stretch>
             <a:fillRect/>
           </a:stretch>
@@ -3107,6 +2783,11 @@
 <file path=ppt/slideMasters/slideMaster1.xml><?xml version="1.0" encoding="utf-8"?>
 <p:sldMaster xmlns:a="http://schemas.openxmlformats.org/drawingml/2006/main" xmlns:r="http://schemas.openxmlformats.org/officeDocument/2006/relationships" xmlns:p="http://schemas.openxmlformats.org/presentationml/2006/main">
   <p:cSld>
+    <p:bg>
+      <p:bgRef idx="1001">
+        <a:schemeClr val="bg1"/>
+      </p:bgRef>
+    </p:bg>
     <p:spTree>
       <p:nvGrpSpPr>
         <p:cNvPr id="1" name=""/>
@@ -3141,7 +2822,7 @@
           </a:prstGeom>
           <a:extLst>
             <a:ext uri="{C572A759-6A51-4108-AA02-DFA0A04FC94B}">
-              <ma14:wrappingTextBoxFlag xmlns:ma14="http://schemas.microsoft.com/office/mac/drawingml/2011/main" val="0"/>
+              <ma14:wrappingTextBoxFlag xmlns:ma14="http://schemas.microsoft.com/office/mac/drawingml/2011/main" xmlns="" val="0"/>
             </a:ext>
           </a:extLst>
         </p:spPr>
@@ -3162,8 +2843,8 @@
           <a:p>
             <a:pPr algn="l"/>
             <a:fld id="{F7021451-1387-4CA6-816F-3879F97B5CBC}" type="slidenum">
-              <a:rPr b="0" lang="en-US"/>
-              <a:t>null</a:t>
+              <a:rPr lang="en-US" b="0"/>
+              <a:t>‹#›</a:t>
             </a:fld>
             <a:endParaRPr lang="en-US"/>
           </a:p>
@@ -3470,11 +3151,11 @@
           <a:bodyPr wrap="square" lIns="0" tIns="0" rIns="0" bIns="0" rtlCol="0" anchor="ctr"/>
           <a:lstStyle/>
           <a:p>
-            <a:pPr indent="0" marL="0">
-              <a:buNone/>
-            </a:pPr>
-            <a:r>
-              <a:rPr lang="en-US" sz="1200" b="1" spc="400" kern="0" dirty="0">
+            <a:pPr marL="0" indent="0">
+              <a:buNone/>
+            </a:pPr>
+            <a:r>
+              <a:rPr lang="en-US" sz="1200" b="1" kern="0" spc="400" dirty="0">
                 <a:solidFill>
                   <a:srgbClr val="FFFFFF"/>
                 </a:solidFill>
@@ -3509,11 +3190,11 @@
           <a:bodyPr wrap="square" lIns="0" tIns="0" rIns="0" bIns="0" rtlCol="0" anchor="ctr"/>
           <a:lstStyle/>
           <a:p>
-            <a:pPr indent="0" marL="0">
-              <a:buNone/>
-            </a:pPr>
-            <a:r>
-              <a:rPr lang="en-US" sz="1200" b="1" spc="300" kern="0" dirty="0">
+            <a:pPr marL="0" indent="0">
+              <a:buNone/>
+            </a:pPr>
+            <a:r>
+              <a:rPr lang="en-US" sz="1200" b="1" kern="0" spc="300" dirty="0">
                 <a:solidFill>
                   <a:srgbClr val="C4B3F5"/>
                 </a:solidFill>
@@ -3548,7 +3229,7 @@
           <a:bodyPr wrap="square" lIns="0" tIns="0" rIns="0" bIns="0" rtlCol="0" anchor="t"/>
           <a:lstStyle/>
           <a:p>
-            <a:pPr indent="0" marL="0">
+            <a:pPr marL="0" indent="0">
               <a:lnSpc>
                 <a:spcPct val="102000"/>
               </a:lnSpc>
@@ -3568,7 +3249,7 @@
             <a:endParaRPr lang="en-US" sz="3600" dirty="0"/>
           </a:p>
           <a:p>
-            <a:pPr indent="0" marL="0">
+            <a:pPr marL="0" indent="0">
               <a:lnSpc>
                 <a:spcPct val="102000"/>
               </a:lnSpc>
@@ -3610,7 +3291,7 @@
           <a:bodyPr wrap="square" lIns="0" tIns="0" rIns="0" bIns="0" rtlCol="0" anchor="ctr"/>
           <a:lstStyle/>
           <a:p>
-            <a:pPr indent="0" marL="0">
+            <a:pPr marL="0" indent="0">
               <a:lnSpc>
                 <a:spcPct val="120000"/>
               </a:lnSpc>
@@ -3678,7 +3359,7 @@
           <a:bodyPr wrap="square" lIns="0" tIns="0" rIns="0" bIns="0" rtlCol="0" anchor="ctr"/>
           <a:lstStyle/>
           <a:p>
-            <a:pPr algn="ctr" indent="0" marL="0">
+            <a:pPr marL="0" indent="0" algn="ctr">
               <a:buNone/>
             </a:pPr>
             <a:r>
@@ -3743,7 +3424,7 @@
           <a:bodyPr wrap="square" lIns="0" tIns="0" rIns="0" bIns="0" rtlCol="0" anchor="ctr"/>
           <a:lstStyle/>
           <a:p>
-            <a:pPr algn="ctr" indent="0" marL="0">
+            <a:pPr marL="0" indent="0" algn="ctr">
               <a:buNone/>
             </a:pPr>
             <a:r>
@@ -3808,7 +3489,7 @@
           <a:bodyPr wrap="square" lIns="0" tIns="0" rIns="0" bIns="0" rtlCol="0" anchor="ctr"/>
           <a:lstStyle/>
           <a:p>
-            <a:pPr algn="ctr" indent="0" marL="0">
+            <a:pPr marL="0" indent="0" algn="ctr">
               <a:buNone/>
             </a:pPr>
             <a:r>
@@ -3873,7 +3554,7 @@
           <a:bodyPr wrap="square" lIns="0" tIns="0" rIns="0" bIns="0" rtlCol="0" anchor="ctr"/>
           <a:lstStyle/>
           <a:p>
-            <a:pPr algn="ctr" indent="0" marL="0">
+            <a:pPr marL="0" indent="0" algn="ctr">
               <a:buNone/>
             </a:pPr>
             <a:r>
@@ -3934,7 +3615,7 @@
           <a:bodyPr wrap="square" lIns="0" tIns="0" rIns="0" bIns="0" rtlCol="0" anchor="ctr"/>
           <a:lstStyle/>
           <a:p>
-            <a:pPr algn="ctr" indent="0" marL="0">
+            <a:pPr marL="0" indent="0" algn="ctr">
               <a:buNone/>
             </a:pPr>
             <a:r>
@@ -3999,7 +3680,7 @@
           <a:bodyPr wrap="square" lIns="0" tIns="0" rIns="0" bIns="0" rtlCol="0" anchor="ctr"/>
           <a:lstStyle/>
           <a:p>
-            <a:pPr algn="ctr" indent="0" marL="0">
+            <a:pPr marL="0" indent="0" algn="ctr">
               <a:buNone/>
             </a:pPr>
             <a:r>
@@ -4085,7 +3766,7 @@
           <a:bodyPr wrap="square" lIns="0" tIns="0" rIns="0" bIns="0" rtlCol="0" anchor="ctr"/>
           <a:lstStyle/>
           <a:p>
-            <a:pPr algn="l" indent="0" marL="0">
+            <a:pPr marL="0" indent="0" algn="l">
               <a:buNone/>
             </a:pPr>
             <a:r>
@@ -4124,7 +3805,7 @@
           <a:bodyPr wrap="square" lIns="0" tIns="0" rIns="0" bIns="0" rtlCol="0" anchor="ctr"/>
           <a:lstStyle/>
           <a:p>
-            <a:pPr indent="0" marL="0">
+            <a:pPr marL="0" indent="0">
               <a:buNone/>
             </a:pPr>
             <a:r>
@@ -4190,11 +3871,11 @@
           <a:bodyPr wrap="square" lIns="0" tIns="0" rIns="0" bIns="0" rtlCol="0" anchor="ctr"/>
           <a:lstStyle/>
           <a:p>
-            <a:pPr algn="ctr" indent="0" marL="0">
-              <a:buNone/>
-            </a:pPr>
-            <a:r>
-              <a:rPr lang="en-US" sz="900" b="1" spc="100" kern="0" dirty="0">
+            <a:pPr marL="0" indent="0" algn="ctr">
+              <a:buNone/>
+            </a:pPr>
+            <a:r>
+              <a:rPr lang="en-US" sz="900" b="1" kern="0" spc="100" dirty="0">
                 <a:solidFill>
                   <a:srgbClr val="5A05F4"/>
                 </a:solidFill>
@@ -4210,14 +3891,14 @@
       </p:sp>
       <p:pic>
         <p:nvPicPr>
-          <p:cNvPr id="7" name="Image 0" descr="preencoded.png">    </p:cNvPr>
+          <p:cNvPr id="7" name="Image 0" descr="preencoded.png"/>
           <p:cNvPicPr>
             <a:picLocks noChangeAspect="1"/>
           </p:cNvPicPr>
           <p:nvPr/>
         </p:nvPicPr>
         <p:blipFill>
-          <a:blip r:embed="rId1"/>
+          <a:blip r:embed="rId3"/>
           <a:stretch>
             <a:fillRect/>
           </a:stretch>
@@ -4280,11 +3961,11 @@
           <a:bodyPr wrap="square" lIns="0" tIns="0" rIns="0" bIns="0" rtlCol="0" anchor="ctr"/>
           <a:lstStyle/>
           <a:p>
-            <a:pPr indent="0" marL="0">
-              <a:buNone/>
-            </a:pPr>
-            <a:r>
-              <a:rPr lang="en-US" sz="950" b="1" spc="150" kern="0" dirty="0">
+            <a:pPr marL="0" indent="0">
+              <a:buNone/>
+            </a:pPr>
+            <a:r>
+              <a:rPr lang="en-US" sz="950" b="1" kern="0" spc="150" dirty="0">
                 <a:solidFill>
                   <a:srgbClr val="B3261E"/>
                 </a:solidFill>
@@ -4319,7 +4000,7 @@
           <a:bodyPr wrap="square" lIns="0" tIns="0" rIns="0" bIns="0" rtlCol="0" anchor="ctr"/>
           <a:lstStyle/>
           <a:p>
-            <a:pPr indent="0" marL="0">
+            <a:pPr marL="0" indent="0">
               <a:lnSpc>
                 <a:spcPct val="112000"/>
               </a:lnSpc>
@@ -4383,7 +4064,7 @@
           <a:bodyPr wrap="square" lIns="0" tIns="0" rIns="0" bIns="0" rtlCol="0" anchor="ctr"/>
           <a:lstStyle/>
           <a:p>
-            <a:pPr indent="0" marL="0">
+            <a:pPr marL="0" indent="0">
               <a:buNone/>
             </a:pPr>
             <a:r>
@@ -4422,7 +4103,7 @@
           <a:bodyPr wrap="square" lIns="0" tIns="0" rIns="0" bIns="0" rtlCol="0" anchor="t"/>
           <a:lstStyle/>
           <a:p>
-            <a:pPr indent="0" marL="0">
+            <a:pPr marL="0" indent="0">
               <a:buNone/>
             </a:pPr>
             <a:r>
@@ -4483,7 +4164,7 @@
           <a:bodyPr wrap="square" lIns="0" tIns="0" rIns="0" bIns="0" rtlCol="0" anchor="ctr"/>
           <a:lstStyle/>
           <a:p>
-            <a:pPr indent="0" marL="0">
+            <a:pPr marL="0" indent="0">
               <a:buNone/>
             </a:pPr>
             <a:r>
@@ -4522,7 +4203,7 @@
           <a:bodyPr wrap="square" lIns="0" tIns="0" rIns="0" bIns="0" rtlCol="0" anchor="t"/>
           <a:lstStyle/>
           <a:p>
-            <a:pPr indent="0" marL="0">
+            <a:pPr marL="0" indent="0">
               <a:buNone/>
             </a:pPr>
             <a:r>
@@ -4583,7 +4264,7 @@
           <a:bodyPr wrap="square" lIns="0" tIns="0" rIns="0" bIns="0" rtlCol="0" anchor="ctr"/>
           <a:lstStyle/>
           <a:p>
-            <a:pPr indent="0" marL="0">
+            <a:pPr marL="0" indent="0">
               <a:buNone/>
             </a:pPr>
             <a:r>
@@ -4622,7 +4303,7 @@
           <a:bodyPr wrap="square" lIns="0" tIns="0" rIns="0" bIns="0" rtlCol="0" anchor="t"/>
           <a:lstStyle/>
           <a:p>
-            <a:pPr indent="0" marL="0">
+            <a:pPr marL="0" indent="0">
               <a:lnSpc>
                 <a:spcPct val="108000"/>
               </a:lnSpc>
@@ -4686,7 +4367,7 @@
           <a:bodyPr wrap="square" lIns="0" tIns="0" rIns="0" bIns="0" rtlCol="0" anchor="ctr"/>
           <a:lstStyle/>
           <a:p>
-            <a:pPr indent="0" marL="0">
+            <a:pPr marL="0" indent="0">
               <a:buNone/>
             </a:pPr>
             <a:r>
@@ -4725,7 +4406,7 @@
           <a:bodyPr wrap="square" lIns="0" tIns="0" rIns="0" bIns="0" rtlCol="0" anchor="t"/>
           <a:lstStyle/>
           <a:p>
-            <a:pPr indent="0" marL="0">
+            <a:pPr marL="0" indent="0">
               <a:lnSpc>
                 <a:spcPct val="108000"/>
               </a:lnSpc>
@@ -4766,7 +4447,7 @@
           </a:prstGeom>
           <a:extLst>
             <a:ext uri="{C572A759-6A51-4108-AA02-DFA0A04FC94B}">
-              <ma14:wrappingTextBoxFlag xmlns:ma14="http://schemas.microsoft.com/office/mac/drawingml/2011/main" val="0"/>
+              <ma14:wrappingTextBoxFlag xmlns:ma14="http://schemas.microsoft.com/office/mac/drawingml/2011/main" xmlns="" val="0"/>
             </a:ext>
           </a:extLst>
         </p:spPr>
@@ -4787,7 +4468,7 @@
           <a:p>
             <a:pPr algn="l"/>
             <a:fld id="{F7021451-1387-4CA6-816F-3879F97B5CBC}" type="slidenum">
-              <a:rPr b="0" lang="en-US"/>
+              <a:rPr lang="en-US" b="0"/>
               <a:t>10</a:t>
             </a:fld>
             <a:endParaRPr lang="en-US"/>
@@ -4862,7 +4543,7 @@
           <a:bodyPr wrap="square" lIns="0" tIns="0" rIns="0" bIns="0" rtlCol="0" anchor="ctr"/>
           <a:lstStyle/>
           <a:p>
-            <a:pPr algn="l" indent="0" marL="0">
+            <a:pPr marL="0" indent="0" algn="l">
               <a:buNone/>
             </a:pPr>
             <a:r>
@@ -4901,7 +4582,7 @@
           <a:bodyPr wrap="square" lIns="0" tIns="0" rIns="0" bIns="0" rtlCol="0" anchor="ctr"/>
           <a:lstStyle/>
           <a:p>
-            <a:pPr indent="0" marL="0">
+            <a:pPr marL="0" indent="0">
               <a:buNone/>
             </a:pPr>
             <a:r>
@@ -4967,11 +4648,11 @@
           <a:bodyPr wrap="square" lIns="0" tIns="0" rIns="0" bIns="0" rtlCol="0" anchor="ctr"/>
           <a:lstStyle/>
           <a:p>
-            <a:pPr algn="ctr" indent="0" marL="0">
-              <a:buNone/>
-            </a:pPr>
-            <a:r>
-              <a:rPr lang="en-US" sz="900" b="1" spc="100" kern="0" dirty="0">
+            <a:pPr marL="0" indent="0" algn="ctr">
+              <a:buNone/>
+            </a:pPr>
+            <a:r>
+              <a:rPr lang="en-US" sz="900" b="1" kern="0" spc="100" dirty="0">
                 <a:solidFill>
                   <a:srgbClr val="5A05F4"/>
                 </a:solidFill>
@@ -4987,14 +4668,14 @@
       </p:sp>
       <p:pic>
         <p:nvPicPr>
-          <p:cNvPr id="7" name="Image 0" descr="preencoded.png">    </p:cNvPr>
+          <p:cNvPr id="7" name="Image 0" descr="preencoded.png"/>
           <p:cNvPicPr>
             <a:picLocks noChangeAspect="1"/>
           </p:cNvPicPr>
           <p:nvPr/>
         </p:nvPicPr>
         <p:blipFill>
-          <a:blip r:embed="rId1"/>
+          <a:blip r:embed="rId3"/>
           <a:stretch>
             <a:fillRect/>
           </a:stretch>
@@ -5025,16 +4706,34 @@
         </p:nvGraphicFramePr>
         <p:xfrm>
           <a:off x="566928" y="1737360"/>
-          <a:ext cx="11064240" cy="914400"/>
+          <a:ext cx="11064240" cy="2633472"/>
         </p:xfrm>
         <a:graphic>
           <a:graphicData uri="http://schemas.openxmlformats.org/drawingml/2006/table">
             <a:tbl>
               <a:tblPr/>
               <a:tblGrid>
-                <a:gridCol w="3840480"/>
-                <a:gridCol w="3657600"/>
-                <a:gridCol w="3566160"/>
+                <a:gridCol w="3840480">
+                  <a:extLst>
+                    <a:ext uri="{9D8B030D-6E8A-4147-A177-3AD203B41FA5}">
+                      <a16:colId xmlns:a16="http://schemas.microsoft.com/office/drawing/2014/main" val="20000"/>
+                    </a:ext>
+                  </a:extLst>
+                </a:gridCol>
+                <a:gridCol w="3657600">
+                  <a:extLst>
+                    <a:ext uri="{9D8B030D-6E8A-4147-A177-3AD203B41FA5}">
+                      <a16:colId xmlns:a16="http://schemas.microsoft.com/office/drawing/2014/main" val="20001"/>
+                    </a:ext>
+                  </a:extLst>
+                </a:gridCol>
+                <a:gridCol w="3566160">
+                  <a:extLst>
+                    <a:ext uri="{9D8B030D-6E8A-4147-A177-3AD203B41FA5}">
+                      <a16:colId xmlns:a16="http://schemas.microsoft.com/office/drawing/2014/main" val="20002"/>
+                    </a:ext>
+                  </a:extLst>
+                </a:gridCol>
               </a:tblGrid>
               <a:tr h="658368">
                 <a:tc>
@@ -5042,11 +4741,11 @@
                     <a:bodyPr/>
                     <a:lstStyle/>
                     <a:p>
-                      <a:pPr algn="ctr" indent="0" marL="0">
+                      <a:pPr marL="0" indent="0" algn="ctr">
                         <a:buNone/>
                       </a:pPr>
                       <a:r>
-                        <a:rPr lang="en-US" sz="900" b="1" spc="100" kern="0" dirty="0">
+                        <a:rPr lang="en-US" sz="900" b="1" kern="0" spc="100" dirty="0">
                           <a:solidFill>
                             <a:srgbClr val="FFFFFF"/>
                           </a:solidFill>
@@ -5110,11 +4809,11 @@
                     <a:bodyPr/>
                     <a:lstStyle/>
                     <a:p>
-                      <a:pPr algn="ctr" indent="0" marL="0">
+                      <a:pPr marL="0" indent="0" algn="ctr">
                         <a:buNone/>
                       </a:pPr>
                       <a:r>
-                        <a:rPr lang="en-US" sz="900" b="1" spc="100" kern="0" dirty="0">
+                        <a:rPr lang="en-US" sz="900" b="1" kern="0" spc="100" dirty="0">
                           <a:solidFill>
                             <a:srgbClr val="FFFFFF"/>
                           </a:solidFill>
@@ -5178,11 +4877,11 @@
                     <a:bodyPr/>
                     <a:lstStyle/>
                     <a:p>
-                      <a:pPr algn="ctr" indent="0" marL="0">
+                      <a:pPr marL="0" indent="0" algn="ctr">
                         <a:buNone/>
                       </a:pPr>
                       <a:r>
-                        <a:rPr lang="en-US" sz="900" b="1" spc="100" kern="0" dirty="0">
+                        <a:rPr lang="en-US" sz="900" b="1" kern="0" spc="100" dirty="0">
                           <a:solidFill>
                             <a:srgbClr val="FFFFFF"/>
                           </a:solidFill>
@@ -5241,6 +4940,11 @@
                     </a:solidFill>
                   </a:tcPr>
                 </a:tc>
+                <a:extLst>
+                  <a:ext uri="{0D108BD9-81ED-4DB2-BD59-A6C34878D82A}">
+                    <a16:rowId xmlns:a16="http://schemas.microsoft.com/office/drawing/2014/main" val="10000"/>
+                  </a:ext>
+                </a:extLst>
               </a:tr>
               <a:tr h="658368">
                 <a:tc>
@@ -5248,7 +4952,7 @@
                     <a:bodyPr/>
                     <a:lstStyle/>
                     <a:p>
-                      <a:pPr indent="0" marL="0">
+                      <a:pPr marL="0" indent="0">
                         <a:buNone/>
                       </a:pPr>
                       <a:r>
@@ -5316,7 +5020,7 @@
                     <a:bodyPr/>
                     <a:lstStyle/>
                     <a:p>
-                      <a:pPr indent="0" marL="0">
+                      <a:pPr marL="0" indent="0">
                         <a:buNone/>
                       </a:pPr>
                       <a:r>
@@ -5384,7 +5088,7 @@
                     <a:bodyPr/>
                     <a:lstStyle/>
                     <a:p>
-                      <a:pPr indent="0" marL="0">
+                      <a:pPr marL="0" indent="0">
                         <a:buNone/>
                       </a:pPr>
                       <a:r>
@@ -5447,6 +5151,11 @@
                     </a:solidFill>
                   </a:tcPr>
                 </a:tc>
+                <a:extLst>
+                  <a:ext uri="{0D108BD9-81ED-4DB2-BD59-A6C34878D82A}">
+                    <a16:rowId xmlns:a16="http://schemas.microsoft.com/office/drawing/2014/main" val="10001"/>
+                  </a:ext>
+                </a:extLst>
               </a:tr>
               <a:tr h="658368">
                 <a:tc>
@@ -5454,7 +5163,7 @@
                     <a:bodyPr/>
                     <a:lstStyle/>
                     <a:p>
-                      <a:pPr indent="0" marL="0">
+                      <a:pPr marL="0" indent="0">
                         <a:buNone/>
                       </a:pPr>
                       <a:r>
@@ -5522,7 +5231,7 @@
                     <a:bodyPr/>
                     <a:lstStyle/>
                     <a:p>
-                      <a:pPr indent="0" marL="0">
+                      <a:pPr marL="0" indent="0">
                         <a:buNone/>
                       </a:pPr>
                       <a:r>
@@ -5590,7 +5299,7 @@
                     <a:bodyPr/>
                     <a:lstStyle/>
                     <a:p>
-                      <a:pPr indent="0" marL="0">
+                      <a:pPr marL="0" indent="0">
                         <a:buNone/>
                       </a:pPr>
                       <a:r>
@@ -5653,6 +5362,11 @@
                     </a:solidFill>
                   </a:tcPr>
                 </a:tc>
+                <a:extLst>
+                  <a:ext uri="{0D108BD9-81ED-4DB2-BD59-A6C34878D82A}">
+                    <a16:rowId xmlns:a16="http://schemas.microsoft.com/office/drawing/2014/main" val="10002"/>
+                  </a:ext>
+                </a:extLst>
               </a:tr>
               <a:tr h="658368">
                 <a:tc>
@@ -5660,7 +5374,7 @@
                     <a:bodyPr/>
                     <a:lstStyle/>
                     <a:p>
-                      <a:pPr indent="0" marL="0">
+                      <a:pPr marL="0" indent="0">
                         <a:buNone/>
                       </a:pPr>
                       <a:r>
@@ -5728,7 +5442,7 @@
                     <a:bodyPr/>
                     <a:lstStyle/>
                     <a:p>
-                      <a:pPr indent="0" marL="0">
+                      <a:pPr marL="0" indent="0">
                         <a:buNone/>
                       </a:pPr>
                       <a:r>
@@ -5796,7 +5510,7 @@
                     <a:bodyPr/>
                     <a:lstStyle/>
                     <a:p>
-                      <a:pPr indent="0" marL="0">
+                      <a:pPr marL="0" indent="0">
                         <a:buNone/>
                       </a:pPr>
                       <a:r>
@@ -5859,6 +5573,11 @@
                     </a:solidFill>
                   </a:tcPr>
                 </a:tc>
+                <a:extLst>
+                  <a:ext uri="{0D108BD9-81ED-4DB2-BD59-A6C34878D82A}">
+                    <a16:rowId xmlns:a16="http://schemas.microsoft.com/office/drawing/2014/main" val="10003"/>
+                  </a:ext>
+                </a:extLst>
               </a:tr>
             </a:tbl>
           </a:graphicData>
@@ -5912,11 +5631,11 @@
           <a:bodyPr wrap="square" lIns="0" tIns="0" rIns="0" bIns="0" rtlCol="0" anchor="ctr"/>
           <a:lstStyle/>
           <a:p>
-            <a:pPr indent="0" marL="0">
-              <a:buNone/>
-            </a:pPr>
-            <a:r>
-              <a:rPr lang="en-US" sz="950" b="1" spc="150" kern="0" dirty="0">
+            <a:pPr marL="0" indent="0">
+              <a:buNone/>
+            </a:pPr>
+            <a:r>
+              <a:rPr lang="en-US" sz="950" b="1" kern="0" spc="150" dirty="0">
                 <a:solidFill>
                   <a:srgbClr val="106B41"/>
                 </a:solidFill>
@@ -5951,7 +5670,7 @@
           <a:bodyPr wrap="square" lIns="0" tIns="0" rIns="0" bIns="0" rtlCol="0" anchor="ctr"/>
           <a:lstStyle/>
           <a:p>
-            <a:pPr indent="0" marL="0">
+            <a:pPr marL="0" indent="0">
               <a:lnSpc>
                 <a:spcPct val="112000"/>
               </a:lnSpc>
@@ -5992,7 +5711,7 @@
           </a:prstGeom>
           <a:extLst>
             <a:ext uri="{C572A759-6A51-4108-AA02-DFA0A04FC94B}">
-              <ma14:wrappingTextBoxFlag xmlns:ma14="http://schemas.microsoft.com/office/mac/drawingml/2011/main" val="0"/>
+              <ma14:wrappingTextBoxFlag xmlns:ma14="http://schemas.microsoft.com/office/mac/drawingml/2011/main" xmlns="" val="0"/>
             </a:ext>
           </a:extLst>
         </p:spPr>
@@ -6013,7 +5732,7 @@
           <a:p>
             <a:pPr algn="l"/>
             <a:fld id="{F7021451-1387-4CA6-816F-3879F97B5CBC}" type="slidenum">
-              <a:rPr b="0" lang="en-US"/>
+              <a:rPr lang="en-US" b="0"/>
               <a:t>11</a:t>
             </a:fld>
             <a:endParaRPr lang="en-US"/>
@@ -6088,7 +5807,7 @@
           <a:bodyPr wrap="square" lIns="0" tIns="0" rIns="0" bIns="0" rtlCol="0" anchor="ctr"/>
           <a:lstStyle/>
           <a:p>
-            <a:pPr algn="l" indent="0" marL="0">
+            <a:pPr marL="0" indent="0" algn="l">
               <a:buNone/>
             </a:pPr>
             <a:r>
@@ -6127,7 +5846,7 @@
           <a:bodyPr wrap="square" lIns="0" tIns="0" rIns="0" bIns="0" rtlCol="0" anchor="ctr"/>
           <a:lstStyle/>
           <a:p>
-            <a:pPr indent="0" marL="0">
+            <a:pPr marL="0" indent="0">
               <a:buNone/>
             </a:pPr>
             <a:r>
@@ -6193,11 +5912,11 @@
           <a:bodyPr wrap="square" lIns="0" tIns="0" rIns="0" bIns="0" rtlCol="0" anchor="ctr"/>
           <a:lstStyle/>
           <a:p>
-            <a:pPr algn="ctr" indent="0" marL="0">
-              <a:buNone/>
-            </a:pPr>
-            <a:r>
-              <a:rPr lang="en-US" sz="900" b="1" spc="100" kern="0" dirty="0">
+            <a:pPr marL="0" indent="0" algn="ctr">
+              <a:buNone/>
+            </a:pPr>
+            <a:r>
+              <a:rPr lang="en-US" sz="900" b="1" kern="0" spc="100" dirty="0">
                 <a:solidFill>
                   <a:srgbClr val="5A05F4"/>
                 </a:solidFill>
@@ -6213,14 +5932,14 @@
       </p:sp>
       <p:pic>
         <p:nvPicPr>
-          <p:cNvPr id="7" name="Image 0" descr="preencoded.png">    </p:cNvPr>
+          <p:cNvPr id="7" name="Image 0" descr="preencoded.png"/>
           <p:cNvPicPr>
             <a:picLocks noChangeAspect="1"/>
           </p:cNvPicPr>
           <p:nvPr/>
         </p:nvPicPr>
         <p:blipFill>
-          <a:blip r:embed="rId1"/>
+          <a:blip r:embed="rId3"/>
           <a:stretch>
             <a:fillRect/>
           </a:stretch>
@@ -6283,7 +6002,7 @@
           <a:bodyPr wrap="square" lIns="0" tIns="0" rIns="0" bIns="0" rtlCol="0" anchor="t"/>
           <a:lstStyle/>
           <a:p>
-            <a:pPr indent="0" marL="0">
+            <a:pPr marL="0" indent="0">
               <a:lnSpc>
                 <a:spcPct val="130000"/>
               </a:lnSpc>
@@ -6303,7 +6022,7 @@
             <a:endParaRPr lang="en-US" sz="1150" dirty="0"/>
           </a:p>
           <a:p>
-            <a:pPr indent="0" marL="0">
+            <a:pPr marL="0" indent="0">
               <a:lnSpc>
                 <a:spcPct val="130000"/>
               </a:lnSpc>
@@ -6323,7 +6042,7 @@
             <a:endParaRPr lang="en-US" sz="1150" dirty="0"/>
           </a:p>
           <a:p>
-            <a:pPr indent="0" marL="0">
+            <a:pPr marL="0" indent="0">
               <a:lnSpc>
                 <a:spcPct val="130000"/>
               </a:lnSpc>
@@ -6343,7 +6062,7 @@
             <a:endParaRPr lang="en-US" sz="1150" dirty="0"/>
           </a:p>
           <a:p>
-            <a:pPr indent="0" marL="0">
+            <a:pPr marL="0" indent="0">
               <a:lnSpc>
                 <a:spcPct val="130000"/>
               </a:lnSpc>
@@ -6363,7 +6082,7 @@
             <a:endParaRPr lang="en-US" sz="1150" dirty="0"/>
           </a:p>
           <a:p>
-            <a:pPr indent="0" marL="0">
+            <a:pPr marL="0" indent="0">
               <a:lnSpc>
                 <a:spcPct val="130000"/>
               </a:lnSpc>
@@ -6383,7 +6102,7 @@
             <a:endParaRPr lang="en-US" sz="1150" dirty="0"/>
           </a:p>
           <a:p>
-            <a:pPr indent="0" marL="0">
+            <a:pPr marL="0" indent="0">
               <a:lnSpc>
                 <a:spcPct val="130000"/>
               </a:lnSpc>
@@ -6403,7 +6122,7 @@
             <a:endParaRPr lang="en-US" sz="1150" dirty="0"/>
           </a:p>
           <a:p>
-            <a:pPr indent="0" marL="0">
+            <a:pPr marL="0" indent="0">
               <a:lnSpc>
                 <a:spcPct val="130000"/>
               </a:lnSpc>
@@ -6423,7 +6142,7 @@
             <a:endParaRPr lang="en-US" sz="1150" dirty="0"/>
           </a:p>
           <a:p>
-            <a:pPr indent="0" marL="0">
+            <a:pPr marL="0" indent="0">
               <a:lnSpc>
                 <a:spcPct val="130000"/>
               </a:lnSpc>
@@ -6507,7 +6226,7 @@
           <a:bodyPr wrap="square" lIns="0" tIns="0" rIns="0" bIns="0" rtlCol="0" anchor="ctr"/>
           <a:lstStyle/>
           <a:p>
-            <a:pPr algn="ctr" indent="0" marL="0">
+            <a:pPr marL="0" indent="0" algn="ctr">
               <a:buNone/>
             </a:pPr>
             <a:r>
@@ -6546,7 +6265,7 @@
           <a:bodyPr wrap="square" lIns="0" tIns="0" rIns="0" bIns="0" rtlCol="0" anchor="ctr"/>
           <a:lstStyle/>
           <a:p>
-            <a:pPr indent="0" marL="0">
+            <a:pPr marL="0" indent="0">
               <a:buNone/>
             </a:pPr>
             <a:r>
@@ -6585,7 +6304,7 @@
           <a:bodyPr wrap="square" lIns="0" tIns="0" rIns="0" bIns="0" rtlCol="0" anchor="t"/>
           <a:lstStyle/>
           <a:p>
-            <a:pPr indent="0" marL="0">
+            <a:pPr marL="0" indent="0">
               <a:lnSpc>
                 <a:spcPct val="108000"/>
               </a:lnSpc>
@@ -6669,7 +6388,7 @@
           <a:bodyPr wrap="square" lIns="0" tIns="0" rIns="0" bIns="0" rtlCol="0" anchor="ctr"/>
           <a:lstStyle/>
           <a:p>
-            <a:pPr algn="ctr" indent="0" marL="0">
+            <a:pPr marL="0" indent="0" algn="ctr">
               <a:buNone/>
             </a:pPr>
             <a:r>
@@ -6708,7 +6427,7 @@
           <a:bodyPr wrap="square" lIns="0" tIns="0" rIns="0" bIns="0" rtlCol="0" anchor="ctr"/>
           <a:lstStyle/>
           <a:p>
-            <a:pPr indent="0" marL="0">
+            <a:pPr marL="0" indent="0">
               <a:buNone/>
             </a:pPr>
             <a:r>
@@ -6747,7 +6466,7 @@
           <a:bodyPr wrap="square" lIns="0" tIns="0" rIns="0" bIns="0" rtlCol="0" anchor="t"/>
           <a:lstStyle/>
           <a:p>
-            <a:pPr indent="0" marL="0">
+            <a:pPr marL="0" indent="0">
               <a:lnSpc>
                 <a:spcPct val="108000"/>
               </a:lnSpc>
@@ -6777,7 +6496,7 @@
         <p:spPr>
           <a:xfrm>
             <a:off x="7973568" y="4251960"/>
-            <a:ext cx="3520440" cy="1325880"/>
+            <a:ext cx="3651504" cy="1325880"/>
           </a:xfrm>
           <a:prstGeom prst="roundRect">
             <a:avLst>
@@ -6831,7 +6550,7 @@
           <a:bodyPr wrap="square" lIns="0" tIns="0" rIns="0" bIns="0" rtlCol="0" anchor="ctr"/>
           <a:lstStyle/>
           <a:p>
-            <a:pPr algn="ctr" indent="0" marL="0">
+            <a:pPr marL="0" indent="0" algn="ctr">
               <a:buNone/>
             </a:pPr>
             <a:r>
@@ -6870,7 +6589,7 @@
           <a:bodyPr wrap="square" lIns="0" tIns="0" rIns="0" bIns="0" rtlCol="0" anchor="ctr"/>
           <a:lstStyle/>
           <a:p>
-            <a:pPr indent="0" marL="0">
+            <a:pPr marL="0" indent="0">
               <a:buNone/>
             </a:pPr>
             <a:r>
@@ -6909,7 +6628,7 @@
           <a:bodyPr wrap="square" lIns="0" tIns="0" rIns="0" bIns="0" rtlCol="0" anchor="t"/>
           <a:lstStyle/>
           <a:p>
-            <a:pPr indent="0" marL="0">
+            <a:pPr marL="0" indent="0">
               <a:lnSpc>
                 <a:spcPct val="108000"/>
               </a:lnSpc>
@@ -6950,7 +6669,7 @@
           </a:prstGeom>
           <a:extLst>
             <a:ext uri="{C572A759-6A51-4108-AA02-DFA0A04FC94B}">
-              <ma14:wrappingTextBoxFlag xmlns:ma14="http://schemas.microsoft.com/office/mac/drawingml/2011/main" val="0"/>
+              <ma14:wrappingTextBoxFlag xmlns:ma14="http://schemas.microsoft.com/office/mac/drawingml/2011/main" xmlns="" val="0"/>
             </a:ext>
           </a:extLst>
         </p:spPr>
@@ -6971,7 +6690,7 @@
           <a:p>
             <a:pPr algn="l"/>
             <a:fld id="{F7021451-1387-4CA6-816F-3879F97B5CBC}" type="slidenum">
-              <a:rPr b="0" lang="en-US"/>
+              <a:rPr lang="en-US" b="0"/>
               <a:t>12</a:t>
             </a:fld>
             <a:endParaRPr lang="en-US"/>
@@ -7046,7 +6765,7 @@
           <a:bodyPr wrap="square" lIns="0" tIns="0" rIns="0" bIns="0" rtlCol="0" anchor="ctr"/>
           <a:lstStyle/>
           <a:p>
-            <a:pPr algn="l" indent="0" marL="0">
+            <a:pPr marL="0" indent="0" algn="l">
               <a:buNone/>
             </a:pPr>
             <a:r>
@@ -7085,7 +6804,7 @@
           <a:bodyPr wrap="square" lIns="0" tIns="0" rIns="0" bIns="0" rtlCol="0" anchor="ctr"/>
           <a:lstStyle/>
           <a:p>
-            <a:pPr indent="0" marL="0">
+            <a:pPr marL="0" indent="0">
               <a:buNone/>
             </a:pPr>
             <a:r>
@@ -7151,11 +6870,11 @@
           <a:bodyPr wrap="square" lIns="0" tIns="0" rIns="0" bIns="0" rtlCol="0" anchor="ctr"/>
           <a:lstStyle/>
           <a:p>
-            <a:pPr algn="ctr" indent="0" marL="0">
-              <a:buNone/>
-            </a:pPr>
-            <a:r>
-              <a:rPr lang="en-US" sz="900" b="1" spc="100" kern="0" dirty="0">
+            <a:pPr marL="0" indent="0" algn="ctr">
+              <a:buNone/>
+            </a:pPr>
+            <a:r>
+              <a:rPr lang="en-US" sz="900" b="1" kern="0" spc="100" dirty="0">
                 <a:solidFill>
                   <a:srgbClr val="5A05F4"/>
                 </a:solidFill>
@@ -7171,14 +6890,14 @@
       </p:sp>
       <p:pic>
         <p:nvPicPr>
-          <p:cNvPr id="7" name="Image 0" descr="preencoded.png">    </p:cNvPr>
+          <p:cNvPr id="7" name="Image 0" descr="preencoded.png"/>
           <p:cNvPicPr>
             <a:picLocks noChangeAspect="1"/>
           </p:cNvPicPr>
           <p:nvPr/>
         </p:nvPicPr>
         <p:blipFill>
-          <a:blip r:embed="rId1"/>
+          <a:blip r:embed="rId3"/>
           <a:stretch>
             <a:fillRect/>
           </a:stretch>
@@ -7236,7 +6955,7 @@
           <a:bodyPr wrap="square" lIns="0" tIns="0" rIns="0" bIns="0" rtlCol="0" anchor="ctr"/>
           <a:lstStyle/>
           <a:p>
-            <a:pPr algn="ctr" indent="0" marL="0">
+            <a:pPr marL="0" indent="0" algn="ctr">
               <a:buNone/>
             </a:pPr>
             <a:r>
@@ -7340,7 +7059,7 @@
           <a:bodyPr wrap="square" lIns="0" tIns="0" rIns="0" bIns="0" rtlCol="0" anchor="ctr"/>
           <a:lstStyle/>
           <a:p>
-            <a:pPr algn="ctr" indent="0" marL="0">
+            <a:pPr marL="0" indent="0" algn="ctr">
               <a:buNone/>
             </a:pPr>
             <a:r>
@@ -7444,7 +7163,7 @@
           <a:bodyPr wrap="square" lIns="0" tIns="0" rIns="0" bIns="0" rtlCol="0" anchor="ctr"/>
           <a:lstStyle/>
           <a:p>
-            <a:pPr algn="ctr" indent="0" marL="0">
+            <a:pPr marL="0" indent="0" algn="ctr">
               <a:buNone/>
             </a:pPr>
             <a:r>
@@ -7548,7 +7267,7 @@
           <a:bodyPr wrap="square" lIns="0" tIns="0" rIns="0" bIns="0" rtlCol="0" anchor="ctr"/>
           <a:lstStyle/>
           <a:p>
-            <a:pPr algn="ctr" indent="0" marL="0">
+            <a:pPr marL="0" indent="0" algn="ctr">
               <a:buNone/>
             </a:pPr>
             <a:r>
@@ -7652,7 +7371,7 @@
           <a:bodyPr wrap="square" lIns="0" tIns="0" rIns="0" bIns="0" rtlCol="0" anchor="ctr"/>
           <a:lstStyle/>
           <a:p>
-            <a:pPr algn="ctr" indent="0" marL="0">
+            <a:pPr marL="0" indent="0" algn="ctr">
               <a:buNone/>
             </a:pPr>
             <a:r>
@@ -7691,7 +7410,7 @@
           <a:bodyPr wrap="square" lIns="0" tIns="0" rIns="0" bIns="0" rtlCol="0" anchor="ctr"/>
           <a:lstStyle/>
           <a:p>
-            <a:pPr indent="0" marL="0">
+            <a:pPr marL="0" indent="0">
               <a:buNone/>
             </a:pPr>
             <a:r>
@@ -7752,7 +7471,7 @@
           <a:bodyPr wrap="square" lIns="0" tIns="0" rIns="0" bIns="0" rtlCol="0" anchor="ctr"/>
           <a:lstStyle/>
           <a:p>
-            <a:pPr indent="0" marL="0">
+            <a:pPr marL="0" indent="0">
               <a:buNone/>
             </a:pPr>
             <a:r>
@@ -7791,7 +7510,7 @@
           <a:bodyPr wrap="square" lIns="0" tIns="0" rIns="0" bIns="0" rtlCol="0" anchor="t"/>
           <a:lstStyle/>
           <a:p>
-            <a:pPr indent="0" marL="0">
+            <a:pPr marL="0" indent="0">
               <a:lnSpc>
                 <a:spcPct val="108000"/>
               </a:lnSpc>
@@ -7855,7 +7574,7 @@
           <a:bodyPr wrap="square" lIns="0" tIns="0" rIns="0" bIns="0" rtlCol="0" anchor="ctr"/>
           <a:lstStyle/>
           <a:p>
-            <a:pPr indent="0" marL="0">
+            <a:pPr marL="0" indent="0">
               <a:buNone/>
             </a:pPr>
             <a:r>
@@ -7894,7 +7613,7 @@
           <a:bodyPr wrap="square" lIns="0" tIns="0" rIns="0" bIns="0" rtlCol="0" anchor="t"/>
           <a:lstStyle/>
           <a:p>
-            <a:pPr indent="0" marL="0">
+            <a:pPr marL="0" indent="0">
               <a:lnSpc>
                 <a:spcPct val="108000"/>
               </a:lnSpc>
@@ -7963,7 +7682,7 @@
           <a:bodyPr wrap="square" lIns="0" tIns="0" rIns="0" bIns="0" rtlCol="0" anchor="ctr"/>
           <a:lstStyle/>
           <a:p>
-            <a:pPr indent="0" marL="0">
+            <a:pPr marL="0" indent="0">
               <a:lnSpc>
                 <a:spcPct val="112000"/>
               </a:lnSpc>
@@ -7986,7 +7705,7 @@
       </p:sp>
       <p:sp>
         <p:nvSpPr>
-          <p:cNvPr id="25" name="Slide Number Placeholder 0"/>
+          <p:cNvPr id="35" name="Slide Number Placeholder 0"/>
           <p:cNvSpPr>
             <a:spLocks noGrp="1"/>
           </p:cNvSpPr>
@@ -8004,7 +7723,7 @@
           </a:prstGeom>
           <a:extLst>
             <a:ext uri="{C572A759-6A51-4108-AA02-DFA0A04FC94B}">
-              <ma14:wrappingTextBoxFlag xmlns:ma14="http://schemas.microsoft.com/office/mac/drawingml/2011/main" val="0"/>
+              <ma14:wrappingTextBoxFlag xmlns:ma14="http://schemas.microsoft.com/office/mac/drawingml/2011/main" xmlns="" val="0"/>
             </a:ext>
           </a:extLst>
         </p:spPr>
@@ -8025,7 +7744,7 @@
           <a:p>
             <a:pPr algn="l"/>
             <a:fld id="{F7021451-1387-4CA6-816F-3879F97B5CBC}" type="slidenum">
-              <a:rPr b="0" lang="en-US"/>
+              <a:rPr lang="en-US" b="0"/>
               <a:t>13</a:t>
             </a:fld>
             <a:endParaRPr lang="en-US"/>
@@ -8100,7 +7819,7 @@
           <a:bodyPr wrap="square" lIns="0" tIns="0" rIns="0" bIns="0" rtlCol="0" anchor="ctr"/>
           <a:lstStyle/>
           <a:p>
-            <a:pPr algn="l" indent="0" marL="0">
+            <a:pPr marL="0" indent="0" algn="l">
               <a:buNone/>
             </a:pPr>
             <a:r>
@@ -8139,7 +7858,7 @@
           <a:bodyPr wrap="square" lIns="0" tIns="0" rIns="0" bIns="0" rtlCol="0" anchor="ctr"/>
           <a:lstStyle/>
           <a:p>
-            <a:pPr indent="0" marL="0">
+            <a:pPr marL="0" indent="0">
               <a:buNone/>
             </a:pPr>
             <a:r>
@@ -8205,11 +7924,11 @@
           <a:bodyPr wrap="square" lIns="0" tIns="0" rIns="0" bIns="0" rtlCol="0" anchor="ctr"/>
           <a:lstStyle/>
           <a:p>
-            <a:pPr algn="ctr" indent="0" marL="0">
-              <a:buNone/>
-            </a:pPr>
-            <a:r>
-              <a:rPr lang="en-US" sz="900" b="1" spc="100" kern="0" dirty="0">
+            <a:pPr marL="0" indent="0" algn="ctr">
+              <a:buNone/>
+            </a:pPr>
+            <a:r>
+              <a:rPr lang="en-US" sz="900" b="1" kern="0" spc="100" dirty="0">
                 <a:solidFill>
                   <a:srgbClr val="5A05F4"/>
                 </a:solidFill>
@@ -8225,14 +7944,14 @@
       </p:sp>
       <p:pic>
         <p:nvPicPr>
-          <p:cNvPr id="7" name="Image 0" descr="preencoded.png">    </p:cNvPr>
+          <p:cNvPr id="7" name="Image 0" descr="preencoded.png"/>
           <p:cNvPicPr>
             <a:picLocks noChangeAspect="1"/>
           </p:cNvPicPr>
           <p:nvPr/>
         </p:nvPicPr>
         <p:blipFill>
-          <a:blip r:embed="rId1"/>
+          <a:blip r:embed="rId3"/>
           <a:stretch>
             <a:fillRect/>
           </a:stretch>
@@ -8290,7 +8009,7 @@
           <a:bodyPr wrap="square" lIns="0" tIns="0" rIns="0" bIns="0" rtlCol="0" anchor="ctr"/>
           <a:lstStyle/>
           <a:p>
-            <a:pPr indent="0" marL="0">
+            <a:pPr marL="0" indent="0">
               <a:buNone/>
             </a:pPr>
             <a:r>
@@ -8329,7 +8048,7 @@
           <a:bodyPr wrap="square" lIns="0" tIns="0" rIns="0" bIns="0" rtlCol="0" anchor="t"/>
           <a:lstStyle/>
           <a:p>
-            <a:pPr indent="0" marL="0">
+            <a:pPr marL="0" indent="0">
               <a:buNone/>
             </a:pPr>
             <a:r>
@@ -8390,7 +8109,7 @@
           <a:bodyPr wrap="square" lIns="0" tIns="0" rIns="0" bIns="0" rtlCol="0" anchor="ctr"/>
           <a:lstStyle/>
           <a:p>
-            <a:pPr indent="0" marL="0">
+            <a:pPr marL="0" indent="0">
               <a:buNone/>
             </a:pPr>
             <a:r>
@@ -8429,7 +8148,7 @@
           <a:bodyPr wrap="square" lIns="0" tIns="0" rIns="0" bIns="0" rtlCol="0" anchor="t"/>
           <a:lstStyle/>
           <a:p>
-            <a:pPr indent="0" marL="0">
+            <a:pPr marL="0" indent="0">
               <a:lnSpc>
                 <a:spcPct val="108000"/>
               </a:lnSpc>
@@ -8843,7 +8562,7 @@
           <a:bodyPr wrap="square" lIns="0" tIns="0" rIns="0" bIns="0" rtlCol="0" anchor="ctr"/>
           <a:lstStyle/>
           <a:p>
-            <a:pPr indent="0" marL="0">
+            <a:pPr marL="0" indent="0">
               <a:buNone/>
             </a:pPr>
             <a:r>
@@ -8857,9 +8576,6 @@
               </a:rPr>
               <a:t>прогін зелений  </a:t>
             </a:r>
-            <a:pPr indent="0" marL="0">
-              <a:buNone/>
-            </a:pPr>
             <a:r>
               <a:rPr lang="en-US" sz="1250" dirty="0">
                 <a:solidFill>
@@ -8918,7 +8634,7 @@
           <a:bodyPr wrap="square" lIns="0" tIns="0" rIns="0" bIns="0" rtlCol="0" anchor="ctr"/>
           <a:lstStyle/>
           <a:p>
-            <a:pPr indent="0" marL="0">
+            <a:pPr marL="0" indent="0">
               <a:buNone/>
             </a:pPr>
             <a:r>
@@ -8957,7 +8673,7 @@
           <a:bodyPr wrap="square" lIns="0" tIns="0" rIns="0" bIns="0" rtlCol="0" anchor="ctr"/>
           <a:lstStyle/>
           <a:p>
-            <a:pPr indent="0" marL="0">
+            <a:pPr marL="0" indent="0">
               <a:buNone/>
             </a:pPr>
             <a:r>
@@ -9018,7 +8734,7 @@
           <a:bodyPr wrap="square" lIns="0" tIns="0" rIns="0" bIns="0" rtlCol="0" anchor="ctr"/>
           <a:lstStyle/>
           <a:p>
-            <a:pPr indent="0" marL="0">
+            <a:pPr marL="0" indent="0">
               <a:buNone/>
             </a:pPr>
             <a:r>
@@ -9057,7 +8773,7 @@
           <a:bodyPr wrap="square" lIns="0" tIns="0" rIns="0" bIns="0" rtlCol="0" anchor="ctr"/>
           <a:lstStyle/>
           <a:p>
-            <a:pPr indent="0" marL="0">
+            <a:pPr marL="0" indent="0">
               <a:buNone/>
             </a:pPr>
             <a:r>
@@ -9123,7 +8839,7 @@
           <a:bodyPr wrap="square" lIns="0" tIns="0" rIns="0" bIns="0" rtlCol="0" anchor="ctr"/>
           <a:lstStyle/>
           <a:p>
-            <a:pPr indent="0" marL="0">
+            <a:pPr marL="0" indent="0">
               <a:lnSpc>
                 <a:spcPct val="112000"/>
               </a:lnSpc>
@@ -9146,7 +8862,7 @@
       </p:sp>
       <p:sp>
         <p:nvSpPr>
-          <p:cNvPr id="25" name="Slide Number Placeholder 0"/>
+          <p:cNvPr id="41" name="Slide Number Placeholder 0"/>
           <p:cNvSpPr>
             <a:spLocks noGrp="1"/>
           </p:cNvSpPr>
@@ -9164,7 +8880,7 @@
           </a:prstGeom>
           <a:extLst>
             <a:ext uri="{C572A759-6A51-4108-AA02-DFA0A04FC94B}">
-              <ma14:wrappingTextBoxFlag xmlns:ma14="http://schemas.microsoft.com/office/mac/drawingml/2011/main" val="0"/>
+              <ma14:wrappingTextBoxFlag xmlns:ma14="http://schemas.microsoft.com/office/mac/drawingml/2011/main" xmlns="" val="0"/>
             </a:ext>
           </a:extLst>
         </p:spPr>
@@ -9185,7 +8901,7 @@
           <a:p>
             <a:pPr algn="l"/>
             <a:fld id="{F7021451-1387-4CA6-816F-3879F97B5CBC}" type="slidenum">
-              <a:rPr b="0" lang="en-US"/>
+              <a:rPr lang="en-US" b="0"/>
               <a:t>14</a:t>
             </a:fld>
             <a:endParaRPr lang="en-US"/>
@@ -9260,7 +8976,7 @@
           <a:bodyPr wrap="square" lIns="0" tIns="0" rIns="0" bIns="0" rtlCol="0" anchor="ctr"/>
           <a:lstStyle/>
           <a:p>
-            <a:pPr algn="l" indent="0" marL="0">
+            <a:pPr marL="0" indent="0" algn="l">
               <a:buNone/>
             </a:pPr>
             <a:r>
@@ -9299,7 +9015,7 @@
           <a:bodyPr wrap="square" lIns="0" tIns="0" rIns="0" bIns="0" rtlCol="0" anchor="ctr"/>
           <a:lstStyle/>
           <a:p>
-            <a:pPr indent="0" marL="0">
+            <a:pPr marL="0" indent="0">
               <a:buNone/>
             </a:pPr>
             <a:r>
@@ -9365,11 +9081,11 @@
           <a:bodyPr wrap="square" lIns="0" tIns="0" rIns="0" bIns="0" rtlCol="0" anchor="ctr"/>
           <a:lstStyle/>
           <a:p>
-            <a:pPr algn="ctr" indent="0" marL="0">
-              <a:buNone/>
-            </a:pPr>
-            <a:r>
-              <a:rPr lang="en-US" sz="900" b="1" spc="100" kern="0" dirty="0">
+            <a:pPr marL="0" indent="0" algn="ctr">
+              <a:buNone/>
+            </a:pPr>
+            <a:r>
+              <a:rPr lang="en-US" sz="900" b="1" kern="0" spc="100" dirty="0">
                 <a:solidFill>
                   <a:srgbClr val="5A05F4"/>
                 </a:solidFill>
@@ -9385,14 +9101,14 @@
       </p:sp>
       <p:pic>
         <p:nvPicPr>
-          <p:cNvPr id="7" name="Image 0" descr="preencoded.png">    </p:cNvPr>
+          <p:cNvPr id="7" name="Image 0" descr="preencoded.png"/>
           <p:cNvPicPr>
             <a:picLocks noChangeAspect="1"/>
           </p:cNvPicPr>
           <p:nvPr/>
         </p:nvPicPr>
         <p:blipFill>
-          <a:blip r:embed="rId1"/>
+          <a:blip r:embed="rId3"/>
           <a:stretch>
             <a:fillRect/>
           </a:stretch>
@@ -9455,7 +9171,7 @@
           <a:bodyPr wrap="square" lIns="0" tIns="0" rIns="0" bIns="0" rtlCol="0" anchor="t"/>
           <a:lstStyle/>
           <a:p>
-            <a:pPr indent="0" marL="0">
+            <a:pPr marL="0" indent="0">
               <a:lnSpc>
                 <a:spcPct val="130000"/>
               </a:lnSpc>
@@ -9475,7 +9191,7 @@
             <a:endParaRPr lang="en-US" sz="1100" dirty="0"/>
           </a:p>
           <a:p>
-            <a:pPr indent="0" marL="0">
+            <a:pPr marL="0" indent="0">
               <a:lnSpc>
                 <a:spcPct val="130000"/>
               </a:lnSpc>
@@ -9495,7 +9211,7 @@
             <a:endParaRPr lang="en-US" sz="1100" dirty="0"/>
           </a:p>
           <a:p>
-            <a:pPr indent="0" marL="0">
+            <a:pPr marL="0" indent="0">
               <a:lnSpc>
                 <a:spcPct val="130000"/>
               </a:lnSpc>
@@ -9504,7 +9220,7 @@
             <a:endParaRPr lang="en-US" sz="1100" dirty="0"/>
           </a:p>
           <a:p>
-            <a:pPr indent="0" marL="0">
+            <a:pPr marL="0" indent="0">
               <a:lnSpc>
                 <a:spcPct val="130000"/>
               </a:lnSpc>
@@ -9524,7 +9240,7 @@
             <a:endParaRPr lang="en-US" sz="1100" dirty="0"/>
           </a:p>
           <a:p>
-            <a:pPr indent="0" marL="0">
+            <a:pPr marL="0" indent="0">
               <a:lnSpc>
                 <a:spcPct val="130000"/>
               </a:lnSpc>
@@ -9544,7 +9260,7 @@
             <a:endParaRPr lang="en-US" sz="1100" dirty="0"/>
           </a:p>
           <a:p>
-            <a:pPr indent="0" marL="0">
+            <a:pPr marL="0" indent="0">
               <a:lnSpc>
                 <a:spcPct val="130000"/>
               </a:lnSpc>
@@ -9553,7 +9269,7 @@
             <a:endParaRPr lang="en-US" sz="1100" dirty="0"/>
           </a:p>
           <a:p>
-            <a:pPr indent="0" marL="0">
+            <a:pPr marL="0" indent="0">
               <a:lnSpc>
                 <a:spcPct val="130000"/>
               </a:lnSpc>
@@ -9573,7 +9289,7 @@
             <a:endParaRPr lang="en-US" sz="1100" dirty="0"/>
           </a:p>
           <a:p>
-            <a:pPr indent="0" marL="0">
+            <a:pPr marL="0" indent="0">
               <a:lnSpc>
                 <a:spcPct val="130000"/>
               </a:lnSpc>
@@ -9637,7 +9353,7 @@
           <a:bodyPr wrap="square" lIns="0" tIns="0" rIns="0" bIns="0" rtlCol="0" anchor="ctr"/>
           <a:lstStyle/>
           <a:p>
-            <a:pPr indent="0" marL="0">
+            <a:pPr marL="0" indent="0">
               <a:buNone/>
             </a:pPr>
             <a:r>
@@ -9676,7 +9392,7 @@
           <a:bodyPr wrap="square" lIns="0" tIns="0" rIns="0" bIns="0" rtlCol="0" anchor="t"/>
           <a:lstStyle/>
           <a:p>
-            <a:pPr indent="0" marL="0">
+            <a:pPr marL="0" indent="0">
               <a:lnSpc>
                 <a:spcPct val="108000"/>
               </a:lnSpc>
@@ -9740,7 +9456,7 @@
           <a:bodyPr wrap="square" lIns="0" tIns="0" rIns="0" bIns="0" rtlCol="0" anchor="ctr"/>
           <a:lstStyle/>
           <a:p>
-            <a:pPr indent="0" marL="0">
+            <a:pPr marL="0" indent="0">
               <a:buNone/>
             </a:pPr>
             <a:r>
@@ -9779,7 +9495,7 @@
           <a:bodyPr wrap="square" lIns="0" tIns="0" rIns="0" bIns="0" rtlCol="0" anchor="t"/>
           <a:lstStyle/>
           <a:p>
-            <a:pPr indent="0" marL="0">
+            <a:pPr marL="0" indent="0">
               <a:lnSpc>
                 <a:spcPct val="108000"/>
               </a:lnSpc>
@@ -9843,7 +9559,7 @@
           <a:bodyPr wrap="square" lIns="0" tIns="0" rIns="0" bIns="0" rtlCol="0" anchor="ctr"/>
           <a:lstStyle/>
           <a:p>
-            <a:pPr indent="0" marL="0">
+            <a:pPr marL="0" indent="0">
               <a:lnSpc>
                 <a:spcPct val="112000"/>
               </a:lnSpc>
@@ -9885,7 +9601,7 @@
           <a:bodyPr wrap="square" lIns="0" tIns="0" rIns="0" bIns="0" rtlCol="0" anchor="t"/>
           <a:lstStyle/>
           <a:p>
-            <a:pPr indent="0" marL="0">
+            <a:pPr marL="0" indent="0">
               <a:buNone/>
             </a:pPr>
             <a:r>
@@ -9923,7 +9639,7 @@
           </a:prstGeom>
           <a:extLst>
             <a:ext uri="{C572A759-6A51-4108-AA02-DFA0A04FC94B}">
-              <ma14:wrappingTextBoxFlag xmlns:ma14="http://schemas.microsoft.com/office/mac/drawingml/2011/main" val="0"/>
+              <ma14:wrappingTextBoxFlag xmlns:ma14="http://schemas.microsoft.com/office/mac/drawingml/2011/main" xmlns="" val="0"/>
             </a:ext>
           </a:extLst>
         </p:spPr>
@@ -9944,7 +9660,7 @@
           <a:p>
             <a:pPr algn="l"/>
             <a:fld id="{F7021451-1387-4CA6-816F-3879F97B5CBC}" type="slidenum">
-              <a:rPr b="0" lang="en-US"/>
+              <a:rPr lang="en-US" b="0"/>
               <a:t>15</a:t>
             </a:fld>
             <a:endParaRPr lang="en-US"/>
@@ -10019,7 +9735,7 @@
           <a:bodyPr wrap="square" lIns="0" tIns="0" rIns="0" bIns="0" rtlCol="0" anchor="ctr"/>
           <a:lstStyle/>
           <a:p>
-            <a:pPr algn="l" indent="0" marL="0">
+            <a:pPr marL="0" indent="0" algn="l">
               <a:buNone/>
             </a:pPr>
             <a:r>
@@ -10058,7 +9774,7 @@
           <a:bodyPr wrap="square" lIns="0" tIns="0" rIns="0" bIns="0" rtlCol="0" anchor="ctr"/>
           <a:lstStyle/>
           <a:p>
-            <a:pPr indent="0" marL="0">
+            <a:pPr marL="0" indent="0">
               <a:buNone/>
             </a:pPr>
             <a:r>
@@ -10124,11 +9840,11 @@
           <a:bodyPr wrap="square" lIns="0" tIns="0" rIns="0" bIns="0" rtlCol="0" anchor="ctr"/>
           <a:lstStyle/>
           <a:p>
-            <a:pPr algn="ctr" indent="0" marL="0">
-              <a:buNone/>
-            </a:pPr>
-            <a:r>
-              <a:rPr lang="en-US" sz="900" b="1" spc="100" kern="0" dirty="0">
+            <a:pPr marL="0" indent="0" algn="ctr">
+              <a:buNone/>
+            </a:pPr>
+            <a:r>
+              <a:rPr lang="en-US" sz="900" b="1" kern="0" spc="100" dirty="0">
                 <a:solidFill>
                   <a:srgbClr val="5A05F4"/>
                 </a:solidFill>
@@ -10190,11 +9906,11 @@
           <a:bodyPr wrap="square" lIns="0" tIns="0" rIns="0" bIns="0" rtlCol="0" anchor="ctr"/>
           <a:lstStyle/>
           <a:p>
-            <a:pPr algn="ctr" indent="0" marL="0">
-              <a:buNone/>
-            </a:pPr>
-            <a:r>
-              <a:rPr lang="en-US" sz="900" b="1" spc="100" kern="0" dirty="0">
+            <a:pPr marL="0" indent="0" algn="ctr">
+              <a:buNone/>
+            </a:pPr>
+            <a:r>
+              <a:rPr lang="en-US" sz="900" b="1" kern="0" spc="100" dirty="0">
                 <a:solidFill>
                   <a:srgbClr val="434343"/>
                 </a:solidFill>
@@ -10210,14 +9926,14 @@
       </p:sp>
       <p:pic>
         <p:nvPicPr>
-          <p:cNvPr id="9" name="Image 0" descr="preencoded.png">    </p:cNvPr>
+          <p:cNvPr id="9" name="Image 0" descr="preencoded.png"/>
           <p:cNvPicPr>
             <a:picLocks noChangeAspect="1"/>
           </p:cNvPicPr>
           <p:nvPr/>
         </p:nvPicPr>
         <p:blipFill>
-          <a:blip r:embed="rId1"/>
+          <a:blip r:embed="rId3"/>
           <a:stretch>
             <a:fillRect/>
           </a:stretch>
@@ -10275,7 +9991,7 @@
           <a:bodyPr wrap="square" lIns="0" tIns="0" rIns="0" bIns="0" rtlCol="0" anchor="ctr"/>
           <a:lstStyle/>
           <a:p>
-            <a:pPr indent="0" marL="0">
+            <a:pPr marL="0" indent="0">
               <a:buNone/>
             </a:pPr>
             <a:r>
@@ -10314,7 +10030,7 @@
           <a:bodyPr wrap="square" lIns="0" tIns="0" rIns="0" bIns="0" rtlCol="0" anchor="t"/>
           <a:lstStyle/>
           <a:p>
-            <a:pPr indent="0" marL="0">
+            <a:pPr marL="0" indent="0">
               <a:lnSpc>
                 <a:spcPct val="108000"/>
               </a:lnSpc>
@@ -10378,7 +10094,7 @@
           <a:bodyPr wrap="square" lIns="0" tIns="0" rIns="0" bIns="0" rtlCol="0" anchor="ctr"/>
           <a:lstStyle/>
           <a:p>
-            <a:pPr indent="0" marL="0">
+            <a:pPr marL="0" indent="0">
               <a:buNone/>
             </a:pPr>
             <a:r>
@@ -10417,7 +10133,7 @@
           <a:bodyPr wrap="square" lIns="0" tIns="0" rIns="0" bIns="0" rtlCol="0" anchor="t"/>
           <a:lstStyle/>
           <a:p>
-            <a:pPr indent="0" marL="0">
+            <a:pPr marL="0" indent="0">
               <a:lnSpc>
                 <a:spcPct val="108000"/>
               </a:lnSpc>
@@ -10486,11 +10202,11 @@
           <a:bodyPr wrap="square" lIns="0" tIns="0" rIns="0" bIns="0" rtlCol="0" anchor="ctr"/>
           <a:lstStyle/>
           <a:p>
-            <a:pPr indent="0" marL="0">
-              <a:buNone/>
-            </a:pPr>
-            <a:r>
-              <a:rPr lang="en-US" sz="950" b="1" spc="150" kern="0" dirty="0">
+            <a:pPr marL="0" indent="0">
+              <a:buNone/>
+            </a:pPr>
+            <a:r>
+              <a:rPr lang="en-US" sz="950" b="1" kern="0" spc="150" dirty="0">
                 <a:solidFill>
                   <a:srgbClr val="106B41"/>
                 </a:solidFill>
@@ -10525,7 +10241,7 @@
           <a:bodyPr wrap="square" lIns="0" tIns="0" rIns="0" bIns="0" rtlCol="0" anchor="ctr"/>
           <a:lstStyle/>
           <a:p>
-            <a:pPr indent="0" marL="0">
+            <a:pPr marL="0" indent="0">
               <a:lnSpc>
                 <a:spcPct val="112000"/>
               </a:lnSpc>
@@ -10594,7 +10310,7 @@
           <a:bodyPr wrap="square" lIns="0" tIns="0" rIns="0" bIns="0" rtlCol="0" anchor="ctr"/>
           <a:lstStyle/>
           <a:p>
-            <a:pPr indent="0" marL="0">
+            <a:pPr marL="0" indent="0">
               <a:lnSpc>
                 <a:spcPct val="112000"/>
               </a:lnSpc>
@@ -10635,7 +10351,7 @@
           </a:prstGeom>
           <a:extLst>
             <a:ext uri="{C572A759-6A51-4108-AA02-DFA0A04FC94B}">
-              <ma14:wrappingTextBoxFlag xmlns:ma14="http://schemas.microsoft.com/office/mac/drawingml/2011/main" val="0"/>
+              <ma14:wrappingTextBoxFlag xmlns:ma14="http://schemas.microsoft.com/office/mac/drawingml/2011/main" xmlns="" val="0"/>
             </a:ext>
           </a:extLst>
         </p:spPr>
@@ -10656,7 +10372,7 @@
           <a:p>
             <a:pPr algn="l"/>
             <a:fld id="{F7021451-1387-4CA6-816F-3879F97B5CBC}" type="slidenum">
-              <a:rPr b="0" lang="en-US"/>
+              <a:rPr lang="en-US" b="0"/>
               <a:t>16</a:t>
             </a:fld>
             <a:endParaRPr lang="en-US"/>
@@ -10731,7 +10447,7 @@
           <a:bodyPr wrap="square" lIns="0" tIns="0" rIns="0" bIns="0" rtlCol="0" anchor="ctr"/>
           <a:lstStyle/>
           <a:p>
-            <a:pPr algn="l" indent="0" marL="0">
+            <a:pPr marL="0" indent="0" algn="l">
               <a:buNone/>
             </a:pPr>
             <a:r>
@@ -10770,7 +10486,7 @@
           <a:bodyPr wrap="square" lIns="0" tIns="0" rIns="0" bIns="0" rtlCol="0" anchor="ctr"/>
           <a:lstStyle/>
           <a:p>
-            <a:pPr indent="0" marL="0">
+            <a:pPr marL="0" indent="0">
               <a:buNone/>
             </a:pPr>
             <a:r>
@@ -10836,11 +10552,11 @@
           <a:bodyPr wrap="square" lIns="0" tIns="0" rIns="0" bIns="0" rtlCol="0" anchor="ctr"/>
           <a:lstStyle/>
           <a:p>
-            <a:pPr algn="ctr" indent="0" marL="0">
-              <a:buNone/>
-            </a:pPr>
-            <a:r>
-              <a:rPr lang="en-US" sz="900" b="1" spc="100" kern="0" dirty="0">
+            <a:pPr marL="0" indent="0" algn="ctr">
+              <a:buNone/>
+            </a:pPr>
+            <a:r>
+              <a:rPr lang="en-US" sz="900" b="1" kern="0" spc="100" dirty="0">
                 <a:solidFill>
                   <a:srgbClr val="5A05F4"/>
                 </a:solidFill>
@@ -10856,14 +10572,14 @@
       </p:sp>
       <p:pic>
         <p:nvPicPr>
-          <p:cNvPr id="7" name="Image 0" descr="preencoded.png">    </p:cNvPr>
+          <p:cNvPr id="7" name="Image 0" descr="preencoded.png"/>
           <p:cNvPicPr>
             <a:picLocks noChangeAspect="1"/>
           </p:cNvPicPr>
           <p:nvPr/>
         </p:nvPicPr>
         <p:blipFill>
-          <a:blip r:embed="rId1"/>
+          <a:blip r:embed="rId3"/>
           <a:stretch>
             <a:fillRect/>
           </a:stretch>
@@ -10921,7 +10637,7 @@
           <a:bodyPr wrap="square" lIns="0" tIns="0" rIns="0" bIns="0" rtlCol="0" anchor="ctr"/>
           <a:lstStyle/>
           <a:p>
-            <a:pPr algn="ctr" indent="0" marL="0">
+            <a:pPr marL="0" indent="0" algn="ctr">
               <a:buNone/>
             </a:pPr>
             <a:r>
@@ -11025,7 +10741,7 @@
           <a:bodyPr wrap="square" lIns="0" tIns="0" rIns="0" bIns="0" rtlCol="0" anchor="ctr"/>
           <a:lstStyle/>
           <a:p>
-            <a:pPr algn="ctr" indent="0" marL="0">
+            <a:pPr marL="0" indent="0" algn="ctr">
               <a:buNone/>
             </a:pPr>
             <a:r>
@@ -11129,7 +10845,7 @@
           <a:bodyPr wrap="square" lIns="0" tIns="0" rIns="0" bIns="0" rtlCol="0" anchor="ctr"/>
           <a:lstStyle/>
           <a:p>
-            <a:pPr algn="ctr" indent="0" marL="0">
+            <a:pPr marL="0" indent="0" algn="ctr">
               <a:buNone/>
             </a:pPr>
             <a:r>
@@ -11233,7 +10949,7 @@
           <a:bodyPr wrap="square" lIns="0" tIns="0" rIns="0" bIns="0" rtlCol="0" anchor="ctr"/>
           <a:lstStyle/>
           <a:p>
-            <a:pPr algn="ctr" indent="0" marL="0">
+            <a:pPr marL="0" indent="0" algn="ctr">
               <a:buNone/>
             </a:pPr>
             <a:r>
@@ -11299,11 +11015,11 @@
           <a:bodyPr wrap="square" lIns="0" tIns="0" rIns="0" bIns="0" rtlCol="0" anchor="ctr"/>
           <a:lstStyle/>
           <a:p>
-            <a:pPr indent="0" marL="0">
-              <a:buNone/>
-            </a:pPr>
-            <a:r>
-              <a:rPr lang="en-US" sz="950" b="1" spc="150" kern="0" dirty="0">
+            <a:pPr marL="0" indent="0">
+              <a:buNone/>
+            </a:pPr>
+            <a:r>
+              <a:rPr lang="en-US" sz="950" b="1" kern="0" spc="150" dirty="0">
                 <a:solidFill>
                   <a:srgbClr val="1A4FBF"/>
                 </a:solidFill>
@@ -11338,7 +11054,7 @@
           <a:bodyPr wrap="square" lIns="0" tIns="0" rIns="0" bIns="0" rtlCol="0" anchor="ctr"/>
           <a:lstStyle/>
           <a:p>
-            <a:pPr indent="0" marL="0">
+            <a:pPr marL="0" indent="0">
               <a:lnSpc>
                 <a:spcPct val="112000"/>
               </a:lnSpc>
@@ -11402,7 +11118,7 @@
           <a:bodyPr wrap="square" lIns="0" tIns="0" rIns="0" bIns="0" rtlCol="0" anchor="ctr"/>
           <a:lstStyle/>
           <a:p>
-            <a:pPr indent="0" marL="0">
+            <a:pPr marL="0" indent="0">
               <a:lnSpc>
                 <a:spcPct val="112000"/>
               </a:lnSpc>
@@ -11425,7 +11141,7 @@
       </p:sp>
       <p:sp>
         <p:nvSpPr>
-          <p:cNvPr id="25" name="Slide Number Placeholder 0"/>
+          <p:cNvPr id="27" name="Slide Number Placeholder 0"/>
           <p:cNvSpPr>
             <a:spLocks noGrp="1"/>
           </p:cNvSpPr>
@@ -11443,7 +11159,7 @@
           </a:prstGeom>
           <a:extLst>
             <a:ext uri="{C572A759-6A51-4108-AA02-DFA0A04FC94B}">
-              <ma14:wrappingTextBoxFlag xmlns:ma14="http://schemas.microsoft.com/office/mac/drawingml/2011/main" val="0"/>
+              <ma14:wrappingTextBoxFlag xmlns:ma14="http://schemas.microsoft.com/office/mac/drawingml/2011/main" xmlns="" val="0"/>
             </a:ext>
           </a:extLst>
         </p:spPr>
@@ -11464,7 +11180,7 @@
           <a:p>
             <a:pPr algn="l"/>
             <a:fld id="{F7021451-1387-4CA6-816F-3879F97B5CBC}" type="slidenum">
-              <a:rPr b="0" lang="en-US"/>
+              <a:rPr lang="en-US" b="0"/>
               <a:t>17</a:t>
             </a:fld>
             <a:endParaRPr lang="en-US"/>
@@ -11517,11 +11233,11 @@
           <a:bodyPr wrap="square" lIns="0" tIns="0" rIns="0" bIns="0" rtlCol="0" anchor="ctr"/>
           <a:lstStyle/>
           <a:p>
-            <a:pPr indent="0" marL="0">
-              <a:buNone/>
-            </a:pPr>
-            <a:r>
-              <a:rPr lang="en-US" sz="1200" b="1" spc="400" kern="0" dirty="0">
+            <a:pPr marL="0" indent="0">
+              <a:buNone/>
+            </a:pPr>
+            <a:r>
+              <a:rPr lang="en-US" sz="1200" b="1" kern="0" spc="400" dirty="0">
                 <a:solidFill>
                   <a:srgbClr val="FFFFFF"/>
                 </a:solidFill>
@@ -11556,7 +11272,7 @@
           <a:bodyPr wrap="square" lIns="0" tIns="0" rIns="0" bIns="0" rtlCol="0" anchor="ctr"/>
           <a:lstStyle/>
           <a:p>
-            <a:pPr indent="0" marL="0">
+            <a:pPr marL="0" indent="0">
               <a:buNone/>
             </a:pPr>
             <a:r>
@@ -11595,7 +11311,7 @@
           <a:bodyPr wrap="square" lIns="0" tIns="0" rIns="0" bIns="0" rtlCol="0" anchor="t"/>
           <a:lstStyle/>
           <a:p>
-            <a:pPr indent="0" marL="0">
+            <a:pPr marL="0" indent="0">
               <a:buNone/>
             </a:pPr>
             <a:r>
@@ -11656,7 +11372,7 @@
           <a:bodyPr wrap="square" lIns="0" tIns="0" rIns="0" bIns="0" rtlCol="0" anchor="ctr"/>
           <a:lstStyle/>
           <a:p>
-            <a:pPr algn="ctr" indent="0" marL="0">
+            <a:pPr marL="0" indent="0" algn="ctr">
               <a:buNone/>
             </a:pPr>
             <a:r>
@@ -11742,7 +11458,7 @@
           <a:bodyPr wrap="square" lIns="0" tIns="0" rIns="0" bIns="0" rtlCol="0" anchor="ctr"/>
           <a:lstStyle/>
           <a:p>
-            <a:pPr indent="0" marL="0">
+            <a:pPr marL="0" indent="0">
               <a:buNone/>
             </a:pPr>
             <a:r>
@@ -11803,11 +11519,11 @@
           <a:bodyPr wrap="square" lIns="0" tIns="0" rIns="0" bIns="0" rtlCol="0" anchor="ctr"/>
           <a:lstStyle/>
           <a:p>
-            <a:pPr algn="ctr" indent="0" marL="0">
-              <a:buNone/>
-            </a:pPr>
-            <a:r>
-              <a:rPr lang="en-US" sz="900" b="1" spc="100" kern="0" dirty="0">
+            <a:pPr marL="0" indent="0" algn="ctr">
+              <a:buNone/>
+            </a:pPr>
+            <a:r>
+              <a:rPr lang="en-US" sz="900" b="1" kern="0" spc="100" dirty="0">
                 <a:solidFill>
                   <a:srgbClr val="FFFFFF"/>
                 </a:solidFill>
@@ -11823,14 +11539,14 @@
       </p:sp>
       <p:pic>
         <p:nvPicPr>
-          <p:cNvPr id="6" name="Image 0" descr="preencoded.png">    </p:cNvPr>
+          <p:cNvPr id="6" name="Image 0" descr="preencoded.png"/>
           <p:cNvPicPr>
             <a:picLocks noChangeAspect="1"/>
           </p:cNvPicPr>
           <p:nvPr/>
         </p:nvPicPr>
         <p:blipFill>
-          <a:blip r:embed="rId1"/>
+          <a:blip r:embed="rId3"/>
           <a:stretch>
             <a:fillRect/>
           </a:stretch>
@@ -11908,7 +11624,7 @@
           <a:bodyPr wrap="square" lIns="0" tIns="0" rIns="0" bIns="0" rtlCol="0" anchor="ctr"/>
           <a:lstStyle/>
           <a:p>
-            <a:pPr algn="ctr" indent="0" marL="0">
+            <a:pPr marL="0" indent="0" algn="ctr">
               <a:buNone/>
             </a:pPr>
             <a:r>
@@ -11947,7 +11663,7 @@
           <a:bodyPr wrap="square" lIns="0" tIns="0" rIns="0" bIns="0" rtlCol="0" anchor="ctr"/>
           <a:lstStyle/>
           <a:p>
-            <a:pPr indent="0" marL="0">
+            <a:pPr marL="0" indent="0">
               <a:buNone/>
             </a:pPr>
             <a:r>
@@ -11986,7 +11702,7 @@
           <a:bodyPr wrap="square" lIns="0" tIns="0" rIns="0" bIns="0" rtlCol="0" anchor="t"/>
           <a:lstStyle/>
           <a:p>
-            <a:pPr indent="0" marL="0">
+            <a:pPr marL="0" indent="0">
               <a:lnSpc>
                 <a:spcPct val="108000"/>
               </a:lnSpc>
@@ -12070,7 +11786,7 @@
           <a:bodyPr wrap="square" lIns="0" tIns="0" rIns="0" bIns="0" rtlCol="0" anchor="ctr"/>
           <a:lstStyle/>
           <a:p>
-            <a:pPr algn="ctr" indent="0" marL="0">
+            <a:pPr marL="0" indent="0" algn="ctr">
               <a:buNone/>
             </a:pPr>
             <a:r>
@@ -12109,7 +11825,7 @@
           <a:bodyPr wrap="square" lIns="0" tIns="0" rIns="0" bIns="0" rtlCol="0" anchor="ctr"/>
           <a:lstStyle/>
           <a:p>
-            <a:pPr indent="0" marL="0">
+            <a:pPr marL="0" indent="0">
               <a:buNone/>
             </a:pPr>
             <a:r>
@@ -12148,7 +11864,7 @@
           <a:bodyPr wrap="square" lIns="0" tIns="0" rIns="0" bIns="0" rtlCol="0" anchor="t"/>
           <a:lstStyle/>
           <a:p>
-            <a:pPr indent="0" marL="0">
+            <a:pPr marL="0" indent="0">
               <a:lnSpc>
                 <a:spcPct val="108000"/>
               </a:lnSpc>
@@ -12232,7 +11948,7 @@
           <a:bodyPr wrap="square" lIns="0" tIns="0" rIns="0" bIns="0" rtlCol="0" anchor="ctr"/>
           <a:lstStyle/>
           <a:p>
-            <a:pPr algn="ctr" indent="0" marL="0">
+            <a:pPr marL="0" indent="0" algn="ctr">
               <a:buNone/>
             </a:pPr>
             <a:r>
@@ -12271,7 +11987,7 @@
           <a:bodyPr wrap="square" lIns="0" tIns="0" rIns="0" bIns="0" rtlCol="0" anchor="ctr"/>
           <a:lstStyle/>
           <a:p>
-            <a:pPr indent="0" marL="0">
+            <a:pPr marL="0" indent="0">
               <a:buNone/>
             </a:pPr>
             <a:r>
@@ -12310,7 +12026,7 @@
           <a:bodyPr wrap="square" lIns="0" tIns="0" rIns="0" bIns="0" rtlCol="0" anchor="t"/>
           <a:lstStyle/>
           <a:p>
-            <a:pPr indent="0" marL="0">
+            <a:pPr marL="0" indent="0">
               <a:lnSpc>
                 <a:spcPct val="108000"/>
               </a:lnSpc>
@@ -12394,7 +12110,7 @@
           <a:bodyPr wrap="square" lIns="0" tIns="0" rIns="0" bIns="0" rtlCol="0" anchor="ctr"/>
           <a:lstStyle/>
           <a:p>
-            <a:pPr algn="ctr" indent="0" marL="0">
+            <a:pPr marL="0" indent="0" algn="ctr">
               <a:buNone/>
             </a:pPr>
             <a:r>
@@ -12433,7 +12149,7 @@
           <a:bodyPr wrap="square" lIns="0" tIns="0" rIns="0" bIns="0" rtlCol="0" anchor="ctr"/>
           <a:lstStyle/>
           <a:p>
-            <a:pPr indent="0" marL="0">
+            <a:pPr marL="0" indent="0">
               <a:buNone/>
             </a:pPr>
             <a:r>
@@ -12472,7 +12188,7 @@
           <a:bodyPr wrap="square" lIns="0" tIns="0" rIns="0" bIns="0" rtlCol="0" anchor="t"/>
           <a:lstStyle/>
           <a:p>
-            <a:pPr indent="0" marL="0">
+            <a:pPr marL="0" indent="0">
               <a:lnSpc>
                 <a:spcPct val="108000"/>
               </a:lnSpc>
@@ -12556,7 +12272,7 @@
           <a:bodyPr wrap="square" lIns="0" tIns="0" rIns="0" bIns="0" rtlCol="0" anchor="ctr"/>
           <a:lstStyle/>
           <a:p>
-            <a:pPr algn="ctr" indent="0" marL="0">
+            <a:pPr marL="0" indent="0" algn="ctr">
               <a:buNone/>
             </a:pPr>
             <a:r>
@@ -12595,7 +12311,7 @@
           <a:bodyPr wrap="square" lIns="0" tIns="0" rIns="0" bIns="0" rtlCol="0" anchor="ctr"/>
           <a:lstStyle/>
           <a:p>
-            <a:pPr indent="0" marL="0">
+            <a:pPr marL="0" indent="0">
               <a:buNone/>
             </a:pPr>
             <a:r>
@@ -12634,7 +12350,7 @@
           <a:bodyPr wrap="square" lIns="0" tIns="0" rIns="0" bIns="0" rtlCol="0" anchor="t"/>
           <a:lstStyle/>
           <a:p>
-            <a:pPr indent="0" marL="0">
+            <a:pPr marL="0" indent="0">
               <a:lnSpc>
                 <a:spcPct val="108000"/>
               </a:lnSpc>
@@ -12698,11 +12414,11 @@
           <a:bodyPr wrap="square" lIns="0" tIns="0" rIns="0" bIns="0" rtlCol="0" anchor="ctr"/>
           <a:lstStyle/>
           <a:p>
-            <a:pPr indent="0" marL="0">
-              <a:buNone/>
-            </a:pPr>
-            <a:r>
-              <a:rPr lang="en-US" sz="950" b="1" spc="150" kern="0" dirty="0">
+            <a:pPr marL="0" indent="0">
+              <a:buNone/>
+            </a:pPr>
+            <a:r>
+              <a:rPr lang="en-US" sz="950" b="1" kern="0" spc="150" dirty="0">
                 <a:solidFill>
                   <a:srgbClr val="FFFFFF"/>
                 </a:solidFill>
@@ -12737,7 +12453,7 @@
           <a:bodyPr wrap="square" lIns="0" tIns="0" rIns="0" bIns="0" rtlCol="0" anchor="ctr"/>
           <a:lstStyle/>
           <a:p>
-            <a:pPr indent="0" marL="0">
+            <a:pPr marL="0" indent="0">
               <a:lnSpc>
                 <a:spcPct val="112000"/>
               </a:lnSpc>
@@ -12760,7 +12476,7 @@
       </p:sp>
       <p:sp>
         <p:nvSpPr>
-          <p:cNvPr id="25" name="Slide Number Placeholder 0"/>
+          <p:cNvPr id="35" name="Slide Number Placeholder 0"/>
           <p:cNvSpPr>
             <a:spLocks noGrp="1"/>
           </p:cNvSpPr>
@@ -12778,7 +12494,7 @@
           </a:prstGeom>
           <a:extLst>
             <a:ext uri="{C572A759-6A51-4108-AA02-DFA0A04FC94B}">
-              <ma14:wrappingTextBoxFlag xmlns:ma14="http://schemas.microsoft.com/office/mac/drawingml/2011/main" val="0"/>
+              <ma14:wrappingTextBoxFlag xmlns:ma14="http://schemas.microsoft.com/office/mac/drawingml/2011/main" xmlns="" val="0"/>
             </a:ext>
           </a:extLst>
         </p:spPr>
@@ -12799,7 +12515,7 @@
           <a:p>
             <a:pPr algn="l"/>
             <a:fld id="{F7021451-1387-4CA6-816F-3879F97B5CBC}" type="slidenum">
-              <a:rPr b="0" lang="en-US"/>
+              <a:rPr lang="en-US" b="0"/>
               <a:t>19</a:t>
             </a:fld>
             <a:endParaRPr lang="en-US"/>
@@ -12874,7 +12590,7 @@
           <a:bodyPr wrap="square" lIns="0" tIns="0" rIns="0" bIns="0" rtlCol="0" anchor="ctr"/>
           <a:lstStyle/>
           <a:p>
-            <a:pPr indent="0" marL="0">
+            <a:pPr marL="0" indent="0">
               <a:buNone/>
             </a:pPr>
             <a:r>
@@ -12913,7 +12629,7 @@
           <a:bodyPr wrap="square" lIns="0" tIns="0" rIns="0" bIns="0" rtlCol="0" anchor="t"/>
           <a:lstStyle/>
           <a:p>
-            <a:pPr indent="0" marL="0">
+            <a:pPr marL="0" indent="0">
               <a:lnSpc>
                 <a:spcPct val="100000"/>
               </a:lnSpc>
@@ -12982,11 +12698,11 @@
           <a:bodyPr wrap="square" lIns="0" tIns="0" rIns="0" bIns="0" rtlCol="0" anchor="ctr"/>
           <a:lstStyle/>
           <a:p>
-            <a:pPr algn="ctr" indent="0" marL="0">
-              <a:buNone/>
-            </a:pPr>
-            <a:r>
-              <a:rPr lang="en-US" sz="900" b="1" spc="100" kern="0" dirty="0">
+            <a:pPr marL="0" indent="0" algn="ctr">
+              <a:buNone/>
+            </a:pPr>
+            <a:r>
+              <a:rPr lang="en-US" sz="900" b="1" kern="0" spc="100" dirty="0">
                 <a:solidFill>
                   <a:srgbClr val="5A05F4"/>
                 </a:solidFill>
@@ -13002,14 +12718,14 @@
       </p:sp>
       <p:pic>
         <p:nvPicPr>
-          <p:cNvPr id="7" name="Image 0" descr="preencoded.png">    </p:cNvPr>
+          <p:cNvPr id="7" name="Image 0" descr="preencoded.png"/>
           <p:cNvPicPr>
             <a:picLocks noChangeAspect="1"/>
           </p:cNvPicPr>
           <p:nvPr/>
         </p:nvPicPr>
         <p:blipFill>
-          <a:blip r:embed="rId1"/>
+          <a:blip r:embed="rId3"/>
           <a:stretch>
             <a:fillRect/>
           </a:stretch>
@@ -13087,7 +12803,7 @@
           <a:bodyPr wrap="square" lIns="0" tIns="0" rIns="0" bIns="0" rtlCol="0" anchor="ctr"/>
           <a:lstStyle/>
           <a:p>
-            <a:pPr algn="ctr" indent="0" marL="0">
+            <a:pPr marL="0" indent="0" algn="ctr">
               <a:buNone/>
             </a:pPr>
             <a:r>
@@ -13126,7 +12842,7 @@
           <a:bodyPr wrap="square" lIns="0" tIns="0" rIns="0" bIns="0" rtlCol="0" anchor="ctr"/>
           <a:lstStyle/>
           <a:p>
-            <a:pPr indent="0" marL="0">
+            <a:pPr marL="0" indent="0">
               <a:buNone/>
             </a:pPr>
             <a:r>
@@ -13165,7 +12881,7 @@
           <a:bodyPr wrap="square" lIns="0" tIns="0" rIns="0" bIns="0" rtlCol="0" anchor="t"/>
           <a:lstStyle/>
           <a:p>
-            <a:pPr indent="0" marL="0">
+            <a:pPr marL="0" indent="0">
               <a:lnSpc>
                 <a:spcPct val="108000"/>
               </a:lnSpc>
@@ -13249,7 +12965,7 @@
           <a:bodyPr wrap="square" lIns="0" tIns="0" rIns="0" bIns="0" rtlCol="0" anchor="ctr"/>
           <a:lstStyle/>
           <a:p>
-            <a:pPr algn="ctr" indent="0" marL="0">
+            <a:pPr marL="0" indent="0" algn="ctr">
               <a:buNone/>
             </a:pPr>
             <a:r>
@@ -13288,7 +13004,7 @@
           <a:bodyPr wrap="square" lIns="0" tIns="0" rIns="0" bIns="0" rtlCol="0" anchor="ctr"/>
           <a:lstStyle/>
           <a:p>
-            <a:pPr indent="0" marL="0">
+            <a:pPr marL="0" indent="0">
               <a:buNone/>
             </a:pPr>
             <a:r>
@@ -13327,7 +13043,7 @@
           <a:bodyPr wrap="square" lIns="0" tIns="0" rIns="0" bIns="0" rtlCol="0" anchor="t"/>
           <a:lstStyle/>
           <a:p>
-            <a:pPr indent="0" marL="0">
+            <a:pPr marL="0" indent="0">
               <a:lnSpc>
                 <a:spcPct val="108000"/>
               </a:lnSpc>
@@ -13411,7 +13127,7 @@
           <a:bodyPr wrap="square" lIns="0" tIns="0" rIns="0" bIns="0" rtlCol="0" anchor="ctr"/>
           <a:lstStyle/>
           <a:p>
-            <a:pPr algn="ctr" indent="0" marL="0">
+            <a:pPr marL="0" indent="0" algn="ctr">
               <a:buNone/>
             </a:pPr>
             <a:r>
@@ -13450,7 +13166,7 @@
           <a:bodyPr wrap="square" lIns="0" tIns="0" rIns="0" bIns="0" rtlCol="0" anchor="ctr"/>
           <a:lstStyle/>
           <a:p>
-            <a:pPr indent="0" marL="0">
+            <a:pPr marL="0" indent="0">
               <a:buNone/>
             </a:pPr>
             <a:r>
@@ -13489,7 +13205,7 @@
           <a:bodyPr wrap="square" lIns="0" tIns="0" rIns="0" bIns="0" rtlCol="0" anchor="t"/>
           <a:lstStyle/>
           <a:p>
-            <a:pPr indent="0" marL="0">
+            <a:pPr marL="0" indent="0">
               <a:lnSpc>
                 <a:spcPct val="108000"/>
               </a:lnSpc>
@@ -13573,7 +13289,7 @@
           <a:bodyPr wrap="square" lIns="0" tIns="0" rIns="0" bIns="0" rtlCol="0" anchor="ctr"/>
           <a:lstStyle/>
           <a:p>
-            <a:pPr algn="ctr" indent="0" marL="0">
+            <a:pPr marL="0" indent="0" algn="ctr">
               <a:buNone/>
             </a:pPr>
             <a:r>
@@ -13612,7 +13328,7 @@
           <a:bodyPr wrap="square" lIns="0" tIns="0" rIns="0" bIns="0" rtlCol="0" anchor="ctr"/>
           <a:lstStyle/>
           <a:p>
-            <a:pPr indent="0" marL="0">
+            <a:pPr marL="0" indent="0">
               <a:buNone/>
             </a:pPr>
             <a:r>
@@ -13651,7 +13367,7 @@
           <a:bodyPr wrap="square" lIns="0" tIns="0" rIns="0" bIns="0" rtlCol="0" anchor="t"/>
           <a:lstStyle/>
           <a:p>
-            <a:pPr indent="0" marL="0">
+            <a:pPr marL="0" indent="0">
               <a:lnSpc>
                 <a:spcPct val="108000"/>
               </a:lnSpc>
@@ -13735,7 +13451,7 @@
           <a:bodyPr wrap="square" lIns="0" tIns="0" rIns="0" bIns="0" rtlCol="0" anchor="ctr"/>
           <a:lstStyle/>
           <a:p>
-            <a:pPr algn="ctr" indent="0" marL="0">
+            <a:pPr marL="0" indent="0" algn="ctr">
               <a:buNone/>
             </a:pPr>
             <a:r>
@@ -13774,7 +13490,7 @@
           <a:bodyPr wrap="square" lIns="0" tIns="0" rIns="0" bIns="0" rtlCol="0" anchor="ctr"/>
           <a:lstStyle/>
           <a:p>
-            <a:pPr indent="0" marL="0">
+            <a:pPr marL="0" indent="0">
               <a:buNone/>
             </a:pPr>
             <a:r>
@@ -13813,7 +13529,7 @@
           <a:bodyPr wrap="square" lIns="0" tIns="0" rIns="0" bIns="0" rtlCol="0" anchor="t"/>
           <a:lstStyle/>
           <a:p>
-            <a:pPr indent="0" marL="0">
+            <a:pPr marL="0" indent="0">
               <a:lnSpc>
                 <a:spcPct val="108000"/>
               </a:lnSpc>
@@ -13836,7 +13552,7 @@
       </p:sp>
       <p:sp>
         <p:nvSpPr>
-          <p:cNvPr id="25" name="Slide Number Placeholder 0"/>
+          <p:cNvPr id="33" name="Slide Number Placeholder 0"/>
           <p:cNvSpPr>
             <a:spLocks noGrp="1"/>
           </p:cNvSpPr>
@@ -13854,7 +13570,7 @@
           </a:prstGeom>
           <a:extLst>
             <a:ext uri="{C572A759-6A51-4108-AA02-DFA0A04FC94B}">
-              <ma14:wrappingTextBoxFlag xmlns:ma14="http://schemas.microsoft.com/office/mac/drawingml/2011/main" val="0"/>
+              <ma14:wrappingTextBoxFlag xmlns:ma14="http://schemas.microsoft.com/office/mac/drawingml/2011/main" xmlns="" val="0"/>
             </a:ext>
           </a:extLst>
         </p:spPr>
@@ -13875,7 +13591,7 @@
           <a:p>
             <a:pPr algn="l"/>
             <a:fld id="{F7021451-1387-4CA6-816F-3879F97B5CBC}" type="slidenum">
-              <a:rPr b="0" lang="en-US"/>
+              <a:rPr lang="en-US" b="0"/>
               <a:t>2</a:t>
             </a:fld>
             <a:endParaRPr lang="en-US"/>
@@ -13950,7 +13666,7 @@
           <a:bodyPr wrap="square" lIns="0" tIns="0" rIns="0" bIns="0" rtlCol="0" anchor="ctr"/>
           <a:lstStyle/>
           <a:p>
-            <a:pPr indent="0" marL="0">
+            <a:pPr marL="0" indent="0">
               <a:buNone/>
             </a:pPr>
             <a:r>
@@ -14011,11 +13727,11 @@
           <a:bodyPr wrap="square" lIns="0" tIns="0" rIns="0" bIns="0" rtlCol="0" anchor="ctr"/>
           <a:lstStyle/>
           <a:p>
-            <a:pPr algn="ctr" indent="0" marL="0">
-              <a:buNone/>
-            </a:pPr>
-            <a:r>
-              <a:rPr lang="en-US" sz="900" b="1" spc="100" kern="0" dirty="0">
+            <a:pPr marL="0" indent="0" algn="ctr">
+              <a:buNone/>
+            </a:pPr>
+            <a:r>
+              <a:rPr lang="en-US" sz="900" b="1" kern="0" spc="100" dirty="0">
                 <a:solidFill>
                   <a:srgbClr val="FFFFFF"/>
                 </a:solidFill>
@@ -14031,14 +13747,14 @@
       </p:sp>
       <p:pic>
         <p:nvPicPr>
-          <p:cNvPr id="6" name="Image 0" descr="preencoded.png">    </p:cNvPr>
+          <p:cNvPr id="6" name="Image 0" descr="preencoded.png"/>
           <p:cNvPicPr>
             <a:picLocks noChangeAspect="1"/>
           </p:cNvPicPr>
           <p:nvPr/>
         </p:nvPicPr>
         <p:blipFill>
-          <a:blip r:embed="rId1"/>
+          <a:blip r:embed="rId3"/>
           <a:stretch>
             <a:fillRect/>
           </a:stretch>
@@ -14094,7 +13810,7 @@
           <a:bodyPr wrap="square" lIns="0" tIns="0" rIns="0" bIns="0" rtlCol="0" anchor="ctr"/>
           <a:lstStyle/>
           <a:p>
-            <a:pPr algn="ctr" indent="0" marL="0">
+            <a:pPr marL="0" indent="0" algn="ctr">
               <a:buNone/>
             </a:pPr>
             <a:r>
@@ -14133,7 +13849,7 @@
           <a:bodyPr wrap="square" lIns="0" tIns="0" rIns="0" bIns="0" rtlCol="0" anchor="ctr"/>
           <a:lstStyle/>
           <a:p>
-            <a:pPr indent="0" marL="0">
+            <a:pPr marL="0" indent="0">
               <a:buNone/>
             </a:pPr>
             <a:r>
@@ -14147,9 +13863,6 @@
               </a:rPr>
               <a:t>Анатомія кейса  </a:t>
             </a:r>
-            <a:pPr indent="0" marL="0">
-              <a:buNone/>
-            </a:pPr>
             <a:r>
               <a:rPr lang="en-US" sz="1200" dirty="0">
                 <a:solidFill>
@@ -14206,7 +13919,7 @@
           <a:bodyPr wrap="square" lIns="0" tIns="0" rIns="0" bIns="0" rtlCol="0" anchor="ctr"/>
           <a:lstStyle/>
           <a:p>
-            <a:pPr algn="ctr" indent="0" marL="0">
+            <a:pPr marL="0" indent="0" algn="ctr">
               <a:buNone/>
             </a:pPr>
             <a:r>
@@ -14245,7 +13958,7 @@
           <a:bodyPr wrap="square" lIns="0" tIns="0" rIns="0" bIns="0" rtlCol="0" anchor="ctr"/>
           <a:lstStyle/>
           <a:p>
-            <a:pPr indent="0" marL="0">
+            <a:pPr marL="0" indent="0">
               <a:buNone/>
             </a:pPr>
             <a:r>
@@ -14259,9 +13972,6 @@
               </a:rPr>
               <a:t>Прогнати suite  </a:t>
             </a:r>
-            <a:pPr indent="0" marL="0">
-              <a:buNone/>
-            </a:pPr>
             <a:r>
               <a:rPr lang="en-US" sz="1200" dirty="0">
                 <a:solidFill>
@@ -14318,7 +14028,7 @@
           <a:bodyPr wrap="square" lIns="0" tIns="0" rIns="0" bIns="0" rtlCol="0" anchor="ctr"/>
           <a:lstStyle/>
           <a:p>
-            <a:pPr algn="ctr" indent="0" marL="0">
+            <a:pPr marL="0" indent="0" algn="ctr">
               <a:buNone/>
             </a:pPr>
             <a:r>
@@ -14357,7 +14067,7 @@
           <a:bodyPr wrap="square" lIns="0" tIns="0" rIns="0" bIns="0" rtlCol="0" anchor="ctr"/>
           <a:lstStyle/>
           <a:p>
-            <a:pPr indent="0" marL="0">
+            <a:pPr marL="0" indent="0">
               <a:buNone/>
             </a:pPr>
             <a:r>
@@ -14371,9 +14081,6 @@
               </a:rPr>
               <a:t>Зламати і зловити  </a:t>
             </a:r>
-            <a:pPr indent="0" marL="0">
-              <a:buNone/>
-            </a:pPr>
             <a:r>
               <a:rPr lang="en-US" sz="1200" dirty="0">
                 <a:solidFill>
@@ -14430,7 +14137,7 @@
           <a:bodyPr wrap="square" lIns="0" tIns="0" rIns="0" bIns="0" rtlCol="0" anchor="ctr"/>
           <a:lstStyle/>
           <a:p>
-            <a:pPr algn="ctr" indent="0" marL="0">
+            <a:pPr marL="0" indent="0" algn="ctr">
               <a:buNone/>
             </a:pPr>
             <a:r>
@@ -14469,7 +14176,7 @@
           <a:bodyPr wrap="square" lIns="0" tIns="0" rIns="0" bIns="0" rtlCol="0" anchor="ctr"/>
           <a:lstStyle/>
           <a:p>
-            <a:pPr indent="0" marL="0">
+            <a:pPr marL="0" indent="0">
               <a:buNone/>
             </a:pPr>
             <a:r>
@@ -14483,9 +14190,6 @@
               </a:rPr>
               <a:t>Власні кейси  </a:t>
             </a:r>
-            <a:pPr indent="0" marL="0">
-              <a:buNone/>
-            </a:pPr>
             <a:r>
               <a:rPr lang="en-US" sz="1200" dirty="0">
                 <a:solidFill>
@@ -14542,7 +14246,7 @@
           <a:bodyPr wrap="square" lIns="0" tIns="0" rIns="0" bIns="0" rtlCol="0" anchor="ctr"/>
           <a:lstStyle/>
           <a:p>
-            <a:pPr algn="ctr" indent="0" marL="0">
+            <a:pPr marL="0" indent="0" algn="ctr">
               <a:buNone/>
             </a:pPr>
             <a:r>
@@ -14581,7 +14285,7 @@
           <a:bodyPr wrap="square" lIns="0" tIns="0" rIns="0" bIns="0" rtlCol="0" anchor="ctr"/>
           <a:lstStyle/>
           <a:p>
-            <a:pPr indent="0" marL="0">
+            <a:pPr marL="0" indent="0">
               <a:buNone/>
             </a:pPr>
             <a:r>
@@ -14595,9 +14299,6 @@
               </a:rPr>
               <a:t>LLM-as-judge · опційно  </a:t>
             </a:r>
-            <a:pPr indent="0" marL="0">
-              <a:buNone/>
-            </a:pPr>
             <a:r>
               <a:rPr lang="en-US" sz="1200" dirty="0">
                 <a:solidFill>
@@ -14633,7 +14334,7 @@
           </a:prstGeom>
           <a:extLst>
             <a:ext uri="{C572A759-6A51-4108-AA02-DFA0A04FC94B}">
-              <ma14:wrappingTextBoxFlag xmlns:ma14="http://schemas.microsoft.com/office/mac/drawingml/2011/main" val="0"/>
+              <ma14:wrappingTextBoxFlag xmlns:ma14="http://schemas.microsoft.com/office/mac/drawingml/2011/main" xmlns="" val="0"/>
             </a:ext>
           </a:extLst>
         </p:spPr>
@@ -14654,7 +14355,7 @@
           <a:p>
             <a:pPr algn="l"/>
             <a:fld id="{F7021451-1387-4CA6-816F-3879F97B5CBC}" type="slidenum">
-              <a:rPr b="0" lang="en-US"/>
+              <a:rPr lang="en-US" b="0"/>
               <a:t>20</a:t>
             </a:fld>
             <a:endParaRPr lang="en-US"/>
@@ -14707,11 +14408,11 @@
           <a:bodyPr wrap="square" lIns="0" tIns="0" rIns="0" bIns="0" rtlCol="0" anchor="ctr"/>
           <a:lstStyle/>
           <a:p>
-            <a:pPr indent="0" marL="0">
-              <a:buNone/>
-            </a:pPr>
-            <a:r>
-              <a:rPr lang="en-US" sz="1200" b="1" spc="400" kern="0" dirty="0">
+            <a:pPr marL="0" indent="0">
+              <a:buNone/>
+            </a:pPr>
+            <a:r>
+              <a:rPr lang="en-US" sz="1200" b="1" kern="0" spc="400" dirty="0">
                 <a:solidFill>
                   <a:srgbClr val="FFFFFF"/>
                 </a:solidFill>
@@ -14746,7 +14447,7 @@
           <a:bodyPr wrap="square" lIns="0" tIns="0" rIns="0" bIns="0" rtlCol="0" anchor="ctr"/>
           <a:lstStyle/>
           <a:p>
-            <a:pPr indent="0" marL="0">
+            <a:pPr marL="0" indent="0">
               <a:buNone/>
             </a:pPr>
             <a:r>
@@ -14785,7 +14486,7 @@
           <a:bodyPr wrap="square" lIns="0" tIns="0" rIns="0" bIns="0" rtlCol="0" anchor="t"/>
           <a:lstStyle/>
           <a:p>
-            <a:pPr indent="0" marL="0">
+            <a:pPr marL="0" indent="0">
               <a:buNone/>
             </a:pPr>
             <a:r>
@@ -14871,7 +14572,7 @@
           <a:bodyPr wrap="square" lIns="0" tIns="0" rIns="0" bIns="0" rtlCol="0" anchor="ctr"/>
           <a:lstStyle/>
           <a:p>
-            <a:pPr indent="0" marL="0">
+            <a:pPr marL="0" indent="0">
               <a:buNone/>
             </a:pPr>
             <a:r>
@@ -14937,11 +14638,11 @@
           <a:bodyPr wrap="square" lIns="0" tIns="0" rIns="0" bIns="0" rtlCol="0" anchor="ctr"/>
           <a:lstStyle/>
           <a:p>
-            <a:pPr algn="ctr" indent="0" marL="0">
-              <a:buNone/>
-            </a:pPr>
-            <a:r>
-              <a:rPr lang="en-US" sz="900" b="1" spc="100" kern="0" dirty="0">
+            <a:pPr marL="0" indent="0" algn="ctr">
+              <a:buNone/>
+            </a:pPr>
+            <a:r>
+              <a:rPr lang="en-US" sz="900" b="1" kern="0" spc="100" dirty="0">
                 <a:solidFill>
                   <a:srgbClr val="1A4FBF"/>
                 </a:solidFill>
@@ -14957,14 +14658,14 @@
       </p:sp>
       <p:pic>
         <p:nvPicPr>
-          <p:cNvPr id="6" name="Image 0" descr="preencoded.png">    </p:cNvPr>
+          <p:cNvPr id="6" name="Image 0" descr="preencoded.png"/>
           <p:cNvPicPr>
             <a:picLocks noChangeAspect="1"/>
           </p:cNvPicPr>
           <p:nvPr/>
         </p:nvPicPr>
         <p:blipFill>
-          <a:blip r:embed="rId1"/>
+          <a:blip r:embed="rId3"/>
           <a:stretch>
             <a:fillRect/>
           </a:stretch>
@@ -15022,7 +14723,7 @@
           <a:bodyPr wrap="square" lIns="0" tIns="0" rIns="0" bIns="0" rtlCol="0" anchor="ctr"/>
           <a:lstStyle/>
           <a:p>
-            <a:pPr indent="0" marL="0">
+            <a:pPr marL="0" indent="0">
               <a:buNone/>
             </a:pPr>
             <a:r>
@@ -15061,7 +14762,7 @@
           <a:bodyPr wrap="square" lIns="0" tIns="0" rIns="0" bIns="0" rtlCol="0" anchor="t"/>
           <a:lstStyle/>
           <a:p>
-            <a:pPr indent="0" marL="0">
+            <a:pPr marL="0" indent="0">
               <a:lnSpc>
                 <a:spcPct val="108000"/>
               </a:lnSpc>
@@ -15125,7 +14826,7 @@
           <a:bodyPr wrap="square" lIns="0" tIns="0" rIns="0" bIns="0" rtlCol="0" anchor="ctr"/>
           <a:lstStyle/>
           <a:p>
-            <a:pPr indent="0" marL="0">
+            <a:pPr marL="0" indent="0">
               <a:buNone/>
             </a:pPr>
             <a:r>
@@ -15164,7 +14865,7 @@
           <a:bodyPr wrap="square" lIns="0" tIns="0" rIns="0" bIns="0" rtlCol="0" anchor="t"/>
           <a:lstStyle/>
           <a:p>
-            <a:pPr indent="0" marL="0">
+            <a:pPr marL="0" indent="0">
               <a:lnSpc>
                 <a:spcPct val="108000"/>
               </a:lnSpc>
@@ -15228,7 +14929,7 @@
           <a:bodyPr wrap="square" lIns="0" tIns="0" rIns="0" bIns="0" rtlCol="0" anchor="ctr"/>
           <a:lstStyle/>
           <a:p>
-            <a:pPr indent="0" marL="0">
+            <a:pPr marL="0" indent="0">
               <a:buNone/>
             </a:pPr>
             <a:r>
@@ -15267,7 +14968,7 @@
           <a:bodyPr wrap="square" lIns="0" tIns="0" rIns="0" bIns="0" rtlCol="0" anchor="t"/>
           <a:lstStyle/>
           <a:p>
-            <a:pPr indent="0" marL="0">
+            <a:pPr marL="0" indent="0">
               <a:lnSpc>
                 <a:spcPct val="108000"/>
               </a:lnSpc>
@@ -15336,7 +15037,7 @@
           <a:bodyPr wrap="square" lIns="0" tIns="0" rIns="0" bIns="0" rtlCol="0" anchor="ctr"/>
           <a:lstStyle/>
           <a:p>
-            <a:pPr indent="0" marL="0">
+            <a:pPr marL="0" indent="0">
               <a:lnSpc>
                 <a:spcPct val="112000"/>
               </a:lnSpc>
@@ -15377,7 +15078,7 @@
           </a:prstGeom>
           <a:extLst>
             <a:ext uri="{C572A759-6A51-4108-AA02-DFA0A04FC94B}">
-              <ma14:wrappingTextBoxFlag xmlns:ma14="http://schemas.microsoft.com/office/mac/drawingml/2011/main" val="0"/>
+              <ma14:wrappingTextBoxFlag xmlns:ma14="http://schemas.microsoft.com/office/mac/drawingml/2011/main" xmlns="" val="0"/>
             </a:ext>
           </a:extLst>
         </p:spPr>
@@ -15398,7 +15099,7 @@
           <a:p>
             <a:pPr algn="l"/>
             <a:fld id="{F7021451-1387-4CA6-816F-3879F97B5CBC}" type="slidenum">
-              <a:rPr b="0" lang="en-US"/>
+              <a:rPr lang="en-US" b="0"/>
               <a:t>22</a:t>
             </a:fld>
             <a:endParaRPr lang="en-US"/>
@@ -15473,7 +15174,7 @@
           <a:bodyPr wrap="square" lIns="0" tIns="0" rIns="0" bIns="0" rtlCol="0" anchor="ctr"/>
           <a:lstStyle/>
           <a:p>
-            <a:pPr indent="0" marL="0">
+            <a:pPr marL="0" indent="0">
               <a:buNone/>
             </a:pPr>
             <a:r>
@@ -15539,11 +15240,11 @@
           <a:bodyPr wrap="square" lIns="0" tIns="0" rIns="0" bIns="0" rtlCol="0" anchor="ctr"/>
           <a:lstStyle/>
           <a:p>
-            <a:pPr algn="ctr" indent="0" marL="0">
-              <a:buNone/>
-            </a:pPr>
-            <a:r>
-              <a:rPr lang="en-US" sz="900" b="1" spc="100" kern="0" dirty="0">
+            <a:pPr marL="0" indent="0" algn="ctr">
+              <a:buNone/>
+            </a:pPr>
+            <a:r>
+              <a:rPr lang="en-US" sz="900" b="1" kern="0" spc="100" dirty="0">
                 <a:solidFill>
                   <a:srgbClr val="1A4FBF"/>
                 </a:solidFill>
@@ -15559,14 +15260,14 @@
       </p:sp>
       <p:pic>
         <p:nvPicPr>
-          <p:cNvPr id="6" name="Image 0" descr="preencoded.png">    </p:cNvPr>
+          <p:cNvPr id="6" name="Image 0" descr="preencoded.png"/>
           <p:cNvPicPr>
             <a:picLocks noChangeAspect="1"/>
           </p:cNvPicPr>
           <p:nvPr/>
         </p:nvPicPr>
         <p:blipFill>
-          <a:blip r:embed="rId1"/>
+          <a:blip r:embed="rId3"/>
           <a:stretch>
             <a:fillRect/>
           </a:stretch>
@@ -15696,7 +15397,7 @@
           <a:bodyPr wrap="square" lIns="0" tIns="0" rIns="0" bIns="0" rtlCol="0" anchor="ctr"/>
           <a:lstStyle/>
           <a:p>
-            <a:pPr indent="0" marL="0">
+            <a:pPr marL="0" indent="0">
               <a:buNone/>
             </a:pPr>
             <a:r>
@@ -15802,7 +15503,7 @@
           <a:bodyPr wrap="square" lIns="0" tIns="0" rIns="0" bIns="0" rtlCol="0" anchor="ctr"/>
           <a:lstStyle/>
           <a:p>
-            <a:pPr indent="0" marL="0">
+            <a:pPr marL="0" indent="0">
               <a:buNone/>
             </a:pPr>
             <a:r>
@@ -15908,7 +15609,7 @@
           <a:bodyPr wrap="square" lIns="0" tIns="0" rIns="0" bIns="0" rtlCol="0" anchor="ctr"/>
           <a:lstStyle/>
           <a:p>
-            <a:pPr indent="0" marL="0">
+            <a:pPr marL="0" indent="0">
               <a:buNone/>
             </a:pPr>
             <a:r>
@@ -16014,7 +15715,7 @@
           <a:bodyPr wrap="square" lIns="0" tIns="0" rIns="0" bIns="0" rtlCol="0" anchor="ctr"/>
           <a:lstStyle/>
           <a:p>
-            <a:pPr indent="0" marL="0">
+            <a:pPr marL="0" indent="0">
               <a:buNone/>
             </a:pPr>
             <a:r>
@@ -16120,7 +15821,7 @@
           <a:bodyPr wrap="square" lIns="0" tIns="0" rIns="0" bIns="0" rtlCol="0" anchor="ctr"/>
           <a:lstStyle/>
           <a:p>
-            <a:pPr indent="0" marL="0">
+            <a:pPr marL="0" indent="0">
               <a:buNone/>
             </a:pPr>
             <a:r>
@@ -16159,7 +15860,7 @@
           <a:bodyPr wrap="square" lIns="0" tIns="0" rIns="0" bIns="0" rtlCol="0" anchor="ctr"/>
           <a:lstStyle/>
           <a:p>
-            <a:pPr indent="0" marL="0">
+            <a:pPr marL="0" indent="0">
               <a:buNone/>
             </a:pPr>
             <a:r>
@@ -16179,7 +15880,7 @@
       </p:sp>
       <p:sp>
         <p:nvSpPr>
-          <p:cNvPr id="25" name="Slide Number Placeholder 0"/>
+          <p:cNvPr id="29" name="Slide Number Placeholder 0"/>
           <p:cNvSpPr>
             <a:spLocks noGrp="1"/>
           </p:cNvSpPr>
@@ -16197,7 +15898,7 @@
           </a:prstGeom>
           <a:extLst>
             <a:ext uri="{C572A759-6A51-4108-AA02-DFA0A04FC94B}">
-              <ma14:wrappingTextBoxFlag xmlns:ma14="http://schemas.microsoft.com/office/mac/drawingml/2011/main" val="0"/>
+              <ma14:wrappingTextBoxFlag xmlns:ma14="http://schemas.microsoft.com/office/mac/drawingml/2011/main" xmlns="" val="0"/>
             </a:ext>
           </a:extLst>
         </p:spPr>
@@ -16218,7 +15919,7 @@
           <a:p>
             <a:pPr algn="l"/>
             <a:fld id="{F7021451-1387-4CA6-816F-3879F97B5CBC}" type="slidenum">
-              <a:rPr b="0" lang="en-US"/>
+              <a:rPr lang="en-US" b="0"/>
               <a:t>23</a:t>
             </a:fld>
             <a:endParaRPr lang="en-US"/>
@@ -16293,7 +15994,7 @@
           <a:bodyPr wrap="square" lIns="0" tIns="0" rIns="0" bIns="0" rtlCol="0" anchor="ctr"/>
           <a:lstStyle/>
           <a:p>
-            <a:pPr indent="0" marL="0">
+            <a:pPr marL="0" indent="0">
               <a:buNone/>
             </a:pPr>
             <a:r>
@@ -16359,11 +16060,11 @@
           <a:bodyPr wrap="square" lIns="0" tIns="0" rIns="0" bIns="0" rtlCol="0" anchor="ctr"/>
           <a:lstStyle/>
           <a:p>
-            <a:pPr algn="ctr" indent="0" marL="0">
-              <a:buNone/>
-            </a:pPr>
-            <a:r>
-              <a:rPr lang="en-US" sz="900" b="1" spc="100" kern="0" dirty="0">
+            <a:pPr marL="0" indent="0" algn="ctr">
+              <a:buNone/>
+            </a:pPr>
+            <a:r>
+              <a:rPr lang="en-US" sz="900" b="1" kern="0" spc="100" dirty="0">
                 <a:solidFill>
                   <a:srgbClr val="1A4FBF"/>
                 </a:solidFill>
@@ -16379,14 +16080,14 @@
       </p:sp>
       <p:pic>
         <p:nvPicPr>
-          <p:cNvPr id="6" name="Image 0" descr="preencoded.png">    </p:cNvPr>
+          <p:cNvPr id="6" name="Image 0" descr="preencoded.png"/>
           <p:cNvPicPr>
             <a:picLocks noChangeAspect="1"/>
           </p:cNvPicPr>
           <p:nvPr/>
         </p:nvPicPr>
         <p:blipFill>
-          <a:blip r:embed="rId1"/>
+          <a:blip r:embed="rId3"/>
           <a:stretch>
             <a:fillRect/>
           </a:stretch>
@@ -16514,7 +16215,7 @@
           <a:bodyPr wrap="square" lIns="0" tIns="0" rIns="0" bIns="0" rtlCol="0" anchor="ctr"/>
           <a:lstStyle/>
           <a:p>
-            <a:pPr indent="0" marL="0">
+            <a:pPr marL="0" indent="0">
               <a:buNone/>
             </a:pPr>
             <a:r>
@@ -16528,9 +16229,6 @@
               </a:rPr>
               <a:t>Expect на цілу фразу   </a:t>
             </a:r>
-            <a:pPr indent="0" marL="0">
-              <a:buNone/>
-            </a:pPr>
             <a:r>
               <a:rPr lang="en-US" sz="1150" dirty="0">
                 <a:solidFill>
@@ -16659,7 +16357,7 @@
           <a:bodyPr wrap="square" lIns="0" tIns="0" rIns="0" bIns="0" rtlCol="0" anchor="ctr"/>
           <a:lstStyle/>
           <a:p>
-            <a:pPr indent="0" marL="0">
+            <a:pPr marL="0" indent="0">
               <a:buNone/>
             </a:pPr>
             <a:r>
@@ -16673,9 +16371,6 @@
               </a:rPr>
               <a:t>Датасет, який не росте   </a:t>
             </a:r>
-            <a:pPr indent="0" marL="0">
-              <a:buNone/>
-            </a:pPr>
             <a:r>
               <a:rPr lang="en-US" sz="1150" dirty="0">
                 <a:solidFill>
@@ -16804,7 +16499,7 @@
           <a:bodyPr wrap="square" lIns="0" tIns="0" rIns="0" bIns="0" rtlCol="0" anchor="ctr"/>
           <a:lstStyle/>
           <a:p>
-            <a:pPr indent="0" marL="0">
+            <a:pPr marL="0" indent="0">
               <a:buNone/>
             </a:pPr>
             <a:r>
@@ -16818,9 +16513,6 @@
               </a:rPr>
               <a:t>Поріг «щоб позеленіло»   </a:t>
             </a:r>
-            <a:pPr indent="0" marL="0">
-              <a:buNone/>
-            </a:pPr>
             <a:r>
               <a:rPr lang="en-US" sz="1150" dirty="0">
                 <a:solidFill>
@@ -16949,7 +16641,7 @@
           <a:bodyPr wrap="square" lIns="0" tIns="0" rIns="0" bIns="0" rtlCol="0" anchor="ctr"/>
           <a:lstStyle/>
           <a:p>
-            <a:pPr indent="0" marL="0">
+            <a:pPr marL="0" indent="0">
               <a:buNone/>
             </a:pPr>
             <a:r>
@@ -16963,9 +16655,6 @@
               </a:rPr>
               <a:t>Перезапускати, поки не пройде   </a:t>
             </a:r>
-            <a:pPr indent="0" marL="0">
-              <a:buNone/>
-            </a:pPr>
             <a:r>
               <a:rPr lang="en-US" sz="1150" dirty="0">
                 <a:solidFill>
@@ -17094,7 +16783,7 @@
           <a:bodyPr wrap="square" lIns="0" tIns="0" rIns="0" bIns="0" rtlCol="0" anchor="ctr"/>
           <a:lstStyle/>
           <a:p>
-            <a:pPr indent="0" marL="0">
+            <a:pPr marL="0" indent="0">
               <a:buNone/>
             </a:pPr>
             <a:r>
@@ -17108,9 +16797,6 @@
               </a:rPr>
               <a:t>Judge замість правил   </a:t>
             </a:r>
-            <a:pPr indent="0" marL="0">
-              <a:buNone/>
-            </a:pPr>
             <a:r>
               <a:rPr lang="en-US" sz="1150" dirty="0">
                 <a:solidFill>
@@ -17128,7 +16814,7 @@
       </p:sp>
       <p:sp>
         <p:nvSpPr>
-          <p:cNvPr id="25" name="Slide Number Placeholder 0"/>
+          <p:cNvPr id="32" name="Slide Number Placeholder 0"/>
           <p:cNvSpPr>
             <a:spLocks noGrp="1"/>
           </p:cNvSpPr>
@@ -17146,7 +16832,7 @@
           </a:prstGeom>
           <a:extLst>
             <a:ext uri="{C572A759-6A51-4108-AA02-DFA0A04FC94B}">
-              <ma14:wrappingTextBoxFlag xmlns:ma14="http://schemas.microsoft.com/office/mac/drawingml/2011/main" val="0"/>
+              <ma14:wrappingTextBoxFlag xmlns:ma14="http://schemas.microsoft.com/office/mac/drawingml/2011/main" xmlns="" val="0"/>
             </a:ext>
           </a:extLst>
         </p:spPr>
@@ -17167,7 +16853,7 @@
           <a:p>
             <a:pPr algn="l"/>
             <a:fld id="{F7021451-1387-4CA6-816F-3879F97B5CBC}" type="slidenum">
-              <a:rPr b="0" lang="en-US"/>
+              <a:rPr lang="en-US" b="0"/>
               <a:t>24</a:t>
             </a:fld>
             <a:endParaRPr lang="en-US"/>
@@ -17242,7 +16928,7 @@
           <a:bodyPr wrap="square" lIns="0" tIns="0" rIns="0" bIns="0" rtlCol="0" anchor="ctr"/>
           <a:lstStyle/>
           <a:p>
-            <a:pPr indent="0" marL="0">
+            <a:pPr marL="0" indent="0">
               <a:buNone/>
             </a:pPr>
             <a:r>
@@ -17303,11 +16989,11 @@
           <a:bodyPr wrap="square" lIns="0" tIns="0" rIns="0" bIns="0" rtlCol="0" anchor="ctr"/>
           <a:lstStyle/>
           <a:p>
-            <a:pPr algn="ctr" indent="0" marL="0">
-              <a:buNone/>
-            </a:pPr>
-            <a:r>
-              <a:rPr lang="en-US" sz="900" b="1" spc="100" kern="0" dirty="0">
+            <a:pPr marL="0" indent="0" algn="ctr">
+              <a:buNone/>
+            </a:pPr>
+            <a:r>
+              <a:rPr lang="en-US" sz="900" b="1" kern="0" spc="100" dirty="0">
                 <a:solidFill>
                   <a:srgbClr val="FFFFFF"/>
                 </a:solidFill>
@@ -17323,14 +17009,14 @@
       </p:sp>
       <p:pic>
         <p:nvPicPr>
-          <p:cNvPr id="6" name="Image 0" descr="preencoded.png">    </p:cNvPr>
+          <p:cNvPr id="6" name="Image 0" descr="preencoded.png"/>
           <p:cNvPicPr>
             <a:picLocks noChangeAspect="1"/>
           </p:cNvPicPr>
           <p:nvPr/>
         </p:nvPicPr>
         <p:blipFill>
-          <a:blip r:embed="rId1"/>
+          <a:blip r:embed="rId3"/>
           <a:stretch>
             <a:fillRect/>
           </a:stretch>
@@ -17393,7 +17079,7 @@
           <a:bodyPr wrap="square" lIns="0" tIns="0" rIns="0" bIns="0" rtlCol="0" anchor="ctr"/>
           <a:lstStyle/>
           <a:p>
-            <a:pPr indent="0" marL="0">
+            <a:pPr marL="0" indent="0">
               <a:buNone/>
             </a:pPr>
             <a:r>
@@ -17432,7 +17118,7 @@
           <a:bodyPr wrap="square" lIns="0" tIns="0" rIns="0" bIns="0" rtlCol="0" anchor="ctr"/>
           <a:lstStyle/>
           <a:p>
-            <a:pPr indent="0" marL="0">
+            <a:pPr marL="0" indent="0">
               <a:buNone/>
             </a:pPr>
             <a:r>
@@ -17471,11 +17157,11 @@
           <a:bodyPr wrap="square" lIns="0" tIns="0" rIns="0" bIns="0" rtlCol="0" anchor="ctr"/>
           <a:lstStyle/>
           <a:p>
-            <a:pPr indent="0" marL="0">
-              <a:buNone/>
-            </a:pPr>
-            <a:r>
-              <a:rPr lang="en-US" sz="950" b="1" spc="100" kern="0" dirty="0">
+            <a:pPr marL="0" indent="0">
+              <a:buNone/>
+            </a:pPr>
+            <a:r>
+              <a:rPr lang="en-US" sz="950" b="1" kern="0" spc="100" dirty="0">
                 <a:solidFill>
                   <a:srgbClr val="6B6B6B"/>
                 </a:solidFill>
@@ -17510,7 +17196,7 @@
           <a:bodyPr wrap="square" lIns="0" tIns="0" rIns="0" bIns="0" rtlCol="0" anchor="ctr"/>
           <a:lstStyle/>
           <a:p>
-            <a:pPr indent="0" marL="0">
+            <a:pPr marL="0" indent="0">
               <a:buNone/>
             </a:pPr>
             <a:r>
@@ -17524,9 +17210,6 @@
               </a:rPr>
               <a:t>•  </a:t>
             </a:r>
-            <a:pPr indent="0" marL="0">
-              <a:buNone/>
-            </a:pPr>
             <a:r>
               <a:rPr lang="en-US" sz="1250" dirty="0">
                 <a:solidFill>
@@ -17563,7 +17246,7 @@
           <a:bodyPr wrap="square" lIns="0" tIns="0" rIns="0" bIns="0" rtlCol="0" anchor="ctr"/>
           <a:lstStyle/>
           <a:p>
-            <a:pPr indent="0" marL="0">
+            <a:pPr marL="0" indent="0">
               <a:buNone/>
             </a:pPr>
             <a:r>
@@ -17577,9 +17260,6 @@
               </a:rPr>
               <a:t>•  </a:t>
             </a:r>
-            <a:pPr indent="0" marL="0">
-              <a:buNone/>
-            </a:pPr>
             <a:r>
               <a:rPr lang="en-US" sz="1250" dirty="0">
                 <a:solidFill>
@@ -17616,7 +17296,7 @@
           <a:bodyPr wrap="square" lIns="0" tIns="0" rIns="0" bIns="0" rtlCol="0" anchor="ctr"/>
           <a:lstStyle/>
           <a:p>
-            <a:pPr indent="0" marL="0">
+            <a:pPr marL="0" indent="0">
               <a:buNone/>
             </a:pPr>
             <a:r>
@@ -17630,9 +17310,6 @@
               </a:rPr>
               <a:t>•  </a:t>
             </a:r>
-            <a:pPr indent="0" marL="0">
-              <a:buNone/>
-            </a:pPr>
             <a:r>
               <a:rPr lang="en-US" sz="1250" dirty="0">
                 <a:solidFill>
@@ -17691,7 +17368,7 @@
           <a:bodyPr wrap="square" lIns="0" tIns="0" rIns="0" bIns="0" rtlCol="0" anchor="ctr"/>
           <a:lstStyle/>
           <a:p>
-            <a:pPr indent="0" marL="0">
+            <a:pPr marL="0" indent="0">
               <a:buNone/>
             </a:pPr>
             <a:r>
@@ -17730,7 +17407,7 @@
           <a:bodyPr wrap="square" lIns="0" tIns="0" rIns="0" bIns="0" rtlCol="0" anchor="t"/>
           <a:lstStyle/>
           <a:p>
-            <a:pPr indent="0" marL="0">
+            <a:pPr marL="0" indent="0">
               <a:lnSpc>
                 <a:spcPct val="108000"/>
               </a:lnSpc>
@@ -17750,7 +17427,7 @@
             <a:endParaRPr lang="en-US" sz="1200" dirty="0"/>
           </a:p>
           <a:p>
-            <a:pPr indent="0" marL="0">
+            <a:pPr marL="0" indent="0">
               <a:lnSpc>
                 <a:spcPct val="108000"/>
               </a:lnSpc>
@@ -17791,7 +17468,7 @@
           </a:prstGeom>
           <a:extLst>
             <a:ext uri="{C572A759-6A51-4108-AA02-DFA0A04FC94B}">
-              <ma14:wrappingTextBoxFlag xmlns:ma14="http://schemas.microsoft.com/office/mac/drawingml/2011/main" val="0"/>
+              <ma14:wrappingTextBoxFlag xmlns:ma14="http://schemas.microsoft.com/office/mac/drawingml/2011/main" xmlns="" val="0"/>
             </a:ext>
           </a:extLst>
         </p:spPr>
@@ -17812,7 +17489,7 @@
           <a:p>
             <a:pPr algn="l"/>
             <a:fld id="{F7021451-1387-4CA6-816F-3879F97B5CBC}" type="slidenum">
-              <a:rPr b="0" lang="en-US"/>
+              <a:rPr lang="en-US" b="0"/>
               <a:t>25</a:t>
             </a:fld>
             <a:endParaRPr lang="en-US"/>
@@ -17865,11 +17542,11 @@
           <a:bodyPr wrap="square" lIns="0" tIns="0" rIns="0" bIns="0" rtlCol="0" anchor="ctr"/>
           <a:lstStyle/>
           <a:p>
-            <a:pPr indent="0" marL="0">
-              <a:buNone/>
-            </a:pPr>
-            <a:r>
-              <a:rPr lang="en-US" sz="1200" b="1" spc="400" kern="0" dirty="0">
+            <a:pPr marL="0" indent="0">
+              <a:buNone/>
+            </a:pPr>
+            <a:r>
+              <a:rPr lang="en-US" sz="1200" b="1" kern="0" spc="400" dirty="0">
                 <a:solidFill>
                   <a:srgbClr val="FFFFFF"/>
                 </a:solidFill>
@@ -17904,11 +17581,11 @@
           <a:bodyPr wrap="square" lIns="0" tIns="0" rIns="0" bIns="0" rtlCol="0" anchor="ctr"/>
           <a:lstStyle/>
           <a:p>
-            <a:pPr indent="0" marL="0">
-              <a:buNone/>
-            </a:pPr>
-            <a:r>
-              <a:rPr lang="en-US" sz="1100" b="1" spc="300" kern="0" dirty="0">
+            <a:pPr marL="0" indent="0">
+              <a:buNone/>
+            </a:pPr>
+            <a:r>
+              <a:rPr lang="en-US" sz="1100" b="1" kern="0" spc="300" dirty="0">
                 <a:solidFill>
                   <a:srgbClr val="C4B3F5"/>
                 </a:solidFill>
@@ -17963,7 +17640,7 @@
           <a:bodyPr wrap="square" lIns="0" tIns="0" rIns="0" bIns="0" rtlCol="0" anchor="t"/>
           <a:lstStyle/>
           <a:p>
-            <a:pPr indent="0" marL="0">
+            <a:pPr marL="0" indent="0">
               <a:lnSpc>
                 <a:spcPct val="110000"/>
               </a:lnSpc>
@@ -18025,7 +17702,7 @@
           <a:bodyPr wrap="square" lIns="0" tIns="0" rIns="0" bIns="0" rtlCol="0" anchor="t"/>
           <a:lstStyle/>
           <a:p>
-            <a:pPr indent="0" marL="0">
+            <a:pPr marL="0" indent="0">
               <a:lnSpc>
                 <a:spcPct val="110000"/>
               </a:lnSpc>
@@ -18087,7 +17764,7 @@
           <a:bodyPr wrap="square" lIns="0" tIns="0" rIns="0" bIns="0" rtlCol="0" anchor="t"/>
           <a:lstStyle/>
           <a:p>
-            <a:pPr indent="0" marL="0">
+            <a:pPr marL="0" indent="0">
               <a:lnSpc>
                 <a:spcPct val="110000"/>
               </a:lnSpc>
@@ -18149,7 +17826,7 @@
           <a:bodyPr wrap="square" lIns="0" tIns="0" rIns="0" bIns="0" rtlCol="0" anchor="t"/>
           <a:lstStyle/>
           <a:p>
-            <a:pPr indent="0" marL="0">
+            <a:pPr marL="0" indent="0">
               <a:lnSpc>
                 <a:spcPct val="110000"/>
               </a:lnSpc>
@@ -18211,7 +17888,7 @@
           <a:bodyPr wrap="square" lIns="0" tIns="0" rIns="0" bIns="0" rtlCol="0" anchor="t"/>
           <a:lstStyle/>
           <a:p>
-            <a:pPr indent="0" marL="0">
+            <a:pPr marL="0" indent="0">
               <a:lnSpc>
                 <a:spcPct val="110000"/>
               </a:lnSpc>
@@ -18280,7 +17957,7 @@
           <a:bodyPr wrap="square" lIns="0" tIns="0" rIns="0" bIns="0" rtlCol="0" anchor="ctr"/>
           <a:lstStyle/>
           <a:p>
-            <a:pPr indent="0" marL="0">
+            <a:pPr marL="0" indent="0">
               <a:buNone/>
             </a:pPr>
             <a:r>
@@ -18319,7 +17996,7 @@
           <a:bodyPr wrap="square" lIns="0" tIns="0" rIns="0" bIns="0" rtlCol="0" anchor="t"/>
           <a:lstStyle/>
           <a:p>
-            <a:pPr indent="0" marL="0">
+            <a:pPr marL="0" indent="0">
               <a:lnSpc>
                 <a:spcPct val="115000"/>
               </a:lnSpc>
@@ -18386,11 +18063,11 @@
           <a:bodyPr wrap="square" lIns="0" tIns="0" rIns="0" bIns="0" rtlCol="0" anchor="ctr"/>
           <a:lstStyle/>
           <a:p>
-            <a:pPr indent="0" marL="0">
-              <a:buNone/>
-            </a:pPr>
-            <a:r>
-              <a:rPr lang="en-US" sz="1200" b="1" spc="400" kern="0" dirty="0">
+            <a:pPr marL="0" indent="0">
+              <a:buNone/>
+            </a:pPr>
+            <a:r>
+              <a:rPr lang="en-US" sz="1200" b="1" kern="0" spc="400" dirty="0">
                 <a:solidFill>
                   <a:srgbClr val="FFFFFF"/>
                 </a:solidFill>
@@ -18425,7 +18102,7 @@
           <a:bodyPr wrap="square" lIns="0" tIns="0" rIns="0" bIns="0" rtlCol="0" anchor="ctr"/>
           <a:lstStyle/>
           <a:p>
-            <a:pPr indent="0" marL="0">
+            <a:pPr marL="0" indent="0">
               <a:buNone/>
             </a:pPr>
             <a:r>
@@ -18511,7 +18188,7 @@
           <a:bodyPr wrap="square" lIns="0" tIns="0" rIns="0" bIns="0" rtlCol="0" anchor="ctr"/>
           <a:lstStyle/>
           <a:p>
-            <a:pPr indent="0" marL="0">
+            <a:pPr marL="0" indent="0">
               <a:buNone/>
             </a:pPr>
             <a:r>
@@ -18577,11 +18254,11 @@
           <a:bodyPr wrap="square" lIns="0" tIns="0" rIns="0" bIns="0" rtlCol="0" anchor="ctr"/>
           <a:lstStyle/>
           <a:p>
-            <a:pPr algn="ctr" indent="0" marL="0">
-              <a:buNone/>
-            </a:pPr>
-            <a:r>
-              <a:rPr lang="en-US" sz="900" b="1" spc="100" kern="0" dirty="0">
+            <a:pPr marL="0" indent="0" algn="ctr">
+              <a:buNone/>
+            </a:pPr>
+            <a:r>
+              <a:rPr lang="en-US" sz="900" b="1" kern="0" spc="100" dirty="0">
                 <a:solidFill>
                   <a:srgbClr val="5A05F4"/>
                 </a:solidFill>
@@ -18597,14 +18274,14 @@
       </p:sp>
       <p:pic>
         <p:nvPicPr>
-          <p:cNvPr id="6" name="Image 0" descr="preencoded.png">    </p:cNvPr>
+          <p:cNvPr id="6" name="Image 0" descr="preencoded.png"/>
           <p:cNvPicPr>
             <a:picLocks noChangeAspect="1"/>
           </p:cNvPicPr>
           <p:nvPr/>
         </p:nvPicPr>
         <p:blipFill>
-          <a:blip r:embed="rId1"/>
+          <a:blip r:embed="rId3"/>
           <a:stretch>
             <a:fillRect/>
           </a:stretch>
@@ -18682,7 +18359,7 @@
           <a:bodyPr wrap="square" lIns="0" tIns="0" rIns="0" bIns="0" rtlCol="0" anchor="ctr"/>
           <a:lstStyle/>
           <a:p>
-            <a:pPr algn="ctr" indent="0" marL="0">
+            <a:pPr marL="0" indent="0" algn="ctr">
               <a:buNone/>
             </a:pPr>
             <a:r>
@@ -18721,7 +18398,7 @@
           <a:bodyPr wrap="square" lIns="0" tIns="0" rIns="0" bIns="0" rtlCol="0" anchor="ctr"/>
           <a:lstStyle/>
           <a:p>
-            <a:pPr indent="0" marL="0">
+            <a:pPr marL="0" indent="0">
               <a:buNone/>
             </a:pPr>
             <a:r>
@@ -18802,7 +18479,7 @@
           <a:bodyPr wrap="square" lIns="0" tIns="0" rIns="0" bIns="0" rtlCol="0" anchor="ctr"/>
           <a:lstStyle/>
           <a:p>
-            <a:pPr algn="ctr" indent="0" marL="0">
+            <a:pPr marL="0" indent="0" algn="ctr">
               <a:buNone/>
             </a:pPr>
             <a:r>
@@ -18841,7 +18518,7 @@
           <a:bodyPr wrap="square" lIns="0" tIns="0" rIns="0" bIns="0" rtlCol="0" anchor="ctr"/>
           <a:lstStyle/>
           <a:p>
-            <a:pPr indent="0" marL="0">
+            <a:pPr marL="0" indent="0">
               <a:buNone/>
             </a:pPr>
             <a:r>
@@ -18922,7 +18599,7 @@
           <a:bodyPr wrap="square" lIns="0" tIns="0" rIns="0" bIns="0" rtlCol="0" anchor="ctr"/>
           <a:lstStyle/>
           <a:p>
-            <a:pPr algn="ctr" indent="0" marL="0">
+            <a:pPr marL="0" indent="0" algn="ctr">
               <a:buNone/>
             </a:pPr>
             <a:r>
@@ -18961,7 +18638,7 @@
           <a:bodyPr wrap="square" lIns="0" tIns="0" rIns="0" bIns="0" rtlCol="0" anchor="ctr"/>
           <a:lstStyle/>
           <a:p>
-            <a:pPr indent="0" marL="0">
+            <a:pPr marL="0" indent="0">
               <a:buNone/>
             </a:pPr>
             <a:r>
@@ -19042,7 +18719,7 @@
           <a:bodyPr wrap="square" lIns="0" tIns="0" rIns="0" bIns="0" rtlCol="0" anchor="ctr"/>
           <a:lstStyle/>
           <a:p>
-            <a:pPr algn="ctr" indent="0" marL="0">
+            <a:pPr marL="0" indent="0" algn="ctr">
               <a:buNone/>
             </a:pPr>
             <a:r>
@@ -19081,7 +18758,7 @@
           <a:bodyPr wrap="square" lIns="0" tIns="0" rIns="0" bIns="0" rtlCol="0" anchor="ctr"/>
           <a:lstStyle/>
           <a:p>
-            <a:pPr indent="0" marL="0">
+            <a:pPr marL="0" indent="0">
               <a:buNone/>
             </a:pPr>
             <a:r>
@@ -19162,7 +18839,7 @@
           <a:bodyPr wrap="square" lIns="0" tIns="0" rIns="0" bIns="0" rtlCol="0" anchor="ctr"/>
           <a:lstStyle/>
           <a:p>
-            <a:pPr algn="ctr" indent="0" marL="0">
+            <a:pPr marL="0" indent="0" algn="ctr">
               <a:buNone/>
             </a:pPr>
             <a:r>
@@ -19201,7 +18878,7 @@
           <a:bodyPr wrap="square" lIns="0" tIns="0" rIns="0" bIns="0" rtlCol="0" anchor="ctr"/>
           <a:lstStyle/>
           <a:p>
-            <a:pPr indent="0" marL="0">
+            <a:pPr marL="0" indent="0">
               <a:buNone/>
             </a:pPr>
             <a:r>
@@ -19282,7 +18959,7 @@
           <a:bodyPr wrap="square" lIns="0" tIns="0" rIns="0" bIns="0" rtlCol="0" anchor="ctr"/>
           <a:lstStyle/>
           <a:p>
-            <a:pPr algn="ctr" indent="0" marL="0">
+            <a:pPr marL="0" indent="0" algn="ctr">
               <a:buNone/>
             </a:pPr>
             <a:r>
@@ -19321,7 +18998,7 @@
           <a:bodyPr wrap="square" lIns="0" tIns="0" rIns="0" bIns="0" rtlCol="0" anchor="ctr"/>
           <a:lstStyle/>
           <a:p>
-            <a:pPr indent="0" marL="0">
+            <a:pPr marL="0" indent="0">
               <a:buNone/>
             </a:pPr>
             <a:r>
@@ -19402,7 +19079,7 @@
           <a:bodyPr wrap="square" lIns="0" tIns="0" rIns="0" bIns="0" rtlCol="0" anchor="ctr"/>
           <a:lstStyle/>
           <a:p>
-            <a:pPr algn="ctr" indent="0" marL="0">
+            <a:pPr marL="0" indent="0" algn="ctr">
               <a:buNone/>
             </a:pPr>
             <a:r>
@@ -19441,7 +19118,7 @@
           <a:bodyPr wrap="square" lIns="0" tIns="0" rIns="0" bIns="0" rtlCol="0" anchor="ctr"/>
           <a:lstStyle/>
           <a:p>
-            <a:pPr indent="0" marL="0">
+            <a:pPr marL="0" indent="0">
               <a:buNone/>
             </a:pPr>
             <a:r>
@@ -19522,7 +19199,7 @@
           <a:bodyPr wrap="square" lIns="0" tIns="0" rIns="0" bIns="0" rtlCol="0" anchor="ctr"/>
           <a:lstStyle/>
           <a:p>
-            <a:pPr algn="ctr" indent="0" marL="0">
+            <a:pPr marL="0" indent="0" algn="ctr">
               <a:buNone/>
             </a:pPr>
             <a:r>
@@ -19561,7 +19238,7 @@
           <a:bodyPr wrap="square" lIns="0" tIns="0" rIns="0" bIns="0" rtlCol="0" anchor="ctr"/>
           <a:lstStyle/>
           <a:p>
-            <a:pPr indent="0" marL="0">
+            <a:pPr marL="0" indent="0">
               <a:buNone/>
             </a:pPr>
             <a:r>
@@ -19642,7 +19319,7 @@
           <a:bodyPr wrap="square" lIns="0" tIns="0" rIns="0" bIns="0" rtlCol="0" anchor="ctr"/>
           <a:lstStyle/>
           <a:p>
-            <a:pPr algn="ctr" indent="0" marL="0">
+            <a:pPr marL="0" indent="0" algn="ctr">
               <a:buNone/>
             </a:pPr>
             <a:r>
@@ -19681,7 +19358,7 @@
           <a:bodyPr wrap="square" lIns="0" tIns="0" rIns="0" bIns="0" rtlCol="0" anchor="ctr"/>
           <a:lstStyle/>
           <a:p>
-            <a:pPr indent="0" marL="0">
+            <a:pPr marL="0" indent="0">
               <a:buNone/>
             </a:pPr>
             <a:r>
@@ -19762,7 +19439,7 @@
           <a:bodyPr wrap="square" lIns="0" tIns="0" rIns="0" bIns="0" rtlCol="0" anchor="ctr"/>
           <a:lstStyle/>
           <a:p>
-            <a:pPr algn="ctr" indent="0" marL="0">
+            <a:pPr marL="0" indent="0" algn="ctr">
               <a:buNone/>
             </a:pPr>
             <a:r>
@@ -19801,7 +19478,7 @@
           <a:bodyPr wrap="square" lIns="0" tIns="0" rIns="0" bIns="0" rtlCol="0" anchor="ctr"/>
           <a:lstStyle/>
           <a:p>
-            <a:pPr indent="0" marL="0">
+            <a:pPr marL="0" indent="0">
               <a:buNone/>
             </a:pPr>
             <a:r>
@@ -19882,7 +19559,7 @@
           <a:bodyPr wrap="square" lIns="0" tIns="0" rIns="0" bIns="0" rtlCol="0" anchor="ctr"/>
           <a:lstStyle/>
           <a:p>
-            <a:pPr algn="ctr" indent="0" marL="0">
+            <a:pPr marL="0" indent="0" algn="ctr">
               <a:buNone/>
             </a:pPr>
             <a:r>
@@ -19921,7 +19598,7 @@
           <a:bodyPr wrap="square" lIns="0" tIns="0" rIns="0" bIns="0" rtlCol="0" anchor="ctr"/>
           <a:lstStyle/>
           <a:p>
-            <a:pPr indent="0" marL="0">
+            <a:pPr marL="0" indent="0">
               <a:buNone/>
             </a:pPr>
             <a:r>
@@ -20002,7 +19679,7 @@
           <a:bodyPr wrap="square" lIns="0" tIns="0" rIns="0" bIns="0" rtlCol="0" anchor="ctr"/>
           <a:lstStyle/>
           <a:p>
-            <a:pPr algn="ctr" indent="0" marL="0">
+            <a:pPr marL="0" indent="0" algn="ctr">
               <a:buNone/>
             </a:pPr>
             <a:r>
@@ -20041,7 +19718,7 @@
           <a:bodyPr wrap="square" lIns="0" tIns="0" rIns="0" bIns="0" rtlCol="0" anchor="ctr"/>
           <a:lstStyle/>
           <a:p>
-            <a:pPr indent="0" marL="0">
+            <a:pPr marL="0" indent="0">
               <a:buNone/>
             </a:pPr>
             <a:r>
@@ -20068,7 +19745,7 @@
         <p:spPr>
           <a:xfrm>
             <a:off x="566928" y="5779008"/>
-            <a:ext cx="11064240" cy="402336"/>
+            <a:ext cx="10927080" cy="402336"/>
           </a:xfrm>
           <a:prstGeom prst="roundRect">
             <a:avLst>
@@ -20107,7 +19784,7 @@
           <a:bodyPr wrap="square" lIns="0" tIns="0" rIns="0" bIns="0" rtlCol="0" anchor="ctr"/>
           <a:lstStyle/>
           <a:p>
-            <a:pPr indent="0" marL="0">
+            <a:pPr marL="0" indent="0">
               <a:lnSpc>
                 <a:spcPct val="112000"/>
               </a:lnSpc>
@@ -20130,7 +19807,7 @@
       </p:sp>
       <p:sp>
         <p:nvSpPr>
-          <p:cNvPr id="25" name="Slide Number Placeholder 0"/>
+          <p:cNvPr id="57" name="Slide Number Placeholder 0"/>
           <p:cNvSpPr>
             <a:spLocks noGrp="1"/>
           </p:cNvSpPr>
@@ -20148,7 +19825,7 @@
           </a:prstGeom>
           <a:extLst>
             <a:ext uri="{C572A759-6A51-4108-AA02-DFA0A04FC94B}">
-              <ma14:wrappingTextBoxFlag xmlns:ma14="http://schemas.microsoft.com/office/mac/drawingml/2011/main" val="0"/>
+              <ma14:wrappingTextBoxFlag xmlns:ma14="http://schemas.microsoft.com/office/mac/drawingml/2011/main" xmlns="" val="0"/>
             </a:ext>
           </a:extLst>
         </p:spPr>
@@ -20169,7 +19846,7 @@
           <a:p>
             <a:pPr algn="l"/>
             <a:fld id="{F7021451-1387-4CA6-816F-3879F97B5CBC}" type="slidenum">
-              <a:rPr b="0" lang="en-US"/>
+              <a:rPr lang="en-US" b="0"/>
               <a:t>3</a:t>
             </a:fld>
             <a:endParaRPr lang="en-US"/>
@@ -20244,7 +19921,7 @@
           <a:bodyPr wrap="square" lIns="0" tIns="0" rIns="0" bIns="0" rtlCol="0" anchor="ctr"/>
           <a:lstStyle/>
           <a:p>
-            <a:pPr indent="0" marL="0">
+            <a:pPr marL="0" indent="0">
               <a:buNone/>
             </a:pPr>
             <a:r>
@@ -20283,7 +19960,7 @@
           <a:bodyPr wrap="square" lIns="0" tIns="0" rIns="0" bIns="0" rtlCol="0" anchor="t"/>
           <a:lstStyle/>
           <a:p>
-            <a:pPr indent="0" marL="0">
+            <a:pPr marL="0" indent="0">
               <a:lnSpc>
                 <a:spcPct val="100000"/>
               </a:lnSpc>
@@ -20352,11 +20029,11 @@
           <a:bodyPr wrap="square" lIns="0" tIns="0" rIns="0" bIns="0" rtlCol="0" anchor="ctr"/>
           <a:lstStyle/>
           <a:p>
-            <a:pPr algn="ctr" indent="0" marL="0">
-              <a:buNone/>
-            </a:pPr>
-            <a:r>
-              <a:rPr lang="en-US" sz="900" b="1" spc="100" kern="0" dirty="0">
+            <a:pPr marL="0" indent="0" algn="ctr">
+              <a:buNone/>
+            </a:pPr>
+            <a:r>
+              <a:rPr lang="en-US" sz="900" b="1" kern="0" spc="100" dirty="0">
                 <a:solidFill>
                   <a:srgbClr val="5A05F4"/>
                 </a:solidFill>
@@ -20372,14 +20049,14 @@
       </p:sp>
       <p:pic>
         <p:nvPicPr>
-          <p:cNvPr id="7" name="Image 0" descr="preencoded.png">    </p:cNvPr>
+          <p:cNvPr id="7" name="Image 0" descr="preencoded.png"/>
           <p:cNvPicPr>
             <a:picLocks noChangeAspect="1"/>
           </p:cNvPicPr>
           <p:nvPr/>
         </p:nvPicPr>
         <p:blipFill>
-          <a:blip r:embed="rId1"/>
+          <a:blip r:embed="rId3"/>
           <a:stretch>
             <a:fillRect/>
           </a:stretch>
@@ -20442,7 +20119,7 @@
           <a:bodyPr wrap="square" lIns="0" tIns="0" rIns="0" bIns="0" rtlCol="0" anchor="ctr"/>
           <a:lstStyle/>
           <a:p>
-            <a:pPr indent="0" marL="0">
+            <a:pPr marL="0" indent="0">
               <a:buNone/>
             </a:pPr>
             <a:r>
@@ -20481,7 +20158,7 @@
           <a:bodyPr wrap="square" lIns="0" tIns="0" rIns="0" bIns="0" rtlCol="0" anchor="t"/>
           <a:lstStyle/>
           <a:p>
-            <a:pPr indent="0" marL="0">
+            <a:pPr marL="0" indent="0">
               <a:lnSpc>
                 <a:spcPct val="105000"/>
               </a:lnSpc>
@@ -20550,7 +20227,7 @@
           <a:bodyPr wrap="square" lIns="0" tIns="0" rIns="0" bIns="0" rtlCol="0" anchor="ctr"/>
           <a:lstStyle/>
           <a:p>
-            <a:pPr indent="0" marL="0">
+            <a:pPr marL="0" indent="0">
               <a:buNone/>
             </a:pPr>
             <a:r>
@@ -20589,7 +20266,7 @@
           <a:bodyPr wrap="square" lIns="0" tIns="0" rIns="0" bIns="0" rtlCol="0" anchor="t"/>
           <a:lstStyle/>
           <a:p>
-            <a:pPr indent="0" marL="0">
+            <a:pPr marL="0" indent="0">
               <a:lnSpc>
                 <a:spcPct val="105000"/>
               </a:lnSpc>
@@ -20658,7 +20335,7 @@
           <a:bodyPr wrap="square" lIns="0" tIns="0" rIns="0" bIns="0" rtlCol="0" anchor="ctr"/>
           <a:lstStyle/>
           <a:p>
-            <a:pPr indent="0" marL="0">
+            <a:pPr marL="0" indent="0">
               <a:buNone/>
             </a:pPr>
             <a:r>
@@ -20697,7 +20374,7 @@
           <a:bodyPr wrap="square" lIns="0" tIns="0" rIns="0" bIns="0" rtlCol="0" anchor="t"/>
           <a:lstStyle/>
           <a:p>
-            <a:pPr indent="0" marL="0">
+            <a:pPr marL="0" indent="0">
               <a:lnSpc>
                 <a:spcPct val="105000"/>
               </a:lnSpc>
@@ -20766,7 +20443,7 @@
           <a:bodyPr wrap="square" lIns="0" tIns="0" rIns="0" bIns="0" rtlCol="0" anchor="ctr"/>
           <a:lstStyle/>
           <a:p>
-            <a:pPr indent="0" marL="0">
+            <a:pPr marL="0" indent="0">
               <a:buNone/>
             </a:pPr>
             <a:r>
@@ -20805,7 +20482,7 @@
           <a:bodyPr wrap="square" lIns="0" tIns="0" rIns="0" bIns="0" rtlCol="0" anchor="t"/>
           <a:lstStyle/>
           <a:p>
-            <a:pPr indent="0" marL="0">
+            <a:pPr marL="0" indent="0">
               <a:lnSpc>
                 <a:spcPct val="105000"/>
               </a:lnSpc>
@@ -20874,7 +20551,7 @@
           <a:bodyPr wrap="square" lIns="0" tIns="0" rIns="0" bIns="0" rtlCol="0" anchor="ctr"/>
           <a:lstStyle/>
           <a:p>
-            <a:pPr indent="0" marL="0">
+            <a:pPr marL="0" indent="0">
               <a:buNone/>
             </a:pPr>
             <a:r>
@@ -20913,7 +20590,7 @@
           <a:bodyPr wrap="square" lIns="0" tIns="0" rIns="0" bIns="0" rtlCol="0" anchor="t"/>
           <a:lstStyle/>
           <a:p>
-            <a:pPr indent="0" marL="0">
+            <a:pPr marL="0" indent="0">
               <a:lnSpc>
                 <a:spcPct val="105000"/>
               </a:lnSpc>
@@ -20982,7 +20659,7 @@
           <a:bodyPr wrap="square" lIns="0" tIns="0" rIns="0" bIns="0" rtlCol="0" anchor="ctr"/>
           <a:lstStyle/>
           <a:p>
-            <a:pPr indent="0" marL="0">
+            <a:pPr marL="0" indent="0">
               <a:buNone/>
             </a:pPr>
             <a:r>
@@ -21021,7 +20698,7 @@
           <a:bodyPr wrap="square" lIns="0" tIns="0" rIns="0" bIns="0" rtlCol="0" anchor="t"/>
           <a:lstStyle/>
           <a:p>
-            <a:pPr indent="0" marL="0">
+            <a:pPr marL="0" indent="0">
               <a:lnSpc>
                 <a:spcPct val="105000"/>
               </a:lnSpc>
@@ -21090,7 +20767,7 @@
           <a:bodyPr wrap="square" lIns="0" tIns="0" rIns="0" bIns="0" rtlCol="0" anchor="ctr"/>
           <a:lstStyle/>
           <a:p>
-            <a:pPr indent="0" marL="0">
+            <a:pPr marL="0" indent="0">
               <a:lnSpc>
                 <a:spcPct val="112000"/>
               </a:lnSpc>
@@ -21113,7 +20790,7 @@
       </p:sp>
       <p:sp>
         <p:nvSpPr>
-          <p:cNvPr id="25" name="Slide Number Placeholder 0"/>
+          <p:cNvPr id="28" name="Slide Number Placeholder 0"/>
           <p:cNvSpPr>
             <a:spLocks noGrp="1"/>
           </p:cNvSpPr>
@@ -21131,7 +20808,7 @@
           </a:prstGeom>
           <a:extLst>
             <a:ext uri="{C572A759-6A51-4108-AA02-DFA0A04FC94B}">
-              <ma14:wrappingTextBoxFlag xmlns:ma14="http://schemas.microsoft.com/office/mac/drawingml/2011/main" val="0"/>
+              <ma14:wrappingTextBoxFlag xmlns:ma14="http://schemas.microsoft.com/office/mac/drawingml/2011/main" xmlns="" val="0"/>
             </a:ext>
           </a:extLst>
         </p:spPr>
@@ -21152,7 +20829,7 @@
           <a:p>
             <a:pPr algn="l"/>
             <a:fld id="{F7021451-1387-4CA6-816F-3879F97B5CBC}" type="slidenum">
-              <a:rPr b="0" lang="en-US"/>
+              <a:rPr lang="en-US" b="0"/>
               <a:t>4</a:t>
             </a:fld>
             <a:endParaRPr lang="en-US"/>
@@ -21205,11 +20882,11 @@
           <a:bodyPr wrap="square" lIns="0" tIns="0" rIns="0" bIns="0" rtlCol="0" anchor="ctr"/>
           <a:lstStyle/>
           <a:p>
-            <a:pPr indent="0" marL="0">
-              <a:buNone/>
-            </a:pPr>
-            <a:r>
-              <a:rPr lang="en-US" sz="1200" b="1" spc="400" kern="0" dirty="0">
+            <a:pPr marL="0" indent="0">
+              <a:buNone/>
+            </a:pPr>
+            <a:r>
+              <a:rPr lang="en-US" sz="1200" b="1" kern="0" spc="400" dirty="0">
                 <a:solidFill>
                   <a:srgbClr val="FFFFFF"/>
                 </a:solidFill>
@@ -21244,7 +20921,7 @@
           <a:bodyPr wrap="square" lIns="0" tIns="0" rIns="0" bIns="0" rtlCol="0" anchor="ctr"/>
           <a:lstStyle/>
           <a:p>
-            <a:pPr indent="0" marL="0">
+            <a:pPr marL="0" indent="0">
               <a:buNone/>
             </a:pPr>
             <a:r>
@@ -21283,7 +20960,7 @@
           <a:bodyPr wrap="square" lIns="0" tIns="0" rIns="0" bIns="0" rtlCol="0" anchor="t"/>
           <a:lstStyle/>
           <a:p>
-            <a:pPr indent="0" marL="0">
+            <a:pPr marL="0" indent="0">
               <a:buNone/>
             </a:pPr>
             <a:r>
@@ -21369,7 +21046,7 @@
           <a:bodyPr wrap="square" lIns="0" tIns="0" rIns="0" bIns="0" rtlCol="0" anchor="ctr"/>
           <a:lstStyle/>
           <a:p>
-            <a:pPr algn="l" indent="0" marL="0">
+            <a:pPr marL="0" indent="0" algn="l">
               <a:buNone/>
             </a:pPr>
             <a:r>
@@ -21408,7 +21085,7 @@
           <a:bodyPr wrap="square" lIns="0" tIns="0" rIns="0" bIns="0" rtlCol="0" anchor="ctr"/>
           <a:lstStyle/>
           <a:p>
-            <a:pPr indent="0" marL="0">
+            <a:pPr marL="0" indent="0">
               <a:buNone/>
             </a:pPr>
             <a:r>
@@ -21474,11 +21151,11 @@
           <a:bodyPr wrap="square" lIns="0" tIns="0" rIns="0" bIns="0" rtlCol="0" anchor="ctr"/>
           <a:lstStyle/>
           <a:p>
-            <a:pPr algn="ctr" indent="0" marL="0">
-              <a:buNone/>
-            </a:pPr>
-            <a:r>
-              <a:rPr lang="en-US" sz="900" b="1" spc="100" kern="0" dirty="0">
+            <a:pPr marL="0" indent="0" algn="ctr">
+              <a:buNone/>
+            </a:pPr>
+            <a:r>
+              <a:rPr lang="en-US" sz="900" b="1" kern="0" spc="100" dirty="0">
                 <a:solidFill>
                   <a:srgbClr val="5A05F4"/>
                 </a:solidFill>
@@ -21494,14 +21171,14 @@
       </p:sp>
       <p:pic>
         <p:nvPicPr>
-          <p:cNvPr id="7" name="Image 0" descr="preencoded.png">    </p:cNvPr>
+          <p:cNvPr id="7" name="Image 0" descr="preencoded.png"/>
           <p:cNvPicPr>
             <a:picLocks noChangeAspect="1"/>
           </p:cNvPicPr>
           <p:nvPr/>
         </p:nvPicPr>
         <p:blipFill>
-          <a:blip r:embed="rId1"/>
+          <a:blip r:embed="rId3"/>
           <a:stretch>
             <a:fillRect/>
           </a:stretch>
@@ -21579,7 +21256,7 @@
           <a:bodyPr wrap="square" lIns="0" tIns="0" rIns="0" bIns="0" rtlCol="0" anchor="ctr"/>
           <a:lstStyle/>
           <a:p>
-            <a:pPr algn="ctr" indent="0" marL="0">
+            <a:pPr marL="0" indent="0" algn="ctr">
               <a:buNone/>
             </a:pPr>
             <a:r>
@@ -21618,7 +21295,7 @@
           <a:bodyPr wrap="square" lIns="0" tIns="0" rIns="0" bIns="0" rtlCol="0" anchor="ctr"/>
           <a:lstStyle/>
           <a:p>
-            <a:pPr indent="0" marL="0">
+            <a:pPr marL="0" indent="0">
               <a:buNone/>
             </a:pPr>
             <a:r>
@@ -21657,7 +21334,7 @@
           <a:bodyPr wrap="square" lIns="0" tIns="0" rIns="0" bIns="0" rtlCol="0" anchor="t"/>
           <a:lstStyle/>
           <a:p>
-            <a:pPr indent="0" marL="0">
+            <a:pPr marL="0" indent="0">
               <a:lnSpc>
                 <a:spcPct val="108000"/>
               </a:lnSpc>
@@ -21741,7 +21418,7 @@
           <a:bodyPr wrap="square" lIns="0" tIns="0" rIns="0" bIns="0" rtlCol="0" anchor="ctr"/>
           <a:lstStyle/>
           <a:p>
-            <a:pPr algn="ctr" indent="0" marL="0">
+            <a:pPr marL="0" indent="0" algn="ctr">
               <a:buNone/>
             </a:pPr>
             <a:r>
@@ -21780,7 +21457,7 @@
           <a:bodyPr wrap="square" lIns="0" tIns="0" rIns="0" bIns="0" rtlCol="0" anchor="ctr"/>
           <a:lstStyle/>
           <a:p>
-            <a:pPr indent="0" marL="0">
+            <a:pPr marL="0" indent="0">
               <a:buNone/>
             </a:pPr>
             <a:r>
@@ -21819,7 +21496,7 @@
           <a:bodyPr wrap="square" lIns="0" tIns="0" rIns="0" bIns="0" rtlCol="0" anchor="t"/>
           <a:lstStyle/>
           <a:p>
-            <a:pPr indent="0" marL="0">
+            <a:pPr marL="0" indent="0">
               <a:lnSpc>
                 <a:spcPct val="108000"/>
               </a:lnSpc>
@@ -21903,7 +21580,7 @@
           <a:bodyPr wrap="square" lIns="0" tIns="0" rIns="0" bIns="0" rtlCol="0" anchor="ctr"/>
           <a:lstStyle/>
           <a:p>
-            <a:pPr algn="ctr" indent="0" marL="0">
+            <a:pPr marL="0" indent="0" algn="ctr">
               <a:buNone/>
             </a:pPr>
             <a:r>
@@ -21942,7 +21619,7 @@
           <a:bodyPr wrap="square" lIns="0" tIns="0" rIns="0" bIns="0" rtlCol="0" anchor="ctr"/>
           <a:lstStyle/>
           <a:p>
-            <a:pPr indent="0" marL="0">
+            <a:pPr marL="0" indent="0">
               <a:buNone/>
             </a:pPr>
             <a:r>
@@ -21981,7 +21658,7 @@
           <a:bodyPr wrap="square" lIns="0" tIns="0" rIns="0" bIns="0" rtlCol="0" anchor="t"/>
           <a:lstStyle/>
           <a:p>
-            <a:pPr indent="0" marL="0">
+            <a:pPr marL="0" indent="0">
               <a:lnSpc>
                 <a:spcPct val="108000"/>
               </a:lnSpc>
@@ -22023,7 +21700,7 @@
           <a:bodyPr wrap="square" lIns="0" tIns="0" rIns="0" bIns="0" rtlCol="0" anchor="ctr"/>
           <a:lstStyle/>
           <a:p>
-            <a:pPr indent="0" marL="0">
+            <a:pPr marL="0" indent="0">
               <a:buNone/>
             </a:pPr>
             <a:r>
@@ -22050,7 +21727,7 @@
         <p:spPr>
           <a:xfrm>
             <a:off x="566928" y="4160520"/>
-            <a:ext cx="11064240" cy="1371600"/>
+            <a:ext cx="10927080" cy="1371600"/>
           </a:xfrm>
           <a:prstGeom prst="roundRect">
             <a:avLst>
@@ -22084,11 +21761,11 @@
           <a:bodyPr wrap="square" lIns="0" tIns="0" rIns="0" bIns="0" rtlCol="0" anchor="ctr"/>
           <a:lstStyle/>
           <a:p>
-            <a:pPr indent="0" marL="0">
-              <a:buNone/>
-            </a:pPr>
-            <a:r>
-              <a:rPr lang="en-US" sz="950" b="1" spc="150" kern="0" dirty="0">
+            <a:pPr marL="0" indent="0">
+              <a:buNone/>
+            </a:pPr>
+            <a:r>
+              <a:rPr lang="en-US" sz="950" b="1" kern="0" spc="150" dirty="0">
                 <a:solidFill>
                   <a:srgbClr val="FFFFFF"/>
                 </a:solidFill>
@@ -22123,7 +21800,7 @@
           <a:bodyPr wrap="square" lIns="0" tIns="0" rIns="0" bIns="0" rtlCol="0" anchor="ctr"/>
           <a:lstStyle/>
           <a:p>
-            <a:pPr indent="0" marL="0">
+            <a:pPr marL="0" indent="0">
               <a:lnSpc>
                 <a:spcPct val="112000"/>
               </a:lnSpc>
@@ -22146,7 +21823,7 @@
       </p:sp>
       <p:sp>
         <p:nvSpPr>
-          <p:cNvPr id="25" name="Slide Number Placeholder 0"/>
+          <p:cNvPr id="27" name="Slide Number Placeholder 0"/>
           <p:cNvSpPr>
             <a:spLocks noGrp="1"/>
           </p:cNvSpPr>
@@ -22164,7 +21841,7 @@
           </a:prstGeom>
           <a:extLst>
             <a:ext uri="{C572A759-6A51-4108-AA02-DFA0A04FC94B}">
-              <ma14:wrappingTextBoxFlag xmlns:ma14="http://schemas.microsoft.com/office/mac/drawingml/2011/main" val="0"/>
+              <ma14:wrappingTextBoxFlag xmlns:ma14="http://schemas.microsoft.com/office/mac/drawingml/2011/main" xmlns="" val="0"/>
             </a:ext>
           </a:extLst>
         </p:spPr>
@@ -22185,7 +21862,7 @@
           <a:p>
             <a:pPr algn="l"/>
             <a:fld id="{F7021451-1387-4CA6-816F-3879F97B5CBC}" type="slidenum">
-              <a:rPr b="0" lang="en-US"/>
+              <a:rPr lang="en-US" b="0"/>
               <a:t>6</a:t>
             </a:fld>
             <a:endParaRPr lang="en-US"/>
@@ -22260,7 +21937,7 @@
           <a:bodyPr wrap="square" lIns="0" tIns="0" rIns="0" bIns="0" rtlCol="0" anchor="ctr"/>
           <a:lstStyle/>
           <a:p>
-            <a:pPr algn="l" indent="0" marL="0">
+            <a:pPr marL="0" indent="0" algn="l">
               <a:buNone/>
             </a:pPr>
             <a:r>
@@ -22299,7 +21976,7 @@
           <a:bodyPr wrap="square" lIns="0" tIns="0" rIns="0" bIns="0" rtlCol="0" anchor="ctr"/>
           <a:lstStyle/>
           <a:p>
-            <a:pPr indent="0" marL="0">
+            <a:pPr marL="0" indent="0">
               <a:buNone/>
             </a:pPr>
             <a:r>
@@ -22365,11 +22042,11 @@
           <a:bodyPr wrap="square" lIns="0" tIns="0" rIns="0" bIns="0" rtlCol="0" anchor="ctr"/>
           <a:lstStyle/>
           <a:p>
-            <a:pPr algn="ctr" indent="0" marL="0">
-              <a:buNone/>
-            </a:pPr>
-            <a:r>
-              <a:rPr lang="en-US" sz="900" b="1" spc="100" kern="0" dirty="0">
+            <a:pPr marL="0" indent="0" algn="ctr">
+              <a:buNone/>
+            </a:pPr>
+            <a:r>
+              <a:rPr lang="en-US" sz="900" b="1" kern="0" spc="100" dirty="0">
                 <a:solidFill>
                   <a:srgbClr val="5A05F4"/>
                 </a:solidFill>
@@ -22385,14 +22062,14 @@
       </p:sp>
       <p:pic>
         <p:nvPicPr>
-          <p:cNvPr id="7" name="Image 0" descr="preencoded.png">    </p:cNvPr>
+          <p:cNvPr id="7" name="Image 0" descr="preencoded.png"/>
           <p:cNvPicPr>
             <a:picLocks noChangeAspect="1"/>
           </p:cNvPicPr>
           <p:nvPr/>
         </p:nvPicPr>
         <p:blipFill>
-          <a:blip r:embed="rId1"/>
+          <a:blip r:embed="rId3"/>
           <a:stretch>
             <a:fillRect/>
           </a:stretch>
@@ -22450,7 +22127,7 @@
           <a:bodyPr wrap="square" lIns="0" tIns="0" rIns="0" bIns="0" rtlCol="0" anchor="ctr"/>
           <a:lstStyle/>
           <a:p>
-            <a:pPr indent="0" marL="0">
+            <a:pPr marL="0" indent="0">
               <a:buNone/>
             </a:pPr>
             <a:r>
@@ -22489,7 +22166,7 @@
           <a:bodyPr wrap="square" lIns="0" tIns="0" rIns="0" bIns="0" rtlCol="0" anchor="ctr"/>
           <a:lstStyle/>
           <a:p>
-            <a:pPr indent="0" marL="0">
+            <a:pPr marL="0" indent="0">
               <a:buNone/>
             </a:pPr>
             <a:r>
@@ -22550,7 +22227,7 @@
           <a:bodyPr wrap="square" lIns="0" tIns="0" rIns="0" bIns="0" rtlCol="0" anchor="ctr"/>
           <a:lstStyle/>
           <a:p>
-            <a:pPr indent="0" marL="0">
+            <a:pPr marL="0" indent="0">
               <a:buNone/>
             </a:pPr>
             <a:r>
@@ -22589,7 +22266,7 @@
           <a:bodyPr wrap="square" lIns="0" tIns="0" rIns="0" bIns="0" rtlCol="0" anchor="ctr"/>
           <a:lstStyle/>
           <a:p>
-            <a:pPr indent="0" marL="0">
+            <a:pPr marL="0" indent="0">
               <a:buNone/>
             </a:pPr>
             <a:r>
@@ -22650,7 +22327,7 @@
           <a:bodyPr wrap="square" lIns="0" tIns="0" rIns="0" bIns="0" rtlCol="0" anchor="ctr"/>
           <a:lstStyle/>
           <a:p>
-            <a:pPr indent="0" marL="0">
+            <a:pPr marL="0" indent="0">
               <a:buNone/>
             </a:pPr>
             <a:r>
@@ -22689,7 +22366,7 @@
           <a:bodyPr wrap="square" lIns="0" tIns="0" rIns="0" bIns="0" rtlCol="0" anchor="ctr"/>
           <a:lstStyle/>
           <a:p>
-            <a:pPr indent="0" marL="0">
+            <a:pPr marL="0" indent="0">
               <a:buNone/>
             </a:pPr>
             <a:r>
@@ -22755,7 +22432,7 @@
           <a:bodyPr wrap="square" lIns="0" tIns="0" rIns="0" bIns="0" rtlCol="0" anchor="ctr"/>
           <a:lstStyle/>
           <a:p>
-            <a:pPr algn="ctr" indent="0" marL="0">
+            <a:pPr marL="0" indent="0" algn="ctr">
               <a:buNone/>
             </a:pPr>
             <a:r>
@@ -22859,7 +22536,7 @@
           <a:bodyPr wrap="square" lIns="0" tIns="0" rIns="0" bIns="0" rtlCol="0" anchor="ctr"/>
           <a:lstStyle/>
           <a:p>
-            <a:pPr algn="ctr" indent="0" marL="0">
+            <a:pPr marL="0" indent="0" algn="ctr">
               <a:buNone/>
             </a:pPr>
             <a:r>
@@ -22920,7 +22597,7 @@
           <a:bodyPr wrap="square" lIns="0" tIns="0" rIns="0" bIns="0" rtlCol="0" anchor="ctr"/>
           <a:lstStyle/>
           <a:p>
-            <a:pPr algn="ctr" indent="0" marL="0">
+            <a:pPr marL="0" indent="0" algn="ctr">
               <a:buNone/>
             </a:pPr>
             <a:r>
@@ -22981,7 +22658,7 @@
           <a:bodyPr wrap="square" lIns="0" tIns="0" rIns="0" bIns="0" rtlCol="0" anchor="ctr"/>
           <a:lstStyle/>
           <a:p>
-            <a:pPr algn="ctr" indent="0" marL="0">
+            <a:pPr marL="0" indent="0" algn="ctr">
               <a:buNone/>
             </a:pPr>
             <a:r>
@@ -23085,7 +22762,7 @@
           <a:bodyPr wrap="square" lIns="0" tIns="0" rIns="0" bIns="0" rtlCol="0" anchor="ctr"/>
           <a:lstStyle/>
           <a:p>
-            <a:pPr algn="ctr" indent="0" marL="0">
+            <a:pPr marL="0" indent="0" algn="ctr">
               <a:buNone/>
             </a:pPr>
             <a:r>
@@ -23151,11 +22828,11 @@
           <a:bodyPr wrap="square" lIns="0" tIns="0" rIns="0" bIns="0" rtlCol="0" anchor="ctr"/>
           <a:lstStyle/>
           <a:p>
-            <a:pPr indent="0" marL="0">
-              <a:buNone/>
-            </a:pPr>
-            <a:r>
-              <a:rPr lang="en-US" sz="950" b="1" spc="150" kern="0" dirty="0">
+            <a:pPr marL="0" indent="0">
+              <a:buNone/>
+            </a:pPr>
+            <a:r>
+              <a:rPr lang="en-US" sz="950" b="1" kern="0" spc="150" dirty="0">
                 <a:solidFill>
                   <a:srgbClr val="106B41"/>
                 </a:solidFill>
@@ -23190,7 +22867,7 @@
           <a:bodyPr wrap="square" lIns="0" tIns="0" rIns="0" bIns="0" rtlCol="0" anchor="ctr"/>
           <a:lstStyle/>
           <a:p>
-            <a:pPr indent="0" marL="0">
+            <a:pPr marL="0" indent="0">
               <a:lnSpc>
                 <a:spcPct val="112000"/>
               </a:lnSpc>
@@ -23259,7 +22936,7 @@
           <a:bodyPr wrap="square" lIns="0" tIns="0" rIns="0" bIns="0" rtlCol="0" anchor="ctr"/>
           <a:lstStyle/>
           <a:p>
-            <a:pPr indent="0" marL="0">
+            <a:pPr marL="0" indent="0">
               <a:lnSpc>
                 <a:spcPct val="112000"/>
               </a:lnSpc>
@@ -23282,7 +22959,7 @@
       </p:sp>
       <p:sp>
         <p:nvSpPr>
-          <p:cNvPr id="25" name="Slide Number Placeholder 0"/>
+          <p:cNvPr id="36" name="Slide Number Placeholder 0"/>
           <p:cNvSpPr>
             <a:spLocks noGrp="1"/>
           </p:cNvSpPr>
@@ -23300,7 +22977,7 @@
           </a:prstGeom>
           <a:extLst>
             <a:ext uri="{C572A759-6A51-4108-AA02-DFA0A04FC94B}">
-              <ma14:wrappingTextBoxFlag xmlns:ma14="http://schemas.microsoft.com/office/mac/drawingml/2011/main" val="0"/>
+              <ma14:wrappingTextBoxFlag xmlns:ma14="http://schemas.microsoft.com/office/mac/drawingml/2011/main" xmlns="" val="0"/>
             </a:ext>
           </a:extLst>
         </p:spPr>
@@ -23321,7 +22998,7 @@
           <a:p>
             <a:pPr algn="l"/>
             <a:fld id="{F7021451-1387-4CA6-816F-3879F97B5CBC}" type="slidenum">
-              <a:rPr b="0" lang="en-US"/>
+              <a:rPr lang="en-US" b="0"/>
               <a:t>7</a:t>
             </a:fld>
             <a:endParaRPr lang="en-US"/>
@@ -23396,7 +23073,7 @@
           <a:bodyPr wrap="square" lIns="0" tIns="0" rIns="0" bIns="0" rtlCol="0" anchor="ctr"/>
           <a:lstStyle/>
           <a:p>
-            <a:pPr algn="l" indent="0" marL="0">
+            <a:pPr marL="0" indent="0" algn="l">
               <a:buNone/>
             </a:pPr>
             <a:r>
@@ -23435,7 +23112,7 @@
           <a:bodyPr wrap="square" lIns="0" tIns="0" rIns="0" bIns="0" rtlCol="0" anchor="ctr"/>
           <a:lstStyle/>
           <a:p>
-            <a:pPr indent="0" marL="0">
+            <a:pPr marL="0" indent="0">
               <a:buNone/>
             </a:pPr>
             <a:r>
@@ -23501,11 +23178,11 @@
           <a:bodyPr wrap="square" lIns="0" tIns="0" rIns="0" bIns="0" rtlCol="0" anchor="ctr"/>
           <a:lstStyle/>
           <a:p>
-            <a:pPr algn="ctr" indent="0" marL="0">
-              <a:buNone/>
-            </a:pPr>
-            <a:r>
-              <a:rPr lang="en-US" sz="900" b="1" spc="100" kern="0" dirty="0">
+            <a:pPr marL="0" indent="0" algn="ctr">
+              <a:buNone/>
+            </a:pPr>
+            <a:r>
+              <a:rPr lang="en-US" sz="900" b="1" kern="0" spc="100" dirty="0">
                 <a:solidFill>
                   <a:srgbClr val="5A05F4"/>
                 </a:solidFill>
@@ -23521,14 +23198,14 @@
       </p:sp>
       <p:pic>
         <p:nvPicPr>
-          <p:cNvPr id="7" name="Image 0" descr="preencoded.png">    </p:cNvPr>
+          <p:cNvPr id="7" name="Image 0" descr="preencoded.png"/>
           <p:cNvPicPr>
             <a:picLocks noChangeAspect="1"/>
           </p:cNvPicPr>
           <p:nvPr/>
         </p:nvPicPr>
         <p:blipFill>
-          <a:blip r:embed="rId1"/>
+          <a:blip r:embed="rId3"/>
           <a:stretch>
             <a:fillRect/>
           </a:stretch>
@@ -23586,7 +23263,7 @@
           <a:bodyPr wrap="square" lIns="0" tIns="0" rIns="0" bIns="0" rtlCol="0" anchor="ctr"/>
           <a:lstStyle/>
           <a:p>
-            <a:pPr indent="0" marL="0">
+            <a:pPr marL="0" indent="0">
               <a:buNone/>
             </a:pPr>
             <a:r>
@@ -23625,7 +23302,7 @@
           <a:bodyPr wrap="square" lIns="0" tIns="0" rIns="0" bIns="0" rtlCol="0" anchor="t"/>
           <a:lstStyle/>
           <a:p>
-            <a:pPr indent="0" marL="0">
+            <a:pPr marL="0" indent="0">
               <a:lnSpc>
                 <a:spcPct val="108000"/>
               </a:lnSpc>
@@ -23689,7 +23366,7 @@
           <a:bodyPr wrap="square" lIns="0" tIns="0" rIns="0" bIns="0" rtlCol="0" anchor="ctr"/>
           <a:lstStyle/>
           <a:p>
-            <a:pPr indent="0" marL="0">
+            <a:pPr marL="0" indent="0">
               <a:buNone/>
             </a:pPr>
             <a:r>
@@ -23728,7 +23405,7 @@
           <a:bodyPr wrap="square" lIns="0" tIns="0" rIns="0" bIns="0" rtlCol="0" anchor="t"/>
           <a:lstStyle/>
           <a:p>
-            <a:pPr indent="0" marL="0">
+            <a:pPr marL="0" indent="0">
               <a:lnSpc>
                 <a:spcPct val="108000"/>
               </a:lnSpc>
@@ -23770,7 +23447,7 @@
           <a:bodyPr wrap="square" lIns="0" tIns="0" rIns="0" bIns="0" rtlCol="0" anchor="ctr"/>
           <a:lstStyle/>
           <a:p>
-            <a:pPr algn="ctr" indent="0" marL="0">
+            <a:pPr marL="0" indent="0" algn="ctr">
               <a:buNone/>
             </a:pPr>
             <a:r>
@@ -23836,11 +23513,11 @@
           <a:bodyPr wrap="square" lIns="0" tIns="0" rIns="0" bIns="0" rtlCol="0" anchor="ctr"/>
           <a:lstStyle/>
           <a:p>
-            <a:pPr indent="0" marL="0">
-              <a:buNone/>
-            </a:pPr>
-            <a:r>
-              <a:rPr lang="en-US" sz="950" b="1" spc="150" kern="0" dirty="0">
+            <a:pPr marL="0" indent="0">
+              <a:buNone/>
+            </a:pPr>
+            <a:r>
+              <a:rPr lang="en-US" sz="950" b="1" kern="0" spc="150" dirty="0">
                 <a:solidFill>
                   <a:srgbClr val="B3261E"/>
                 </a:solidFill>
@@ -23875,7 +23552,7 @@
           <a:bodyPr wrap="square" lIns="0" tIns="0" rIns="0" bIns="0" rtlCol="0" anchor="ctr"/>
           <a:lstStyle/>
           <a:p>
-            <a:pPr indent="0" marL="0">
+            <a:pPr marL="0" indent="0">
               <a:lnSpc>
                 <a:spcPct val="112000"/>
               </a:lnSpc>
@@ -23916,7 +23593,7 @@
           </a:prstGeom>
           <a:extLst>
             <a:ext uri="{C572A759-6A51-4108-AA02-DFA0A04FC94B}">
-              <ma14:wrappingTextBoxFlag xmlns:ma14="http://schemas.microsoft.com/office/mac/drawingml/2011/main" val="0"/>
+              <ma14:wrappingTextBoxFlag xmlns:ma14="http://schemas.microsoft.com/office/mac/drawingml/2011/main" xmlns="" val="0"/>
             </a:ext>
           </a:extLst>
         </p:spPr>
@@ -23937,7 +23614,7 @@
           <a:p>
             <a:pPr algn="l"/>
             <a:fld id="{F7021451-1387-4CA6-816F-3879F97B5CBC}" type="slidenum">
-              <a:rPr b="0" lang="en-US"/>
+              <a:rPr lang="en-US" b="0"/>
               <a:t>8</a:t>
             </a:fld>
             <a:endParaRPr lang="en-US"/>
@@ -24012,7 +23689,7 @@
           <a:bodyPr wrap="square" lIns="0" tIns="0" rIns="0" bIns="0" rtlCol="0" anchor="ctr"/>
           <a:lstStyle/>
           <a:p>
-            <a:pPr algn="l" indent="0" marL="0">
+            <a:pPr marL="0" indent="0" algn="l">
               <a:buNone/>
             </a:pPr>
             <a:r>
@@ -24051,7 +23728,7 @@
           <a:bodyPr wrap="square" lIns="0" tIns="0" rIns="0" bIns="0" rtlCol="0" anchor="ctr"/>
           <a:lstStyle/>
           <a:p>
-            <a:pPr indent="0" marL="0">
+            <a:pPr marL="0" indent="0">
               <a:buNone/>
             </a:pPr>
             <a:r>
@@ -24117,11 +23794,11 @@
           <a:bodyPr wrap="square" lIns="0" tIns="0" rIns="0" bIns="0" rtlCol="0" anchor="ctr"/>
           <a:lstStyle/>
           <a:p>
-            <a:pPr algn="ctr" indent="0" marL="0">
-              <a:buNone/>
-            </a:pPr>
-            <a:r>
-              <a:rPr lang="en-US" sz="900" b="1" spc="100" kern="0" dirty="0">
+            <a:pPr marL="0" indent="0" algn="ctr">
+              <a:buNone/>
+            </a:pPr>
+            <a:r>
+              <a:rPr lang="en-US" sz="900" b="1" kern="0" spc="100" dirty="0">
                 <a:solidFill>
                   <a:srgbClr val="5A05F4"/>
                 </a:solidFill>
@@ -24137,14 +23814,14 @@
       </p:sp>
       <p:pic>
         <p:nvPicPr>
-          <p:cNvPr id="7" name="Image 0" descr="preencoded.png">    </p:cNvPr>
+          <p:cNvPr id="7" name="Image 0" descr="preencoded.png"/>
           <p:cNvPicPr>
             <a:picLocks noChangeAspect="1"/>
           </p:cNvPicPr>
           <p:nvPr/>
         </p:nvPicPr>
         <p:blipFill>
-          <a:blip r:embed="rId1"/>
+          <a:blip r:embed="rId3"/>
           <a:stretch>
             <a:fillRect/>
           </a:stretch>
@@ -24207,7 +23884,7 @@
           <a:bodyPr wrap="square" lIns="0" tIns="0" rIns="0" bIns="0" rtlCol="0" anchor="t"/>
           <a:lstStyle/>
           <a:p>
-            <a:pPr indent="0" marL="0">
+            <a:pPr marL="0" indent="0">
               <a:lnSpc>
                 <a:spcPct val="130000"/>
               </a:lnSpc>
@@ -24227,7 +23904,7 @@
             <a:endParaRPr lang="en-US" sz="1000" dirty="0"/>
           </a:p>
           <a:p>
-            <a:pPr indent="0" marL="0">
+            <a:pPr marL="0" indent="0">
               <a:lnSpc>
                 <a:spcPct val="130000"/>
               </a:lnSpc>
@@ -24247,7 +23924,7 @@
             <a:endParaRPr lang="en-US" sz="1000" dirty="0"/>
           </a:p>
           <a:p>
-            <a:pPr indent="0" marL="0">
+            <a:pPr marL="0" indent="0">
               <a:lnSpc>
                 <a:spcPct val="130000"/>
               </a:lnSpc>
@@ -24267,7 +23944,7 @@
             <a:endParaRPr lang="en-US" sz="1000" dirty="0"/>
           </a:p>
           <a:p>
-            <a:pPr indent="0" marL="0">
+            <a:pPr marL="0" indent="0">
               <a:lnSpc>
                 <a:spcPct val="130000"/>
               </a:lnSpc>
@@ -24287,7 +23964,7 @@
             <a:endParaRPr lang="en-US" sz="1000" dirty="0"/>
           </a:p>
           <a:p>
-            <a:pPr indent="0" marL="0">
+            <a:pPr marL="0" indent="0">
               <a:lnSpc>
                 <a:spcPct val="130000"/>
               </a:lnSpc>
@@ -24307,7 +23984,7 @@
             <a:endParaRPr lang="en-US" sz="1000" dirty="0"/>
           </a:p>
           <a:p>
-            <a:pPr indent="0" marL="0">
+            <a:pPr marL="0" indent="0">
               <a:lnSpc>
                 <a:spcPct val="130000"/>
               </a:lnSpc>
@@ -24349,7 +24026,7 @@
           <a:bodyPr wrap="square" lIns="0" tIns="0" rIns="0" bIns="0" rtlCol="0" anchor="ctr"/>
           <a:lstStyle/>
           <a:p>
-            <a:pPr indent="0" marL="0">
+            <a:pPr marL="0" indent="0">
               <a:buNone/>
             </a:pPr>
             <a:r>
@@ -24388,7 +24065,7 @@
           <a:bodyPr wrap="square" lIns="0" tIns="0" rIns="0" bIns="0" rtlCol="0" anchor="ctr"/>
           <a:lstStyle/>
           <a:p>
-            <a:pPr indent="0" marL="0">
+            <a:pPr marL="0" indent="0">
               <a:buNone/>
             </a:pPr>
             <a:r>
@@ -24454,7 +24131,7 @@
           <a:bodyPr wrap="square" lIns="0" tIns="0" rIns="0" bIns="0" rtlCol="0" anchor="ctr"/>
           <a:lstStyle/>
           <a:p>
-            <a:pPr algn="ctr" indent="0" marL="0">
+            <a:pPr marL="0" indent="0" algn="ctr">
               <a:buNone/>
             </a:pPr>
             <a:r>
@@ -24493,7 +24170,7 @@
           <a:bodyPr wrap="square" lIns="0" tIns="0" rIns="0" bIns="0" rtlCol="0" anchor="ctr"/>
           <a:lstStyle/>
           <a:p>
-            <a:pPr indent="0" marL="0">
+            <a:pPr marL="0" indent="0">
               <a:buNone/>
             </a:pPr>
             <a:r>
@@ -24532,7 +24209,7 @@
           <a:bodyPr wrap="square" lIns="0" tIns="0" rIns="0" bIns="0" rtlCol="0" anchor="ctr"/>
           <a:lstStyle/>
           <a:p>
-            <a:pPr indent="0" marL="0">
+            <a:pPr marL="0" indent="0">
               <a:buNone/>
             </a:pPr>
             <a:r>
@@ -24598,7 +24275,7 @@
           <a:bodyPr wrap="square" lIns="0" tIns="0" rIns="0" bIns="0" rtlCol="0" anchor="ctr"/>
           <a:lstStyle/>
           <a:p>
-            <a:pPr algn="ctr" indent="0" marL="0">
+            <a:pPr marL="0" indent="0" algn="ctr">
               <a:buNone/>
             </a:pPr>
             <a:r>
@@ -24637,7 +24314,7 @@
           <a:bodyPr wrap="square" lIns="0" tIns="0" rIns="0" bIns="0" rtlCol="0" anchor="ctr"/>
           <a:lstStyle/>
           <a:p>
-            <a:pPr indent="0" marL="0">
+            <a:pPr marL="0" indent="0">
               <a:buNone/>
             </a:pPr>
             <a:r>
@@ -24676,7 +24353,7 @@
           <a:bodyPr wrap="square" lIns="0" tIns="0" rIns="0" bIns="0" rtlCol="0" anchor="ctr"/>
           <a:lstStyle/>
           <a:p>
-            <a:pPr indent="0" marL="0">
+            <a:pPr marL="0" indent="0">
               <a:buNone/>
             </a:pPr>
             <a:r>
@@ -24742,7 +24419,7 @@
           <a:bodyPr wrap="square" lIns="0" tIns="0" rIns="0" bIns="0" rtlCol="0" anchor="ctr"/>
           <a:lstStyle/>
           <a:p>
-            <a:pPr algn="ctr" indent="0" marL="0">
+            <a:pPr marL="0" indent="0" algn="ctr">
               <a:buNone/>
             </a:pPr>
             <a:r>
@@ -24781,7 +24458,7 @@
           <a:bodyPr wrap="square" lIns="0" tIns="0" rIns="0" bIns="0" rtlCol="0" anchor="ctr"/>
           <a:lstStyle/>
           <a:p>
-            <a:pPr indent="0" marL="0">
+            <a:pPr marL="0" indent="0">
               <a:buNone/>
             </a:pPr>
             <a:r>
@@ -24820,7 +24497,7 @@
           <a:bodyPr wrap="square" lIns="0" tIns="0" rIns="0" bIns="0" rtlCol="0" anchor="ctr"/>
           <a:lstStyle/>
           <a:p>
-            <a:pPr indent="0" marL="0">
+            <a:pPr marL="0" indent="0">
               <a:buNone/>
             </a:pPr>
             <a:r>
@@ -24886,7 +24563,7 @@
           <a:bodyPr wrap="square" lIns="0" tIns="0" rIns="0" bIns="0" rtlCol="0" anchor="ctr"/>
           <a:lstStyle/>
           <a:p>
-            <a:pPr algn="ctr" indent="0" marL="0">
+            <a:pPr marL="0" indent="0" algn="ctr">
               <a:buNone/>
             </a:pPr>
             <a:r>
@@ -24906,7 +24583,7 @@
       </p:sp>
       <p:sp>
         <p:nvSpPr>
-          <p:cNvPr id="25" name="Slide Number Placeholder 0"/>
+          <p:cNvPr id="26" name="Slide Number Placeholder 0"/>
           <p:cNvSpPr>
             <a:spLocks noGrp="1"/>
           </p:cNvSpPr>
@@ -24924,7 +24601,7 @@
           </a:prstGeom>
           <a:extLst>
             <a:ext uri="{C572A759-6A51-4108-AA02-DFA0A04FC94B}">
-              <ma14:wrappingTextBoxFlag xmlns:ma14="http://schemas.microsoft.com/office/mac/drawingml/2011/main" val="0"/>
+              <ma14:wrappingTextBoxFlag xmlns:ma14="http://schemas.microsoft.com/office/mac/drawingml/2011/main" xmlns="" val="0"/>
             </a:ext>
           </a:extLst>
         </p:spPr>
@@ -24945,7 +24622,7 @@
           <a:p>
             <a:pPr algn="l"/>
             <a:fld id="{F7021451-1387-4CA6-816F-3879F97B5CBC}" type="slidenum">
-              <a:rPr b="0" lang="en-US"/>
+              <a:rPr lang="en-US" b="0"/>
               <a:t>9</a:t>
             </a:fld>
             <a:endParaRPr lang="en-US"/>
@@ -25253,4 +24930,299 @@
     </a:ext>
   </a:extLst>
 </a:theme>
+</file>
+
+<file path=ppt/theme/theme2.xml><?xml version="1.0" encoding="utf-8"?>
+<a:theme xmlns:a="http://schemas.openxmlformats.org/drawingml/2006/main" name="Office Theme">
+  <a:themeElements>
+    <a:clrScheme name="Office">
+      <a:dk1>
+        <a:sysClr val="windowText" lastClr="000000"/>
+      </a:dk1>
+      <a:lt1>
+        <a:sysClr val="window" lastClr="FFFFFF"/>
+      </a:lt1>
+      <a:dk2>
+        <a:srgbClr val="44546A"/>
+      </a:dk2>
+      <a:lt2>
+        <a:srgbClr val="E7E6E6"/>
+      </a:lt2>
+      <a:accent1>
+        <a:srgbClr val="4472C4"/>
+      </a:accent1>
+      <a:accent2>
+        <a:srgbClr val="ED7D31"/>
+      </a:accent2>
+      <a:accent3>
+        <a:srgbClr val="A5A5A5"/>
+      </a:accent3>
+      <a:accent4>
+        <a:srgbClr val="FFC000"/>
+      </a:accent4>
+      <a:accent5>
+        <a:srgbClr val="5B9BD5"/>
+      </a:accent5>
+      <a:accent6>
+        <a:srgbClr val="70AD47"/>
+      </a:accent6>
+      <a:hlink>
+        <a:srgbClr val="0563C1"/>
+      </a:hlink>
+      <a:folHlink>
+        <a:srgbClr val="954F72"/>
+      </a:folHlink>
+    </a:clrScheme>
+    <a:fontScheme name="Office">
+      <a:majorFont>
+        <a:latin typeface="Calibri Light" panose="020F0302020204030204"/>
+        <a:ea typeface=""/>
+        <a:cs typeface=""/>
+        <a:font script="Jpan" typeface="游ゴシック Light"/>
+        <a:font script="Hang" typeface="맑은 고딕"/>
+        <a:font script="Hans" typeface="等线 Light"/>
+        <a:font script="Hant" typeface="新細明體"/>
+        <a:font script="Arab" typeface="Times New Roman"/>
+        <a:font script="Hebr" typeface="Times New Roman"/>
+        <a:font script="Thai" typeface="Angsana New"/>
+        <a:font script="Ethi" typeface="Nyala"/>
+        <a:font script="Beng" typeface="Vrinda"/>
+        <a:font script="Gujr" typeface="Shruti"/>
+        <a:font script="Khmr" typeface="MoolBoran"/>
+        <a:font script="Knda" typeface="Tunga"/>
+        <a:font script="Guru" typeface="Raavi"/>
+        <a:font script="Cans" typeface="Euphemia"/>
+        <a:font script="Cher" typeface="Plantagenet Cherokee"/>
+        <a:font script="Yiii" typeface="Microsoft Yi Baiti"/>
+        <a:font script="Tibt" typeface="Microsoft Himalaya"/>
+        <a:font script="Thaa" typeface="MV Boli"/>
+        <a:font script="Deva" typeface="Mangal"/>
+        <a:font script="Telu" typeface="Gautami"/>
+        <a:font script="Taml" typeface="Latha"/>
+        <a:font script="Syrc" typeface="Estrangelo Edessa"/>
+        <a:font script="Orya" typeface="Kalinga"/>
+        <a:font script="Mlym" typeface="Kartika"/>
+        <a:font script="Laoo" typeface="DokChampa"/>
+        <a:font script="Sinh" typeface="Iskoola Pota"/>
+        <a:font script="Mong" typeface="Mongolian Baiti"/>
+        <a:font script="Viet" typeface="Times New Roman"/>
+        <a:font script="Uigh" typeface="Microsoft Uighur"/>
+        <a:font script="Geor" typeface="Sylfaen"/>
+        <a:font script="Armn" typeface="Arial"/>
+        <a:font script="Bugi" typeface="Leelawadee UI"/>
+        <a:font script="Bopo" typeface="Microsoft JhengHei"/>
+        <a:font script="Java" typeface="Javanese Text"/>
+        <a:font script="Lisu" typeface="Segoe UI"/>
+        <a:font script="Mymr" typeface="Myanmar Text"/>
+        <a:font script="Nkoo" typeface="Ebrima"/>
+        <a:font script="Olck" typeface="Nirmala UI"/>
+        <a:font script="Osma" typeface="Ebrima"/>
+        <a:font script="Phag" typeface="Phagspa"/>
+        <a:font script="Syrn" typeface="Estrangelo Edessa"/>
+        <a:font script="Syrj" typeface="Estrangelo Edessa"/>
+        <a:font script="Syre" typeface="Estrangelo Edessa"/>
+        <a:font script="Sora" typeface="Nirmala UI"/>
+        <a:font script="Tale" typeface="Microsoft Tai Le"/>
+        <a:font script="Talu" typeface="Microsoft New Tai Lue"/>
+        <a:font script="Tfng" typeface="Ebrima"/>
+      </a:majorFont>
+      <a:minorFont>
+        <a:latin typeface="Calibri" panose="020F0502020204030204"/>
+        <a:ea typeface=""/>
+        <a:cs typeface=""/>
+        <a:font script="Jpan" typeface="游ゴシック"/>
+        <a:font script="Hang" typeface="맑은 고딕"/>
+        <a:font script="Hans" typeface="等线"/>
+        <a:font script="Hant" typeface="新細明體"/>
+        <a:font script="Arab" typeface="Arial"/>
+        <a:font script="Hebr" typeface="Arial"/>
+        <a:font script="Thai" typeface="Cordia New"/>
+        <a:font script="Ethi" typeface="Nyala"/>
+        <a:font script="Beng" typeface="Vrinda"/>
+        <a:font script="Gujr" typeface="Shruti"/>
+        <a:font script="Khmr" typeface="DaunPenh"/>
+        <a:font script="Knda" typeface="Tunga"/>
+        <a:font script="Guru" typeface="Raavi"/>
+        <a:font script="Cans" typeface="Euphemia"/>
+        <a:font script="Cher" typeface="Plantagenet Cherokee"/>
+        <a:font script="Yiii" typeface="Microsoft Yi Baiti"/>
+        <a:font script="Tibt" typeface="Microsoft Himalaya"/>
+        <a:font script="Thaa" typeface="MV Boli"/>
+        <a:font script="Deva" typeface="Mangal"/>
+        <a:font script="Telu" typeface="Gautami"/>
+        <a:font script="Taml" typeface="Latha"/>
+        <a:font script="Syrc" typeface="Estrangelo Edessa"/>
+        <a:font script="Orya" typeface="Kalinga"/>
+        <a:font script="Mlym" typeface="Kartika"/>
+        <a:font script="Laoo" typeface="DokChampa"/>
+        <a:font script="Sinh" typeface="Iskoola Pota"/>
+        <a:font script="Mong" typeface="Mongolian Baiti"/>
+        <a:font script="Viet" typeface="Arial"/>
+        <a:font script="Uigh" typeface="Microsoft Uighur"/>
+        <a:font script="Geor" typeface="Sylfaen"/>
+        <a:font script="Armn" typeface="Arial"/>
+        <a:font script="Bugi" typeface="Leelawadee UI"/>
+        <a:font script="Bopo" typeface="Microsoft JhengHei"/>
+        <a:font script="Java" typeface="Javanese Text"/>
+        <a:font script="Lisu" typeface="Segoe UI"/>
+        <a:font script="Mymr" typeface="Myanmar Text"/>
+        <a:font script="Nkoo" typeface="Ebrima"/>
+        <a:font script="Olck" typeface="Nirmala UI"/>
+        <a:font script="Osma" typeface="Ebrima"/>
+        <a:font script="Phag" typeface="Phagspa"/>
+        <a:font script="Syrn" typeface="Estrangelo Edessa"/>
+        <a:font script="Syrj" typeface="Estrangelo Edessa"/>
+        <a:font script="Syre" typeface="Estrangelo Edessa"/>
+        <a:font script="Sora" typeface="Nirmala UI"/>
+        <a:font script="Tale" typeface="Microsoft Tai Le"/>
+        <a:font script="Talu" typeface="Microsoft New Tai Lue"/>
+        <a:font script="Tfng" typeface="Ebrima"/>
+      </a:minorFont>
+    </a:fontScheme>
+    <a:fmtScheme name="Office">
+      <a:fillStyleLst>
+        <a:solidFill>
+          <a:schemeClr val="phClr"/>
+        </a:solidFill>
+        <a:gradFill rotWithShape="1">
+          <a:gsLst>
+            <a:gs pos="0">
+              <a:schemeClr val="phClr">
+                <a:lumMod val="110000"/>
+                <a:satMod val="105000"/>
+                <a:tint val="67000"/>
+              </a:schemeClr>
+            </a:gs>
+            <a:gs pos="50000">
+              <a:schemeClr val="phClr">
+                <a:lumMod val="105000"/>
+                <a:satMod val="103000"/>
+                <a:tint val="73000"/>
+              </a:schemeClr>
+            </a:gs>
+            <a:gs pos="100000">
+              <a:schemeClr val="phClr">
+                <a:lumMod val="105000"/>
+                <a:satMod val="109000"/>
+                <a:tint val="81000"/>
+              </a:schemeClr>
+            </a:gs>
+          </a:gsLst>
+          <a:lin ang="5400000" scaled="0"/>
+        </a:gradFill>
+        <a:gradFill rotWithShape="1">
+          <a:gsLst>
+            <a:gs pos="0">
+              <a:schemeClr val="phClr">
+                <a:satMod val="103000"/>
+                <a:lumMod val="102000"/>
+                <a:tint val="94000"/>
+              </a:schemeClr>
+            </a:gs>
+            <a:gs pos="50000">
+              <a:schemeClr val="phClr">
+                <a:satMod val="110000"/>
+                <a:lumMod val="100000"/>
+                <a:shade val="100000"/>
+              </a:schemeClr>
+            </a:gs>
+            <a:gs pos="100000">
+              <a:schemeClr val="phClr">
+                <a:lumMod val="99000"/>
+                <a:satMod val="120000"/>
+                <a:shade val="78000"/>
+              </a:schemeClr>
+            </a:gs>
+          </a:gsLst>
+          <a:lin ang="5400000" scaled="0"/>
+        </a:gradFill>
+      </a:fillStyleLst>
+      <a:lnStyleLst>
+        <a:ln w="6350" cap="flat" cmpd="sng" algn="ctr">
+          <a:solidFill>
+            <a:schemeClr val="phClr"/>
+          </a:solidFill>
+          <a:prstDash val="solid"/>
+          <a:miter lim="800000"/>
+        </a:ln>
+        <a:ln w="12700" cap="flat" cmpd="sng" algn="ctr">
+          <a:solidFill>
+            <a:schemeClr val="phClr"/>
+          </a:solidFill>
+          <a:prstDash val="solid"/>
+          <a:miter lim="800000"/>
+        </a:ln>
+        <a:ln w="19050" cap="flat" cmpd="sng" algn="ctr">
+          <a:solidFill>
+            <a:schemeClr val="phClr"/>
+          </a:solidFill>
+          <a:prstDash val="solid"/>
+          <a:miter lim="800000"/>
+        </a:ln>
+      </a:lnStyleLst>
+      <a:effectStyleLst>
+        <a:effectStyle>
+          <a:effectLst/>
+        </a:effectStyle>
+        <a:effectStyle>
+          <a:effectLst/>
+        </a:effectStyle>
+        <a:effectStyle>
+          <a:effectLst>
+            <a:outerShdw blurRad="57150" dist="19050" dir="5400000" algn="ctr" rotWithShape="0">
+              <a:srgbClr val="000000">
+                <a:alpha val="63000"/>
+              </a:srgbClr>
+            </a:outerShdw>
+          </a:effectLst>
+        </a:effectStyle>
+      </a:effectStyleLst>
+      <a:bgFillStyleLst>
+        <a:solidFill>
+          <a:schemeClr val="phClr"/>
+        </a:solidFill>
+        <a:solidFill>
+          <a:schemeClr val="phClr">
+            <a:tint val="95000"/>
+            <a:satMod val="170000"/>
+          </a:schemeClr>
+        </a:solidFill>
+        <a:gradFill rotWithShape="1">
+          <a:gsLst>
+            <a:gs pos="0">
+              <a:schemeClr val="phClr">
+                <a:tint val="93000"/>
+                <a:satMod val="150000"/>
+                <a:shade val="98000"/>
+                <a:lumMod val="102000"/>
+              </a:schemeClr>
+            </a:gs>
+            <a:gs pos="50000">
+              <a:schemeClr val="phClr">
+                <a:tint val="98000"/>
+                <a:satMod val="130000"/>
+                <a:shade val="90000"/>
+                <a:lumMod val="103000"/>
+              </a:schemeClr>
+            </a:gs>
+            <a:gs pos="100000">
+              <a:schemeClr val="phClr">
+                <a:shade val="63000"/>
+                <a:satMod val="120000"/>
+              </a:schemeClr>
+            </a:gs>
+          </a:gsLst>
+          <a:lin ang="5400000" scaled="0"/>
+        </a:gradFill>
+      </a:bgFillStyleLst>
+    </a:fmtScheme>
+  </a:themeElements>
+  <a:objectDefaults/>
+  <a:extraClrSchemeLst/>
+  <a:extLst>
+    <a:ext uri="{05A4C25C-085E-4340-85A3-A5531E510DB2}">
+      <thm15:themeFamily xmlns:thm15="http://schemas.microsoft.com/office/thememl/2012/main" name="Office Theme" id="{62F939B6-93AF-4DB8-9C6B-D6C7DFDC589F}" vid="{4A3C46E8-61CC-4603-A589-7422A47A8E4A}"/>
+    </a:ext>
+  </a:extLst>
+</a:theme>
 </file>
--- a/docs/decks/L10.pptx
+++ b/docs/decks/L10.pptx
@@ -4,9 +4,6 @@
   <p:sldMasterIdLst>
     <p:sldMasterId id="2147483648" r:id="rId1"/>
   </p:sldMasterIdLst>
-  <p:notesMasterIdLst>
-    <p:notesMasterId r:id="rId29"/>
-  </p:notesMasterIdLst>
   <p:sldIdLst>
     <p:sldId id="256" r:id="rId2"/>
     <p:sldId id="257" r:id="rId3"/>
@@ -36,6 +33,9 @@
     <p:sldId id="281" r:id="rId27"/>
     <p:sldId id="282" r:id="rId28"/>
   </p:sldIdLst>
+  <p:notesMasterIdLst>
+    <p:notesMasterId r:id="rId29"/>
+  </p:notesMasterIdLst>
   <p:sldSz cx="12192000" cy="6858000"/>
   <p:notesSz cx="6858000" cy="12192000"/>
   <p:defaultTextStyle>
@@ -130,11 +130,6 @@
       </a:defRPr>
     </a:lvl9pPr>
   </p:defaultTextStyle>
-  <p:extLst>
-    <p:ext uri="{EFAFB233-063F-42B5-8137-9DF3F51BA10A}">
-      <p15:sldGuideLst xmlns:p15="http://schemas.microsoft.com/office/powerpoint/2012/main"/>
-    </p:ext>
-  </p:extLst>
 </p:presentation>
 </file>
 
@@ -160,10 +155,234 @@
           <a:chExt cx="0" cy="0"/>
         </a:xfrm>
       </p:grpSpPr>
+      <p:sp>
+        <p:nvSpPr>
+          <p:cNvPr id="2" name="Header Placeholder 1"/>
+          <p:cNvSpPr>
+            <a:spLocks noGrp="1"/>
+          </p:cNvSpPr>
+          <p:nvPr>
+            <p:ph type="hdr" sz="quarter"/>
+          </p:nvPr>
+        </p:nvSpPr>
+        <p:spPr>
+          <a:xfrm>
+            <a:off x="0" y="0"/>
+            <a:ext cx="2971800" cy="458788"/>
+          </a:xfrm>
+          <a:prstGeom prst="rect">
+            <a:avLst/>
+          </a:prstGeom>
+        </p:spPr>
+        <p:txBody>
+          <a:bodyPr vert="horz" lIns="91440" tIns="45720" rIns="91440" bIns="45720" rtlCol="0"/>
+          <a:lstStyle>
+            <a:lvl1pPr algn="l">
+              <a:defRPr sz="1200"/>
+            </a:lvl1pPr>
+          </a:lstStyle>
+          <a:p>
+            <a:endParaRPr lang="en-US"/>
+          </a:p>
+        </p:txBody>
+      </p:sp>
+      <p:sp>
+        <p:nvSpPr>
+          <p:cNvPr id="3" name="Date Placeholder 2"/>
+          <p:cNvSpPr>
+            <a:spLocks noGrp="1"/>
+          </p:cNvSpPr>
+          <p:nvPr>
+            <p:ph type="dt" idx="1"/>
+          </p:nvPr>
+        </p:nvSpPr>
+        <p:spPr>
+          <a:xfrm>
+            <a:off x="3884613" y="0"/>
+            <a:ext cx="2971800" cy="458788"/>
+          </a:xfrm>
+          <a:prstGeom prst="rect">
+            <a:avLst/>
+          </a:prstGeom>
+        </p:spPr>
+        <p:txBody>
+          <a:bodyPr vert="horz" lIns="91440" tIns="45720" rIns="91440" bIns="45720" rtlCol="0"/>
+          <a:lstStyle>
+            <a:lvl1pPr algn="r">
+              <a:defRPr sz="1200"/>
+            </a:lvl1pPr>
+          </a:lstStyle>
+          <a:p>
+            <a:fld id="{5282F153-3F37-0F45-9E97-73ACFA13230C}" type="datetimeFigureOut">
+              <a:rPr lang="en-US"/>
+              <a:t>7/23/19</a:t>
+            </a:fld>
+            <a:endParaRPr lang="en-US"/>
+          </a:p>
+        </p:txBody>
+      </p:sp>
+      <p:sp>
+        <p:nvSpPr>
+          <p:cNvPr id="4" name="Slide Image Placeholder 3"/>
+          <p:cNvSpPr>
+            <a:spLocks noGrp="1" noRot="1" noChangeAspect="1"/>
+          </p:cNvSpPr>
+          <p:nvPr>
+            <p:ph type="sldImg" idx="2"/>
+          </p:nvPr>
+        </p:nvSpPr>
+        <p:spPr>
+          <a:xfrm>
+            <a:off x="685800" y="1143000"/>
+            <a:ext cx="5486400" cy="3086100"/>
+          </a:xfrm>
+          <a:prstGeom prst="rect">
+            <a:avLst/>
+          </a:prstGeom>
+          <a:noFill/>
+          <a:ln w="12700">
+            <a:solidFill>
+              <a:prstClr val="black"/>
+            </a:solidFill>
+          </a:ln>
+        </p:spPr>
+        <p:txBody>
+          <a:bodyPr vert="horz" lIns="91440" tIns="45720" rIns="91440" bIns="45720" rtlCol="0" anchor="ctr"/>
+          <a:lstStyle/>
+          <a:p>
+            <a:endParaRPr lang="en-US"/>
+          </a:p>
+        </p:txBody>
+      </p:sp>
+      <p:sp>
+        <p:nvSpPr>
+          <p:cNvPr id="5" name="Notes Placeholder 4"/>
+          <p:cNvSpPr>
+            <a:spLocks noGrp="1"/>
+          </p:cNvSpPr>
+          <p:nvPr>
+            <p:ph type="body" sz="quarter" idx="3"/>
+          </p:nvPr>
+        </p:nvSpPr>
+        <p:spPr>
+          <a:xfrm>
+            <a:off x="685800" y="4400550"/>
+            <a:ext cx="5486400" cy="3600450"/>
+          </a:xfrm>
+          <a:prstGeom prst="rect">
+            <a:avLst/>
+          </a:prstGeom>
+        </p:spPr>
+        <p:txBody>
+          <a:bodyPr vert="horz" lIns="91440" tIns="45720" rIns="91440" bIns="45720" rtlCol="0"/>
+          <a:lstStyle/>
+          <a:p>
+            <a:pPr lvl="0"/>
+            <a:r>
+              <a:rPr lang="en-US"/>
+              <a:t>Click to edit Master text styles</a:t>
+            </a:r>
+          </a:p>
+          <a:p>
+            <a:pPr lvl="1"/>
+            <a:r>
+              <a:rPr lang="en-US"/>
+              <a:t>Second level</a:t>
+            </a:r>
+          </a:p>
+          <a:p>
+            <a:pPr lvl="2"/>
+            <a:r>
+              <a:rPr lang="en-US"/>
+              <a:t>Third level</a:t>
+            </a:r>
+          </a:p>
+          <a:p>
+            <a:pPr lvl="3"/>
+            <a:r>
+              <a:rPr lang="en-US"/>
+              <a:t>Fourth level</a:t>
+            </a:r>
+          </a:p>
+          <a:p>
+            <a:pPr lvl="4"/>
+            <a:r>
+              <a:rPr lang="en-US"/>
+              <a:t>Fifth level</a:t>
+            </a:r>
+          </a:p>
+        </p:txBody>
+      </p:sp>
+      <p:sp>
+        <p:nvSpPr>
+          <p:cNvPr id="6" name="Footer Placeholder 5"/>
+          <p:cNvSpPr>
+            <a:spLocks noGrp="1"/>
+          </p:cNvSpPr>
+          <p:nvPr>
+            <p:ph type="ftr" sz="quarter" idx="4"/>
+          </p:nvPr>
+        </p:nvSpPr>
+        <p:spPr>
+          <a:xfrm>
+            <a:off x="0" y="8685213"/>
+            <a:ext cx="2971800" cy="458787"/>
+          </a:xfrm>
+          <a:prstGeom prst="rect">
+            <a:avLst/>
+          </a:prstGeom>
+        </p:spPr>
+        <p:txBody>
+          <a:bodyPr vert="horz" lIns="91440" tIns="45720" rIns="91440" bIns="45720" rtlCol="0" anchor="b"/>
+          <a:lstStyle>
+            <a:lvl1pPr algn="l">
+              <a:defRPr sz="1200"/>
+            </a:lvl1pPr>
+          </a:lstStyle>
+          <a:p>
+            <a:endParaRPr lang="en-US"/>
+          </a:p>
+        </p:txBody>
+      </p:sp>
+      <p:sp>
+        <p:nvSpPr>
+          <p:cNvPr id="7" name="Slide Number Placeholder 6"/>
+          <p:cNvSpPr>
+            <a:spLocks noGrp="1"/>
+          </p:cNvSpPr>
+          <p:nvPr>
+            <p:ph type="sldNum" sz="quarter" idx="5"/>
+          </p:nvPr>
+        </p:nvSpPr>
+        <p:spPr>
+          <a:xfrm>
+            <a:off x="3884613" y="8685213"/>
+            <a:ext cx="2971800" cy="458787"/>
+          </a:xfrm>
+          <a:prstGeom prst="rect">
+            <a:avLst/>
+          </a:prstGeom>
+        </p:spPr>
+        <p:txBody>
+          <a:bodyPr vert="horz" lIns="91440" tIns="45720" rIns="91440" bIns="45720" rtlCol="0" anchor="b"/>
+          <a:lstStyle>
+            <a:lvl1pPr algn="r">
+              <a:defRPr sz="1200"/>
+            </a:lvl1pPr>
+          </a:lstStyle>
+          <a:p>
+            <a:fld id="{CE5E9CC1-C706-0F49-92D6-E571CC5EEA8F}" type="slidenum">
+              <a:rPr lang="en-US"/>
+              <a:t>‹#›</a:t>
+            </a:fld>
+            <a:endParaRPr lang="en-US"/>
+          </a:p>
+        </p:txBody>
+      </p:sp>
     </p:spTree>
     <p:extLst>
       <p:ext uri="{BB962C8B-B14F-4D97-AF65-F5344CB8AC3E}">
-        <p14:creationId xmlns:p14="http://schemas.microsoft.com/office/powerpoint/2010/main" val="791583179"/>
+        <p14:creationId xmlns:p14="http://schemas.microsoft.com/office/powerpoint/2010/main" val="1024086991"/>
       </p:ext>
     </p:extLst>
   </p:cSld>
@@ -307,6 +526,10 @@
           <a:bodyPr/>
           <a:lstStyle/>
           <a:p>
+            <a:r>
+              <a:rPr lang="en-US" dirty="0"/>
+              <a:t/>
+            </a:r>
             <a:endParaRPr lang="en-US" dirty="0"/>
           </a:p>
         </p:txBody>
@@ -391,6 +614,10 @@
           <a:bodyPr/>
           <a:lstStyle/>
           <a:p>
+            <a:r>
+              <a:rPr lang="en-US" dirty="0"/>
+              <a:t/>
+            </a:r>
             <a:endParaRPr lang="en-US" dirty="0"/>
           </a:p>
         </p:txBody>
@@ -475,6 +702,10 @@
           <a:bodyPr/>
           <a:lstStyle/>
           <a:p>
+            <a:r>
+              <a:rPr lang="en-US" dirty="0"/>
+              <a:t/>
+            </a:r>
             <a:endParaRPr lang="en-US" dirty="0"/>
           </a:p>
         </p:txBody>
@@ -559,6 +790,10 @@
           <a:bodyPr/>
           <a:lstStyle/>
           <a:p>
+            <a:r>
+              <a:rPr lang="en-US" dirty="0"/>
+              <a:t/>
+            </a:r>
             <a:endParaRPr lang="en-US" dirty="0"/>
           </a:p>
         </p:txBody>
@@ -643,6 +878,10 @@
           <a:bodyPr/>
           <a:lstStyle/>
           <a:p>
+            <a:r>
+              <a:rPr lang="en-US" dirty="0"/>
+              <a:t/>
+            </a:r>
             <a:endParaRPr lang="en-US" dirty="0"/>
           </a:p>
         </p:txBody>
@@ -727,6 +966,10 @@
           <a:bodyPr/>
           <a:lstStyle/>
           <a:p>
+            <a:r>
+              <a:rPr lang="en-US" dirty="0"/>
+              <a:t/>
+            </a:r>
             <a:endParaRPr lang="en-US" dirty="0"/>
           </a:p>
         </p:txBody>
@@ -811,6 +1054,10 @@
           <a:bodyPr/>
           <a:lstStyle/>
           <a:p>
+            <a:r>
+              <a:rPr lang="en-US" dirty="0"/>
+              <a:t/>
+            </a:r>
             <a:endParaRPr lang="en-US" dirty="0"/>
           </a:p>
         </p:txBody>
@@ -895,6 +1142,10 @@
           <a:bodyPr/>
           <a:lstStyle/>
           <a:p>
+            <a:r>
+              <a:rPr lang="en-US" dirty="0"/>
+              <a:t/>
+            </a:r>
             <a:endParaRPr lang="en-US" dirty="0"/>
           </a:p>
         </p:txBody>
@@ -979,6 +1230,10 @@
           <a:bodyPr/>
           <a:lstStyle/>
           <a:p>
+            <a:r>
+              <a:rPr lang="en-US" dirty="0"/>
+              <a:t/>
+            </a:r>
             <a:endParaRPr lang="en-US" dirty="0"/>
           </a:p>
         </p:txBody>
@@ -1063,6 +1318,10 @@
           <a:bodyPr/>
           <a:lstStyle/>
           <a:p>
+            <a:r>
+              <a:rPr lang="en-US" dirty="0"/>
+              <a:t/>
+            </a:r>
             <a:endParaRPr lang="en-US" dirty="0"/>
           </a:p>
         </p:txBody>
@@ -1147,6 +1406,10 @@
           <a:bodyPr/>
           <a:lstStyle/>
           <a:p>
+            <a:r>
+              <a:rPr lang="en-US" dirty="0"/>
+              <a:t/>
+            </a:r>
             <a:endParaRPr lang="en-US" dirty="0"/>
           </a:p>
         </p:txBody>
@@ -1231,6 +1494,10 @@
           <a:bodyPr/>
           <a:lstStyle/>
           <a:p>
+            <a:r>
+              <a:rPr lang="en-US" dirty="0"/>
+              <a:t/>
+            </a:r>
             <a:endParaRPr lang="en-US" dirty="0"/>
           </a:p>
         </p:txBody>
@@ -1315,6 +1582,10 @@
           <a:bodyPr/>
           <a:lstStyle/>
           <a:p>
+            <a:r>
+              <a:rPr lang="en-US" dirty="0"/>
+              <a:t/>
+            </a:r>
             <a:endParaRPr lang="en-US" dirty="0"/>
           </a:p>
         </p:txBody>
@@ -1399,6 +1670,10 @@
           <a:bodyPr/>
           <a:lstStyle/>
           <a:p>
+            <a:r>
+              <a:rPr lang="en-US" dirty="0"/>
+              <a:t/>
+            </a:r>
             <a:endParaRPr lang="en-US" dirty="0"/>
           </a:p>
         </p:txBody>
@@ -1483,6 +1758,10 @@
           <a:bodyPr/>
           <a:lstStyle/>
           <a:p>
+            <a:r>
+              <a:rPr lang="en-US" dirty="0"/>
+              <a:t/>
+            </a:r>
             <a:endParaRPr lang="en-US" dirty="0"/>
           </a:p>
         </p:txBody>
@@ -1567,6 +1846,10 @@
           <a:bodyPr/>
           <a:lstStyle/>
           <a:p>
+            <a:r>
+              <a:rPr lang="en-US" dirty="0"/>
+              <a:t/>
+            </a:r>
             <a:endParaRPr lang="en-US" dirty="0"/>
           </a:p>
         </p:txBody>
@@ -1651,6 +1934,10 @@
           <a:bodyPr/>
           <a:lstStyle/>
           <a:p>
+            <a:r>
+              <a:rPr lang="en-US" dirty="0"/>
+              <a:t/>
+            </a:r>
             <a:endParaRPr lang="en-US" dirty="0"/>
           </a:p>
         </p:txBody>
@@ -1735,6 +2022,10 @@
           <a:bodyPr/>
           <a:lstStyle/>
           <a:p>
+            <a:r>
+              <a:rPr lang="en-US" dirty="0"/>
+              <a:t/>
+            </a:r>
             <a:endParaRPr lang="en-US" dirty="0"/>
           </a:p>
         </p:txBody>
@@ -1819,6 +2110,10 @@
           <a:bodyPr/>
           <a:lstStyle/>
           <a:p>
+            <a:r>
+              <a:rPr lang="en-US" dirty="0"/>
+              <a:t/>
+            </a:r>
             <a:endParaRPr lang="en-US" dirty="0"/>
           </a:p>
         </p:txBody>
@@ -1903,6 +2198,10 @@
           <a:bodyPr/>
           <a:lstStyle/>
           <a:p>
+            <a:r>
+              <a:rPr lang="en-US" dirty="0"/>
+              <a:t/>
+            </a:r>
             <a:endParaRPr lang="en-US" dirty="0"/>
           </a:p>
         </p:txBody>
@@ -1987,6 +2286,10 @@
           <a:bodyPr/>
           <a:lstStyle/>
           <a:p>
+            <a:r>
+              <a:rPr lang="en-US" dirty="0"/>
+              <a:t/>
+            </a:r>
             <a:endParaRPr lang="en-US" dirty="0"/>
           </a:p>
         </p:txBody>
@@ -2071,6 +2374,10 @@
           <a:bodyPr/>
           <a:lstStyle/>
           <a:p>
+            <a:r>
+              <a:rPr lang="en-US" dirty="0"/>
+              <a:t/>
+            </a:r>
             <a:endParaRPr lang="en-US" dirty="0"/>
           </a:p>
         </p:txBody>
@@ -2155,6 +2462,10 @@
           <a:bodyPr/>
           <a:lstStyle/>
           <a:p>
+            <a:r>
+              <a:rPr lang="en-US" dirty="0"/>
+              <a:t/>
+            </a:r>
             <a:endParaRPr lang="en-US" dirty="0"/>
           </a:p>
         </p:txBody>
@@ -2239,6 +2550,10 @@
           <a:bodyPr/>
           <a:lstStyle/>
           <a:p>
+            <a:r>
+              <a:rPr lang="en-US" dirty="0"/>
+              <a:t/>
+            </a:r>
             <a:endParaRPr lang="en-US" dirty="0"/>
           </a:p>
         </p:txBody>
@@ -2323,6 +2638,10 @@
           <a:bodyPr/>
           <a:lstStyle/>
           <a:p>
+            <a:r>
+              <a:rPr lang="en-US" dirty="0"/>
+              <a:t/>
+            </a:r>
             <a:endParaRPr lang="en-US" dirty="0"/>
           </a:p>
         </p:txBody>
@@ -2407,6 +2726,10 @@
           <a:bodyPr/>
           <a:lstStyle/>
           <a:p>
+            <a:r>
+              <a:rPr lang="en-US" dirty="0"/>
+              <a:t/>
+            </a:r>
             <a:endParaRPr lang="en-US" dirty="0"/>
           </a:p>
         </p:txBody>
@@ -2491,6 +2814,10 @@
           <a:bodyPr/>
           <a:lstStyle/>
           <a:p>
+            <a:r>
+              <a:rPr lang="en-US" dirty="0"/>
+              <a:t/>
+            </a:r>
             <a:endParaRPr lang="en-US" dirty="0"/>
           </a:p>
         </p:txBody>
@@ -2573,7 +2900,7 @@
           </a:prstGeom>
           <a:extLst>
             <a:ext uri="{C572A759-6A51-4108-AA02-DFA0A04FC94B}">
-              <ma14:wrappingTextBoxFlag xmlns:ma14="http://schemas.microsoft.com/office/mac/drawingml/2011/main" xmlns="" val="0"/>
+              <ma14:wrappingTextBoxFlag xmlns:ma14="http://schemas.microsoft.com/office/mac/drawingml/2011/main" val="0"/>
             </a:ext>
           </a:extLst>
         </p:spPr>
@@ -2594,8 +2921,8 @@
           <a:p>
             <a:pPr algn="l"/>
             <a:fld id="{F7021451-1387-4CA6-816F-3879F97B5CBC}" type="slidenum">
-              <a:rPr lang="en-US" b="0"/>
-              <a:t>‹#›</a:t>
+              <a:rPr b="0" lang="en-US"/>
+              <a:t>1000</a:t>
             </a:fld>
             <a:endParaRPr lang="en-US"/>
           </a:p>
@@ -2617,7 +2944,6 @@
         <a:solidFill>
           <a:srgbClr val="000000"/>
         </a:solidFill>
-        <a:effectLst/>
       </p:bgPr>
     </p:bg>
     <p:spTree>
@@ -2636,14 +2962,14 @@
       </p:grpSpPr>
       <p:pic>
         <p:nvPicPr>
-          <p:cNvPr id="2" name="Image 0" descr="preencoded.png"/>
+          <p:cNvPr id="2" name="Image 0" descr="preencoded.png">    </p:cNvPr>
           <p:cNvPicPr>
             <a:picLocks noChangeAspect="1"/>
           </p:cNvPicPr>
           <p:nvPr/>
         </p:nvPicPr>
         <p:blipFill>
-          <a:blip r:embed="rId2"/>
+          <a:blip r:embed="rId1"/>
           <a:stretch>
             <a:fillRect/>
           </a:stretch>
@@ -2674,7 +3000,6 @@
         <a:solidFill>
           <a:srgbClr val="000000"/>
         </a:solidFill>
-        <a:effectLst/>
       </p:bgPr>
     </p:bg>
     <p:spTree>
@@ -2693,14 +3018,14 @@
       </p:grpSpPr>
       <p:pic>
         <p:nvPicPr>
-          <p:cNvPr id="2" name="Image 0" descr="preencoded.png"/>
+          <p:cNvPr id="2" name="Image 0" descr="preencoded.png">    </p:cNvPr>
           <p:cNvPicPr>
             <a:picLocks noChangeAspect="1"/>
           </p:cNvPicPr>
           <p:nvPr/>
         </p:nvPicPr>
         <p:blipFill>
-          <a:blip r:embed="rId2"/>
+          <a:blip r:embed="rId1"/>
           <a:stretch>
             <a:fillRect/>
           </a:stretch>
@@ -2731,7 +3056,6 @@
         <a:solidFill>
           <a:srgbClr val="000000"/>
         </a:solidFill>
-        <a:effectLst/>
       </p:bgPr>
     </p:bg>
     <p:spTree>
@@ -2750,14 +3074,14 @@
       </p:grpSpPr>
       <p:pic>
         <p:nvPicPr>
-          <p:cNvPr id="2" name="Image 0" descr="preencoded.png"/>
+          <p:cNvPr id="2" name="Image 0" descr="preencoded.png">    </p:cNvPr>
           <p:cNvPicPr>
             <a:picLocks noChangeAspect="1"/>
           </p:cNvPicPr>
           <p:nvPr/>
         </p:nvPicPr>
         <p:blipFill>
-          <a:blip r:embed="rId2"/>
+          <a:blip r:embed="rId1"/>
           <a:stretch>
             <a:fillRect/>
           </a:stretch>
@@ -2783,11 +3107,6 @@
 <file path=ppt/slideMasters/slideMaster1.xml><?xml version="1.0" encoding="utf-8"?>
 <p:sldMaster xmlns:a="http://schemas.openxmlformats.org/drawingml/2006/main" xmlns:r="http://schemas.openxmlformats.org/officeDocument/2006/relationships" xmlns:p="http://schemas.openxmlformats.org/presentationml/2006/main">
   <p:cSld>
-    <p:bg>
-      <p:bgRef idx="1001">
-        <a:schemeClr val="bg1"/>
-      </p:bgRef>
-    </p:bg>
     <p:spTree>
       <p:nvGrpSpPr>
         <p:cNvPr id="1" name=""/>
@@ -2822,7 +3141,7 @@
           </a:prstGeom>
           <a:extLst>
             <a:ext uri="{C572A759-6A51-4108-AA02-DFA0A04FC94B}">
-              <ma14:wrappingTextBoxFlag xmlns:ma14="http://schemas.microsoft.com/office/mac/drawingml/2011/main" xmlns="" val="0"/>
+              <ma14:wrappingTextBoxFlag xmlns:ma14="http://schemas.microsoft.com/office/mac/drawingml/2011/main" val="0"/>
             </a:ext>
           </a:extLst>
         </p:spPr>
@@ -2843,8 +3162,8 @@
           <a:p>
             <a:pPr algn="l"/>
             <a:fld id="{F7021451-1387-4CA6-816F-3879F97B5CBC}" type="slidenum">
-              <a:rPr lang="en-US" b="0"/>
-              <a:t>‹#›</a:t>
+              <a:rPr b="0" lang="en-US"/>
+              <a:t>null</a:t>
             </a:fld>
             <a:endParaRPr lang="en-US"/>
           </a:p>
@@ -3151,11 +3470,11 @@
           <a:bodyPr wrap="square" lIns="0" tIns="0" rIns="0" bIns="0" rtlCol="0" anchor="ctr"/>
           <a:lstStyle/>
           <a:p>
-            <a:pPr marL="0" indent="0">
-              <a:buNone/>
-            </a:pPr>
-            <a:r>
-              <a:rPr lang="en-US" sz="1200" b="1" kern="0" spc="400" dirty="0">
+            <a:pPr indent="0" marL="0">
+              <a:buNone/>
+            </a:pPr>
+            <a:r>
+              <a:rPr lang="en-US" sz="1200" b="1" spc="400" kern="0" dirty="0">
                 <a:solidFill>
                   <a:srgbClr val="FFFFFF"/>
                 </a:solidFill>
@@ -3190,11 +3509,11 @@
           <a:bodyPr wrap="square" lIns="0" tIns="0" rIns="0" bIns="0" rtlCol="0" anchor="ctr"/>
           <a:lstStyle/>
           <a:p>
-            <a:pPr marL="0" indent="0">
-              <a:buNone/>
-            </a:pPr>
-            <a:r>
-              <a:rPr lang="en-US" sz="1200" b="1" kern="0" spc="300" dirty="0">
+            <a:pPr indent="0" marL="0">
+              <a:buNone/>
+            </a:pPr>
+            <a:r>
+              <a:rPr lang="en-US" sz="1200" b="1" spc="300" kern="0" dirty="0">
                 <a:solidFill>
                   <a:srgbClr val="C4B3F5"/>
                 </a:solidFill>
@@ -3229,7 +3548,7 @@
           <a:bodyPr wrap="square" lIns="0" tIns="0" rIns="0" bIns="0" rtlCol="0" anchor="t"/>
           <a:lstStyle/>
           <a:p>
-            <a:pPr marL="0" indent="0">
+            <a:pPr indent="0" marL="0">
               <a:lnSpc>
                 <a:spcPct val="102000"/>
               </a:lnSpc>
@@ -3249,7 +3568,7 @@
             <a:endParaRPr lang="en-US" sz="3600" dirty="0"/>
           </a:p>
           <a:p>
-            <a:pPr marL="0" indent="0">
+            <a:pPr indent="0" marL="0">
               <a:lnSpc>
                 <a:spcPct val="102000"/>
               </a:lnSpc>
@@ -3291,7 +3610,7 @@
           <a:bodyPr wrap="square" lIns="0" tIns="0" rIns="0" bIns="0" rtlCol="0" anchor="ctr"/>
           <a:lstStyle/>
           <a:p>
-            <a:pPr marL="0" indent="0">
+            <a:pPr indent="0" marL="0">
               <a:lnSpc>
                 <a:spcPct val="120000"/>
               </a:lnSpc>
@@ -3359,7 +3678,7 @@
           <a:bodyPr wrap="square" lIns="0" tIns="0" rIns="0" bIns="0" rtlCol="0" anchor="ctr"/>
           <a:lstStyle/>
           <a:p>
-            <a:pPr marL="0" indent="0" algn="ctr">
+            <a:pPr algn="ctr" indent="0" marL="0">
               <a:buNone/>
             </a:pPr>
             <a:r>
@@ -3424,7 +3743,7 @@
           <a:bodyPr wrap="square" lIns="0" tIns="0" rIns="0" bIns="0" rtlCol="0" anchor="ctr"/>
           <a:lstStyle/>
           <a:p>
-            <a:pPr marL="0" indent="0" algn="ctr">
+            <a:pPr algn="ctr" indent="0" marL="0">
               <a:buNone/>
             </a:pPr>
             <a:r>
@@ -3489,7 +3808,7 @@
           <a:bodyPr wrap="square" lIns="0" tIns="0" rIns="0" bIns="0" rtlCol="0" anchor="ctr"/>
           <a:lstStyle/>
           <a:p>
-            <a:pPr marL="0" indent="0" algn="ctr">
+            <a:pPr algn="ctr" indent="0" marL="0">
               <a:buNone/>
             </a:pPr>
             <a:r>
@@ -3554,7 +3873,7 @@
           <a:bodyPr wrap="square" lIns="0" tIns="0" rIns="0" bIns="0" rtlCol="0" anchor="ctr"/>
           <a:lstStyle/>
           <a:p>
-            <a:pPr marL="0" indent="0" algn="ctr">
+            <a:pPr algn="ctr" indent="0" marL="0">
               <a:buNone/>
             </a:pPr>
             <a:r>
@@ -3615,7 +3934,7 @@
           <a:bodyPr wrap="square" lIns="0" tIns="0" rIns="0" bIns="0" rtlCol="0" anchor="ctr"/>
           <a:lstStyle/>
           <a:p>
-            <a:pPr marL="0" indent="0" algn="ctr">
+            <a:pPr algn="ctr" indent="0" marL="0">
               <a:buNone/>
             </a:pPr>
             <a:r>
@@ -3680,7 +3999,7 @@
           <a:bodyPr wrap="square" lIns="0" tIns="0" rIns="0" bIns="0" rtlCol="0" anchor="ctr"/>
           <a:lstStyle/>
           <a:p>
-            <a:pPr marL="0" indent="0" algn="ctr">
+            <a:pPr algn="ctr" indent="0" marL="0">
               <a:buNone/>
             </a:pPr>
             <a:r>
@@ -3766,7 +4085,7 @@
           <a:bodyPr wrap="square" lIns="0" tIns="0" rIns="0" bIns="0" rtlCol="0" anchor="ctr"/>
           <a:lstStyle/>
           <a:p>
-            <a:pPr marL="0" indent="0" algn="l">
+            <a:pPr algn="l" indent="0" marL="0">
               <a:buNone/>
             </a:pPr>
             <a:r>
@@ -3805,7 +4124,7 @@
           <a:bodyPr wrap="square" lIns="0" tIns="0" rIns="0" bIns="0" rtlCol="0" anchor="ctr"/>
           <a:lstStyle/>
           <a:p>
-            <a:pPr marL="0" indent="0">
+            <a:pPr indent="0" marL="0">
               <a:buNone/>
             </a:pPr>
             <a:r>
@@ -3871,11 +4190,11 @@
           <a:bodyPr wrap="square" lIns="0" tIns="0" rIns="0" bIns="0" rtlCol="0" anchor="ctr"/>
           <a:lstStyle/>
           <a:p>
-            <a:pPr marL="0" indent="0" algn="ctr">
-              <a:buNone/>
-            </a:pPr>
-            <a:r>
-              <a:rPr lang="en-US" sz="900" b="1" kern="0" spc="100" dirty="0">
+            <a:pPr algn="ctr" indent="0" marL="0">
+              <a:buNone/>
+            </a:pPr>
+            <a:r>
+              <a:rPr lang="en-US" sz="900" b="1" spc="100" kern="0" dirty="0">
                 <a:solidFill>
                   <a:srgbClr val="5A05F4"/>
                 </a:solidFill>
@@ -3891,14 +4210,14 @@
       </p:sp>
       <p:pic>
         <p:nvPicPr>
-          <p:cNvPr id="7" name="Image 0" descr="preencoded.png"/>
+          <p:cNvPr id="7" name="Image 0" descr="preencoded.png">    </p:cNvPr>
           <p:cNvPicPr>
             <a:picLocks noChangeAspect="1"/>
           </p:cNvPicPr>
           <p:nvPr/>
         </p:nvPicPr>
         <p:blipFill>
-          <a:blip r:embed="rId3"/>
+          <a:blip r:embed="rId1"/>
           <a:stretch>
             <a:fillRect/>
           </a:stretch>
@@ -3961,11 +4280,11 @@
           <a:bodyPr wrap="square" lIns="0" tIns="0" rIns="0" bIns="0" rtlCol="0" anchor="ctr"/>
           <a:lstStyle/>
           <a:p>
-            <a:pPr marL="0" indent="0">
-              <a:buNone/>
-            </a:pPr>
-            <a:r>
-              <a:rPr lang="en-US" sz="950" b="1" kern="0" spc="150" dirty="0">
+            <a:pPr indent="0" marL="0">
+              <a:buNone/>
+            </a:pPr>
+            <a:r>
+              <a:rPr lang="en-US" sz="950" b="1" spc="150" kern="0" dirty="0">
                 <a:solidFill>
                   <a:srgbClr val="B3261E"/>
                 </a:solidFill>
@@ -4000,7 +4319,7 @@
           <a:bodyPr wrap="square" lIns="0" tIns="0" rIns="0" bIns="0" rtlCol="0" anchor="ctr"/>
           <a:lstStyle/>
           <a:p>
-            <a:pPr marL="0" indent="0">
+            <a:pPr indent="0" marL="0">
               <a:lnSpc>
                 <a:spcPct val="112000"/>
               </a:lnSpc>
@@ -4064,7 +4383,7 @@
           <a:bodyPr wrap="square" lIns="0" tIns="0" rIns="0" bIns="0" rtlCol="0" anchor="ctr"/>
           <a:lstStyle/>
           <a:p>
-            <a:pPr marL="0" indent="0">
+            <a:pPr indent="0" marL="0">
               <a:buNone/>
             </a:pPr>
             <a:r>
@@ -4103,7 +4422,7 @@
           <a:bodyPr wrap="square" lIns="0" tIns="0" rIns="0" bIns="0" rtlCol="0" anchor="t"/>
           <a:lstStyle/>
           <a:p>
-            <a:pPr marL="0" indent="0">
+            <a:pPr indent="0" marL="0">
               <a:buNone/>
             </a:pPr>
             <a:r>
@@ -4164,7 +4483,7 @@
           <a:bodyPr wrap="square" lIns="0" tIns="0" rIns="0" bIns="0" rtlCol="0" anchor="ctr"/>
           <a:lstStyle/>
           <a:p>
-            <a:pPr marL="0" indent="0">
+            <a:pPr indent="0" marL="0">
               <a:buNone/>
             </a:pPr>
             <a:r>
@@ -4203,7 +4522,7 @@
           <a:bodyPr wrap="square" lIns="0" tIns="0" rIns="0" bIns="0" rtlCol="0" anchor="t"/>
           <a:lstStyle/>
           <a:p>
-            <a:pPr marL="0" indent="0">
+            <a:pPr indent="0" marL="0">
               <a:buNone/>
             </a:pPr>
             <a:r>
@@ -4264,7 +4583,7 @@
           <a:bodyPr wrap="square" lIns="0" tIns="0" rIns="0" bIns="0" rtlCol="0" anchor="ctr"/>
           <a:lstStyle/>
           <a:p>
-            <a:pPr marL="0" indent="0">
+            <a:pPr indent="0" marL="0">
               <a:buNone/>
             </a:pPr>
             <a:r>
@@ -4303,7 +4622,7 @@
           <a:bodyPr wrap="square" lIns="0" tIns="0" rIns="0" bIns="0" rtlCol="0" anchor="t"/>
           <a:lstStyle/>
           <a:p>
-            <a:pPr marL="0" indent="0">
+            <a:pPr indent="0" marL="0">
               <a:lnSpc>
                 <a:spcPct val="108000"/>
               </a:lnSpc>
@@ -4367,7 +4686,7 @@
           <a:bodyPr wrap="square" lIns="0" tIns="0" rIns="0" bIns="0" rtlCol="0" anchor="ctr"/>
           <a:lstStyle/>
           <a:p>
-            <a:pPr marL="0" indent="0">
+            <a:pPr indent="0" marL="0">
               <a:buNone/>
             </a:pPr>
             <a:r>
@@ -4406,7 +4725,7 @@
           <a:bodyPr wrap="square" lIns="0" tIns="0" rIns="0" bIns="0" rtlCol="0" anchor="t"/>
           <a:lstStyle/>
           <a:p>
-            <a:pPr marL="0" indent="0">
+            <a:pPr indent="0" marL="0">
               <a:lnSpc>
                 <a:spcPct val="108000"/>
               </a:lnSpc>
@@ -4447,7 +4766,7 @@
           </a:prstGeom>
           <a:extLst>
             <a:ext uri="{C572A759-6A51-4108-AA02-DFA0A04FC94B}">
-              <ma14:wrappingTextBoxFlag xmlns:ma14="http://schemas.microsoft.com/office/mac/drawingml/2011/main" xmlns="" val="0"/>
+              <ma14:wrappingTextBoxFlag xmlns:ma14="http://schemas.microsoft.com/office/mac/drawingml/2011/main" val="0"/>
             </a:ext>
           </a:extLst>
         </p:spPr>
@@ -4468,7 +4787,7 @@
           <a:p>
             <a:pPr algn="l"/>
             <a:fld id="{F7021451-1387-4CA6-816F-3879F97B5CBC}" type="slidenum">
-              <a:rPr lang="en-US" b="0"/>
+              <a:rPr b="0" lang="en-US"/>
               <a:t>10</a:t>
             </a:fld>
             <a:endParaRPr lang="en-US"/>
@@ -4543,7 +4862,7 @@
           <a:bodyPr wrap="square" lIns="0" tIns="0" rIns="0" bIns="0" rtlCol="0" anchor="ctr"/>
           <a:lstStyle/>
           <a:p>
-            <a:pPr marL="0" indent="0" algn="l">
+            <a:pPr algn="l" indent="0" marL="0">
               <a:buNone/>
             </a:pPr>
             <a:r>
@@ -4582,7 +4901,7 @@
           <a:bodyPr wrap="square" lIns="0" tIns="0" rIns="0" bIns="0" rtlCol="0" anchor="ctr"/>
           <a:lstStyle/>
           <a:p>
-            <a:pPr marL="0" indent="0">
+            <a:pPr indent="0" marL="0">
               <a:buNone/>
             </a:pPr>
             <a:r>
@@ -4648,11 +4967,11 @@
           <a:bodyPr wrap="square" lIns="0" tIns="0" rIns="0" bIns="0" rtlCol="0" anchor="ctr"/>
           <a:lstStyle/>
           <a:p>
-            <a:pPr marL="0" indent="0" algn="ctr">
-              <a:buNone/>
-            </a:pPr>
-            <a:r>
-              <a:rPr lang="en-US" sz="900" b="1" kern="0" spc="100" dirty="0">
+            <a:pPr algn="ctr" indent="0" marL="0">
+              <a:buNone/>
+            </a:pPr>
+            <a:r>
+              <a:rPr lang="en-US" sz="900" b="1" spc="100" kern="0" dirty="0">
                 <a:solidFill>
                   <a:srgbClr val="5A05F4"/>
                 </a:solidFill>
@@ -4668,14 +4987,14 @@
       </p:sp>
       <p:pic>
         <p:nvPicPr>
-          <p:cNvPr id="7" name="Image 0" descr="preencoded.png"/>
+          <p:cNvPr id="7" name="Image 0" descr="preencoded.png">    </p:cNvPr>
           <p:cNvPicPr>
             <a:picLocks noChangeAspect="1"/>
           </p:cNvPicPr>
           <p:nvPr/>
         </p:nvPicPr>
         <p:blipFill>
-          <a:blip r:embed="rId3"/>
+          <a:blip r:embed="rId1"/>
           <a:stretch>
             <a:fillRect/>
           </a:stretch>
@@ -4706,34 +5025,16 @@
         </p:nvGraphicFramePr>
         <p:xfrm>
           <a:off x="566928" y="1737360"/>
-          <a:ext cx="11064240" cy="2633472"/>
+          <a:ext cx="11064240" cy="914400"/>
         </p:xfrm>
         <a:graphic>
           <a:graphicData uri="http://schemas.openxmlformats.org/drawingml/2006/table">
             <a:tbl>
               <a:tblPr/>
               <a:tblGrid>
-                <a:gridCol w="3840480">
-                  <a:extLst>
-                    <a:ext uri="{9D8B030D-6E8A-4147-A177-3AD203B41FA5}">
-                      <a16:colId xmlns:a16="http://schemas.microsoft.com/office/drawing/2014/main" val="20000"/>
-                    </a:ext>
-                  </a:extLst>
-                </a:gridCol>
-                <a:gridCol w="3657600">
-                  <a:extLst>
-                    <a:ext uri="{9D8B030D-6E8A-4147-A177-3AD203B41FA5}">
-                      <a16:colId xmlns:a16="http://schemas.microsoft.com/office/drawing/2014/main" val="20001"/>
-                    </a:ext>
-                  </a:extLst>
-                </a:gridCol>
-                <a:gridCol w="3566160">
-                  <a:extLst>
-                    <a:ext uri="{9D8B030D-6E8A-4147-A177-3AD203B41FA5}">
-                      <a16:colId xmlns:a16="http://schemas.microsoft.com/office/drawing/2014/main" val="20002"/>
-                    </a:ext>
-                  </a:extLst>
-                </a:gridCol>
+                <a:gridCol w="3840480"/>
+                <a:gridCol w="3657600"/>
+                <a:gridCol w="3566160"/>
               </a:tblGrid>
               <a:tr h="658368">
                 <a:tc>
@@ -4741,11 +5042,11 @@
                     <a:bodyPr/>
                     <a:lstStyle/>
                     <a:p>
-                      <a:pPr marL="0" indent="0" algn="ctr">
+                      <a:pPr algn="ctr" indent="0" marL="0">
                         <a:buNone/>
                       </a:pPr>
                       <a:r>
-                        <a:rPr lang="en-US" sz="900" b="1" kern="0" spc="100" dirty="0">
+                        <a:rPr lang="en-US" sz="900" b="1" spc="100" kern="0" dirty="0">
                           <a:solidFill>
                             <a:srgbClr val="FFFFFF"/>
                           </a:solidFill>
@@ -4809,11 +5110,11 @@
                     <a:bodyPr/>
                     <a:lstStyle/>
                     <a:p>
-                      <a:pPr marL="0" indent="0" algn="ctr">
+                      <a:pPr algn="ctr" indent="0" marL="0">
                         <a:buNone/>
                       </a:pPr>
                       <a:r>
-                        <a:rPr lang="en-US" sz="900" b="1" kern="0" spc="100" dirty="0">
+                        <a:rPr lang="en-US" sz="900" b="1" spc="100" kern="0" dirty="0">
                           <a:solidFill>
                             <a:srgbClr val="FFFFFF"/>
                           </a:solidFill>
@@ -4877,11 +5178,11 @@
                     <a:bodyPr/>
                     <a:lstStyle/>
                     <a:p>
-                      <a:pPr marL="0" indent="0" algn="ctr">
+                      <a:pPr algn="ctr" indent="0" marL="0">
                         <a:buNone/>
                       </a:pPr>
                       <a:r>
-                        <a:rPr lang="en-US" sz="900" b="1" kern="0" spc="100" dirty="0">
+                        <a:rPr lang="en-US" sz="900" b="1" spc="100" kern="0" dirty="0">
                           <a:solidFill>
                             <a:srgbClr val="FFFFFF"/>
                           </a:solidFill>
@@ -4940,11 +5241,6 @@
                     </a:solidFill>
                   </a:tcPr>
                 </a:tc>
-                <a:extLst>
-                  <a:ext uri="{0D108BD9-81ED-4DB2-BD59-A6C34878D82A}">
-                    <a16:rowId xmlns:a16="http://schemas.microsoft.com/office/drawing/2014/main" val="10000"/>
-                  </a:ext>
-                </a:extLst>
               </a:tr>
               <a:tr h="658368">
                 <a:tc>
@@ -4952,7 +5248,7 @@
                     <a:bodyPr/>
                     <a:lstStyle/>
                     <a:p>
-                      <a:pPr marL="0" indent="0">
+                      <a:pPr indent="0" marL="0">
                         <a:buNone/>
                       </a:pPr>
                       <a:r>
@@ -5020,7 +5316,7 @@
                     <a:bodyPr/>
                     <a:lstStyle/>
                     <a:p>
-                      <a:pPr marL="0" indent="0">
+                      <a:pPr indent="0" marL="0">
                         <a:buNone/>
                       </a:pPr>
                       <a:r>
@@ -5088,7 +5384,7 @@
                     <a:bodyPr/>
                     <a:lstStyle/>
                     <a:p>
-                      <a:pPr marL="0" indent="0">
+                      <a:pPr indent="0" marL="0">
                         <a:buNone/>
                       </a:pPr>
                       <a:r>
@@ -5151,11 +5447,6 @@
                     </a:solidFill>
                   </a:tcPr>
                 </a:tc>
-                <a:extLst>
-                  <a:ext uri="{0D108BD9-81ED-4DB2-BD59-A6C34878D82A}">
-                    <a16:rowId xmlns:a16="http://schemas.microsoft.com/office/drawing/2014/main" val="10001"/>
-                  </a:ext>
-                </a:extLst>
               </a:tr>
               <a:tr h="658368">
                 <a:tc>
@@ -5163,7 +5454,7 @@
                     <a:bodyPr/>
                     <a:lstStyle/>
                     <a:p>
-                      <a:pPr marL="0" indent="0">
+                      <a:pPr indent="0" marL="0">
                         <a:buNone/>
                       </a:pPr>
                       <a:r>
@@ -5231,7 +5522,7 @@
                     <a:bodyPr/>
                     <a:lstStyle/>
                     <a:p>
-                      <a:pPr marL="0" indent="0">
+                      <a:pPr indent="0" marL="0">
                         <a:buNone/>
                       </a:pPr>
                       <a:r>
@@ -5299,7 +5590,7 @@
                     <a:bodyPr/>
                     <a:lstStyle/>
                     <a:p>
-                      <a:pPr marL="0" indent="0">
+                      <a:pPr indent="0" marL="0">
                         <a:buNone/>
                       </a:pPr>
                       <a:r>
@@ -5362,11 +5653,6 @@
                     </a:solidFill>
                   </a:tcPr>
                 </a:tc>
-                <a:extLst>
-                  <a:ext uri="{0D108BD9-81ED-4DB2-BD59-A6C34878D82A}">
-                    <a16:rowId xmlns:a16="http://schemas.microsoft.com/office/drawing/2014/main" val="10002"/>
-                  </a:ext>
-                </a:extLst>
               </a:tr>
               <a:tr h="658368">
                 <a:tc>
@@ -5374,7 +5660,7 @@
                     <a:bodyPr/>
                     <a:lstStyle/>
                     <a:p>
-                      <a:pPr marL="0" indent="0">
+                      <a:pPr indent="0" marL="0">
                         <a:buNone/>
                       </a:pPr>
                       <a:r>
@@ -5442,7 +5728,7 @@
                     <a:bodyPr/>
                     <a:lstStyle/>
                     <a:p>
-                      <a:pPr marL="0" indent="0">
+                      <a:pPr indent="0" marL="0">
                         <a:buNone/>
                       </a:pPr>
                       <a:r>
@@ -5510,7 +5796,7 @@
                     <a:bodyPr/>
                     <a:lstStyle/>
                     <a:p>
-                      <a:pPr marL="0" indent="0">
+                      <a:pPr indent="0" marL="0">
                         <a:buNone/>
                       </a:pPr>
                       <a:r>
@@ -5573,11 +5859,6 @@
                     </a:solidFill>
                   </a:tcPr>
                 </a:tc>
-                <a:extLst>
-                  <a:ext uri="{0D108BD9-81ED-4DB2-BD59-A6C34878D82A}">
-                    <a16:rowId xmlns:a16="http://schemas.microsoft.com/office/drawing/2014/main" val="10003"/>
-                  </a:ext>
-                </a:extLst>
               </a:tr>
             </a:tbl>
           </a:graphicData>
@@ -5612,14 +5893,34 @@
       </p:sp>
       <p:sp>
         <p:nvSpPr>
-          <p:cNvPr id="10" name="Text 6"/>
-          <p:cNvSpPr/>
-          <p:nvPr/>
-        </p:nvSpPr>
-        <p:spPr>
-          <a:xfrm>
-            <a:off x="786384" y="4681728"/>
-            <a:ext cx="10625328" cy="219456"/>
+          <p:cNvPr id="10" name="Shape 6"/>
+          <p:cNvSpPr/>
+          <p:nvPr/>
+        </p:nvSpPr>
+        <p:spPr>
+          <a:xfrm>
+            <a:off x="749808" y="5015484"/>
+            <a:ext cx="310896" cy="310896"/>
+          </a:xfrm>
+          <a:prstGeom prst="ellipse">
+            <a:avLst/>
+          </a:prstGeom>
+          <a:solidFill>
+            <a:srgbClr val="106B41"/>
+          </a:solidFill>
+          <a:ln/>
+        </p:spPr>
+      </p:sp>
+      <p:sp>
+        <p:nvSpPr>
+          <p:cNvPr id="11" name="Text 7"/>
+          <p:cNvSpPr/>
+          <p:nvPr/>
+        </p:nvSpPr>
+        <p:spPr>
+          <a:xfrm>
+            <a:off x="749808" y="5015484"/>
+            <a:ext cx="310896" cy="310896"/>
           </a:xfrm>
           <a:prstGeom prst="rect">
             <a:avLst/>
@@ -5631,11 +5932,50 @@
           <a:bodyPr wrap="square" lIns="0" tIns="0" rIns="0" bIns="0" rtlCol="0" anchor="ctr"/>
           <a:lstStyle/>
           <a:p>
-            <a:pPr marL="0" indent="0">
-              <a:buNone/>
-            </a:pPr>
-            <a:r>
-              <a:rPr lang="en-US" sz="950" b="1" kern="0" spc="150" dirty="0">
+            <a:pPr algn="ctr" indent="0" marL="0">
+              <a:buNone/>
+            </a:pPr>
+            <a:r>
+              <a:rPr lang="en-US" sz="1200" b="1" dirty="0">
+                <a:solidFill>
+                  <a:srgbClr val="FFFFFF"/>
+                </a:solidFill>
+                <a:latin typeface="Arial" pitchFamily="34" charset="0"/>
+                <a:ea typeface="Arial" pitchFamily="34" charset="-122"/>
+                <a:cs typeface="Arial" pitchFamily="34" charset="-120"/>
+              </a:rPr>
+              <a:t>◆</a:t>
+            </a:r>
+            <a:endParaRPr lang="en-US" sz="1200" dirty="0"/>
+          </a:p>
+        </p:txBody>
+      </p:sp>
+      <p:sp>
+        <p:nvSpPr>
+          <p:cNvPr id="12" name="Text 8"/>
+          <p:cNvSpPr/>
+          <p:nvPr/>
+        </p:nvSpPr>
+        <p:spPr>
+          <a:xfrm>
+            <a:off x="1243584" y="4681728"/>
+            <a:ext cx="10168128" cy="219456"/>
+          </a:xfrm>
+          <a:prstGeom prst="rect">
+            <a:avLst/>
+          </a:prstGeom>
+          <a:noFill/>
+          <a:ln/>
+        </p:spPr>
+        <p:txBody>
+          <a:bodyPr wrap="square" lIns="0" tIns="0" rIns="0" bIns="0" rtlCol="0" anchor="ctr"/>
+          <a:lstStyle/>
+          <a:p>
+            <a:pPr indent="0" marL="0">
+              <a:buNone/>
+            </a:pPr>
+            <a:r>
+              <a:rPr lang="en-US" sz="950" b="1" spc="150" kern="0" dirty="0">
                 <a:solidFill>
                   <a:srgbClr val="106B41"/>
                 </a:solidFill>
@@ -5651,14 +5991,14 @@
       </p:sp>
       <p:sp>
         <p:nvSpPr>
-          <p:cNvPr id="11" name="Text 7"/>
-          <p:cNvSpPr/>
-          <p:nvPr/>
-        </p:nvSpPr>
-        <p:spPr>
-          <a:xfrm>
-            <a:off x="786384" y="4937760"/>
-            <a:ext cx="10625328" cy="722376"/>
+          <p:cNvPr id="13" name="Text 9"/>
+          <p:cNvSpPr/>
+          <p:nvPr/>
+        </p:nvSpPr>
+        <p:spPr>
+          <a:xfrm>
+            <a:off x="1243584" y="4937760"/>
+            <a:ext cx="10168128" cy="722376"/>
           </a:xfrm>
           <a:prstGeom prst="rect">
             <a:avLst/>
@@ -5670,7 +6010,7 @@
           <a:bodyPr wrap="square" lIns="0" tIns="0" rIns="0" bIns="0" rtlCol="0" anchor="ctr"/>
           <a:lstStyle/>
           <a:p>
-            <a:pPr marL="0" indent="0">
+            <a:pPr indent="0" marL="0">
               <a:lnSpc>
                 <a:spcPct val="112000"/>
               </a:lnSpc>
@@ -5711,7 +6051,7 @@
           </a:prstGeom>
           <a:extLst>
             <a:ext uri="{C572A759-6A51-4108-AA02-DFA0A04FC94B}">
-              <ma14:wrappingTextBoxFlag xmlns:ma14="http://schemas.microsoft.com/office/mac/drawingml/2011/main" xmlns="" val="0"/>
+              <ma14:wrappingTextBoxFlag xmlns:ma14="http://schemas.microsoft.com/office/mac/drawingml/2011/main" val="0"/>
             </a:ext>
           </a:extLst>
         </p:spPr>
@@ -5732,7 +6072,7 @@
           <a:p>
             <a:pPr algn="l"/>
             <a:fld id="{F7021451-1387-4CA6-816F-3879F97B5CBC}" type="slidenum">
-              <a:rPr lang="en-US" b="0"/>
+              <a:rPr b="0" lang="en-US"/>
               <a:t>11</a:t>
             </a:fld>
             <a:endParaRPr lang="en-US"/>
@@ -5807,7 +6147,7 @@
           <a:bodyPr wrap="square" lIns="0" tIns="0" rIns="0" bIns="0" rtlCol="0" anchor="ctr"/>
           <a:lstStyle/>
           <a:p>
-            <a:pPr marL="0" indent="0" algn="l">
+            <a:pPr algn="l" indent="0" marL="0">
               <a:buNone/>
             </a:pPr>
             <a:r>
@@ -5846,7 +6186,7 @@
           <a:bodyPr wrap="square" lIns="0" tIns="0" rIns="0" bIns="0" rtlCol="0" anchor="ctr"/>
           <a:lstStyle/>
           <a:p>
-            <a:pPr marL="0" indent="0">
+            <a:pPr indent="0" marL="0">
               <a:buNone/>
             </a:pPr>
             <a:r>
@@ -5912,11 +6252,11 @@
           <a:bodyPr wrap="square" lIns="0" tIns="0" rIns="0" bIns="0" rtlCol="0" anchor="ctr"/>
           <a:lstStyle/>
           <a:p>
-            <a:pPr marL="0" indent="0" algn="ctr">
-              <a:buNone/>
-            </a:pPr>
-            <a:r>
-              <a:rPr lang="en-US" sz="900" b="1" kern="0" spc="100" dirty="0">
+            <a:pPr algn="ctr" indent="0" marL="0">
+              <a:buNone/>
+            </a:pPr>
+            <a:r>
+              <a:rPr lang="en-US" sz="900" b="1" spc="100" kern="0" dirty="0">
                 <a:solidFill>
                   <a:srgbClr val="5A05F4"/>
                 </a:solidFill>
@@ -5932,14 +6272,14 @@
       </p:sp>
       <p:pic>
         <p:nvPicPr>
-          <p:cNvPr id="7" name="Image 0" descr="preencoded.png"/>
+          <p:cNvPr id="7" name="Image 0" descr="preencoded.png">    </p:cNvPr>
           <p:cNvPicPr>
             <a:picLocks noChangeAspect="1"/>
           </p:cNvPicPr>
           <p:nvPr/>
         </p:nvPicPr>
         <p:blipFill>
-          <a:blip r:embed="rId3"/>
+          <a:blip r:embed="rId1"/>
           <a:stretch>
             <a:fillRect/>
           </a:stretch>
@@ -6002,7 +6342,7 @@
           <a:bodyPr wrap="square" lIns="0" tIns="0" rIns="0" bIns="0" rtlCol="0" anchor="t"/>
           <a:lstStyle/>
           <a:p>
-            <a:pPr marL="0" indent="0">
+            <a:pPr indent="0" marL="0">
               <a:lnSpc>
                 <a:spcPct val="130000"/>
               </a:lnSpc>
@@ -6022,7 +6362,7 @@
             <a:endParaRPr lang="en-US" sz="1150" dirty="0"/>
           </a:p>
           <a:p>
-            <a:pPr marL="0" indent="0">
+            <a:pPr indent="0" marL="0">
               <a:lnSpc>
                 <a:spcPct val="130000"/>
               </a:lnSpc>
@@ -6042,7 +6382,7 @@
             <a:endParaRPr lang="en-US" sz="1150" dirty="0"/>
           </a:p>
           <a:p>
-            <a:pPr marL="0" indent="0">
+            <a:pPr indent="0" marL="0">
               <a:lnSpc>
                 <a:spcPct val="130000"/>
               </a:lnSpc>
@@ -6062,7 +6402,7 @@
             <a:endParaRPr lang="en-US" sz="1150" dirty="0"/>
           </a:p>
           <a:p>
-            <a:pPr marL="0" indent="0">
+            <a:pPr indent="0" marL="0">
               <a:lnSpc>
                 <a:spcPct val="130000"/>
               </a:lnSpc>
@@ -6082,7 +6422,7 @@
             <a:endParaRPr lang="en-US" sz="1150" dirty="0"/>
           </a:p>
           <a:p>
-            <a:pPr marL="0" indent="0">
+            <a:pPr indent="0" marL="0">
               <a:lnSpc>
                 <a:spcPct val="130000"/>
               </a:lnSpc>
@@ -6102,7 +6442,7 @@
             <a:endParaRPr lang="en-US" sz="1150" dirty="0"/>
           </a:p>
           <a:p>
-            <a:pPr marL="0" indent="0">
+            <a:pPr indent="0" marL="0">
               <a:lnSpc>
                 <a:spcPct val="130000"/>
               </a:lnSpc>
@@ -6122,7 +6462,7 @@
             <a:endParaRPr lang="en-US" sz="1150" dirty="0"/>
           </a:p>
           <a:p>
-            <a:pPr marL="0" indent="0">
+            <a:pPr indent="0" marL="0">
               <a:lnSpc>
                 <a:spcPct val="130000"/>
               </a:lnSpc>
@@ -6142,7 +6482,7 @@
             <a:endParaRPr lang="en-US" sz="1150" dirty="0"/>
           </a:p>
           <a:p>
-            <a:pPr marL="0" indent="0">
+            <a:pPr indent="0" marL="0">
               <a:lnSpc>
                 <a:spcPct val="130000"/>
               </a:lnSpc>
@@ -6226,7 +6566,7 @@
           <a:bodyPr wrap="square" lIns="0" tIns="0" rIns="0" bIns="0" rtlCol="0" anchor="ctr"/>
           <a:lstStyle/>
           <a:p>
-            <a:pPr marL="0" indent="0" algn="ctr">
+            <a:pPr algn="ctr" indent="0" marL="0">
               <a:buNone/>
             </a:pPr>
             <a:r>
@@ -6265,7 +6605,7 @@
           <a:bodyPr wrap="square" lIns="0" tIns="0" rIns="0" bIns="0" rtlCol="0" anchor="ctr"/>
           <a:lstStyle/>
           <a:p>
-            <a:pPr marL="0" indent="0">
+            <a:pPr indent="0" marL="0">
               <a:buNone/>
             </a:pPr>
             <a:r>
@@ -6304,7 +6644,7 @@
           <a:bodyPr wrap="square" lIns="0" tIns="0" rIns="0" bIns="0" rtlCol="0" anchor="t"/>
           <a:lstStyle/>
           <a:p>
-            <a:pPr marL="0" indent="0">
+            <a:pPr indent="0" marL="0">
               <a:lnSpc>
                 <a:spcPct val="108000"/>
               </a:lnSpc>
@@ -6388,7 +6728,7 @@
           <a:bodyPr wrap="square" lIns="0" tIns="0" rIns="0" bIns="0" rtlCol="0" anchor="ctr"/>
           <a:lstStyle/>
           <a:p>
-            <a:pPr marL="0" indent="0" algn="ctr">
+            <a:pPr algn="ctr" indent="0" marL="0">
               <a:buNone/>
             </a:pPr>
             <a:r>
@@ -6427,7 +6767,7 @@
           <a:bodyPr wrap="square" lIns="0" tIns="0" rIns="0" bIns="0" rtlCol="0" anchor="ctr"/>
           <a:lstStyle/>
           <a:p>
-            <a:pPr marL="0" indent="0">
+            <a:pPr indent="0" marL="0">
               <a:buNone/>
             </a:pPr>
             <a:r>
@@ -6466,7 +6806,7 @@
           <a:bodyPr wrap="square" lIns="0" tIns="0" rIns="0" bIns="0" rtlCol="0" anchor="t"/>
           <a:lstStyle/>
           <a:p>
-            <a:pPr marL="0" indent="0">
+            <a:pPr indent="0" marL="0">
               <a:lnSpc>
                 <a:spcPct val="108000"/>
               </a:lnSpc>
@@ -6496,7 +6836,7 @@
         <p:spPr>
           <a:xfrm>
             <a:off x="7973568" y="4251960"/>
-            <a:ext cx="3651504" cy="1325880"/>
+            <a:ext cx="3520440" cy="1325880"/>
           </a:xfrm>
           <a:prstGeom prst="roundRect">
             <a:avLst>
@@ -6550,7 +6890,7 @@
           <a:bodyPr wrap="square" lIns="0" tIns="0" rIns="0" bIns="0" rtlCol="0" anchor="ctr"/>
           <a:lstStyle/>
           <a:p>
-            <a:pPr marL="0" indent="0" algn="ctr">
+            <a:pPr algn="ctr" indent="0" marL="0">
               <a:buNone/>
             </a:pPr>
             <a:r>
@@ -6589,7 +6929,7 @@
           <a:bodyPr wrap="square" lIns="0" tIns="0" rIns="0" bIns="0" rtlCol="0" anchor="ctr"/>
           <a:lstStyle/>
           <a:p>
-            <a:pPr marL="0" indent="0">
+            <a:pPr indent="0" marL="0">
               <a:buNone/>
             </a:pPr>
             <a:r>
@@ -6628,7 +6968,7 @@
           <a:bodyPr wrap="square" lIns="0" tIns="0" rIns="0" bIns="0" rtlCol="0" anchor="t"/>
           <a:lstStyle/>
           <a:p>
-            <a:pPr marL="0" indent="0">
+            <a:pPr indent="0" marL="0">
               <a:lnSpc>
                 <a:spcPct val="108000"/>
               </a:lnSpc>
@@ -6669,7 +7009,7 @@
           </a:prstGeom>
           <a:extLst>
             <a:ext uri="{C572A759-6A51-4108-AA02-DFA0A04FC94B}">
-              <ma14:wrappingTextBoxFlag xmlns:ma14="http://schemas.microsoft.com/office/mac/drawingml/2011/main" xmlns="" val="0"/>
+              <ma14:wrappingTextBoxFlag xmlns:ma14="http://schemas.microsoft.com/office/mac/drawingml/2011/main" val="0"/>
             </a:ext>
           </a:extLst>
         </p:spPr>
@@ -6690,7 +7030,7 @@
           <a:p>
             <a:pPr algn="l"/>
             <a:fld id="{F7021451-1387-4CA6-816F-3879F97B5CBC}" type="slidenum">
-              <a:rPr lang="en-US" b="0"/>
+              <a:rPr b="0" lang="en-US"/>
               <a:t>12</a:t>
             </a:fld>
             <a:endParaRPr lang="en-US"/>
@@ -6765,7 +7105,7 @@
           <a:bodyPr wrap="square" lIns="0" tIns="0" rIns="0" bIns="0" rtlCol="0" anchor="ctr"/>
           <a:lstStyle/>
           <a:p>
-            <a:pPr marL="0" indent="0" algn="l">
+            <a:pPr algn="l" indent="0" marL="0">
               <a:buNone/>
             </a:pPr>
             <a:r>
@@ -6804,7 +7144,7 @@
           <a:bodyPr wrap="square" lIns="0" tIns="0" rIns="0" bIns="0" rtlCol="0" anchor="ctr"/>
           <a:lstStyle/>
           <a:p>
-            <a:pPr marL="0" indent="0">
+            <a:pPr indent="0" marL="0">
               <a:buNone/>
             </a:pPr>
             <a:r>
@@ -6870,11 +7210,11 @@
           <a:bodyPr wrap="square" lIns="0" tIns="0" rIns="0" bIns="0" rtlCol="0" anchor="ctr"/>
           <a:lstStyle/>
           <a:p>
-            <a:pPr marL="0" indent="0" algn="ctr">
-              <a:buNone/>
-            </a:pPr>
-            <a:r>
-              <a:rPr lang="en-US" sz="900" b="1" kern="0" spc="100" dirty="0">
+            <a:pPr algn="ctr" indent="0" marL="0">
+              <a:buNone/>
+            </a:pPr>
+            <a:r>
+              <a:rPr lang="en-US" sz="900" b="1" spc="100" kern="0" dirty="0">
                 <a:solidFill>
                   <a:srgbClr val="5A05F4"/>
                 </a:solidFill>
@@ -6890,14 +7230,14 @@
       </p:sp>
       <p:pic>
         <p:nvPicPr>
-          <p:cNvPr id="7" name="Image 0" descr="preencoded.png"/>
+          <p:cNvPr id="7" name="Image 0" descr="preencoded.png">    </p:cNvPr>
           <p:cNvPicPr>
             <a:picLocks noChangeAspect="1"/>
           </p:cNvPicPr>
           <p:nvPr/>
         </p:nvPicPr>
         <p:blipFill>
-          <a:blip r:embed="rId3"/>
+          <a:blip r:embed="rId1"/>
           <a:stretch>
             <a:fillRect/>
           </a:stretch>
@@ -6955,7 +7295,7 @@
           <a:bodyPr wrap="square" lIns="0" tIns="0" rIns="0" bIns="0" rtlCol="0" anchor="ctr"/>
           <a:lstStyle/>
           <a:p>
-            <a:pPr marL="0" indent="0" algn="ctr">
+            <a:pPr algn="ctr" indent="0" marL="0">
               <a:buNone/>
             </a:pPr>
             <a:r>
@@ -7059,7 +7399,7 @@
           <a:bodyPr wrap="square" lIns="0" tIns="0" rIns="0" bIns="0" rtlCol="0" anchor="ctr"/>
           <a:lstStyle/>
           <a:p>
-            <a:pPr marL="0" indent="0" algn="ctr">
+            <a:pPr algn="ctr" indent="0" marL="0">
               <a:buNone/>
             </a:pPr>
             <a:r>
@@ -7163,7 +7503,7 @@
           <a:bodyPr wrap="square" lIns="0" tIns="0" rIns="0" bIns="0" rtlCol="0" anchor="ctr"/>
           <a:lstStyle/>
           <a:p>
-            <a:pPr marL="0" indent="0" algn="ctr">
+            <a:pPr algn="ctr" indent="0" marL="0">
               <a:buNone/>
             </a:pPr>
             <a:r>
@@ -7267,7 +7607,7 @@
           <a:bodyPr wrap="square" lIns="0" tIns="0" rIns="0" bIns="0" rtlCol="0" anchor="ctr"/>
           <a:lstStyle/>
           <a:p>
-            <a:pPr marL="0" indent="0" algn="ctr">
+            <a:pPr algn="ctr" indent="0" marL="0">
               <a:buNone/>
             </a:pPr>
             <a:r>
@@ -7371,7 +7711,7 @@
           <a:bodyPr wrap="square" lIns="0" tIns="0" rIns="0" bIns="0" rtlCol="0" anchor="ctr"/>
           <a:lstStyle/>
           <a:p>
-            <a:pPr marL="0" indent="0" algn="ctr">
+            <a:pPr algn="ctr" indent="0" marL="0">
               <a:buNone/>
             </a:pPr>
             <a:r>
@@ -7410,7 +7750,7 @@
           <a:bodyPr wrap="square" lIns="0" tIns="0" rIns="0" bIns="0" rtlCol="0" anchor="ctr"/>
           <a:lstStyle/>
           <a:p>
-            <a:pPr marL="0" indent="0">
+            <a:pPr indent="0" marL="0">
               <a:buNone/>
             </a:pPr>
             <a:r>
@@ -7471,7 +7811,7 @@
           <a:bodyPr wrap="square" lIns="0" tIns="0" rIns="0" bIns="0" rtlCol="0" anchor="ctr"/>
           <a:lstStyle/>
           <a:p>
-            <a:pPr marL="0" indent="0">
+            <a:pPr indent="0" marL="0">
               <a:buNone/>
             </a:pPr>
             <a:r>
@@ -7510,7 +7850,7 @@
           <a:bodyPr wrap="square" lIns="0" tIns="0" rIns="0" bIns="0" rtlCol="0" anchor="t"/>
           <a:lstStyle/>
           <a:p>
-            <a:pPr marL="0" indent="0">
+            <a:pPr indent="0" marL="0">
               <a:lnSpc>
                 <a:spcPct val="108000"/>
               </a:lnSpc>
@@ -7574,7 +7914,7 @@
           <a:bodyPr wrap="square" lIns="0" tIns="0" rIns="0" bIns="0" rtlCol="0" anchor="ctr"/>
           <a:lstStyle/>
           <a:p>
-            <a:pPr marL="0" indent="0">
+            <a:pPr indent="0" marL="0">
               <a:buNone/>
             </a:pPr>
             <a:r>
@@ -7613,7 +7953,7 @@
           <a:bodyPr wrap="square" lIns="0" tIns="0" rIns="0" bIns="0" rtlCol="0" anchor="t"/>
           <a:lstStyle/>
           <a:p>
-            <a:pPr marL="0" indent="0">
+            <a:pPr indent="0" marL="0">
               <a:lnSpc>
                 <a:spcPct val="108000"/>
               </a:lnSpc>
@@ -7682,7 +8022,7 @@
           <a:bodyPr wrap="square" lIns="0" tIns="0" rIns="0" bIns="0" rtlCol="0" anchor="ctr"/>
           <a:lstStyle/>
           <a:p>
-            <a:pPr marL="0" indent="0">
+            <a:pPr indent="0" marL="0">
               <a:lnSpc>
                 <a:spcPct val="112000"/>
               </a:lnSpc>
@@ -7705,7 +8045,7 @@
       </p:sp>
       <p:sp>
         <p:nvSpPr>
-          <p:cNvPr id="35" name="Slide Number Placeholder 0"/>
+          <p:cNvPr id="25" name="Slide Number Placeholder 0"/>
           <p:cNvSpPr>
             <a:spLocks noGrp="1"/>
           </p:cNvSpPr>
@@ -7723,7 +8063,7 @@
           </a:prstGeom>
           <a:extLst>
             <a:ext uri="{C572A759-6A51-4108-AA02-DFA0A04FC94B}">
-              <ma14:wrappingTextBoxFlag xmlns:ma14="http://schemas.microsoft.com/office/mac/drawingml/2011/main" xmlns="" val="0"/>
+              <ma14:wrappingTextBoxFlag xmlns:ma14="http://schemas.microsoft.com/office/mac/drawingml/2011/main" val="0"/>
             </a:ext>
           </a:extLst>
         </p:spPr>
@@ -7744,7 +8084,7 @@
           <a:p>
             <a:pPr algn="l"/>
             <a:fld id="{F7021451-1387-4CA6-816F-3879F97B5CBC}" type="slidenum">
-              <a:rPr lang="en-US" b="0"/>
+              <a:rPr b="0" lang="en-US"/>
               <a:t>13</a:t>
             </a:fld>
             <a:endParaRPr lang="en-US"/>
@@ -7819,7 +8159,7 @@
           <a:bodyPr wrap="square" lIns="0" tIns="0" rIns="0" bIns="0" rtlCol="0" anchor="ctr"/>
           <a:lstStyle/>
           <a:p>
-            <a:pPr marL="0" indent="0" algn="l">
+            <a:pPr algn="l" indent="0" marL="0">
               <a:buNone/>
             </a:pPr>
             <a:r>
@@ -7858,7 +8198,7 @@
           <a:bodyPr wrap="square" lIns="0" tIns="0" rIns="0" bIns="0" rtlCol="0" anchor="ctr"/>
           <a:lstStyle/>
           <a:p>
-            <a:pPr marL="0" indent="0">
+            <a:pPr indent="0" marL="0">
               <a:buNone/>
             </a:pPr>
             <a:r>
@@ -7924,11 +8264,11 @@
           <a:bodyPr wrap="square" lIns="0" tIns="0" rIns="0" bIns="0" rtlCol="0" anchor="ctr"/>
           <a:lstStyle/>
           <a:p>
-            <a:pPr marL="0" indent="0" algn="ctr">
-              <a:buNone/>
-            </a:pPr>
-            <a:r>
-              <a:rPr lang="en-US" sz="900" b="1" kern="0" spc="100" dirty="0">
+            <a:pPr algn="ctr" indent="0" marL="0">
+              <a:buNone/>
+            </a:pPr>
+            <a:r>
+              <a:rPr lang="en-US" sz="900" b="1" spc="100" kern="0" dirty="0">
                 <a:solidFill>
                   <a:srgbClr val="5A05F4"/>
                 </a:solidFill>
@@ -7944,14 +8284,14 @@
       </p:sp>
       <p:pic>
         <p:nvPicPr>
-          <p:cNvPr id="7" name="Image 0" descr="preencoded.png"/>
+          <p:cNvPr id="7" name="Image 0" descr="preencoded.png">    </p:cNvPr>
           <p:cNvPicPr>
             <a:picLocks noChangeAspect="1"/>
           </p:cNvPicPr>
           <p:nvPr/>
         </p:nvPicPr>
         <p:blipFill>
-          <a:blip r:embed="rId3"/>
+          <a:blip r:embed="rId1"/>
           <a:stretch>
             <a:fillRect/>
           </a:stretch>
@@ -8009,7 +8349,7 @@
           <a:bodyPr wrap="square" lIns="0" tIns="0" rIns="0" bIns="0" rtlCol="0" anchor="ctr"/>
           <a:lstStyle/>
           <a:p>
-            <a:pPr marL="0" indent="0">
+            <a:pPr indent="0" marL="0">
               <a:buNone/>
             </a:pPr>
             <a:r>
@@ -8048,7 +8388,7 @@
           <a:bodyPr wrap="square" lIns="0" tIns="0" rIns="0" bIns="0" rtlCol="0" anchor="t"/>
           <a:lstStyle/>
           <a:p>
-            <a:pPr marL="0" indent="0">
+            <a:pPr indent="0" marL="0">
               <a:buNone/>
             </a:pPr>
             <a:r>
@@ -8109,7 +8449,7 @@
           <a:bodyPr wrap="square" lIns="0" tIns="0" rIns="0" bIns="0" rtlCol="0" anchor="ctr"/>
           <a:lstStyle/>
           <a:p>
-            <a:pPr marL="0" indent="0">
+            <a:pPr indent="0" marL="0">
               <a:buNone/>
             </a:pPr>
             <a:r>
@@ -8148,7 +8488,7 @@
           <a:bodyPr wrap="square" lIns="0" tIns="0" rIns="0" bIns="0" rtlCol="0" anchor="t"/>
           <a:lstStyle/>
           <a:p>
-            <a:pPr marL="0" indent="0">
+            <a:pPr indent="0" marL="0">
               <a:lnSpc>
                 <a:spcPct val="108000"/>
               </a:lnSpc>
@@ -8163,7 +8503,7 @@
                 <a:ea typeface="Montserrat" pitchFamily="34" charset="-122"/>
                 <a:cs typeface="Montserrat" pitchFamily="34" charset="-120"/>
               </a:rPr>
-              <a:t>недетермінізм робить сотку крихкою: один мигаючий кейс — і червоне ігнорують</a:t>
+              <a:t>недетермінізм робить поріг 100% крихким: один нестабільний кейс — і червоне ігнорують</a:t>
             </a:r>
             <a:endParaRPr lang="en-US" sz="1200" dirty="0"/>
           </a:p>
@@ -8562,7 +8902,7 @@
           <a:bodyPr wrap="square" lIns="0" tIns="0" rIns="0" bIns="0" rtlCol="0" anchor="ctr"/>
           <a:lstStyle/>
           <a:p>
-            <a:pPr marL="0" indent="0">
+            <a:pPr indent="0" marL="0">
               <a:buNone/>
             </a:pPr>
             <a:r>
@@ -8576,6 +8916,9 @@
               </a:rPr>
               <a:t>прогін зелений  </a:t>
             </a:r>
+            <a:pPr indent="0" marL="0">
+              <a:buNone/>
+            </a:pPr>
             <a:r>
               <a:rPr lang="en-US" sz="1250" dirty="0">
                 <a:solidFill>
@@ -8634,7 +8977,7 @@
           <a:bodyPr wrap="square" lIns="0" tIns="0" rIns="0" bIns="0" rtlCol="0" anchor="ctr"/>
           <a:lstStyle/>
           <a:p>
-            <a:pPr marL="0" indent="0">
+            <a:pPr indent="0" marL="0">
               <a:buNone/>
             </a:pPr>
             <a:r>
@@ -8673,7 +9016,7 @@
           <a:bodyPr wrap="square" lIns="0" tIns="0" rIns="0" bIns="0" rtlCol="0" anchor="ctr"/>
           <a:lstStyle/>
           <a:p>
-            <a:pPr marL="0" indent="0">
+            <a:pPr indent="0" marL="0">
               <a:buNone/>
             </a:pPr>
             <a:r>
@@ -8734,7 +9077,7 @@
           <a:bodyPr wrap="square" lIns="0" tIns="0" rIns="0" bIns="0" rtlCol="0" anchor="ctr"/>
           <a:lstStyle/>
           <a:p>
-            <a:pPr marL="0" indent="0">
+            <a:pPr indent="0" marL="0">
               <a:buNone/>
             </a:pPr>
             <a:r>
@@ -8773,7 +9116,7 @@
           <a:bodyPr wrap="square" lIns="0" tIns="0" rIns="0" bIns="0" rtlCol="0" anchor="ctr"/>
           <a:lstStyle/>
           <a:p>
-            <a:pPr marL="0" indent="0">
+            <a:pPr indent="0" marL="0">
               <a:buNone/>
             </a:pPr>
             <a:r>
@@ -8839,7 +9182,7 @@
           <a:bodyPr wrap="square" lIns="0" tIns="0" rIns="0" bIns="0" rtlCol="0" anchor="ctr"/>
           <a:lstStyle/>
           <a:p>
-            <a:pPr marL="0" indent="0">
+            <a:pPr indent="0" marL="0">
               <a:lnSpc>
                 <a:spcPct val="112000"/>
               </a:lnSpc>
@@ -8862,7 +9205,7 @@
       </p:sp>
       <p:sp>
         <p:nvSpPr>
-          <p:cNvPr id="41" name="Slide Number Placeholder 0"/>
+          <p:cNvPr id="25" name="Slide Number Placeholder 0"/>
           <p:cNvSpPr>
             <a:spLocks noGrp="1"/>
           </p:cNvSpPr>
@@ -8880,7 +9223,7 @@
           </a:prstGeom>
           <a:extLst>
             <a:ext uri="{C572A759-6A51-4108-AA02-DFA0A04FC94B}">
-              <ma14:wrappingTextBoxFlag xmlns:ma14="http://schemas.microsoft.com/office/mac/drawingml/2011/main" xmlns="" val="0"/>
+              <ma14:wrappingTextBoxFlag xmlns:ma14="http://schemas.microsoft.com/office/mac/drawingml/2011/main" val="0"/>
             </a:ext>
           </a:extLst>
         </p:spPr>
@@ -8901,7 +9244,7 @@
           <a:p>
             <a:pPr algn="l"/>
             <a:fld id="{F7021451-1387-4CA6-816F-3879F97B5CBC}" type="slidenum">
-              <a:rPr lang="en-US" b="0"/>
+              <a:rPr b="0" lang="en-US"/>
               <a:t>14</a:t>
             </a:fld>
             <a:endParaRPr lang="en-US"/>
@@ -8976,7 +9319,7 @@
           <a:bodyPr wrap="square" lIns="0" tIns="0" rIns="0" bIns="0" rtlCol="0" anchor="ctr"/>
           <a:lstStyle/>
           <a:p>
-            <a:pPr marL="0" indent="0" algn="l">
+            <a:pPr algn="l" indent="0" marL="0">
               <a:buNone/>
             </a:pPr>
             <a:r>
@@ -9015,7 +9358,7 @@
           <a:bodyPr wrap="square" lIns="0" tIns="0" rIns="0" bIns="0" rtlCol="0" anchor="ctr"/>
           <a:lstStyle/>
           <a:p>
-            <a:pPr marL="0" indent="0">
+            <a:pPr indent="0" marL="0">
               <a:buNone/>
             </a:pPr>
             <a:r>
@@ -9081,11 +9424,11 @@
           <a:bodyPr wrap="square" lIns="0" tIns="0" rIns="0" bIns="0" rtlCol="0" anchor="ctr"/>
           <a:lstStyle/>
           <a:p>
-            <a:pPr marL="0" indent="0" algn="ctr">
-              <a:buNone/>
-            </a:pPr>
-            <a:r>
-              <a:rPr lang="en-US" sz="900" b="1" kern="0" spc="100" dirty="0">
+            <a:pPr algn="ctr" indent="0" marL="0">
+              <a:buNone/>
+            </a:pPr>
+            <a:r>
+              <a:rPr lang="en-US" sz="900" b="1" spc="100" kern="0" dirty="0">
                 <a:solidFill>
                   <a:srgbClr val="5A05F4"/>
                 </a:solidFill>
@@ -9101,14 +9444,14 @@
       </p:sp>
       <p:pic>
         <p:nvPicPr>
-          <p:cNvPr id="7" name="Image 0" descr="preencoded.png"/>
+          <p:cNvPr id="7" name="Image 0" descr="preencoded.png">    </p:cNvPr>
           <p:cNvPicPr>
             <a:picLocks noChangeAspect="1"/>
           </p:cNvPicPr>
           <p:nvPr/>
         </p:nvPicPr>
         <p:blipFill>
-          <a:blip r:embed="rId3"/>
+          <a:blip r:embed="rId1"/>
           <a:stretch>
             <a:fillRect/>
           </a:stretch>
@@ -9171,7 +9514,7 @@
           <a:bodyPr wrap="square" lIns="0" tIns="0" rIns="0" bIns="0" rtlCol="0" anchor="t"/>
           <a:lstStyle/>
           <a:p>
-            <a:pPr marL="0" indent="0">
+            <a:pPr indent="0" marL="0">
               <a:lnSpc>
                 <a:spcPct val="130000"/>
               </a:lnSpc>
@@ -9191,7 +9534,7 @@
             <a:endParaRPr lang="en-US" sz="1100" dirty="0"/>
           </a:p>
           <a:p>
-            <a:pPr marL="0" indent="0">
+            <a:pPr indent="0" marL="0">
               <a:lnSpc>
                 <a:spcPct val="130000"/>
               </a:lnSpc>
@@ -9211,7 +9554,7 @@
             <a:endParaRPr lang="en-US" sz="1100" dirty="0"/>
           </a:p>
           <a:p>
-            <a:pPr marL="0" indent="0">
+            <a:pPr indent="0" marL="0">
               <a:lnSpc>
                 <a:spcPct val="130000"/>
               </a:lnSpc>
@@ -9220,7 +9563,7 @@
             <a:endParaRPr lang="en-US" sz="1100" dirty="0"/>
           </a:p>
           <a:p>
-            <a:pPr marL="0" indent="0">
+            <a:pPr indent="0" marL="0">
               <a:lnSpc>
                 <a:spcPct val="130000"/>
               </a:lnSpc>
@@ -9240,7 +9583,7 @@
             <a:endParaRPr lang="en-US" sz="1100" dirty="0"/>
           </a:p>
           <a:p>
-            <a:pPr marL="0" indent="0">
+            <a:pPr indent="0" marL="0">
               <a:lnSpc>
                 <a:spcPct val="130000"/>
               </a:lnSpc>
@@ -9260,7 +9603,7 @@
             <a:endParaRPr lang="en-US" sz="1100" dirty="0"/>
           </a:p>
           <a:p>
-            <a:pPr marL="0" indent="0">
+            <a:pPr indent="0" marL="0">
               <a:lnSpc>
                 <a:spcPct val="130000"/>
               </a:lnSpc>
@@ -9269,7 +9612,7 @@
             <a:endParaRPr lang="en-US" sz="1100" dirty="0"/>
           </a:p>
           <a:p>
-            <a:pPr marL="0" indent="0">
+            <a:pPr indent="0" marL="0">
               <a:lnSpc>
                 <a:spcPct val="130000"/>
               </a:lnSpc>
@@ -9289,7 +9632,7 @@
             <a:endParaRPr lang="en-US" sz="1100" dirty="0"/>
           </a:p>
           <a:p>
-            <a:pPr marL="0" indent="0">
+            <a:pPr indent="0" marL="0">
               <a:lnSpc>
                 <a:spcPct val="130000"/>
               </a:lnSpc>
@@ -9353,7 +9696,7 @@
           <a:bodyPr wrap="square" lIns="0" tIns="0" rIns="0" bIns="0" rtlCol="0" anchor="ctr"/>
           <a:lstStyle/>
           <a:p>
-            <a:pPr marL="0" indent="0">
+            <a:pPr indent="0" marL="0">
               <a:buNone/>
             </a:pPr>
             <a:r>
@@ -9392,7 +9735,7 @@
           <a:bodyPr wrap="square" lIns="0" tIns="0" rIns="0" bIns="0" rtlCol="0" anchor="t"/>
           <a:lstStyle/>
           <a:p>
-            <a:pPr marL="0" indent="0">
+            <a:pPr indent="0" marL="0">
               <a:lnSpc>
                 <a:spcPct val="108000"/>
               </a:lnSpc>
@@ -9456,7 +9799,7 @@
           <a:bodyPr wrap="square" lIns="0" tIns="0" rIns="0" bIns="0" rtlCol="0" anchor="ctr"/>
           <a:lstStyle/>
           <a:p>
-            <a:pPr marL="0" indent="0">
+            <a:pPr indent="0" marL="0">
               <a:buNone/>
             </a:pPr>
             <a:r>
@@ -9495,7 +9838,7 @@
           <a:bodyPr wrap="square" lIns="0" tIns="0" rIns="0" bIns="0" rtlCol="0" anchor="t"/>
           <a:lstStyle/>
           <a:p>
-            <a:pPr marL="0" indent="0">
+            <a:pPr indent="0" marL="0">
               <a:lnSpc>
                 <a:spcPct val="108000"/>
               </a:lnSpc>
@@ -9559,7 +9902,7 @@
           <a:bodyPr wrap="square" lIns="0" tIns="0" rIns="0" bIns="0" rtlCol="0" anchor="ctr"/>
           <a:lstStyle/>
           <a:p>
-            <a:pPr marL="0" indent="0">
+            <a:pPr indent="0" marL="0">
               <a:lnSpc>
                 <a:spcPct val="112000"/>
               </a:lnSpc>
@@ -9601,7 +9944,7 @@
           <a:bodyPr wrap="square" lIns="0" tIns="0" rIns="0" bIns="0" rtlCol="0" anchor="t"/>
           <a:lstStyle/>
           <a:p>
-            <a:pPr marL="0" indent="0">
+            <a:pPr indent="0" marL="0">
               <a:buNone/>
             </a:pPr>
             <a:r>
@@ -9639,7 +9982,7 @@
           </a:prstGeom>
           <a:extLst>
             <a:ext uri="{C572A759-6A51-4108-AA02-DFA0A04FC94B}">
-              <ma14:wrappingTextBoxFlag xmlns:ma14="http://schemas.microsoft.com/office/mac/drawingml/2011/main" xmlns="" val="0"/>
+              <ma14:wrappingTextBoxFlag xmlns:ma14="http://schemas.microsoft.com/office/mac/drawingml/2011/main" val="0"/>
             </a:ext>
           </a:extLst>
         </p:spPr>
@@ -9660,7 +10003,7 @@
           <a:p>
             <a:pPr algn="l"/>
             <a:fld id="{F7021451-1387-4CA6-816F-3879F97B5CBC}" type="slidenum">
-              <a:rPr lang="en-US" b="0"/>
+              <a:rPr b="0" lang="en-US"/>
               <a:t>15</a:t>
             </a:fld>
             <a:endParaRPr lang="en-US"/>
@@ -9735,7 +10078,7 @@
           <a:bodyPr wrap="square" lIns="0" tIns="0" rIns="0" bIns="0" rtlCol="0" anchor="ctr"/>
           <a:lstStyle/>
           <a:p>
-            <a:pPr marL="0" indent="0" algn="l">
+            <a:pPr algn="l" indent="0" marL="0">
               <a:buNone/>
             </a:pPr>
             <a:r>
@@ -9774,7 +10117,7 @@
           <a:bodyPr wrap="square" lIns="0" tIns="0" rIns="0" bIns="0" rtlCol="0" anchor="ctr"/>
           <a:lstStyle/>
           <a:p>
-            <a:pPr marL="0" indent="0">
+            <a:pPr indent="0" marL="0">
               <a:buNone/>
             </a:pPr>
             <a:r>
@@ -9840,11 +10183,11 @@
           <a:bodyPr wrap="square" lIns="0" tIns="0" rIns="0" bIns="0" rtlCol="0" anchor="ctr"/>
           <a:lstStyle/>
           <a:p>
-            <a:pPr marL="0" indent="0" algn="ctr">
-              <a:buNone/>
-            </a:pPr>
-            <a:r>
-              <a:rPr lang="en-US" sz="900" b="1" kern="0" spc="100" dirty="0">
+            <a:pPr algn="ctr" indent="0" marL="0">
+              <a:buNone/>
+            </a:pPr>
+            <a:r>
+              <a:rPr lang="en-US" sz="900" b="1" spc="100" kern="0" dirty="0">
                 <a:solidFill>
                   <a:srgbClr val="5A05F4"/>
                 </a:solidFill>
@@ -9906,11 +10249,11 @@
           <a:bodyPr wrap="square" lIns="0" tIns="0" rIns="0" bIns="0" rtlCol="0" anchor="ctr"/>
           <a:lstStyle/>
           <a:p>
-            <a:pPr marL="0" indent="0" algn="ctr">
-              <a:buNone/>
-            </a:pPr>
-            <a:r>
-              <a:rPr lang="en-US" sz="900" b="1" kern="0" spc="100" dirty="0">
+            <a:pPr algn="ctr" indent="0" marL="0">
+              <a:buNone/>
+            </a:pPr>
+            <a:r>
+              <a:rPr lang="en-US" sz="900" b="1" spc="100" kern="0" dirty="0">
                 <a:solidFill>
                   <a:srgbClr val="434343"/>
                 </a:solidFill>
@@ -9926,14 +10269,14 @@
       </p:sp>
       <p:pic>
         <p:nvPicPr>
-          <p:cNvPr id="9" name="Image 0" descr="preencoded.png"/>
+          <p:cNvPr id="9" name="Image 0" descr="preencoded.png">    </p:cNvPr>
           <p:cNvPicPr>
             <a:picLocks noChangeAspect="1"/>
           </p:cNvPicPr>
           <p:nvPr/>
         </p:nvPicPr>
         <p:blipFill>
-          <a:blip r:embed="rId3"/>
+          <a:blip r:embed="rId1"/>
           <a:stretch>
             <a:fillRect/>
           </a:stretch>
@@ -9991,7 +10334,7 @@
           <a:bodyPr wrap="square" lIns="0" tIns="0" rIns="0" bIns="0" rtlCol="0" anchor="ctr"/>
           <a:lstStyle/>
           <a:p>
-            <a:pPr marL="0" indent="0">
+            <a:pPr indent="0" marL="0">
               <a:buNone/>
             </a:pPr>
             <a:r>
@@ -10030,7 +10373,7 @@
           <a:bodyPr wrap="square" lIns="0" tIns="0" rIns="0" bIns="0" rtlCol="0" anchor="t"/>
           <a:lstStyle/>
           <a:p>
-            <a:pPr marL="0" indent="0">
+            <a:pPr indent="0" marL="0">
               <a:lnSpc>
                 <a:spcPct val="108000"/>
               </a:lnSpc>
@@ -10094,7 +10437,7 @@
           <a:bodyPr wrap="square" lIns="0" tIns="0" rIns="0" bIns="0" rtlCol="0" anchor="ctr"/>
           <a:lstStyle/>
           <a:p>
-            <a:pPr marL="0" indent="0">
+            <a:pPr indent="0" marL="0">
               <a:buNone/>
             </a:pPr>
             <a:r>
@@ -10133,7 +10476,7 @@
           <a:bodyPr wrap="square" lIns="0" tIns="0" rIns="0" bIns="0" rtlCol="0" anchor="t"/>
           <a:lstStyle/>
           <a:p>
-            <a:pPr marL="0" indent="0">
+            <a:pPr indent="0" marL="0">
               <a:lnSpc>
                 <a:spcPct val="108000"/>
               </a:lnSpc>
@@ -10202,11 +10545,11 @@
           <a:bodyPr wrap="square" lIns="0" tIns="0" rIns="0" bIns="0" rtlCol="0" anchor="ctr"/>
           <a:lstStyle/>
           <a:p>
-            <a:pPr marL="0" indent="0">
-              <a:buNone/>
-            </a:pPr>
-            <a:r>
-              <a:rPr lang="en-US" sz="950" b="1" kern="0" spc="150" dirty="0">
+            <a:pPr indent="0" marL="0">
+              <a:buNone/>
+            </a:pPr>
+            <a:r>
+              <a:rPr lang="en-US" sz="950" b="1" spc="150" kern="0" dirty="0">
                 <a:solidFill>
                   <a:srgbClr val="106B41"/>
                 </a:solidFill>
@@ -10241,7 +10584,7 @@
           <a:bodyPr wrap="square" lIns="0" tIns="0" rIns="0" bIns="0" rtlCol="0" anchor="ctr"/>
           <a:lstStyle/>
           <a:p>
-            <a:pPr marL="0" indent="0">
+            <a:pPr indent="0" marL="0">
               <a:lnSpc>
                 <a:spcPct val="112000"/>
               </a:lnSpc>
@@ -10310,7 +10653,7 @@
           <a:bodyPr wrap="square" lIns="0" tIns="0" rIns="0" bIns="0" rtlCol="0" anchor="ctr"/>
           <a:lstStyle/>
           <a:p>
-            <a:pPr marL="0" indent="0">
+            <a:pPr indent="0" marL="0">
               <a:lnSpc>
                 <a:spcPct val="112000"/>
               </a:lnSpc>
@@ -10351,7 +10694,7 @@
           </a:prstGeom>
           <a:extLst>
             <a:ext uri="{C572A759-6A51-4108-AA02-DFA0A04FC94B}">
-              <ma14:wrappingTextBoxFlag xmlns:ma14="http://schemas.microsoft.com/office/mac/drawingml/2011/main" xmlns="" val="0"/>
+              <ma14:wrappingTextBoxFlag xmlns:ma14="http://schemas.microsoft.com/office/mac/drawingml/2011/main" val="0"/>
             </a:ext>
           </a:extLst>
         </p:spPr>
@@ -10372,7 +10715,7 @@
           <a:p>
             <a:pPr algn="l"/>
             <a:fld id="{F7021451-1387-4CA6-816F-3879F97B5CBC}" type="slidenum">
-              <a:rPr lang="en-US" b="0"/>
+              <a:rPr b="0" lang="en-US"/>
               <a:t>16</a:t>
             </a:fld>
             <a:endParaRPr lang="en-US"/>
@@ -10447,7 +10790,7 @@
           <a:bodyPr wrap="square" lIns="0" tIns="0" rIns="0" bIns="0" rtlCol="0" anchor="ctr"/>
           <a:lstStyle/>
           <a:p>
-            <a:pPr marL="0" indent="0" algn="l">
+            <a:pPr algn="l" indent="0" marL="0">
               <a:buNone/>
             </a:pPr>
             <a:r>
@@ -10486,7 +10829,7 @@
           <a:bodyPr wrap="square" lIns="0" tIns="0" rIns="0" bIns="0" rtlCol="0" anchor="ctr"/>
           <a:lstStyle/>
           <a:p>
-            <a:pPr marL="0" indent="0">
+            <a:pPr indent="0" marL="0">
               <a:buNone/>
             </a:pPr>
             <a:r>
@@ -10552,11 +10895,11 @@
           <a:bodyPr wrap="square" lIns="0" tIns="0" rIns="0" bIns="0" rtlCol="0" anchor="ctr"/>
           <a:lstStyle/>
           <a:p>
-            <a:pPr marL="0" indent="0" algn="ctr">
-              <a:buNone/>
-            </a:pPr>
-            <a:r>
-              <a:rPr lang="en-US" sz="900" b="1" kern="0" spc="100" dirty="0">
+            <a:pPr algn="ctr" indent="0" marL="0">
+              <a:buNone/>
+            </a:pPr>
+            <a:r>
+              <a:rPr lang="en-US" sz="900" b="1" spc="100" kern="0" dirty="0">
                 <a:solidFill>
                   <a:srgbClr val="5A05F4"/>
                 </a:solidFill>
@@ -10572,14 +10915,14 @@
       </p:sp>
       <p:pic>
         <p:nvPicPr>
-          <p:cNvPr id="7" name="Image 0" descr="preencoded.png"/>
+          <p:cNvPr id="7" name="Image 0" descr="preencoded.png">    </p:cNvPr>
           <p:cNvPicPr>
             <a:picLocks noChangeAspect="1"/>
           </p:cNvPicPr>
           <p:nvPr/>
         </p:nvPicPr>
         <p:blipFill>
-          <a:blip r:embed="rId3"/>
+          <a:blip r:embed="rId1"/>
           <a:stretch>
             <a:fillRect/>
           </a:stretch>
@@ -10637,7 +10980,7 @@
           <a:bodyPr wrap="square" lIns="0" tIns="0" rIns="0" bIns="0" rtlCol="0" anchor="ctr"/>
           <a:lstStyle/>
           <a:p>
-            <a:pPr marL="0" indent="0" algn="ctr">
+            <a:pPr algn="ctr" indent="0" marL="0">
               <a:buNone/>
             </a:pPr>
             <a:r>
@@ -10741,7 +11084,7 @@
           <a:bodyPr wrap="square" lIns="0" tIns="0" rIns="0" bIns="0" rtlCol="0" anchor="ctr"/>
           <a:lstStyle/>
           <a:p>
-            <a:pPr marL="0" indent="0" algn="ctr">
+            <a:pPr algn="ctr" indent="0" marL="0">
               <a:buNone/>
             </a:pPr>
             <a:r>
@@ -10845,7 +11188,7 @@
           <a:bodyPr wrap="square" lIns="0" tIns="0" rIns="0" bIns="0" rtlCol="0" anchor="ctr"/>
           <a:lstStyle/>
           <a:p>
-            <a:pPr marL="0" indent="0" algn="ctr">
+            <a:pPr algn="ctr" indent="0" marL="0">
               <a:buNone/>
             </a:pPr>
             <a:r>
@@ -10949,7 +11292,7 @@
           <a:bodyPr wrap="square" lIns="0" tIns="0" rIns="0" bIns="0" rtlCol="0" anchor="ctr"/>
           <a:lstStyle/>
           <a:p>
-            <a:pPr marL="0" indent="0" algn="ctr">
+            <a:pPr algn="ctr" indent="0" marL="0">
               <a:buNone/>
             </a:pPr>
             <a:r>
@@ -10996,14 +11339,34 @@
       </p:sp>
       <p:sp>
         <p:nvSpPr>
-          <p:cNvPr id="23" name="Text 20"/>
-          <p:cNvSpPr/>
-          <p:nvPr/>
-        </p:nvSpPr>
-        <p:spPr>
-          <a:xfrm>
-            <a:off x="786384" y="3236976"/>
-            <a:ext cx="10625328" cy="219456"/>
+          <p:cNvPr id="23" name="Shape 20"/>
+          <p:cNvSpPr/>
+          <p:nvPr/>
+        </p:nvSpPr>
+        <p:spPr>
+          <a:xfrm>
+            <a:off x="749808" y="3570732"/>
+            <a:ext cx="310896" cy="310896"/>
+          </a:xfrm>
+          <a:prstGeom prst="ellipse">
+            <a:avLst/>
+          </a:prstGeom>
+          <a:solidFill>
+            <a:srgbClr val="1A4FBF"/>
+          </a:solidFill>
+          <a:ln/>
+        </p:spPr>
+      </p:sp>
+      <p:sp>
+        <p:nvSpPr>
+          <p:cNvPr id="24" name="Text 21"/>
+          <p:cNvSpPr/>
+          <p:nvPr/>
+        </p:nvSpPr>
+        <p:spPr>
+          <a:xfrm>
+            <a:off x="749808" y="3570732"/>
+            <a:ext cx="310896" cy="310896"/>
           </a:xfrm>
           <a:prstGeom prst="rect">
             <a:avLst/>
@@ -11015,11 +11378,50 @@
           <a:bodyPr wrap="square" lIns="0" tIns="0" rIns="0" bIns="0" rtlCol="0" anchor="ctr"/>
           <a:lstStyle/>
           <a:p>
-            <a:pPr marL="0" indent="0">
-              <a:buNone/>
-            </a:pPr>
-            <a:r>
-              <a:rPr lang="en-US" sz="950" b="1" kern="0" spc="150" dirty="0">
+            <a:pPr algn="ctr" indent="0" marL="0">
+              <a:buNone/>
+            </a:pPr>
+            <a:r>
+              <a:rPr lang="en-US" sz="1200" b="1" dirty="0">
+                <a:solidFill>
+                  <a:srgbClr val="FFFFFF"/>
+                </a:solidFill>
+                <a:latin typeface="Arial" pitchFamily="34" charset="0"/>
+                <a:ea typeface="Arial" pitchFamily="34" charset="-122"/>
+                <a:cs typeface="Arial" pitchFamily="34" charset="-120"/>
+              </a:rPr>
+              <a:t>★</a:t>
+            </a:r>
+            <a:endParaRPr lang="en-US" sz="1200" dirty="0"/>
+          </a:p>
+        </p:txBody>
+      </p:sp>
+      <p:sp>
+        <p:nvSpPr>
+          <p:cNvPr id="25" name="Text 22"/>
+          <p:cNvSpPr/>
+          <p:nvPr/>
+        </p:nvSpPr>
+        <p:spPr>
+          <a:xfrm>
+            <a:off x="1243584" y="3236976"/>
+            <a:ext cx="10168128" cy="219456"/>
+          </a:xfrm>
+          <a:prstGeom prst="rect">
+            <a:avLst/>
+          </a:prstGeom>
+          <a:noFill/>
+          <a:ln/>
+        </p:spPr>
+        <p:txBody>
+          <a:bodyPr wrap="square" lIns="0" tIns="0" rIns="0" bIns="0" rtlCol="0" anchor="ctr"/>
+          <a:lstStyle/>
+          <a:p>
+            <a:pPr indent="0" marL="0">
+              <a:buNone/>
+            </a:pPr>
+            <a:r>
+              <a:rPr lang="en-US" sz="950" b="1" spc="150" kern="0" dirty="0">
                 <a:solidFill>
                   <a:srgbClr val="1A4FBF"/>
                 </a:solidFill>
@@ -11027,7 +11429,7 @@
                 <a:ea typeface="Courier New" pitchFamily="34" charset="-122"/>
                 <a:cs typeface="Courier New" pitchFamily="34" charset="-120"/>
               </a:rPr>
-              <a:t>ЛАЙФХАК</a:t>
+              <a:t>ПОРАДА</a:t>
             </a:r>
             <a:endParaRPr lang="en-US" sz="950" dirty="0"/>
           </a:p>
@@ -11035,14 +11437,14 @@
       </p:sp>
       <p:sp>
         <p:nvSpPr>
-          <p:cNvPr id="24" name="Text 21"/>
-          <p:cNvSpPr/>
-          <p:nvPr/>
-        </p:nvSpPr>
-        <p:spPr>
-          <a:xfrm>
-            <a:off x="786384" y="3493008"/>
-            <a:ext cx="10625328" cy="722376"/>
+          <p:cNvPr id="26" name="Text 23"/>
+          <p:cNvSpPr/>
+          <p:nvPr/>
+        </p:nvSpPr>
+        <p:spPr>
+          <a:xfrm>
+            <a:off x="1243584" y="3493008"/>
+            <a:ext cx="10168128" cy="722376"/>
           </a:xfrm>
           <a:prstGeom prst="rect">
             <a:avLst/>
@@ -11054,7 +11456,7 @@
           <a:bodyPr wrap="square" lIns="0" tIns="0" rIns="0" bIns="0" rtlCol="0" anchor="ctr"/>
           <a:lstStyle/>
           <a:p>
-            <a:pPr marL="0" indent="0">
+            <a:pPr indent="0" marL="0">
               <a:lnSpc>
                 <a:spcPct val="112000"/>
               </a:lnSpc>
@@ -11077,7 +11479,7 @@
       </p:sp>
       <p:sp>
         <p:nvSpPr>
-          <p:cNvPr id="25" name="Shape 22"/>
+          <p:cNvPr id="27" name="Shape 24"/>
           <p:cNvSpPr/>
           <p:nvPr/>
         </p:nvSpPr>
@@ -11099,7 +11501,7 @@
       </p:sp>
       <p:sp>
         <p:nvSpPr>
-          <p:cNvPr id="26" name="Text 23"/>
+          <p:cNvPr id="28" name="Text 25"/>
           <p:cNvSpPr/>
           <p:nvPr/>
         </p:nvSpPr>
@@ -11118,7 +11520,7 @@
           <a:bodyPr wrap="square" lIns="0" tIns="0" rIns="0" bIns="0" rtlCol="0" anchor="ctr"/>
           <a:lstStyle/>
           <a:p>
-            <a:pPr marL="0" indent="0">
+            <a:pPr indent="0" marL="0">
               <a:lnSpc>
                 <a:spcPct val="112000"/>
               </a:lnSpc>
@@ -11141,7 +11543,7 @@
       </p:sp>
       <p:sp>
         <p:nvSpPr>
-          <p:cNvPr id="27" name="Slide Number Placeholder 0"/>
+          <p:cNvPr id="25" name="Slide Number Placeholder 0"/>
           <p:cNvSpPr>
             <a:spLocks noGrp="1"/>
           </p:cNvSpPr>
@@ -11159,7 +11561,7 @@
           </a:prstGeom>
           <a:extLst>
             <a:ext uri="{C572A759-6A51-4108-AA02-DFA0A04FC94B}">
-              <ma14:wrappingTextBoxFlag xmlns:ma14="http://schemas.microsoft.com/office/mac/drawingml/2011/main" xmlns="" val="0"/>
+              <ma14:wrappingTextBoxFlag xmlns:ma14="http://schemas.microsoft.com/office/mac/drawingml/2011/main" val="0"/>
             </a:ext>
           </a:extLst>
         </p:spPr>
@@ -11180,7 +11582,7 @@
           <a:p>
             <a:pPr algn="l"/>
             <a:fld id="{F7021451-1387-4CA6-816F-3879F97B5CBC}" type="slidenum">
-              <a:rPr lang="en-US" b="0"/>
+              <a:rPr b="0" lang="en-US"/>
               <a:t>17</a:t>
             </a:fld>
             <a:endParaRPr lang="en-US"/>
@@ -11233,11 +11635,11 @@
           <a:bodyPr wrap="square" lIns="0" tIns="0" rIns="0" bIns="0" rtlCol="0" anchor="ctr"/>
           <a:lstStyle/>
           <a:p>
-            <a:pPr marL="0" indent="0">
-              <a:buNone/>
-            </a:pPr>
-            <a:r>
-              <a:rPr lang="en-US" sz="1200" b="1" kern="0" spc="400" dirty="0">
+            <a:pPr indent="0" marL="0">
+              <a:buNone/>
+            </a:pPr>
+            <a:r>
+              <a:rPr lang="en-US" sz="1200" b="1" spc="400" kern="0" dirty="0">
                 <a:solidFill>
                   <a:srgbClr val="FFFFFF"/>
                 </a:solidFill>
@@ -11272,7 +11674,7 @@
           <a:bodyPr wrap="square" lIns="0" tIns="0" rIns="0" bIns="0" rtlCol="0" anchor="ctr"/>
           <a:lstStyle/>
           <a:p>
-            <a:pPr marL="0" indent="0">
+            <a:pPr indent="0" marL="0">
               <a:buNone/>
             </a:pPr>
             <a:r>
@@ -11311,7 +11713,7 @@
           <a:bodyPr wrap="square" lIns="0" tIns="0" rIns="0" bIns="0" rtlCol="0" anchor="t"/>
           <a:lstStyle/>
           <a:p>
-            <a:pPr marL="0" indent="0">
+            <a:pPr indent="0" marL="0">
               <a:buNone/>
             </a:pPr>
             <a:r>
@@ -11372,7 +11774,7 @@
           <a:bodyPr wrap="square" lIns="0" tIns="0" rIns="0" bIns="0" rtlCol="0" anchor="ctr"/>
           <a:lstStyle/>
           <a:p>
-            <a:pPr marL="0" indent="0" algn="ctr">
+            <a:pPr algn="ctr" indent="0" marL="0">
               <a:buNone/>
             </a:pPr>
             <a:r>
@@ -11458,7 +11860,7 @@
           <a:bodyPr wrap="square" lIns="0" tIns="0" rIns="0" bIns="0" rtlCol="0" anchor="ctr"/>
           <a:lstStyle/>
           <a:p>
-            <a:pPr marL="0" indent="0">
+            <a:pPr indent="0" marL="0">
               <a:buNone/>
             </a:pPr>
             <a:r>
@@ -11519,11 +11921,11 @@
           <a:bodyPr wrap="square" lIns="0" tIns="0" rIns="0" bIns="0" rtlCol="0" anchor="ctr"/>
           <a:lstStyle/>
           <a:p>
-            <a:pPr marL="0" indent="0" algn="ctr">
-              <a:buNone/>
-            </a:pPr>
-            <a:r>
-              <a:rPr lang="en-US" sz="900" b="1" kern="0" spc="100" dirty="0">
+            <a:pPr algn="ctr" indent="0" marL="0">
+              <a:buNone/>
+            </a:pPr>
+            <a:r>
+              <a:rPr lang="en-US" sz="900" b="1" spc="100" kern="0" dirty="0">
                 <a:solidFill>
                   <a:srgbClr val="FFFFFF"/>
                 </a:solidFill>
@@ -11539,14 +11941,14 @@
       </p:sp>
       <p:pic>
         <p:nvPicPr>
-          <p:cNvPr id="6" name="Image 0" descr="preencoded.png"/>
+          <p:cNvPr id="6" name="Image 0" descr="preencoded.png">    </p:cNvPr>
           <p:cNvPicPr>
             <a:picLocks noChangeAspect="1"/>
           </p:cNvPicPr>
           <p:nvPr/>
         </p:nvPicPr>
         <p:blipFill>
-          <a:blip r:embed="rId3"/>
+          <a:blip r:embed="rId1"/>
           <a:stretch>
             <a:fillRect/>
           </a:stretch>
@@ -11624,7 +12026,7 @@
           <a:bodyPr wrap="square" lIns="0" tIns="0" rIns="0" bIns="0" rtlCol="0" anchor="ctr"/>
           <a:lstStyle/>
           <a:p>
-            <a:pPr marL="0" indent="0" algn="ctr">
+            <a:pPr algn="ctr" indent="0" marL="0">
               <a:buNone/>
             </a:pPr>
             <a:r>
@@ -11663,7 +12065,7 @@
           <a:bodyPr wrap="square" lIns="0" tIns="0" rIns="0" bIns="0" rtlCol="0" anchor="ctr"/>
           <a:lstStyle/>
           <a:p>
-            <a:pPr marL="0" indent="0">
+            <a:pPr indent="0" marL="0">
               <a:buNone/>
             </a:pPr>
             <a:r>
@@ -11702,7 +12104,7 @@
           <a:bodyPr wrap="square" lIns="0" tIns="0" rIns="0" bIns="0" rtlCol="0" anchor="t"/>
           <a:lstStyle/>
           <a:p>
-            <a:pPr marL="0" indent="0">
+            <a:pPr indent="0" marL="0">
               <a:lnSpc>
                 <a:spcPct val="108000"/>
               </a:lnSpc>
@@ -11786,7 +12188,7 @@
           <a:bodyPr wrap="square" lIns="0" tIns="0" rIns="0" bIns="0" rtlCol="0" anchor="ctr"/>
           <a:lstStyle/>
           <a:p>
-            <a:pPr marL="0" indent="0" algn="ctr">
+            <a:pPr algn="ctr" indent="0" marL="0">
               <a:buNone/>
             </a:pPr>
             <a:r>
@@ -11825,7 +12227,7 @@
           <a:bodyPr wrap="square" lIns="0" tIns="0" rIns="0" bIns="0" rtlCol="0" anchor="ctr"/>
           <a:lstStyle/>
           <a:p>
-            <a:pPr marL="0" indent="0">
+            <a:pPr indent="0" marL="0">
               <a:buNone/>
             </a:pPr>
             <a:r>
@@ -11864,7 +12266,7 @@
           <a:bodyPr wrap="square" lIns="0" tIns="0" rIns="0" bIns="0" rtlCol="0" anchor="t"/>
           <a:lstStyle/>
           <a:p>
-            <a:pPr marL="0" indent="0">
+            <a:pPr indent="0" marL="0">
               <a:lnSpc>
                 <a:spcPct val="108000"/>
               </a:lnSpc>
@@ -11948,7 +12350,7 @@
           <a:bodyPr wrap="square" lIns="0" tIns="0" rIns="0" bIns="0" rtlCol="0" anchor="ctr"/>
           <a:lstStyle/>
           <a:p>
-            <a:pPr marL="0" indent="0" algn="ctr">
+            <a:pPr algn="ctr" indent="0" marL="0">
               <a:buNone/>
             </a:pPr>
             <a:r>
@@ -11987,7 +12389,7 @@
           <a:bodyPr wrap="square" lIns="0" tIns="0" rIns="0" bIns="0" rtlCol="0" anchor="ctr"/>
           <a:lstStyle/>
           <a:p>
-            <a:pPr marL="0" indent="0">
+            <a:pPr indent="0" marL="0">
               <a:buNone/>
             </a:pPr>
             <a:r>
@@ -12026,7 +12428,7 @@
           <a:bodyPr wrap="square" lIns="0" tIns="0" rIns="0" bIns="0" rtlCol="0" anchor="t"/>
           <a:lstStyle/>
           <a:p>
-            <a:pPr marL="0" indent="0">
+            <a:pPr indent="0" marL="0">
               <a:lnSpc>
                 <a:spcPct val="108000"/>
               </a:lnSpc>
@@ -12110,7 +12512,7 @@
           <a:bodyPr wrap="square" lIns="0" tIns="0" rIns="0" bIns="0" rtlCol="0" anchor="ctr"/>
           <a:lstStyle/>
           <a:p>
-            <a:pPr marL="0" indent="0" algn="ctr">
+            <a:pPr algn="ctr" indent="0" marL="0">
               <a:buNone/>
             </a:pPr>
             <a:r>
@@ -12149,7 +12551,7 @@
           <a:bodyPr wrap="square" lIns="0" tIns="0" rIns="0" bIns="0" rtlCol="0" anchor="ctr"/>
           <a:lstStyle/>
           <a:p>
-            <a:pPr marL="0" indent="0">
+            <a:pPr indent="0" marL="0">
               <a:buNone/>
             </a:pPr>
             <a:r>
@@ -12188,7 +12590,7 @@
           <a:bodyPr wrap="square" lIns="0" tIns="0" rIns="0" bIns="0" rtlCol="0" anchor="t"/>
           <a:lstStyle/>
           <a:p>
-            <a:pPr marL="0" indent="0">
+            <a:pPr indent="0" marL="0">
               <a:lnSpc>
                 <a:spcPct val="108000"/>
               </a:lnSpc>
@@ -12272,7 +12674,7 @@
           <a:bodyPr wrap="square" lIns="0" tIns="0" rIns="0" bIns="0" rtlCol="0" anchor="ctr"/>
           <a:lstStyle/>
           <a:p>
-            <a:pPr marL="0" indent="0" algn="ctr">
+            <a:pPr algn="ctr" indent="0" marL="0">
               <a:buNone/>
             </a:pPr>
             <a:r>
@@ -12311,7 +12713,7 @@
           <a:bodyPr wrap="square" lIns="0" tIns="0" rIns="0" bIns="0" rtlCol="0" anchor="ctr"/>
           <a:lstStyle/>
           <a:p>
-            <a:pPr marL="0" indent="0">
+            <a:pPr indent="0" marL="0">
               <a:buNone/>
             </a:pPr>
             <a:r>
@@ -12350,7 +12752,7 @@
           <a:bodyPr wrap="square" lIns="0" tIns="0" rIns="0" bIns="0" rtlCol="0" anchor="t"/>
           <a:lstStyle/>
           <a:p>
-            <a:pPr marL="0" indent="0">
+            <a:pPr indent="0" marL="0">
               <a:lnSpc>
                 <a:spcPct val="108000"/>
               </a:lnSpc>
@@ -12395,14 +12797,34 @@
       </p:sp>
       <p:sp>
         <p:nvSpPr>
-          <p:cNvPr id="33" name="Text 30"/>
-          <p:cNvSpPr/>
-          <p:nvPr/>
-        </p:nvSpPr>
-        <p:spPr>
-          <a:xfrm>
-            <a:off x="786384" y="5157216"/>
-            <a:ext cx="10625328" cy="219456"/>
+          <p:cNvPr id="33" name="Shape 30"/>
+          <p:cNvSpPr/>
+          <p:nvPr/>
+        </p:nvSpPr>
+        <p:spPr>
+          <a:xfrm>
+            <a:off x="749808" y="5399532"/>
+            <a:ext cx="310896" cy="310896"/>
+          </a:xfrm>
+          <a:prstGeom prst="ellipse">
+            <a:avLst/>
+          </a:prstGeom>
+          <a:solidFill>
+            <a:srgbClr val="FFFFFF"/>
+          </a:solidFill>
+          <a:ln/>
+        </p:spPr>
+      </p:sp>
+      <p:sp>
+        <p:nvSpPr>
+          <p:cNvPr id="34" name="Text 31"/>
+          <p:cNvSpPr/>
+          <p:nvPr/>
+        </p:nvSpPr>
+        <p:spPr>
+          <a:xfrm>
+            <a:off x="749808" y="5399532"/>
+            <a:ext cx="310896" cy="310896"/>
           </a:xfrm>
           <a:prstGeom prst="rect">
             <a:avLst/>
@@ -12414,11 +12836,50 @@
           <a:bodyPr wrap="square" lIns="0" tIns="0" rIns="0" bIns="0" rtlCol="0" anchor="ctr"/>
           <a:lstStyle/>
           <a:p>
-            <a:pPr marL="0" indent="0">
-              <a:buNone/>
-            </a:pPr>
-            <a:r>
-              <a:rPr lang="en-US" sz="950" b="1" kern="0" spc="150" dirty="0">
+            <a:pPr algn="ctr" indent="0" marL="0">
+              <a:buNone/>
+            </a:pPr>
+            <a:r>
+              <a:rPr lang="en-US" sz="1200" b="1" dirty="0">
+                <a:solidFill>
+                  <a:srgbClr val="5A05F4"/>
+                </a:solidFill>
+                <a:latin typeface="Arial" pitchFamily="34" charset="0"/>
+                <a:ea typeface="Arial" pitchFamily="34" charset="-122"/>
+                <a:cs typeface="Arial" pitchFamily="34" charset="-120"/>
+              </a:rPr>
+              <a:t>?</a:t>
+            </a:r>
+            <a:endParaRPr lang="en-US" sz="1200" dirty="0"/>
+          </a:p>
+        </p:txBody>
+      </p:sp>
+      <p:sp>
+        <p:nvSpPr>
+          <p:cNvPr id="35" name="Text 32"/>
+          <p:cNvSpPr/>
+          <p:nvPr/>
+        </p:nvSpPr>
+        <p:spPr>
+          <a:xfrm>
+            <a:off x="1243584" y="5157216"/>
+            <a:ext cx="10168128" cy="219456"/>
+          </a:xfrm>
+          <a:prstGeom prst="rect">
+            <a:avLst/>
+          </a:prstGeom>
+          <a:noFill/>
+          <a:ln/>
+        </p:spPr>
+        <p:txBody>
+          <a:bodyPr wrap="square" lIns="0" tIns="0" rIns="0" bIns="0" rtlCol="0" anchor="ctr"/>
+          <a:lstStyle/>
+          <a:p>
+            <a:pPr indent="0" marL="0">
+              <a:buNone/>
+            </a:pPr>
+            <a:r>
+              <a:rPr lang="en-US" sz="950" b="1" spc="150" kern="0" dirty="0">
                 <a:solidFill>
                   <a:srgbClr val="FFFFFF"/>
                 </a:solidFill>
@@ -12434,14 +12895,14 @@
       </p:sp>
       <p:sp>
         <p:nvSpPr>
-          <p:cNvPr id="34" name="Text 31"/>
-          <p:cNvSpPr/>
-          <p:nvPr/>
-        </p:nvSpPr>
-        <p:spPr>
-          <a:xfrm>
-            <a:off x="786384" y="5413248"/>
-            <a:ext cx="10625328" cy="539496"/>
+          <p:cNvPr id="36" name="Text 33"/>
+          <p:cNvSpPr/>
+          <p:nvPr/>
+        </p:nvSpPr>
+        <p:spPr>
+          <a:xfrm>
+            <a:off x="1243584" y="5413248"/>
+            <a:ext cx="10168128" cy="539496"/>
           </a:xfrm>
           <a:prstGeom prst="rect">
             <a:avLst/>
@@ -12453,7 +12914,7 @@
           <a:bodyPr wrap="square" lIns="0" tIns="0" rIns="0" bIns="0" rtlCol="0" anchor="ctr"/>
           <a:lstStyle/>
           <a:p>
-            <a:pPr marL="0" indent="0">
+            <a:pPr indent="0" marL="0">
               <a:lnSpc>
                 <a:spcPct val="112000"/>
               </a:lnSpc>
@@ -12476,7 +12937,7 @@
       </p:sp>
       <p:sp>
         <p:nvSpPr>
-          <p:cNvPr id="35" name="Slide Number Placeholder 0"/>
+          <p:cNvPr id="25" name="Slide Number Placeholder 0"/>
           <p:cNvSpPr>
             <a:spLocks noGrp="1"/>
           </p:cNvSpPr>
@@ -12494,7 +12955,7 @@
           </a:prstGeom>
           <a:extLst>
             <a:ext uri="{C572A759-6A51-4108-AA02-DFA0A04FC94B}">
-              <ma14:wrappingTextBoxFlag xmlns:ma14="http://schemas.microsoft.com/office/mac/drawingml/2011/main" xmlns="" val="0"/>
+              <ma14:wrappingTextBoxFlag xmlns:ma14="http://schemas.microsoft.com/office/mac/drawingml/2011/main" val="0"/>
             </a:ext>
           </a:extLst>
         </p:spPr>
@@ -12515,7 +12976,7 @@
           <a:p>
             <a:pPr algn="l"/>
             <a:fld id="{F7021451-1387-4CA6-816F-3879F97B5CBC}" type="slidenum">
-              <a:rPr lang="en-US" b="0"/>
+              <a:rPr b="0" lang="en-US"/>
               <a:t>19</a:t>
             </a:fld>
             <a:endParaRPr lang="en-US"/>
@@ -12590,7 +13051,7 @@
           <a:bodyPr wrap="square" lIns="0" tIns="0" rIns="0" bIns="0" rtlCol="0" anchor="ctr"/>
           <a:lstStyle/>
           <a:p>
-            <a:pPr marL="0" indent="0">
+            <a:pPr indent="0" marL="0">
               <a:buNone/>
             </a:pPr>
             <a:r>
@@ -12629,7 +13090,7 @@
           <a:bodyPr wrap="square" lIns="0" tIns="0" rIns="0" bIns="0" rtlCol="0" anchor="t"/>
           <a:lstStyle/>
           <a:p>
-            <a:pPr marL="0" indent="0">
+            <a:pPr indent="0" marL="0">
               <a:lnSpc>
                 <a:spcPct val="100000"/>
               </a:lnSpc>
@@ -12698,11 +13159,11 @@
           <a:bodyPr wrap="square" lIns="0" tIns="0" rIns="0" bIns="0" rtlCol="0" anchor="ctr"/>
           <a:lstStyle/>
           <a:p>
-            <a:pPr marL="0" indent="0" algn="ctr">
-              <a:buNone/>
-            </a:pPr>
-            <a:r>
-              <a:rPr lang="en-US" sz="900" b="1" kern="0" spc="100" dirty="0">
+            <a:pPr algn="ctr" indent="0" marL="0">
+              <a:buNone/>
+            </a:pPr>
+            <a:r>
+              <a:rPr lang="en-US" sz="900" b="1" spc="100" kern="0" dirty="0">
                 <a:solidFill>
                   <a:srgbClr val="5A05F4"/>
                 </a:solidFill>
@@ -12718,14 +13179,14 @@
       </p:sp>
       <p:pic>
         <p:nvPicPr>
-          <p:cNvPr id="7" name="Image 0" descr="preencoded.png"/>
+          <p:cNvPr id="7" name="Image 0" descr="preencoded.png">    </p:cNvPr>
           <p:cNvPicPr>
             <a:picLocks noChangeAspect="1"/>
           </p:cNvPicPr>
           <p:nvPr/>
         </p:nvPicPr>
         <p:blipFill>
-          <a:blip r:embed="rId3"/>
+          <a:blip r:embed="rId1"/>
           <a:stretch>
             <a:fillRect/>
           </a:stretch>
@@ -12803,7 +13264,7 @@
           <a:bodyPr wrap="square" lIns="0" tIns="0" rIns="0" bIns="0" rtlCol="0" anchor="ctr"/>
           <a:lstStyle/>
           <a:p>
-            <a:pPr marL="0" indent="0" algn="ctr">
+            <a:pPr algn="ctr" indent="0" marL="0">
               <a:buNone/>
             </a:pPr>
             <a:r>
@@ -12842,7 +13303,7 @@
           <a:bodyPr wrap="square" lIns="0" tIns="0" rIns="0" bIns="0" rtlCol="0" anchor="ctr"/>
           <a:lstStyle/>
           <a:p>
-            <a:pPr marL="0" indent="0">
+            <a:pPr indent="0" marL="0">
               <a:buNone/>
             </a:pPr>
             <a:r>
@@ -12881,7 +13342,7 @@
           <a:bodyPr wrap="square" lIns="0" tIns="0" rIns="0" bIns="0" rtlCol="0" anchor="t"/>
           <a:lstStyle/>
           <a:p>
-            <a:pPr marL="0" indent="0">
+            <a:pPr indent="0" marL="0">
               <a:lnSpc>
                 <a:spcPct val="108000"/>
               </a:lnSpc>
@@ -12965,7 +13426,7 @@
           <a:bodyPr wrap="square" lIns="0" tIns="0" rIns="0" bIns="0" rtlCol="0" anchor="ctr"/>
           <a:lstStyle/>
           <a:p>
-            <a:pPr marL="0" indent="0" algn="ctr">
+            <a:pPr algn="ctr" indent="0" marL="0">
               <a:buNone/>
             </a:pPr>
             <a:r>
@@ -13004,7 +13465,7 @@
           <a:bodyPr wrap="square" lIns="0" tIns="0" rIns="0" bIns="0" rtlCol="0" anchor="ctr"/>
           <a:lstStyle/>
           <a:p>
-            <a:pPr marL="0" indent="0">
+            <a:pPr indent="0" marL="0">
               <a:buNone/>
             </a:pPr>
             <a:r>
@@ -13043,7 +13504,7 @@
           <a:bodyPr wrap="square" lIns="0" tIns="0" rIns="0" bIns="0" rtlCol="0" anchor="t"/>
           <a:lstStyle/>
           <a:p>
-            <a:pPr marL="0" indent="0">
+            <a:pPr indent="0" marL="0">
               <a:lnSpc>
                 <a:spcPct val="108000"/>
               </a:lnSpc>
@@ -13127,7 +13588,7 @@
           <a:bodyPr wrap="square" lIns="0" tIns="0" rIns="0" bIns="0" rtlCol="0" anchor="ctr"/>
           <a:lstStyle/>
           <a:p>
-            <a:pPr marL="0" indent="0" algn="ctr">
+            <a:pPr algn="ctr" indent="0" marL="0">
               <a:buNone/>
             </a:pPr>
             <a:r>
@@ -13166,7 +13627,7 @@
           <a:bodyPr wrap="square" lIns="0" tIns="0" rIns="0" bIns="0" rtlCol="0" anchor="ctr"/>
           <a:lstStyle/>
           <a:p>
-            <a:pPr marL="0" indent="0">
+            <a:pPr indent="0" marL="0">
               <a:buNone/>
             </a:pPr>
             <a:r>
@@ -13205,7 +13666,7 @@
           <a:bodyPr wrap="square" lIns="0" tIns="0" rIns="0" bIns="0" rtlCol="0" anchor="t"/>
           <a:lstStyle/>
           <a:p>
-            <a:pPr marL="0" indent="0">
+            <a:pPr indent="0" marL="0">
               <a:lnSpc>
                 <a:spcPct val="108000"/>
               </a:lnSpc>
@@ -13289,7 +13750,7 @@
           <a:bodyPr wrap="square" lIns="0" tIns="0" rIns="0" bIns="0" rtlCol="0" anchor="ctr"/>
           <a:lstStyle/>
           <a:p>
-            <a:pPr marL="0" indent="0" algn="ctr">
+            <a:pPr algn="ctr" indent="0" marL="0">
               <a:buNone/>
             </a:pPr>
             <a:r>
@@ -13328,7 +13789,7 @@
           <a:bodyPr wrap="square" lIns="0" tIns="0" rIns="0" bIns="0" rtlCol="0" anchor="ctr"/>
           <a:lstStyle/>
           <a:p>
-            <a:pPr marL="0" indent="0">
+            <a:pPr indent="0" marL="0">
               <a:buNone/>
             </a:pPr>
             <a:r>
@@ -13367,7 +13828,7 @@
           <a:bodyPr wrap="square" lIns="0" tIns="0" rIns="0" bIns="0" rtlCol="0" anchor="t"/>
           <a:lstStyle/>
           <a:p>
-            <a:pPr marL="0" indent="0">
+            <a:pPr indent="0" marL="0">
               <a:lnSpc>
                 <a:spcPct val="108000"/>
               </a:lnSpc>
@@ -13451,7 +13912,7 @@
           <a:bodyPr wrap="square" lIns="0" tIns="0" rIns="0" bIns="0" rtlCol="0" anchor="ctr"/>
           <a:lstStyle/>
           <a:p>
-            <a:pPr marL="0" indent="0" algn="ctr">
+            <a:pPr algn="ctr" indent="0" marL="0">
               <a:buNone/>
             </a:pPr>
             <a:r>
@@ -13490,7 +13951,7 @@
           <a:bodyPr wrap="square" lIns="0" tIns="0" rIns="0" bIns="0" rtlCol="0" anchor="ctr"/>
           <a:lstStyle/>
           <a:p>
-            <a:pPr marL="0" indent="0">
+            <a:pPr indent="0" marL="0">
               <a:buNone/>
             </a:pPr>
             <a:r>
@@ -13529,7 +13990,7 @@
           <a:bodyPr wrap="square" lIns="0" tIns="0" rIns="0" bIns="0" rtlCol="0" anchor="t"/>
           <a:lstStyle/>
           <a:p>
-            <a:pPr marL="0" indent="0">
+            <a:pPr indent="0" marL="0">
               <a:lnSpc>
                 <a:spcPct val="108000"/>
               </a:lnSpc>
@@ -13552,7 +14013,7 @@
       </p:sp>
       <p:sp>
         <p:nvSpPr>
-          <p:cNvPr id="33" name="Slide Number Placeholder 0"/>
+          <p:cNvPr id="25" name="Slide Number Placeholder 0"/>
           <p:cNvSpPr>
             <a:spLocks noGrp="1"/>
           </p:cNvSpPr>
@@ -13570,7 +14031,7 @@
           </a:prstGeom>
           <a:extLst>
             <a:ext uri="{C572A759-6A51-4108-AA02-DFA0A04FC94B}">
-              <ma14:wrappingTextBoxFlag xmlns:ma14="http://schemas.microsoft.com/office/mac/drawingml/2011/main" xmlns="" val="0"/>
+              <ma14:wrappingTextBoxFlag xmlns:ma14="http://schemas.microsoft.com/office/mac/drawingml/2011/main" val="0"/>
             </a:ext>
           </a:extLst>
         </p:spPr>
@@ -13591,7 +14052,7 @@
           <a:p>
             <a:pPr algn="l"/>
             <a:fld id="{F7021451-1387-4CA6-816F-3879F97B5CBC}" type="slidenum">
-              <a:rPr lang="en-US" b="0"/>
+              <a:rPr b="0" lang="en-US"/>
               <a:t>2</a:t>
             </a:fld>
             <a:endParaRPr lang="en-US"/>
@@ -13666,7 +14127,7 @@
           <a:bodyPr wrap="square" lIns="0" tIns="0" rIns="0" bIns="0" rtlCol="0" anchor="ctr"/>
           <a:lstStyle/>
           <a:p>
-            <a:pPr marL="0" indent="0">
+            <a:pPr indent="0" marL="0">
               <a:buNone/>
             </a:pPr>
             <a:r>
@@ -13727,11 +14188,11 @@
           <a:bodyPr wrap="square" lIns="0" tIns="0" rIns="0" bIns="0" rtlCol="0" anchor="ctr"/>
           <a:lstStyle/>
           <a:p>
-            <a:pPr marL="0" indent="0" algn="ctr">
-              <a:buNone/>
-            </a:pPr>
-            <a:r>
-              <a:rPr lang="en-US" sz="900" b="1" kern="0" spc="100" dirty="0">
+            <a:pPr algn="ctr" indent="0" marL="0">
+              <a:buNone/>
+            </a:pPr>
+            <a:r>
+              <a:rPr lang="en-US" sz="900" b="1" spc="100" kern="0" dirty="0">
                 <a:solidFill>
                   <a:srgbClr val="FFFFFF"/>
                 </a:solidFill>
@@ -13747,14 +14208,14 @@
       </p:sp>
       <p:pic>
         <p:nvPicPr>
-          <p:cNvPr id="6" name="Image 0" descr="preencoded.png"/>
+          <p:cNvPr id="6" name="Image 0" descr="preencoded.png">    </p:cNvPr>
           <p:cNvPicPr>
             <a:picLocks noChangeAspect="1"/>
           </p:cNvPicPr>
           <p:nvPr/>
         </p:nvPicPr>
         <p:blipFill>
-          <a:blip r:embed="rId3"/>
+          <a:blip r:embed="rId1"/>
           <a:stretch>
             <a:fillRect/>
           </a:stretch>
@@ -13810,7 +14271,7 @@
           <a:bodyPr wrap="square" lIns="0" tIns="0" rIns="0" bIns="0" rtlCol="0" anchor="ctr"/>
           <a:lstStyle/>
           <a:p>
-            <a:pPr marL="0" indent="0" algn="ctr">
+            <a:pPr algn="ctr" indent="0" marL="0">
               <a:buNone/>
             </a:pPr>
             <a:r>
@@ -13849,7 +14310,7 @@
           <a:bodyPr wrap="square" lIns="0" tIns="0" rIns="0" bIns="0" rtlCol="0" anchor="ctr"/>
           <a:lstStyle/>
           <a:p>
-            <a:pPr marL="0" indent="0">
+            <a:pPr indent="0" marL="0">
               <a:buNone/>
             </a:pPr>
             <a:r>
@@ -13863,6 +14324,9 @@
               </a:rPr>
               <a:t>Анатомія кейса  </a:t>
             </a:r>
+            <a:pPr indent="0" marL="0">
+              <a:buNone/>
+            </a:pPr>
             <a:r>
               <a:rPr lang="en-US" sz="1200" dirty="0">
                 <a:solidFill>
@@ -13919,7 +14383,7 @@
           <a:bodyPr wrap="square" lIns="0" tIns="0" rIns="0" bIns="0" rtlCol="0" anchor="ctr"/>
           <a:lstStyle/>
           <a:p>
-            <a:pPr marL="0" indent="0" algn="ctr">
+            <a:pPr algn="ctr" indent="0" marL="0">
               <a:buNone/>
             </a:pPr>
             <a:r>
@@ -13958,7 +14422,7 @@
           <a:bodyPr wrap="square" lIns="0" tIns="0" rIns="0" bIns="0" rtlCol="0" anchor="ctr"/>
           <a:lstStyle/>
           <a:p>
-            <a:pPr marL="0" indent="0">
+            <a:pPr indent="0" marL="0">
               <a:buNone/>
             </a:pPr>
             <a:r>
@@ -13972,6 +14436,9 @@
               </a:rPr>
               <a:t>Прогнати suite  </a:t>
             </a:r>
+            <a:pPr indent="0" marL="0">
+              <a:buNone/>
+            </a:pPr>
             <a:r>
               <a:rPr lang="en-US" sz="1200" dirty="0">
                 <a:solidFill>
@@ -14028,7 +14495,7 @@
           <a:bodyPr wrap="square" lIns="0" tIns="0" rIns="0" bIns="0" rtlCol="0" anchor="ctr"/>
           <a:lstStyle/>
           <a:p>
-            <a:pPr marL="0" indent="0" algn="ctr">
+            <a:pPr algn="ctr" indent="0" marL="0">
               <a:buNone/>
             </a:pPr>
             <a:r>
@@ -14067,7 +14534,7 @@
           <a:bodyPr wrap="square" lIns="0" tIns="0" rIns="0" bIns="0" rtlCol="0" anchor="ctr"/>
           <a:lstStyle/>
           <a:p>
-            <a:pPr marL="0" indent="0">
+            <a:pPr indent="0" marL="0">
               <a:buNone/>
             </a:pPr>
             <a:r>
@@ -14081,6 +14548,9 @@
               </a:rPr>
               <a:t>Зламати і зловити  </a:t>
             </a:r>
+            <a:pPr indent="0" marL="0">
+              <a:buNone/>
+            </a:pPr>
             <a:r>
               <a:rPr lang="en-US" sz="1200" dirty="0">
                 <a:solidFill>
@@ -14137,7 +14607,7 @@
           <a:bodyPr wrap="square" lIns="0" tIns="0" rIns="0" bIns="0" rtlCol="0" anchor="ctr"/>
           <a:lstStyle/>
           <a:p>
-            <a:pPr marL="0" indent="0" algn="ctr">
+            <a:pPr algn="ctr" indent="0" marL="0">
               <a:buNone/>
             </a:pPr>
             <a:r>
@@ -14176,7 +14646,7 @@
           <a:bodyPr wrap="square" lIns="0" tIns="0" rIns="0" bIns="0" rtlCol="0" anchor="ctr"/>
           <a:lstStyle/>
           <a:p>
-            <a:pPr marL="0" indent="0">
+            <a:pPr indent="0" marL="0">
               <a:buNone/>
             </a:pPr>
             <a:r>
@@ -14190,6 +14660,9 @@
               </a:rPr>
               <a:t>Власні кейси  </a:t>
             </a:r>
+            <a:pPr indent="0" marL="0">
+              <a:buNone/>
+            </a:pPr>
             <a:r>
               <a:rPr lang="en-US" sz="1200" dirty="0">
                 <a:solidFill>
@@ -14246,7 +14719,7 @@
           <a:bodyPr wrap="square" lIns="0" tIns="0" rIns="0" bIns="0" rtlCol="0" anchor="ctr"/>
           <a:lstStyle/>
           <a:p>
-            <a:pPr marL="0" indent="0" algn="ctr">
+            <a:pPr algn="ctr" indent="0" marL="0">
               <a:buNone/>
             </a:pPr>
             <a:r>
@@ -14285,7 +14758,7 @@
           <a:bodyPr wrap="square" lIns="0" tIns="0" rIns="0" bIns="0" rtlCol="0" anchor="ctr"/>
           <a:lstStyle/>
           <a:p>
-            <a:pPr marL="0" indent="0">
+            <a:pPr indent="0" marL="0">
               <a:buNone/>
             </a:pPr>
             <a:r>
@@ -14299,6 +14772,9 @@
               </a:rPr>
               <a:t>LLM-as-judge · опційно  </a:t>
             </a:r>
+            <a:pPr indent="0" marL="0">
+              <a:buNone/>
+            </a:pPr>
             <a:r>
               <a:rPr lang="en-US" sz="1200" dirty="0">
                 <a:solidFill>
@@ -14334,7 +14810,7 @@
           </a:prstGeom>
           <a:extLst>
             <a:ext uri="{C572A759-6A51-4108-AA02-DFA0A04FC94B}">
-              <ma14:wrappingTextBoxFlag xmlns:ma14="http://schemas.microsoft.com/office/mac/drawingml/2011/main" xmlns="" val="0"/>
+              <ma14:wrappingTextBoxFlag xmlns:ma14="http://schemas.microsoft.com/office/mac/drawingml/2011/main" val="0"/>
             </a:ext>
           </a:extLst>
         </p:spPr>
@@ -14355,7 +14831,7 @@
           <a:p>
             <a:pPr algn="l"/>
             <a:fld id="{F7021451-1387-4CA6-816F-3879F97B5CBC}" type="slidenum">
-              <a:rPr lang="en-US" b="0"/>
+              <a:rPr b="0" lang="en-US"/>
               <a:t>20</a:t>
             </a:fld>
             <a:endParaRPr lang="en-US"/>
@@ -14408,11 +14884,11 @@
           <a:bodyPr wrap="square" lIns="0" tIns="0" rIns="0" bIns="0" rtlCol="0" anchor="ctr"/>
           <a:lstStyle/>
           <a:p>
-            <a:pPr marL="0" indent="0">
-              <a:buNone/>
-            </a:pPr>
-            <a:r>
-              <a:rPr lang="en-US" sz="1200" b="1" kern="0" spc="400" dirty="0">
+            <a:pPr indent="0" marL="0">
+              <a:buNone/>
+            </a:pPr>
+            <a:r>
+              <a:rPr lang="en-US" sz="1200" b="1" spc="400" kern="0" dirty="0">
                 <a:solidFill>
                   <a:srgbClr val="FFFFFF"/>
                 </a:solidFill>
@@ -14447,7 +14923,7 @@
           <a:bodyPr wrap="square" lIns="0" tIns="0" rIns="0" bIns="0" rtlCol="0" anchor="ctr"/>
           <a:lstStyle/>
           <a:p>
-            <a:pPr marL="0" indent="0">
+            <a:pPr indent="0" marL="0">
               <a:buNone/>
             </a:pPr>
             <a:r>
@@ -14486,7 +14962,7 @@
           <a:bodyPr wrap="square" lIns="0" tIns="0" rIns="0" bIns="0" rtlCol="0" anchor="t"/>
           <a:lstStyle/>
           <a:p>
-            <a:pPr marL="0" indent="0">
+            <a:pPr indent="0" marL="0">
               <a:buNone/>
             </a:pPr>
             <a:r>
@@ -14572,7 +15048,7 @@
           <a:bodyPr wrap="square" lIns="0" tIns="0" rIns="0" bIns="0" rtlCol="0" anchor="ctr"/>
           <a:lstStyle/>
           <a:p>
-            <a:pPr marL="0" indent="0">
+            <a:pPr indent="0" marL="0">
               <a:buNone/>
             </a:pPr>
             <a:r>
@@ -14638,11 +15114,11 @@
           <a:bodyPr wrap="square" lIns="0" tIns="0" rIns="0" bIns="0" rtlCol="0" anchor="ctr"/>
           <a:lstStyle/>
           <a:p>
-            <a:pPr marL="0" indent="0" algn="ctr">
-              <a:buNone/>
-            </a:pPr>
-            <a:r>
-              <a:rPr lang="en-US" sz="900" b="1" kern="0" spc="100" dirty="0">
+            <a:pPr algn="ctr" indent="0" marL="0">
+              <a:buNone/>
+            </a:pPr>
+            <a:r>
+              <a:rPr lang="en-US" sz="900" b="1" spc="100" kern="0" dirty="0">
                 <a:solidFill>
                   <a:srgbClr val="1A4FBF"/>
                 </a:solidFill>
@@ -14658,14 +15134,14 @@
       </p:sp>
       <p:pic>
         <p:nvPicPr>
-          <p:cNvPr id="6" name="Image 0" descr="preencoded.png"/>
+          <p:cNvPr id="6" name="Image 0" descr="preencoded.png">    </p:cNvPr>
           <p:cNvPicPr>
             <a:picLocks noChangeAspect="1"/>
           </p:cNvPicPr>
           <p:nvPr/>
         </p:nvPicPr>
         <p:blipFill>
-          <a:blip r:embed="rId3"/>
+          <a:blip r:embed="rId1"/>
           <a:stretch>
             <a:fillRect/>
           </a:stretch>
@@ -14723,7 +15199,7 @@
           <a:bodyPr wrap="square" lIns="0" tIns="0" rIns="0" bIns="0" rtlCol="0" anchor="ctr"/>
           <a:lstStyle/>
           <a:p>
-            <a:pPr marL="0" indent="0">
+            <a:pPr indent="0" marL="0">
               <a:buNone/>
             </a:pPr>
             <a:r>
@@ -14762,7 +15238,7 @@
           <a:bodyPr wrap="square" lIns="0" tIns="0" rIns="0" bIns="0" rtlCol="0" anchor="t"/>
           <a:lstStyle/>
           <a:p>
-            <a:pPr marL="0" indent="0">
+            <a:pPr indent="0" marL="0">
               <a:lnSpc>
                 <a:spcPct val="108000"/>
               </a:lnSpc>
@@ -14826,7 +15302,7 @@
           <a:bodyPr wrap="square" lIns="0" tIns="0" rIns="0" bIns="0" rtlCol="0" anchor="ctr"/>
           <a:lstStyle/>
           <a:p>
-            <a:pPr marL="0" indent="0">
+            <a:pPr indent="0" marL="0">
               <a:buNone/>
             </a:pPr>
             <a:r>
@@ -14865,7 +15341,7 @@
           <a:bodyPr wrap="square" lIns="0" tIns="0" rIns="0" bIns="0" rtlCol="0" anchor="t"/>
           <a:lstStyle/>
           <a:p>
-            <a:pPr marL="0" indent="0">
+            <a:pPr indent="0" marL="0">
               <a:lnSpc>
                 <a:spcPct val="108000"/>
               </a:lnSpc>
@@ -14929,7 +15405,7 @@
           <a:bodyPr wrap="square" lIns="0" tIns="0" rIns="0" bIns="0" rtlCol="0" anchor="ctr"/>
           <a:lstStyle/>
           <a:p>
-            <a:pPr marL="0" indent="0">
+            <a:pPr indent="0" marL="0">
               <a:buNone/>
             </a:pPr>
             <a:r>
@@ -14968,7 +15444,7 @@
           <a:bodyPr wrap="square" lIns="0" tIns="0" rIns="0" bIns="0" rtlCol="0" anchor="t"/>
           <a:lstStyle/>
           <a:p>
-            <a:pPr marL="0" indent="0">
+            <a:pPr indent="0" marL="0">
               <a:lnSpc>
                 <a:spcPct val="108000"/>
               </a:lnSpc>
@@ -15037,7 +15513,7 @@
           <a:bodyPr wrap="square" lIns="0" tIns="0" rIns="0" bIns="0" rtlCol="0" anchor="ctr"/>
           <a:lstStyle/>
           <a:p>
-            <a:pPr marL="0" indent="0">
+            <a:pPr indent="0" marL="0">
               <a:lnSpc>
                 <a:spcPct val="112000"/>
               </a:lnSpc>
@@ -15078,7 +15554,7 @@
           </a:prstGeom>
           <a:extLst>
             <a:ext uri="{C572A759-6A51-4108-AA02-DFA0A04FC94B}">
-              <ma14:wrappingTextBoxFlag xmlns:ma14="http://schemas.microsoft.com/office/mac/drawingml/2011/main" xmlns="" val="0"/>
+              <ma14:wrappingTextBoxFlag xmlns:ma14="http://schemas.microsoft.com/office/mac/drawingml/2011/main" val="0"/>
             </a:ext>
           </a:extLst>
         </p:spPr>
@@ -15099,7 +15575,7 @@
           <a:p>
             <a:pPr algn="l"/>
             <a:fld id="{F7021451-1387-4CA6-816F-3879F97B5CBC}" type="slidenum">
-              <a:rPr lang="en-US" b="0"/>
+              <a:rPr b="0" lang="en-US"/>
               <a:t>22</a:t>
             </a:fld>
             <a:endParaRPr lang="en-US"/>
@@ -15174,7 +15650,7 @@
           <a:bodyPr wrap="square" lIns="0" tIns="0" rIns="0" bIns="0" rtlCol="0" anchor="ctr"/>
           <a:lstStyle/>
           <a:p>
-            <a:pPr marL="0" indent="0">
+            <a:pPr indent="0" marL="0">
               <a:buNone/>
             </a:pPr>
             <a:r>
@@ -15240,11 +15716,11 @@
           <a:bodyPr wrap="square" lIns="0" tIns="0" rIns="0" bIns="0" rtlCol="0" anchor="ctr"/>
           <a:lstStyle/>
           <a:p>
-            <a:pPr marL="0" indent="0" algn="ctr">
-              <a:buNone/>
-            </a:pPr>
-            <a:r>
-              <a:rPr lang="en-US" sz="900" b="1" kern="0" spc="100" dirty="0">
+            <a:pPr algn="ctr" indent="0" marL="0">
+              <a:buNone/>
+            </a:pPr>
+            <a:r>
+              <a:rPr lang="en-US" sz="900" b="1" spc="100" kern="0" dirty="0">
                 <a:solidFill>
                   <a:srgbClr val="1A4FBF"/>
                 </a:solidFill>
@@ -15260,14 +15736,14 @@
       </p:sp>
       <p:pic>
         <p:nvPicPr>
-          <p:cNvPr id="6" name="Image 0" descr="preencoded.png"/>
+          <p:cNvPr id="6" name="Image 0" descr="preencoded.png">    </p:cNvPr>
           <p:cNvPicPr>
             <a:picLocks noChangeAspect="1"/>
           </p:cNvPicPr>
           <p:nvPr/>
         </p:nvPicPr>
         <p:blipFill>
-          <a:blip r:embed="rId3"/>
+          <a:blip r:embed="rId1"/>
           <a:stretch>
             <a:fillRect/>
           </a:stretch>
@@ -15397,7 +15873,7 @@
           <a:bodyPr wrap="square" lIns="0" tIns="0" rIns="0" bIns="0" rtlCol="0" anchor="ctr"/>
           <a:lstStyle/>
           <a:p>
-            <a:pPr marL="0" indent="0">
+            <a:pPr indent="0" marL="0">
               <a:buNone/>
             </a:pPr>
             <a:r>
@@ -15503,7 +15979,7 @@
           <a:bodyPr wrap="square" lIns="0" tIns="0" rIns="0" bIns="0" rtlCol="0" anchor="ctr"/>
           <a:lstStyle/>
           <a:p>
-            <a:pPr marL="0" indent="0">
+            <a:pPr indent="0" marL="0">
               <a:buNone/>
             </a:pPr>
             <a:r>
@@ -15609,7 +16085,7 @@
           <a:bodyPr wrap="square" lIns="0" tIns="0" rIns="0" bIns="0" rtlCol="0" anchor="ctr"/>
           <a:lstStyle/>
           <a:p>
-            <a:pPr marL="0" indent="0">
+            <a:pPr indent="0" marL="0">
               <a:buNone/>
             </a:pPr>
             <a:r>
@@ -15715,7 +16191,7 @@
           <a:bodyPr wrap="square" lIns="0" tIns="0" rIns="0" bIns="0" rtlCol="0" anchor="ctr"/>
           <a:lstStyle/>
           <a:p>
-            <a:pPr marL="0" indent="0">
+            <a:pPr indent="0" marL="0">
               <a:buNone/>
             </a:pPr>
             <a:r>
@@ -15821,7 +16297,7 @@
           <a:bodyPr wrap="square" lIns="0" tIns="0" rIns="0" bIns="0" rtlCol="0" anchor="ctr"/>
           <a:lstStyle/>
           <a:p>
-            <a:pPr marL="0" indent="0">
+            <a:pPr indent="0" marL="0">
               <a:buNone/>
             </a:pPr>
             <a:r>
@@ -15860,7 +16336,7 @@
           <a:bodyPr wrap="square" lIns="0" tIns="0" rIns="0" bIns="0" rtlCol="0" anchor="ctr"/>
           <a:lstStyle/>
           <a:p>
-            <a:pPr marL="0" indent="0">
+            <a:pPr indent="0" marL="0">
               <a:buNone/>
             </a:pPr>
             <a:r>
@@ -15880,7 +16356,7 @@
       </p:sp>
       <p:sp>
         <p:nvSpPr>
-          <p:cNvPr id="29" name="Slide Number Placeholder 0"/>
+          <p:cNvPr id="25" name="Slide Number Placeholder 0"/>
           <p:cNvSpPr>
             <a:spLocks noGrp="1"/>
           </p:cNvSpPr>
@@ -15898,7 +16374,7 @@
           </a:prstGeom>
           <a:extLst>
             <a:ext uri="{C572A759-6A51-4108-AA02-DFA0A04FC94B}">
-              <ma14:wrappingTextBoxFlag xmlns:ma14="http://schemas.microsoft.com/office/mac/drawingml/2011/main" xmlns="" val="0"/>
+              <ma14:wrappingTextBoxFlag xmlns:ma14="http://schemas.microsoft.com/office/mac/drawingml/2011/main" val="0"/>
             </a:ext>
           </a:extLst>
         </p:spPr>
@@ -15919,7 +16395,7 @@
           <a:p>
             <a:pPr algn="l"/>
             <a:fld id="{F7021451-1387-4CA6-816F-3879F97B5CBC}" type="slidenum">
-              <a:rPr lang="en-US" b="0"/>
+              <a:rPr b="0" lang="en-US"/>
               <a:t>23</a:t>
             </a:fld>
             <a:endParaRPr lang="en-US"/>
@@ -15994,7 +16470,7 @@
           <a:bodyPr wrap="square" lIns="0" tIns="0" rIns="0" bIns="0" rtlCol="0" anchor="ctr"/>
           <a:lstStyle/>
           <a:p>
-            <a:pPr marL="0" indent="0">
+            <a:pPr indent="0" marL="0">
               <a:buNone/>
             </a:pPr>
             <a:r>
@@ -16060,11 +16536,11 @@
           <a:bodyPr wrap="square" lIns="0" tIns="0" rIns="0" bIns="0" rtlCol="0" anchor="ctr"/>
           <a:lstStyle/>
           <a:p>
-            <a:pPr marL="0" indent="0" algn="ctr">
-              <a:buNone/>
-            </a:pPr>
-            <a:r>
-              <a:rPr lang="en-US" sz="900" b="1" kern="0" spc="100" dirty="0">
+            <a:pPr algn="ctr" indent="0" marL="0">
+              <a:buNone/>
+            </a:pPr>
+            <a:r>
+              <a:rPr lang="en-US" sz="900" b="1" spc="100" kern="0" dirty="0">
                 <a:solidFill>
                   <a:srgbClr val="1A4FBF"/>
                 </a:solidFill>
@@ -16080,14 +16556,14 @@
       </p:sp>
       <p:pic>
         <p:nvPicPr>
-          <p:cNvPr id="6" name="Image 0" descr="preencoded.png"/>
+          <p:cNvPr id="6" name="Image 0" descr="preencoded.png">    </p:cNvPr>
           <p:cNvPicPr>
             <a:picLocks noChangeAspect="1"/>
           </p:cNvPicPr>
           <p:nvPr/>
         </p:nvPicPr>
         <p:blipFill>
-          <a:blip r:embed="rId3"/>
+          <a:blip r:embed="rId1"/>
           <a:stretch>
             <a:fillRect/>
           </a:stretch>
@@ -16215,7 +16691,7 @@
           <a:bodyPr wrap="square" lIns="0" tIns="0" rIns="0" bIns="0" rtlCol="0" anchor="ctr"/>
           <a:lstStyle/>
           <a:p>
-            <a:pPr marL="0" indent="0">
+            <a:pPr indent="0" marL="0">
               <a:buNone/>
             </a:pPr>
             <a:r>
@@ -16229,6 +16705,9 @@
               </a:rPr>
               <a:t>Expect на цілу фразу   </a:t>
             </a:r>
+            <a:pPr indent="0" marL="0">
+              <a:buNone/>
+            </a:pPr>
             <a:r>
               <a:rPr lang="en-US" sz="1150" dirty="0">
                 <a:solidFill>
@@ -16357,7 +16836,7 @@
           <a:bodyPr wrap="square" lIns="0" tIns="0" rIns="0" bIns="0" rtlCol="0" anchor="ctr"/>
           <a:lstStyle/>
           <a:p>
-            <a:pPr marL="0" indent="0">
+            <a:pPr indent="0" marL="0">
               <a:buNone/>
             </a:pPr>
             <a:r>
@@ -16371,6 +16850,9 @@
               </a:rPr>
               <a:t>Датасет, який не росте   </a:t>
             </a:r>
+            <a:pPr indent="0" marL="0">
+              <a:buNone/>
+            </a:pPr>
             <a:r>
               <a:rPr lang="en-US" sz="1150" dirty="0">
                 <a:solidFill>
@@ -16499,7 +16981,7 @@
           <a:bodyPr wrap="square" lIns="0" tIns="0" rIns="0" bIns="0" rtlCol="0" anchor="ctr"/>
           <a:lstStyle/>
           <a:p>
-            <a:pPr marL="0" indent="0">
+            <a:pPr indent="0" marL="0">
               <a:buNone/>
             </a:pPr>
             <a:r>
@@ -16513,6 +16995,9 @@
               </a:rPr>
               <a:t>Поріг «щоб позеленіло»   </a:t>
             </a:r>
+            <a:pPr indent="0" marL="0">
+              <a:buNone/>
+            </a:pPr>
             <a:r>
               <a:rPr lang="en-US" sz="1150" dirty="0">
                 <a:solidFill>
@@ -16641,7 +17126,7 @@
           <a:bodyPr wrap="square" lIns="0" tIns="0" rIns="0" bIns="0" rtlCol="0" anchor="ctr"/>
           <a:lstStyle/>
           <a:p>
-            <a:pPr marL="0" indent="0">
+            <a:pPr indent="0" marL="0">
               <a:buNone/>
             </a:pPr>
             <a:r>
@@ -16655,6 +17140,9 @@
               </a:rPr>
               <a:t>Перезапускати, поки не пройде   </a:t>
             </a:r>
+            <a:pPr indent="0" marL="0">
+              <a:buNone/>
+            </a:pPr>
             <a:r>
               <a:rPr lang="en-US" sz="1150" dirty="0">
                 <a:solidFill>
@@ -16783,7 +17271,7 @@
           <a:bodyPr wrap="square" lIns="0" tIns="0" rIns="0" bIns="0" rtlCol="0" anchor="ctr"/>
           <a:lstStyle/>
           <a:p>
-            <a:pPr marL="0" indent="0">
+            <a:pPr indent="0" marL="0">
               <a:buNone/>
             </a:pPr>
             <a:r>
@@ -16797,6 +17285,9 @@
               </a:rPr>
               <a:t>Judge замість правил   </a:t>
             </a:r>
+            <a:pPr indent="0" marL="0">
+              <a:buNone/>
+            </a:pPr>
             <a:r>
               <a:rPr lang="en-US" sz="1150" dirty="0">
                 <a:solidFill>
@@ -16814,7 +17305,7 @@
       </p:sp>
       <p:sp>
         <p:nvSpPr>
-          <p:cNvPr id="32" name="Slide Number Placeholder 0"/>
+          <p:cNvPr id="25" name="Slide Number Placeholder 0"/>
           <p:cNvSpPr>
             <a:spLocks noGrp="1"/>
           </p:cNvSpPr>
@@ -16832,7 +17323,7 @@
           </a:prstGeom>
           <a:extLst>
             <a:ext uri="{C572A759-6A51-4108-AA02-DFA0A04FC94B}">
-              <ma14:wrappingTextBoxFlag xmlns:ma14="http://schemas.microsoft.com/office/mac/drawingml/2011/main" xmlns="" val="0"/>
+              <ma14:wrappingTextBoxFlag xmlns:ma14="http://schemas.microsoft.com/office/mac/drawingml/2011/main" val="0"/>
             </a:ext>
           </a:extLst>
         </p:spPr>
@@ -16853,7 +17344,7 @@
           <a:p>
             <a:pPr algn="l"/>
             <a:fld id="{F7021451-1387-4CA6-816F-3879F97B5CBC}" type="slidenum">
-              <a:rPr lang="en-US" b="0"/>
+              <a:rPr b="0" lang="en-US"/>
               <a:t>24</a:t>
             </a:fld>
             <a:endParaRPr lang="en-US"/>
@@ -16928,7 +17419,7 @@
           <a:bodyPr wrap="square" lIns="0" tIns="0" rIns="0" bIns="0" rtlCol="0" anchor="ctr"/>
           <a:lstStyle/>
           <a:p>
-            <a:pPr marL="0" indent="0">
+            <a:pPr indent="0" marL="0">
               <a:buNone/>
             </a:pPr>
             <a:r>
@@ -16989,11 +17480,11 @@
           <a:bodyPr wrap="square" lIns="0" tIns="0" rIns="0" bIns="0" rtlCol="0" anchor="ctr"/>
           <a:lstStyle/>
           <a:p>
-            <a:pPr marL="0" indent="0" algn="ctr">
-              <a:buNone/>
-            </a:pPr>
-            <a:r>
-              <a:rPr lang="en-US" sz="900" b="1" kern="0" spc="100" dirty="0">
+            <a:pPr algn="ctr" indent="0" marL="0">
+              <a:buNone/>
+            </a:pPr>
+            <a:r>
+              <a:rPr lang="en-US" sz="900" b="1" spc="100" kern="0" dirty="0">
                 <a:solidFill>
                   <a:srgbClr val="FFFFFF"/>
                 </a:solidFill>
@@ -17009,14 +17500,14 @@
       </p:sp>
       <p:pic>
         <p:nvPicPr>
-          <p:cNvPr id="6" name="Image 0" descr="preencoded.png"/>
+          <p:cNvPr id="6" name="Image 0" descr="preencoded.png">    </p:cNvPr>
           <p:cNvPicPr>
             <a:picLocks noChangeAspect="1"/>
           </p:cNvPicPr>
           <p:nvPr/>
         </p:nvPicPr>
         <p:blipFill>
-          <a:blip r:embed="rId3"/>
+          <a:blip r:embed="rId1"/>
           <a:stretch>
             <a:fillRect/>
           </a:stretch>
@@ -17079,7 +17570,7 @@
           <a:bodyPr wrap="square" lIns="0" tIns="0" rIns="0" bIns="0" rtlCol="0" anchor="ctr"/>
           <a:lstStyle/>
           <a:p>
-            <a:pPr marL="0" indent="0">
+            <a:pPr indent="0" marL="0">
               <a:buNone/>
             </a:pPr>
             <a:r>
@@ -17118,7 +17609,7 @@
           <a:bodyPr wrap="square" lIns="0" tIns="0" rIns="0" bIns="0" rtlCol="0" anchor="ctr"/>
           <a:lstStyle/>
           <a:p>
-            <a:pPr marL="0" indent="0">
+            <a:pPr indent="0" marL="0">
               <a:buNone/>
             </a:pPr>
             <a:r>
@@ -17157,11 +17648,11 @@
           <a:bodyPr wrap="square" lIns="0" tIns="0" rIns="0" bIns="0" rtlCol="0" anchor="ctr"/>
           <a:lstStyle/>
           <a:p>
-            <a:pPr marL="0" indent="0">
-              <a:buNone/>
-            </a:pPr>
-            <a:r>
-              <a:rPr lang="en-US" sz="950" b="1" kern="0" spc="100" dirty="0">
+            <a:pPr indent="0" marL="0">
+              <a:buNone/>
+            </a:pPr>
+            <a:r>
+              <a:rPr lang="en-US" sz="950" b="1" spc="100" kern="0" dirty="0">
                 <a:solidFill>
                   <a:srgbClr val="6B6B6B"/>
                 </a:solidFill>
@@ -17196,7 +17687,7 @@
           <a:bodyPr wrap="square" lIns="0" tIns="0" rIns="0" bIns="0" rtlCol="0" anchor="ctr"/>
           <a:lstStyle/>
           <a:p>
-            <a:pPr marL="0" indent="0">
+            <a:pPr indent="0" marL="0">
               <a:buNone/>
             </a:pPr>
             <a:r>
@@ -17210,6 +17701,9 @@
               </a:rPr>
               <a:t>•  </a:t>
             </a:r>
+            <a:pPr indent="0" marL="0">
+              <a:buNone/>
+            </a:pPr>
             <a:r>
               <a:rPr lang="en-US" sz="1250" dirty="0">
                 <a:solidFill>
@@ -17246,7 +17740,7 @@
           <a:bodyPr wrap="square" lIns="0" tIns="0" rIns="0" bIns="0" rtlCol="0" anchor="ctr"/>
           <a:lstStyle/>
           <a:p>
-            <a:pPr marL="0" indent="0">
+            <a:pPr indent="0" marL="0">
               <a:buNone/>
             </a:pPr>
             <a:r>
@@ -17260,6 +17754,9 @@
               </a:rPr>
               <a:t>•  </a:t>
             </a:r>
+            <a:pPr indent="0" marL="0">
+              <a:buNone/>
+            </a:pPr>
             <a:r>
               <a:rPr lang="en-US" sz="1250" dirty="0">
                 <a:solidFill>
@@ -17296,7 +17793,7 @@
           <a:bodyPr wrap="square" lIns="0" tIns="0" rIns="0" bIns="0" rtlCol="0" anchor="ctr"/>
           <a:lstStyle/>
           <a:p>
-            <a:pPr marL="0" indent="0">
+            <a:pPr indent="0" marL="0">
               <a:buNone/>
             </a:pPr>
             <a:r>
@@ -17310,6 +17807,9 @@
               </a:rPr>
               <a:t>•  </a:t>
             </a:r>
+            <a:pPr indent="0" marL="0">
+              <a:buNone/>
+            </a:pPr>
             <a:r>
               <a:rPr lang="en-US" sz="1250" dirty="0">
                 <a:solidFill>
@@ -17368,7 +17868,7 @@
           <a:bodyPr wrap="square" lIns="0" tIns="0" rIns="0" bIns="0" rtlCol="0" anchor="ctr"/>
           <a:lstStyle/>
           <a:p>
-            <a:pPr marL="0" indent="0">
+            <a:pPr indent="0" marL="0">
               <a:buNone/>
             </a:pPr>
             <a:r>
@@ -17407,7 +17907,7 @@
           <a:bodyPr wrap="square" lIns="0" tIns="0" rIns="0" bIns="0" rtlCol="0" anchor="t"/>
           <a:lstStyle/>
           <a:p>
-            <a:pPr marL="0" indent="0">
+            <a:pPr indent="0" marL="0">
               <a:lnSpc>
                 <a:spcPct val="108000"/>
               </a:lnSpc>
@@ -17427,7 +17927,7 @@
             <a:endParaRPr lang="en-US" sz="1200" dirty="0"/>
           </a:p>
           <a:p>
-            <a:pPr marL="0" indent="0">
+            <a:pPr indent="0" marL="0">
               <a:lnSpc>
                 <a:spcPct val="108000"/>
               </a:lnSpc>
@@ -17468,7 +17968,7 @@
           </a:prstGeom>
           <a:extLst>
             <a:ext uri="{C572A759-6A51-4108-AA02-DFA0A04FC94B}">
-              <ma14:wrappingTextBoxFlag xmlns:ma14="http://schemas.microsoft.com/office/mac/drawingml/2011/main" xmlns="" val="0"/>
+              <ma14:wrappingTextBoxFlag xmlns:ma14="http://schemas.microsoft.com/office/mac/drawingml/2011/main" val="0"/>
             </a:ext>
           </a:extLst>
         </p:spPr>
@@ -17489,7 +17989,7 @@
           <a:p>
             <a:pPr algn="l"/>
             <a:fld id="{F7021451-1387-4CA6-816F-3879F97B5CBC}" type="slidenum">
-              <a:rPr lang="en-US" b="0"/>
+              <a:rPr b="0" lang="en-US"/>
               <a:t>25</a:t>
             </a:fld>
             <a:endParaRPr lang="en-US"/>
@@ -17542,11 +18042,11 @@
           <a:bodyPr wrap="square" lIns="0" tIns="0" rIns="0" bIns="0" rtlCol="0" anchor="ctr"/>
           <a:lstStyle/>
           <a:p>
-            <a:pPr marL="0" indent="0">
-              <a:buNone/>
-            </a:pPr>
-            <a:r>
-              <a:rPr lang="en-US" sz="1200" b="1" kern="0" spc="400" dirty="0">
+            <a:pPr indent="0" marL="0">
+              <a:buNone/>
+            </a:pPr>
+            <a:r>
+              <a:rPr lang="en-US" sz="1200" b="1" spc="400" kern="0" dirty="0">
                 <a:solidFill>
                   <a:srgbClr val="FFFFFF"/>
                 </a:solidFill>
@@ -17581,11 +18081,11 @@
           <a:bodyPr wrap="square" lIns="0" tIns="0" rIns="0" bIns="0" rtlCol="0" anchor="ctr"/>
           <a:lstStyle/>
           <a:p>
-            <a:pPr marL="0" indent="0">
-              <a:buNone/>
-            </a:pPr>
-            <a:r>
-              <a:rPr lang="en-US" sz="1100" b="1" kern="0" spc="300" dirty="0">
+            <a:pPr indent="0" marL="0">
+              <a:buNone/>
+            </a:pPr>
+            <a:r>
+              <a:rPr lang="en-US" sz="1100" b="1" spc="300" kern="0" dirty="0">
                 <a:solidFill>
                   <a:srgbClr val="C4B3F5"/>
                 </a:solidFill>
@@ -17640,7 +18140,7 @@
           <a:bodyPr wrap="square" lIns="0" tIns="0" rIns="0" bIns="0" rtlCol="0" anchor="t"/>
           <a:lstStyle/>
           <a:p>
-            <a:pPr marL="0" indent="0">
+            <a:pPr indent="0" marL="0">
               <a:lnSpc>
                 <a:spcPct val="110000"/>
               </a:lnSpc>
@@ -17702,7 +18202,7 @@
           <a:bodyPr wrap="square" lIns="0" tIns="0" rIns="0" bIns="0" rtlCol="0" anchor="t"/>
           <a:lstStyle/>
           <a:p>
-            <a:pPr marL="0" indent="0">
+            <a:pPr indent="0" marL="0">
               <a:lnSpc>
                 <a:spcPct val="110000"/>
               </a:lnSpc>
@@ -17764,7 +18264,7 @@
           <a:bodyPr wrap="square" lIns="0" tIns="0" rIns="0" bIns="0" rtlCol="0" anchor="t"/>
           <a:lstStyle/>
           <a:p>
-            <a:pPr marL="0" indent="0">
+            <a:pPr indent="0" marL="0">
               <a:lnSpc>
                 <a:spcPct val="110000"/>
               </a:lnSpc>
@@ -17826,7 +18326,7 @@
           <a:bodyPr wrap="square" lIns="0" tIns="0" rIns="0" bIns="0" rtlCol="0" anchor="t"/>
           <a:lstStyle/>
           <a:p>
-            <a:pPr marL="0" indent="0">
+            <a:pPr indent="0" marL="0">
               <a:lnSpc>
                 <a:spcPct val="110000"/>
               </a:lnSpc>
@@ -17888,7 +18388,7 @@
           <a:bodyPr wrap="square" lIns="0" tIns="0" rIns="0" bIns="0" rtlCol="0" anchor="t"/>
           <a:lstStyle/>
           <a:p>
-            <a:pPr marL="0" indent="0">
+            <a:pPr indent="0" marL="0">
               <a:lnSpc>
                 <a:spcPct val="110000"/>
               </a:lnSpc>
@@ -17957,7 +18457,7 @@
           <a:bodyPr wrap="square" lIns="0" tIns="0" rIns="0" bIns="0" rtlCol="0" anchor="ctr"/>
           <a:lstStyle/>
           <a:p>
-            <a:pPr marL="0" indent="0">
+            <a:pPr indent="0" marL="0">
               <a:buNone/>
             </a:pPr>
             <a:r>
@@ -17996,7 +18496,7 @@
           <a:bodyPr wrap="square" lIns="0" tIns="0" rIns="0" bIns="0" rtlCol="0" anchor="t"/>
           <a:lstStyle/>
           <a:p>
-            <a:pPr marL="0" indent="0">
+            <a:pPr indent="0" marL="0">
               <a:lnSpc>
                 <a:spcPct val="115000"/>
               </a:lnSpc>
@@ -18063,11 +18563,11 @@
           <a:bodyPr wrap="square" lIns="0" tIns="0" rIns="0" bIns="0" rtlCol="0" anchor="ctr"/>
           <a:lstStyle/>
           <a:p>
-            <a:pPr marL="0" indent="0">
-              <a:buNone/>
-            </a:pPr>
-            <a:r>
-              <a:rPr lang="en-US" sz="1200" b="1" kern="0" spc="400" dirty="0">
+            <a:pPr indent="0" marL="0">
+              <a:buNone/>
+            </a:pPr>
+            <a:r>
+              <a:rPr lang="en-US" sz="1200" b="1" spc="400" kern="0" dirty="0">
                 <a:solidFill>
                   <a:srgbClr val="FFFFFF"/>
                 </a:solidFill>
@@ -18102,7 +18602,7 @@
           <a:bodyPr wrap="square" lIns="0" tIns="0" rIns="0" bIns="0" rtlCol="0" anchor="ctr"/>
           <a:lstStyle/>
           <a:p>
-            <a:pPr marL="0" indent="0">
+            <a:pPr indent="0" marL="0">
               <a:buNone/>
             </a:pPr>
             <a:r>
@@ -18188,7 +18688,7 @@
           <a:bodyPr wrap="square" lIns="0" tIns="0" rIns="0" bIns="0" rtlCol="0" anchor="ctr"/>
           <a:lstStyle/>
           <a:p>
-            <a:pPr marL="0" indent="0">
+            <a:pPr indent="0" marL="0">
               <a:buNone/>
             </a:pPr>
             <a:r>
@@ -18254,11 +18754,11 @@
           <a:bodyPr wrap="square" lIns="0" tIns="0" rIns="0" bIns="0" rtlCol="0" anchor="ctr"/>
           <a:lstStyle/>
           <a:p>
-            <a:pPr marL="0" indent="0" algn="ctr">
-              <a:buNone/>
-            </a:pPr>
-            <a:r>
-              <a:rPr lang="en-US" sz="900" b="1" kern="0" spc="100" dirty="0">
+            <a:pPr algn="ctr" indent="0" marL="0">
+              <a:buNone/>
+            </a:pPr>
+            <a:r>
+              <a:rPr lang="en-US" sz="900" b="1" spc="100" kern="0" dirty="0">
                 <a:solidFill>
                   <a:srgbClr val="5A05F4"/>
                 </a:solidFill>
@@ -18274,14 +18774,14 @@
       </p:sp>
       <p:pic>
         <p:nvPicPr>
-          <p:cNvPr id="6" name="Image 0" descr="preencoded.png"/>
+          <p:cNvPr id="6" name="Image 0" descr="preencoded.png">    </p:cNvPr>
           <p:cNvPicPr>
             <a:picLocks noChangeAspect="1"/>
           </p:cNvPicPr>
           <p:nvPr/>
         </p:nvPicPr>
         <p:blipFill>
-          <a:blip r:embed="rId3"/>
+          <a:blip r:embed="rId1"/>
           <a:stretch>
             <a:fillRect/>
           </a:stretch>
@@ -18359,7 +18859,7 @@
           <a:bodyPr wrap="square" lIns="0" tIns="0" rIns="0" bIns="0" rtlCol="0" anchor="ctr"/>
           <a:lstStyle/>
           <a:p>
-            <a:pPr marL="0" indent="0" algn="ctr">
+            <a:pPr algn="ctr" indent="0" marL="0">
               <a:buNone/>
             </a:pPr>
             <a:r>
@@ -18398,7 +18898,7 @@
           <a:bodyPr wrap="square" lIns="0" tIns="0" rIns="0" bIns="0" rtlCol="0" anchor="ctr"/>
           <a:lstStyle/>
           <a:p>
-            <a:pPr marL="0" indent="0">
+            <a:pPr indent="0" marL="0">
               <a:buNone/>
             </a:pPr>
             <a:r>
@@ -18479,7 +18979,7 @@
           <a:bodyPr wrap="square" lIns="0" tIns="0" rIns="0" bIns="0" rtlCol="0" anchor="ctr"/>
           <a:lstStyle/>
           <a:p>
-            <a:pPr marL="0" indent="0" algn="ctr">
+            <a:pPr algn="ctr" indent="0" marL="0">
               <a:buNone/>
             </a:pPr>
             <a:r>
@@ -18518,7 +19018,7 @@
           <a:bodyPr wrap="square" lIns="0" tIns="0" rIns="0" bIns="0" rtlCol="0" anchor="ctr"/>
           <a:lstStyle/>
           <a:p>
-            <a:pPr marL="0" indent="0">
+            <a:pPr indent="0" marL="0">
               <a:buNone/>
             </a:pPr>
             <a:r>
@@ -18599,7 +19099,7 @@
           <a:bodyPr wrap="square" lIns="0" tIns="0" rIns="0" bIns="0" rtlCol="0" anchor="ctr"/>
           <a:lstStyle/>
           <a:p>
-            <a:pPr marL="0" indent="0" algn="ctr">
+            <a:pPr algn="ctr" indent="0" marL="0">
               <a:buNone/>
             </a:pPr>
             <a:r>
@@ -18638,7 +19138,7 @@
           <a:bodyPr wrap="square" lIns="0" tIns="0" rIns="0" bIns="0" rtlCol="0" anchor="ctr"/>
           <a:lstStyle/>
           <a:p>
-            <a:pPr marL="0" indent="0">
+            <a:pPr indent="0" marL="0">
               <a:buNone/>
             </a:pPr>
             <a:r>
@@ -18719,7 +19219,7 @@
           <a:bodyPr wrap="square" lIns="0" tIns="0" rIns="0" bIns="0" rtlCol="0" anchor="ctr"/>
           <a:lstStyle/>
           <a:p>
-            <a:pPr marL="0" indent="0" algn="ctr">
+            <a:pPr algn="ctr" indent="0" marL="0">
               <a:buNone/>
             </a:pPr>
             <a:r>
@@ -18758,7 +19258,7 @@
           <a:bodyPr wrap="square" lIns="0" tIns="0" rIns="0" bIns="0" rtlCol="0" anchor="ctr"/>
           <a:lstStyle/>
           <a:p>
-            <a:pPr marL="0" indent="0">
+            <a:pPr indent="0" marL="0">
               <a:buNone/>
             </a:pPr>
             <a:r>
@@ -18839,7 +19339,7 @@
           <a:bodyPr wrap="square" lIns="0" tIns="0" rIns="0" bIns="0" rtlCol="0" anchor="ctr"/>
           <a:lstStyle/>
           <a:p>
-            <a:pPr marL="0" indent="0" algn="ctr">
+            <a:pPr algn="ctr" indent="0" marL="0">
               <a:buNone/>
             </a:pPr>
             <a:r>
@@ -18878,7 +19378,7 @@
           <a:bodyPr wrap="square" lIns="0" tIns="0" rIns="0" bIns="0" rtlCol="0" anchor="ctr"/>
           <a:lstStyle/>
           <a:p>
-            <a:pPr marL="0" indent="0">
+            <a:pPr indent="0" marL="0">
               <a:buNone/>
             </a:pPr>
             <a:r>
@@ -18959,7 +19459,7 @@
           <a:bodyPr wrap="square" lIns="0" tIns="0" rIns="0" bIns="0" rtlCol="0" anchor="ctr"/>
           <a:lstStyle/>
           <a:p>
-            <a:pPr marL="0" indent="0" algn="ctr">
+            <a:pPr algn="ctr" indent="0" marL="0">
               <a:buNone/>
             </a:pPr>
             <a:r>
@@ -18998,7 +19498,7 @@
           <a:bodyPr wrap="square" lIns="0" tIns="0" rIns="0" bIns="0" rtlCol="0" anchor="ctr"/>
           <a:lstStyle/>
           <a:p>
-            <a:pPr marL="0" indent="0">
+            <a:pPr indent="0" marL="0">
               <a:buNone/>
             </a:pPr>
             <a:r>
@@ -19079,7 +19579,7 @@
           <a:bodyPr wrap="square" lIns="0" tIns="0" rIns="0" bIns="0" rtlCol="0" anchor="ctr"/>
           <a:lstStyle/>
           <a:p>
-            <a:pPr marL="0" indent="0" algn="ctr">
+            <a:pPr algn="ctr" indent="0" marL="0">
               <a:buNone/>
             </a:pPr>
             <a:r>
@@ -19118,7 +19618,7 @@
           <a:bodyPr wrap="square" lIns="0" tIns="0" rIns="0" bIns="0" rtlCol="0" anchor="ctr"/>
           <a:lstStyle/>
           <a:p>
-            <a:pPr marL="0" indent="0">
+            <a:pPr indent="0" marL="0">
               <a:buNone/>
             </a:pPr>
             <a:r>
@@ -19199,7 +19699,7 @@
           <a:bodyPr wrap="square" lIns="0" tIns="0" rIns="0" bIns="0" rtlCol="0" anchor="ctr"/>
           <a:lstStyle/>
           <a:p>
-            <a:pPr marL="0" indent="0" algn="ctr">
+            <a:pPr algn="ctr" indent="0" marL="0">
               <a:buNone/>
             </a:pPr>
             <a:r>
@@ -19238,7 +19738,7 @@
           <a:bodyPr wrap="square" lIns="0" tIns="0" rIns="0" bIns="0" rtlCol="0" anchor="ctr"/>
           <a:lstStyle/>
           <a:p>
-            <a:pPr marL="0" indent="0">
+            <a:pPr indent="0" marL="0">
               <a:buNone/>
             </a:pPr>
             <a:r>
@@ -19319,7 +19819,7 @@
           <a:bodyPr wrap="square" lIns="0" tIns="0" rIns="0" bIns="0" rtlCol="0" anchor="ctr"/>
           <a:lstStyle/>
           <a:p>
-            <a:pPr marL="0" indent="0" algn="ctr">
+            <a:pPr algn="ctr" indent="0" marL="0">
               <a:buNone/>
             </a:pPr>
             <a:r>
@@ -19358,7 +19858,7 @@
           <a:bodyPr wrap="square" lIns="0" tIns="0" rIns="0" bIns="0" rtlCol="0" anchor="ctr"/>
           <a:lstStyle/>
           <a:p>
-            <a:pPr marL="0" indent="0">
+            <a:pPr indent="0" marL="0">
               <a:buNone/>
             </a:pPr>
             <a:r>
@@ -19439,7 +19939,7 @@
           <a:bodyPr wrap="square" lIns="0" tIns="0" rIns="0" bIns="0" rtlCol="0" anchor="ctr"/>
           <a:lstStyle/>
           <a:p>
-            <a:pPr marL="0" indent="0" algn="ctr">
+            <a:pPr algn="ctr" indent="0" marL="0">
               <a:buNone/>
             </a:pPr>
             <a:r>
@@ -19478,7 +19978,7 @@
           <a:bodyPr wrap="square" lIns="0" tIns="0" rIns="0" bIns="0" rtlCol="0" anchor="ctr"/>
           <a:lstStyle/>
           <a:p>
-            <a:pPr marL="0" indent="0">
+            <a:pPr indent="0" marL="0">
               <a:buNone/>
             </a:pPr>
             <a:r>
@@ -19559,7 +20059,7 @@
           <a:bodyPr wrap="square" lIns="0" tIns="0" rIns="0" bIns="0" rtlCol="0" anchor="ctr"/>
           <a:lstStyle/>
           <a:p>
-            <a:pPr marL="0" indent="0" algn="ctr">
+            <a:pPr algn="ctr" indent="0" marL="0">
               <a:buNone/>
             </a:pPr>
             <a:r>
@@ -19598,7 +20098,7 @@
           <a:bodyPr wrap="square" lIns="0" tIns="0" rIns="0" bIns="0" rtlCol="0" anchor="ctr"/>
           <a:lstStyle/>
           <a:p>
-            <a:pPr marL="0" indent="0">
+            <a:pPr indent="0" marL="0">
               <a:buNone/>
             </a:pPr>
             <a:r>
@@ -19679,7 +20179,7 @@
           <a:bodyPr wrap="square" lIns="0" tIns="0" rIns="0" bIns="0" rtlCol="0" anchor="ctr"/>
           <a:lstStyle/>
           <a:p>
-            <a:pPr marL="0" indent="0" algn="ctr">
+            <a:pPr algn="ctr" indent="0" marL="0">
               <a:buNone/>
             </a:pPr>
             <a:r>
@@ -19718,7 +20218,7 @@
           <a:bodyPr wrap="square" lIns="0" tIns="0" rIns="0" bIns="0" rtlCol="0" anchor="ctr"/>
           <a:lstStyle/>
           <a:p>
-            <a:pPr marL="0" indent="0">
+            <a:pPr indent="0" marL="0">
               <a:buNone/>
             </a:pPr>
             <a:r>
@@ -19745,7 +20245,7 @@
         <p:spPr>
           <a:xfrm>
             <a:off x="566928" y="5779008"/>
-            <a:ext cx="10927080" cy="402336"/>
+            <a:ext cx="11064240" cy="402336"/>
           </a:xfrm>
           <a:prstGeom prst="roundRect">
             <a:avLst>
@@ -19784,7 +20284,7 @@
           <a:bodyPr wrap="square" lIns="0" tIns="0" rIns="0" bIns="0" rtlCol="0" anchor="ctr"/>
           <a:lstStyle/>
           <a:p>
-            <a:pPr marL="0" indent="0">
+            <a:pPr indent="0" marL="0">
               <a:lnSpc>
                 <a:spcPct val="112000"/>
               </a:lnSpc>
@@ -19807,7 +20307,7 @@
       </p:sp>
       <p:sp>
         <p:nvSpPr>
-          <p:cNvPr id="57" name="Slide Number Placeholder 0"/>
+          <p:cNvPr id="25" name="Slide Number Placeholder 0"/>
           <p:cNvSpPr>
             <a:spLocks noGrp="1"/>
           </p:cNvSpPr>
@@ -19825,7 +20325,7 @@
           </a:prstGeom>
           <a:extLst>
             <a:ext uri="{C572A759-6A51-4108-AA02-DFA0A04FC94B}">
-              <ma14:wrappingTextBoxFlag xmlns:ma14="http://schemas.microsoft.com/office/mac/drawingml/2011/main" xmlns="" val="0"/>
+              <ma14:wrappingTextBoxFlag xmlns:ma14="http://schemas.microsoft.com/office/mac/drawingml/2011/main" val="0"/>
             </a:ext>
           </a:extLst>
         </p:spPr>
@@ -19846,7 +20346,7 @@
           <a:p>
             <a:pPr algn="l"/>
             <a:fld id="{F7021451-1387-4CA6-816F-3879F97B5CBC}" type="slidenum">
-              <a:rPr lang="en-US" b="0"/>
+              <a:rPr b="0" lang="en-US"/>
               <a:t>3</a:t>
             </a:fld>
             <a:endParaRPr lang="en-US"/>
@@ -19921,7 +20421,7 @@
           <a:bodyPr wrap="square" lIns="0" tIns="0" rIns="0" bIns="0" rtlCol="0" anchor="ctr"/>
           <a:lstStyle/>
           <a:p>
-            <a:pPr marL="0" indent="0">
+            <a:pPr indent="0" marL="0">
               <a:buNone/>
             </a:pPr>
             <a:r>
@@ -19960,7 +20460,7 @@
           <a:bodyPr wrap="square" lIns="0" tIns="0" rIns="0" bIns="0" rtlCol="0" anchor="t"/>
           <a:lstStyle/>
           <a:p>
-            <a:pPr marL="0" indent="0">
+            <a:pPr indent="0" marL="0">
               <a:lnSpc>
                 <a:spcPct val="100000"/>
               </a:lnSpc>
@@ -20029,11 +20529,11 @@
           <a:bodyPr wrap="square" lIns="0" tIns="0" rIns="0" bIns="0" rtlCol="0" anchor="ctr"/>
           <a:lstStyle/>
           <a:p>
-            <a:pPr marL="0" indent="0" algn="ctr">
-              <a:buNone/>
-            </a:pPr>
-            <a:r>
-              <a:rPr lang="en-US" sz="900" b="1" kern="0" spc="100" dirty="0">
+            <a:pPr algn="ctr" indent="0" marL="0">
+              <a:buNone/>
+            </a:pPr>
+            <a:r>
+              <a:rPr lang="en-US" sz="900" b="1" spc="100" kern="0" dirty="0">
                 <a:solidFill>
                   <a:srgbClr val="5A05F4"/>
                 </a:solidFill>
@@ -20049,14 +20549,14 @@
       </p:sp>
       <p:pic>
         <p:nvPicPr>
-          <p:cNvPr id="7" name="Image 0" descr="preencoded.png"/>
+          <p:cNvPr id="7" name="Image 0" descr="preencoded.png">    </p:cNvPr>
           <p:cNvPicPr>
             <a:picLocks noChangeAspect="1"/>
           </p:cNvPicPr>
           <p:nvPr/>
         </p:nvPicPr>
         <p:blipFill>
-          <a:blip r:embed="rId3"/>
+          <a:blip r:embed="rId1"/>
           <a:stretch>
             <a:fillRect/>
           </a:stretch>
@@ -20119,7 +20619,7 @@
           <a:bodyPr wrap="square" lIns="0" tIns="0" rIns="0" bIns="0" rtlCol="0" anchor="ctr"/>
           <a:lstStyle/>
           <a:p>
-            <a:pPr marL="0" indent="0">
+            <a:pPr indent="0" marL="0">
               <a:buNone/>
             </a:pPr>
             <a:r>
@@ -20158,7 +20658,7 @@
           <a:bodyPr wrap="square" lIns="0" tIns="0" rIns="0" bIns="0" rtlCol="0" anchor="t"/>
           <a:lstStyle/>
           <a:p>
-            <a:pPr marL="0" indent="0">
+            <a:pPr indent="0" marL="0">
               <a:lnSpc>
                 <a:spcPct val="105000"/>
               </a:lnSpc>
@@ -20227,7 +20727,7 @@
           <a:bodyPr wrap="square" lIns="0" tIns="0" rIns="0" bIns="0" rtlCol="0" anchor="ctr"/>
           <a:lstStyle/>
           <a:p>
-            <a:pPr marL="0" indent="0">
+            <a:pPr indent="0" marL="0">
               <a:buNone/>
             </a:pPr>
             <a:r>
@@ -20266,7 +20766,7 @@
           <a:bodyPr wrap="square" lIns="0" tIns="0" rIns="0" bIns="0" rtlCol="0" anchor="t"/>
           <a:lstStyle/>
           <a:p>
-            <a:pPr marL="0" indent="0">
+            <a:pPr indent="0" marL="0">
               <a:lnSpc>
                 <a:spcPct val="105000"/>
               </a:lnSpc>
@@ -20335,7 +20835,7 @@
           <a:bodyPr wrap="square" lIns="0" tIns="0" rIns="0" bIns="0" rtlCol="0" anchor="ctr"/>
           <a:lstStyle/>
           <a:p>
-            <a:pPr marL="0" indent="0">
+            <a:pPr indent="0" marL="0">
               <a:buNone/>
             </a:pPr>
             <a:r>
@@ -20374,7 +20874,7 @@
           <a:bodyPr wrap="square" lIns="0" tIns="0" rIns="0" bIns="0" rtlCol="0" anchor="t"/>
           <a:lstStyle/>
           <a:p>
-            <a:pPr marL="0" indent="0">
+            <a:pPr indent="0" marL="0">
               <a:lnSpc>
                 <a:spcPct val="105000"/>
               </a:lnSpc>
@@ -20443,7 +20943,7 @@
           <a:bodyPr wrap="square" lIns="0" tIns="0" rIns="0" bIns="0" rtlCol="0" anchor="ctr"/>
           <a:lstStyle/>
           <a:p>
-            <a:pPr marL="0" indent="0">
+            <a:pPr indent="0" marL="0">
               <a:buNone/>
             </a:pPr>
             <a:r>
@@ -20482,7 +20982,7 @@
           <a:bodyPr wrap="square" lIns="0" tIns="0" rIns="0" bIns="0" rtlCol="0" anchor="t"/>
           <a:lstStyle/>
           <a:p>
-            <a:pPr marL="0" indent="0">
+            <a:pPr indent="0" marL="0">
               <a:lnSpc>
                 <a:spcPct val="105000"/>
               </a:lnSpc>
@@ -20551,7 +21051,7 @@
           <a:bodyPr wrap="square" lIns="0" tIns="0" rIns="0" bIns="0" rtlCol="0" anchor="ctr"/>
           <a:lstStyle/>
           <a:p>
-            <a:pPr marL="0" indent="0">
+            <a:pPr indent="0" marL="0">
               <a:buNone/>
             </a:pPr>
             <a:r>
@@ -20590,7 +21090,7 @@
           <a:bodyPr wrap="square" lIns="0" tIns="0" rIns="0" bIns="0" rtlCol="0" anchor="t"/>
           <a:lstStyle/>
           <a:p>
-            <a:pPr marL="0" indent="0">
+            <a:pPr indent="0" marL="0">
               <a:lnSpc>
                 <a:spcPct val="105000"/>
               </a:lnSpc>
@@ -20659,7 +21159,7 @@
           <a:bodyPr wrap="square" lIns="0" tIns="0" rIns="0" bIns="0" rtlCol="0" anchor="ctr"/>
           <a:lstStyle/>
           <a:p>
-            <a:pPr marL="0" indent="0">
+            <a:pPr indent="0" marL="0">
               <a:buNone/>
             </a:pPr>
             <a:r>
@@ -20698,7 +21198,7 @@
           <a:bodyPr wrap="square" lIns="0" tIns="0" rIns="0" bIns="0" rtlCol="0" anchor="t"/>
           <a:lstStyle/>
           <a:p>
-            <a:pPr marL="0" indent="0">
+            <a:pPr indent="0" marL="0">
               <a:lnSpc>
                 <a:spcPct val="105000"/>
               </a:lnSpc>
@@ -20767,7 +21267,7 @@
           <a:bodyPr wrap="square" lIns="0" tIns="0" rIns="0" bIns="0" rtlCol="0" anchor="ctr"/>
           <a:lstStyle/>
           <a:p>
-            <a:pPr marL="0" indent="0">
+            <a:pPr indent="0" marL="0">
               <a:lnSpc>
                 <a:spcPct val="112000"/>
               </a:lnSpc>
@@ -20790,7 +21290,7 @@
       </p:sp>
       <p:sp>
         <p:nvSpPr>
-          <p:cNvPr id="28" name="Slide Number Placeholder 0"/>
+          <p:cNvPr id="25" name="Slide Number Placeholder 0"/>
           <p:cNvSpPr>
             <a:spLocks noGrp="1"/>
           </p:cNvSpPr>
@@ -20808,7 +21308,7 @@
           </a:prstGeom>
           <a:extLst>
             <a:ext uri="{C572A759-6A51-4108-AA02-DFA0A04FC94B}">
-              <ma14:wrappingTextBoxFlag xmlns:ma14="http://schemas.microsoft.com/office/mac/drawingml/2011/main" xmlns="" val="0"/>
+              <ma14:wrappingTextBoxFlag xmlns:ma14="http://schemas.microsoft.com/office/mac/drawingml/2011/main" val="0"/>
             </a:ext>
           </a:extLst>
         </p:spPr>
@@ -20829,7 +21329,7 @@
           <a:p>
             <a:pPr algn="l"/>
             <a:fld id="{F7021451-1387-4CA6-816F-3879F97B5CBC}" type="slidenum">
-              <a:rPr lang="en-US" b="0"/>
+              <a:rPr b="0" lang="en-US"/>
               <a:t>4</a:t>
             </a:fld>
             <a:endParaRPr lang="en-US"/>
@@ -20882,11 +21382,11 @@
           <a:bodyPr wrap="square" lIns="0" tIns="0" rIns="0" bIns="0" rtlCol="0" anchor="ctr"/>
           <a:lstStyle/>
           <a:p>
-            <a:pPr marL="0" indent="0">
-              <a:buNone/>
-            </a:pPr>
-            <a:r>
-              <a:rPr lang="en-US" sz="1200" b="1" kern="0" spc="400" dirty="0">
+            <a:pPr indent="0" marL="0">
+              <a:buNone/>
+            </a:pPr>
+            <a:r>
+              <a:rPr lang="en-US" sz="1200" b="1" spc="400" kern="0" dirty="0">
                 <a:solidFill>
                   <a:srgbClr val="FFFFFF"/>
                 </a:solidFill>
@@ -20921,7 +21421,7 @@
           <a:bodyPr wrap="square" lIns="0" tIns="0" rIns="0" bIns="0" rtlCol="0" anchor="ctr"/>
           <a:lstStyle/>
           <a:p>
-            <a:pPr marL="0" indent="0">
+            <a:pPr indent="0" marL="0">
               <a:buNone/>
             </a:pPr>
             <a:r>
@@ -20960,7 +21460,7 @@
           <a:bodyPr wrap="square" lIns="0" tIns="0" rIns="0" bIns="0" rtlCol="0" anchor="t"/>
           <a:lstStyle/>
           <a:p>
-            <a:pPr marL="0" indent="0">
+            <a:pPr indent="0" marL="0">
               <a:buNone/>
             </a:pPr>
             <a:r>
@@ -21046,7 +21546,7 @@
           <a:bodyPr wrap="square" lIns="0" tIns="0" rIns="0" bIns="0" rtlCol="0" anchor="ctr"/>
           <a:lstStyle/>
           <a:p>
-            <a:pPr marL="0" indent="0" algn="l">
+            <a:pPr algn="l" indent="0" marL="0">
               <a:buNone/>
             </a:pPr>
             <a:r>
@@ -21085,7 +21585,7 @@
           <a:bodyPr wrap="square" lIns="0" tIns="0" rIns="0" bIns="0" rtlCol="0" anchor="ctr"/>
           <a:lstStyle/>
           <a:p>
-            <a:pPr marL="0" indent="0">
+            <a:pPr indent="0" marL="0">
               <a:buNone/>
             </a:pPr>
             <a:r>
@@ -21151,11 +21651,11 @@
           <a:bodyPr wrap="square" lIns="0" tIns="0" rIns="0" bIns="0" rtlCol="0" anchor="ctr"/>
           <a:lstStyle/>
           <a:p>
-            <a:pPr marL="0" indent="0" algn="ctr">
-              <a:buNone/>
-            </a:pPr>
-            <a:r>
-              <a:rPr lang="en-US" sz="900" b="1" kern="0" spc="100" dirty="0">
+            <a:pPr algn="ctr" indent="0" marL="0">
+              <a:buNone/>
+            </a:pPr>
+            <a:r>
+              <a:rPr lang="en-US" sz="900" b="1" spc="100" kern="0" dirty="0">
                 <a:solidFill>
                   <a:srgbClr val="5A05F4"/>
                 </a:solidFill>
@@ -21171,14 +21671,14 @@
       </p:sp>
       <p:pic>
         <p:nvPicPr>
-          <p:cNvPr id="7" name="Image 0" descr="preencoded.png"/>
+          <p:cNvPr id="7" name="Image 0" descr="preencoded.png">    </p:cNvPr>
           <p:cNvPicPr>
             <a:picLocks noChangeAspect="1"/>
           </p:cNvPicPr>
           <p:nvPr/>
         </p:nvPicPr>
         <p:blipFill>
-          <a:blip r:embed="rId3"/>
+          <a:blip r:embed="rId1"/>
           <a:stretch>
             <a:fillRect/>
           </a:stretch>
@@ -21256,7 +21756,7 @@
           <a:bodyPr wrap="square" lIns="0" tIns="0" rIns="0" bIns="0" rtlCol="0" anchor="ctr"/>
           <a:lstStyle/>
           <a:p>
-            <a:pPr marL="0" indent="0" algn="ctr">
+            <a:pPr algn="ctr" indent="0" marL="0">
               <a:buNone/>
             </a:pPr>
             <a:r>
@@ -21295,7 +21795,7 @@
           <a:bodyPr wrap="square" lIns="0" tIns="0" rIns="0" bIns="0" rtlCol="0" anchor="ctr"/>
           <a:lstStyle/>
           <a:p>
-            <a:pPr marL="0" indent="0">
+            <a:pPr indent="0" marL="0">
               <a:buNone/>
             </a:pPr>
             <a:r>
@@ -21334,7 +21834,7 @@
           <a:bodyPr wrap="square" lIns="0" tIns="0" rIns="0" bIns="0" rtlCol="0" anchor="t"/>
           <a:lstStyle/>
           <a:p>
-            <a:pPr marL="0" indent="0">
+            <a:pPr indent="0" marL="0">
               <a:lnSpc>
                 <a:spcPct val="108000"/>
               </a:lnSpc>
@@ -21418,7 +21918,7 @@
           <a:bodyPr wrap="square" lIns="0" tIns="0" rIns="0" bIns="0" rtlCol="0" anchor="ctr"/>
           <a:lstStyle/>
           <a:p>
-            <a:pPr marL="0" indent="0" algn="ctr">
+            <a:pPr algn="ctr" indent="0" marL="0">
               <a:buNone/>
             </a:pPr>
             <a:r>
@@ -21457,7 +21957,7 @@
           <a:bodyPr wrap="square" lIns="0" tIns="0" rIns="0" bIns="0" rtlCol="0" anchor="ctr"/>
           <a:lstStyle/>
           <a:p>
-            <a:pPr marL="0" indent="0">
+            <a:pPr indent="0" marL="0">
               <a:buNone/>
             </a:pPr>
             <a:r>
@@ -21496,7 +21996,7 @@
           <a:bodyPr wrap="square" lIns="0" tIns="0" rIns="0" bIns="0" rtlCol="0" anchor="t"/>
           <a:lstStyle/>
           <a:p>
-            <a:pPr marL="0" indent="0">
+            <a:pPr indent="0" marL="0">
               <a:lnSpc>
                 <a:spcPct val="108000"/>
               </a:lnSpc>
@@ -21580,7 +22080,7 @@
           <a:bodyPr wrap="square" lIns="0" tIns="0" rIns="0" bIns="0" rtlCol="0" anchor="ctr"/>
           <a:lstStyle/>
           <a:p>
-            <a:pPr marL="0" indent="0" algn="ctr">
+            <a:pPr algn="ctr" indent="0" marL="0">
               <a:buNone/>
             </a:pPr>
             <a:r>
@@ -21619,7 +22119,7 @@
           <a:bodyPr wrap="square" lIns="0" tIns="0" rIns="0" bIns="0" rtlCol="0" anchor="ctr"/>
           <a:lstStyle/>
           <a:p>
-            <a:pPr marL="0" indent="0">
+            <a:pPr indent="0" marL="0">
               <a:buNone/>
             </a:pPr>
             <a:r>
@@ -21658,7 +22158,7 @@
           <a:bodyPr wrap="square" lIns="0" tIns="0" rIns="0" bIns="0" rtlCol="0" anchor="t"/>
           <a:lstStyle/>
           <a:p>
-            <a:pPr marL="0" indent="0">
+            <a:pPr indent="0" marL="0">
               <a:lnSpc>
                 <a:spcPct val="108000"/>
               </a:lnSpc>
@@ -21700,7 +22200,7 @@
           <a:bodyPr wrap="square" lIns="0" tIns="0" rIns="0" bIns="0" rtlCol="0" anchor="ctr"/>
           <a:lstStyle/>
           <a:p>
-            <a:pPr marL="0" indent="0">
+            <a:pPr indent="0" marL="0">
               <a:buNone/>
             </a:pPr>
             <a:r>
@@ -21727,7 +22227,7 @@
         <p:spPr>
           <a:xfrm>
             <a:off x="566928" y="4160520"/>
-            <a:ext cx="10927080" cy="1371600"/>
+            <a:ext cx="11064240" cy="1371600"/>
           </a:xfrm>
           <a:prstGeom prst="roundRect">
             <a:avLst>
@@ -21742,14 +22242,34 @@
       </p:sp>
       <p:sp>
         <p:nvSpPr>
-          <p:cNvPr id="25" name="Text 22"/>
-          <p:cNvSpPr/>
-          <p:nvPr/>
-        </p:nvSpPr>
-        <p:spPr>
-          <a:xfrm>
-            <a:off x="786384" y="4288536"/>
-            <a:ext cx="10625328" cy="219456"/>
+          <p:cNvPr id="25" name="Shape 22"/>
+          <p:cNvSpPr/>
+          <p:nvPr/>
+        </p:nvSpPr>
+        <p:spPr>
+          <a:xfrm>
+            <a:off x="749808" y="4690872"/>
+            <a:ext cx="310896" cy="310896"/>
+          </a:xfrm>
+          <a:prstGeom prst="ellipse">
+            <a:avLst/>
+          </a:prstGeom>
+          <a:solidFill>
+            <a:srgbClr val="FFFFFF"/>
+          </a:solidFill>
+          <a:ln/>
+        </p:spPr>
+      </p:sp>
+      <p:sp>
+        <p:nvSpPr>
+          <p:cNvPr id="26" name="Text 23"/>
+          <p:cNvSpPr/>
+          <p:nvPr/>
+        </p:nvSpPr>
+        <p:spPr>
+          <a:xfrm>
+            <a:off x="749808" y="4690872"/>
+            <a:ext cx="310896" cy="310896"/>
           </a:xfrm>
           <a:prstGeom prst="rect">
             <a:avLst/>
@@ -21761,11 +22281,50 @@
           <a:bodyPr wrap="square" lIns="0" tIns="0" rIns="0" bIns="0" rtlCol="0" anchor="ctr"/>
           <a:lstStyle/>
           <a:p>
-            <a:pPr marL="0" indent="0">
-              <a:buNone/>
-            </a:pPr>
-            <a:r>
-              <a:rPr lang="en-US" sz="950" b="1" kern="0" spc="150" dirty="0">
+            <a:pPr algn="ctr" indent="0" marL="0">
+              <a:buNone/>
+            </a:pPr>
+            <a:r>
+              <a:rPr lang="en-US" sz="1200" b="1" dirty="0">
+                <a:solidFill>
+                  <a:srgbClr val="5A05F4"/>
+                </a:solidFill>
+                <a:latin typeface="Arial" pitchFamily="34" charset="0"/>
+                <a:ea typeface="Arial" pitchFamily="34" charset="-122"/>
+                <a:cs typeface="Arial" pitchFamily="34" charset="-120"/>
+              </a:rPr>
+              <a:t>?</a:t>
+            </a:r>
+            <a:endParaRPr lang="en-US" sz="1200" dirty="0"/>
+          </a:p>
+        </p:txBody>
+      </p:sp>
+      <p:sp>
+        <p:nvSpPr>
+          <p:cNvPr id="27" name="Text 24"/>
+          <p:cNvSpPr/>
+          <p:nvPr/>
+        </p:nvSpPr>
+        <p:spPr>
+          <a:xfrm>
+            <a:off x="1243584" y="4288536"/>
+            <a:ext cx="10168128" cy="219456"/>
+          </a:xfrm>
+          <a:prstGeom prst="rect">
+            <a:avLst/>
+          </a:prstGeom>
+          <a:noFill/>
+          <a:ln/>
+        </p:spPr>
+        <p:txBody>
+          <a:bodyPr wrap="square" lIns="0" tIns="0" rIns="0" bIns="0" rtlCol="0" anchor="ctr"/>
+          <a:lstStyle/>
+          <a:p>
+            <a:pPr indent="0" marL="0">
+              <a:buNone/>
+            </a:pPr>
+            <a:r>
+              <a:rPr lang="en-US" sz="950" b="1" spc="150" kern="0" dirty="0">
                 <a:solidFill>
                   <a:srgbClr val="FFFFFF"/>
                 </a:solidFill>
@@ -21781,14 +22340,14 @@
       </p:sp>
       <p:sp>
         <p:nvSpPr>
-          <p:cNvPr id="26" name="Text 23"/>
-          <p:cNvSpPr/>
-          <p:nvPr/>
-        </p:nvSpPr>
-        <p:spPr>
-          <a:xfrm>
-            <a:off x="786384" y="4544568"/>
-            <a:ext cx="10625328" cy="859536"/>
+          <p:cNvPr id="28" name="Text 25"/>
+          <p:cNvSpPr/>
+          <p:nvPr/>
+        </p:nvSpPr>
+        <p:spPr>
+          <a:xfrm>
+            <a:off x="1243584" y="4544568"/>
+            <a:ext cx="10168128" cy="859536"/>
           </a:xfrm>
           <a:prstGeom prst="rect">
             <a:avLst/>
@@ -21800,7 +22359,7 @@
           <a:bodyPr wrap="square" lIns="0" tIns="0" rIns="0" bIns="0" rtlCol="0" anchor="ctr"/>
           <a:lstStyle/>
           <a:p>
-            <a:pPr marL="0" indent="0">
+            <a:pPr indent="0" marL="0">
               <a:lnSpc>
                 <a:spcPct val="112000"/>
               </a:lnSpc>
@@ -21823,7 +22382,7 @@
       </p:sp>
       <p:sp>
         <p:nvSpPr>
-          <p:cNvPr id="27" name="Slide Number Placeholder 0"/>
+          <p:cNvPr id="25" name="Slide Number Placeholder 0"/>
           <p:cNvSpPr>
             <a:spLocks noGrp="1"/>
           </p:cNvSpPr>
@@ -21841,7 +22400,7 @@
           </a:prstGeom>
           <a:extLst>
             <a:ext uri="{C572A759-6A51-4108-AA02-DFA0A04FC94B}">
-              <ma14:wrappingTextBoxFlag xmlns:ma14="http://schemas.microsoft.com/office/mac/drawingml/2011/main" xmlns="" val="0"/>
+              <ma14:wrappingTextBoxFlag xmlns:ma14="http://schemas.microsoft.com/office/mac/drawingml/2011/main" val="0"/>
             </a:ext>
           </a:extLst>
         </p:spPr>
@@ -21862,7 +22421,7 @@
           <a:p>
             <a:pPr algn="l"/>
             <a:fld id="{F7021451-1387-4CA6-816F-3879F97B5CBC}" type="slidenum">
-              <a:rPr lang="en-US" b="0"/>
+              <a:rPr b="0" lang="en-US"/>
               <a:t>6</a:t>
             </a:fld>
             <a:endParaRPr lang="en-US"/>
@@ -21937,7 +22496,7 @@
           <a:bodyPr wrap="square" lIns="0" tIns="0" rIns="0" bIns="0" rtlCol="0" anchor="ctr"/>
           <a:lstStyle/>
           <a:p>
-            <a:pPr marL="0" indent="0" algn="l">
+            <a:pPr algn="l" indent="0" marL="0">
               <a:buNone/>
             </a:pPr>
             <a:r>
@@ -21976,7 +22535,7 @@
           <a:bodyPr wrap="square" lIns="0" tIns="0" rIns="0" bIns="0" rtlCol="0" anchor="ctr"/>
           <a:lstStyle/>
           <a:p>
-            <a:pPr marL="0" indent="0">
+            <a:pPr indent="0" marL="0">
               <a:buNone/>
             </a:pPr>
             <a:r>
@@ -22042,11 +22601,11 @@
           <a:bodyPr wrap="square" lIns="0" tIns="0" rIns="0" bIns="0" rtlCol="0" anchor="ctr"/>
           <a:lstStyle/>
           <a:p>
-            <a:pPr marL="0" indent="0" algn="ctr">
-              <a:buNone/>
-            </a:pPr>
-            <a:r>
-              <a:rPr lang="en-US" sz="900" b="1" kern="0" spc="100" dirty="0">
+            <a:pPr algn="ctr" indent="0" marL="0">
+              <a:buNone/>
+            </a:pPr>
+            <a:r>
+              <a:rPr lang="en-US" sz="900" b="1" spc="100" kern="0" dirty="0">
                 <a:solidFill>
                   <a:srgbClr val="5A05F4"/>
                 </a:solidFill>
@@ -22062,14 +22621,14 @@
       </p:sp>
       <p:pic>
         <p:nvPicPr>
-          <p:cNvPr id="7" name="Image 0" descr="preencoded.png"/>
+          <p:cNvPr id="7" name="Image 0" descr="preencoded.png">    </p:cNvPr>
           <p:cNvPicPr>
             <a:picLocks noChangeAspect="1"/>
           </p:cNvPicPr>
           <p:nvPr/>
         </p:nvPicPr>
         <p:blipFill>
-          <a:blip r:embed="rId3"/>
+          <a:blip r:embed="rId1"/>
           <a:stretch>
             <a:fillRect/>
           </a:stretch>
@@ -22127,7 +22686,7 @@
           <a:bodyPr wrap="square" lIns="0" tIns="0" rIns="0" bIns="0" rtlCol="0" anchor="ctr"/>
           <a:lstStyle/>
           <a:p>
-            <a:pPr marL="0" indent="0">
+            <a:pPr indent="0" marL="0">
               <a:buNone/>
             </a:pPr>
             <a:r>
@@ -22166,7 +22725,7 @@
           <a:bodyPr wrap="square" lIns="0" tIns="0" rIns="0" bIns="0" rtlCol="0" anchor="ctr"/>
           <a:lstStyle/>
           <a:p>
-            <a:pPr marL="0" indent="0">
+            <a:pPr indent="0" marL="0">
               <a:buNone/>
             </a:pPr>
             <a:r>
@@ -22227,7 +22786,7 @@
           <a:bodyPr wrap="square" lIns="0" tIns="0" rIns="0" bIns="0" rtlCol="0" anchor="ctr"/>
           <a:lstStyle/>
           <a:p>
-            <a:pPr marL="0" indent="0">
+            <a:pPr indent="0" marL="0">
               <a:buNone/>
             </a:pPr>
             <a:r>
@@ -22266,7 +22825,7 @@
           <a:bodyPr wrap="square" lIns="0" tIns="0" rIns="0" bIns="0" rtlCol="0" anchor="ctr"/>
           <a:lstStyle/>
           <a:p>
-            <a:pPr marL="0" indent="0">
+            <a:pPr indent="0" marL="0">
               <a:buNone/>
             </a:pPr>
             <a:r>
@@ -22327,7 +22886,7 @@
           <a:bodyPr wrap="square" lIns="0" tIns="0" rIns="0" bIns="0" rtlCol="0" anchor="ctr"/>
           <a:lstStyle/>
           <a:p>
-            <a:pPr marL="0" indent="0">
+            <a:pPr indent="0" marL="0">
               <a:buNone/>
             </a:pPr>
             <a:r>
@@ -22366,7 +22925,7 @@
           <a:bodyPr wrap="square" lIns="0" tIns="0" rIns="0" bIns="0" rtlCol="0" anchor="ctr"/>
           <a:lstStyle/>
           <a:p>
-            <a:pPr marL="0" indent="0">
+            <a:pPr indent="0" marL="0">
               <a:buNone/>
             </a:pPr>
             <a:r>
@@ -22432,7 +22991,7 @@
           <a:bodyPr wrap="square" lIns="0" tIns="0" rIns="0" bIns="0" rtlCol="0" anchor="ctr"/>
           <a:lstStyle/>
           <a:p>
-            <a:pPr marL="0" indent="0" algn="ctr">
+            <a:pPr algn="ctr" indent="0" marL="0">
               <a:buNone/>
             </a:pPr>
             <a:r>
@@ -22536,7 +23095,7 @@
           <a:bodyPr wrap="square" lIns="0" tIns="0" rIns="0" bIns="0" rtlCol="0" anchor="ctr"/>
           <a:lstStyle/>
           <a:p>
-            <a:pPr marL="0" indent="0" algn="ctr">
+            <a:pPr algn="ctr" indent="0" marL="0">
               <a:buNone/>
             </a:pPr>
             <a:r>
@@ -22597,7 +23156,7 @@
           <a:bodyPr wrap="square" lIns="0" tIns="0" rIns="0" bIns="0" rtlCol="0" anchor="ctr"/>
           <a:lstStyle/>
           <a:p>
-            <a:pPr marL="0" indent="0" algn="ctr">
+            <a:pPr algn="ctr" indent="0" marL="0">
               <a:buNone/>
             </a:pPr>
             <a:r>
@@ -22658,7 +23217,7 @@
           <a:bodyPr wrap="square" lIns="0" tIns="0" rIns="0" bIns="0" rtlCol="0" anchor="ctr"/>
           <a:lstStyle/>
           <a:p>
-            <a:pPr marL="0" indent="0" algn="ctr">
+            <a:pPr algn="ctr" indent="0" marL="0">
               <a:buNone/>
             </a:pPr>
             <a:r>
@@ -22762,7 +23321,7 @@
           <a:bodyPr wrap="square" lIns="0" tIns="0" rIns="0" bIns="0" rtlCol="0" anchor="ctr"/>
           <a:lstStyle/>
           <a:p>
-            <a:pPr marL="0" indent="0" algn="ctr">
+            <a:pPr algn="ctr" indent="0" marL="0">
               <a:buNone/>
             </a:pPr>
             <a:r>
@@ -22809,14 +23368,34 @@
       </p:sp>
       <p:sp>
         <p:nvSpPr>
-          <p:cNvPr id="32" name="Text 29"/>
-          <p:cNvSpPr/>
-          <p:nvPr/>
-        </p:nvSpPr>
-        <p:spPr>
-          <a:xfrm>
-            <a:off x="786384" y="4928616"/>
-            <a:ext cx="10625328" cy="219456"/>
+          <p:cNvPr id="32" name="Shape 29"/>
+          <p:cNvSpPr/>
+          <p:nvPr/>
+        </p:nvSpPr>
+        <p:spPr>
+          <a:xfrm>
+            <a:off x="749808" y="5056632"/>
+            <a:ext cx="310896" cy="310896"/>
+          </a:xfrm>
+          <a:prstGeom prst="ellipse">
+            <a:avLst/>
+          </a:prstGeom>
+          <a:solidFill>
+            <a:srgbClr val="106B41"/>
+          </a:solidFill>
+          <a:ln/>
+        </p:spPr>
+      </p:sp>
+      <p:sp>
+        <p:nvSpPr>
+          <p:cNvPr id="33" name="Text 30"/>
+          <p:cNvSpPr/>
+          <p:nvPr/>
+        </p:nvSpPr>
+        <p:spPr>
+          <a:xfrm>
+            <a:off x="749808" y="5056632"/>
+            <a:ext cx="310896" cy="310896"/>
           </a:xfrm>
           <a:prstGeom prst="rect">
             <a:avLst/>
@@ -22828,11 +23407,50 @@
           <a:bodyPr wrap="square" lIns="0" tIns="0" rIns="0" bIns="0" rtlCol="0" anchor="ctr"/>
           <a:lstStyle/>
           <a:p>
-            <a:pPr marL="0" indent="0">
-              <a:buNone/>
-            </a:pPr>
-            <a:r>
-              <a:rPr lang="en-US" sz="950" b="1" kern="0" spc="150" dirty="0">
+            <a:pPr algn="ctr" indent="0" marL="0">
+              <a:buNone/>
+            </a:pPr>
+            <a:r>
+              <a:rPr lang="en-US" sz="1200" b="1" dirty="0">
+                <a:solidFill>
+                  <a:srgbClr val="FFFFFF"/>
+                </a:solidFill>
+                <a:latin typeface="Arial" pitchFamily="34" charset="0"/>
+                <a:ea typeface="Arial" pitchFamily="34" charset="-122"/>
+                <a:cs typeface="Arial" pitchFamily="34" charset="-120"/>
+              </a:rPr>
+              <a:t>◆</a:t>
+            </a:r>
+            <a:endParaRPr lang="en-US" sz="1200" dirty="0"/>
+          </a:p>
+        </p:txBody>
+      </p:sp>
+      <p:sp>
+        <p:nvSpPr>
+          <p:cNvPr id="34" name="Text 31"/>
+          <p:cNvSpPr/>
+          <p:nvPr/>
+        </p:nvSpPr>
+        <p:spPr>
+          <a:xfrm>
+            <a:off x="1243584" y="4928616"/>
+            <a:ext cx="10168128" cy="219456"/>
+          </a:xfrm>
+          <a:prstGeom prst="rect">
+            <a:avLst/>
+          </a:prstGeom>
+          <a:noFill/>
+          <a:ln/>
+        </p:spPr>
+        <p:txBody>
+          <a:bodyPr wrap="square" lIns="0" tIns="0" rIns="0" bIns="0" rtlCol="0" anchor="ctr"/>
+          <a:lstStyle/>
+          <a:p>
+            <a:pPr indent="0" marL="0">
+              <a:buNone/>
+            </a:pPr>
+            <a:r>
+              <a:rPr lang="en-US" sz="950" b="1" spc="150" kern="0" dirty="0">
                 <a:solidFill>
                   <a:srgbClr val="106B41"/>
                 </a:solidFill>
@@ -22848,14 +23466,14 @@
       </p:sp>
       <p:sp>
         <p:nvSpPr>
-          <p:cNvPr id="33" name="Text 30"/>
-          <p:cNvSpPr/>
-          <p:nvPr/>
-        </p:nvSpPr>
-        <p:spPr>
-          <a:xfrm>
-            <a:off x="786384" y="5184648"/>
-            <a:ext cx="10625328" cy="310896"/>
+          <p:cNvPr id="35" name="Text 32"/>
+          <p:cNvSpPr/>
+          <p:nvPr/>
+        </p:nvSpPr>
+        <p:spPr>
+          <a:xfrm>
+            <a:off x="1243584" y="5184648"/>
+            <a:ext cx="10168128" cy="310896"/>
           </a:xfrm>
           <a:prstGeom prst="rect">
             <a:avLst/>
@@ -22867,7 +23485,7 @@
           <a:bodyPr wrap="square" lIns="0" tIns="0" rIns="0" bIns="0" rtlCol="0" anchor="ctr"/>
           <a:lstStyle/>
           <a:p>
-            <a:pPr marL="0" indent="0">
+            <a:pPr indent="0" marL="0">
               <a:lnSpc>
                 <a:spcPct val="112000"/>
               </a:lnSpc>
@@ -22890,7 +23508,7 @@
       </p:sp>
       <p:sp>
         <p:nvSpPr>
-          <p:cNvPr id="34" name="Shape 31"/>
+          <p:cNvPr id="36" name="Shape 33"/>
           <p:cNvSpPr/>
           <p:nvPr/>
         </p:nvSpPr>
@@ -22917,7 +23535,7 @@
       </p:sp>
       <p:sp>
         <p:nvSpPr>
-          <p:cNvPr id="35" name="Text 32"/>
+          <p:cNvPr id="37" name="Text 34"/>
           <p:cNvSpPr/>
           <p:nvPr/>
         </p:nvSpPr>
@@ -22936,7 +23554,7 @@
           <a:bodyPr wrap="square" lIns="0" tIns="0" rIns="0" bIns="0" rtlCol="0" anchor="ctr"/>
           <a:lstStyle/>
           <a:p>
-            <a:pPr marL="0" indent="0">
+            <a:pPr indent="0" marL="0">
               <a:lnSpc>
                 <a:spcPct val="112000"/>
               </a:lnSpc>
@@ -22959,7 +23577,7 @@
       </p:sp>
       <p:sp>
         <p:nvSpPr>
-          <p:cNvPr id="36" name="Slide Number Placeholder 0"/>
+          <p:cNvPr id="25" name="Slide Number Placeholder 0"/>
           <p:cNvSpPr>
             <a:spLocks noGrp="1"/>
           </p:cNvSpPr>
@@ -22977,7 +23595,7 @@
           </a:prstGeom>
           <a:extLst>
             <a:ext uri="{C572A759-6A51-4108-AA02-DFA0A04FC94B}">
-              <ma14:wrappingTextBoxFlag xmlns:ma14="http://schemas.microsoft.com/office/mac/drawingml/2011/main" xmlns="" val="0"/>
+              <ma14:wrappingTextBoxFlag xmlns:ma14="http://schemas.microsoft.com/office/mac/drawingml/2011/main" val="0"/>
             </a:ext>
           </a:extLst>
         </p:spPr>
@@ -22998,7 +23616,7 @@
           <a:p>
             <a:pPr algn="l"/>
             <a:fld id="{F7021451-1387-4CA6-816F-3879F97B5CBC}" type="slidenum">
-              <a:rPr lang="en-US" b="0"/>
+              <a:rPr b="0" lang="en-US"/>
               <a:t>7</a:t>
             </a:fld>
             <a:endParaRPr lang="en-US"/>
@@ -23073,7 +23691,7 @@
           <a:bodyPr wrap="square" lIns="0" tIns="0" rIns="0" bIns="0" rtlCol="0" anchor="ctr"/>
           <a:lstStyle/>
           <a:p>
-            <a:pPr marL="0" indent="0" algn="l">
+            <a:pPr algn="l" indent="0" marL="0">
               <a:buNone/>
             </a:pPr>
             <a:r>
@@ -23112,7 +23730,7 @@
           <a:bodyPr wrap="square" lIns="0" tIns="0" rIns="0" bIns="0" rtlCol="0" anchor="ctr"/>
           <a:lstStyle/>
           <a:p>
-            <a:pPr marL="0" indent="0">
+            <a:pPr indent="0" marL="0">
               <a:buNone/>
             </a:pPr>
             <a:r>
@@ -23178,11 +23796,11 @@
           <a:bodyPr wrap="square" lIns="0" tIns="0" rIns="0" bIns="0" rtlCol="0" anchor="ctr"/>
           <a:lstStyle/>
           <a:p>
-            <a:pPr marL="0" indent="0" algn="ctr">
-              <a:buNone/>
-            </a:pPr>
-            <a:r>
-              <a:rPr lang="en-US" sz="900" b="1" kern="0" spc="100" dirty="0">
+            <a:pPr algn="ctr" indent="0" marL="0">
+              <a:buNone/>
+            </a:pPr>
+            <a:r>
+              <a:rPr lang="en-US" sz="900" b="1" spc="100" kern="0" dirty="0">
                 <a:solidFill>
                   <a:srgbClr val="5A05F4"/>
                 </a:solidFill>
@@ -23198,14 +23816,14 @@
       </p:sp>
       <p:pic>
         <p:nvPicPr>
-          <p:cNvPr id="7" name="Image 0" descr="preencoded.png"/>
+          <p:cNvPr id="7" name="Image 0" descr="preencoded.png">    </p:cNvPr>
           <p:cNvPicPr>
             <a:picLocks noChangeAspect="1"/>
           </p:cNvPicPr>
           <p:nvPr/>
         </p:nvPicPr>
         <p:blipFill>
-          <a:blip r:embed="rId3"/>
+          <a:blip r:embed="rId1"/>
           <a:stretch>
             <a:fillRect/>
           </a:stretch>
@@ -23263,7 +23881,7 @@
           <a:bodyPr wrap="square" lIns="0" tIns="0" rIns="0" bIns="0" rtlCol="0" anchor="ctr"/>
           <a:lstStyle/>
           <a:p>
-            <a:pPr marL="0" indent="0">
+            <a:pPr indent="0" marL="0">
               <a:buNone/>
             </a:pPr>
             <a:r>
@@ -23302,7 +23920,7 @@
           <a:bodyPr wrap="square" lIns="0" tIns="0" rIns="0" bIns="0" rtlCol="0" anchor="t"/>
           <a:lstStyle/>
           <a:p>
-            <a:pPr marL="0" indent="0">
+            <a:pPr indent="0" marL="0">
               <a:lnSpc>
                 <a:spcPct val="108000"/>
               </a:lnSpc>
@@ -23366,7 +23984,7 @@
           <a:bodyPr wrap="square" lIns="0" tIns="0" rIns="0" bIns="0" rtlCol="0" anchor="ctr"/>
           <a:lstStyle/>
           <a:p>
-            <a:pPr marL="0" indent="0">
+            <a:pPr indent="0" marL="0">
               <a:buNone/>
             </a:pPr>
             <a:r>
@@ -23405,7 +24023,7 @@
           <a:bodyPr wrap="square" lIns="0" tIns="0" rIns="0" bIns="0" rtlCol="0" anchor="t"/>
           <a:lstStyle/>
           <a:p>
-            <a:pPr marL="0" indent="0">
+            <a:pPr indent="0" marL="0">
               <a:lnSpc>
                 <a:spcPct val="108000"/>
               </a:lnSpc>
@@ -23447,7 +24065,7 @@
           <a:bodyPr wrap="square" lIns="0" tIns="0" rIns="0" bIns="0" rtlCol="0" anchor="ctr"/>
           <a:lstStyle/>
           <a:p>
-            <a:pPr marL="0" indent="0" algn="ctr">
+            <a:pPr algn="ctr" indent="0" marL="0">
               <a:buNone/>
             </a:pPr>
             <a:r>
@@ -23513,11 +24131,11 @@
           <a:bodyPr wrap="square" lIns="0" tIns="0" rIns="0" bIns="0" rtlCol="0" anchor="ctr"/>
           <a:lstStyle/>
           <a:p>
-            <a:pPr marL="0" indent="0">
-              <a:buNone/>
-            </a:pPr>
-            <a:r>
-              <a:rPr lang="en-US" sz="950" b="1" kern="0" spc="150" dirty="0">
+            <a:pPr indent="0" marL="0">
+              <a:buNone/>
+            </a:pPr>
+            <a:r>
+              <a:rPr lang="en-US" sz="950" b="1" spc="150" kern="0" dirty="0">
                 <a:solidFill>
                   <a:srgbClr val="B3261E"/>
                 </a:solidFill>
@@ -23552,7 +24170,7 @@
           <a:bodyPr wrap="square" lIns="0" tIns="0" rIns="0" bIns="0" rtlCol="0" anchor="ctr"/>
           <a:lstStyle/>
           <a:p>
-            <a:pPr marL="0" indent="0">
+            <a:pPr indent="0" marL="0">
               <a:lnSpc>
                 <a:spcPct val="112000"/>
               </a:lnSpc>
@@ -23593,7 +24211,7 @@
           </a:prstGeom>
           <a:extLst>
             <a:ext uri="{C572A759-6A51-4108-AA02-DFA0A04FC94B}">
-              <ma14:wrappingTextBoxFlag xmlns:ma14="http://schemas.microsoft.com/office/mac/drawingml/2011/main" xmlns="" val="0"/>
+              <ma14:wrappingTextBoxFlag xmlns:ma14="http://schemas.microsoft.com/office/mac/drawingml/2011/main" val="0"/>
             </a:ext>
           </a:extLst>
         </p:spPr>
@@ -23614,7 +24232,7 @@
           <a:p>
             <a:pPr algn="l"/>
             <a:fld id="{F7021451-1387-4CA6-816F-3879F97B5CBC}" type="slidenum">
-              <a:rPr lang="en-US" b="0"/>
+              <a:rPr b="0" lang="en-US"/>
               <a:t>8</a:t>
             </a:fld>
             <a:endParaRPr lang="en-US"/>
@@ -23689,7 +24307,7 @@
           <a:bodyPr wrap="square" lIns="0" tIns="0" rIns="0" bIns="0" rtlCol="0" anchor="ctr"/>
           <a:lstStyle/>
           <a:p>
-            <a:pPr marL="0" indent="0" algn="l">
+            <a:pPr algn="l" indent="0" marL="0">
               <a:buNone/>
             </a:pPr>
             <a:r>
@@ -23728,7 +24346,7 @@
           <a:bodyPr wrap="square" lIns="0" tIns="0" rIns="0" bIns="0" rtlCol="0" anchor="ctr"/>
           <a:lstStyle/>
           <a:p>
-            <a:pPr marL="0" indent="0">
+            <a:pPr indent="0" marL="0">
               <a:buNone/>
             </a:pPr>
             <a:r>
@@ -23794,11 +24412,11 @@
           <a:bodyPr wrap="square" lIns="0" tIns="0" rIns="0" bIns="0" rtlCol="0" anchor="ctr"/>
           <a:lstStyle/>
           <a:p>
-            <a:pPr marL="0" indent="0" algn="ctr">
-              <a:buNone/>
-            </a:pPr>
-            <a:r>
-              <a:rPr lang="en-US" sz="900" b="1" kern="0" spc="100" dirty="0">
+            <a:pPr algn="ctr" indent="0" marL="0">
+              <a:buNone/>
+            </a:pPr>
+            <a:r>
+              <a:rPr lang="en-US" sz="900" b="1" spc="100" kern="0" dirty="0">
                 <a:solidFill>
                   <a:srgbClr val="5A05F4"/>
                 </a:solidFill>
@@ -23814,14 +24432,14 @@
       </p:sp>
       <p:pic>
         <p:nvPicPr>
-          <p:cNvPr id="7" name="Image 0" descr="preencoded.png"/>
+          <p:cNvPr id="7" name="Image 0" descr="preencoded.png">    </p:cNvPr>
           <p:cNvPicPr>
             <a:picLocks noChangeAspect="1"/>
           </p:cNvPicPr>
           <p:nvPr/>
         </p:nvPicPr>
         <p:blipFill>
-          <a:blip r:embed="rId3"/>
+          <a:blip r:embed="rId1"/>
           <a:stretch>
             <a:fillRect/>
           </a:stretch>
@@ -23884,7 +24502,7 @@
           <a:bodyPr wrap="square" lIns="0" tIns="0" rIns="0" bIns="0" rtlCol="0" anchor="t"/>
           <a:lstStyle/>
           <a:p>
-            <a:pPr marL="0" indent="0">
+            <a:pPr indent="0" marL="0">
               <a:lnSpc>
                 <a:spcPct val="130000"/>
               </a:lnSpc>
@@ -23904,7 +24522,7 @@
             <a:endParaRPr lang="en-US" sz="1000" dirty="0"/>
           </a:p>
           <a:p>
-            <a:pPr marL="0" indent="0">
+            <a:pPr indent="0" marL="0">
               <a:lnSpc>
                 <a:spcPct val="130000"/>
               </a:lnSpc>
@@ -23924,7 +24542,7 @@
             <a:endParaRPr lang="en-US" sz="1000" dirty="0"/>
           </a:p>
           <a:p>
-            <a:pPr marL="0" indent="0">
+            <a:pPr indent="0" marL="0">
               <a:lnSpc>
                 <a:spcPct val="130000"/>
               </a:lnSpc>
@@ -23944,7 +24562,7 @@
             <a:endParaRPr lang="en-US" sz="1000" dirty="0"/>
           </a:p>
           <a:p>
-            <a:pPr marL="0" indent="0">
+            <a:pPr indent="0" marL="0">
               <a:lnSpc>
                 <a:spcPct val="130000"/>
               </a:lnSpc>
@@ -23964,7 +24582,7 @@
             <a:endParaRPr lang="en-US" sz="1000" dirty="0"/>
           </a:p>
           <a:p>
-            <a:pPr marL="0" indent="0">
+            <a:pPr indent="0" marL="0">
               <a:lnSpc>
                 <a:spcPct val="130000"/>
               </a:lnSpc>
@@ -23984,7 +24602,7 @@
             <a:endParaRPr lang="en-US" sz="1000" dirty="0"/>
           </a:p>
           <a:p>
-            <a:pPr marL="0" indent="0">
+            <a:pPr indent="0" marL="0">
               <a:lnSpc>
                 <a:spcPct val="130000"/>
               </a:lnSpc>
@@ -24026,7 +24644,7 @@
           <a:bodyPr wrap="square" lIns="0" tIns="0" rIns="0" bIns="0" rtlCol="0" anchor="ctr"/>
           <a:lstStyle/>
           <a:p>
-            <a:pPr marL="0" indent="0">
+            <a:pPr indent="0" marL="0">
               <a:buNone/>
             </a:pPr>
             <a:r>
@@ -24065,7 +24683,7 @@
           <a:bodyPr wrap="square" lIns="0" tIns="0" rIns="0" bIns="0" rtlCol="0" anchor="ctr"/>
           <a:lstStyle/>
           <a:p>
-            <a:pPr marL="0" indent="0">
+            <a:pPr indent="0" marL="0">
               <a:buNone/>
             </a:pPr>
             <a:r>
@@ -24131,7 +24749,7 @@
           <a:bodyPr wrap="square" lIns="0" tIns="0" rIns="0" bIns="0" rtlCol="0" anchor="ctr"/>
           <a:lstStyle/>
           <a:p>
-            <a:pPr marL="0" indent="0" algn="ctr">
+            <a:pPr algn="ctr" indent="0" marL="0">
               <a:buNone/>
             </a:pPr>
             <a:r>
@@ -24170,7 +24788,7 @@
           <a:bodyPr wrap="square" lIns="0" tIns="0" rIns="0" bIns="0" rtlCol="0" anchor="ctr"/>
           <a:lstStyle/>
           <a:p>
-            <a:pPr marL="0" indent="0">
+            <a:pPr indent="0" marL="0">
               <a:buNone/>
             </a:pPr>
             <a:r>
@@ -24209,7 +24827,7 @@
           <a:bodyPr wrap="square" lIns="0" tIns="0" rIns="0" bIns="0" rtlCol="0" anchor="ctr"/>
           <a:lstStyle/>
           <a:p>
-            <a:pPr marL="0" indent="0">
+            <a:pPr indent="0" marL="0">
               <a:buNone/>
             </a:pPr>
             <a:r>
@@ -24275,7 +24893,7 @@
           <a:bodyPr wrap="square" lIns="0" tIns="0" rIns="0" bIns="0" rtlCol="0" anchor="ctr"/>
           <a:lstStyle/>
           <a:p>
-            <a:pPr marL="0" indent="0" algn="ctr">
+            <a:pPr algn="ctr" indent="0" marL="0">
               <a:buNone/>
             </a:pPr>
             <a:r>
@@ -24314,7 +24932,7 @@
           <a:bodyPr wrap="square" lIns="0" tIns="0" rIns="0" bIns="0" rtlCol="0" anchor="ctr"/>
           <a:lstStyle/>
           <a:p>
-            <a:pPr marL="0" indent="0">
+            <a:pPr indent="0" marL="0">
               <a:buNone/>
             </a:pPr>
             <a:r>
@@ -24353,7 +24971,7 @@
           <a:bodyPr wrap="square" lIns="0" tIns="0" rIns="0" bIns="0" rtlCol="0" anchor="ctr"/>
           <a:lstStyle/>
           <a:p>
-            <a:pPr marL="0" indent="0">
+            <a:pPr indent="0" marL="0">
               <a:buNone/>
             </a:pPr>
             <a:r>
@@ -24419,7 +25037,7 @@
           <a:bodyPr wrap="square" lIns="0" tIns="0" rIns="0" bIns="0" rtlCol="0" anchor="ctr"/>
           <a:lstStyle/>
           <a:p>
-            <a:pPr marL="0" indent="0" algn="ctr">
+            <a:pPr algn="ctr" indent="0" marL="0">
               <a:buNone/>
             </a:pPr>
             <a:r>
@@ -24458,7 +25076,7 @@
           <a:bodyPr wrap="square" lIns="0" tIns="0" rIns="0" bIns="0" rtlCol="0" anchor="ctr"/>
           <a:lstStyle/>
           <a:p>
-            <a:pPr marL="0" indent="0">
+            <a:pPr indent="0" marL="0">
               <a:buNone/>
             </a:pPr>
             <a:r>
@@ -24497,7 +25115,7 @@
           <a:bodyPr wrap="square" lIns="0" tIns="0" rIns="0" bIns="0" rtlCol="0" anchor="ctr"/>
           <a:lstStyle/>
           <a:p>
-            <a:pPr marL="0" indent="0">
+            <a:pPr indent="0" marL="0">
               <a:buNone/>
             </a:pPr>
             <a:r>
@@ -24563,7 +25181,7 @@
           <a:bodyPr wrap="square" lIns="0" tIns="0" rIns="0" bIns="0" rtlCol="0" anchor="ctr"/>
           <a:lstStyle/>
           <a:p>
-            <a:pPr marL="0" indent="0" algn="ctr">
+            <a:pPr algn="ctr" indent="0" marL="0">
               <a:buNone/>
             </a:pPr>
             <a:r>
@@ -24583,7 +25201,7 @@
       </p:sp>
       <p:sp>
         <p:nvSpPr>
-          <p:cNvPr id="26" name="Slide Number Placeholder 0"/>
+          <p:cNvPr id="25" name="Slide Number Placeholder 0"/>
           <p:cNvSpPr>
             <a:spLocks noGrp="1"/>
           </p:cNvSpPr>
@@ -24601,7 +25219,7 @@
           </a:prstGeom>
           <a:extLst>
             <a:ext uri="{C572A759-6A51-4108-AA02-DFA0A04FC94B}">
-              <ma14:wrappingTextBoxFlag xmlns:ma14="http://schemas.microsoft.com/office/mac/drawingml/2011/main" xmlns="" val="0"/>
+              <ma14:wrappingTextBoxFlag xmlns:ma14="http://schemas.microsoft.com/office/mac/drawingml/2011/main" val="0"/>
             </a:ext>
           </a:extLst>
         </p:spPr>
@@ -24622,7 +25240,7 @@
           <a:p>
             <a:pPr algn="l"/>
             <a:fld id="{F7021451-1387-4CA6-816F-3879F97B5CBC}" type="slidenum">
-              <a:rPr lang="en-US" b="0"/>
+              <a:rPr b="0" lang="en-US"/>
               <a:t>9</a:t>
             </a:fld>
             <a:endParaRPr lang="en-US"/>
@@ -24930,299 +25548,4 @@
     </a:ext>
   </a:extLst>
 </a:theme>
-</file>
-
-<file path=ppt/theme/theme2.xml><?xml version="1.0" encoding="utf-8"?>
-<a:theme xmlns:a="http://schemas.openxmlformats.org/drawingml/2006/main" name="Office Theme">
-  <a:themeElements>
-    <a:clrScheme name="Office">
-      <a:dk1>
-        <a:sysClr val="windowText" lastClr="000000"/>
-      </a:dk1>
-      <a:lt1>
-        <a:sysClr val="window" lastClr="FFFFFF"/>
-      </a:lt1>
-      <a:dk2>
-        <a:srgbClr val="44546A"/>
-      </a:dk2>
-      <a:lt2>
-        <a:srgbClr val="E7E6E6"/>
-      </a:lt2>
-      <a:accent1>
-        <a:srgbClr val="4472C4"/>
-      </a:accent1>
-      <a:accent2>
-        <a:srgbClr val="ED7D31"/>
-      </a:accent2>
-      <a:accent3>
-        <a:srgbClr val="A5A5A5"/>
-      </a:accent3>
-      <a:accent4>
-        <a:srgbClr val="FFC000"/>
-      </a:accent4>
-      <a:accent5>
-        <a:srgbClr val="5B9BD5"/>
-      </a:accent5>
-      <a:accent6>
-        <a:srgbClr val="70AD47"/>
-      </a:accent6>
-      <a:hlink>
-        <a:srgbClr val="0563C1"/>
-      </a:hlink>
-      <a:folHlink>
-        <a:srgbClr val="954F72"/>
-      </a:folHlink>
-    </a:clrScheme>
-    <a:fontScheme name="Office">
-      <a:majorFont>
-        <a:latin typeface="Calibri Light" panose="020F0302020204030204"/>
-        <a:ea typeface=""/>
-        <a:cs typeface=""/>
-        <a:font script="Jpan" typeface="游ゴシック Light"/>
-        <a:font script="Hang" typeface="맑은 고딕"/>
-        <a:font script="Hans" typeface="等线 Light"/>
-        <a:font script="Hant" typeface="新細明體"/>
-        <a:font script="Arab" typeface="Times New Roman"/>
-        <a:font script="Hebr" typeface="Times New Roman"/>
-        <a:font script="Thai" typeface="Angsana New"/>
-        <a:font script="Ethi" typeface="Nyala"/>
-        <a:font script="Beng" typeface="Vrinda"/>
-        <a:font script="Gujr" typeface="Shruti"/>
-        <a:font script="Khmr" typeface="MoolBoran"/>
-        <a:font script="Knda" typeface="Tunga"/>
-        <a:font script="Guru" typeface="Raavi"/>
-        <a:font script="Cans" typeface="Euphemia"/>
-        <a:font script="Cher" typeface="Plantagenet Cherokee"/>
-        <a:font script="Yiii" typeface="Microsoft Yi Baiti"/>
-        <a:font script="Tibt" typeface="Microsoft Himalaya"/>
-        <a:font script="Thaa" typeface="MV Boli"/>
-        <a:font script="Deva" typeface="Mangal"/>
-        <a:font script="Telu" typeface="Gautami"/>
-        <a:font script="Taml" typeface="Latha"/>
-        <a:font script="Syrc" typeface="Estrangelo Edessa"/>
-        <a:font script="Orya" typeface="Kalinga"/>
-        <a:font script="Mlym" typeface="Kartika"/>
-        <a:font script="Laoo" typeface="DokChampa"/>
-        <a:font script="Sinh" typeface="Iskoola Pota"/>
-        <a:font script="Mong" typeface="Mongolian Baiti"/>
-        <a:font script="Viet" typeface="Times New Roman"/>
-        <a:font script="Uigh" typeface="Microsoft Uighur"/>
-        <a:font script="Geor" typeface="Sylfaen"/>
-        <a:font script="Armn" typeface="Arial"/>
-        <a:font script="Bugi" typeface="Leelawadee UI"/>
-        <a:font script="Bopo" typeface="Microsoft JhengHei"/>
-        <a:font script="Java" typeface="Javanese Text"/>
-        <a:font script="Lisu" typeface="Segoe UI"/>
-        <a:font script="Mymr" typeface="Myanmar Text"/>
-        <a:font script="Nkoo" typeface="Ebrima"/>
-        <a:font script="Olck" typeface="Nirmala UI"/>
-        <a:font script="Osma" typeface="Ebrima"/>
-        <a:font script="Phag" typeface="Phagspa"/>
-        <a:font script="Syrn" typeface="Estrangelo Edessa"/>
-        <a:font script="Syrj" typeface="Estrangelo Edessa"/>
-        <a:font script="Syre" typeface="Estrangelo Edessa"/>
-        <a:font script="Sora" typeface="Nirmala UI"/>
-        <a:font script="Tale" typeface="Microsoft Tai Le"/>
-        <a:font script="Talu" typeface="Microsoft New Tai Lue"/>
-        <a:font script="Tfng" typeface="Ebrima"/>
-      </a:majorFont>
-      <a:minorFont>
-        <a:latin typeface="Calibri" panose="020F0502020204030204"/>
-        <a:ea typeface=""/>
-        <a:cs typeface=""/>
-        <a:font script="Jpan" typeface="游ゴシック"/>
-        <a:font script="Hang" typeface="맑은 고딕"/>
-        <a:font script="Hans" typeface="等线"/>
-        <a:font script="Hant" typeface="新細明體"/>
-        <a:font script="Arab" typeface="Arial"/>
-        <a:font script="Hebr" typeface="Arial"/>
-        <a:font script="Thai" typeface="Cordia New"/>
-        <a:font script="Ethi" typeface="Nyala"/>
-        <a:font script="Beng" typeface="Vrinda"/>
-        <a:font script="Gujr" typeface="Shruti"/>
-        <a:font script="Khmr" typeface="DaunPenh"/>
-        <a:font script="Knda" typeface="Tunga"/>
-        <a:font script="Guru" typeface="Raavi"/>
-        <a:font script="Cans" typeface="Euphemia"/>
-        <a:font script="Cher" typeface="Plantagenet Cherokee"/>
-        <a:font script="Yiii" typeface="Microsoft Yi Baiti"/>
-        <a:font script="Tibt" typeface="Microsoft Himalaya"/>
-        <a:font script="Thaa" typeface="MV Boli"/>
-        <a:font script="Deva" typeface="Mangal"/>
-        <a:font script="Telu" typeface="Gautami"/>
-        <a:font script="Taml" typeface="Latha"/>
-        <a:font script="Syrc" typeface="Estrangelo Edessa"/>
-        <a:font script="Orya" typeface="Kalinga"/>
-        <a:font script="Mlym" typeface="Kartika"/>
-        <a:font script="Laoo" typeface="DokChampa"/>
-        <a:font script="Sinh" typeface="Iskoola Pota"/>
-        <a:font script="Mong" typeface="Mongolian Baiti"/>
-        <a:font script="Viet" typeface="Arial"/>
-        <a:font script="Uigh" typeface="Microsoft Uighur"/>
-        <a:font script="Geor" typeface="Sylfaen"/>
-        <a:font script="Armn" typeface="Arial"/>
-        <a:font script="Bugi" typeface="Leelawadee UI"/>
-        <a:font script="Bopo" typeface="Microsoft JhengHei"/>
-        <a:font script="Java" typeface="Javanese Text"/>
-        <a:font script="Lisu" typeface="Segoe UI"/>
-        <a:font script="Mymr" typeface="Myanmar Text"/>
-        <a:font script="Nkoo" typeface="Ebrima"/>
-        <a:font script="Olck" typeface="Nirmala UI"/>
-        <a:font script="Osma" typeface="Ebrima"/>
-        <a:font script="Phag" typeface="Phagspa"/>
-        <a:font script="Syrn" typeface="Estrangelo Edessa"/>
-        <a:font script="Syrj" typeface="Estrangelo Edessa"/>
-        <a:font script="Syre" typeface="Estrangelo Edessa"/>
-        <a:font script="Sora" typeface="Nirmala UI"/>
-        <a:font script="Tale" typeface="Microsoft Tai Le"/>
-        <a:font script="Talu" typeface="Microsoft New Tai Lue"/>
-        <a:font script="Tfng" typeface="Ebrima"/>
-      </a:minorFont>
-    </a:fontScheme>
-    <a:fmtScheme name="Office">
-      <a:fillStyleLst>
-        <a:solidFill>
-          <a:schemeClr val="phClr"/>
-        </a:solidFill>
-        <a:gradFill rotWithShape="1">
-          <a:gsLst>
-            <a:gs pos="0">
-              <a:schemeClr val="phClr">
-                <a:lumMod val="110000"/>
-                <a:satMod val="105000"/>
-                <a:tint val="67000"/>
-              </a:schemeClr>
-            </a:gs>
-            <a:gs pos="50000">
-              <a:schemeClr val="phClr">
-                <a:lumMod val="105000"/>
-                <a:satMod val="103000"/>
-                <a:tint val="73000"/>
-              </a:schemeClr>
-            </a:gs>
-            <a:gs pos="100000">
-              <a:schemeClr val="phClr">
-                <a:lumMod val="105000"/>
-                <a:satMod val="109000"/>
-                <a:tint val="81000"/>
-              </a:schemeClr>
-            </a:gs>
-          </a:gsLst>
-          <a:lin ang="5400000" scaled="0"/>
-        </a:gradFill>
-        <a:gradFill rotWithShape="1">
-          <a:gsLst>
-            <a:gs pos="0">
-              <a:schemeClr val="phClr">
-                <a:satMod val="103000"/>
-                <a:lumMod val="102000"/>
-                <a:tint val="94000"/>
-              </a:schemeClr>
-            </a:gs>
-            <a:gs pos="50000">
-              <a:schemeClr val="phClr">
-                <a:satMod val="110000"/>
-                <a:lumMod val="100000"/>
-                <a:shade val="100000"/>
-              </a:schemeClr>
-            </a:gs>
-            <a:gs pos="100000">
-              <a:schemeClr val="phClr">
-                <a:lumMod val="99000"/>
-                <a:satMod val="120000"/>
-                <a:shade val="78000"/>
-              </a:schemeClr>
-            </a:gs>
-          </a:gsLst>
-          <a:lin ang="5400000" scaled="0"/>
-        </a:gradFill>
-      </a:fillStyleLst>
-      <a:lnStyleLst>
-        <a:ln w="6350" cap="flat" cmpd="sng" algn="ctr">
-          <a:solidFill>
-            <a:schemeClr val="phClr"/>
-          </a:solidFill>
-          <a:prstDash val="solid"/>
-          <a:miter lim="800000"/>
-        </a:ln>
-        <a:ln w="12700" cap="flat" cmpd="sng" algn="ctr">
-          <a:solidFill>
-            <a:schemeClr val="phClr"/>
-          </a:solidFill>
-          <a:prstDash val="solid"/>
-          <a:miter lim="800000"/>
-        </a:ln>
-        <a:ln w="19050" cap="flat" cmpd="sng" algn="ctr">
-          <a:solidFill>
-            <a:schemeClr val="phClr"/>
-          </a:solidFill>
-          <a:prstDash val="solid"/>
-          <a:miter lim="800000"/>
-        </a:ln>
-      </a:lnStyleLst>
-      <a:effectStyleLst>
-        <a:effectStyle>
-          <a:effectLst/>
-        </a:effectStyle>
-        <a:effectStyle>
-          <a:effectLst/>
-        </a:effectStyle>
-        <a:effectStyle>
-          <a:effectLst>
-            <a:outerShdw blurRad="57150" dist="19050" dir="5400000" algn="ctr" rotWithShape="0">
-              <a:srgbClr val="000000">
-                <a:alpha val="63000"/>
-              </a:srgbClr>
-            </a:outerShdw>
-          </a:effectLst>
-        </a:effectStyle>
-      </a:effectStyleLst>
-      <a:bgFillStyleLst>
-        <a:solidFill>
-          <a:schemeClr val="phClr"/>
-        </a:solidFill>
-        <a:solidFill>
-          <a:schemeClr val="phClr">
-            <a:tint val="95000"/>
-            <a:satMod val="170000"/>
-          </a:schemeClr>
-        </a:solidFill>
-        <a:gradFill rotWithShape="1">
-          <a:gsLst>
-            <a:gs pos="0">
-              <a:schemeClr val="phClr">
-                <a:tint val="93000"/>
-                <a:satMod val="150000"/>
-                <a:shade val="98000"/>
-                <a:lumMod val="102000"/>
-              </a:schemeClr>
-            </a:gs>
-            <a:gs pos="50000">
-              <a:schemeClr val="phClr">
-                <a:tint val="98000"/>
-                <a:satMod val="130000"/>
-                <a:shade val="90000"/>
-                <a:lumMod val="103000"/>
-              </a:schemeClr>
-            </a:gs>
-            <a:gs pos="100000">
-              <a:schemeClr val="phClr">
-                <a:shade val="63000"/>
-                <a:satMod val="120000"/>
-              </a:schemeClr>
-            </a:gs>
-          </a:gsLst>
-          <a:lin ang="5400000" scaled="0"/>
-        </a:gradFill>
-      </a:bgFillStyleLst>
-    </a:fmtScheme>
-  </a:themeElements>
-  <a:objectDefaults/>
-  <a:extraClrSchemeLst/>
-  <a:extLst>
-    <a:ext uri="{05A4C25C-085E-4340-85A3-A5531E510DB2}">
-      <thm15:themeFamily xmlns:thm15="http://schemas.microsoft.com/office/thememl/2012/main" name="Office Theme" id="{62F939B6-93AF-4DB8-9C6B-D6C7DFDC589F}" vid="{4A3C46E8-61CC-4603-A589-7422A47A8E4A}"/>
-    </a:ext>
-  </a:extLst>
-</a:theme>
 </file>
--- a/docs/decks/L10.pptx
+++ b/docs/decks/L10.pptx
@@ -3521,7 +3521,7 @@
                 <a:ea typeface="Courier New" pitchFamily="34" charset="-122"/>
                 <a:cs typeface="Courier New" pitchFamily="34" charset="-120"/>
               </a:rPr>
-              <a:t>ТИЖДЕНЬ 5 · УРОК 10 З 12</a:t>
+              <a:t>ТИЖДЕНЬ 5 · ТЕМА 10 З 12</a:t>
             </a:r>
             <a:endParaRPr lang="en-US" sz="1200" dirty="0"/>
           </a:p>
@@ -5328,7 +5328,7 @@
                           <a:ea typeface="Montserrat" pitchFamily="34" charset="-122"/>
                           <a:cs typeface="Montserrat" pitchFamily="34" charset="-120"/>
                         </a:rPr>
-                        <a:t>формулювання, яких ви не вигадали б</a:t>
+                        <a:t>формулювання, яких Ви не вигадали б</a:t>
                       </a:r>
                       <a:endParaRPr lang="en-US" sz="1150" dirty="0">
                         <a:latin typeface="Montserrat" charset="0"/>
@@ -5396,7 +5396,7 @@
                           <a:ea typeface="Montserrat" pitchFamily="34" charset="-122"/>
                           <a:cs typeface="Montserrat" pitchFamily="34" charset="-120"/>
                         </a:rPr>
-                        <a:t>ваш справжній трафік, а не уявлення</a:t>
+                        <a:t>Ваш справжній трафік, а не уявлення</a:t>
                       </a:r>
                       <a:endParaRPr lang="en-US" sz="1150" dirty="0">
                         <a:latin typeface="Montserrat" charset="0"/>
@@ -9917,7 +9917,7 @@
                 <a:ea typeface="Montserrat" pitchFamily="34" charset="-122"/>
                 <a:cs typeface="Montserrat" pitchFamily="34" charset="-120"/>
               </a:rPr>
-              <a:t>Регресію з уроку 2 тепер ловить команда, а на тижні 6 — кожен PR.</a:t>
+              <a:t>Регресію з Теми 2 тепер ловить команда, а на тижні 6 — кожен PR.</a:t>
             </a:r>
             <a:endParaRPr lang="en-US" sz="1300" dirty="0"/>
           </a:p>
@@ -11872,7 +11872,7 @@
                 <a:ea typeface="Unbounded" pitchFamily="34" charset="-122"/>
                 <a:cs typeface="Unbounded" pitchFamily="34" charset="-120"/>
               </a:rPr>
-              <a:t>Зараз ви побачите — і навіщо</a:t>
+              <a:t>Зараз Ви побачите — і навіщо</a:t>
             </a:r>
             <a:endParaRPr lang="en-US" sz="2400" dirty="0"/>
           </a:p>
@@ -13063,7 +13063,7 @@
                 <a:ea typeface="Unbounded" pitchFamily="34" charset="-122"/>
                 <a:cs typeface="Unbounded" pitchFamily="34" charset="-120"/>
               </a:rPr>
-              <a:t>Що ви зможете після уроку</a:t>
+              <a:t>Що Ви зможете після теми</a:t>
             </a:r>
             <a:endParaRPr lang="en-US" sz="2400" dirty="0"/>
           </a:p>
@@ -15528,7 +15528,7 @@
                 <a:ea typeface="Montserrat" pitchFamily="34" charset="-122"/>
                 <a:cs typeface="Montserrat" pitchFamily="34" charset="-120"/>
               </a:rPr>
-              <a:t>Тиждень 5 закрито: систему видно і якість виміряна. Лишилося зробити так, щоб перевірка запускалася без вас — це наступний тиждень.</a:t>
+              <a:t>Тиждень 5 закрито: систему видно і якість виміряна. Лишилося зробити так, щоб перевірка запускалася без Вас — це наступний тиждень.</a:t>
             </a:r>
             <a:endParaRPr lang="en-US" sz="1300" dirty="0"/>
           </a:p>
@@ -17621,7 +17621,7 @@
                 <a:ea typeface="Montserrat" pitchFamily="34" charset="-122"/>
                 <a:cs typeface="Montserrat" pitchFamily="34" charset="-120"/>
               </a:rPr>
-              <a:t>Обидва уроки тижня здаються одним PR: живі плитки консолі з уроку 9 плюс розширений eval-контур.</a:t>
+              <a:t>обидві теми тижня здаються одним PR: живі плитки консолі з Теми 9 плюс розширений eval-контур.</a:t>
             </a:r>
             <a:endParaRPr lang="en-US" sz="1250" dirty="0"/>
           </a:p>
@@ -17922,7 +17922,7 @@
                 <a:ea typeface="Montserrat" pitchFamily="34" charset="-122"/>
                 <a:cs typeface="Montserrat" pitchFamily="34" charset="-120"/>
               </a:rPr>
-              <a:t>• таксономія помилок з окремими лічильниками (з уроку 9)</a:t>
+              <a:t>• таксономія помилок з окремими лічильниками (з Теми 9)</a:t>
             </a:r>
             <a:endParaRPr lang="en-US" sz="1200" dirty="0"/>
           </a:p>
@@ -18093,7 +18093,7 @@
                 <a:ea typeface="Courier New" pitchFamily="34" charset="-122"/>
                 <a:cs typeface="Courier New" pitchFamily="34" charset="-120"/>
               </a:rPr>
-              <a:t>ПІДСУМОК УРОКУ 10</a:t>
+              <a:t>ПІДСУМОК ТЕМИ 10</a:t>
             </a:r>
             <a:endParaRPr lang="en-US" sz="1100" dirty="0"/>
           </a:p>
@@ -18469,7 +18469,7 @@
                 <a:ea typeface="Montserrat" pitchFamily="34" charset="-122"/>
                 <a:cs typeface="Montserrat" pitchFamily="34" charset="-120"/>
               </a:rPr>
-              <a:t>Наступний крок → Урок 11 · CI/CD quality gates, canary і rollback</a:t>
+              <a:t>Наступний крок → Тема 11 · CI/CD quality gates, canary і rollback</a:t>
             </a:r>
             <a:endParaRPr lang="en-US" sz="1500" dirty="0"/>
           </a:p>
@@ -18511,7 +18511,7 @@
                 <a:ea typeface="Montserrat" pitchFamily="34" charset="-122"/>
                 <a:cs typeface="Montserrat" pitchFamily="34" charset="-120"/>
               </a:rPr>
-              <a:t>Прогін, який треба не забути запустити, не працює. Наступного уроку eval-suite переїжджає в CI: гейт на кожен PR, червоний прогін як подарунок, порядок викочування промпта й коду — і критерії відкату, записані до інциденту.</a:t>
+              <a:t>Прогін, який треба не забути запустити, не працює. У наступній темі eval-suite переїжджає в CI: гейт на кожен PR, червоний прогін як подарунок, порядок викочування промпта й коду — і критерії відкату, записані до інциденту.</a:t>
             </a:r>
             <a:endParaRPr lang="en-US" sz="1250" dirty="0"/>
           </a:p>
@@ -20475,7 +20475,7 @@
                 <a:ea typeface="Montserrat" pitchFamily="34" charset="-122"/>
                 <a:cs typeface="Montserrat" pitchFamily="34" charset="-120"/>
               </a:rPr>
-              <a:t>Шість слів сьогоднішнього уроку</a:t>
+              <a:t>Шість слів сьогоднішньої теми</a:t>
             </a:r>
             <a:endParaRPr lang="en-US" sz="1300" dirty="0"/>
           </a:p>
@@ -20889,7 +20889,7 @@
                 <a:ea typeface="Montserrat" pitchFamily="34" charset="-122"/>
                 <a:cs typeface="Montserrat" pitchFamily="34" charset="-120"/>
               </a:rPr>
-              <a:t>очікуємо відмову: red-team кейси з уроку 8</a:t>
+              <a:t>очікуємо відмову: red-team кейси з Теми 8</a:t>
             </a:r>
             <a:endParaRPr lang="en-US" sz="1150" dirty="0"/>
           </a:p>
@@ -22173,7 +22173,7 @@
                 <a:ea typeface="Montserrat" pitchFamily="34" charset="-122"/>
                 <a:cs typeface="Montserrat" pitchFamily="34" charset="-120"/>
               </a:rPr>
-              <a:t>провайдер оновив версію — поведінка попливла без вашої дії</a:t>
+              <a:t>провайдер оновив версію — поведінка попливла без Вашої дії</a:t>
             </a:r>
             <a:endParaRPr lang="en-US" sz="1200" dirty="0"/>
           </a:p>
@@ -22212,7 +22212,7 @@
                 <a:ea typeface="Montserrat" pitchFamily="34" charset="-122"/>
                 <a:cs typeface="Montserrat" pitchFamily="34" charset="-120"/>
               </a:rPr>
-              <a:t>три джерела регресій — і жодне з них не сповіщає вас про себе</a:t>
+              <a:t>три джерела регресій — і жодне з них не сповіщає Вас про себе</a:t>
             </a:r>
             <a:endParaRPr lang="en-US" sz="1200" dirty="0"/>
           </a:p>
@@ -22374,7 +22374,7 @@
                 <a:ea typeface="Montserrat" pitchFamily="34" charset="-122"/>
                 <a:cs typeface="Montserrat" pitchFamily="34" charset="-120"/>
               </a:rPr>
-              <a:t>Це відповідь на третє питання з уроку 1 — «хто помітить, що відповіді стали гіршими?». Метрики уроку 9 кажуть «щось не так»; eval'и кажуть «зламалося саме це».</a:t>
+              <a:t>Це відповідь на третє питання з Теми 1 — «хто помітить, що відповіді стали гіршими?». Метрики Теми 9 кажуть «щось не так»; eval'и кажуть «зламалося саме це».</a:t>
             </a:r>
             <a:endParaRPr lang="en-US" sz="1300" dirty="0"/>
           </a:p>
@@ -22937,7 +22937,7 @@
                 <a:ea typeface="Montserrat" pitchFamily="34" charset="-122"/>
                 <a:cs typeface="Montserrat" pitchFamily="34" charset="-120"/>
               </a:rPr>
-              <a:t>очікуємо відмову: red-team кейси з уроку 8</a:t>
+              <a:t>очікуємо відмову: red-team кейси з Теми 8</a:t>
             </a:r>
             <a:endParaRPr lang="en-US" sz="1150" dirty="0"/>
           </a:p>
@@ -23935,7 +23935,7 @@
                 <a:ea typeface="Montserrat" pitchFamily="34" charset="-122"/>
                 <a:cs typeface="Montserrat" pitchFamily="34" charset="-120"/>
               </a:rPr>
-              <a:t>топ реальних інтентів вашого трафіку — список того, що ламати найдорожче</a:t>
+              <a:t>топ реальних інтентів Вашого трафіку — список того, що ламати найдорожче</a:t>
             </a:r>
             <a:endParaRPr lang="en-US" sz="1200" dirty="0"/>
           </a:p>

--- a/docs/decks/L10.pptx
+++ b/docs/decks/L10.pptx
@@ -12929,7 +12929,7 @@
                 <a:ea typeface="Montserrat" pitchFamily="34" charset="-122"/>
                 <a:cs typeface="Montserrat" pitchFamily="34" charset="-120"/>
               </a:rPr>
-              <a:t>Побачити, як якість стає числом: та сама регресія, яку на уроці 2 ловили очима, тепер має вимірюваний вердикт і код виходу для машини.</a:t>
+              <a:t>Побачити, як якість стає числом: та сама регресія, яку у Темі 2 ловили очима, тепер має вимірюваний вердикт і код виходу для машини.</a:t>
             </a:r>
             <a:endParaRPr lang="en-US" sz="1300" dirty="0"/>
           </a:p>

--- a/docs/decks/L10.pptx
+++ b/docs/decks/L10.pptx
@@ -10505,12 +10505,502 @@
         </p:nvSpPr>
         <p:spPr>
           <a:xfrm>
-            <a:off x="566928" y="3749040"/>
-            <a:ext cx="11064240" cy="1234440"/>
+            <a:off x="566928" y="3703320"/>
+            <a:ext cx="2423160" cy="512064"/>
           </a:xfrm>
           <a:prstGeom prst="roundRect">
             <a:avLst>
-              <a:gd name="adj" fmla="val 8889"/>
+              <a:gd name="adj" fmla="val 17857"/>
+            </a:avLst>
+          </a:prstGeom>
+          <a:solidFill>
+            <a:srgbClr val="000000"/>
+          </a:solidFill>
+          <a:ln/>
+        </p:spPr>
+      </p:sp>
+      <p:sp>
+        <p:nvSpPr>
+          <p:cNvPr id="17" name="Text 14"/>
+          <p:cNvSpPr/>
+          <p:nvPr/>
+        </p:nvSpPr>
+        <p:spPr>
+          <a:xfrm>
+            <a:off x="621792" y="3703320"/>
+            <a:ext cx="2313432" cy="512064"/>
+          </a:xfrm>
+          <a:prstGeom prst="rect">
+            <a:avLst/>
+          </a:prstGeom>
+          <a:noFill/>
+          <a:ln/>
+        </p:spPr>
+        <p:txBody>
+          <a:bodyPr wrap="square" lIns="0" tIns="0" rIns="0" bIns="0" rtlCol="0" anchor="ctr"/>
+          <a:lstStyle/>
+          <a:p>
+            <a:pPr algn="ctr" indent="0" marL="0">
+              <a:buNone/>
+            </a:pPr>
+            <a:r>
+              <a:rPr lang="en-US" sz="1050" dirty="0">
+                <a:solidFill>
+                  <a:srgbClr val="FFFFFF"/>
+                </a:solidFill>
+                <a:latin typeface="Courier New" pitchFamily="34" charset="0"/>
+                <a:ea typeface="Courier New" pitchFamily="34" charset="-122"/>
+                <a:cs typeface="Courier New" pitchFamily="34" charset="-120"/>
+              </a:rPr>
+              <a:t>відповідь системи</a:t>
+            </a:r>
+            <a:endParaRPr lang="en-US" sz="1050" dirty="0"/>
+          </a:p>
+        </p:txBody>
+      </p:sp>
+      <p:sp>
+        <p:nvSpPr>
+          <p:cNvPr id="18" name="Shape 15"/>
+          <p:cNvSpPr/>
+          <p:nvPr/>
+        </p:nvSpPr>
+        <p:spPr>
+          <a:xfrm>
+            <a:off x="3081528" y="3959352"/>
+            <a:ext cx="164592" cy="0"/>
+          </a:xfrm>
+          <a:prstGeom prst="line">
+            <a:avLst/>
+          </a:prstGeom>
+          <a:noFill/>
+          <a:ln w="15875">
+            <a:solidFill>
+              <a:srgbClr val="5A05F4"/>
+            </a:solidFill>
+            <a:prstDash val="solid"/>
+          </a:ln>
+        </p:spPr>
+      </p:sp>
+      <p:sp>
+        <p:nvSpPr>
+          <p:cNvPr id="19" name="Shape 16"/>
+          <p:cNvSpPr/>
+          <p:nvPr/>
+        </p:nvSpPr>
+        <p:spPr>
+          <a:xfrm rot="5400000">
+            <a:off x="3209544" y="3890772"/>
+            <a:ext cx="146304" cy="137160"/>
+          </a:xfrm>
+          <a:prstGeom prst="triangle">
+            <a:avLst/>
+          </a:prstGeom>
+          <a:solidFill>
+            <a:srgbClr val="5A05F4"/>
+          </a:solidFill>
+          <a:ln/>
+        </p:spPr>
+      </p:sp>
+      <p:sp>
+        <p:nvSpPr>
+          <p:cNvPr id="20" name="Shape 17"/>
+          <p:cNvSpPr/>
+          <p:nvPr/>
+        </p:nvSpPr>
+        <p:spPr>
+          <a:xfrm>
+            <a:off x="3447288" y="3703320"/>
+            <a:ext cx="2423160" cy="512064"/>
+          </a:xfrm>
+          <a:prstGeom prst="roundRect">
+            <a:avLst>
+              <a:gd name="adj" fmla="val 17857"/>
+            </a:avLst>
+          </a:prstGeom>
+          <a:solidFill>
+            <a:srgbClr val="000000"/>
+          </a:solidFill>
+          <a:ln/>
+        </p:spPr>
+      </p:sp>
+      <p:sp>
+        <p:nvSpPr>
+          <p:cNvPr id="21" name="Text 18"/>
+          <p:cNvSpPr/>
+          <p:nvPr/>
+        </p:nvSpPr>
+        <p:spPr>
+          <a:xfrm>
+            <a:off x="3502152" y="3703320"/>
+            <a:ext cx="2313432" cy="512064"/>
+          </a:xfrm>
+          <a:prstGeom prst="rect">
+            <a:avLst/>
+          </a:prstGeom>
+          <a:noFill/>
+          <a:ln/>
+        </p:spPr>
+        <p:txBody>
+          <a:bodyPr wrap="square" lIns="0" tIns="0" rIns="0" bIns="0" rtlCol="0" anchor="ctr"/>
+          <a:lstStyle/>
+          <a:p>
+            <a:pPr algn="ctr" indent="0" marL="0">
+              <a:buNone/>
+            </a:pPr>
+            <a:r>
+              <a:rPr lang="en-US" sz="1050" b="1" dirty="0">
+                <a:solidFill>
+                  <a:srgbClr val="3FCF8E"/>
+                </a:solidFill>
+                <a:latin typeface="Courier New" pitchFamily="34" charset="0"/>
+                <a:ea typeface="Courier New" pitchFamily="34" charset="-122"/>
+                <a:cs typeface="Courier New" pitchFamily="34" charset="-120"/>
+              </a:rPr>
+              <a:t>rule-based: expect / forbid</a:t>
+            </a:r>
+            <a:endParaRPr lang="en-US" sz="1050" dirty="0"/>
+          </a:p>
+        </p:txBody>
+      </p:sp>
+      <p:sp>
+        <p:nvSpPr>
+          <p:cNvPr id="22" name="Text 19"/>
+          <p:cNvSpPr/>
+          <p:nvPr/>
+        </p:nvSpPr>
+        <p:spPr>
+          <a:xfrm>
+            <a:off x="3447288" y="4251960"/>
+            <a:ext cx="2423160" cy="274320"/>
+          </a:xfrm>
+          <a:prstGeom prst="rect">
+            <a:avLst/>
+          </a:prstGeom>
+          <a:noFill/>
+          <a:ln/>
+        </p:spPr>
+        <p:txBody>
+          <a:bodyPr wrap="square" lIns="0" tIns="0" rIns="0" bIns="0" rtlCol="0" anchor="ctr"/>
+          <a:lstStyle/>
+          <a:p>
+            <a:pPr algn="ctr" indent="0" marL="0">
+              <a:buNone/>
+            </a:pPr>
+            <a:r>
+              <a:rPr lang="en-US" sz="1000" dirty="0">
+                <a:solidFill>
+                  <a:srgbClr val="6B6B6B"/>
+                </a:solidFill>
+                <a:latin typeface="Montserrat" pitchFamily="34" charset="0"/>
+                <a:ea typeface="Montserrat" pitchFamily="34" charset="-122"/>
+                <a:cs typeface="Montserrat" pitchFamily="34" charset="-120"/>
+              </a:rPr>
+              <a:t>безкоштовно, детерміновано</a:t>
+            </a:r>
+            <a:endParaRPr lang="en-US" sz="1000" dirty="0"/>
+          </a:p>
+        </p:txBody>
+      </p:sp>
+      <p:sp>
+        <p:nvSpPr>
+          <p:cNvPr id="23" name="Shape 20"/>
+          <p:cNvSpPr/>
+          <p:nvPr/>
+        </p:nvSpPr>
+        <p:spPr>
+          <a:xfrm>
+            <a:off x="5961888" y="3959352"/>
+            <a:ext cx="164592" cy="0"/>
+          </a:xfrm>
+          <a:prstGeom prst="line">
+            <a:avLst/>
+          </a:prstGeom>
+          <a:noFill/>
+          <a:ln w="15875">
+            <a:solidFill>
+              <a:srgbClr val="5A05F4"/>
+            </a:solidFill>
+            <a:prstDash val="solid"/>
+          </a:ln>
+        </p:spPr>
+      </p:sp>
+      <p:sp>
+        <p:nvSpPr>
+          <p:cNvPr id="24" name="Shape 21"/>
+          <p:cNvSpPr/>
+          <p:nvPr/>
+        </p:nvSpPr>
+        <p:spPr>
+          <a:xfrm rot="5400000">
+            <a:off x="6089904" y="3890772"/>
+            <a:ext cx="146304" cy="137160"/>
+          </a:xfrm>
+          <a:prstGeom prst="triangle">
+            <a:avLst/>
+          </a:prstGeom>
+          <a:solidFill>
+            <a:srgbClr val="5A05F4"/>
+          </a:solidFill>
+          <a:ln/>
+        </p:spPr>
+      </p:sp>
+      <p:sp>
+        <p:nvSpPr>
+          <p:cNvPr id="25" name="Shape 22"/>
+          <p:cNvSpPr/>
+          <p:nvPr/>
+        </p:nvSpPr>
+        <p:spPr>
+          <a:xfrm>
+            <a:off x="6327648" y="3703320"/>
+            <a:ext cx="2423160" cy="512064"/>
+          </a:xfrm>
+          <a:prstGeom prst="roundRect">
+            <a:avLst>
+              <a:gd name="adj" fmla="val 17857"/>
+            </a:avLst>
+          </a:prstGeom>
+          <a:solidFill>
+            <a:srgbClr val="000000"/>
+          </a:solidFill>
+          <a:ln/>
+        </p:spPr>
+      </p:sp>
+      <p:sp>
+        <p:nvSpPr>
+          <p:cNvPr id="26" name="Text 23"/>
+          <p:cNvSpPr/>
+          <p:nvPr/>
+        </p:nvSpPr>
+        <p:spPr>
+          <a:xfrm>
+            <a:off x="6382512" y="3703320"/>
+            <a:ext cx="2313432" cy="512064"/>
+          </a:xfrm>
+          <a:prstGeom prst="rect">
+            <a:avLst/>
+          </a:prstGeom>
+          <a:noFill/>
+          <a:ln/>
+        </p:spPr>
+        <p:txBody>
+          <a:bodyPr wrap="square" lIns="0" tIns="0" rIns="0" bIns="0" rtlCol="0" anchor="ctr"/>
+          <a:lstStyle/>
+          <a:p>
+            <a:pPr algn="ctr" indent="0" marL="0">
+              <a:buNone/>
+            </a:pPr>
+            <a:r>
+              <a:rPr lang="en-US" sz="1050" b="1" dirty="0">
+                <a:solidFill>
+                  <a:srgbClr val="6BA0F8"/>
+                </a:solidFill>
+                <a:latin typeface="Courier New" pitchFamily="34" charset="0"/>
+                <a:ea typeface="Courier New" pitchFamily="34" charset="-122"/>
+                <a:cs typeface="Courier New" pitchFamily="34" charset="-120"/>
+              </a:rPr>
+              <a:t>judge: виклик моделі</a:t>
+            </a:r>
+            <a:endParaRPr lang="en-US" sz="1050" dirty="0"/>
+          </a:p>
+        </p:txBody>
+      </p:sp>
+      <p:sp>
+        <p:nvSpPr>
+          <p:cNvPr id="27" name="Text 24"/>
+          <p:cNvSpPr/>
+          <p:nvPr/>
+        </p:nvSpPr>
+        <p:spPr>
+          <a:xfrm>
+            <a:off x="6327648" y="4251960"/>
+            <a:ext cx="2423160" cy="274320"/>
+          </a:xfrm>
+          <a:prstGeom prst="rect">
+            <a:avLst/>
+          </a:prstGeom>
+          <a:noFill/>
+          <a:ln/>
+        </p:spPr>
+        <p:txBody>
+          <a:bodyPr wrap="square" lIns="0" tIns="0" rIns="0" bIns="0" rtlCol="0" anchor="ctr"/>
+          <a:lstStyle/>
+          <a:p>
+            <a:pPr algn="ctr" indent="0" marL="0">
+              <a:buNone/>
+            </a:pPr>
+            <a:r>
+              <a:rPr lang="en-US" sz="1000" dirty="0">
+                <a:solidFill>
+                  <a:srgbClr val="6B6B6B"/>
+                </a:solidFill>
+                <a:latin typeface="Montserrat" pitchFamily="34" charset="0"/>
+                <a:ea typeface="Montserrat" pitchFamily="34" charset="-122"/>
+                <a:cs typeface="Montserrat" pitchFamily="34" charset="-120"/>
+              </a:rPr>
+              <a:t>$ і різний вердикт</a:t>
+            </a:r>
+            <a:endParaRPr lang="en-US" sz="1000" dirty="0"/>
+          </a:p>
+        </p:txBody>
+      </p:sp>
+      <p:sp>
+        <p:nvSpPr>
+          <p:cNvPr id="28" name="Shape 25"/>
+          <p:cNvSpPr/>
+          <p:nvPr/>
+        </p:nvSpPr>
+        <p:spPr>
+          <a:xfrm>
+            <a:off x="8842248" y="3959352"/>
+            <a:ext cx="164592" cy="0"/>
+          </a:xfrm>
+          <a:prstGeom prst="line">
+            <a:avLst/>
+          </a:prstGeom>
+          <a:noFill/>
+          <a:ln w="15875">
+            <a:solidFill>
+              <a:srgbClr val="5A05F4"/>
+            </a:solidFill>
+            <a:prstDash val="solid"/>
+          </a:ln>
+        </p:spPr>
+      </p:sp>
+      <p:sp>
+        <p:nvSpPr>
+          <p:cNvPr id="29" name="Shape 26"/>
+          <p:cNvSpPr/>
+          <p:nvPr/>
+        </p:nvSpPr>
+        <p:spPr>
+          <a:xfrm rot="5400000">
+            <a:off x="8970264" y="3890772"/>
+            <a:ext cx="146304" cy="137160"/>
+          </a:xfrm>
+          <a:prstGeom prst="triangle">
+            <a:avLst/>
+          </a:prstGeom>
+          <a:solidFill>
+            <a:srgbClr val="5A05F4"/>
+          </a:solidFill>
+          <a:ln/>
+        </p:spPr>
+      </p:sp>
+      <p:sp>
+        <p:nvSpPr>
+          <p:cNvPr id="30" name="Shape 27"/>
+          <p:cNvSpPr/>
+          <p:nvPr/>
+        </p:nvSpPr>
+        <p:spPr>
+          <a:xfrm>
+            <a:off x="9208008" y="3703320"/>
+            <a:ext cx="2423160" cy="512064"/>
+          </a:xfrm>
+          <a:prstGeom prst="roundRect">
+            <a:avLst>
+              <a:gd name="adj" fmla="val 17857"/>
+            </a:avLst>
+          </a:prstGeom>
+          <a:solidFill>
+            <a:srgbClr val="000000"/>
+          </a:solidFill>
+          <a:ln/>
+        </p:spPr>
+      </p:sp>
+      <p:sp>
+        <p:nvSpPr>
+          <p:cNvPr id="31" name="Text 28"/>
+          <p:cNvSpPr/>
+          <p:nvPr/>
+        </p:nvSpPr>
+        <p:spPr>
+          <a:xfrm>
+            <a:off x="9262872" y="3703320"/>
+            <a:ext cx="2313432" cy="512064"/>
+          </a:xfrm>
+          <a:prstGeom prst="rect">
+            <a:avLst/>
+          </a:prstGeom>
+          <a:noFill/>
+          <a:ln/>
+        </p:spPr>
+        <p:txBody>
+          <a:bodyPr wrap="square" lIns="0" tIns="0" rIns="0" bIns="0" rtlCol="0" anchor="ctr"/>
+          <a:lstStyle/>
+          <a:p>
+            <a:pPr algn="ctr" indent="0" marL="0">
+              <a:buNone/>
+            </a:pPr>
+            <a:r>
+              <a:rPr lang="en-US" sz="1050" b="1" dirty="0">
+                <a:solidFill>
+                  <a:srgbClr val="A98BFF"/>
+                </a:solidFill>
+                <a:latin typeface="Courier New" pitchFamily="34" charset="0"/>
+                <a:ea typeface="Courier New" pitchFamily="34" charset="-122"/>
+                <a:cs typeface="Courier New" pitchFamily="34" charset="-120"/>
+              </a:rPr>
+              <a:t>калібрування на розмічених</a:t>
+            </a:r>
+            <a:endParaRPr lang="en-US" sz="1050" dirty="0"/>
+          </a:p>
+        </p:txBody>
+      </p:sp>
+      <p:sp>
+        <p:nvSpPr>
+          <p:cNvPr id="32" name="Text 29"/>
+          <p:cNvSpPr/>
+          <p:nvPr/>
+        </p:nvSpPr>
+        <p:spPr>
+          <a:xfrm>
+            <a:off x="9208008" y="4251960"/>
+            <a:ext cx="2423160" cy="274320"/>
+          </a:xfrm>
+          <a:prstGeom prst="rect">
+            <a:avLst/>
+          </a:prstGeom>
+          <a:noFill/>
+          <a:ln/>
+        </p:spPr>
+        <p:txBody>
+          <a:bodyPr wrap="square" lIns="0" tIns="0" rIns="0" bIns="0" rtlCol="0" anchor="ctr"/>
+          <a:lstStyle/>
+          <a:p>
+            <a:pPr algn="ctr" indent="0" marL="0">
+              <a:buNone/>
+            </a:pPr>
+            <a:r>
+              <a:rPr lang="en-US" sz="1000" dirty="0">
+                <a:solidFill>
+                  <a:srgbClr val="6B6B6B"/>
+                </a:solidFill>
+                <a:latin typeface="Montserrat" pitchFamily="34" charset="0"/>
+                <a:ea typeface="Montserrat" pitchFamily="34" charset="-122"/>
+                <a:cs typeface="Montserrat" pitchFamily="34" charset="-120"/>
+              </a:rPr>
+              <a:t>лише тоді довіряти</a:t>
+            </a:r>
+            <a:endParaRPr lang="en-US" sz="1000" dirty="0"/>
+          </a:p>
+        </p:txBody>
+      </p:sp>
+      <p:sp>
+        <p:nvSpPr>
+          <p:cNvPr id="33" name="Shape 30"/>
+          <p:cNvSpPr/>
+          <p:nvPr/>
+        </p:nvSpPr>
+        <p:spPr>
+          <a:xfrm>
+            <a:off x="566928" y="4663440"/>
+            <a:ext cx="11064240" cy="914400"/>
+          </a:xfrm>
+          <a:prstGeom prst="roundRect">
+            <a:avLst>
+              <a:gd name="adj" fmla="val 12000"/>
             </a:avLst>
           </a:prstGeom>
           <a:solidFill>
@@ -10526,13 +11016,13 @@
       </p:sp>
       <p:sp>
         <p:nvSpPr>
-          <p:cNvPr id="17" name="Text 14"/>
-          <p:cNvSpPr/>
-          <p:nvPr/>
-        </p:nvSpPr>
-        <p:spPr>
-          <a:xfrm>
-            <a:off x="786384" y="3877056"/>
+          <p:cNvPr id="34" name="Text 31"/>
+          <p:cNvSpPr/>
+          <p:nvPr/>
+        </p:nvSpPr>
+        <p:spPr>
+          <a:xfrm>
+            <a:off x="786384" y="4791456"/>
             <a:ext cx="10625328" cy="219456"/>
           </a:xfrm>
           <a:prstGeom prst="rect">
@@ -10565,14 +11055,14 @@
       </p:sp>
       <p:sp>
         <p:nvSpPr>
-          <p:cNvPr id="18" name="Text 15"/>
-          <p:cNvSpPr/>
-          <p:nvPr/>
-        </p:nvSpPr>
-        <p:spPr>
-          <a:xfrm>
-            <a:off x="786384" y="4133088"/>
-            <a:ext cx="10625328" cy="722376"/>
+          <p:cNvPr id="35" name="Text 32"/>
+          <p:cNvSpPr/>
+          <p:nvPr/>
+        </p:nvSpPr>
+        <p:spPr>
+          <a:xfrm>
+            <a:off x="786384" y="5047488"/>
+            <a:ext cx="10625328" cy="402336"/>
           </a:xfrm>
           <a:prstGeom prst="rect">
             <a:avLst/>
@@ -10607,18 +11097,18 @@
       </p:sp>
       <p:sp>
         <p:nvSpPr>
-          <p:cNvPr id="19" name="Shape 16"/>
-          <p:cNvSpPr/>
-          <p:nvPr/>
-        </p:nvSpPr>
-        <p:spPr>
-          <a:xfrm>
-            <a:off x="566928" y="5120640"/>
-            <a:ext cx="11064240" cy="731520"/>
+          <p:cNvPr id="36" name="Shape 33"/>
+          <p:cNvSpPr/>
+          <p:nvPr/>
+        </p:nvSpPr>
+        <p:spPr>
+          <a:xfrm>
+            <a:off x="566928" y="5669280"/>
+            <a:ext cx="11064240" cy="457200"/>
           </a:xfrm>
           <a:prstGeom prst="roundRect">
             <a:avLst>
-              <a:gd name="adj" fmla="val 15000"/>
+              <a:gd name="adj" fmla="val 24000"/>
             </a:avLst>
           </a:prstGeom>
           <a:solidFill>
@@ -10634,14 +11124,14 @@
       </p:sp>
       <p:sp>
         <p:nvSpPr>
-          <p:cNvPr id="20" name="Text 17"/>
-          <p:cNvSpPr/>
-          <p:nvPr/>
-        </p:nvSpPr>
-        <p:spPr>
-          <a:xfrm>
-            <a:off x="786384" y="5266944"/>
-            <a:ext cx="10625328" cy="438912"/>
+          <p:cNvPr id="37" name="Text 34"/>
+          <p:cNvSpPr/>
+          <p:nvPr/>
+        </p:nvSpPr>
+        <p:spPr>
+          <a:xfrm>
+            <a:off x="786384" y="5815584"/>
+            <a:ext cx="10625328" cy="164592"/>
           </a:xfrm>
           <a:prstGeom prst="rect">
             <a:avLst/>
@@ -22181,60 +22671,389 @@
       </p:sp>
       <p:sp>
         <p:nvSpPr>
-          <p:cNvPr id="23" name="Text 20"/>
-          <p:cNvSpPr/>
-          <p:nvPr/>
-        </p:nvSpPr>
-        <p:spPr>
-          <a:xfrm>
-            <a:off x="566928" y="3657600"/>
-            <a:ext cx="10972800" cy="274320"/>
-          </a:xfrm>
-          <a:prstGeom prst="rect">
-            <a:avLst/>
-          </a:prstGeom>
-          <a:noFill/>
-          <a:ln/>
-        </p:spPr>
-        <p:txBody>
-          <a:bodyPr wrap="square" lIns="0" tIns="0" rIns="0" bIns="0" rtlCol="0" anchor="ctr"/>
-          <a:lstStyle/>
-          <a:p>
-            <a:pPr indent="0" marL="0">
-              <a:buNone/>
-            </a:pPr>
-            <a:r>
-              <a:rPr lang="en-US" sz="1200" i="1" dirty="0">
-                <a:solidFill>
-                  <a:srgbClr val="434343"/>
+          <p:cNvPr id="23" name="Shape 20"/>
+          <p:cNvSpPr/>
+          <p:nvPr/>
+        </p:nvSpPr>
+        <p:spPr>
+          <a:xfrm>
+            <a:off x="566928" y="3703320"/>
+            <a:ext cx="2423160" cy="512064"/>
+          </a:xfrm>
+          <a:prstGeom prst="roundRect">
+            <a:avLst>
+              <a:gd name="adj" fmla="val 17857"/>
+            </a:avLst>
+          </a:prstGeom>
+          <a:solidFill>
+            <a:srgbClr val="000000"/>
+          </a:solidFill>
+          <a:ln/>
+        </p:spPr>
+      </p:sp>
+      <p:sp>
+        <p:nvSpPr>
+          <p:cNvPr id="24" name="Text 21"/>
+          <p:cNvSpPr/>
+          <p:nvPr/>
+        </p:nvSpPr>
+        <p:spPr>
+          <a:xfrm>
+            <a:off x="621792" y="3703320"/>
+            <a:ext cx="2313432" cy="512064"/>
+          </a:xfrm>
+          <a:prstGeom prst="rect">
+            <a:avLst/>
+          </a:prstGeom>
+          <a:noFill/>
+          <a:ln/>
+        </p:spPr>
+        <p:txBody>
+          <a:bodyPr wrap="square" lIns="0" tIns="0" rIns="0" bIns="0" rtlCol="0" anchor="ctr"/>
+          <a:lstStyle/>
+          <a:p>
+            <a:pPr algn="ctr" indent="0" marL="0">
+              <a:buNone/>
+            </a:pPr>
+            <a:r>
+              <a:rPr lang="en-US" sz="1050" b="1" dirty="0">
+                <a:solidFill>
+                  <a:srgbClr val="6BA0F8"/>
+                </a:solidFill>
+                <a:latin typeface="Courier New" pitchFamily="34" charset="0"/>
+                <a:ea typeface="Courier New" pitchFamily="34" charset="-122"/>
+                <a:cs typeface="Courier New" pitchFamily="34" charset="-120"/>
+              </a:rPr>
+              <a:t>«маленька правка»</a:t>
+            </a:r>
+            <a:endParaRPr lang="en-US" sz="1050" dirty="0"/>
+          </a:p>
+        </p:txBody>
+      </p:sp>
+      <p:sp>
+        <p:nvSpPr>
+          <p:cNvPr id="25" name="Shape 22"/>
+          <p:cNvSpPr/>
+          <p:nvPr/>
+        </p:nvSpPr>
+        <p:spPr>
+          <a:xfrm>
+            <a:off x="3081528" y="3959352"/>
+            <a:ext cx="164592" cy="0"/>
+          </a:xfrm>
+          <a:prstGeom prst="line">
+            <a:avLst/>
+          </a:prstGeom>
+          <a:noFill/>
+          <a:ln w="15875">
+            <a:solidFill>
+              <a:srgbClr val="5A05F4"/>
+            </a:solidFill>
+            <a:prstDash val="solid"/>
+          </a:ln>
+        </p:spPr>
+      </p:sp>
+      <p:sp>
+        <p:nvSpPr>
+          <p:cNvPr id="26" name="Shape 23"/>
+          <p:cNvSpPr/>
+          <p:nvPr/>
+        </p:nvSpPr>
+        <p:spPr>
+          <a:xfrm rot="5400000">
+            <a:off x="3209544" y="3890772"/>
+            <a:ext cx="146304" cy="137160"/>
+          </a:xfrm>
+          <a:prstGeom prst="triangle">
+            <a:avLst/>
+          </a:prstGeom>
+          <a:solidFill>
+            <a:srgbClr val="5A05F4"/>
+          </a:solidFill>
+          <a:ln/>
+        </p:spPr>
+      </p:sp>
+      <p:sp>
+        <p:nvSpPr>
+          <p:cNvPr id="27" name="Shape 24"/>
+          <p:cNvSpPr/>
+          <p:nvPr/>
+        </p:nvSpPr>
+        <p:spPr>
+          <a:xfrm>
+            <a:off x="3447288" y="3703320"/>
+            <a:ext cx="2423160" cy="512064"/>
+          </a:xfrm>
+          <a:prstGeom prst="roundRect">
+            <a:avLst>
+              <a:gd name="adj" fmla="val 17857"/>
+            </a:avLst>
+          </a:prstGeom>
+          <a:solidFill>
+            <a:srgbClr val="000000"/>
+          </a:solidFill>
+          <a:ln/>
+        </p:spPr>
+      </p:sp>
+      <p:sp>
+        <p:nvSpPr>
+          <p:cNvPr id="28" name="Text 25"/>
+          <p:cNvSpPr/>
+          <p:nvPr/>
+        </p:nvSpPr>
+        <p:spPr>
+          <a:xfrm>
+            <a:off x="3502152" y="3703320"/>
+            <a:ext cx="2313432" cy="512064"/>
+          </a:xfrm>
+          <a:prstGeom prst="rect">
+            <a:avLst/>
+          </a:prstGeom>
+          <a:noFill/>
+          <a:ln/>
+        </p:spPr>
+        <p:txBody>
+          <a:bodyPr wrap="square" lIns="0" tIns="0" rIns="0" bIns="0" rtlCol="0" anchor="ctr"/>
+          <a:lstStyle/>
+          <a:p>
+            <a:pPr algn="ctr" indent="0" marL="0">
+              <a:buNone/>
+            </a:pPr>
+            <a:r>
+              <a:rPr lang="en-US" sz="1050" dirty="0">
+                <a:solidFill>
+                  <a:srgbClr val="FFFFFF"/>
+                </a:solidFill>
+                <a:latin typeface="Courier New" pitchFamily="34" charset="0"/>
+                <a:ea typeface="Courier New" pitchFamily="34" charset="-122"/>
+                <a:cs typeface="Courier New" pitchFamily="34" charset="-120"/>
+              </a:rPr>
+              <a:t>деплою немає · HTTP 200</a:t>
+            </a:r>
+            <a:endParaRPr lang="en-US" sz="1050" dirty="0"/>
+          </a:p>
+        </p:txBody>
+      </p:sp>
+      <p:sp>
+        <p:nvSpPr>
+          <p:cNvPr id="29" name="Text 26"/>
+          <p:cNvSpPr/>
+          <p:nvPr/>
+        </p:nvSpPr>
+        <p:spPr>
+          <a:xfrm>
+            <a:off x="3447288" y="4251960"/>
+            <a:ext cx="2423160" cy="274320"/>
+          </a:xfrm>
+          <a:prstGeom prst="rect">
+            <a:avLst/>
+          </a:prstGeom>
+          <a:noFill/>
+          <a:ln/>
+        </p:spPr>
+        <p:txBody>
+          <a:bodyPr wrap="square" lIns="0" tIns="0" rIns="0" bIns="0" rtlCol="0" anchor="ctr"/>
+          <a:lstStyle/>
+          <a:p>
+            <a:pPr algn="ctr" indent="0" marL="0">
+              <a:buNone/>
+            </a:pPr>
+            <a:r>
+              <a:rPr lang="en-US" sz="1000" dirty="0">
+                <a:solidFill>
+                  <a:srgbClr val="6B6B6B"/>
                 </a:solidFill>
                 <a:latin typeface="Montserrat" pitchFamily="34" charset="0"/>
                 <a:ea typeface="Montserrat" pitchFamily="34" charset="-122"/>
                 <a:cs typeface="Montserrat" pitchFamily="34" charset="-120"/>
               </a:rPr>
-              <a:t>три джерела регресій — і жодне з них не сповіщає Вас про себе</a:t>
-            </a:r>
-            <a:endParaRPr lang="en-US" sz="1200" dirty="0"/>
-          </a:p>
-        </p:txBody>
-      </p:sp>
-      <p:sp>
-        <p:nvSpPr>
-          <p:cNvPr id="24" name="Shape 21"/>
-          <p:cNvSpPr/>
-          <p:nvPr/>
-        </p:nvSpPr>
-        <p:spPr>
-          <a:xfrm>
-            <a:off x="566928" y="4160520"/>
-            <a:ext cx="11064240" cy="1371600"/>
+              <a:t>моніторинг мовчить</a:t>
+            </a:r>
+            <a:endParaRPr lang="en-US" sz="1000" dirty="0"/>
+          </a:p>
+        </p:txBody>
+      </p:sp>
+      <p:sp>
+        <p:nvSpPr>
+          <p:cNvPr id="30" name="Shape 27"/>
+          <p:cNvSpPr/>
+          <p:nvPr/>
+        </p:nvSpPr>
+        <p:spPr>
+          <a:xfrm>
+            <a:off x="5961888" y="3959352"/>
+            <a:ext cx="164592" cy="0"/>
+          </a:xfrm>
+          <a:prstGeom prst="line">
+            <a:avLst/>
+          </a:prstGeom>
+          <a:noFill/>
+          <a:ln w="15875">
+            <a:solidFill>
+              <a:srgbClr val="5A05F4"/>
+            </a:solidFill>
+            <a:prstDash val="solid"/>
+          </a:ln>
+        </p:spPr>
+      </p:sp>
+      <p:sp>
+        <p:nvSpPr>
+          <p:cNvPr id="31" name="Shape 28"/>
+          <p:cNvSpPr/>
+          <p:nvPr/>
+        </p:nvSpPr>
+        <p:spPr>
+          <a:xfrm rot="5400000">
+            <a:off x="6089904" y="3890772"/>
+            <a:ext cx="146304" cy="137160"/>
+          </a:xfrm>
+          <a:prstGeom prst="triangle">
+            <a:avLst/>
+          </a:prstGeom>
+          <a:solidFill>
+            <a:srgbClr val="5A05F4"/>
+          </a:solidFill>
+          <a:ln/>
+        </p:spPr>
+      </p:sp>
+      <p:sp>
+        <p:nvSpPr>
+          <p:cNvPr id="32" name="Shape 29"/>
+          <p:cNvSpPr/>
+          <p:nvPr/>
+        </p:nvSpPr>
+        <p:spPr>
+          <a:xfrm>
+            <a:off x="6327648" y="3703320"/>
+            <a:ext cx="2423160" cy="512064"/>
           </a:xfrm>
           <a:prstGeom prst="roundRect">
             <a:avLst>
-              <a:gd name="adj" fmla="val 8000"/>
+              <a:gd name="adj" fmla="val 17857"/>
             </a:avLst>
           </a:prstGeom>
           <a:solidFill>
+            <a:srgbClr val="000000"/>
+          </a:solidFill>
+          <a:ln/>
+        </p:spPr>
+      </p:sp>
+      <p:sp>
+        <p:nvSpPr>
+          <p:cNvPr id="33" name="Text 30"/>
+          <p:cNvSpPr/>
+          <p:nvPr/>
+        </p:nvSpPr>
+        <p:spPr>
+          <a:xfrm>
+            <a:off x="6382512" y="3703320"/>
+            <a:ext cx="2313432" cy="512064"/>
+          </a:xfrm>
+          <a:prstGeom prst="rect">
+            <a:avLst/>
+          </a:prstGeom>
+          <a:noFill/>
+          <a:ln/>
+        </p:spPr>
+        <p:txBody>
+          <a:bodyPr wrap="square" lIns="0" tIns="0" rIns="0" bIns="0" rtlCol="0" anchor="ctr"/>
+          <a:lstStyle/>
+          <a:p>
+            <a:pPr algn="ctr" indent="0" marL="0">
+              <a:buNone/>
+            </a:pPr>
+            <a:r>
+              <a:rPr lang="en-US" sz="1050" b="1" dirty="0">
+                <a:solidFill>
+                  <a:srgbClr val="FF6B6B"/>
+                </a:solidFill>
+                <a:latin typeface="Courier New" pitchFamily="34" charset="0"/>
+                <a:ea typeface="Courier New" pitchFamily="34" charset="-122"/>
+                <a:cs typeface="Courier New" pitchFamily="34" charset="-120"/>
+              </a:rPr>
+              <a:t>відповіді стали іншими</a:t>
+            </a:r>
+            <a:endParaRPr lang="en-US" sz="1050" dirty="0"/>
+          </a:p>
+        </p:txBody>
+      </p:sp>
+      <p:sp>
+        <p:nvSpPr>
+          <p:cNvPr id="34" name="Text 31"/>
+          <p:cNvSpPr/>
+          <p:nvPr/>
+        </p:nvSpPr>
+        <p:spPr>
+          <a:xfrm>
+            <a:off x="6327648" y="4251960"/>
+            <a:ext cx="2423160" cy="274320"/>
+          </a:xfrm>
+          <a:prstGeom prst="rect">
+            <a:avLst/>
+          </a:prstGeom>
+          <a:noFill/>
+          <a:ln/>
+        </p:spPr>
+        <p:txBody>
+          <a:bodyPr wrap="square" lIns="0" tIns="0" rIns="0" bIns="0" rtlCol="0" anchor="ctr"/>
+          <a:lstStyle/>
+          <a:p>
+            <a:pPr algn="ctr" indent="0" marL="0">
+              <a:buNone/>
+            </a:pPr>
+            <a:r>
+              <a:rPr lang="en-US" sz="1000" dirty="0">
+                <a:solidFill>
+                  <a:srgbClr val="6B6B6B"/>
+                </a:solidFill>
+                <a:latin typeface="Montserrat" pitchFamily="34" charset="0"/>
+                <a:ea typeface="Montserrat" pitchFamily="34" charset="-122"/>
+                <a:cs typeface="Montserrat" pitchFamily="34" charset="-120"/>
+              </a:rPr>
+              <a:t>ніхто не сповістив</a:t>
+            </a:r>
+            <a:endParaRPr lang="en-US" sz="1000" dirty="0"/>
+          </a:p>
+        </p:txBody>
+      </p:sp>
+      <p:sp>
+        <p:nvSpPr>
+          <p:cNvPr id="35" name="Shape 32"/>
+          <p:cNvSpPr/>
+          <p:nvPr/>
+        </p:nvSpPr>
+        <p:spPr>
+          <a:xfrm>
+            <a:off x="8842248" y="3959352"/>
+            <a:ext cx="164592" cy="0"/>
+          </a:xfrm>
+          <a:prstGeom prst="line">
+            <a:avLst/>
+          </a:prstGeom>
+          <a:noFill/>
+          <a:ln w="15875">
+            <a:solidFill>
+              <a:srgbClr val="5A05F4"/>
+            </a:solidFill>
+            <a:prstDash val="solid"/>
+          </a:ln>
+        </p:spPr>
+      </p:sp>
+      <p:sp>
+        <p:nvSpPr>
+          <p:cNvPr id="36" name="Shape 33"/>
+          <p:cNvSpPr/>
+          <p:nvPr/>
+        </p:nvSpPr>
+        <p:spPr>
+          <a:xfrm rot="5400000">
+            <a:off x="8970264" y="3890772"/>
+            <a:ext cx="146304" cy="137160"/>
+          </a:xfrm>
+          <a:prstGeom prst="triangle">
+            <a:avLst/>
+          </a:prstGeom>
+          <a:solidFill>
             <a:srgbClr val="5A05F4"/>
           </a:solidFill>
           <a:ln/>
@@ -22242,13 +23061,135 @@
       </p:sp>
       <p:sp>
         <p:nvSpPr>
-          <p:cNvPr id="25" name="Shape 22"/>
-          <p:cNvSpPr/>
-          <p:nvPr/>
-        </p:nvSpPr>
-        <p:spPr>
-          <a:xfrm>
-            <a:off x="749808" y="4690872"/>
+          <p:cNvPr id="37" name="Shape 34"/>
+          <p:cNvSpPr/>
+          <p:nvPr/>
+        </p:nvSpPr>
+        <p:spPr>
+          <a:xfrm>
+            <a:off x="9208008" y="3703320"/>
+            <a:ext cx="2423160" cy="512064"/>
+          </a:xfrm>
+          <a:prstGeom prst="roundRect">
+            <a:avLst>
+              <a:gd name="adj" fmla="val 17857"/>
+            </a:avLst>
+          </a:prstGeom>
+          <a:solidFill>
+            <a:srgbClr val="000000"/>
+          </a:solidFill>
+          <a:ln/>
+        </p:spPr>
+      </p:sp>
+      <p:sp>
+        <p:nvSpPr>
+          <p:cNvPr id="38" name="Text 35"/>
+          <p:cNvSpPr/>
+          <p:nvPr/>
+        </p:nvSpPr>
+        <p:spPr>
+          <a:xfrm>
+            <a:off x="9262872" y="3703320"/>
+            <a:ext cx="2313432" cy="512064"/>
+          </a:xfrm>
+          <a:prstGeom prst="rect">
+            <a:avLst/>
+          </a:prstGeom>
+          <a:noFill/>
+          <a:ln/>
+        </p:spPr>
+        <p:txBody>
+          <a:bodyPr wrap="square" lIns="0" tIns="0" rIns="0" bIns="0" rtlCol="0" anchor="ctr"/>
+          <a:lstStyle/>
+          <a:p>
+            <a:pPr algn="ctr" indent="0" marL="0">
+              <a:buNone/>
+            </a:pPr>
+            <a:r>
+              <a:rPr lang="en-US" sz="1050" b="1" dirty="0">
+                <a:solidFill>
+                  <a:srgbClr val="3FCF8E"/>
+                </a:solidFill>
+                <a:latin typeface="Courier New" pitchFamily="34" charset="0"/>
+                <a:ea typeface="Courier New" pitchFamily="34" charset="-122"/>
+                <a:cs typeface="Courier New" pitchFamily="34" charset="-120"/>
+              </a:rPr>
+              <a:t>eval-прогін: червоне</a:t>
+            </a:r>
+            <a:endParaRPr lang="en-US" sz="1050" dirty="0"/>
+          </a:p>
+        </p:txBody>
+      </p:sp>
+      <p:sp>
+        <p:nvSpPr>
+          <p:cNvPr id="39" name="Text 36"/>
+          <p:cNvSpPr/>
+          <p:nvPr/>
+        </p:nvSpPr>
+        <p:spPr>
+          <a:xfrm>
+            <a:off x="9208008" y="4251960"/>
+            <a:ext cx="2423160" cy="274320"/>
+          </a:xfrm>
+          <a:prstGeom prst="rect">
+            <a:avLst/>
+          </a:prstGeom>
+          <a:noFill/>
+          <a:ln/>
+        </p:spPr>
+        <p:txBody>
+          <a:bodyPr wrap="square" lIns="0" tIns="0" rIns="0" bIns="0" rtlCol="0" anchor="ctr"/>
+          <a:lstStyle/>
+          <a:p>
+            <a:pPr algn="ctr" indent="0" marL="0">
+              <a:buNone/>
+            </a:pPr>
+            <a:r>
+              <a:rPr lang="en-US" sz="1000" dirty="0">
+                <a:solidFill>
+                  <a:srgbClr val="6B6B6B"/>
+                </a:solidFill>
+                <a:latin typeface="Montserrat" pitchFamily="34" charset="0"/>
+                <a:ea typeface="Montserrat" pitchFamily="34" charset="-122"/>
+                <a:cs typeface="Montserrat" pitchFamily="34" charset="-120"/>
+              </a:rPr>
+              <a:t>число, а не настрій</a:t>
+            </a:r>
+            <a:endParaRPr lang="en-US" sz="1000" dirty="0"/>
+          </a:p>
+        </p:txBody>
+      </p:sp>
+      <p:sp>
+        <p:nvSpPr>
+          <p:cNvPr id="40" name="Shape 37"/>
+          <p:cNvSpPr/>
+          <p:nvPr/>
+        </p:nvSpPr>
+        <p:spPr>
+          <a:xfrm>
+            <a:off x="566928" y="4709160"/>
+            <a:ext cx="11064240" cy="1188720"/>
+          </a:xfrm>
+          <a:prstGeom prst="roundRect">
+            <a:avLst>
+              <a:gd name="adj" fmla="val 9231"/>
+            </a:avLst>
+          </a:prstGeom>
+          <a:solidFill>
+            <a:srgbClr val="5A05F4"/>
+          </a:solidFill>
+          <a:ln/>
+        </p:spPr>
+      </p:sp>
+      <p:sp>
+        <p:nvSpPr>
+          <p:cNvPr id="41" name="Shape 38"/>
+          <p:cNvSpPr/>
+          <p:nvPr/>
+        </p:nvSpPr>
+        <p:spPr>
+          <a:xfrm>
+            <a:off x="749808" y="5148072"/>
             <a:ext cx="310896" cy="310896"/>
           </a:xfrm>
           <a:prstGeom prst="ellipse">
@@ -22262,13 +23203,13 @@
       </p:sp>
       <p:sp>
         <p:nvSpPr>
-          <p:cNvPr id="26" name="Text 23"/>
-          <p:cNvSpPr/>
-          <p:nvPr/>
-        </p:nvSpPr>
-        <p:spPr>
-          <a:xfrm>
-            <a:off x="749808" y="4690872"/>
+          <p:cNvPr id="42" name="Text 39"/>
+          <p:cNvSpPr/>
+          <p:nvPr/>
+        </p:nvSpPr>
+        <p:spPr>
+          <a:xfrm>
+            <a:off x="749808" y="5148072"/>
             <a:ext cx="310896" cy="310896"/>
           </a:xfrm>
           <a:prstGeom prst="rect">
@@ -22301,13 +23242,13 @@
       </p:sp>
       <p:sp>
         <p:nvSpPr>
-          <p:cNvPr id="27" name="Text 24"/>
-          <p:cNvSpPr/>
-          <p:nvPr/>
-        </p:nvSpPr>
-        <p:spPr>
-          <a:xfrm>
-            <a:off x="1243584" y="4288536"/>
+          <p:cNvPr id="43" name="Text 40"/>
+          <p:cNvSpPr/>
+          <p:nvPr/>
+        </p:nvSpPr>
+        <p:spPr>
+          <a:xfrm>
+            <a:off x="1243584" y="4837176"/>
             <a:ext cx="10168128" cy="219456"/>
           </a:xfrm>
           <a:prstGeom prst="rect">
@@ -22340,14 +23281,14 @@
       </p:sp>
       <p:sp>
         <p:nvSpPr>
-          <p:cNvPr id="28" name="Text 25"/>
-          <p:cNvSpPr/>
-          <p:nvPr/>
-        </p:nvSpPr>
-        <p:spPr>
-          <a:xfrm>
-            <a:off x="1243584" y="4544568"/>
-            <a:ext cx="10168128" cy="859536"/>
+          <p:cNvPr id="44" name="Text 41"/>
+          <p:cNvSpPr/>
+          <p:nvPr/>
+        </p:nvSpPr>
+        <p:spPr>
+          <a:xfrm>
+            <a:off x="1243584" y="5093208"/>
+            <a:ext cx="10168128" cy="676656"/>
           </a:xfrm>
           <a:prstGeom prst="rect">
             <a:avLst/>
@@ -24053,31 +24994,31 @@
         <p:spPr>
           <a:xfrm>
             <a:off x="566928" y="3520440"/>
-            <a:ext cx="10972800" cy="274320"/>
-          </a:xfrm>
-          <a:prstGeom prst="rect">
-            <a:avLst/>
-          </a:prstGeom>
-          <a:noFill/>
-          <a:ln/>
-        </p:spPr>
-        <p:txBody>
-          <a:bodyPr wrap="square" lIns="0" tIns="0" rIns="0" bIns="0" rtlCol="0" anchor="ctr"/>
-          <a:lstStyle/>
-          <a:p>
-            <a:pPr algn="ctr" indent="0" marL="0">
-              <a:buNone/>
-            </a:pPr>
-            <a:r>
-              <a:rPr lang="en-US" sz="1250" i="1" dirty="0">
-                <a:solidFill>
-                  <a:srgbClr val="434343"/>
+            <a:ext cx="2944368" cy="329184"/>
+          </a:xfrm>
+          <a:prstGeom prst="rect">
+            <a:avLst/>
+          </a:prstGeom>
+          <a:noFill/>
+          <a:ln/>
+        </p:spPr>
+        <p:txBody>
+          <a:bodyPr wrap="square" lIns="0" tIns="0" rIns="0" bIns="0" rtlCol="0" anchor="ctr"/>
+          <a:lstStyle/>
+          <a:p>
+            <a:pPr algn="l" indent="0" marL="0">
+              <a:buNone/>
+            </a:pPr>
+            <a:r>
+              <a:rPr lang="en-US" sz="1250" dirty="0">
+                <a:solidFill>
+                  <a:srgbClr val="000000"/>
                 </a:solidFill>
                 <a:latin typeface="Montserrat" pitchFamily="34" charset="0"/>
                 <a:ea typeface="Montserrat" pitchFamily="34" charset="-122"/>
                 <a:cs typeface="Montserrat" pitchFamily="34" charset="-120"/>
               </a:rPr>
-              <a:t>хороший датасет = «голова» розподілу + «хвіст» ризиків</a:t>
+              <a:t>FAQ-інтенти</a:t>
             </a:r>
             <a:endParaRPr lang="en-US" sz="1250" dirty="0"/>
           </a:p>
@@ -24091,12 +25032,273 @@
         </p:nvSpPr>
         <p:spPr>
           <a:xfrm>
-            <a:off x="566928" y="4023360"/>
-            <a:ext cx="11064240" cy="1508760"/>
+            <a:off x="3675888" y="3579693"/>
+            <a:ext cx="4023360" cy="210678"/>
           </a:xfrm>
           <a:prstGeom prst="roundRect">
             <a:avLst>
-              <a:gd name="adj" fmla="val 7273"/>
+              <a:gd name="adj" fmla="val 21701"/>
+            </a:avLst>
+          </a:prstGeom>
+          <a:solidFill>
+            <a:srgbClr val="5A05F4"/>
+          </a:solidFill>
+          <a:ln/>
+        </p:spPr>
+      </p:sp>
+      <p:sp>
+        <p:nvSpPr>
+          <p:cNvPr id="16" name="Text 13"/>
+          <p:cNvSpPr/>
+          <p:nvPr/>
+        </p:nvSpPr>
+        <p:spPr>
+          <a:xfrm>
+            <a:off x="7927848" y="3520440"/>
+            <a:ext cx="3474720" cy="329184"/>
+          </a:xfrm>
+          <a:prstGeom prst="rect">
+            <a:avLst/>
+          </a:prstGeom>
+          <a:noFill/>
+          <a:ln/>
+        </p:spPr>
+        <p:txBody>
+          <a:bodyPr wrap="square" lIns="0" tIns="0" rIns="0" bIns="0" rtlCol="0" anchor="ctr"/>
+          <a:lstStyle/>
+          <a:p>
+            <a:pPr indent="0" marL="0">
+              <a:buNone/>
+            </a:pPr>
+            <a:r>
+              <a:rPr lang="en-US" sz="1150" b="1" dirty="0">
+                <a:solidFill>
+                  <a:srgbClr val="5A05F4"/>
+                </a:solidFill>
+                <a:latin typeface="Montserrat" pitchFamily="34" charset="0"/>
+                <a:ea typeface="Montserrat" pitchFamily="34" charset="-122"/>
+                <a:cs typeface="Montserrat" pitchFamily="34" charset="-120"/>
+              </a:rPr>
+              <a:t>«голова» — з лога</a:t>
+            </a:r>
+            <a:endParaRPr lang="en-US" sz="1150" dirty="0"/>
+          </a:p>
+        </p:txBody>
+      </p:sp>
+      <p:sp>
+        <p:nvSpPr>
+          <p:cNvPr id="17" name="Text 14"/>
+          <p:cNvSpPr/>
+          <p:nvPr/>
+        </p:nvSpPr>
+        <p:spPr>
+          <a:xfrm>
+            <a:off x="566928" y="3959352"/>
+            <a:ext cx="2944368" cy="329184"/>
+          </a:xfrm>
+          <a:prstGeom prst="rect">
+            <a:avLst/>
+          </a:prstGeom>
+          <a:noFill/>
+          <a:ln/>
+        </p:spPr>
+        <p:txBody>
+          <a:bodyPr wrap="square" lIns="0" tIns="0" rIns="0" bIns="0" rtlCol="0" anchor="ctr"/>
+          <a:lstStyle/>
+          <a:p>
+            <a:pPr algn="l" indent="0" marL="0">
+              <a:buNone/>
+            </a:pPr>
+            <a:r>
+              <a:rPr lang="en-US" sz="1250" dirty="0">
+                <a:solidFill>
+                  <a:srgbClr val="000000"/>
+                </a:solidFill>
+                <a:latin typeface="Montserrat" pitchFamily="34" charset="0"/>
+                <a:ea typeface="Montserrat" pitchFamily="34" charset="-122"/>
+                <a:cs typeface="Montserrat" pitchFamily="34" charset="-120"/>
+              </a:rPr>
+              <a:t>замовлення · статуси</a:t>
+            </a:r>
+            <a:endParaRPr lang="en-US" sz="1250" dirty="0"/>
+          </a:p>
+        </p:txBody>
+      </p:sp>
+      <p:sp>
+        <p:nvSpPr>
+          <p:cNvPr id="18" name="Shape 15"/>
+          <p:cNvSpPr/>
+          <p:nvPr/>
+        </p:nvSpPr>
+        <p:spPr>
+          <a:xfrm>
+            <a:off x="3675888" y="4018605"/>
+            <a:ext cx="1149531" cy="210678"/>
+          </a:xfrm>
+          <a:prstGeom prst="roundRect">
+            <a:avLst>
+              <a:gd name="adj" fmla="val 21701"/>
+            </a:avLst>
+          </a:prstGeom>
+          <a:solidFill>
+            <a:srgbClr val="5A05F4"/>
+          </a:solidFill>
+          <a:ln/>
+        </p:spPr>
+      </p:sp>
+      <p:sp>
+        <p:nvSpPr>
+          <p:cNvPr id="19" name="Text 16"/>
+          <p:cNvSpPr/>
+          <p:nvPr/>
+        </p:nvSpPr>
+        <p:spPr>
+          <a:xfrm>
+            <a:off x="7927848" y="3959352"/>
+            <a:ext cx="3474720" cy="329184"/>
+          </a:xfrm>
+          <a:prstGeom prst="rect">
+            <a:avLst/>
+          </a:prstGeom>
+          <a:noFill/>
+          <a:ln/>
+        </p:spPr>
+        <p:txBody>
+          <a:bodyPr wrap="square" lIns="0" tIns="0" rIns="0" bIns="0" rtlCol="0" anchor="ctr"/>
+          <a:lstStyle/>
+          <a:p>
+            <a:pPr indent="0" marL="0">
+              <a:buNone/>
+            </a:pPr>
+            <a:r>
+              <a:rPr lang="en-US" sz="1150" b="1" dirty="0">
+                <a:solidFill>
+                  <a:srgbClr val="5A05F4"/>
+                </a:solidFill>
+                <a:latin typeface="Montserrat" pitchFamily="34" charset="0"/>
+                <a:ea typeface="Montserrat" pitchFamily="34" charset="-122"/>
+                <a:cs typeface="Montserrat" pitchFamily="34" charset="-120"/>
+              </a:rPr>
+              <a:t>«голова» — з лога</a:t>
+            </a:r>
+            <a:endParaRPr lang="en-US" sz="1150" dirty="0"/>
+          </a:p>
+        </p:txBody>
+      </p:sp>
+      <p:sp>
+        <p:nvSpPr>
+          <p:cNvPr id="20" name="Text 17"/>
+          <p:cNvSpPr/>
+          <p:nvPr/>
+        </p:nvSpPr>
+        <p:spPr>
+          <a:xfrm>
+            <a:off x="566928" y="4398264"/>
+            <a:ext cx="2944368" cy="329184"/>
+          </a:xfrm>
+          <a:prstGeom prst="rect">
+            <a:avLst/>
+          </a:prstGeom>
+          <a:noFill/>
+          <a:ln/>
+        </p:spPr>
+        <p:txBody>
+          <a:bodyPr wrap="square" lIns="0" tIns="0" rIns="0" bIns="0" rtlCol="0" anchor="ctr"/>
+          <a:lstStyle/>
+          <a:p>
+            <a:pPr algn="l" indent="0" marL="0">
+              <a:buNone/>
+            </a:pPr>
+            <a:r>
+              <a:rPr lang="en-US" sz="1250" dirty="0">
+                <a:solidFill>
+                  <a:srgbClr val="000000"/>
+                </a:solidFill>
+                <a:latin typeface="Montserrat" pitchFamily="34" charset="0"/>
+                <a:ea typeface="Montserrat" pitchFamily="34" charset="-122"/>
+                <a:cs typeface="Montserrat" pitchFamily="34" charset="-120"/>
+              </a:rPr>
+              <a:t>ескалації · дії · атаки</a:t>
+            </a:r>
+            <a:endParaRPr lang="en-US" sz="1250" dirty="0"/>
+          </a:p>
+        </p:txBody>
+      </p:sp>
+      <p:sp>
+        <p:nvSpPr>
+          <p:cNvPr id="21" name="Shape 18"/>
+          <p:cNvSpPr/>
+          <p:nvPr/>
+        </p:nvSpPr>
+        <p:spPr>
+          <a:xfrm>
+            <a:off x="3675888" y="4457517"/>
+            <a:ext cx="574766" cy="210678"/>
+          </a:xfrm>
+          <a:prstGeom prst="roundRect">
+            <a:avLst>
+              <a:gd name="adj" fmla="val 21701"/>
+            </a:avLst>
+          </a:prstGeom>
+          <a:solidFill>
+            <a:srgbClr val="B3261E"/>
+          </a:solidFill>
+          <a:ln/>
+        </p:spPr>
+      </p:sp>
+      <p:sp>
+        <p:nvSpPr>
+          <p:cNvPr id="22" name="Text 19"/>
+          <p:cNvSpPr/>
+          <p:nvPr/>
+        </p:nvSpPr>
+        <p:spPr>
+          <a:xfrm>
+            <a:off x="7927848" y="4398264"/>
+            <a:ext cx="3474720" cy="329184"/>
+          </a:xfrm>
+          <a:prstGeom prst="rect">
+            <a:avLst/>
+          </a:prstGeom>
+          <a:noFill/>
+          <a:ln/>
+        </p:spPr>
+        <p:txBody>
+          <a:bodyPr wrap="square" lIns="0" tIns="0" rIns="0" bIns="0" rtlCol="0" anchor="ctr"/>
+          <a:lstStyle/>
+          <a:p>
+            <a:pPr indent="0" marL="0">
+              <a:buNone/>
+            </a:pPr>
+            <a:r>
+              <a:rPr lang="en-US" sz="1150" b="1" dirty="0">
+                <a:solidFill>
+                  <a:srgbClr val="B3261E"/>
+                </a:solidFill>
+                <a:latin typeface="Montserrat" pitchFamily="34" charset="0"/>
+                <a:ea typeface="Montserrat" pitchFamily="34" charset="-122"/>
+                <a:cs typeface="Montserrat" pitchFamily="34" charset="-120"/>
+              </a:rPr>
+              <a:t>«хвіст» — зі страхів</a:t>
+            </a:r>
+            <a:endParaRPr lang="en-US" sz="1150" dirty="0"/>
+          </a:p>
+        </p:txBody>
+      </p:sp>
+      <p:sp>
+        <p:nvSpPr>
+          <p:cNvPr id="23" name="Shape 20"/>
+          <p:cNvSpPr/>
+          <p:nvPr/>
+        </p:nvSpPr>
+        <p:spPr>
+          <a:xfrm>
+            <a:off x="566928" y="4892040"/>
+            <a:ext cx="11064240" cy="1143000"/>
+          </a:xfrm>
+          <a:prstGeom prst="roundRect">
+            <a:avLst>
+              <a:gd name="adj" fmla="val 9600"/>
             </a:avLst>
           </a:prstGeom>
           <a:solidFill>
@@ -24112,13 +25314,13 @@
       </p:sp>
       <p:sp>
         <p:nvSpPr>
-          <p:cNvPr id="16" name="Text 13"/>
-          <p:cNvSpPr/>
-          <p:nvPr/>
-        </p:nvSpPr>
-        <p:spPr>
-          <a:xfrm>
-            <a:off x="786384" y="4151376"/>
+          <p:cNvPr id="24" name="Text 21"/>
+          <p:cNvSpPr/>
+          <p:nvPr/>
+        </p:nvSpPr>
+        <p:spPr>
+          <a:xfrm>
+            <a:off x="786384" y="5020056"/>
             <a:ext cx="10625328" cy="219456"/>
           </a:xfrm>
           <a:prstGeom prst="rect">
@@ -24151,14 +25353,14 @@
       </p:sp>
       <p:sp>
         <p:nvSpPr>
-          <p:cNvPr id="17" name="Text 14"/>
-          <p:cNvSpPr/>
-          <p:nvPr/>
-        </p:nvSpPr>
-        <p:spPr>
-          <a:xfrm>
-            <a:off x="786384" y="4407408"/>
-            <a:ext cx="10625328" cy="996696"/>
+          <p:cNvPr id="25" name="Text 22"/>
+          <p:cNvSpPr/>
+          <p:nvPr/>
+        </p:nvSpPr>
+        <p:spPr>
+          <a:xfrm>
+            <a:off x="786384" y="5276088"/>
+            <a:ext cx="10625328" cy="630936"/>
           </a:xfrm>
           <a:prstGeom prst="rect">
             <a:avLst/>

--- a/docs/decks/L10.pptx
+++ b/docs/decks/L10.pptx
@@ -12461,29 +12461,7 @@
         </p:nvSpPr>
         <p:spPr>
           <a:xfrm>
-            <a:off x="566928" y="1691640"/>
-            <a:ext cx="3520440" cy="1417320"/>
-          </a:xfrm>
-          <a:prstGeom prst="roundRect">
-            <a:avLst>
-              <a:gd name="adj" fmla="val 7742"/>
-            </a:avLst>
-          </a:prstGeom>
-          <a:solidFill>
-            <a:srgbClr val="000000"/>
-          </a:solidFill>
-          <a:ln/>
-        </p:spPr>
-      </p:sp>
-      <p:sp>
-        <p:nvSpPr>
-          <p:cNvPr id="8" name="Shape 5"/>
-          <p:cNvSpPr/>
-          <p:nvPr/>
-        </p:nvSpPr>
-        <p:spPr>
-          <a:xfrm>
-            <a:off x="768096" y="1874520"/>
+            <a:off x="566928" y="1755648"/>
             <a:ext cx="384048" cy="384048"/>
           </a:xfrm>
           <a:prstGeom prst="ellipse">
@@ -12497,13 +12475,13 @@
       </p:sp>
       <p:sp>
         <p:nvSpPr>
-          <p:cNvPr id="9" name="Text 6"/>
-          <p:cNvSpPr/>
-          <p:nvPr/>
-        </p:nvSpPr>
-        <p:spPr>
-          <a:xfrm>
-            <a:off x="768096" y="1874520"/>
+          <p:cNvPr id="8" name="Text 5"/>
+          <p:cNvSpPr/>
+          <p:nvPr/>
+        </p:nvSpPr>
+        <p:spPr>
+          <a:xfrm>
+            <a:off x="566928" y="1755648"/>
             <a:ext cx="384048" cy="384048"/>
           </a:xfrm>
           <a:prstGeom prst="rect">
@@ -12536,14 +12514,14 @@
       </p:sp>
       <p:sp>
         <p:nvSpPr>
-          <p:cNvPr id="10" name="Text 7"/>
-          <p:cNvSpPr/>
-          <p:nvPr/>
-        </p:nvSpPr>
-        <p:spPr>
-          <a:xfrm>
-            <a:off x="1280160" y="1847088"/>
-            <a:ext cx="2606040" cy="438912"/>
+          <p:cNvPr id="9" name="Text 6"/>
+          <p:cNvSpPr/>
+          <p:nvPr/>
+        </p:nvSpPr>
+        <p:spPr>
+          <a:xfrm>
+            <a:off x="1115568" y="1691640"/>
+            <a:ext cx="6675120" cy="512064"/>
           </a:xfrm>
           <a:prstGeom prst="rect">
             <a:avLst/>
@@ -12559,51 +12537,23 @@
               <a:buNone/>
             </a:pPr>
             <a:r>
-              <a:rPr lang="en-US" sz="1450" b="1" dirty="0">
-                <a:solidFill>
-                  <a:srgbClr val="3FCF8E"/>
+              <a:rPr lang="en-US" sz="1300" b="1" dirty="0">
+                <a:solidFill>
+                  <a:srgbClr val="000000"/>
                 </a:solidFill>
                 <a:latin typeface="Montserrat" pitchFamily="34" charset="0"/>
                 <a:ea typeface="Montserrat" pitchFamily="34" charset="-122"/>
                 <a:cs typeface="Montserrat" pitchFamily="34" charset="-120"/>
               </a:rPr>
-              <a:t>golden.jsonl</a:t>
-            </a:r>
-            <a:endParaRPr lang="en-US" sz="1450" dirty="0"/>
-          </a:p>
-        </p:txBody>
-      </p:sp>
-      <p:sp>
-        <p:nvSpPr>
-          <p:cNvPr id="11" name="Text 8"/>
-          <p:cNvSpPr/>
-          <p:nvPr/>
-        </p:nvSpPr>
-        <p:spPr>
-          <a:xfrm>
-            <a:off x="768096" y="2377440"/>
-            <a:ext cx="3118104" cy="576072"/>
-          </a:xfrm>
-          <a:prstGeom prst="rect">
-            <a:avLst/>
-          </a:prstGeom>
-          <a:noFill/>
-          <a:ln/>
-        </p:spPr>
-        <p:txBody>
-          <a:bodyPr wrap="square" lIns="0" tIns="0" rIns="0" bIns="0" rtlCol="0" anchor="t"/>
-          <a:lstStyle/>
-          <a:p>
+              <a:t>golden.jsonl  </a:t>
+            </a:r>
             <a:pPr indent="0" marL="0">
-              <a:lnSpc>
-                <a:spcPct val="108000"/>
-              </a:lnSpc>
-              <a:buNone/>
-            </a:pPr>
-            <a:r>
-              <a:rPr lang="en-US" sz="1200" dirty="0">
-                <a:solidFill>
-                  <a:srgbClr val="E9E4F7"/>
+              <a:buNone/>
+            </a:pPr>
+            <a:r>
+              <a:rPr lang="en-US" sz="1100" dirty="0">
+                <a:solidFill>
+                  <a:srgbClr val="434343"/>
                 </a:solidFill>
                 <a:latin typeface="Montserrat" pitchFamily="34" charset="0"/>
                 <a:ea typeface="Montserrat" pitchFamily="34" charset="-122"/>
@@ -12611,41 +12561,19 @@
               </a:rPr>
               <a:t>шість кейсів — специфікація п'яти тижнів</a:t>
             </a:r>
-            <a:endParaRPr lang="en-US" sz="1200" dirty="0"/>
-          </a:p>
-        </p:txBody>
-      </p:sp>
-      <p:sp>
-        <p:nvSpPr>
-          <p:cNvPr id="12" name="Shape 9"/>
-          <p:cNvSpPr/>
-          <p:nvPr/>
-        </p:nvSpPr>
-        <p:spPr>
-          <a:xfrm>
-            <a:off x="4270248" y="1691640"/>
-            <a:ext cx="3520440" cy="1417320"/>
-          </a:xfrm>
-          <a:prstGeom prst="roundRect">
-            <a:avLst>
-              <a:gd name="adj" fmla="val 7742"/>
-            </a:avLst>
-          </a:prstGeom>
-          <a:solidFill>
-            <a:srgbClr val="000000"/>
-          </a:solidFill>
-          <a:ln/>
-        </p:spPr>
-      </p:sp>
-      <p:sp>
-        <p:nvSpPr>
-          <p:cNvPr id="13" name="Shape 10"/>
-          <p:cNvSpPr/>
-          <p:nvPr/>
-        </p:nvSpPr>
-        <p:spPr>
-          <a:xfrm>
-            <a:off x="4471416" y="1874520"/>
+            <a:endParaRPr lang="en-US" sz="1300" dirty="0"/>
+          </a:p>
+        </p:txBody>
+      </p:sp>
+      <p:sp>
+        <p:nvSpPr>
+          <p:cNvPr id="10" name="Shape 7"/>
+          <p:cNvSpPr/>
+          <p:nvPr/>
+        </p:nvSpPr>
+        <p:spPr>
+          <a:xfrm>
+            <a:off x="566928" y="2359152"/>
             <a:ext cx="384048" cy="384048"/>
           </a:xfrm>
           <a:prstGeom prst="ellipse">
@@ -12659,13 +12587,13 @@
       </p:sp>
       <p:sp>
         <p:nvSpPr>
-          <p:cNvPr id="14" name="Text 11"/>
-          <p:cNvSpPr/>
-          <p:nvPr/>
-        </p:nvSpPr>
-        <p:spPr>
-          <a:xfrm>
-            <a:off x="4471416" y="1874520"/>
+          <p:cNvPr id="11" name="Text 8"/>
+          <p:cNvSpPr/>
+          <p:nvPr/>
+        </p:nvSpPr>
+        <p:spPr>
+          <a:xfrm>
+            <a:off x="566928" y="2359152"/>
             <a:ext cx="384048" cy="384048"/>
           </a:xfrm>
           <a:prstGeom prst="rect">
@@ -12698,14 +12626,14 @@
       </p:sp>
       <p:sp>
         <p:nvSpPr>
-          <p:cNvPr id="15" name="Text 12"/>
-          <p:cNvSpPr/>
-          <p:nvPr/>
-        </p:nvSpPr>
-        <p:spPr>
-          <a:xfrm>
-            <a:off x="4983480" y="1847088"/>
-            <a:ext cx="2606040" cy="438912"/>
+          <p:cNvPr id="12" name="Text 9"/>
+          <p:cNvSpPr/>
+          <p:nvPr/>
+        </p:nvSpPr>
+        <p:spPr>
+          <a:xfrm>
+            <a:off x="1115568" y="2295144"/>
+            <a:ext cx="6675120" cy="512064"/>
           </a:xfrm>
           <a:prstGeom prst="rect">
             <a:avLst/>
@@ -12721,51 +12649,23 @@
               <a:buNone/>
             </a:pPr>
             <a:r>
-              <a:rPr lang="en-US" sz="1450" b="1" dirty="0">
-                <a:solidFill>
-                  <a:srgbClr val="3FCF8E"/>
+              <a:rPr lang="en-US" sz="1300" b="1" dirty="0">
+                <a:solidFill>
+                  <a:srgbClr val="000000"/>
                 </a:solidFill>
                 <a:latin typeface="Montserrat" pitchFamily="34" charset="0"/>
                 <a:ea typeface="Montserrat" pitchFamily="34" charset="-122"/>
                 <a:cs typeface="Montserrat" pitchFamily="34" charset="-120"/>
               </a:rPr>
-              <a:t>run.py → 6/6</a:t>
-            </a:r>
-            <a:endParaRPr lang="en-US" sz="1450" dirty="0"/>
-          </a:p>
-        </p:txBody>
-      </p:sp>
-      <p:sp>
-        <p:nvSpPr>
-          <p:cNvPr id="16" name="Text 13"/>
-          <p:cNvSpPr/>
-          <p:nvPr/>
-        </p:nvSpPr>
-        <p:spPr>
-          <a:xfrm>
-            <a:off x="4471416" y="2377440"/>
-            <a:ext cx="3118104" cy="576072"/>
-          </a:xfrm>
-          <a:prstGeom prst="rect">
-            <a:avLst/>
-          </a:prstGeom>
-          <a:noFill/>
-          <a:ln/>
-        </p:spPr>
-        <p:txBody>
-          <a:bodyPr wrap="square" lIns="0" tIns="0" rIns="0" bIns="0" rtlCol="0" anchor="t"/>
-          <a:lstStyle/>
-          <a:p>
+              <a:t>run.py → 6/6  </a:t>
+            </a:r>
             <a:pPr indent="0" marL="0">
-              <a:lnSpc>
-                <a:spcPct val="108000"/>
-              </a:lnSpc>
-              <a:buNone/>
-            </a:pPr>
-            <a:r>
-              <a:rPr lang="en-US" sz="1200" dirty="0">
-                <a:solidFill>
-                  <a:srgbClr val="E9E4F7"/>
+              <a:buNone/>
+            </a:pPr>
+            <a:r>
+              <a:rPr lang="en-US" sz="1100" dirty="0">
+                <a:solidFill>
+                  <a:srgbClr val="434343"/>
                 </a:solidFill>
                 <a:latin typeface="Montserrat" pitchFamily="34" charset="0"/>
                 <a:ea typeface="Montserrat" pitchFamily="34" charset="-122"/>
@@ -12773,61 +12673,39 @@
               </a:rPr>
               <a:t>зелений прогін, exit 0</a:t>
             </a:r>
-            <a:endParaRPr lang="en-US" sz="1200" dirty="0"/>
-          </a:p>
-        </p:txBody>
-      </p:sp>
-      <p:sp>
-        <p:nvSpPr>
-          <p:cNvPr id="17" name="Shape 14"/>
-          <p:cNvSpPr/>
-          <p:nvPr/>
-        </p:nvSpPr>
-        <p:spPr>
-          <a:xfrm>
-            <a:off x="7973568" y="1691640"/>
-            <a:ext cx="3520440" cy="1417320"/>
-          </a:xfrm>
-          <a:prstGeom prst="roundRect">
-            <a:avLst>
-              <a:gd name="adj" fmla="val 7742"/>
-            </a:avLst>
-          </a:prstGeom>
-          <a:solidFill>
-            <a:srgbClr val="000000"/>
-          </a:solidFill>
-          <a:ln/>
-        </p:spPr>
-      </p:sp>
-      <p:sp>
-        <p:nvSpPr>
-          <p:cNvPr id="18" name="Shape 15"/>
-          <p:cNvSpPr/>
-          <p:nvPr/>
-        </p:nvSpPr>
-        <p:spPr>
-          <a:xfrm>
-            <a:off x="8174736" y="1874520"/>
+            <a:endParaRPr lang="en-US" sz="1300" dirty="0"/>
+          </a:p>
+        </p:txBody>
+      </p:sp>
+      <p:sp>
+        <p:nvSpPr>
+          <p:cNvPr id="13" name="Shape 10"/>
+          <p:cNvSpPr/>
+          <p:nvPr/>
+        </p:nvSpPr>
+        <p:spPr>
+          <a:xfrm>
+            <a:off x="566928" y="2962656"/>
             <a:ext cx="384048" cy="384048"/>
           </a:xfrm>
           <a:prstGeom prst="ellipse">
             <a:avLst/>
           </a:prstGeom>
           <a:solidFill>
-            <a:srgbClr val="5A05F4"/>
-          </a:solidFill>
-          <a:ln/>
-        </p:spPr>
-      </p:sp>
-      <p:sp>
-        <p:nvSpPr>
-          <p:cNvPr id="19" name="Text 16"/>
-          <p:cNvSpPr/>
-          <p:nvPr/>
-        </p:nvSpPr>
-        <p:spPr>
-          <a:xfrm>
-            <a:off x="8174736" y="1874520"/>
+            <a:srgbClr val="B3261E"/>
+          </a:solidFill>
+          <a:ln/>
+        </p:spPr>
+      </p:sp>
+      <p:sp>
+        <p:nvSpPr>
+          <p:cNvPr id="14" name="Text 11"/>
+          <p:cNvSpPr/>
+          <p:nvPr/>
+        </p:nvSpPr>
+        <p:spPr>
+          <a:xfrm>
+            <a:off x="566928" y="2962656"/>
             <a:ext cx="384048" cy="384048"/>
           </a:xfrm>
           <a:prstGeom prst="rect">
@@ -12860,14 +12738,14 @@
       </p:sp>
       <p:sp>
         <p:nvSpPr>
-          <p:cNvPr id="20" name="Text 17"/>
-          <p:cNvSpPr/>
-          <p:nvPr/>
-        </p:nvSpPr>
-        <p:spPr>
-          <a:xfrm>
-            <a:off x="8686800" y="1847088"/>
-            <a:ext cx="2606040" cy="438912"/>
+          <p:cNvPr id="15" name="Text 12"/>
+          <p:cNvSpPr/>
+          <p:nvPr/>
+        </p:nvSpPr>
+        <p:spPr>
+          <a:xfrm>
+            <a:off x="1115568" y="2898648"/>
+            <a:ext cx="6675120" cy="512064"/>
           </a:xfrm>
           <a:prstGeom prst="rect">
             <a:avLst/>
@@ -12883,51 +12761,23 @@
               <a:buNone/>
             </a:pPr>
             <a:r>
-              <a:rPr lang="en-US" sz="1450" b="1" dirty="0">
-                <a:solidFill>
-                  <a:srgbClr val="FF6B6B"/>
+              <a:rPr lang="en-US" sz="1300" b="1" dirty="0">
+                <a:solidFill>
+                  <a:srgbClr val="B3261E"/>
                 </a:solidFill>
                 <a:latin typeface="Montserrat" pitchFamily="34" charset="0"/>
                 <a:ea typeface="Montserrat" pitchFamily="34" charset="-122"/>
                 <a:cs typeface="Montserrat" pitchFamily="34" charset="-120"/>
               </a:rPr>
-              <a:t>activate v1 → 3/6</a:t>
-            </a:r>
-            <a:endParaRPr lang="en-US" sz="1450" dirty="0"/>
-          </a:p>
-        </p:txBody>
-      </p:sp>
-      <p:sp>
-        <p:nvSpPr>
-          <p:cNvPr id="21" name="Text 18"/>
-          <p:cNvSpPr/>
-          <p:nvPr/>
-        </p:nvSpPr>
-        <p:spPr>
-          <a:xfrm>
-            <a:off x="8174736" y="2377440"/>
-            <a:ext cx="3118104" cy="576072"/>
-          </a:xfrm>
-          <a:prstGeom prst="rect">
-            <a:avLst/>
-          </a:prstGeom>
-          <a:noFill/>
-          <a:ln/>
-        </p:spPr>
-        <p:txBody>
-          <a:bodyPr wrap="square" lIns="0" tIns="0" rIns="0" bIns="0" rtlCol="0" anchor="t"/>
-          <a:lstStyle/>
-          <a:p>
+              <a:t>activate v1 → 3/6  </a:t>
+            </a:r>
             <a:pPr indent="0" marL="0">
-              <a:lnSpc>
-                <a:spcPct val="108000"/>
-              </a:lnSpc>
-              <a:buNone/>
-            </a:pPr>
-            <a:r>
-              <a:rPr lang="en-US" sz="1200" dirty="0">
-                <a:solidFill>
-                  <a:srgbClr val="E9E4F7"/>
+              <a:buNone/>
+            </a:pPr>
+            <a:r>
+              <a:rPr lang="en-US" sz="1100" dirty="0">
+                <a:solidFill>
+                  <a:srgbClr val="434343"/>
                 </a:solidFill>
                 <a:latin typeface="Montserrat" pitchFamily="34" charset="0"/>
                 <a:ea typeface="Montserrat" pitchFamily="34" charset="-122"/>
@@ -12935,41 +12785,19 @@
               </a:rPr>
               <a:t>ЧЕРВОНО, exit 1 — регресія спіймана</a:t>
             </a:r>
-            <a:endParaRPr lang="en-US" sz="1200" dirty="0"/>
-          </a:p>
-        </p:txBody>
-      </p:sp>
-      <p:sp>
-        <p:nvSpPr>
-          <p:cNvPr id="22" name="Shape 19"/>
-          <p:cNvSpPr/>
-          <p:nvPr/>
-        </p:nvSpPr>
-        <p:spPr>
-          <a:xfrm>
-            <a:off x="566928" y="3291840"/>
-            <a:ext cx="3520440" cy="1417320"/>
-          </a:xfrm>
-          <a:prstGeom prst="roundRect">
-            <a:avLst>
-              <a:gd name="adj" fmla="val 7742"/>
-            </a:avLst>
-          </a:prstGeom>
-          <a:solidFill>
-            <a:srgbClr val="000000"/>
-          </a:solidFill>
-          <a:ln/>
-        </p:spPr>
-      </p:sp>
-      <p:sp>
-        <p:nvSpPr>
-          <p:cNvPr id="23" name="Shape 20"/>
-          <p:cNvSpPr/>
-          <p:nvPr/>
-        </p:nvSpPr>
-        <p:spPr>
-          <a:xfrm>
-            <a:off x="768096" y="3474720"/>
+            <a:endParaRPr lang="en-US" sz="1300" dirty="0"/>
+          </a:p>
+        </p:txBody>
+      </p:sp>
+      <p:sp>
+        <p:nvSpPr>
+          <p:cNvPr id="16" name="Shape 13"/>
+          <p:cNvSpPr/>
+          <p:nvPr/>
+        </p:nvSpPr>
+        <p:spPr>
+          <a:xfrm>
+            <a:off x="566928" y="3566160"/>
             <a:ext cx="384048" cy="384048"/>
           </a:xfrm>
           <a:prstGeom prst="ellipse">
@@ -12983,13 +12811,13 @@
       </p:sp>
       <p:sp>
         <p:nvSpPr>
-          <p:cNvPr id="24" name="Text 21"/>
-          <p:cNvSpPr/>
-          <p:nvPr/>
-        </p:nvSpPr>
-        <p:spPr>
-          <a:xfrm>
-            <a:off x="768096" y="3474720"/>
+          <p:cNvPr id="17" name="Text 14"/>
+          <p:cNvSpPr/>
+          <p:nvPr/>
+        </p:nvSpPr>
+        <p:spPr>
+          <a:xfrm>
+            <a:off x="566928" y="3566160"/>
             <a:ext cx="384048" cy="384048"/>
           </a:xfrm>
           <a:prstGeom prst="rect">
@@ -13022,14 +12850,14 @@
       </p:sp>
       <p:sp>
         <p:nvSpPr>
-          <p:cNvPr id="25" name="Text 22"/>
-          <p:cNvSpPr/>
-          <p:nvPr/>
-        </p:nvSpPr>
-        <p:spPr>
-          <a:xfrm>
-            <a:off x="1280160" y="3447288"/>
-            <a:ext cx="2606040" cy="438912"/>
+          <p:cNvPr id="18" name="Text 15"/>
+          <p:cNvSpPr/>
+          <p:nvPr/>
+        </p:nvSpPr>
+        <p:spPr>
+          <a:xfrm>
+            <a:off x="1115568" y="3502152"/>
+            <a:ext cx="6675120" cy="512064"/>
           </a:xfrm>
           <a:prstGeom prst="rect">
             <a:avLst/>
@@ -13045,51 +12873,23 @@
               <a:buNone/>
             </a:pPr>
             <a:r>
-              <a:rPr lang="en-US" sz="1450" b="1" dirty="0">
-                <a:solidFill>
-                  <a:srgbClr val="3FCF8E"/>
+              <a:rPr lang="en-US" sz="1300" b="1" dirty="0">
+                <a:solidFill>
+                  <a:srgbClr val="000000"/>
                 </a:solidFill>
                 <a:latin typeface="Montserrat" pitchFamily="34" charset="0"/>
                 <a:ea typeface="Montserrat" pitchFamily="34" charset="-122"/>
                 <a:cs typeface="Montserrat" pitchFamily="34" charset="-120"/>
               </a:rPr>
-              <a:t>activate v2 → 6/6</a:t>
-            </a:r>
-            <a:endParaRPr lang="en-US" sz="1450" dirty="0"/>
-          </a:p>
-        </p:txBody>
-      </p:sp>
-      <p:sp>
-        <p:nvSpPr>
-          <p:cNvPr id="26" name="Text 23"/>
-          <p:cNvSpPr/>
-          <p:nvPr/>
-        </p:nvSpPr>
-        <p:spPr>
-          <a:xfrm>
-            <a:off x="768096" y="3977640"/>
-            <a:ext cx="3118104" cy="576072"/>
-          </a:xfrm>
-          <a:prstGeom prst="rect">
-            <a:avLst/>
-          </a:prstGeom>
-          <a:noFill/>
-          <a:ln/>
-        </p:spPr>
-        <p:txBody>
-          <a:bodyPr wrap="square" lIns="0" tIns="0" rIns="0" bIns="0" rtlCol="0" anchor="t"/>
-          <a:lstStyle/>
-          <a:p>
+              <a:t>activate v2 → 6/6  </a:t>
+            </a:r>
             <a:pPr indent="0" marL="0">
-              <a:lnSpc>
-                <a:spcPct val="108000"/>
-              </a:lnSpc>
-              <a:buNone/>
-            </a:pPr>
-            <a:r>
-              <a:rPr lang="en-US" sz="1200" dirty="0">
-                <a:solidFill>
-                  <a:srgbClr val="E9E4F7"/>
+              <a:buNone/>
+            </a:pPr>
+            <a:r>
+              <a:rPr lang="en-US" sz="1100" dirty="0">
+                <a:solidFill>
+                  <a:srgbClr val="434343"/>
                 </a:solidFill>
                 <a:latin typeface="Montserrat" pitchFamily="34" charset="0"/>
                 <a:ea typeface="Montserrat" pitchFamily="34" charset="-122"/>
@@ -13097,41 +12897,19 @@
               </a:rPr>
               <a:t>відкат, зелено знову</a:t>
             </a:r>
-            <a:endParaRPr lang="en-US" sz="1200" dirty="0"/>
-          </a:p>
-        </p:txBody>
-      </p:sp>
-      <p:sp>
-        <p:nvSpPr>
-          <p:cNvPr id="27" name="Shape 24"/>
-          <p:cNvSpPr/>
-          <p:nvPr/>
-        </p:nvSpPr>
-        <p:spPr>
-          <a:xfrm>
-            <a:off x="4270248" y="3291840"/>
-            <a:ext cx="3520440" cy="1417320"/>
-          </a:xfrm>
-          <a:prstGeom prst="roundRect">
-            <a:avLst>
-              <a:gd name="adj" fmla="val 7742"/>
-            </a:avLst>
-          </a:prstGeom>
-          <a:solidFill>
-            <a:srgbClr val="000000"/>
-          </a:solidFill>
-          <a:ln/>
-        </p:spPr>
-      </p:sp>
-      <p:sp>
-        <p:nvSpPr>
-          <p:cNvPr id="28" name="Shape 25"/>
-          <p:cNvSpPr/>
-          <p:nvPr/>
-        </p:nvSpPr>
-        <p:spPr>
-          <a:xfrm>
-            <a:off x="4471416" y="3474720"/>
+            <a:endParaRPr lang="en-US" sz="1300" dirty="0"/>
+          </a:p>
+        </p:txBody>
+      </p:sp>
+      <p:sp>
+        <p:nvSpPr>
+          <p:cNvPr id="19" name="Shape 16"/>
+          <p:cNvSpPr/>
+          <p:nvPr/>
+        </p:nvSpPr>
+        <p:spPr>
+          <a:xfrm>
+            <a:off x="566928" y="4169664"/>
             <a:ext cx="384048" cy="384048"/>
           </a:xfrm>
           <a:prstGeom prst="ellipse">
@@ -13145,13 +12923,13 @@
       </p:sp>
       <p:sp>
         <p:nvSpPr>
-          <p:cNvPr id="29" name="Text 26"/>
-          <p:cNvSpPr/>
-          <p:nvPr/>
-        </p:nvSpPr>
-        <p:spPr>
-          <a:xfrm>
-            <a:off x="4471416" y="3474720"/>
+          <p:cNvPr id="20" name="Text 17"/>
+          <p:cNvSpPr/>
+          <p:nvPr/>
+        </p:nvSpPr>
+        <p:spPr>
+          <a:xfrm>
+            <a:off x="566928" y="4169664"/>
             <a:ext cx="384048" cy="384048"/>
           </a:xfrm>
           <a:prstGeom prst="rect">
@@ -13184,14 +12962,14 @@
       </p:sp>
       <p:sp>
         <p:nvSpPr>
-          <p:cNvPr id="30" name="Text 27"/>
-          <p:cNvSpPr/>
-          <p:nvPr/>
-        </p:nvSpPr>
-        <p:spPr>
-          <a:xfrm>
-            <a:off x="4983480" y="3447288"/>
-            <a:ext cx="2606040" cy="438912"/>
+          <p:cNvPr id="21" name="Text 18"/>
+          <p:cNvSpPr/>
+          <p:nvPr/>
+        </p:nvSpPr>
+        <p:spPr>
+          <a:xfrm>
+            <a:off x="1115568" y="4105656"/>
+            <a:ext cx="6675120" cy="512064"/>
           </a:xfrm>
           <a:prstGeom prst="rect">
             <a:avLst/>
@@ -13207,51 +12985,23 @@
               <a:buNone/>
             </a:pPr>
             <a:r>
-              <a:rPr lang="en-US" sz="1450" b="1" dirty="0">
-                <a:solidFill>
-                  <a:srgbClr val="3FCF8E"/>
+              <a:rPr lang="en-US" sz="1300" b="1" dirty="0">
+                <a:solidFill>
+                  <a:srgbClr val="000000"/>
                 </a:solidFill>
                 <a:latin typeface="Montserrat" pitchFamily="34" charset="0"/>
                 <a:ea typeface="Montserrat" pitchFamily="34" charset="-122"/>
                 <a:cs typeface="Montserrat" pitchFamily="34" charset="-120"/>
               </a:rPr>
-              <a:t>echo $?</a:t>
-            </a:r>
-            <a:endParaRPr lang="en-US" sz="1450" dirty="0"/>
-          </a:p>
-        </p:txBody>
-      </p:sp>
-      <p:sp>
-        <p:nvSpPr>
-          <p:cNvPr id="31" name="Text 28"/>
-          <p:cNvSpPr/>
-          <p:nvPr/>
-        </p:nvSpPr>
-        <p:spPr>
-          <a:xfrm>
-            <a:off x="4471416" y="3977640"/>
-            <a:ext cx="3118104" cy="576072"/>
-          </a:xfrm>
-          <a:prstGeom prst="rect">
-            <a:avLst/>
-          </a:prstGeom>
-          <a:noFill/>
-          <a:ln/>
-        </p:spPr>
-        <p:txBody>
-          <a:bodyPr wrap="square" lIns="0" tIns="0" rIns="0" bIns="0" rtlCol="0" anchor="t"/>
-          <a:lstStyle/>
-          <a:p>
+              <a:t>echo $?  </a:t>
+            </a:r>
             <a:pPr indent="0" marL="0">
-              <a:lnSpc>
-                <a:spcPct val="108000"/>
-              </a:lnSpc>
-              <a:buNone/>
-            </a:pPr>
-            <a:r>
-              <a:rPr lang="en-US" sz="1200" dirty="0">
-                <a:solidFill>
-                  <a:srgbClr val="E9E4F7"/>
+              <a:buNone/>
+            </a:pPr>
+            <a:r>
+              <a:rPr lang="en-US" sz="1100" dirty="0">
+                <a:solidFill>
+                  <a:srgbClr val="434343"/>
                 </a:solidFill>
                 <a:latin typeface="Montserrat" pitchFamily="34" charset="0"/>
                 <a:ea typeface="Montserrat" pitchFamily="34" charset="-122"/>
@@ -13259,13 +13009,541 @@
               </a:rPr>
               <a:t>код виходу окремо, без pipe</a:t>
             </a:r>
-            <a:endParaRPr lang="en-US" sz="1200" dirty="0"/>
-          </a:p>
-        </p:txBody>
-      </p:sp>
-      <p:sp>
-        <p:nvSpPr>
-          <p:cNvPr id="32" name="Shape 29"/>
+            <a:endParaRPr lang="en-US" sz="1300" dirty="0"/>
+          </a:p>
+        </p:txBody>
+      </p:sp>
+      <p:sp>
+        <p:nvSpPr>
+          <p:cNvPr id="22" name="Shape 19"/>
+          <p:cNvSpPr/>
+          <p:nvPr/>
+        </p:nvSpPr>
+        <p:spPr>
+          <a:xfrm>
+            <a:off x="8156448" y="1691640"/>
+            <a:ext cx="3474720" cy="3063240"/>
+          </a:xfrm>
+          <a:prstGeom prst="roundRect">
+            <a:avLst>
+              <a:gd name="adj" fmla="val 2388"/>
+            </a:avLst>
+          </a:prstGeom>
+          <a:solidFill>
+            <a:srgbClr val="0A0810"/>
+          </a:solidFill>
+          <a:ln w="12700">
+            <a:solidFill>
+              <a:srgbClr val="D9D9D9"/>
+            </a:solidFill>
+            <a:prstDash val="solid"/>
+          </a:ln>
+        </p:spPr>
+      </p:sp>
+      <p:sp>
+        <p:nvSpPr>
+          <p:cNvPr id="23" name="Shape 20"/>
+          <p:cNvSpPr/>
+          <p:nvPr/>
+        </p:nvSpPr>
+        <p:spPr>
+          <a:xfrm>
+            <a:off x="8284464" y="1810512"/>
+            <a:ext cx="73152" cy="73152"/>
+          </a:xfrm>
+          <a:prstGeom prst="ellipse">
+            <a:avLst/>
+          </a:prstGeom>
+          <a:solidFill>
+            <a:srgbClr val="FF6B6B"/>
+          </a:solidFill>
+          <a:ln/>
+        </p:spPr>
+      </p:sp>
+      <p:sp>
+        <p:nvSpPr>
+          <p:cNvPr id="24" name="Shape 21"/>
+          <p:cNvSpPr/>
+          <p:nvPr/>
+        </p:nvSpPr>
+        <p:spPr>
+          <a:xfrm>
+            <a:off x="8430768" y="1810512"/>
+            <a:ext cx="73152" cy="73152"/>
+          </a:xfrm>
+          <a:prstGeom prst="ellipse">
+            <a:avLst/>
+          </a:prstGeom>
+          <a:solidFill>
+            <a:srgbClr val="6BA0F8"/>
+          </a:solidFill>
+          <a:ln/>
+        </p:spPr>
+      </p:sp>
+      <p:sp>
+        <p:nvSpPr>
+          <p:cNvPr id="25" name="Shape 22"/>
+          <p:cNvSpPr/>
+          <p:nvPr/>
+        </p:nvSpPr>
+        <p:spPr>
+          <a:xfrm>
+            <a:off x="8577072" y="1810512"/>
+            <a:ext cx="73152" cy="73152"/>
+          </a:xfrm>
+          <a:prstGeom prst="ellipse">
+            <a:avLst/>
+          </a:prstGeom>
+          <a:solidFill>
+            <a:srgbClr val="3FCF8E"/>
+          </a:solidFill>
+          <a:ln/>
+        </p:spPr>
+      </p:sp>
+      <p:sp>
+        <p:nvSpPr>
+          <p:cNvPr id="26" name="Text 23"/>
+          <p:cNvSpPr/>
+          <p:nvPr/>
+        </p:nvSpPr>
+        <p:spPr>
+          <a:xfrm>
+            <a:off x="8759952" y="1691640"/>
+            <a:ext cx="2761488" cy="310896"/>
+          </a:xfrm>
+          <a:prstGeom prst="rect">
+            <a:avLst/>
+          </a:prstGeom>
+          <a:noFill/>
+          <a:ln/>
+        </p:spPr>
+        <p:txBody>
+          <a:bodyPr wrap="square" lIns="0" tIns="0" rIns="0" bIns="0" rtlCol="0" anchor="ctr"/>
+          <a:lstStyle/>
+          <a:p>
+            <a:pPr indent="0" marL="0">
+              <a:buNone/>
+            </a:pPr>
+            <a:r>
+              <a:rPr lang="en-US" sz="800" dirty="0">
+                <a:solidFill>
+                  <a:srgbClr val="9A94AA"/>
+                </a:solidFill>
+                <a:latin typeface="Courier New" pitchFamily="34" charset="0"/>
+                <a:ea typeface="Courier New" pitchFamily="34" charset="-122"/>
+                <a:cs typeface="Courier New" pitchFamily="34" charset="-120"/>
+              </a:rPr>
+              <a:t>terminal · evals</a:t>
+            </a:r>
+            <a:endParaRPr lang="en-US" sz="800" dirty="0"/>
+          </a:p>
+        </p:txBody>
+      </p:sp>
+      <p:sp>
+        <p:nvSpPr>
+          <p:cNvPr id="27" name="Shape 24"/>
+          <p:cNvSpPr/>
+          <p:nvPr/>
+        </p:nvSpPr>
+        <p:spPr>
+          <a:xfrm>
+            <a:off x="8156448" y="2002536"/>
+            <a:ext cx="3474720" cy="0"/>
+          </a:xfrm>
+          <a:prstGeom prst="line">
+            <a:avLst/>
+          </a:prstGeom>
+          <a:noFill/>
+          <a:ln w="9525">
+            <a:solidFill>
+              <a:srgbClr val="2A2438"/>
+            </a:solidFill>
+            <a:prstDash val="solid"/>
+          </a:ln>
+        </p:spPr>
+      </p:sp>
+      <p:sp>
+        <p:nvSpPr>
+          <p:cNvPr id="28" name="Text 25"/>
+          <p:cNvSpPr/>
+          <p:nvPr/>
+        </p:nvSpPr>
+        <p:spPr>
+          <a:xfrm>
+            <a:off x="8321040" y="2112264"/>
+            <a:ext cx="3145536" cy="221513"/>
+          </a:xfrm>
+          <a:prstGeom prst="rect">
+            <a:avLst/>
+          </a:prstGeom>
+          <a:noFill/>
+          <a:ln/>
+        </p:spPr>
+        <p:txBody>
+          <a:bodyPr wrap="square" lIns="0" tIns="0" rIns="0" bIns="0" rtlCol="0" anchor="ctr"/>
+          <a:lstStyle/>
+          <a:p>
+            <a:pPr indent="0" marL="0">
+              <a:buNone/>
+            </a:pPr>
+            <a:r>
+              <a:rPr lang="en-US" sz="950" dirty="0">
+                <a:solidFill>
+                  <a:srgbClr val="D8D4E4"/>
+                </a:solidFill>
+                <a:latin typeface="Courier New" pitchFamily="34" charset="0"/>
+                <a:ea typeface="Courier New" pitchFamily="34" charset="-122"/>
+                <a:cs typeface="Courier New" pitchFamily="34" charset="-120"/>
+              </a:rPr>
+              <a:t>$ python evals/run.py</a:t>
+            </a:r>
+            <a:endParaRPr lang="en-US" sz="950" dirty="0"/>
+          </a:p>
+        </p:txBody>
+      </p:sp>
+      <p:sp>
+        <p:nvSpPr>
+          <p:cNvPr id="29" name="Text 26"/>
+          <p:cNvSpPr/>
+          <p:nvPr/>
+        </p:nvSpPr>
+        <p:spPr>
+          <a:xfrm>
+            <a:off x="8321040" y="2333777"/>
+            <a:ext cx="3145536" cy="221513"/>
+          </a:xfrm>
+          <a:prstGeom prst="rect">
+            <a:avLst/>
+          </a:prstGeom>
+          <a:noFill/>
+          <a:ln/>
+        </p:spPr>
+        <p:txBody>
+          <a:bodyPr wrap="square" lIns="0" tIns="0" rIns="0" bIns="0" rtlCol="0" anchor="ctr"/>
+          <a:lstStyle/>
+          <a:p>
+            <a:pPr indent="0" marL="0">
+              <a:buNone/>
+            </a:pPr>
+            <a:r>
+              <a:rPr lang="en-US" sz="950" dirty="0">
+                <a:solidFill>
+                  <a:srgbClr val="3FCF8E"/>
+                </a:solidFill>
+                <a:latin typeface="Courier New" pitchFamily="34" charset="0"/>
+                <a:ea typeface="Courier New" pitchFamily="34" charset="-122"/>
+                <a:cs typeface="Courier New" pitchFamily="34" charset="-120"/>
+              </a:rPr>
+              <a:t> ✓ faq-1   ✓ faq-2   ✓ order-1</a:t>
+            </a:r>
+            <a:endParaRPr lang="en-US" sz="950" dirty="0"/>
+          </a:p>
+        </p:txBody>
+      </p:sp>
+      <p:sp>
+        <p:nvSpPr>
+          <p:cNvPr id="30" name="Text 27"/>
+          <p:cNvSpPr/>
+          <p:nvPr/>
+        </p:nvSpPr>
+        <p:spPr>
+          <a:xfrm>
+            <a:off x="8321040" y="2555291"/>
+            <a:ext cx="3145536" cy="221513"/>
+          </a:xfrm>
+          <a:prstGeom prst="rect">
+            <a:avLst/>
+          </a:prstGeom>
+          <a:noFill/>
+          <a:ln/>
+        </p:spPr>
+        <p:txBody>
+          <a:bodyPr wrap="square" lIns="0" tIns="0" rIns="0" bIns="0" rtlCol="0" anchor="ctr"/>
+          <a:lstStyle/>
+          <a:p>
+            <a:pPr indent="0" marL="0">
+              <a:buNone/>
+            </a:pPr>
+            <a:r>
+              <a:rPr lang="en-US" sz="950" dirty="0">
+                <a:solidFill>
+                  <a:srgbClr val="3FCF8E"/>
+                </a:solidFill>
+                <a:latin typeface="Courier New" pitchFamily="34" charset="0"/>
+                <a:ea typeface="Courier New" pitchFamily="34" charset="-122"/>
+                <a:cs typeface="Courier New" pitchFamily="34" charset="-120"/>
+              </a:rPr>
+              <a:t> ✓ refund-1 ✓ safety-1 ✓ caps-1</a:t>
+            </a:r>
+            <a:endParaRPr lang="en-US" sz="950" dirty="0"/>
+          </a:p>
+        </p:txBody>
+      </p:sp>
+      <p:sp>
+        <p:nvSpPr>
+          <p:cNvPr id="31" name="Text 28"/>
+          <p:cNvSpPr/>
+          <p:nvPr/>
+        </p:nvSpPr>
+        <p:spPr>
+          <a:xfrm>
+            <a:off x="8321040" y="2776804"/>
+            <a:ext cx="3145536" cy="221513"/>
+          </a:xfrm>
+          <a:prstGeom prst="rect">
+            <a:avLst/>
+          </a:prstGeom>
+          <a:noFill/>
+          <a:ln/>
+        </p:spPr>
+        <p:txBody>
+          <a:bodyPr wrap="square" lIns="0" tIns="0" rIns="0" bIns="0" rtlCol="0" anchor="ctr"/>
+          <a:lstStyle/>
+          <a:p>
+            <a:pPr indent="0" marL="0">
+              <a:buNone/>
+            </a:pPr>
+            <a:r>
+              <a:rPr lang="en-US" sz="950" b="1" dirty="0">
+                <a:solidFill>
+                  <a:srgbClr val="3FCF8E"/>
+                </a:solidFill>
+                <a:latin typeface="Courier New" pitchFamily="34" charset="0"/>
+                <a:ea typeface="Courier New" pitchFamily="34" charset="-122"/>
+                <a:cs typeface="Courier New" pitchFamily="34" charset="-120"/>
+              </a:rPr>
+              <a:t> 6/6 passed · threshold 5</a:t>
+            </a:r>
+            <a:endParaRPr lang="en-US" sz="950" dirty="0"/>
+          </a:p>
+        </p:txBody>
+      </p:sp>
+      <p:sp>
+        <p:nvSpPr>
+          <p:cNvPr id="32" name="Text 29"/>
+          <p:cNvSpPr/>
+          <p:nvPr/>
+        </p:nvSpPr>
+        <p:spPr>
+          <a:xfrm>
+            <a:off x="8321040" y="2998318"/>
+            <a:ext cx="3145536" cy="221513"/>
+          </a:xfrm>
+          <a:prstGeom prst="rect">
+            <a:avLst/>
+          </a:prstGeom>
+          <a:noFill/>
+          <a:ln/>
+        </p:spPr>
+        <p:txBody>
+          <a:bodyPr wrap="square" lIns="0" tIns="0" rIns="0" bIns="0" rtlCol="0" anchor="ctr"/>
+          <a:lstStyle/>
+          <a:p>
+            <a:pPr indent="0" marL="0">
+              <a:buNone/>
+            </a:pPr>
+            <a:endParaRPr lang="en-US" sz="950" dirty="0"/>
+          </a:p>
+        </p:txBody>
+      </p:sp>
+      <p:sp>
+        <p:nvSpPr>
+          <p:cNvPr id="33" name="Text 30"/>
+          <p:cNvSpPr/>
+          <p:nvPr/>
+        </p:nvSpPr>
+        <p:spPr>
+          <a:xfrm>
+            <a:off x="8321040" y="3219831"/>
+            <a:ext cx="3145536" cy="221513"/>
+          </a:xfrm>
+          <a:prstGeom prst="rect">
+            <a:avLst/>
+          </a:prstGeom>
+          <a:noFill/>
+          <a:ln/>
+        </p:spPr>
+        <p:txBody>
+          <a:bodyPr wrap="square" lIns="0" tIns="0" rIns="0" bIns="0" rtlCol="0" anchor="ctr"/>
+          <a:lstStyle/>
+          <a:p>
+            <a:pPr indent="0" marL="0">
+              <a:buNone/>
+            </a:pPr>
+            <a:r>
+              <a:rPr lang="en-US" sz="950" dirty="0">
+                <a:solidFill>
+                  <a:srgbClr val="D8D4E4"/>
+                </a:solidFill>
+                <a:latin typeface="Courier New" pitchFamily="34" charset="0"/>
+                <a:ea typeface="Courier New" pitchFamily="34" charset="-122"/>
+                <a:cs typeface="Courier New" pitchFamily="34" charset="-120"/>
+              </a:rPr>
+              <a:t>$ curl -X POST …/prompts/v1/activate</a:t>
+            </a:r>
+            <a:endParaRPr lang="en-US" sz="950" dirty="0"/>
+          </a:p>
+        </p:txBody>
+      </p:sp>
+      <p:sp>
+        <p:nvSpPr>
+          <p:cNvPr id="34" name="Text 31"/>
+          <p:cNvSpPr/>
+          <p:nvPr/>
+        </p:nvSpPr>
+        <p:spPr>
+          <a:xfrm>
+            <a:off x="8321040" y="3441344"/>
+            <a:ext cx="3145536" cy="221513"/>
+          </a:xfrm>
+          <a:prstGeom prst="rect">
+            <a:avLst/>
+          </a:prstGeom>
+          <a:noFill/>
+          <a:ln/>
+        </p:spPr>
+        <p:txBody>
+          <a:bodyPr wrap="square" lIns="0" tIns="0" rIns="0" bIns="0" rtlCol="0" anchor="ctr"/>
+          <a:lstStyle/>
+          <a:p>
+            <a:pPr indent="0" marL="0">
+              <a:buNone/>
+            </a:pPr>
+            <a:r>
+              <a:rPr lang="en-US" sz="950" dirty="0">
+                <a:solidFill>
+                  <a:srgbClr val="D8D4E4"/>
+                </a:solidFill>
+                <a:latin typeface="Courier New" pitchFamily="34" charset="0"/>
+                <a:ea typeface="Courier New" pitchFamily="34" charset="-122"/>
+                <a:cs typeface="Courier New" pitchFamily="34" charset="-120"/>
+              </a:rPr>
+              <a:t>$ python evals/run.py</a:t>
+            </a:r>
+            <a:endParaRPr lang="en-US" sz="950" dirty="0"/>
+          </a:p>
+        </p:txBody>
+      </p:sp>
+      <p:sp>
+        <p:nvSpPr>
+          <p:cNvPr id="35" name="Text 32"/>
+          <p:cNvSpPr/>
+          <p:nvPr/>
+        </p:nvSpPr>
+        <p:spPr>
+          <a:xfrm>
+            <a:off x="8321040" y="3662858"/>
+            <a:ext cx="3145536" cy="221513"/>
+          </a:xfrm>
+          <a:prstGeom prst="rect">
+            <a:avLst/>
+          </a:prstGeom>
+          <a:noFill/>
+          <a:ln/>
+        </p:spPr>
+        <p:txBody>
+          <a:bodyPr wrap="square" lIns="0" tIns="0" rIns="0" bIns="0" rtlCol="0" anchor="ctr"/>
+          <a:lstStyle/>
+          <a:p>
+            <a:pPr indent="0" marL="0">
+              <a:buNone/>
+            </a:pPr>
+            <a:r>
+              <a:rPr lang="en-US" sz="950" b="1" dirty="0">
+                <a:solidFill>
+                  <a:srgbClr val="FF6B6B"/>
+                </a:solidFill>
+                <a:latin typeface="Courier New" pitchFamily="34" charset="0"/>
+                <a:ea typeface="Courier New" pitchFamily="34" charset="-122"/>
+                <a:cs typeface="Courier New" pitchFamily="34" charset="-120"/>
+              </a:rPr>
+              <a:t> 3/6 passed · threshold 5 · FAIL</a:t>
+            </a:r>
+            <a:endParaRPr lang="en-US" sz="950" dirty="0"/>
+          </a:p>
+        </p:txBody>
+      </p:sp>
+      <p:sp>
+        <p:nvSpPr>
+          <p:cNvPr id="36" name="Text 33"/>
+          <p:cNvSpPr/>
+          <p:nvPr/>
+        </p:nvSpPr>
+        <p:spPr>
+          <a:xfrm>
+            <a:off x="8321040" y="3884371"/>
+            <a:ext cx="3145536" cy="221513"/>
+          </a:xfrm>
+          <a:prstGeom prst="rect">
+            <a:avLst/>
+          </a:prstGeom>
+          <a:noFill/>
+          <a:ln/>
+        </p:spPr>
+        <p:txBody>
+          <a:bodyPr wrap="square" lIns="0" tIns="0" rIns="0" bIns="0" rtlCol="0" anchor="ctr"/>
+          <a:lstStyle/>
+          <a:p>
+            <a:pPr indent="0" marL="0">
+              <a:buNone/>
+            </a:pPr>
+            <a:r>
+              <a:rPr lang="en-US" sz="950" dirty="0">
+                <a:solidFill>
+                  <a:srgbClr val="D8D4E4"/>
+                </a:solidFill>
+                <a:latin typeface="Courier New" pitchFamily="34" charset="0"/>
+                <a:ea typeface="Courier New" pitchFamily="34" charset="-122"/>
+                <a:cs typeface="Courier New" pitchFamily="34" charset="-120"/>
+              </a:rPr>
+              <a:t>$ echo $?</a:t>
+            </a:r>
+            <a:endParaRPr lang="en-US" sz="950" dirty="0"/>
+          </a:p>
+        </p:txBody>
+      </p:sp>
+      <p:sp>
+        <p:nvSpPr>
+          <p:cNvPr id="37" name="Text 34"/>
+          <p:cNvSpPr/>
+          <p:nvPr/>
+        </p:nvSpPr>
+        <p:spPr>
+          <a:xfrm>
+            <a:off x="8321040" y="4105885"/>
+            <a:ext cx="3145536" cy="221513"/>
+          </a:xfrm>
+          <a:prstGeom prst="rect">
+            <a:avLst/>
+          </a:prstGeom>
+          <a:noFill/>
+          <a:ln/>
+        </p:spPr>
+        <p:txBody>
+          <a:bodyPr wrap="square" lIns="0" tIns="0" rIns="0" bIns="0" rtlCol="0" anchor="ctr"/>
+          <a:lstStyle/>
+          <a:p>
+            <a:pPr indent="0" marL="0">
+              <a:buNone/>
+            </a:pPr>
+            <a:r>
+              <a:rPr lang="en-US" sz="950" dirty="0">
+                <a:solidFill>
+                  <a:srgbClr val="FF6B6B"/>
+                </a:solidFill>
+                <a:latin typeface="Courier New" pitchFamily="34" charset="0"/>
+                <a:ea typeface="Courier New" pitchFamily="34" charset="-122"/>
+                <a:cs typeface="Courier New" pitchFamily="34" charset="-120"/>
+              </a:rPr>
+              <a:t> 1</a:t>
+            </a:r>
+            <a:endParaRPr lang="en-US" sz="950" dirty="0"/>
+          </a:p>
+        </p:txBody>
+      </p:sp>
+      <p:sp>
+        <p:nvSpPr>
+          <p:cNvPr id="38" name="Shape 35"/>
           <p:cNvSpPr/>
           <p:nvPr/>
         </p:nvSpPr>
@@ -13287,7 +13565,7 @@
       </p:sp>
       <p:sp>
         <p:nvSpPr>
-          <p:cNvPr id="33" name="Shape 30"/>
+          <p:cNvPr id="39" name="Shape 36"/>
           <p:cNvSpPr/>
           <p:nvPr/>
         </p:nvSpPr>
@@ -13307,7 +13585,7 @@
       </p:sp>
       <p:sp>
         <p:nvSpPr>
-          <p:cNvPr id="34" name="Text 31"/>
+          <p:cNvPr id="40" name="Text 37"/>
           <p:cNvSpPr/>
           <p:nvPr/>
         </p:nvSpPr>
@@ -13346,7 +13624,7 @@
       </p:sp>
       <p:sp>
         <p:nvSpPr>
-          <p:cNvPr id="35" name="Text 32"/>
+          <p:cNvPr id="41" name="Text 38"/>
           <p:cNvSpPr/>
           <p:nvPr/>
         </p:nvSpPr>
@@ -13385,7 +13663,7 @@
       </p:sp>
       <p:sp>
         <p:nvSpPr>
-          <p:cNvPr id="36" name="Text 33"/>
+          <p:cNvPr id="42" name="Text 39"/>
           <p:cNvSpPr/>
           <p:nvPr/>
         </p:nvSpPr>
@@ -15655,11 +15933,11 @@
         <p:spPr>
           <a:xfrm>
             <a:off x="566928" y="1737360"/>
-            <a:ext cx="3566160" cy="2148840"/>
+            <a:ext cx="7223760" cy="1051560"/>
           </a:xfrm>
           <a:prstGeom prst="roundRect">
             <a:avLst>
-              <a:gd name="adj" fmla="val 5106"/>
+              <a:gd name="adj" fmla="val 10435"/>
             </a:avLst>
           </a:prstGeom>
           <a:solidFill>
@@ -15677,7 +15955,7 @@
         <p:spPr>
           <a:xfrm>
             <a:off x="768096" y="1892808"/>
-            <a:ext cx="3163824" cy="438912"/>
+            <a:ext cx="6821424" cy="438912"/>
           </a:xfrm>
           <a:prstGeom prst="rect">
             <a:avLst/>
@@ -15716,7 +15994,7 @@
         <p:spPr>
           <a:xfrm>
             <a:off x="768096" y="2423160"/>
-            <a:ext cx="3163824" cy="1307592"/>
+            <a:ext cx="6821424" cy="210312"/>
           </a:xfrm>
           <a:prstGeom prst="rect">
             <a:avLst/>
@@ -15757,12 +16035,12 @@
         </p:nvSpPr>
         <p:spPr>
           <a:xfrm>
-            <a:off x="4315968" y="1737360"/>
-            <a:ext cx="3566160" cy="2148840"/>
+            <a:off x="566928" y="2926080"/>
+            <a:ext cx="7223760" cy="1051560"/>
           </a:xfrm>
           <a:prstGeom prst="roundRect">
             <a:avLst>
-              <a:gd name="adj" fmla="val 5106"/>
+              <a:gd name="adj" fmla="val 10435"/>
             </a:avLst>
           </a:prstGeom>
           <a:solidFill>
@@ -15779,8 +16057,8 @@
         </p:nvSpPr>
         <p:spPr>
           <a:xfrm>
-            <a:off x="4517136" y="1892808"/>
-            <a:ext cx="3163824" cy="438912"/>
+            <a:off x="768096" y="3081528"/>
+            <a:ext cx="6821424" cy="438912"/>
           </a:xfrm>
           <a:prstGeom prst="rect">
             <a:avLst/>
@@ -15818,8 +16096,8 @@
         </p:nvSpPr>
         <p:spPr>
           <a:xfrm>
-            <a:off x="4517136" y="2423160"/>
-            <a:ext cx="3163824" cy="1307592"/>
+            <a:off x="768096" y="3611880"/>
+            <a:ext cx="6821424" cy="210312"/>
           </a:xfrm>
           <a:prstGeom prst="rect">
             <a:avLst/>
@@ -15860,12 +16138,12 @@
         </p:nvSpPr>
         <p:spPr>
           <a:xfrm>
-            <a:off x="8065008" y="1737360"/>
-            <a:ext cx="3566160" cy="2148840"/>
+            <a:off x="566928" y="4114800"/>
+            <a:ext cx="7223760" cy="1051560"/>
           </a:xfrm>
           <a:prstGeom prst="roundRect">
             <a:avLst>
-              <a:gd name="adj" fmla="val 5106"/>
+              <a:gd name="adj" fmla="val 10435"/>
             </a:avLst>
           </a:prstGeom>
           <a:solidFill>
@@ -15882,8 +16160,8 @@
         </p:nvSpPr>
         <p:spPr>
           <a:xfrm>
-            <a:off x="8266176" y="1892808"/>
-            <a:ext cx="3163824" cy="438912"/>
+            <a:off x="768096" y="4270248"/>
+            <a:ext cx="6821424" cy="438912"/>
           </a:xfrm>
           <a:prstGeom prst="rect">
             <a:avLst/>
@@ -15921,8 +16199,8 @@
         </p:nvSpPr>
         <p:spPr>
           <a:xfrm>
-            <a:off x="8266176" y="2423160"/>
-            <a:ext cx="3163824" cy="1307592"/>
+            <a:off x="768096" y="4800600"/>
+            <a:ext cx="6821424" cy="210312"/>
           </a:xfrm>
           <a:prstGeom prst="rect">
             <a:avLst/>
@@ -15963,16 +16241,16 @@
         </p:nvSpPr>
         <p:spPr>
           <a:xfrm>
-            <a:off x="566928" y="4297680"/>
-            <a:ext cx="11064240" cy="1600200"/>
+            <a:off x="8156448" y="1737360"/>
+            <a:ext cx="3474720" cy="3429000"/>
           </a:xfrm>
           <a:prstGeom prst="roundRect">
             <a:avLst>
-              <a:gd name="adj" fmla="val 6857"/>
+              <a:gd name="adj" fmla="val 2133"/>
             </a:avLst>
           </a:prstGeom>
           <a:solidFill>
-            <a:srgbClr val="FFFFFF"/>
+            <a:srgbClr val="0A0810"/>
           </a:solidFill>
           <a:ln w="12700">
             <a:solidFill>
@@ -15984,14 +16262,520 @@
       </p:sp>
       <p:sp>
         <p:nvSpPr>
-          <p:cNvPr id="17" name="Text 14"/>
-          <p:cNvSpPr/>
-          <p:nvPr/>
-        </p:nvSpPr>
-        <p:spPr>
-          <a:xfrm>
-            <a:off x="786384" y="4443984"/>
-            <a:ext cx="10625328" cy="1307592"/>
+          <p:cNvPr id="17" name="Shape 14"/>
+          <p:cNvSpPr/>
+          <p:nvPr/>
+        </p:nvSpPr>
+        <p:spPr>
+          <a:xfrm>
+            <a:off x="8284464" y="1856232"/>
+            <a:ext cx="73152" cy="73152"/>
+          </a:xfrm>
+          <a:prstGeom prst="ellipse">
+            <a:avLst/>
+          </a:prstGeom>
+          <a:solidFill>
+            <a:srgbClr val="FF6B6B"/>
+          </a:solidFill>
+          <a:ln/>
+        </p:spPr>
+      </p:sp>
+      <p:sp>
+        <p:nvSpPr>
+          <p:cNvPr id="18" name="Shape 15"/>
+          <p:cNvSpPr/>
+          <p:nvPr/>
+        </p:nvSpPr>
+        <p:spPr>
+          <a:xfrm>
+            <a:off x="8430768" y="1856232"/>
+            <a:ext cx="73152" cy="73152"/>
+          </a:xfrm>
+          <a:prstGeom prst="ellipse">
+            <a:avLst/>
+          </a:prstGeom>
+          <a:solidFill>
+            <a:srgbClr val="6BA0F8"/>
+          </a:solidFill>
+          <a:ln/>
+        </p:spPr>
+      </p:sp>
+      <p:sp>
+        <p:nvSpPr>
+          <p:cNvPr id="19" name="Shape 16"/>
+          <p:cNvSpPr/>
+          <p:nvPr/>
+        </p:nvSpPr>
+        <p:spPr>
+          <a:xfrm>
+            <a:off x="8577072" y="1856232"/>
+            <a:ext cx="73152" cy="73152"/>
+          </a:xfrm>
+          <a:prstGeom prst="ellipse">
+            <a:avLst/>
+          </a:prstGeom>
+          <a:solidFill>
+            <a:srgbClr val="3FCF8E"/>
+          </a:solidFill>
+          <a:ln/>
+        </p:spPr>
+      </p:sp>
+      <p:sp>
+        <p:nvSpPr>
+          <p:cNvPr id="20" name="Text 17"/>
+          <p:cNvSpPr/>
+          <p:nvPr/>
+        </p:nvSpPr>
+        <p:spPr>
+          <a:xfrm>
+            <a:off x="8759952" y="1737360"/>
+            <a:ext cx="2761488" cy="310896"/>
+          </a:xfrm>
+          <a:prstGeom prst="rect">
+            <a:avLst/>
+          </a:prstGeom>
+          <a:noFill/>
+          <a:ln/>
+        </p:spPr>
+        <p:txBody>
+          <a:bodyPr wrap="square" lIns="0" tIns="0" rIns="0" bIns="0" rtlCol="0" anchor="ctr"/>
+          <a:lstStyle/>
+          <a:p>
+            <a:pPr indent="0" marL="0">
+              <a:buNone/>
+            </a:pPr>
+            <a:r>
+              <a:rPr lang="en-US" sz="800" dirty="0">
+                <a:solidFill>
+                  <a:srgbClr val="9A94AA"/>
+                </a:solidFill>
+                <a:latin typeface="Courier New" pitchFamily="34" charset="0"/>
+                <a:ea typeface="Courier New" pitchFamily="34" charset="-122"/>
+                <a:cs typeface="Courier New" pitchFamily="34" charset="-120"/>
+              </a:rPr>
+              <a:t>два прогони · один датасет</a:t>
+            </a:r>
+            <a:endParaRPr lang="en-US" sz="800" dirty="0"/>
+          </a:p>
+        </p:txBody>
+      </p:sp>
+      <p:sp>
+        <p:nvSpPr>
+          <p:cNvPr id="21" name="Shape 18"/>
+          <p:cNvSpPr/>
+          <p:nvPr/>
+        </p:nvSpPr>
+        <p:spPr>
+          <a:xfrm>
+            <a:off x="8156448" y="2048256"/>
+            <a:ext cx="3474720" cy="0"/>
+          </a:xfrm>
+          <a:prstGeom prst="line">
+            <a:avLst/>
+          </a:prstGeom>
+          <a:noFill/>
+          <a:ln w="9525">
+            <a:solidFill>
+              <a:srgbClr val="2A2438"/>
+            </a:solidFill>
+            <a:prstDash val="solid"/>
+          </a:ln>
+        </p:spPr>
+      </p:sp>
+      <p:sp>
+        <p:nvSpPr>
+          <p:cNvPr id="22" name="Text 19"/>
+          <p:cNvSpPr/>
+          <p:nvPr/>
+        </p:nvSpPr>
+        <p:spPr>
+          <a:xfrm>
+            <a:off x="8321040" y="2157984"/>
+            <a:ext cx="3145536" cy="221513"/>
+          </a:xfrm>
+          <a:prstGeom prst="rect">
+            <a:avLst/>
+          </a:prstGeom>
+          <a:noFill/>
+          <a:ln/>
+        </p:spPr>
+        <p:txBody>
+          <a:bodyPr wrap="square" lIns="0" tIns="0" rIns="0" bIns="0" rtlCol="0" anchor="ctr"/>
+          <a:lstStyle/>
+          <a:p>
+            <a:pPr indent="0" marL="0">
+              <a:buNone/>
+            </a:pPr>
+            <a:r>
+              <a:rPr lang="en-US" sz="950" dirty="0">
+                <a:solidFill>
+                  <a:srgbClr val="9A94AA"/>
+                </a:solidFill>
+                <a:latin typeface="Courier New" pitchFamily="34" charset="0"/>
+                <a:ea typeface="Courier New" pitchFamily="34" charset="-122"/>
+                <a:cs typeface="Courier New" pitchFamily="34" charset="-120"/>
+              </a:rPr>
+              <a:t>activate v2 → run.py</a:t>
+            </a:r>
+            <a:endParaRPr lang="en-US" sz="950" dirty="0"/>
+          </a:p>
+        </p:txBody>
+      </p:sp>
+      <p:sp>
+        <p:nvSpPr>
+          <p:cNvPr id="23" name="Text 20"/>
+          <p:cNvSpPr/>
+          <p:nvPr/>
+        </p:nvSpPr>
+        <p:spPr>
+          <a:xfrm>
+            <a:off x="8321040" y="2379497"/>
+            <a:ext cx="3145536" cy="221513"/>
+          </a:xfrm>
+          <a:prstGeom prst="rect">
+            <a:avLst/>
+          </a:prstGeom>
+          <a:noFill/>
+          <a:ln/>
+        </p:spPr>
+        <p:txBody>
+          <a:bodyPr wrap="square" lIns="0" tIns="0" rIns="0" bIns="0" rtlCol="0" anchor="ctr"/>
+          <a:lstStyle/>
+          <a:p>
+            <a:pPr indent="0" marL="0">
+              <a:buNone/>
+            </a:pPr>
+            <a:r>
+              <a:rPr lang="en-US" sz="950" b="1" dirty="0">
+                <a:solidFill>
+                  <a:srgbClr val="3FCF8E"/>
+                </a:solidFill>
+                <a:latin typeface="Courier New" pitchFamily="34" charset="0"/>
+                <a:ea typeface="Courier New" pitchFamily="34" charset="-122"/>
+                <a:cs typeface="Courier New" pitchFamily="34" charset="-120"/>
+              </a:rPr>
+              <a:t> 6/6 · exit 0</a:t>
+            </a:r>
+            <a:endParaRPr lang="en-US" sz="950" dirty="0"/>
+          </a:p>
+        </p:txBody>
+      </p:sp>
+      <p:sp>
+        <p:nvSpPr>
+          <p:cNvPr id="24" name="Text 21"/>
+          <p:cNvSpPr/>
+          <p:nvPr/>
+        </p:nvSpPr>
+        <p:spPr>
+          <a:xfrm>
+            <a:off x="8321040" y="2601011"/>
+            <a:ext cx="3145536" cy="221513"/>
+          </a:xfrm>
+          <a:prstGeom prst="rect">
+            <a:avLst/>
+          </a:prstGeom>
+          <a:noFill/>
+          <a:ln/>
+        </p:spPr>
+        <p:txBody>
+          <a:bodyPr wrap="square" lIns="0" tIns="0" rIns="0" bIns="0" rtlCol="0" anchor="ctr"/>
+          <a:lstStyle/>
+          <a:p>
+            <a:pPr indent="0" marL="0">
+              <a:buNone/>
+            </a:pPr>
+            <a:endParaRPr lang="en-US" sz="950" dirty="0"/>
+          </a:p>
+        </p:txBody>
+      </p:sp>
+      <p:sp>
+        <p:nvSpPr>
+          <p:cNvPr id="25" name="Text 22"/>
+          <p:cNvSpPr/>
+          <p:nvPr/>
+        </p:nvSpPr>
+        <p:spPr>
+          <a:xfrm>
+            <a:off x="8321040" y="2822524"/>
+            <a:ext cx="3145536" cy="221513"/>
+          </a:xfrm>
+          <a:prstGeom prst="rect">
+            <a:avLst/>
+          </a:prstGeom>
+          <a:noFill/>
+          <a:ln/>
+        </p:spPr>
+        <p:txBody>
+          <a:bodyPr wrap="square" lIns="0" tIns="0" rIns="0" bIns="0" rtlCol="0" anchor="ctr"/>
+          <a:lstStyle/>
+          <a:p>
+            <a:pPr indent="0" marL="0">
+              <a:buNone/>
+            </a:pPr>
+            <a:r>
+              <a:rPr lang="en-US" sz="950" dirty="0">
+                <a:solidFill>
+                  <a:srgbClr val="9A94AA"/>
+                </a:solidFill>
+                <a:latin typeface="Courier New" pitchFamily="34" charset="0"/>
+                <a:ea typeface="Courier New" pitchFamily="34" charset="-122"/>
+                <a:cs typeface="Courier New" pitchFamily="34" charset="-120"/>
+              </a:rPr>
+              <a:t>activate v1 → run.py</a:t>
+            </a:r>
+            <a:endParaRPr lang="en-US" sz="950" dirty="0"/>
+          </a:p>
+        </p:txBody>
+      </p:sp>
+      <p:sp>
+        <p:nvSpPr>
+          <p:cNvPr id="26" name="Text 23"/>
+          <p:cNvSpPr/>
+          <p:nvPr/>
+        </p:nvSpPr>
+        <p:spPr>
+          <a:xfrm>
+            <a:off x="8321040" y="3044038"/>
+            <a:ext cx="3145536" cy="221513"/>
+          </a:xfrm>
+          <a:prstGeom prst="rect">
+            <a:avLst/>
+          </a:prstGeom>
+          <a:noFill/>
+          <a:ln/>
+        </p:spPr>
+        <p:txBody>
+          <a:bodyPr wrap="square" lIns="0" tIns="0" rIns="0" bIns="0" rtlCol="0" anchor="ctr"/>
+          <a:lstStyle/>
+          <a:p>
+            <a:pPr indent="0" marL="0">
+              <a:buNone/>
+            </a:pPr>
+            <a:r>
+              <a:rPr lang="en-US" sz="950" b="1" dirty="0">
+                <a:solidFill>
+                  <a:srgbClr val="FF6B6B"/>
+                </a:solidFill>
+                <a:latin typeface="Courier New" pitchFamily="34" charset="0"/>
+                <a:ea typeface="Courier New" pitchFamily="34" charset="-122"/>
+                <a:cs typeface="Courier New" pitchFamily="34" charset="-120"/>
+              </a:rPr>
+              <a:t> 3/6 · exit 1</a:t>
+            </a:r>
+            <a:endParaRPr lang="en-US" sz="950" dirty="0"/>
+          </a:p>
+        </p:txBody>
+      </p:sp>
+      <p:sp>
+        <p:nvSpPr>
+          <p:cNvPr id="27" name="Text 24"/>
+          <p:cNvSpPr/>
+          <p:nvPr/>
+        </p:nvSpPr>
+        <p:spPr>
+          <a:xfrm>
+            <a:off x="8321040" y="3265551"/>
+            <a:ext cx="3145536" cy="221513"/>
+          </a:xfrm>
+          <a:prstGeom prst="rect">
+            <a:avLst/>
+          </a:prstGeom>
+          <a:noFill/>
+          <a:ln/>
+        </p:spPr>
+        <p:txBody>
+          <a:bodyPr wrap="square" lIns="0" tIns="0" rIns="0" bIns="0" rtlCol="0" anchor="ctr"/>
+          <a:lstStyle/>
+          <a:p>
+            <a:pPr indent="0" marL="0">
+              <a:buNone/>
+            </a:pPr>
+            <a:endParaRPr lang="en-US" sz="950" dirty="0"/>
+          </a:p>
+        </p:txBody>
+      </p:sp>
+      <p:sp>
+        <p:nvSpPr>
+          <p:cNvPr id="28" name="Text 25"/>
+          <p:cNvSpPr/>
+          <p:nvPr/>
+        </p:nvSpPr>
+        <p:spPr>
+          <a:xfrm>
+            <a:off x="8321040" y="3487064"/>
+            <a:ext cx="3145536" cy="221513"/>
+          </a:xfrm>
+          <a:prstGeom prst="rect">
+            <a:avLst/>
+          </a:prstGeom>
+          <a:noFill/>
+          <a:ln/>
+        </p:spPr>
+        <p:txBody>
+          <a:bodyPr wrap="square" lIns="0" tIns="0" rIns="0" bIns="0" rtlCol="0" anchor="ctr"/>
+          <a:lstStyle/>
+          <a:p>
+            <a:pPr indent="0" marL="0">
+              <a:buNone/>
+            </a:pPr>
+            <a:r>
+              <a:rPr lang="en-US" sz="950" dirty="0">
+                <a:solidFill>
+                  <a:srgbClr val="9A94AA"/>
+                </a:solidFill>
+                <a:latin typeface="Courier New" pitchFamily="34" charset="0"/>
+                <a:ea typeface="Courier New" pitchFamily="34" charset="-122"/>
+                <a:cs typeface="Courier New" pitchFamily="34" charset="-120"/>
+              </a:rPr>
+              <a:t>поріг 5 з 6:</a:t>
+            </a:r>
+            <a:endParaRPr lang="en-US" sz="950" dirty="0"/>
+          </a:p>
+        </p:txBody>
+      </p:sp>
+      <p:sp>
+        <p:nvSpPr>
+          <p:cNvPr id="29" name="Text 26"/>
+          <p:cNvSpPr/>
+          <p:nvPr/>
+        </p:nvSpPr>
+        <p:spPr>
+          <a:xfrm>
+            <a:off x="8321040" y="3708578"/>
+            <a:ext cx="3145536" cy="221513"/>
+          </a:xfrm>
+          <a:prstGeom prst="rect">
+            <a:avLst/>
+          </a:prstGeom>
+          <a:noFill/>
+          <a:ln/>
+        </p:spPr>
+        <p:txBody>
+          <a:bodyPr wrap="square" lIns="0" tIns="0" rIns="0" bIns="0" rtlCol="0" anchor="ctr"/>
+          <a:lstStyle/>
+          <a:p>
+            <a:pPr indent="0" marL="0">
+              <a:buNone/>
+            </a:pPr>
+            <a:r>
+              <a:rPr lang="en-US" sz="950" dirty="0">
+                <a:solidFill>
+                  <a:srgbClr val="A98BFF"/>
+                </a:solidFill>
+                <a:latin typeface="Courier New" pitchFamily="34" charset="0"/>
+                <a:ea typeface="Courier New" pitchFamily="34" charset="-122"/>
+                <a:cs typeface="Courier New" pitchFamily="34" charset="-120"/>
+              </a:rPr>
+              <a:t> одному кейсу можна впасти</a:t>
+            </a:r>
+            <a:endParaRPr lang="en-US" sz="950" dirty="0"/>
+          </a:p>
+        </p:txBody>
+      </p:sp>
+      <p:sp>
+        <p:nvSpPr>
+          <p:cNvPr id="30" name="Text 27"/>
+          <p:cNvSpPr/>
+          <p:nvPr/>
+        </p:nvSpPr>
+        <p:spPr>
+          <a:xfrm>
+            <a:off x="8321040" y="3930091"/>
+            <a:ext cx="3145536" cy="221513"/>
+          </a:xfrm>
+          <a:prstGeom prst="rect">
+            <a:avLst/>
+          </a:prstGeom>
+          <a:noFill/>
+          <a:ln/>
+        </p:spPr>
+        <p:txBody>
+          <a:bodyPr wrap="square" lIns="0" tIns="0" rIns="0" bIns="0" rtlCol="0" anchor="ctr"/>
+          <a:lstStyle/>
+          <a:p>
+            <a:pPr indent="0" marL="0">
+              <a:buNone/>
+            </a:pPr>
+            <a:endParaRPr lang="en-US" sz="950" dirty="0"/>
+          </a:p>
+        </p:txBody>
+      </p:sp>
+      <p:sp>
+        <p:nvSpPr>
+          <p:cNvPr id="31" name="Text 28"/>
+          <p:cNvSpPr/>
+          <p:nvPr/>
+        </p:nvSpPr>
+        <p:spPr>
+          <a:xfrm>
+            <a:off x="8321040" y="4151605"/>
+            <a:ext cx="3145536" cy="221513"/>
+          </a:xfrm>
+          <a:prstGeom prst="rect">
+            <a:avLst/>
+          </a:prstGeom>
+          <a:noFill/>
+          <a:ln/>
+        </p:spPr>
+        <p:txBody>
+          <a:bodyPr wrap="square" lIns="0" tIns="0" rIns="0" bIns="0" rtlCol="0" anchor="ctr"/>
+          <a:lstStyle/>
+          <a:p>
+            <a:pPr indent="0" marL="0">
+              <a:buNone/>
+            </a:pPr>
+            <a:r>
+              <a:rPr lang="en-US" sz="950" dirty="0">
+                <a:solidFill>
+                  <a:srgbClr val="6BA0F8"/>
+                </a:solidFill>
+                <a:latin typeface="Courier New" pitchFamily="34" charset="0"/>
+                <a:ea typeface="Courier New" pitchFamily="34" charset="-122"/>
+                <a:cs typeface="Courier New" pitchFamily="34" charset="-120"/>
+              </a:rPr>
+              <a:t>exit code → гейт у CI (Тема 11)</a:t>
+            </a:r>
+            <a:endParaRPr lang="en-US" sz="950" dirty="0"/>
+          </a:p>
+        </p:txBody>
+      </p:sp>
+      <p:sp>
+        <p:nvSpPr>
+          <p:cNvPr id="32" name="Shape 29"/>
+          <p:cNvSpPr/>
+          <p:nvPr/>
+        </p:nvSpPr>
+        <p:spPr>
+          <a:xfrm>
+            <a:off x="566928" y="5349240"/>
+            <a:ext cx="11064240" cy="731520"/>
+          </a:xfrm>
+          <a:prstGeom prst="roundRect">
+            <a:avLst>
+              <a:gd name="adj" fmla="val 15000"/>
+            </a:avLst>
+          </a:prstGeom>
+          <a:solidFill>
+            <a:srgbClr val="FFFFFF"/>
+          </a:solidFill>
+          <a:ln w="12700">
+            <a:solidFill>
+              <a:srgbClr val="D9D9D9"/>
+            </a:solidFill>
+            <a:prstDash val="solid"/>
+          </a:ln>
+        </p:spPr>
+      </p:sp>
+      <p:sp>
+        <p:nvSpPr>
+          <p:cNvPr id="33" name="Text 30"/>
+          <p:cNvSpPr/>
+          <p:nvPr/>
+        </p:nvSpPr>
+        <p:spPr>
+          <a:xfrm>
+            <a:off x="786384" y="5495544"/>
+            <a:ext cx="10625328" cy="438912"/>
           </a:xfrm>
           <a:prstGeom prst="rect">
             <a:avLst/>

--- a/docs/decks/L10.pptx
+++ b/docs/decks/L10.pptx
@@ -6303,11 +6303,11 @@
         <p:spPr>
           <a:xfrm>
             <a:off x="566928" y="1737360"/>
-            <a:ext cx="11064240" cy="2286000"/>
+            <a:ext cx="11064240" cy="2514600"/>
           </a:xfrm>
           <a:prstGeom prst="roundRect">
             <a:avLst>
-              <a:gd name="adj" fmla="val 4800"/>
+              <a:gd name="adj" fmla="val 4364"/>
             </a:avLst>
           </a:prstGeom>
           <a:solidFill>
@@ -6330,7 +6330,7 @@
         <p:spPr>
           <a:xfrm>
             <a:off x="786384" y="1883664"/>
-            <a:ext cx="10625328" cy="1993392"/>
+            <a:ext cx="10625328" cy="2221992"/>
           </a:xfrm>
           <a:prstGeom prst="rect">
             <a:avLst/>
@@ -6501,6 +6501,26 @@
             </a:r>
             <a:endParaRPr lang="en-US" sz="1150" dirty="0"/>
           </a:p>
+          <a:p>
+            <a:pPr indent="0" marL="0">
+              <a:lnSpc>
+                <a:spcPct val="130000"/>
+              </a:lnSpc>
+              <a:buNone/>
+            </a:pPr>
+            <a:r>
+              <a:rPr lang="en-US" sz="1150" dirty="0">
+                <a:solidFill>
+                  <a:srgbClr val="A98BFF"/>
+                </a:solidFill>
+                <a:latin typeface="Courier New" pitchFamily="34" charset="0"/>
+                <a:ea typeface="Courier New" pitchFamily="34" charset="-122"/>
+                <a:cs typeface="Courier New" pitchFamily="34" charset="-120"/>
+              </a:rPr>
+              <a:t>    return True</a:t>
+            </a:r>
+            <a:endParaRPr lang="en-US" sz="1150" dirty="0"/>
+          </a:p>
         </p:txBody>
       </p:sp>
       <p:sp>
@@ -6511,7 +6531,7 @@
         </p:nvSpPr>
         <p:spPr>
           <a:xfrm>
-            <a:off x="566928" y="4251960"/>
+            <a:off x="566928" y="4434840"/>
             <a:ext cx="3520440" cy="1325880"/>
           </a:xfrm>
           <a:prstGeom prst="roundRect">
@@ -6533,7 +6553,7 @@
         </p:nvSpPr>
         <p:spPr>
           <a:xfrm>
-            <a:off x="768096" y="4434840"/>
+            <a:off x="768096" y="4617720"/>
             <a:ext cx="384048" cy="384048"/>
           </a:xfrm>
           <a:prstGeom prst="ellipse">
@@ -6553,7 +6573,7 @@
         </p:nvSpPr>
         <p:spPr>
           <a:xfrm>
-            <a:off x="768096" y="4434840"/>
+            <a:off x="768096" y="4617720"/>
             <a:ext cx="384048" cy="384048"/>
           </a:xfrm>
           <a:prstGeom prst="rect">
@@ -6592,7 +6612,7 @@
         </p:nvSpPr>
         <p:spPr>
           <a:xfrm>
-            <a:off x="1280160" y="4407408"/>
+            <a:off x="1280160" y="4590288"/>
             <a:ext cx="2606040" cy="438912"/>
           </a:xfrm>
           <a:prstGeom prst="rect">
@@ -6631,7 +6651,7 @@
         </p:nvSpPr>
         <p:spPr>
           <a:xfrm>
-            <a:off x="768096" y="4937760"/>
+            <a:off x="768096" y="5120640"/>
             <a:ext cx="3118104" cy="484632"/>
           </a:xfrm>
           <a:prstGeom prst="rect">
@@ -6673,7 +6693,7 @@
         </p:nvSpPr>
         <p:spPr>
           <a:xfrm>
-            <a:off x="4270248" y="4251960"/>
+            <a:off x="4270248" y="4434840"/>
             <a:ext cx="3520440" cy="1325880"/>
           </a:xfrm>
           <a:prstGeom prst="roundRect">
@@ -6695,7 +6715,7 @@
         </p:nvSpPr>
         <p:spPr>
           <a:xfrm>
-            <a:off x="4471416" y="4434840"/>
+            <a:off x="4471416" y="4617720"/>
             <a:ext cx="384048" cy="384048"/>
           </a:xfrm>
           <a:prstGeom prst="ellipse">
@@ -6715,7 +6735,7 @@
         </p:nvSpPr>
         <p:spPr>
           <a:xfrm>
-            <a:off x="4471416" y="4434840"/>
+            <a:off x="4471416" y="4617720"/>
             <a:ext cx="384048" cy="384048"/>
           </a:xfrm>
           <a:prstGeom prst="rect">
@@ -6754,7 +6774,7 @@
         </p:nvSpPr>
         <p:spPr>
           <a:xfrm>
-            <a:off x="4983480" y="4407408"/>
+            <a:off x="4983480" y="4590288"/>
             <a:ext cx="2606040" cy="438912"/>
           </a:xfrm>
           <a:prstGeom prst="rect">
@@ -6793,7 +6813,7 @@
         </p:nvSpPr>
         <p:spPr>
           <a:xfrm>
-            <a:off x="4471416" y="4937760"/>
+            <a:off x="4471416" y="5120640"/>
             <a:ext cx="3118104" cy="484632"/>
           </a:xfrm>
           <a:prstGeom prst="rect">
@@ -6835,7 +6855,7 @@
         </p:nvSpPr>
         <p:spPr>
           <a:xfrm>
-            <a:off x="7973568" y="4251960"/>
+            <a:off x="7973568" y="4434840"/>
             <a:ext cx="3520440" cy="1325880"/>
           </a:xfrm>
           <a:prstGeom prst="roundRect">
@@ -6857,7 +6877,7 @@
         </p:nvSpPr>
         <p:spPr>
           <a:xfrm>
-            <a:off x="8174736" y="4434840"/>
+            <a:off x="8174736" y="4617720"/>
             <a:ext cx="384048" cy="384048"/>
           </a:xfrm>
           <a:prstGeom prst="ellipse">
@@ -6877,7 +6897,7 @@
         </p:nvSpPr>
         <p:spPr>
           <a:xfrm>
-            <a:off x="8174736" y="4434840"/>
+            <a:off x="8174736" y="4617720"/>
             <a:ext cx="384048" cy="384048"/>
           </a:xfrm>
           <a:prstGeom prst="rect">
@@ -6916,7 +6936,7 @@
         </p:nvSpPr>
         <p:spPr>
           <a:xfrm>
-            <a:off x="8686800" y="4407408"/>
+            <a:off x="8686800" y="4590288"/>
             <a:ext cx="2606040" cy="438912"/>
           </a:xfrm>
           <a:prstGeom prst="rect">
@@ -6955,7 +6975,7 @@
         </p:nvSpPr>
         <p:spPr>
           <a:xfrm>
-            <a:off x="8174736" y="4937760"/>
+            <a:off x="8174736" y="5120640"/>
             <a:ext cx="3118104" cy="484632"/>
           </a:xfrm>
           <a:prstGeom prst="rect">
@@ -12993,7 +13013,7 @@
                 <a:ea typeface="Montserrat" pitchFamily="34" charset="-122"/>
                 <a:cs typeface="Montserrat" pitchFamily="34" charset="-120"/>
               </a:rPr>
-              <a:t>echo $?  </a:t>
+              <a:t>прогін із __fail_503  </a:t>
             </a:r>
             <a:pPr indent="0" marL="0">
               <a:buNone/>
@@ -13007,7 +13027,7 @@
                 <a:ea typeface="Montserrat" pitchFamily="34" charset="-122"/>
                 <a:cs typeface="Montserrat" pitchFamily="34" charset="-120"/>
               </a:rPr>
-              <a:t>код виходу окремо, без pipe</a:t>
+              <a:t>нуль пройдених — жоден кейс не зеленіє випадково</a:t>
             </a:r>
             <a:endParaRPr lang="en-US" sz="1300" dirty="0"/>
           </a:p>
@@ -15426,7 +15446,7 @@
                 <a:ea typeface="Montserrat" pitchFamily="34" charset="-122"/>
                 <a:cs typeface="Montserrat" pitchFamily="34" charset="-120"/>
               </a:rPr>
-              <a:t>Власні кейси  </a:t>
+              <a:t>Власні кейси + __fail_503  </a:t>
             </a:r>
             <a:pPr indent="0" marL="0">
               <a:buNone/>
@@ -15440,7 +15460,7 @@
                 <a:ea typeface="Montserrat" pitchFamily="34" charset="-122"/>
                 <a:cs typeface="Montserrat" pitchFamily="34" charset="-120"/>
               </a:rPr>
-              <a:t>додати два: позитивний і негативний; перерахувати поріг</a:t>
+              <a:t>додати два кейси, перерахувати поріг; прогін із __fail_503 → 0 пройдених</a:t>
             </a:r>
             <a:endParaRPr lang="en-US" sz="1400" dirty="0"/>
           </a:p>
@@ -15742,7 +15762,7 @@
                 <a:ea typeface="Montserrat" pitchFamily="34" charset="-122"/>
                 <a:cs typeface="Montserrat" pitchFamily="34" charset="-120"/>
               </a:rPr>
-              <a:t>що це довело · перевір себе · антипатерни тижня</a:t>
+              <a:t>що це довело · перевірте себе · антипатерни тижня</a:t>
             </a:r>
             <a:endParaRPr lang="en-US" sz="1500" dirty="0"/>
           </a:p>
@@ -16936,7 +16956,7 @@
                 <a:ea typeface="Unbounded" pitchFamily="34" charset="-122"/>
                 <a:cs typeface="Unbounded" pitchFamily="34" charset="-120"/>
               </a:rPr>
-              <a:t>Перевір себе</a:t>
+              <a:t>Перевірте себе</a:t>
             </a:r>
             <a:endParaRPr lang="en-US" sz="2400" dirty="0"/>
           </a:p>
